--- a/GULib-master/report/0417_5003report/ppt/out-test/final_15min_defense.pptx
+++ b/GULib-master/report/0417_5003report/ppt/out-test/final_15min_defense.pptx
@@ -4,9 +4,6 @@
   <p:sldMasterIdLst>
     <p:sldMasterId id="2147483648" r:id="rId1"/>
   </p:sldMasterIdLst>
-  <p:notesMasterIdLst>
-    <p:notesMasterId r:id="rId16"/>
-  </p:notesMasterIdLst>
   <p:sldIdLst>
     <p:sldId id="256" r:id="rId2"/>
     <p:sldId id="257" r:id="rId3"/>
@@ -23,7 +20,10 @@
     <p:sldId id="268" r:id="rId14"/>
     <p:sldId id="269" r:id="rId15"/>
   </p:sldIdLst>
-  <p:sldSz cx="9144000" cy="5143500" type="screen16x9"/>
+  <p:notesMasterIdLst>
+    <p:notesMasterId r:id="rId16"/>
+  </p:notesMasterIdLst>
+  <p:sldSz cx="9144000" cy="5143500"/>
   <p:notesSz cx="5143500" cy="9144000"/>
   <p:defaultTextStyle>
     <a:lvl1pPr marL="0" algn="l" defTabSz="914400" rtl="0" eaLnBrk="1" latinLnBrk="0" hangingPunct="1">
@@ -117,11 +117,6 @@
       </a:defRPr>
     </a:lvl9pPr>
   </p:defaultTextStyle>
-  <p:extLst>
-    <p:ext uri="{EFAFB233-063F-42B5-8137-9DF3F51BA10A}">
-      <p15:sldGuideLst xmlns:p15="http://schemas.microsoft.com/office/powerpoint/2012/main"/>
-    </p:ext>
-  </p:extLst>
 </p:presentation>
 </file>
 
@@ -147,10 +142,234 @@
           <a:chExt cx="0" cy="0"/>
         </a:xfrm>
       </p:grpSpPr>
+      <p:sp>
+        <p:nvSpPr>
+          <p:cNvPr id="2" name="Header Placeholder 1"/>
+          <p:cNvSpPr>
+            <a:spLocks noGrp="1"/>
+          </p:cNvSpPr>
+          <p:nvPr>
+            <p:ph type="hdr" sz="quarter"/>
+          </p:nvPr>
+        </p:nvSpPr>
+        <p:spPr>
+          <a:xfrm>
+            <a:off x="0" y="0"/>
+            <a:ext cx="2971800" cy="458788"/>
+          </a:xfrm>
+          <a:prstGeom prst="rect">
+            <a:avLst/>
+          </a:prstGeom>
+        </p:spPr>
+        <p:txBody>
+          <a:bodyPr vert="horz" lIns="91440" tIns="45720" rIns="91440" bIns="45720" rtlCol="0"/>
+          <a:lstStyle>
+            <a:lvl1pPr algn="l">
+              <a:defRPr sz="1200"/>
+            </a:lvl1pPr>
+          </a:lstStyle>
+          <a:p>
+            <a:endParaRPr lang="en-US"/>
+          </a:p>
+        </p:txBody>
+      </p:sp>
+      <p:sp>
+        <p:nvSpPr>
+          <p:cNvPr id="3" name="Date Placeholder 2"/>
+          <p:cNvSpPr>
+            <a:spLocks noGrp="1"/>
+          </p:cNvSpPr>
+          <p:nvPr>
+            <p:ph type="dt" idx="1"/>
+          </p:nvPr>
+        </p:nvSpPr>
+        <p:spPr>
+          <a:xfrm>
+            <a:off x="3884613" y="0"/>
+            <a:ext cx="2971800" cy="458788"/>
+          </a:xfrm>
+          <a:prstGeom prst="rect">
+            <a:avLst/>
+          </a:prstGeom>
+        </p:spPr>
+        <p:txBody>
+          <a:bodyPr vert="horz" lIns="91440" tIns="45720" rIns="91440" bIns="45720" rtlCol="0"/>
+          <a:lstStyle>
+            <a:lvl1pPr algn="r">
+              <a:defRPr sz="1200"/>
+            </a:lvl1pPr>
+          </a:lstStyle>
+          <a:p>
+            <a:fld id="{5282F153-3F37-0F45-9E97-73ACFA13230C}" type="datetimeFigureOut">
+              <a:rPr lang="en-US"/>
+              <a:t>7/23/19</a:t>
+            </a:fld>
+            <a:endParaRPr lang="en-US"/>
+          </a:p>
+        </p:txBody>
+      </p:sp>
+      <p:sp>
+        <p:nvSpPr>
+          <p:cNvPr id="4" name="Slide Image Placeholder 3"/>
+          <p:cNvSpPr>
+            <a:spLocks noGrp="1" noRot="1" noChangeAspect="1"/>
+          </p:cNvSpPr>
+          <p:nvPr>
+            <p:ph type="sldImg" idx="2"/>
+          </p:nvPr>
+        </p:nvSpPr>
+        <p:spPr>
+          <a:xfrm>
+            <a:off x="685800" y="1143000"/>
+            <a:ext cx="5486400" cy="3086100"/>
+          </a:xfrm>
+          <a:prstGeom prst="rect">
+            <a:avLst/>
+          </a:prstGeom>
+          <a:noFill/>
+          <a:ln w="12700">
+            <a:solidFill>
+              <a:prstClr val="black"/>
+            </a:solidFill>
+          </a:ln>
+        </p:spPr>
+        <p:txBody>
+          <a:bodyPr vert="horz" lIns="91440" tIns="45720" rIns="91440" bIns="45720" rtlCol="0" anchor="ctr"/>
+          <a:lstStyle/>
+          <a:p>
+            <a:endParaRPr lang="en-US"/>
+          </a:p>
+        </p:txBody>
+      </p:sp>
+      <p:sp>
+        <p:nvSpPr>
+          <p:cNvPr id="5" name="Notes Placeholder 4"/>
+          <p:cNvSpPr>
+            <a:spLocks noGrp="1"/>
+          </p:cNvSpPr>
+          <p:nvPr>
+            <p:ph type="body" sz="quarter" idx="3"/>
+          </p:nvPr>
+        </p:nvSpPr>
+        <p:spPr>
+          <a:xfrm>
+            <a:off x="685800" y="4400550"/>
+            <a:ext cx="5486400" cy="3600450"/>
+          </a:xfrm>
+          <a:prstGeom prst="rect">
+            <a:avLst/>
+          </a:prstGeom>
+        </p:spPr>
+        <p:txBody>
+          <a:bodyPr vert="horz" lIns="91440" tIns="45720" rIns="91440" bIns="45720" rtlCol="0"/>
+          <a:lstStyle/>
+          <a:p>
+            <a:pPr lvl="0"/>
+            <a:r>
+              <a:rPr lang="en-US"/>
+              <a:t>Click to edit Master text styles</a:t>
+            </a:r>
+          </a:p>
+          <a:p>
+            <a:pPr lvl="1"/>
+            <a:r>
+              <a:rPr lang="en-US"/>
+              <a:t>Second level</a:t>
+            </a:r>
+          </a:p>
+          <a:p>
+            <a:pPr lvl="2"/>
+            <a:r>
+              <a:rPr lang="en-US"/>
+              <a:t>Third level</a:t>
+            </a:r>
+          </a:p>
+          <a:p>
+            <a:pPr lvl="3"/>
+            <a:r>
+              <a:rPr lang="en-US"/>
+              <a:t>Fourth level</a:t>
+            </a:r>
+          </a:p>
+          <a:p>
+            <a:pPr lvl="4"/>
+            <a:r>
+              <a:rPr lang="en-US"/>
+              <a:t>Fifth level</a:t>
+            </a:r>
+          </a:p>
+        </p:txBody>
+      </p:sp>
+      <p:sp>
+        <p:nvSpPr>
+          <p:cNvPr id="6" name="Footer Placeholder 5"/>
+          <p:cNvSpPr>
+            <a:spLocks noGrp="1"/>
+          </p:cNvSpPr>
+          <p:nvPr>
+            <p:ph type="ftr" sz="quarter" idx="4"/>
+          </p:nvPr>
+        </p:nvSpPr>
+        <p:spPr>
+          <a:xfrm>
+            <a:off x="0" y="8685213"/>
+            <a:ext cx="2971800" cy="458787"/>
+          </a:xfrm>
+          <a:prstGeom prst="rect">
+            <a:avLst/>
+          </a:prstGeom>
+        </p:spPr>
+        <p:txBody>
+          <a:bodyPr vert="horz" lIns="91440" tIns="45720" rIns="91440" bIns="45720" rtlCol="0" anchor="b"/>
+          <a:lstStyle>
+            <a:lvl1pPr algn="l">
+              <a:defRPr sz="1200"/>
+            </a:lvl1pPr>
+          </a:lstStyle>
+          <a:p>
+            <a:endParaRPr lang="en-US"/>
+          </a:p>
+        </p:txBody>
+      </p:sp>
+      <p:sp>
+        <p:nvSpPr>
+          <p:cNvPr id="7" name="Slide Number Placeholder 6"/>
+          <p:cNvSpPr>
+            <a:spLocks noGrp="1"/>
+          </p:cNvSpPr>
+          <p:nvPr>
+            <p:ph type="sldNum" sz="quarter" idx="5"/>
+          </p:nvPr>
+        </p:nvSpPr>
+        <p:spPr>
+          <a:xfrm>
+            <a:off x="3884613" y="8685213"/>
+            <a:ext cx="2971800" cy="458787"/>
+          </a:xfrm>
+          <a:prstGeom prst="rect">
+            <a:avLst/>
+          </a:prstGeom>
+        </p:spPr>
+        <p:txBody>
+          <a:bodyPr vert="horz" lIns="91440" tIns="45720" rIns="91440" bIns="45720" rtlCol="0" anchor="b"/>
+          <a:lstStyle>
+            <a:lvl1pPr algn="r">
+              <a:defRPr sz="1200"/>
+            </a:lvl1pPr>
+          </a:lstStyle>
+          <a:p>
+            <a:fld id="{CE5E9CC1-C706-0F49-92D6-E571CC5EEA8F}" type="slidenum">
+              <a:rPr lang="en-US"/>
+              <a:t>‹#›</a:t>
+            </a:fld>
+            <a:endParaRPr lang="en-US"/>
+          </a:p>
+        </p:txBody>
+      </p:sp>
     </p:spTree>
     <p:extLst>
       <p:ext uri="{BB962C8B-B14F-4D97-AF65-F5344CB8AC3E}">
-        <p14:creationId xmlns:p14="http://schemas.microsoft.com/office/powerpoint/2010/main" val="3853904346"/>
+        <p14:creationId xmlns:p14="http://schemas.microsoft.com/office/powerpoint/2010/main" val="1024086991"/>
       </p:ext>
     </p:extLst>
   </p:cSld>
@@ -294,6 +513,10 @@
           <a:bodyPr/>
           <a:lstStyle/>
           <a:p>
+            <a:r>
+              <a:rPr lang="en-US" dirty="0"/>
+              <a:t/>
+            </a:r>
             <a:endParaRPr lang="en-US" dirty="0"/>
           </a:p>
         </p:txBody>
@@ -378,6 +601,10 @@
           <a:bodyPr/>
           <a:lstStyle/>
           <a:p>
+            <a:r>
+              <a:rPr lang="en-US" dirty="0"/>
+              <a:t/>
+            </a:r>
             <a:endParaRPr lang="en-US" dirty="0"/>
           </a:p>
         </p:txBody>
@@ -462,6 +689,10 @@
           <a:bodyPr/>
           <a:lstStyle/>
           <a:p>
+            <a:r>
+              <a:rPr lang="en-US" dirty="0"/>
+              <a:t/>
+            </a:r>
             <a:endParaRPr lang="en-US" dirty="0"/>
           </a:p>
         </p:txBody>
@@ -546,6 +777,10 @@
           <a:bodyPr/>
           <a:lstStyle/>
           <a:p>
+            <a:r>
+              <a:rPr lang="en-US" dirty="0"/>
+              <a:t/>
+            </a:r>
             <a:endParaRPr lang="en-US" dirty="0"/>
           </a:p>
         </p:txBody>
@@ -630,6 +865,10 @@
           <a:bodyPr/>
           <a:lstStyle/>
           <a:p>
+            <a:r>
+              <a:rPr lang="en-US" dirty="0"/>
+              <a:t/>
+            </a:r>
             <a:endParaRPr lang="en-US" dirty="0"/>
           </a:p>
         </p:txBody>
@@ -714,6 +953,10 @@
           <a:bodyPr/>
           <a:lstStyle/>
           <a:p>
+            <a:r>
+              <a:rPr lang="en-US" dirty="0"/>
+              <a:t/>
+            </a:r>
             <a:endParaRPr lang="en-US" dirty="0"/>
           </a:p>
         </p:txBody>
@@ -798,6 +1041,10 @@
           <a:bodyPr/>
           <a:lstStyle/>
           <a:p>
+            <a:r>
+              <a:rPr lang="en-US" dirty="0"/>
+              <a:t/>
+            </a:r>
             <a:endParaRPr lang="en-US" dirty="0"/>
           </a:p>
         </p:txBody>
@@ -882,6 +1129,10 @@
           <a:bodyPr/>
           <a:lstStyle/>
           <a:p>
+            <a:r>
+              <a:rPr lang="en-US" dirty="0"/>
+              <a:t/>
+            </a:r>
             <a:endParaRPr lang="en-US" dirty="0"/>
           </a:p>
         </p:txBody>
@@ -966,6 +1217,10 @@
           <a:bodyPr/>
           <a:lstStyle/>
           <a:p>
+            <a:r>
+              <a:rPr lang="en-US" dirty="0"/>
+              <a:t/>
+            </a:r>
             <a:endParaRPr lang="en-US" dirty="0"/>
           </a:p>
         </p:txBody>
@@ -1050,6 +1305,10 @@
           <a:bodyPr/>
           <a:lstStyle/>
           <a:p>
+            <a:r>
+              <a:rPr lang="en-US" dirty="0"/>
+              <a:t/>
+            </a:r>
             <a:endParaRPr lang="en-US" dirty="0"/>
           </a:p>
         </p:txBody>
@@ -1134,6 +1393,10 @@
           <a:bodyPr/>
           <a:lstStyle/>
           <a:p>
+            <a:r>
+              <a:rPr lang="en-US" dirty="0"/>
+              <a:t/>
+            </a:r>
             <a:endParaRPr lang="en-US" dirty="0"/>
           </a:p>
         </p:txBody>
@@ -1218,6 +1481,10 @@
           <a:bodyPr/>
           <a:lstStyle/>
           <a:p>
+            <a:r>
+              <a:rPr lang="en-US" dirty="0"/>
+              <a:t/>
+            </a:r>
             <a:endParaRPr lang="en-US" dirty="0"/>
           </a:p>
         </p:txBody>
@@ -1302,6 +1569,10 @@
           <a:bodyPr/>
           <a:lstStyle/>
           <a:p>
+            <a:r>
+              <a:rPr lang="en-US" dirty="0"/>
+              <a:t/>
+            </a:r>
             <a:endParaRPr lang="en-US" dirty="0"/>
           </a:p>
         </p:txBody>
@@ -1386,6 +1657,10 @@
           <a:bodyPr/>
           <a:lstStyle/>
           <a:p>
+            <a:r>
+              <a:rPr lang="en-US" dirty="0"/>
+              <a:t/>
+            </a:r>
             <a:endParaRPr lang="en-US" dirty="0"/>
           </a:p>
         </p:txBody>
@@ -1459,11 +1734,6 @@
 <file path=ppt/slideMasters/slideMaster1.xml><?xml version="1.0" encoding="utf-8"?>
 <p:sldMaster xmlns:a="http://schemas.openxmlformats.org/drawingml/2006/main" xmlns:r="http://schemas.openxmlformats.org/officeDocument/2006/relationships" xmlns:p="http://schemas.openxmlformats.org/presentationml/2006/main">
   <p:cSld>
-    <p:bg>
-      <p:bgRef idx="1001">
-        <a:schemeClr val="bg1"/>
-      </p:bgRef>
-    </p:bg>
     <p:spTree>
       <p:nvGrpSpPr>
         <p:cNvPr id="1" name=""/>
@@ -1746,7 +2016,6 @@
         <a:solidFill>
           <a:srgbClr val="16263F"/>
         </a:solidFill>
-        <a:effectLst/>
       </p:bgPr>
     </p:bg>
     <p:spTree>
@@ -1791,13 +2060,6 @@
             <a:prstDash val="solid"/>
           </a:ln>
         </p:spPr>
-        <p:txBody>
-          <a:bodyPr/>
-          <a:lstStyle/>
-          <a:p>
-            <a:endParaRPr lang="zh-CN" altLang="en-US"/>
-          </a:p>
-        </p:txBody>
       </p:sp>
       <p:sp>
         <p:nvSpPr>
@@ -1822,7 +2084,7 @@
           </a:bodyPr>
           <a:lstStyle/>
           <a:p>
-            <a:pPr marL="0" indent="0">
+            <a:pPr indent="0" marL="0">
               <a:buNone/>
             </a:pPr>
             <a:r>
@@ -1830,16 +2092,16 @@
                 <a:solidFill>
                   <a:srgbClr val="FFFFFF"/>
                 </a:solidFill>
-                <a:latin typeface="Georgia" pitchFamily="34" charset="0"/>
-                <a:ea typeface="Georgia" pitchFamily="34" charset="-122"/>
-                <a:cs typeface="Georgia" pitchFamily="34" charset="-120"/>
+                <a:latin typeface="Times New Roman" pitchFamily="34" charset="0"/>
+                <a:ea typeface="Times New Roman" pitchFamily="34" charset="-122"/>
+                <a:cs typeface="Times New Roman" pitchFamily="34" charset="-120"/>
               </a:rPr>
               <a:t>Adversarial Deletion Attacks on</a:t>
             </a:r>
             <a:endParaRPr lang="en-US" sz="2400" dirty="0"/>
           </a:p>
           <a:p>
-            <a:pPr marL="0" indent="0">
+            <a:pPr indent="0" marL="0">
               <a:buNone/>
             </a:pPr>
             <a:r>
@@ -1847,9 +2109,9 @@
                 <a:solidFill>
                   <a:srgbClr val="FFFFFF"/>
                 </a:solidFill>
-                <a:latin typeface="Georgia" pitchFamily="34" charset="0"/>
-                <a:ea typeface="Georgia" pitchFamily="34" charset="-122"/>
-                <a:cs typeface="Georgia" pitchFamily="34" charset="-120"/>
+                <a:latin typeface="Times New Roman" pitchFamily="34" charset="0"/>
+                <a:ea typeface="Times New Roman" pitchFamily="34" charset="-122"/>
+                <a:cs typeface="Times New Roman" pitchFamily="34" charset="-120"/>
               </a:rPr>
               <a:t>Approximate Graph Unlearning</a:t>
             </a:r>
@@ -1878,7 +2140,7 @@
           <a:bodyPr wrap="square" lIns="0" tIns="0" rIns="0" bIns="0" rtlCol="0" anchor="ctr"/>
           <a:lstStyle/>
           <a:p>
-            <a:pPr marL="0" indent="0">
+            <a:pPr indent="0" marL="0">
               <a:buNone/>
             </a:pPr>
             <a:r>
@@ -1886,9 +2148,9 @@
                 <a:solidFill>
                   <a:srgbClr val="F7F5F1"/>
                 </a:solidFill>
-                <a:latin typeface="Calibri" pitchFamily="34" charset="0"/>
-                <a:ea typeface="Calibri" pitchFamily="34" charset="-122"/>
-                <a:cs typeface="Calibri" pitchFamily="34" charset="-120"/>
+                <a:latin typeface="Times New Roman" pitchFamily="34" charset="0"/>
+                <a:ea typeface="Times New Roman" pitchFamily="34" charset="-122"/>
+                <a:cs typeface="Times New Roman" pitchFamily="34" charset="-120"/>
               </a:rPr>
               <a:t>The inheritance of safety behavior within graph unlearning families</a:t>
             </a:r>
@@ -1917,7 +2179,7 @@
           <a:bodyPr wrap="square" lIns="0" tIns="0" rIns="0" bIns="0" rtlCol="0" anchor="ctr"/>
           <a:lstStyle/>
           <a:p>
-            <a:pPr marL="0" indent="0">
+            <a:pPr indent="0" marL="0">
               <a:buNone/>
             </a:pPr>
             <a:r>
@@ -1925,16 +2187,16 @@
                 <a:solidFill>
                   <a:srgbClr val="F7F5F1"/>
                 </a:solidFill>
-                <a:latin typeface="Calibri" pitchFamily="34" charset="0"/>
-                <a:ea typeface="Calibri" pitchFamily="34" charset="-122"/>
-                <a:cs typeface="Calibri" pitchFamily="34" charset="-120"/>
+                <a:latin typeface="Times New Roman" pitchFamily="34" charset="0"/>
+                <a:ea typeface="Times New Roman" pitchFamily="34" charset="-122"/>
+                <a:cs typeface="Times New Roman" pitchFamily="34" charset="-120"/>
               </a:rPr>
               <a:t>EE5003 MSc Project Report</a:t>
             </a:r>
             <a:endParaRPr lang="en-US" sz="1500" dirty="0"/>
           </a:p>
           <a:p>
-            <a:pPr marL="0" indent="0">
+            <a:pPr indent="0" marL="0">
               <a:buNone/>
             </a:pPr>
             <a:r>
@@ -1942,9 +2204,9 @@
                 <a:solidFill>
                   <a:srgbClr val="F7F5F1"/>
                 </a:solidFill>
-                <a:latin typeface="Calibri" pitchFamily="34" charset="0"/>
-                <a:ea typeface="Calibri" pitchFamily="34" charset="-122"/>
-                <a:cs typeface="Calibri" pitchFamily="34" charset="-120"/>
+                <a:latin typeface="Times New Roman" pitchFamily="34" charset="0"/>
+                <a:ea typeface="Times New Roman" pitchFamily="34" charset="-122"/>
+                <a:cs typeface="Times New Roman" pitchFamily="34" charset="-120"/>
               </a:rPr>
               <a:t>National University of Singapore</a:t>
             </a:r>
@@ -1973,7 +2235,7 @@
           <a:bodyPr wrap="square" lIns="0" tIns="0" rIns="0" bIns="0" rtlCol="0" anchor="ctr"/>
           <a:lstStyle/>
           <a:p>
-            <a:pPr marL="0" indent="0">
+            <a:pPr indent="0" marL="0">
               <a:buNone/>
             </a:pPr>
             <a:r>
@@ -1981,16 +2243,16 @@
                 <a:solidFill>
                   <a:srgbClr val="FFFFFF"/>
                 </a:solidFill>
-                <a:latin typeface="Calibri" pitchFamily="34" charset="0"/>
-                <a:ea typeface="Calibri" pitchFamily="34" charset="-122"/>
-                <a:cs typeface="Calibri" pitchFamily="34" charset="-120"/>
+                <a:latin typeface="Times New Roman" pitchFamily="34" charset="0"/>
+                <a:ea typeface="Times New Roman" pitchFamily="34" charset="-122"/>
+                <a:cs typeface="Times New Roman" pitchFamily="34" charset="-120"/>
               </a:rPr>
               <a:t>Liu Chengyu</a:t>
             </a:r>
             <a:endParaRPr lang="en-US" sz="1400" dirty="0"/>
           </a:p>
           <a:p>
-            <a:pPr marL="0" indent="0">
+            <a:pPr indent="0" marL="0">
               <a:buNone/>
             </a:pPr>
             <a:r>
@@ -1998,9 +2260,9 @@
                 <a:solidFill>
                   <a:srgbClr val="FFFFFF"/>
                 </a:solidFill>
-                <a:latin typeface="Calibri" pitchFamily="34" charset="0"/>
-                <a:ea typeface="Calibri" pitchFamily="34" charset="-122"/>
-                <a:cs typeface="Calibri" pitchFamily="34" charset="-120"/>
+                <a:latin typeface="Times New Roman" pitchFamily="34" charset="0"/>
+                <a:ea typeface="Times New Roman" pitchFamily="34" charset="-122"/>
+                <a:cs typeface="Times New Roman" pitchFamily="34" charset="-120"/>
               </a:rPr>
               <a:t>April 2026</a:t>
             </a:r>
@@ -2016,7 +2278,7 @@
         </p:nvSpPr>
         <p:spPr>
           <a:xfrm>
-            <a:off x="6373368" y="973836"/>
+            <a:off x="6355080" y="1005840"/>
             <a:ext cx="2057400" cy="1828800"/>
           </a:xfrm>
           <a:prstGeom prst="roundRect">
@@ -2034,13 +2296,6 @@
             <a:prstDash val="solid"/>
           </a:ln>
         </p:spPr>
-        <p:txBody>
-          <a:bodyPr/>
-          <a:lstStyle/>
-          <a:p>
-            <a:endParaRPr lang="zh-CN" altLang="en-US"/>
-          </a:p>
-        </p:txBody>
       </p:sp>
       <p:sp>
         <p:nvSpPr>
@@ -2063,7 +2318,7 @@
           <a:bodyPr wrap="square" lIns="0" tIns="0" rIns="0" bIns="0" rtlCol="0" anchor="ctr"/>
           <a:lstStyle/>
           <a:p>
-            <a:pPr marL="0" indent="0">
+            <a:pPr indent="0" marL="0">
               <a:buNone/>
             </a:pPr>
             <a:r>
@@ -2071,9 +2326,9 @@
                 <a:solidFill>
                   <a:srgbClr val="16263F"/>
                 </a:solidFill>
-                <a:latin typeface="Georgia" pitchFamily="34" charset="0"/>
-                <a:ea typeface="Georgia" pitchFamily="34" charset="-122"/>
-                <a:cs typeface="Georgia" pitchFamily="34" charset="-120"/>
+                <a:latin typeface="Times New Roman" pitchFamily="34" charset="0"/>
+                <a:ea typeface="Times New Roman" pitchFamily="34" charset="-122"/>
+                <a:cs typeface="Times New Roman" pitchFamily="34" charset="-120"/>
               </a:rPr>
               <a:t>Thesis</a:t>
             </a:r>
@@ -2104,7 +2359,7 @@
           </a:bodyPr>
           <a:lstStyle/>
           <a:p>
-            <a:pPr marL="0" indent="0">
+            <a:pPr indent="0" marL="0">
               <a:buNone/>
             </a:pPr>
             <a:r>
@@ -2112,9 +2367,9 @@
                 <a:solidFill>
                   <a:srgbClr val="1E2630"/>
                 </a:solidFill>
-                <a:latin typeface="Calibri" pitchFamily="34" charset="0"/>
-                <a:ea typeface="Calibri" pitchFamily="34" charset="-122"/>
-                <a:cs typeface="Calibri" pitchFamily="34" charset="-120"/>
+                <a:latin typeface="Times New Roman" pitchFamily="34" charset="0"/>
+                <a:ea typeface="Times New Roman" pitchFamily="34" charset="-122"/>
+                <a:cs typeface="Times New Roman" pitchFamily="34" charset="-120"/>
               </a:rPr>
               <a:t>Deletion interfaces in approximate graph unlearning can be exploited to amplify approximation error, and fragility differs sharply across method families.</a:t>
             </a:r>
@@ -2143,7 +2398,7 @@
           <a:bodyPr wrap="square" lIns="0" tIns="0" rIns="0" bIns="0" rtlCol="0" anchor="ctr"/>
           <a:lstStyle/>
           <a:p>
-            <a:pPr marL="0" indent="0" algn="ctr">
+            <a:pPr algn="ctr" indent="0" marL="0">
               <a:buNone/>
             </a:pPr>
             <a:r>
@@ -2151,9 +2406,9 @@
                 <a:solidFill>
                   <a:srgbClr val="223A5E"/>
                 </a:solidFill>
-                <a:latin typeface="Calibri" pitchFamily="34" charset="0"/>
-                <a:ea typeface="Calibri" pitchFamily="34" charset="-122"/>
-                <a:cs typeface="Calibri" pitchFamily="34" charset="-120"/>
+                <a:latin typeface="Times New Roman" pitchFamily="34" charset="0"/>
+                <a:ea typeface="Times New Roman" pitchFamily="34" charset="-122"/>
+                <a:cs typeface="Times New Roman" pitchFamily="34" charset="-120"/>
               </a:rPr>
               <a:t>Problem -&gt; Method -&gt; Results -&gt; Takeaway</a:t>
             </a:r>
@@ -2177,7 +2432,6 @@
         <a:solidFill>
           <a:srgbClr val="F7F5F1"/>
         </a:solidFill>
-        <a:effectLst/>
       </p:bgPr>
     </p:bg>
     <p:spTree>
@@ -2220,13 +2474,6 @@
             <a:prstDash val="solid"/>
           </a:ln>
         </p:spPr>
-        <p:txBody>
-          <a:bodyPr/>
-          <a:lstStyle/>
-          <a:p>
-            <a:endParaRPr lang="zh-CN" altLang="en-US"/>
-          </a:p>
-        </p:txBody>
       </p:sp>
       <p:sp>
         <p:nvSpPr>
@@ -2249,7 +2496,7 @@
           <a:bodyPr wrap="square" lIns="0" tIns="0" rIns="0" bIns="0" rtlCol="0" anchor="ctr"/>
           <a:lstStyle/>
           <a:p>
-            <a:pPr marL="0" indent="0">
+            <a:pPr indent="0" marL="0">
               <a:buNone/>
             </a:pPr>
             <a:r>
@@ -2257,9 +2504,9 @@
                 <a:solidFill>
                   <a:srgbClr val="FFFFFF"/>
                 </a:solidFill>
-                <a:latin typeface="Georgia" pitchFamily="34" charset="0"/>
-                <a:ea typeface="Georgia" pitchFamily="34" charset="-122"/>
-                <a:cs typeface="Georgia" pitchFamily="34" charset="-120"/>
+                <a:latin typeface="Times New Roman" pitchFamily="34" charset="0"/>
+                <a:ea typeface="Times New Roman" pitchFamily="34" charset="-122"/>
+                <a:cs typeface="Times New Roman" pitchFamily="34" charset="-120"/>
               </a:rPr>
               <a:t>Why GraphEraser Behaves Differently</a:t>
             </a:r>
@@ -2288,7 +2535,7 @@
           <a:bodyPr wrap="square" lIns="0" tIns="0" rIns="0" bIns="0" rtlCol="0" anchor="ctr"/>
           <a:lstStyle/>
           <a:p>
-            <a:pPr marL="0" indent="0" algn="r">
+            <a:pPr algn="r" indent="0" marL="0">
               <a:buNone/>
             </a:pPr>
             <a:r>
@@ -2296,9 +2543,9 @@
                 <a:solidFill>
                   <a:srgbClr val="F7F5F1"/>
                 </a:solidFill>
-                <a:latin typeface="Calibri" pitchFamily="34" charset="0"/>
-                <a:ea typeface="Calibri" pitchFamily="34" charset="-122"/>
-                <a:cs typeface="Calibri" pitchFamily="34" charset="-120"/>
+                <a:latin typeface="Times New Roman" pitchFamily="34" charset="0"/>
+                <a:ea typeface="Times New Roman" pitchFamily="34" charset="-122"/>
+                <a:cs typeface="Times New Roman" pitchFamily="34" charset="-120"/>
               </a:rPr>
               <a:t>10 / 14</a:t>
             </a:r>
@@ -2327,7 +2574,7 @@
           <a:bodyPr wrap="square" lIns="0" tIns="0" rIns="0" bIns="0" rtlCol="0" anchor="ctr"/>
           <a:lstStyle/>
           <a:p>
-            <a:pPr marL="0" indent="0">
+            <a:pPr indent="0" marL="0">
               <a:buNone/>
             </a:pPr>
             <a:r>
@@ -2335,9 +2582,9 @@
                 <a:solidFill>
                   <a:srgbClr val="667085"/>
                 </a:solidFill>
-                <a:latin typeface="Calibri" pitchFamily="34" charset="0"/>
-                <a:ea typeface="Calibri" pitchFamily="34" charset="-122"/>
-                <a:cs typeface="Calibri" pitchFamily="34" charset="-120"/>
+                <a:latin typeface="Times New Roman" pitchFamily="34" charset="0"/>
+                <a:ea typeface="Times New Roman" pitchFamily="34" charset="-122"/>
+                <a:cs typeface="Times New Roman" pitchFamily="34" charset="-120"/>
               </a:rPr>
               <a:t>EE5003 MSc Project | Liu Chengyu</a:t>
             </a:r>
@@ -2366,7 +2613,7 @@
           <a:bodyPr wrap="square" lIns="0" tIns="0" rIns="0" bIns="0" rtlCol="0" anchor="ctr"/>
           <a:lstStyle/>
           <a:p>
-            <a:pPr marL="0" indent="0" algn="r">
+            <a:pPr algn="r" indent="0" marL="0">
               <a:buNone/>
             </a:pPr>
             <a:r>
@@ -2374,9 +2621,9 @@
                 <a:solidFill>
                   <a:srgbClr val="667085"/>
                 </a:solidFill>
-                <a:latin typeface="Calibri" pitchFamily="34" charset="0"/>
-                <a:ea typeface="Calibri" pitchFamily="34" charset="-122"/>
-                <a:cs typeface="Calibri" pitchFamily="34" charset="-120"/>
+                <a:latin typeface="Times New Roman" pitchFamily="34" charset="0"/>
+                <a:ea typeface="Times New Roman" pitchFamily="34" charset="-122"/>
+                <a:cs typeface="Times New Roman" pitchFamily="34" charset="-120"/>
               </a:rPr>
               <a:t>Approximate Graph Unlearning Audit</a:t>
             </a:r>
@@ -2386,14 +2633,14 @@
       </p:sp>
       <p:pic>
         <p:nvPicPr>
-          <p:cNvPr id="7" name="Image 0" descr="H:\project\OpenGU\GULib-master\report\0417_5003report\figures\report_figures\fig2_grapheraser_shard.png"/>
+          <p:cNvPr id="7" name="Image 0" descr="H:\project\OpenGU\GULib-master\report\0417_5003report\figures\report_figures\fig2_grapheraser_shard.png">    </p:cNvPr>
           <p:cNvPicPr>
             <a:picLocks noChangeAspect="1"/>
           </p:cNvPicPr>
           <p:nvPr/>
         </p:nvPicPr>
         <p:blipFill>
-          <a:blip r:embed="rId3"/>
+          <a:blip r:embed="rId1"/>
           <a:stretch>
             <a:fillRect/>
           </a:stretch>
@@ -2429,7 +2676,7 @@
           <a:bodyPr wrap="square" lIns="0" tIns="0" rIns="0" bIns="0" rtlCol="0" anchor="ctr"/>
           <a:lstStyle/>
           <a:p>
-            <a:pPr marL="0" indent="0">
+            <a:pPr indent="0" marL="0">
               <a:buNone/>
             </a:pPr>
             <a:r>
@@ -2437,9 +2684,9 @@
                 <a:solidFill>
                   <a:srgbClr val="667085"/>
                 </a:solidFill>
-                <a:latin typeface="Calibri" pitchFamily="34" charset="0"/>
-                <a:ea typeface="Calibri" pitchFamily="34" charset="-122"/>
-                <a:cs typeface="Calibri" pitchFamily="34" charset="-120"/>
+                <a:latin typeface="Times New Roman" pitchFamily="34" charset="0"/>
+                <a:ea typeface="Times New Roman" pitchFamily="34" charset="-122"/>
+                <a:cs typeface="Times New Roman" pitchFamily="34" charset="-120"/>
               </a:rPr>
               <a:t>Observed shard-level score shift for GraphEraser on Cora/GCN.</a:t>
             </a:r>
@@ -2473,13 +2720,6 @@
             <a:prstDash val="solid"/>
           </a:ln>
         </p:spPr>
-        <p:txBody>
-          <a:bodyPr/>
-          <a:lstStyle/>
-          <a:p>
-            <a:endParaRPr lang="zh-CN" altLang="en-US"/>
-          </a:p>
-        </p:txBody>
       </p:sp>
       <p:sp>
         <p:nvSpPr>
@@ -2502,7 +2742,7 @@
           <a:bodyPr wrap="square" lIns="0" tIns="0" rIns="0" bIns="0" rtlCol="0" anchor="ctr"/>
           <a:lstStyle/>
           <a:p>
-            <a:pPr marL="0" indent="0">
+            <a:pPr indent="0" marL="0">
               <a:buNone/>
             </a:pPr>
             <a:r>
@@ -2510,9 +2750,9 @@
                 <a:solidFill>
                   <a:srgbClr val="223A5E"/>
                 </a:solidFill>
-                <a:latin typeface="Georgia" pitchFamily="34" charset="0"/>
-                <a:ea typeface="Georgia" pitchFamily="34" charset="-122"/>
-                <a:cs typeface="Georgia" pitchFamily="34" charset="-120"/>
+                <a:latin typeface="Times New Roman" pitchFamily="34" charset="0"/>
+                <a:ea typeface="Times New Roman" pitchFamily="34" charset="-122"/>
+                <a:cs typeface="Times New Roman" pitchFamily="34" charset="-120"/>
               </a:rPr>
               <a:t>Observed pattern</a:t>
             </a:r>
@@ -2543,7 +2783,7 @@
           </a:bodyPr>
           <a:lstStyle/>
           <a:p>
-            <a:pPr marL="0" indent="0">
+            <a:pPr indent="0" marL="0">
               <a:buNone/>
             </a:pPr>
             <a:r>
@@ -2551,9 +2791,9 @@
                 <a:solidFill>
                   <a:srgbClr val="1E2630"/>
                 </a:solidFill>
-                <a:latin typeface="Calibri" pitchFamily="34" charset="0"/>
-                <a:ea typeface="Calibri" pitchFamily="34" charset="-122"/>
-                <a:cs typeface="Calibri" pitchFamily="34" charset="-120"/>
+                <a:latin typeface="Times New Roman" pitchFamily="34" charset="0"/>
+                <a:ea typeface="Times New Roman" pitchFamily="34" charset="-122"/>
+                <a:cs typeface="Times New Roman" pitchFamily="34" charset="-120"/>
               </a:rPr>
               <a:t>After-unlearning scores shift upward across the tested attack strategies, matching the non-collapse pattern seen in the main results.</a:t>
             </a:r>
@@ -2587,13 +2827,6 @@
             <a:prstDash val="solid"/>
           </a:ln>
         </p:spPr>
-        <p:txBody>
-          <a:bodyPr/>
-          <a:lstStyle/>
-          <a:p>
-            <a:endParaRPr lang="zh-CN" altLang="en-US"/>
-          </a:p>
-        </p:txBody>
       </p:sp>
       <p:sp>
         <p:nvSpPr>
@@ -2616,7 +2849,7 @@
           <a:bodyPr wrap="square" lIns="0" tIns="0" rIns="0" bIns="0" rtlCol="0" anchor="ctr"/>
           <a:lstStyle/>
           <a:p>
-            <a:pPr marL="0" indent="0">
+            <a:pPr indent="0" marL="0">
               <a:buNone/>
             </a:pPr>
             <a:r>
@@ -2624,9 +2857,9 @@
                 <a:solidFill>
                   <a:srgbClr val="223A5E"/>
                 </a:solidFill>
-                <a:latin typeface="Georgia" pitchFamily="34" charset="0"/>
-                <a:ea typeface="Georgia" pitchFamily="34" charset="-122"/>
-                <a:cs typeface="Georgia" pitchFamily="34" charset="-120"/>
+                <a:latin typeface="Times New Roman" pitchFamily="34" charset="0"/>
+                <a:ea typeface="Times New Roman" pitchFamily="34" charset="-122"/>
+                <a:cs typeface="Times New Roman" pitchFamily="34" charset="-120"/>
               </a:rPr>
               <a:t>Interpretation</a:t>
             </a:r>
@@ -2657,7 +2890,7 @@
           </a:bodyPr>
           <a:lstStyle/>
           <a:p>
-            <a:pPr marL="0" indent="0">
+            <a:pPr indent="0" marL="0">
               <a:buNone/>
             </a:pPr>
             <a:r>
@@ -2665,9 +2898,9 @@
                 <a:solidFill>
                   <a:srgbClr val="1E2630"/>
                 </a:solidFill>
-                <a:latin typeface="Calibri" pitchFamily="34" charset="0"/>
-                <a:ea typeface="Calibri" pitchFamily="34" charset="-122"/>
-                <a:cs typeface="Calibri" pitchFamily="34" charset="-120"/>
+                <a:latin typeface="Times New Roman" pitchFamily="34" charset="0"/>
+                <a:ea typeface="Times New Roman" pitchFamily="34" charset="-122"/>
+                <a:cs typeface="Times New Roman" pitchFamily="34" charset="-120"/>
               </a:rPr>
               <a:t>A plausible reading is that deleting bridge or hub nodes can simplify shard-local classification and reduce cross-shard interference.</a:t>
             </a:r>
@@ -2701,13 +2934,6 @@
             <a:prstDash val="solid"/>
           </a:ln>
         </p:spPr>
-        <p:txBody>
-          <a:bodyPr/>
-          <a:lstStyle/>
-          <a:p>
-            <a:endParaRPr lang="zh-CN" altLang="en-US"/>
-          </a:p>
-        </p:txBody>
       </p:sp>
       <p:sp>
         <p:nvSpPr>
@@ -2730,7 +2956,7 @@
           <a:bodyPr wrap="square" lIns="0" tIns="0" rIns="0" bIns="0" rtlCol="0" anchor="ctr"/>
           <a:lstStyle/>
           <a:p>
-            <a:pPr marL="0" indent="0">
+            <a:pPr indent="0" marL="0">
               <a:buNone/>
             </a:pPr>
             <a:r>
@@ -2738,9 +2964,9 @@
                 <a:solidFill>
                   <a:srgbClr val="FFFFFF"/>
                 </a:solidFill>
-                <a:latin typeface="Georgia" pitchFamily="34" charset="0"/>
-                <a:ea typeface="Georgia" pitchFamily="34" charset="-122"/>
-                <a:cs typeface="Georgia" pitchFamily="34" charset="-120"/>
+                <a:latin typeface="Times New Roman" pitchFamily="34" charset="0"/>
+                <a:ea typeface="Times New Roman" pitchFamily="34" charset="-122"/>
+                <a:cs typeface="Times New Roman" pitchFamily="34" charset="-120"/>
               </a:rPr>
               <a:t>Caution</a:t>
             </a:r>
@@ -2771,7 +2997,7 @@
           </a:bodyPr>
           <a:lstStyle/>
           <a:p>
-            <a:pPr marL="0" indent="0">
+            <a:pPr indent="0" marL="0">
               <a:buNone/>
             </a:pPr>
             <a:r>
@@ -2779,9 +3005,9 @@
                 <a:solidFill>
                   <a:srgbClr val="FFFFFF"/>
                 </a:solidFill>
-                <a:latin typeface="Calibri" pitchFamily="34" charset="0"/>
-                <a:ea typeface="Calibri" pitchFamily="34" charset="-122"/>
-                <a:cs typeface="Calibri" pitchFamily="34" charset="-120"/>
+                <a:latin typeface="Times New Roman" pitchFamily="34" charset="0"/>
+                <a:ea typeface="Times New Roman" pitchFamily="34" charset="-122"/>
+                <a:cs typeface="Times New Roman" pitchFamily="34" charset="-120"/>
               </a:rPr>
               <a:t>This is setting-specific evidence, not a claim of universal robustness.</a:t>
             </a:r>
@@ -2805,7 +3031,6 @@
         <a:solidFill>
           <a:srgbClr val="FFFFFF"/>
         </a:solidFill>
-        <a:effectLst/>
       </p:bgPr>
     </p:bg>
     <p:spTree>
@@ -2848,13 +3073,6 @@
             <a:prstDash val="solid"/>
           </a:ln>
         </p:spPr>
-        <p:txBody>
-          <a:bodyPr/>
-          <a:lstStyle/>
-          <a:p>
-            <a:endParaRPr lang="zh-CN" altLang="en-US"/>
-          </a:p>
-        </p:txBody>
       </p:sp>
       <p:sp>
         <p:nvSpPr>
@@ -2877,7 +3095,7 @@
           <a:bodyPr wrap="square" lIns="0" tIns="0" rIns="0" bIns="0" rtlCol="0" anchor="ctr"/>
           <a:lstStyle/>
           <a:p>
-            <a:pPr marL="0" indent="0">
+            <a:pPr indent="0" marL="0">
               <a:buNone/>
             </a:pPr>
             <a:r>
@@ -2885,9 +3103,9 @@
                 <a:solidFill>
                   <a:srgbClr val="FFFFFF"/>
                 </a:solidFill>
-                <a:latin typeface="Georgia" pitchFamily="34" charset="0"/>
-                <a:ea typeface="Georgia" pitchFamily="34" charset="-122"/>
-                <a:cs typeface="Georgia" pitchFamily="34" charset="-120"/>
+                <a:latin typeface="Times New Roman" pitchFamily="34" charset="0"/>
+                <a:ea typeface="Times New Roman" pitchFamily="34" charset="-122"/>
+                <a:cs typeface="Times New Roman" pitchFamily="34" charset="-120"/>
               </a:rPr>
               <a:t>Attack Strength And Practicality</a:t>
             </a:r>
@@ -2916,7 +3134,7 @@
           <a:bodyPr wrap="square" lIns="0" tIns="0" rIns="0" bIns="0" rtlCol="0" anchor="ctr"/>
           <a:lstStyle/>
           <a:p>
-            <a:pPr marL="0" indent="0" algn="r">
+            <a:pPr algn="r" indent="0" marL="0">
               <a:buNone/>
             </a:pPr>
             <a:r>
@@ -2924,9 +3142,9 @@
                 <a:solidFill>
                   <a:srgbClr val="F7F5F1"/>
                 </a:solidFill>
-                <a:latin typeface="Calibri" pitchFamily="34" charset="0"/>
-                <a:ea typeface="Calibri" pitchFamily="34" charset="-122"/>
-                <a:cs typeface="Calibri" pitchFamily="34" charset="-120"/>
+                <a:latin typeface="Times New Roman" pitchFamily="34" charset="0"/>
+                <a:ea typeface="Times New Roman" pitchFamily="34" charset="-122"/>
+                <a:cs typeface="Times New Roman" pitchFamily="34" charset="-120"/>
               </a:rPr>
               <a:t>11 / 14</a:t>
             </a:r>
@@ -2955,7 +3173,7 @@
           <a:bodyPr wrap="square" lIns="0" tIns="0" rIns="0" bIns="0" rtlCol="0" anchor="ctr"/>
           <a:lstStyle/>
           <a:p>
-            <a:pPr marL="0" indent="0">
+            <a:pPr indent="0" marL="0">
               <a:buNone/>
             </a:pPr>
             <a:r>
@@ -2963,9 +3181,9 @@
                 <a:solidFill>
                   <a:srgbClr val="667085"/>
                 </a:solidFill>
-                <a:latin typeface="Calibri" pitchFamily="34" charset="0"/>
-                <a:ea typeface="Calibri" pitchFamily="34" charset="-122"/>
-                <a:cs typeface="Calibri" pitchFamily="34" charset="-120"/>
+                <a:latin typeface="Times New Roman" pitchFamily="34" charset="0"/>
+                <a:ea typeface="Times New Roman" pitchFamily="34" charset="-122"/>
+                <a:cs typeface="Times New Roman" pitchFamily="34" charset="-120"/>
               </a:rPr>
               <a:t>EE5003 MSc Project | Liu Chengyu</a:t>
             </a:r>
@@ -2994,7 +3212,7 @@
           <a:bodyPr wrap="square" lIns="0" tIns="0" rIns="0" bIns="0" rtlCol="0" anchor="ctr"/>
           <a:lstStyle/>
           <a:p>
-            <a:pPr marL="0" indent="0" algn="r">
+            <a:pPr algn="r" indent="0" marL="0">
               <a:buNone/>
             </a:pPr>
             <a:r>
@@ -3002,9 +3220,9 @@
                 <a:solidFill>
                   <a:srgbClr val="667085"/>
                 </a:solidFill>
-                <a:latin typeface="Calibri" pitchFamily="34" charset="0"/>
-                <a:ea typeface="Calibri" pitchFamily="34" charset="-122"/>
-                <a:cs typeface="Calibri" pitchFamily="34" charset="-120"/>
+                <a:latin typeface="Times New Roman" pitchFamily="34" charset="0"/>
+                <a:ea typeface="Times New Roman" pitchFamily="34" charset="-122"/>
+                <a:cs typeface="Times New Roman" pitchFamily="34" charset="-120"/>
               </a:rPr>
               <a:t>Approximate Graph Unlearning Audit</a:t>
             </a:r>
@@ -3014,14 +3232,14 @@
       </p:sp>
       <p:pic>
         <p:nvPicPr>
-          <p:cNvPr id="7" name="Image 0" descr="H:\project\OpenGU\GULib-master\report\0417_5003report\figures\paper_figures\FIG-3_Spectrum.png"/>
+          <p:cNvPr id="7" name="Image 0" descr="H:\project\OpenGU\GULib-master\report\0417_5003report\figures\paper_figures\FIG-3_Spectrum.png">    </p:cNvPr>
           <p:cNvPicPr>
             <a:picLocks noChangeAspect="1"/>
           </p:cNvPicPr>
           <p:nvPr/>
         </p:nvPicPr>
         <p:blipFill>
-          <a:blip r:embed="rId3"/>
+          <a:blip r:embed="rId1"/>
           <a:stretch>
             <a:fillRect/>
           </a:stretch>
@@ -3057,7 +3275,7 @@
           <a:bodyPr wrap="square" lIns="0" tIns="0" rIns="0" bIns="0" rtlCol="0" anchor="ctr"/>
           <a:lstStyle/>
           <a:p>
-            <a:pPr marL="0" indent="0">
+            <a:pPr indent="0" marL="0">
               <a:buNone/>
             </a:pPr>
             <a:r>
@@ -3065,9 +3283,9 @@
                 <a:solidFill>
                   <a:srgbClr val="667085"/>
                 </a:solidFill>
-                <a:latin typeface="Calibri" pitchFamily="34" charset="0"/>
-                <a:ea typeface="Calibri" pitchFamily="34" charset="-122"/>
-                <a:cs typeface="Calibri" pitchFamily="34" charset="-120"/>
+                <a:latin typeface="Times New Roman" pitchFamily="34" charset="0"/>
+                <a:ea typeface="Times New Roman" pitchFamily="34" charset="-122"/>
+                <a:cs typeface="Times New Roman" pitchFamily="34" charset="-120"/>
               </a:rPr>
               <a:t>Figure 3. Cross-family comparison of the main attack strategies at ratio = 0.05.</a:t>
             </a:r>
@@ -3101,13 +3319,6 @@
             <a:prstDash val="solid"/>
           </a:ln>
         </p:spPr>
-        <p:txBody>
-          <a:bodyPr/>
-          <a:lstStyle/>
-          <a:p>
-            <a:endParaRPr lang="zh-CN" altLang="en-US"/>
-          </a:p>
-        </p:txBody>
       </p:sp>
       <p:sp>
         <p:nvSpPr>
@@ -3130,7 +3341,7 @@
           <a:bodyPr wrap="square" lIns="0" tIns="0" rIns="0" bIns="0" rtlCol="0" anchor="ctr"/>
           <a:lstStyle/>
           <a:p>
-            <a:pPr marL="0" indent="0">
+            <a:pPr indent="0" marL="0">
               <a:buNone/>
             </a:pPr>
             <a:r>
@@ -3138,9 +3349,9 @@
                 <a:solidFill>
                   <a:srgbClr val="223A5E"/>
                 </a:solidFill>
-                <a:latin typeface="Georgia" pitchFamily="34" charset="0"/>
-                <a:ea typeface="Georgia" pitchFamily="34" charset="-122"/>
-                <a:cs typeface="Georgia" pitchFamily="34" charset="-120"/>
+                <a:latin typeface="Times New Roman" pitchFamily="34" charset="0"/>
+                <a:ea typeface="Times New Roman" pitchFamily="34" charset="-122"/>
+                <a:cs typeface="Times New Roman" pitchFamily="34" charset="-120"/>
               </a:rPr>
               <a:t>Reading key</a:t>
             </a:r>
@@ -3171,7 +3382,7 @@
           </a:bodyPr>
           <a:lstStyle/>
           <a:p>
-            <a:pPr marL="0" indent="0">
+            <a:pPr indent="0" marL="0">
               <a:buNone/>
             </a:pPr>
             <a:r>
@@ -3179,9 +3390,9 @@
                 <a:solidFill>
                   <a:srgbClr val="1E2630"/>
                 </a:solidFill>
-                <a:latin typeface="Calibri" pitchFamily="34" charset="0"/>
-                <a:ea typeface="Calibri" pitchFamily="34" charset="-122"/>
-                <a:cs typeface="Calibri" pitchFamily="34" charset="-120"/>
+                <a:latin typeface="Times New Roman" pitchFamily="34" charset="0"/>
+                <a:ea typeface="Times New Roman" pitchFamily="34" charset="-122"/>
+                <a:cs typeface="Times New Roman" pitchFamily="34" charset="-120"/>
               </a:rPr>
               <a:t>Relative F1 drop measures the attack-over-random advantage at the same budget.</a:t>
             </a:r>
@@ -3217,13 +3428,6 @@
             <a:prstDash val="solid"/>
           </a:ln>
         </p:spPr>
-        <p:txBody>
-          <a:bodyPr/>
-          <a:lstStyle/>
-          <a:p>
-            <a:endParaRPr lang="zh-CN" altLang="en-US"/>
-          </a:p>
-        </p:txBody>
       </p:sp>
       <p:sp>
         <p:nvSpPr>
@@ -3246,7 +3450,7 @@
           <a:bodyPr wrap="square" lIns="0" tIns="0" rIns="0" bIns="0" rtlCol="0" anchor="ctr"/>
           <a:lstStyle/>
           <a:p>
-            <a:pPr marL="0" indent="0" algn="ctr">
+            <a:pPr algn="ctr" indent="0" marL="0">
               <a:buNone/>
             </a:pPr>
             <a:r>
@@ -3254,9 +3458,9 @@
                 <a:solidFill>
                   <a:srgbClr val="FFFFFF"/>
                 </a:solidFill>
-                <a:latin typeface="Georgia" pitchFamily="34" charset="0"/>
-                <a:ea typeface="Georgia" pitchFamily="34" charset="-122"/>
-                <a:cs typeface="Georgia" pitchFamily="34" charset="-120"/>
+                <a:latin typeface="Times New Roman" pitchFamily="34" charset="0"/>
+                <a:ea typeface="Times New Roman" pitchFamily="34" charset="-122"/>
+                <a:cs typeface="Times New Roman" pitchFamily="34" charset="-120"/>
               </a:rPr>
               <a:t>18.9s</a:t>
             </a:r>
@@ -3287,7 +3491,7 @@
           </a:bodyPr>
           <a:lstStyle/>
           <a:p>
-            <a:pPr marL="0" indent="0" algn="ctr">
+            <a:pPr algn="ctr" indent="0" marL="0">
               <a:buNone/>
             </a:pPr>
             <a:r>
@@ -3295,9 +3499,9 @@
                 <a:solidFill>
                   <a:srgbClr val="F7F5F1"/>
                 </a:solidFill>
-                <a:latin typeface="Calibri" pitchFamily="34" charset="0"/>
-                <a:ea typeface="Calibri" pitchFamily="34" charset="-122"/>
-                <a:cs typeface="Calibri" pitchFamily="34" charset="-120"/>
+                <a:latin typeface="Times New Roman" pitchFamily="34" charset="0"/>
+                <a:ea typeface="Times New Roman" pitchFamily="34" charset="-122"/>
+                <a:cs typeface="Times New Roman" pitchFamily="34" charset="-120"/>
               </a:rPr>
               <a:t>IM-v4 selection time</a:t>
             </a:r>
@@ -3333,13 +3537,6 @@
             <a:prstDash val="solid"/>
           </a:ln>
         </p:spPr>
-        <p:txBody>
-          <a:bodyPr/>
-          <a:lstStyle/>
-          <a:p>
-            <a:endParaRPr lang="zh-CN" altLang="en-US"/>
-          </a:p>
-        </p:txBody>
       </p:sp>
       <p:sp>
         <p:nvSpPr>
@@ -3362,7 +3559,7 @@
           <a:bodyPr wrap="square" lIns="0" tIns="0" rIns="0" bIns="0" rtlCol="0" anchor="ctr"/>
           <a:lstStyle/>
           <a:p>
-            <a:pPr marL="0" indent="0" algn="ctr">
+            <a:pPr algn="ctr" indent="0" marL="0">
               <a:buNone/>
             </a:pPr>
             <a:r>
@@ -3370,9 +3567,9 @@
                 <a:solidFill>
                   <a:srgbClr val="223A5E"/>
                 </a:solidFill>
-                <a:latin typeface="Georgia" pitchFamily="34" charset="0"/>
-                <a:ea typeface="Georgia" pitchFamily="34" charset="-122"/>
-                <a:cs typeface="Georgia" pitchFamily="34" charset="-120"/>
+                <a:latin typeface="Times New Roman" pitchFamily="34" charset="0"/>
+                <a:ea typeface="Times New Roman" pitchFamily="34" charset="-122"/>
+                <a:cs typeface="Times New Roman" pitchFamily="34" charset="-120"/>
               </a:rPr>
               <a:t>1.3%</a:t>
             </a:r>
@@ -3403,7 +3600,7 @@
           </a:bodyPr>
           <a:lstStyle/>
           <a:p>
-            <a:pPr marL="0" indent="0" algn="ctr">
+            <a:pPr algn="ctr" indent="0" marL="0">
               <a:buNone/>
             </a:pPr>
             <a:r>
@@ -3411,9 +3608,9 @@
                 <a:solidFill>
                   <a:srgbClr val="223A5E"/>
                 </a:solidFill>
-                <a:latin typeface="Calibri" pitchFamily="34" charset="0"/>
-                <a:ea typeface="Calibri" pitchFamily="34" charset="-122"/>
-                <a:cs typeface="Calibri" pitchFamily="34" charset="-120"/>
+                <a:latin typeface="Times New Roman" pitchFamily="34" charset="0"/>
+                <a:ea typeface="Times New Roman" pitchFamily="34" charset="-122"/>
+                <a:cs typeface="Times New Roman" pitchFamily="34" charset="-120"/>
               </a:rPr>
               <a:t>spread loss vs CELF</a:t>
             </a:r>
@@ -3447,13 +3644,6 @@
             <a:prstDash val="solid"/>
           </a:ln>
         </p:spPr>
-        <p:txBody>
-          <a:bodyPr/>
-          <a:lstStyle/>
-          <a:p>
-            <a:endParaRPr lang="zh-CN" altLang="en-US"/>
-          </a:p>
-        </p:txBody>
       </p:sp>
       <p:sp>
         <p:nvSpPr>
@@ -3476,7 +3666,7 @@
           <a:bodyPr wrap="square" lIns="0" tIns="0" rIns="0" bIns="0" rtlCol="0" anchor="ctr"/>
           <a:lstStyle/>
           <a:p>
-            <a:pPr marL="0" indent="0">
+            <a:pPr indent="0" marL="0">
               <a:buNone/>
             </a:pPr>
             <a:r>
@@ -3484,9 +3674,9 @@
                 <a:solidFill>
                   <a:srgbClr val="223A5E"/>
                 </a:solidFill>
-                <a:latin typeface="Georgia" pitchFamily="34" charset="0"/>
-                <a:ea typeface="Georgia" pitchFamily="34" charset="-122"/>
-                <a:cs typeface="Georgia" pitchFamily="34" charset="-120"/>
+                <a:latin typeface="Times New Roman" pitchFamily="34" charset="0"/>
+                <a:ea typeface="Times New Roman" pitchFamily="34" charset="-122"/>
+                <a:cs typeface="Times New Roman" pitchFamily="34" charset="-120"/>
               </a:rPr>
               <a:t>Practical</a:t>
             </a:r>
@@ -3517,7 +3707,7 @@
           </a:bodyPr>
           <a:lstStyle/>
           <a:p>
-            <a:pPr marL="0" indent="0">
+            <a:pPr indent="0" marL="0">
               <a:buNone/>
             </a:pPr>
             <a:r>
@@ -3525,9 +3715,9 @@
                 <a:solidFill>
                   <a:srgbClr val="1E2630"/>
                 </a:solidFill>
-                <a:latin typeface="Calibri" pitchFamily="34" charset="0"/>
-                <a:ea typeface="Calibri" pitchFamily="34" charset="-122"/>
-                <a:cs typeface="Calibri" pitchFamily="34" charset="-120"/>
+                <a:latin typeface="Times New Roman" pitchFamily="34" charset="0"/>
+                <a:ea typeface="Times New Roman" pitchFamily="34" charset="-122"/>
+                <a:cs typeface="Times New Roman" pitchFamily="34" charset="-120"/>
               </a:rPr>
               <a:t>Selection is operationally feasible.</a:t>
             </a:r>
@@ -3565,9 +3755,9 @@
                 <a:solidFill>
                   <a:srgbClr val="1E2630"/>
                 </a:solidFill>
-                <a:latin typeface="Calibri" pitchFamily="34" charset="0"/>
-                <a:ea typeface="Calibri" pitchFamily="34" charset="-122"/>
-                <a:cs typeface="Calibri" pitchFamily="34" charset="-120"/>
+                <a:latin typeface="Times New Roman" pitchFamily="34" charset="0"/>
+                <a:ea typeface="Times New Roman" pitchFamily="34" charset="-122"/>
+                <a:cs typeface="Times New Roman" pitchFamily="34" charset="-120"/>
               </a:rPr>
               <a:t>Structured attacks outperform random deletion most clearly on GNNDelete.</a:t>
             </a:r>
@@ -3583,9 +3773,9 @@
                 <a:solidFill>
                   <a:srgbClr val="1E2630"/>
                 </a:solidFill>
-                <a:latin typeface="Calibri" pitchFamily="34" charset="0"/>
-                <a:ea typeface="Calibri" pitchFamily="34" charset="-122"/>
-                <a:cs typeface="Calibri" pitchFamily="34" charset="-120"/>
+                <a:latin typeface="Times New Roman" pitchFamily="34" charset="0"/>
+                <a:ea typeface="Times New Roman" pitchFamily="34" charset="-122"/>
+                <a:cs typeface="Times New Roman" pitchFamily="34" charset="-120"/>
               </a:rPr>
               <a:t>IM-v4 makes attack selection fast enough to matter in practice.</a:t>
             </a:r>
@@ -3609,7 +3799,6 @@
         <a:solidFill>
           <a:srgbClr val="F7F5F1"/>
         </a:solidFill>
-        <a:effectLst/>
       </p:bgPr>
     </p:bg>
     <p:spTree>
@@ -3652,13 +3841,6 @@
             <a:prstDash val="solid"/>
           </a:ln>
         </p:spPr>
-        <p:txBody>
-          <a:bodyPr/>
-          <a:lstStyle/>
-          <a:p>
-            <a:endParaRPr lang="zh-CN" altLang="en-US"/>
-          </a:p>
-        </p:txBody>
       </p:sp>
       <p:sp>
         <p:nvSpPr>
@@ -3681,7 +3863,7 @@
           <a:bodyPr wrap="square" lIns="0" tIns="0" rIns="0" bIns="0" rtlCol="0" anchor="ctr"/>
           <a:lstStyle/>
           <a:p>
-            <a:pPr marL="0" indent="0">
+            <a:pPr indent="0" marL="0">
               <a:buNone/>
             </a:pPr>
             <a:r>
@@ -3689,9 +3871,9 @@
                 <a:solidFill>
                   <a:srgbClr val="FFFFFF"/>
                 </a:solidFill>
-                <a:latin typeface="Georgia" pitchFamily="34" charset="0"/>
-                <a:ea typeface="Georgia" pitchFamily="34" charset="-122"/>
-                <a:cs typeface="Georgia" pitchFamily="34" charset="-120"/>
+                <a:latin typeface="Times New Roman" pitchFamily="34" charset="0"/>
+                <a:ea typeface="Times New Roman" pitchFamily="34" charset="-122"/>
+                <a:cs typeface="Times New Roman" pitchFamily="34" charset="-120"/>
               </a:rPr>
               <a:t>Limitations And Future Work</a:t>
             </a:r>
@@ -3720,7 +3902,7 @@
           <a:bodyPr wrap="square" lIns="0" tIns="0" rIns="0" bIns="0" rtlCol="0" anchor="ctr"/>
           <a:lstStyle/>
           <a:p>
-            <a:pPr marL="0" indent="0" algn="r">
+            <a:pPr algn="r" indent="0" marL="0">
               <a:buNone/>
             </a:pPr>
             <a:r>
@@ -3728,9 +3910,9 @@
                 <a:solidFill>
                   <a:srgbClr val="F7F5F1"/>
                 </a:solidFill>
-                <a:latin typeface="Calibri" pitchFamily="34" charset="0"/>
-                <a:ea typeface="Calibri" pitchFamily="34" charset="-122"/>
-                <a:cs typeface="Calibri" pitchFamily="34" charset="-120"/>
+                <a:latin typeface="Times New Roman" pitchFamily="34" charset="0"/>
+                <a:ea typeface="Times New Roman" pitchFamily="34" charset="-122"/>
+                <a:cs typeface="Times New Roman" pitchFamily="34" charset="-120"/>
               </a:rPr>
               <a:t>12 / 14</a:t>
             </a:r>
@@ -3759,7 +3941,7 @@
           <a:bodyPr wrap="square" lIns="0" tIns="0" rIns="0" bIns="0" rtlCol="0" anchor="ctr"/>
           <a:lstStyle/>
           <a:p>
-            <a:pPr marL="0" indent="0">
+            <a:pPr indent="0" marL="0">
               <a:buNone/>
             </a:pPr>
             <a:r>
@@ -3767,9 +3949,9 @@
                 <a:solidFill>
                   <a:srgbClr val="667085"/>
                 </a:solidFill>
-                <a:latin typeface="Calibri" pitchFamily="34" charset="0"/>
-                <a:ea typeface="Calibri" pitchFamily="34" charset="-122"/>
-                <a:cs typeface="Calibri" pitchFamily="34" charset="-120"/>
+                <a:latin typeface="Times New Roman" pitchFamily="34" charset="0"/>
+                <a:ea typeface="Times New Roman" pitchFamily="34" charset="-122"/>
+                <a:cs typeface="Times New Roman" pitchFamily="34" charset="-120"/>
               </a:rPr>
               <a:t>EE5003 MSc Project | Liu Chengyu</a:t>
             </a:r>
@@ -3798,7 +3980,7 @@
           <a:bodyPr wrap="square" lIns="0" tIns="0" rIns="0" bIns="0" rtlCol="0" anchor="ctr"/>
           <a:lstStyle/>
           <a:p>
-            <a:pPr marL="0" indent="0" algn="r">
+            <a:pPr algn="r" indent="0" marL="0">
               <a:buNone/>
             </a:pPr>
             <a:r>
@@ -3806,9 +3988,9 @@
                 <a:solidFill>
                   <a:srgbClr val="667085"/>
                 </a:solidFill>
-                <a:latin typeface="Calibri" pitchFamily="34" charset="0"/>
-                <a:ea typeface="Calibri" pitchFamily="34" charset="-122"/>
-                <a:cs typeface="Calibri" pitchFamily="34" charset="-120"/>
+                <a:latin typeface="Times New Roman" pitchFamily="34" charset="0"/>
+                <a:ea typeface="Times New Roman" pitchFamily="34" charset="-122"/>
+                <a:cs typeface="Times New Roman" pitchFamily="34" charset="-120"/>
               </a:rPr>
               <a:t>Approximate Graph Unlearning Audit</a:t>
             </a:r>
@@ -3837,7 +4019,7 @@
           <a:bodyPr wrap="square" lIns="0" tIns="0" rIns="0" bIns="0" rtlCol="0" anchor="ctr"/>
           <a:lstStyle/>
           <a:p>
-            <a:pPr marL="0" indent="0">
+            <a:pPr indent="0" marL="0">
               <a:buNone/>
             </a:pPr>
             <a:r>
@@ -3845,9 +4027,9 @@
                 <a:solidFill>
                   <a:srgbClr val="223A5E"/>
                 </a:solidFill>
-                <a:latin typeface="Georgia" pitchFamily="34" charset="0"/>
-                <a:ea typeface="Georgia" pitchFamily="34" charset="-122"/>
-                <a:cs typeface="Georgia" pitchFamily="34" charset="-120"/>
+                <a:latin typeface="Times New Roman" pitchFamily="34" charset="0"/>
+                <a:ea typeface="Times New Roman" pitchFamily="34" charset="-122"/>
+                <a:cs typeface="Times New Roman" pitchFamily="34" charset="-120"/>
               </a:rPr>
               <a:t>The project is complete; these scope limits and follow-up directions define what this report does and does not claim.</a:t>
             </a:r>
@@ -3881,13 +4063,6 @@
             <a:prstDash val="solid"/>
           </a:ln>
         </p:spPr>
-        <p:txBody>
-          <a:bodyPr/>
-          <a:lstStyle/>
-          <a:p>
-            <a:endParaRPr lang="zh-CN" altLang="en-US"/>
-          </a:p>
-        </p:txBody>
       </p:sp>
       <p:sp>
         <p:nvSpPr>
@@ -3910,7 +4085,7 @@
           <a:bodyPr wrap="square" lIns="0" tIns="0" rIns="0" bIns="0" rtlCol="0" anchor="ctr"/>
           <a:lstStyle/>
           <a:p>
-            <a:pPr marL="0" indent="0">
+            <a:pPr indent="0" marL="0">
               <a:buNone/>
             </a:pPr>
             <a:r>
@@ -3918,9 +4093,9 @@
                 <a:solidFill>
                   <a:srgbClr val="223A5E"/>
                 </a:solidFill>
-                <a:latin typeface="Georgia" pitchFamily="34" charset="0"/>
-                <a:ea typeface="Georgia" pitchFamily="34" charset="-122"/>
-                <a:cs typeface="Georgia" pitchFamily="34" charset="-120"/>
+                <a:latin typeface="Times New Roman" pitchFamily="34" charset="0"/>
+                <a:ea typeface="Times New Roman" pitchFamily="34" charset="-122"/>
+                <a:cs typeface="Times New Roman" pitchFamily="34" charset="-120"/>
               </a:rPr>
               <a:t>Limitation 1</a:t>
             </a:r>
@@ -3951,7 +4126,7 @@
           </a:bodyPr>
           <a:lstStyle/>
           <a:p>
-            <a:pPr marL="0" indent="0">
+            <a:pPr indent="0" marL="0">
               <a:buNone/>
             </a:pPr>
             <a:r>
@@ -3959,9 +4134,9 @@
                 <a:solidFill>
                   <a:srgbClr val="1E2630"/>
                 </a:solidFill>
-                <a:latin typeface="Calibri" pitchFamily="34" charset="0"/>
-                <a:ea typeface="Calibri" pitchFamily="34" charset="-122"/>
-                <a:cs typeface="Calibri" pitchFamily="34" charset="-120"/>
+                <a:latin typeface="Times New Roman" pitchFamily="34" charset="0"/>
+                <a:ea typeface="Times New Roman" pitchFamily="34" charset="-122"/>
+                <a:cs typeface="Times New Roman" pitchFamily="34" charset="-120"/>
               </a:rPr>
               <a:t>Evidence is concentrated on the tested citation benchmarks and backbones.</a:t>
             </a:r>
@@ -3995,13 +4170,6 @@
             <a:prstDash val="solid"/>
           </a:ln>
         </p:spPr>
-        <p:txBody>
-          <a:bodyPr/>
-          <a:lstStyle/>
-          <a:p>
-            <a:endParaRPr lang="zh-CN" altLang="en-US"/>
-          </a:p>
-        </p:txBody>
       </p:sp>
       <p:sp>
         <p:nvSpPr>
@@ -4024,7 +4192,7 @@
           <a:bodyPr wrap="square" lIns="0" tIns="0" rIns="0" bIns="0" rtlCol="0" anchor="ctr"/>
           <a:lstStyle/>
           <a:p>
-            <a:pPr marL="0" indent="0">
+            <a:pPr indent="0" marL="0">
               <a:buNone/>
             </a:pPr>
             <a:r>
@@ -4032,9 +4200,9 @@
                 <a:solidFill>
                   <a:srgbClr val="223A5E"/>
                 </a:solidFill>
-                <a:latin typeface="Georgia" pitchFamily="34" charset="0"/>
-                <a:ea typeface="Georgia" pitchFamily="34" charset="-122"/>
-                <a:cs typeface="Georgia" pitchFamily="34" charset="-120"/>
+                <a:latin typeface="Times New Roman" pitchFamily="34" charset="0"/>
+                <a:ea typeface="Times New Roman" pitchFamily="34" charset="-122"/>
+                <a:cs typeface="Times New Roman" pitchFamily="34" charset="-120"/>
               </a:rPr>
               <a:t>Limitation 2</a:t>
             </a:r>
@@ -4065,7 +4233,7 @@
           </a:bodyPr>
           <a:lstStyle/>
           <a:p>
-            <a:pPr marL="0" indent="0">
+            <a:pPr indent="0" marL="0">
               <a:buNone/>
             </a:pPr>
             <a:r>
@@ -4073,9 +4241,9 @@
                 <a:solidFill>
                   <a:srgbClr val="1E2630"/>
                 </a:solidFill>
-                <a:latin typeface="Calibri" pitchFamily="34" charset="0"/>
-                <a:ea typeface="Calibri" pitchFamily="34" charset="-122"/>
-                <a:cs typeface="Calibri" pitchFamily="34" charset="-120"/>
+                <a:latin typeface="Times New Roman" pitchFamily="34" charset="0"/>
+                <a:ea typeface="Times New Roman" pitchFamily="34" charset="-122"/>
+                <a:cs typeface="Times New Roman" pitchFamily="34" charset="-120"/>
               </a:rPr>
               <a:t>The mechanism-level explanation for GNNDelete fragility is still incomplete.</a:t>
             </a:r>
@@ -4109,13 +4277,6 @@
             <a:prstDash val="solid"/>
           </a:ln>
         </p:spPr>
-        <p:txBody>
-          <a:bodyPr/>
-          <a:lstStyle/>
-          <a:p>
-            <a:endParaRPr lang="zh-CN" altLang="en-US"/>
-          </a:p>
-        </p:txBody>
       </p:sp>
       <p:sp>
         <p:nvSpPr>
@@ -4138,7 +4299,7 @@
           <a:bodyPr wrap="square" lIns="0" tIns="0" rIns="0" bIns="0" rtlCol="0" anchor="ctr"/>
           <a:lstStyle/>
           <a:p>
-            <a:pPr marL="0" indent="0">
+            <a:pPr indent="0" marL="0">
               <a:buNone/>
             </a:pPr>
             <a:r>
@@ -4146,9 +4307,9 @@
                 <a:solidFill>
                   <a:srgbClr val="223A5E"/>
                 </a:solidFill>
-                <a:latin typeface="Georgia" pitchFamily="34" charset="0"/>
-                <a:ea typeface="Georgia" pitchFamily="34" charset="-122"/>
-                <a:cs typeface="Georgia" pitchFamily="34" charset="-120"/>
+                <a:latin typeface="Times New Roman" pitchFamily="34" charset="0"/>
+                <a:ea typeface="Times New Roman" pitchFamily="34" charset="-122"/>
+                <a:cs typeface="Times New Roman" pitchFamily="34" charset="-120"/>
               </a:rPr>
               <a:t>Future work 1</a:t>
             </a:r>
@@ -4179,7 +4340,7 @@
           </a:bodyPr>
           <a:lstStyle/>
           <a:p>
-            <a:pPr marL="0" indent="0">
+            <a:pPr indent="0" marL="0">
               <a:buNone/>
             </a:pPr>
             <a:r>
@@ -4187,9 +4348,9 @@
                 <a:solidFill>
                   <a:srgbClr val="1E2630"/>
                 </a:solidFill>
-                <a:latin typeface="Calibri" pitchFamily="34" charset="0"/>
-                <a:ea typeface="Calibri" pitchFamily="34" charset="-122"/>
-                <a:cs typeface="Calibri" pitchFamily="34" charset="-120"/>
+                <a:latin typeface="Times New Roman" pitchFamily="34" charset="0"/>
+                <a:ea typeface="Times New Roman" pitchFamily="34" charset="-122"/>
+                <a:cs typeface="Times New Roman" pitchFamily="34" charset="-120"/>
               </a:rPr>
               <a:t>Validate the same pattern on larger graph benchmarks such as PubMed.</a:t>
             </a:r>
@@ -4223,13 +4384,6 @@
             <a:prstDash val="solid"/>
           </a:ln>
         </p:spPr>
-        <p:txBody>
-          <a:bodyPr/>
-          <a:lstStyle/>
-          <a:p>
-            <a:endParaRPr lang="zh-CN" altLang="en-US"/>
-          </a:p>
-        </p:txBody>
       </p:sp>
       <p:sp>
         <p:nvSpPr>
@@ -4252,7 +4406,7 @@
           <a:bodyPr wrap="square" lIns="0" tIns="0" rIns="0" bIns="0" rtlCol="0" anchor="ctr"/>
           <a:lstStyle/>
           <a:p>
-            <a:pPr marL="0" indent="0">
+            <a:pPr indent="0" marL="0">
               <a:buNone/>
             </a:pPr>
             <a:r>
@@ -4260,9 +4414,9 @@
                 <a:solidFill>
                   <a:srgbClr val="223A5E"/>
                 </a:solidFill>
-                <a:latin typeface="Georgia" pitchFamily="34" charset="0"/>
-                <a:ea typeface="Georgia" pitchFamily="34" charset="-122"/>
-                <a:cs typeface="Georgia" pitchFamily="34" charset="-120"/>
+                <a:latin typeface="Times New Roman" pitchFamily="34" charset="0"/>
+                <a:ea typeface="Times New Roman" pitchFamily="34" charset="-122"/>
+                <a:cs typeface="Times New Roman" pitchFamily="34" charset="-120"/>
               </a:rPr>
               <a:t>Future work 2</a:t>
             </a:r>
@@ -4293,7 +4447,7 @@
           </a:bodyPr>
           <a:lstStyle/>
           <a:p>
-            <a:pPr marL="0" indent="0">
+            <a:pPr indent="0" marL="0">
               <a:buNone/>
             </a:pPr>
             <a:r>
@@ -4301,9 +4455,9 @@
                 <a:solidFill>
                   <a:srgbClr val="1E2630"/>
                 </a:solidFill>
-                <a:latin typeface="Calibri" pitchFamily="34" charset="0"/>
-                <a:ea typeface="Calibri" pitchFamily="34" charset="-122"/>
-                <a:cs typeface="Calibri" pitchFamily="34" charset="-120"/>
+                <a:latin typeface="Times New Roman" pitchFamily="34" charset="0"/>
+                <a:ea typeface="Times New Roman" pitchFamily="34" charset="-122"/>
+                <a:cs typeface="Times New Roman" pitchFamily="34" charset="-120"/>
               </a:rPr>
               <a:t>Add targeted ablations that explain when and why GNNDelete fails.</a:t>
             </a:r>
@@ -4339,13 +4493,6 @@
             <a:prstDash val="solid"/>
           </a:ln>
         </p:spPr>
-        <p:txBody>
-          <a:bodyPr/>
-          <a:lstStyle/>
-          <a:p>
-            <a:endParaRPr lang="zh-CN" altLang="en-US"/>
-          </a:p>
-        </p:txBody>
       </p:sp>
       <p:sp>
         <p:nvSpPr>
@@ -4368,7 +4515,7 @@
           <a:bodyPr wrap="square" lIns="0" tIns="0" rIns="0" bIns="0" rtlCol="0" anchor="ctr"/>
           <a:lstStyle/>
           <a:p>
-            <a:pPr marL="0" indent="0">
+            <a:pPr indent="0" marL="0">
               <a:buNone/>
             </a:pPr>
             <a:r>
@@ -4376,9 +4523,9 @@
                 <a:solidFill>
                   <a:srgbClr val="F7F5F1"/>
                 </a:solidFill>
-                <a:latin typeface="Georgia" pitchFamily="34" charset="0"/>
-                <a:ea typeface="Georgia" pitchFamily="34" charset="-122"/>
-                <a:cs typeface="Georgia" pitchFamily="34" charset="-120"/>
+                <a:latin typeface="Times New Roman" pitchFamily="34" charset="0"/>
+                <a:ea typeface="Times New Roman" pitchFamily="34" charset="-122"/>
+                <a:cs typeface="Times New Roman" pitchFamily="34" charset="-120"/>
               </a:rPr>
               <a:t>Project status</a:t>
             </a:r>
@@ -4409,7 +4556,7 @@
           </a:bodyPr>
           <a:lstStyle/>
           <a:p>
-            <a:pPr marL="0" indent="0">
+            <a:pPr indent="0" marL="0">
               <a:buNone/>
             </a:pPr>
             <a:r>
@@ -4417,16 +4564,16 @@
                 <a:solidFill>
                   <a:srgbClr val="F7F5F1"/>
                 </a:solidFill>
-                <a:latin typeface="Calibri" pitchFamily="34" charset="0"/>
-                <a:ea typeface="Calibri" pitchFamily="34" charset="-122"/>
-                <a:cs typeface="Calibri" pitchFamily="34" charset="-120"/>
+                <a:latin typeface="Times New Roman" pitchFamily="34" charset="0"/>
+                <a:ea typeface="Times New Roman" pitchFamily="34" charset="-122"/>
+                <a:cs typeface="Times New Roman" pitchFamily="34" charset="-120"/>
               </a:rPr>
               <a:t>Completed MSc project</a:t>
             </a:r>
             <a:endParaRPr lang="en-US" sz="1040" dirty="0"/>
           </a:p>
           <a:p>
-            <a:pPr marL="0" indent="0">
+            <a:pPr indent="0" marL="0">
               <a:buNone/>
             </a:pPr>
             <a:r>
@@ -4434,9 +4581,9 @@
                 <a:solidFill>
                   <a:srgbClr val="F7F5F1"/>
                 </a:solidFill>
-                <a:latin typeface="Calibri" pitchFamily="34" charset="0"/>
-                <a:ea typeface="Calibri" pitchFamily="34" charset="-122"/>
-                <a:cs typeface="Calibri" pitchFamily="34" charset="-120"/>
+                <a:latin typeface="Times New Roman" pitchFamily="34" charset="0"/>
+                <a:ea typeface="Times New Roman" pitchFamily="34" charset="-122"/>
+                <a:cs typeface="Times New Roman" pitchFamily="34" charset="-120"/>
               </a:rPr>
               <a:t>Final course submission with a reusable audit workflow.</a:t>
             </a:r>
@@ -4460,7 +4607,6 @@
         <a:solidFill>
           <a:srgbClr val="16263F"/>
         </a:solidFill>
-        <a:effectLst/>
       </p:bgPr>
     </p:bg>
     <p:spTree>
@@ -4498,7 +4644,7 @@
           <a:bodyPr wrap="square" lIns="0" tIns="0" rIns="0" bIns="0" rtlCol="0" anchor="ctr"/>
           <a:lstStyle/>
           <a:p>
-            <a:pPr marL="0" indent="0">
+            <a:pPr indent="0" marL="0">
               <a:buNone/>
             </a:pPr>
             <a:r>
@@ -4506,9 +4652,9 @@
                 <a:solidFill>
                   <a:srgbClr val="FFFFFF"/>
                 </a:solidFill>
-                <a:latin typeface="Georgia" pitchFamily="34" charset="0"/>
-                <a:ea typeface="Georgia" pitchFamily="34" charset="-122"/>
-                <a:cs typeface="Georgia" pitchFamily="34" charset="-120"/>
+                <a:latin typeface="Times New Roman" pitchFamily="34" charset="0"/>
+                <a:ea typeface="Times New Roman" pitchFamily="34" charset="-122"/>
+                <a:cs typeface="Times New Roman" pitchFamily="34" charset="-120"/>
               </a:rPr>
               <a:t>Takeaways</a:t>
             </a:r>
@@ -4542,13 +4688,6 @@
             <a:prstDash val="solid"/>
           </a:ln>
         </p:spPr>
-        <p:txBody>
-          <a:bodyPr/>
-          <a:lstStyle/>
-          <a:p>
-            <a:endParaRPr lang="zh-CN" altLang="en-US"/>
-          </a:p>
-        </p:txBody>
       </p:sp>
       <p:sp>
         <p:nvSpPr>
@@ -4571,7 +4710,7 @@
           <a:bodyPr wrap="square" lIns="0" tIns="0" rIns="0" bIns="0" rtlCol="0" anchor="ctr"/>
           <a:lstStyle/>
           <a:p>
-            <a:pPr marL="0" indent="0">
+            <a:pPr indent="0" marL="0">
               <a:buNone/>
             </a:pPr>
             <a:r>
@@ -4579,9 +4718,9 @@
                 <a:solidFill>
                   <a:srgbClr val="16263F"/>
                 </a:solidFill>
-                <a:latin typeface="Georgia" pitchFamily="34" charset="0"/>
-                <a:ea typeface="Georgia" pitchFamily="34" charset="-122"/>
-                <a:cs typeface="Georgia" pitchFamily="34" charset="-120"/>
+                <a:latin typeface="Times New Roman" pitchFamily="34" charset="0"/>
+                <a:ea typeface="Times New Roman" pitchFamily="34" charset="-122"/>
+                <a:cs typeface="Times New Roman" pitchFamily="34" charset="-120"/>
               </a:rPr>
               <a:t>1. Auditability matters</a:t>
             </a:r>
@@ -4612,7 +4751,7 @@
           </a:bodyPr>
           <a:lstStyle/>
           <a:p>
-            <a:pPr marL="0" indent="0">
+            <a:pPr indent="0" marL="0">
               <a:buNone/>
             </a:pPr>
             <a:r>
@@ -4620,9 +4759,9 @@
                 <a:solidFill>
                   <a:srgbClr val="1E2630"/>
                 </a:solidFill>
-                <a:latin typeface="Calibri" pitchFamily="34" charset="0"/>
-                <a:ea typeface="Calibri" pitchFamily="34" charset="-122"/>
-                <a:cs typeface="Calibri" pitchFamily="34" charset="-120"/>
+                <a:latin typeface="Times New Roman" pitchFamily="34" charset="0"/>
+                <a:ea typeface="Times New Roman" pitchFamily="34" charset="-122"/>
+                <a:cs typeface="Times New Roman" pitchFamily="34" charset="-120"/>
               </a:rPr>
               <a:t>Approximate graph unlearning should be evaluated not only for accuracy but also for adversarial deletion robustness.</a:t>
             </a:r>
@@ -4656,13 +4795,6 @@
             <a:prstDash val="solid"/>
           </a:ln>
         </p:spPr>
-        <p:txBody>
-          <a:bodyPr/>
-          <a:lstStyle/>
-          <a:p>
-            <a:endParaRPr lang="zh-CN" altLang="en-US"/>
-          </a:p>
-        </p:txBody>
       </p:sp>
       <p:sp>
         <p:nvSpPr>
@@ -4685,7 +4817,7 @@
           <a:bodyPr wrap="square" lIns="0" tIns="0" rIns="0" bIns="0" rtlCol="0" anchor="ctr"/>
           <a:lstStyle/>
           <a:p>
-            <a:pPr marL="0" indent="0">
+            <a:pPr indent="0" marL="0">
               <a:buNone/>
             </a:pPr>
             <a:r>
@@ -4693,9 +4825,9 @@
                 <a:solidFill>
                   <a:srgbClr val="A6404B"/>
                 </a:solidFill>
-                <a:latin typeface="Georgia" pitchFamily="34" charset="0"/>
-                <a:ea typeface="Georgia" pitchFamily="34" charset="-122"/>
-                <a:cs typeface="Georgia" pitchFamily="34" charset="-120"/>
+                <a:latin typeface="Times New Roman" pitchFamily="34" charset="0"/>
+                <a:ea typeface="Times New Roman" pitchFamily="34" charset="-122"/>
+                <a:cs typeface="Times New Roman" pitchFamily="34" charset="-120"/>
               </a:rPr>
               <a:t>2. Family behavior differs</a:t>
             </a:r>
@@ -4726,7 +4858,7 @@
           </a:bodyPr>
           <a:lstStyle/>
           <a:p>
-            <a:pPr marL="0" indent="0">
+            <a:pPr indent="0" marL="0">
               <a:buNone/>
             </a:pPr>
             <a:r>
@@ -4734,9 +4866,9 @@
                 <a:solidFill>
                   <a:srgbClr val="1E2630"/>
                 </a:solidFill>
-                <a:latin typeface="Calibri" pitchFamily="34" charset="0"/>
-                <a:ea typeface="Calibri" pitchFamily="34" charset="-122"/>
-                <a:cs typeface="Calibri" pitchFamily="34" charset="-120"/>
+                <a:latin typeface="Times New Roman" pitchFamily="34" charset="0"/>
+                <a:ea typeface="Times New Roman" pitchFamily="34" charset="-122"/>
+                <a:cs typeface="Times New Roman" pitchFamily="34" charset="-120"/>
               </a:rPr>
               <a:t>In the tested settings, GNNDelete is most fragile, GIF is comparatively stable, and GraphEraser exhibits shard protection.</a:t>
             </a:r>
@@ -4770,13 +4902,6 @@
             <a:prstDash val="solid"/>
           </a:ln>
         </p:spPr>
-        <p:txBody>
-          <a:bodyPr/>
-          <a:lstStyle/>
-          <a:p>
-            <a:endParaRPr lang="zh-CN" altLang="en-US"/>
-          </a:p>
-        </p:txBody>
       </p:sp>
       <p:sp>
         <p:nvSpPr>
@@ -4799,7 +4924,7 @@
           <a:bodyPr wrap="square" lIns="0" tIns="0" rIns="0" bIns="0" rtlCol="0" anchor="ctr"/>
           <a:lstStyle/>
           <a:p>
-            <a:pPr marL="0" indent="0">
+            <a:pPr indent="0" marL="0">
               <a:buNone/>
             </a:pPr>
             <a:r>
@@ -4807,9 +4932,9 @@
                 <a:solidFill>
                   <a:srgbClr val="223A5E"/>
                 </a:solidFill>
-                <a:latin typeface="Georgia" pitchFamily="34" charset="0"/>
-                <a:ea typeface="Georgia" pitchFamily="34" charset="-122"/>
-                <a:cs typeface="Georgia" pitchFamily="34" charset="-120"/>
+                <a:latin typeface="Times New Roman" pitchFamily="34" charset="0"/>
+                <a:ea typeface="Times New Roman" pitchFamily="34" charset="-122"/>
+                <a:cs typeface="Times New Roman" pitchFamily="34" charset="-120"/>
               </a:rPr>
               <a:t>3. Workflow contribution</a:t>
             </a:r>
@@ -4840,7 +4965,7 @@
           </a:bodyPr>
           <a:lstStyle/>
           <a:p>
-            <a:pPr marL="0" indent="0">
+            <a:pPr indent="0" marL="0">
               <a:buNone/>
             </a:pPr>
             <a:r>
@@ -4848,9 +4973,9 @@
                 <a:solidFill>
                   <a:srgbClr val="1E2630"/>
                 </a:solidFill>
-                <a:latin typeface="Calibri" pitchFamily="34" charset="0"/>
-                <a:ea typeface="Calibri" pitchFamily="34" charset="-122"/>
-                <a:cs typeface="Calibri" pitchFamily="34" charset="-120"/>
+                <a:latin typeface="Times New Roman" pitchFamily="34" charset="0"/>
+                <a:ea typeface="Times New Roman" pitchFamily="34" charset="-122"/>
+                <a:cs typeface="Times New Roman" pitchFamily="34" charset="-120"/>
               </a:rPr>
               <a:t>The project contributes a reusable OpenGU-based audit pipeline alongside the findings themselves.</a:t>
             </a:r>
@@ -4879,7 +5004,7 @@
           <a:bodyPr wrap="square" lIns="0" tIns="0" rIns="0" bIns="0" rtlCol="0" anchor="ctr"/>
           <a:lstStyle/>
           <a:p>
-            <a:pPr marL="0" indent="0" algn="ctr">
+            <a:pPr algn="ctr" indent="0" marL="0">
               <a:buNone/>
             </a:pPr>
             <a:r>
@@ -4887,9 +5012,9 @@
                 <a:solidFill>
                   <a:srgbClr val="FFFFFF"/>
                 </a:solidFill>
-                <a:latin typeface="Georgia" pitchFamily="34" charset="0"/>
-                <a:ea typeface="Georgia" pitchFamily="34" charset="-122"/>
-                <a:cs typeface="Georgia" pitchFamily="34" charset="-120"/>
+                <a:latin typeface="Times New Roman" pitchFamily="34" charset="0"/>
+                <a:ea typeface="Times New Roman" pitchFamily="34" charset="-122"/>
+                <a:cs typeface="Times New Roman" pitchFamily="34" charset="-120"/>
               </a:rPr>
               <a:t>Thank you. Q&amp;A</a:t>
             </a:r>
@@ -4918,7 +5043,7 @@
           <a:bodyPr wrap="square" lIns="0" tIns="0" rIns="0" bIns="0" rtlCol="0" anchor="ctr"/>
           <a:lstStyle/>
           <a:p>
-            <a:pPr marL="0" indent="0">
+            <a:pPr indent="0" marL="0">
               <a:buNone/>
             </a:pPr>
             <a:r>
@@ -4926,9 +5051,9 @@
                 <a:solidFill>
                   <a:srgbClr val="F7F5F1"/>
                 </a:solidFill>
-                <a:latin typeface="Calibri" pitchFamily="34" charset="0"/>
-                <a:ea typeface="Calibri" pitchFamily="34" charset="-122"/>
-                <a:cs typeface="Calibri" pitchFamily="34" charset="-120"/>
+                <a:latin typeface="Times New Roman" pitchFamily="34" charset="0"/>
+                <a:ea typeface="Times New Roman" pitchFamily="34" charset="-122"/>
+                <a:cs typeface="Times New Roman" pitchFamily="34" charset="-120"/>
               </a:rPr>
               <a:t>EE5003 MSc Project | Liu Chengyu</a:t>
             </a:r>
@@ -4952,7 +5077,6 @@
         <a:solidFill>
           <a:srgbClr val="FFFFFF"/>
         </a:solidFill>
-        <a:effectLst/>
       </p:bgPr>
     </p:bg>
     <p:spTree>
@@ -4995,13 +5119,6 @@
             <a:prstDash val="solid"/>
           </a:ln>
         </p:spPr>
-        <p:txBody>
-          <a:bodyPr/>
-          <a:lstStyle/>
-          <a:p>
-            <a:endParaRPr lang="zh-CN" altLang="en-US"/>
-          </a:p>
-        </p:txBody>
       </p:sp>
       <p:sp>
         <p:nvSpPr>
@@ -5024,7 +5141,7 @@
           <a:bodyPr wrap="square" lIns="0" tIns="0" rIns="0" bIns="0" rtlCol="0" anchor="ctr"/>
           <a:lstStyle/>
           <a:p>
-            <a:pPr marL="0" indent="0">
+            <a:pPr indent="0" marL="0">
               <a:buNone/>
             </a:pPr>
             <a:r>
@@ -5032,9 +5149,9 @@
                 <a:solidFill>
                   <a:srgbClr val="FFFFFF"/>
                 </a:solidFill>
-                <a:latin typeface="Georgia" pitchFamily="34" charset="0"/>
-                <a:ea typeface="Georgia" pitchFamily="34" charset="-122"/>
-                <a:cs typeface="Georgia" pitchFamily="34" charset="-120"/>
+                <a:latin typeface="Times New Roman" pitchFamily="34" charset="0"/>
+                <a:ea typeface="Times New Roman" pitchFamily="34" charset="-122"/>
+                <a:cs typeface="Times New Roman" pitchFamily="34" charset="-120"/>
               </a:rPr>
               <a:t>Backup Appendix: Statistical Support</a:t>
             </a:r>
@@ -5063,7 +5180,7 @@
           <a:bodyPr wrap="square" lIns="0" tIns="0" rIns="0" bIns="0" rtlCol="0" anchor="ctr"/>
           <a:lstStyle/>
           <a:p>
-            <a:pPr marL="0" indent="0" algn="r">
+            <a:pPr algn="r" indent="0" marL="0">
               <a:buNone/>
             </a:pPr>
             <a:r>
@@ -5071,9 +5188,9 @@
                 <a:solidFill>
                   <a:srgbClr val="F7F5F1"/>
                 </a:solidFill>
-                <a:latin typeface="Calibri" pitchFamily="34" charset="0"/>
-                <a:ea typeface="Calibri" pitchFamily="34" charset="-122"/>
-                <a:cs typeface="Calibri" pitchFamily="34" charset="-120"/>
+                <a:latin typeface="Times New Roman" pitchFamily="34" charset="0"/>
+                <a:ea typeface="Times New Roman" pitchFamily="34" charset="-122"/>
+                <a:cs typeface="Times New Roman" pitchFamily="34" charset="-120"/>
               </a:rPr>
               <a:t>14 / 14</a:t>
             </a:r>
@@ -5102,7 +5219,7 @@
           <a:bodyPr wrap="square" lIns="0" tIns="0" rIns="0" bIns="0" rtlCol="0" anchor="ctr"/>
           <a:lstStyle/>
           <a:p>
-            <a:pPr marL="0" indent="0">
+            <a:pPr indent="0" marL="0">
               <a:buNone/>
             </a:pPr>
             <a:r>
@@ -5110,9 +5227,9 @@
                 <a:solidFill>
                   <a:srgbClr val="667085"/>
                 </a:solidFill>
-                <a:latin typeface="Calibri" pitchFamily="34" charset="0"/>
-                <a:ea typeface="Calibri" pitchFamily="34" charset="-122"/>
-                <a:cs typeface="Calibri" pitchFamily="34" charset="-120"/>
+                <a:latin typeface="Times New Roman" pitchFamily="34" charset="0"/>
+                <a:ea typeface="Times New Roman" pitchFamily="34" charset="-122"/>
+                <a:cs typeface="Times New Roman" pitchFamily="34" charset="-120"/>
               </a:rPr>
               <a:t>EE5003 MSc Project | Liu Chengyu</a:t>
             </a:r>
@@ -5141,7 +5258,7 @@
           <a:bodyPr wrap="square" lIns="0" tIns="0" rIns="0" bIns="0" rtlCol="0" anchor="ctr"/>
           <a:lstStyle/>
           <a:p>
-            <a:pPr marL="0" indent="0" algn="r">
+            <a:pPr algn="r" indent="0" marL="0">
               <a:buNone/>
             </a:pPr>
             <a:r>
@@ -5149,9 +5266,9 @@
                 <a:solidFill>
                   <a:srgbClr val="667085"/>
                 </a:solidFill>
-                <a:latin typeface="Calibri" pitchFamily="34" charset="0"/>
-                <a:ea typeface="Calibri" pitchFamily="34" charset="-122"/>
-                <a:cs typeface="Calibri" pitchFamily="34" charset="-120"/>
+                <a:latin typeface="Times New Roman" pitchFamily="34" charset="0"/>
+                <a:ea typeface="Times New Roman" pitchFamily="34" charset="-122"/>
+                <a:cs typeface="Times New Roman" pitchFamily="34" charset="-120"/>
               </a:rPr>
               <a:t>Approximate Graph Unlearning Audit</a:t>
             </a:r>
@@ -5161,14 +5278,14 @@
       </p:sp>
       <p:pic>
         <p:nvPicPr>
-          <p:cNvPr id="7" name="Image 0" descr="H:\project\OpenGU\GULib-master\report\0417_5003report\figures\paper_figures\FIG-4a_Significance.png"/>
+          <p:cNvPr id="7" name="Image 0" descr="H:\project\OpenGU\GULib-master\report\0417_5003report\figures\paper_figures\FIG-4a_Significance.png">    </p:cNvPr>
           <p:cNvPicPr>
             <a:picLocks noChangeAspect="1"/>
           </p:cNvPicPr>
           <p:nvPr/>
         </p:nvPicPr>
         <p:blipFill>
-          <a:blip r:embed="rId3"/>
+          <a:blip r:embed="rId1"/>
           <a:stretch>
             <a:fillRect/>
           </a:stretch>
@@ -5185,14 +5302,14 @@
       </p:pic>
       <p:pic>
         <p:nvPicPr>
-          <p:cNvPr id="8" name="Image 1" descr="H:\project\OpenGU\GULib-master\report\0417_5003report\figures\paper_figures\FIG-4b_Effect.png"/>
+          <p:cNvPr id="8" name="Image 1" descr="H:\project\OpenGU\GULib-master\report\0417_5003report\figures\paper_figures\FIG-4b_Effect.png">    </p:cNvPr>
           <p:cNvPicPr>
             <a:picLocks noChangeAspect="1"/>
           </p:cNvPicPr>
           <p:nvPr/>
         </p:nvPicPr>
         <p:blipFill>
-          <a:blip r:embed="rId4"/>
+          <a:blip r:embed="rId2"/>
           <a:stretch>
             <a:fillRect/>
           </a:stretch>
@@ -5228,7 +5345,7 @@
           <a:bodyPr wrap="square" lIns="0" tIns="0" rIns="0" bIns="0" rtlCol="0" anchor="ctr"/>
           <a:lstStyle/>
           <a:p>
-            <a:pPr marL="0" indent="0">
+            <a:pPr indent="0" marL="0">
               <a:buNone/>
             </a:pPr>
             <a:r>
@@ -5236,9 +5353,9 @@
                 <a:solidFill>
                   <a:srgbClr val="667085"/>
                 </a:solidFill>
-                <a:latin typeface="Calibri" pitchFamily="34" charset="0"/>
-                <a:ea typeface="Calibri" pitchFamily="34" charset="-122"/>
-                <a:cs typeface="Calibri" pitchFamily="34" charset="-120"/>
+                <a:latin typeface="Times New Roman" pitchFamily="34" charset="0"/>
+                <a:ea typeface="Times New Roman" pitchFamily="34" charset="-122"/>
+                <a:cs typeface="Times New Roman" pitchFamily="34" charset="-120"/>
               </a:rPr>
               <a:t>Figure 4a. -log10(p) support against random deletion.</a:t>
             </a:r>
@@ -5267,7 +5384,7 @@
           <a:bodyPr wrap="square" lIns="0" tIns="0" rIns="0" bIns="0" rtlCol="0" anchor="ctr"/>
           <a:lstStyle/>
           <a:p>
-            <a:pPr marL="0" indent="0">
+            <a:pPr indent="0" marL="0">
               <a:buNone/>
             </a:pPr>
             <a:r>
@@ -5275,9 +5392,9 @@
                 <a:solidFill>
                   <a:srgbClr val="667085"/>
                 </a:solidFill>
-                <a:latin typeface="Calibri" pitchFamily="34" charset="0"/>
-                <a:ea typeface="Calibri" pitchFamily="34" charset="-122"/>
-                <a:cs typeface="Calibri" pitchFamily="34" charset="-120"/>
+                <a:latin typeface="Times New Roman" pitchFamily="34" charset="0"/>
+                <a:ea typeface="Times New Roman" pitchFamily="34" charset="-122"/>
+                <a:cs typeface="Times New Roman" pitchFamily="34" charset="-120"/>
               </a:rPr>
               <a:t>Figure 4b. Effect size beyond random deletion.</a:t>
             </a:r>
@@ -5301,7 +5418,6 @@
         <a:solidFill>
           <a:srgbClr val="F7F5F1"/>
         </a:solidFill>
-        <a:effectLst/>
       </p:bgPr>
     </p:bg>
     <p:spTree>
@@ -5344,13 +5460,6 @@
             <a:prstDash val="solid"/>
           </a:ln>
         </p:spPr>
-        <p:txBody>
-          <a:bodyPr/>
-          <a:lstStyle/>
-          <a:p>
-            <a:endParaRPr lang="zh-CN" altLang="en-US"/>
-          </a:p>
-        </p:txBody>
       </p:sp>
       <p:sp>
         <p:nvSpPr>
@@ -5373,7 +5482,7 @@
           <a:bodyPr wrap="square" lIns="0" tIns="0" rIns="0" bIns="0" rtlCol="0" anchor="ctr"/>
           <a:lstStyle/>
           <a:p>
-            <a:pPr marL="0" indent="0">
+            <a:pPr indent="0" marL="0">
               <a:buNone/>
             </a:pPr>
             <a:r>
@@ -5381,9 +5490,9 @@
                 <a:solidFill>
                   <a:srgbClr val="FFFFFF"/>
                 </a:solidFill>
-                <a:latin typeface="Georgia" pitchFamily="34" charset="0"/>
-                <a:ea typeface="Georgia" pitchFamily="34" charset="-122"/>
-                <a:cs typeface="Georgia" pitchFamily="34" charset="-120"/>
+                <a:latin typeface="Times New Roman" pitchFamily="34" charset="0"/>
+                <a:ea typeface="Times New Roman" pitchFamily="34" charset="-122"/>
+                <a:cs typeface="Times New Roman" pitchFamily="34" charset="-120"/>
               </a:rPr>
               <a:t>Why Graph Unlearning Matters</a:t>
             </a:r>
@@ -5412,7 +5521,7 @@
           <a:bodyPr wrap="square" lIns="0" tIns="0" rIns="0" bIns="0" rtlCol="0" anchor="ctr"/>
           <a:lstStyle/>
           <a:p>
-            <a:pPr marL="0" indent="0" algn="r">
+            <a:pPr algn="r" indent="0" marL="0">
               <a:buNone/>
             </a:pPr>
             <a:r>
@@ -5420,9 +5529,9 @@
                 <a:solidFill>
                   <a:srgbClr val="F7F5F1"/>
                 </a:solidFill>
-                <a:latin typeface="Calibri" pitchFamily="34" charset="0"/>
-                <a:ea typeface="Calibri" pitchFamily="34" charset="-122"/>
-                <a:cs typeface="Calibri" pitchFamily="34" charset="-120"/>
+                <a:latin typeface="Times New Roman" pitchFamily="34" charset="0"/>
+                <a:ea typeface="Times New Roman" pitchFamily="34" charset="-122"/>
+                <a:cs typeface="Times New Roman" pitchFamily="34" charset="-120"/>
               </a:rPr>
               <a:t>02 / 14</a:t>
             </a:r>
@@ -5451,7 +5560,7 @@
           <a:bodyPr wrap="square" lIns="0" tIns="0" rIns="0" bIns="0" rtlCol="0" anchor="ctr"/>
           <a:lstStyle/>
           <a:p>
-            <a:pPr marL="0" indent="0">
+            <a:pPr indent="0" marL="0">
               <a:buNone/>
             </a:pPr>
             <a:r>
@@ -5459,9 +5568,9 @@
                 <a:solidFill>
                   <a:srgbClr val="667085"/>
                 </a:solidFill>
-                <a:latin typeface="Calibri" pitchFamily="34" charset="0"/>
-                <a:ea typeface="Calibri" pitchFamily="34" charset="-122"/>
-                <a:cs typeface="Calibri" pitchFamily="34" charset="-120"/>
+                <a:latin typeface="Times New Roman" pitchFamily="34" charset="0"/>
+                <a:ea typeface="Times New Roman" pitchFamily="34" charset="-122"/>
+                <a:cs typeface="Times New Roman" pitchFamily="34" charset="-120"/>
               </a:rPr>
               <a:t>EE5003 MSc Project | Liu Chengyu</a:t>
             </a:r>
@@ -5490,7 +5599,7 @@
           <a:bodyPr wrap="square" lIns="0" tIns="0" rIns="0" bIns="0" rtlCol="0" anchor="ctr"/>
           <a:lstStyle/>
           <a:p>
-            <a:pPr marL="0" indent="0" algn="r">
+            <a:pPr algn="r" indent="0" marL="0">
               <a:buNone/>
             </a:pPr>
             <a:r>
@@ -5498,9 +5607,9 @@
                 <a:solidFill>
                   <a:srgbClr val="667085"/>
                 </a:solidFill>
-                <a:latin typeface="Calibri" pitchFamily="34" charset="0"/>
-                <a:ea typeface="Calibri" pitchFamily="34" charset="-122"/>
-                <a:cs typeface="Calibri" pitchFamily="34" charset="-120"/>
+                <a:latin typeface="Times New Roman" pitchFamily="34" charset="0"/>
+                <a:ea typeface="Times New Roman" pitchFamily="34" charset="-122"/>
+                <a:cs typeface="Times New Roman" pitchFamily="34" charset="-120"/>
               </a:rPr>
               <a:t>Approximate Graph Unlearning Audit</a:t>
             </a:r>
@@ -5517,33 +5626,35 @@
         <p:spPr>
           <a:xfrm>
             <a:off x="594360" y="768096"/>
-            <a:ext cx="5669280" cy="228600"/>
-          </a:xfrm>
-          <a:prstGeom prst="rect">
-            <a:avLst/>
-          </a:prstGeom>
-          <a:noFill/>
-          <a:ln/>
-        </p:spPr>
-        <p:txBody>
-          <a:bodyPr wrap="square" lIns="0" tIns="0" rIns="0" bIns="0" rtlCol="0" anchor="ctr"/>
-          <a:lstStyle/>
-          <a:p>
-            <a:pPr marL="0" indent="0">
-              <a:buNone/>
-            </a:pPr>
-            <a:r>
-              <a:rPr lang="en-US" sz="1900" b="1" dirty="0">
+            <a:ext cx="5486400" cy="530352"/>
+          </a:xfrm>
+          <a:prstGeom prst="rect">
+            <a:avLst/>
+          </a:prstGeom>
+          <a:noFill/>
+          <a:ln/>
+        </p:spPr>
+        <p:txBody>
+          <a:bodyPr wrap="square" lIns="0" tIns="0" rIns="0" bIns="0" rtlCol="0" anchor="ctr">
+            <a:normAutofit/>
+          </a:bodyPr>
+          <a:lstStyle/>
+          <a:p>
+            <a:pPr indent="0" marL="0">
+              <a:buNone/>
+            </a:pPr>
+            <a:r>
+              <a:rPr lang="en-US" sz="1720" b="1" dirty="0">
                 <a:solidFill>
                   <a:srgbClr val="223A5E"/>
                 </a:solidFill>
-                <a:latin typeface="Georgia" pitchFamily="34" charset="0"/>
-                <a:ea typeface="Georgia" pitchFamily="34" charset="-122"/>
-                <a:cs typeface="Georgia" pitchFamily="34" charset="-120"/>
+                <a:latin typeface="Times New Roman" pitchFamily="34" charset="0"/>
+                <a:ea typeface="Times New Roman" pitchFamily="34" charset="-122"/>
+                <a:cs typeface="Times New Roman" pitchFamily="34" charset="-120"/>
               </a:rPr>
               <a:t>Deletion requests are operationally plausible, and approximation turns them into a security question.</a:t>
             </a:r>
-            <a:endParaRPr lang="en-US" sz="1900" dirty="0"/>
+            <a:endParaRPr lang="en-US" sz="1720" dirty="0"/>
           </a:p>
         </p:txBody>
       </p:sp>
@@ -5555,12 +5666,12 @@
         </p:nvSpPr>
         <p:spPr>
           <a:xfrm>
-            <a:off x="594360" y="1280160"/>
-            <a:ext cx="2468880" cy="2697480"/>
+            <a:off x="594360" y="1353312"/>
+            <a:ext cx="2468880" cy="2267712"/>
           </a:xfrm>
           <a:prstGeom prst="roundRect">
             <a:avLst>
-              <a:gd name="adj" fmla="val 1852"/>
+              <a:gd name="adj" fmla="val 2016"/>
             </a:avLst>
           </a:prstGeom>
           <a:solidFill>
@@ -5573,13 +5684,6 @@
             <a:prstDash val="solid"/>
           </a:ln>
         </p:spPr>
-        <p:txBody>
-          <a:bodyPr/>
-          <a:lstStyle/>
-          <a:p>
-            <a:endParaRPr lang="zh-CN" altLang="en-US"/>
-          </a:p>
-        </p:txBody>
       </p:sp>
       <p:sp>
         <p:nvSpPr>
@@ -5589,47 +5693,8 @@
         </p:nvSpPr>
         <p:spPr>
           <a:xfrm>
-            <a:off x="731520" y="1371600"/>
-            <a:ext cx="2194560" cy="182880"/>
-          </a:xfrm>
-          <a:prstGeom prst="rect">
-            <a:avLst/>
-          </a:prstGeom>
-          <a:noFill/>
-          <a:ln/>
-        </p:spPr>
-        <p:txBody>
-          <a:bodyPr wrap="square" lIns="0" tIns="0" rIns="0" bIns="0" rtlCol="0" anchor="ctr"/>
-          <a:lstStyle/>
-          <a:p>
-            <a:pPr marL="0" indent="0">
-              <a:buNone/>
-            </a:pPr>
-            <a:r>
-              <a:rPr lang="en-US" sz="1700" b="1" dirty="0">
-                <a:solidFill>
-                  <a:srgbClr val="223A5E"/>
-                </a:solidFill>
-                <a:latin typeface="Georgia" pitchFamily="34" charset="0"/>
-                <a:ea typeface="Georgia" pitchFamily="34" charset="-122"/>
-                <a:cs typeface="Georgia" pitchFamily="34" charset="-120"/>
-              </a:rPr>
-              <a:t>Real deletion requests</a:t>
-            </a:r>
-            <a:endParaRPr lang="en-US" sz="1700" dirty="0"/>
-          </a:p>
-        </p:txBody>
-      </p:sp>
-      <p:sp>
-        <p:nvSpPr>
-          <p:cNvPr id="10" name="Text 8"/>
-          <p:cNvSpPr/>
-          <p:nvPr/>
-        </p:nvSpPr>
-        <p:spPr>
-          <a:xfrm>
-            <a:off x="731520" y="1618488"/>
-            <a:ext cx="2194560" cy="2267712"/>
+            <a:off x="731520" y="1463040"/>
+            <a:ext cx="2194560" cy="420624"/>
           </a:xfrm>
           <a:prstGeom prst="rect">
             <a:avLst/>
@@ -5643,21 +5708,62 @@
           </a:bodyPr>
           <a:lstStyle/>
           <a:p>
-            <a:pPr marL="0" indent="0">
-              <a:buNone/>
-            </a:pPr>
-            <a:r>
-              <a:rPr lang="en-US" sz="1220" dirty="0">
+            <a:pPr indent="0" marL="0">
+              <a:buNone/>
+            </a:pPr>
+            <a:r>
+              <a:rPr lang="en-US" sz="1580" b="1" dirty="0">
+                <a:solidFill>
+                  <a:srgbClr val="223A5E"/>
+                </a:solidFill>
+                <a:latin typeface="Times New Roman" pitchFamily="34" charset="0"/>
+                <a:ea typeface="Times New Roman" pitchFamily="34" charset="-122"/>
+                <a:cs typeface="Times New Roman" pitchFamily="34" charset="-120"/>
+              </a:rPr>
+              <a:t>Real deletion requests</a:t>
+            </a:r>
+            <a:endParaRPr lang="en-US" sz="1580" dirty="0"/>
+          </a:p>
+        </p:txBody>
+      </p:sp>
+      <p:sp>
+        <p:nvSpPr>
+          <p:cNvPr id="10" name="Text 8"/>
+          <p:cNvSpPr/>
+          <p:nvPr/>
+        </p:nvSpPr>
+        <p:spPr>
+          <a:xfrm>
+            <a:off x="731520" y="2377440"/>
+            <a:ext cx="2194560" cy="1106424"/>
+          </a:xfrm>
+          <a:prstGeom prst="rect">
+            <a:avLst/>
+          </a:prstGeom>
+          <a:noFill/>
+          <a:ln/>
+        </p:spPr>
+        <p:txBody>
+          <a:bodyPr wrap="square" lIns="0" tIns="0" rIns="0" bIns="0" rtlCol="0" anchor="ctr">
+            <a:normAutofit/>
+          </a:bodyPr>
+          <a:lstStyle/>
+          <a:p>
+            <a:pPr indent="0" marL="0">
+              <a:buNone/>
+            </a:pPr>
+            <a:r>
+              <a:rPr lang="en-US" sz="1180" dirty="0">
                 <a:solidFill>
                   <a:srgbClr val="1E2630"/>
                 </a:solidFill>
-                <a:latin typeface="Calibri" pitchFamily="34" charset="0"/>
-                <a:ea typeface="Calibri" pitchFamily="34" charset="-122"/>
-                <a:cs typeface="Calibri" pitchFamily="34" charset="-120"/>
+                <a:latin typeface="Times New Roman" pitchFamily="34" charset="0"/>
+                <a:ea typeface="Times New Roman" pitchFamily="34" charset="-122"/>
+                <a:cs typeface="Times New Roman" pitchFamily="34" charset="-120"/>
               </a:rPr>
               <a:t>User-level or node-level removal is realistic in citation, social, and recommendation graphs.</a:t>
             </a:r>
-            <a:endParaRPr lang="en-US" sz="1220" dirty="0"/>
+            <a:endParaRPr lang="en-US" sz="1180" dirty="0"/>
           </a:p>
         </p:txBody>
       </p:sp>
@@ -5669,12 +5775,12 @@
         </p:nvSpPr>
         <p:spPr>
           <a:xfrm>
-            <a:off x="3337560" y="1280160"/>
-            <a:ext cx="2468880" cy="2697480"/>
+            <a:off x="3337560" y="1353312"/>
+            <a:ext cx="2468880" cy="2267712"/>
           </a:xfrm>
           <a:prstGeom prst="roundRect">
             <a:avLst>
-              <a:gd name="adj" fmla="val 1852"/>
+              <a:gd name="adj" fmla="val 2016"/>
             </a:avLst>
           </a:prstGeom>
           <a:solidFill>
@@ -5687,13 +5793,6 @@
             <a:prstDash val="solid"/>
           </a:ln>
         </p:spPr>
-        <p:txBody>
-          <a:bodyPr/>
-          <a:lstStyle/>
-          <a:p>
-            <a:endParaRPr lang="zh-CN" altLang="en-US"/>
-          </a:p>
-        </p:txBody>
       </p:sp>
       <p:sp>
         <p:nvSpPr>
@@ -5703,47 +5802,8 @@
         </p:nvSpPr>
         <p:spPr>
           <a:xfrm>
-            <a:off x="3474720" y="1371600"/>
-            <a:ext cx="2194560" cy="182880"/>
-          </a:xfrm>
-          <a:prstGeom prst="rect">
-            <a:avLst/>
-          </a:prstGeom>
-          <a:noFill/>
-          <a:ln/>
-        </p:spPr>
-        <p:txBody>
-          <a:bodyPr wrap="square" lIns="0" tIns="0" rIns="0" bIns="0" rtlCol="0" anchor="ctr"/>
-          <a:lstStyle/>
-          <a:p>
-            <a:pPr marL="0" indent="0">
-              <a:buNone/>
-            </a:pPr>
-            <a:r>
-              <a:rPr lang="en-US" sz="1700" b="1" dirty="0">
-                <a:solidFill>
-                  <a:srgbClr val="223A5E"/>
-                </a:solidFill>
-                <a:latin typeface="Georgia" pitchFamily="34" charset="0"/>
-                <a:ea typeface="Georgia" pitchFamily="34" charset="-122"/>
-                <a:cs typeface="Georgia" pitchFamily="34" charset="-120"/>
-              </a:rPr>
-              <a:t>Approximate unlearning</a:t>
-            </a:r>
-            <a:endParaRPr lang="en-US" sz="1700" dirty="0"/>
-          </a:p>
-        </p:txBody>
-      </p:sp>
-      <p:sp>
-        <p:nvSpPr>
-          <p:cNvPr id="13" name="Text 11"/>
-          <p:cNvSpPr/>
-          <p:nvPr/>
-        </p:nvSpPr>
-        <p:spPr>
-          <a:xfrm>
-            <a:off x="3474720" y="1618488"/>
-            <a:ext cx="2194560" cy="2267712"/>
+            <a:off x="3474720" y="1463040"/>
+            <a:ext cx="2194560" cy="420624"/>
           </a:xfrm>
           <a:prstGeom prst="rect">
             <a:avLst/>
@@ -5757,21 +5817,79 @@
           </a:bodyPr>
           <a:lstStyle/>
           <a:p>
-            <a:pPr marL="0" indent="0">
-              <a:buNone/>
-            </a:pPr>
-            <a:r>
-              <a:rPr lang="en-US" sz="1220" dirty="0">
+            <a:pPr indent="0" marL="0">
+              <a:buNone/>
+            </a:pPr>
+            <a:r>
+              <a:rPr lang="en-US" sz="1580" b="1" dirty="0">
+                <a:solidFill>
+                  <a:srgbClr val="223A5E"/>
+                </a:solidFill>
+                <a:latin typeface="Times New Roman" pitchFamily="34" charset="0"/>
+                <a:ea typeface="Times New Roman" pitchFamily="34" charset="-122"/>
+                <a:cs typeface="Times New Roman" pitchFamily="34" charset="-120"/>
+              </a:rPr>
+              <a:t>Approximate</a:t>
+            </a:r>
+            <a:endParaRPr lang="en-US" sz="1580" dirty="0"/>
+          </a:p>
+          <a:p>
+            <a:pPr indent="0" marL="0">
+              <a:buNone/>
+            </a:pPr>
+            <a:r>
+              <a:rPr lang="en-US" sz="1580" b="1" dirty="0">
+                <a:solidFill>
+                  <a:srgbClr val="223A5E"/>
+                </a:solidFill>
+                <a:latin typeface="Times New Roman" pitchFamily="34" charset="0"/>
+                <a:ea typeface="Times New Roman" pitchFamily="34" charset="-122"/>
+                <a:cs typeface="Times New Roman" pitchFamily="34" charset="-120"/>
+              </a:rPr>
+              <a:t>unlearning</a:t>
+            </a:r>
+            <a:endParaRPr lang="en-US" sz="1580" dirty="0"/>
+          </a:p>
+        </p:txBody>
+      </p:sp>
+      <p:sp>
+        <p:nvSpPr>
+          <p:cNvPr id="13" name="Text 11"/>
+          <p:cNvSpPr/>
+          <p:nvPr/>
+        </p:nvSpPr>
+        <p:spPr>
+          <a:xfrm>
+            <a:off x="3474720" y="2377440"/>
+            <a:ext cx="2194560" cy="1106424"/>
+          </a:xfrm>
+          <a:prstGeom prst="rect">
+            <a:avLst/>
+          </a:prstGeom>
+          <a:noFill/>
+          <a:ln/>
+        </p:spPr>
+        <p:txBody>
+          <a:bodyPr wrap="square" lIns="0" tIns="0" rIns="0" bIns="0" rtlCol="0" anchor="ctr">
+            <a:normAutofit/>
+          </a:bodyPr>
+          <a:lstStyle/>
+          <a:p>
+            <a:pPr indent="0" marL="0">
+              <a:buNone/>
+            </a:pPr>
+            <a:r>
+              <a:rPr lang="en-US" sz="1180" dirty="0">
                 <a:solidFill>
                   <a:srgbClr val="1E2630"/>
                 </a:solidFill>
-                <a:latin typeface="Calibri" pitchFamily="34" charset="0"/>
-                <a:ea typeface="Calibri" pitchFamily="34" charset="-122"/>
-                <a:cs typeface="Calibri" pitchFamily="34" charset="-120"/>
+                <a:latin typeface="Times New Roman" pitchFamily="34" charset="0"/>
+                <a:ea typeface="Times New Roman" pitchFamily="34" charset="-122"/>
+                <a:cs typeface="Times New Roman" pitchFamily="34" charset="-120"/>
               </a:rPr>
               <a:t>Exact retraining is expensive, so practical systems use approximation.</a:t>
             </a:r>
-            <a:endParaRPr lang="en-US" sz="1220" dirty="0"/>
+            <a:endParaRPr lang="en-US" sz="1180" dirty="0"/>
           </a:p>
         </p:txBody>
       </p:sp>
@@ -5783,12 +5901,12 @@
         </p:nvSpPr>
         <p:spPr>
           <a:xfrm>
-            <a:off x="6080760" y="1280160"/>
-            <a:ext cx="2468880" cy="2697480"/>
+            <a:off x="6080760" y="1353312"/>
+            <a:ext cx="2468880" cy="2267712"/>
           </a:xfrm>
           <a:prstGeom prst="roundRect">
             <a:avLst>
-              <a:gd name="adj" fmla="val 1852"/>
+              <a:gd name="adj" fmla="val 2016"/>
             </a:avLst>
           </a:prstGeom>
           <a:solidFill>
@@ -5801,13 +5919,6 @@
             <a:prstDash val="solid"/>
           </a:ln>
         </p:spPr>
-        <p:txBody>
-          <a:bodyPr/>
-          <a:lstStyle/>
-          <a:p>
-            <a:endParaRPr lang="zh-CN" altLang="en-US"/>
-          </a:p>
-        </p:txBody>
       </p:sp>
       <p:sp>
         <p:nvSpPr>
@@ -5817,47 +5928,8 @@
         </p:nvSpPr>
         <p:spPr>
           <a:xfrm>
-            <a:off x="6217920" y="1371600"/>
-            <a:ext cx="2194560" cy="182880"/>
-          </a:xfrm>
-          <a:prstGeom prst="rect">
-            <a:avLst/>
-          </a:prstGeom>
-          <a:noFill/>
-          <a:ln/>
-        </p:spPr>
-        <p:txBody>
-          <a:bodyPr wrap="square" lIns="0" tIns="0" rIns="0" bIns="0" rtlCol="0" anchor="ctr"/>
-          <a:lstStyle/>
-          <a:p>
-            <a:pPr marL="0" indent="0">
-              <a:buNone/>
-            </a:pPr>
-            <a:r>
-              <a:rPr lang="en-US" sz="1700" b="1" dirty="0">
-                <a:solidFill>
-                  <a:srgbClr val="223A5E"/>
-                </a:solidFill>
-                <a:latin typeface="Georgia" pitchFamily="34" charset="0"/>
-                <a:ea typeface="Georgia" pitchFamily="34" charset="-122"/>
-                <a:cs typeface="Georgia" pitchFamily="34" charset="-120"/>
-              </a:rPr>
-              <a:t>Attack surface</a:t>
-            </a:r>
-            <a:endParaRPr lang="en-US" sz="1700" dirty="0"/>
-          </a:p>
-        </p:txBody>
-      </p:sp>
-      <p:sp>
-        <p:nvSpPr>
-          <p:cNvPr id="16" name="Text 14"/>
-          <p:cNvSpPr/>
-          <p:nvPr/>
-        </p:nvSpPr>
-        <p:spPr>
-          <a:xfrm>
-            <a:off x="6217920" y="1618488"/>
-            <a:ext cx="2194560" cy="2267712"/>
+            <a:off x="6217920" y="1463040"/>
+            <a:ext cx="2194560" cy="420624"/>
           </a:xfrm>
           <a:prstGeom prst="rect">
             <a:avLst/>
@@ -5871,21 +5943,62 @@
           </a:bodyPr>
           <a:lstStyle/>
           <a:p>
-            <a:pPr marL="0" indent="0">
-              <a:buNone/>
-            </a:pPr>
-            <a:r>
-              <a:rPr lang="en-US" sz="1220" dirty="0">
+            <a:pPr indent="0" marL="0">
+              <a:buNone/>
+            </a:pPr>
+            <a:r>
+              <a:rPr lang="en-US" sz="1580" b="1" dirty="0">
+                <a:solidFill>
+                  <a:srgbClr val="223A5E"/>
+                </a:solidFill>
+                <a:latin typeface="Times New Roman" pitchFamily="34" charset="0"/>
+                <a:ea typeface="Times New Roman" pitchFamily="34" charset="-122"/>
+                <a:cs typeface="Times New Roman" pitchFamily="34" charset="-120"/>
+              </a:rPr>
+              <a:t>Attack surface</a:t>
+            </a:r>
+            <a:endParaRPr lang="en-US" sz="1580" dirty="0"/>
+          </a:p>
+        </p:txBody>
+      </p:sp>
+      <p:sp>
+        <p:nvSpPr>
+          <p:cNvPr id="16" name="Text 14"/>
+          <p:cNvSpPr/>
+          <p:nvPr/>
+        </p:nvSpPr>
+        <p:spPr>
+          <a:xfrm>
+            <a:off x="6217920" y="2377440"/>
+            <a:ext cx="2194560" cy="1106424"/>
+          </a:xfrm>
+          <a:prstGeom prst="rect">
+            <a:avLst/>
+          </a:prstGeom>
+          <a:noFill/>
+          <a:ln/>
+        </p:spPr>
+        <p:txBody>
+          <a:bodyPr wrap="square" lIns="0" tIns="0" rIns="0" bIns="0" rtlCol="0" anchor="ctr">
+            <a:normAutofit/>
+          </a:bodyPr>
+          <a:lstStyle/>
+          <a:p>
+            <a:pPr indent="0" marL="0">
+              <a:buNone/>
+            </a:pPr>
+            <a:r>
+              <a:rPr lang="en-US" sz="1180" dirty="0">
                 <a:solidFill>
                   <a:srgbClr val="1E2630"/>
                 </a:solidFill>
-                <a:latin typeface="Calibri" pitchFamily="34" charset="0"/>
-                <a:ea typeface="Calibri" pitchFamily="34" charset="-122"/>
-                <a:cs typeface="Calibri" pitchFamily="34" charset="-120"/>
+                <a:latin typeface="Times New Roman" pitchFamily="34" charset="0"/>
+                <a:ea typeface="Times New Roman" pitchFamily="34" charset="-122"/>
+                <a:cs typeface="Times New Roman" pitchFamily="34" charset="-120"/>
               </a:rPr>
               <a:t>A malicious requester may exploit the deletion interface itself by choosing harmful targets.</a:t>
             </a:r>
-            <a:endParaRPr lang="en-US" sz="1220" dirty="0"/>
+            <a:endParaRPr lang="en-US" sz="1180" dirty="0"/>
           </a:p>
         </p:txBody>
       </p:sp>
@@ -5897,12 +6010,12 @@
         </p:nvSpPr>
         <p:spPr>
           <a:xfrm>
-            <a:off x="6583680" y="4160520"/>
-            <a:ext cx="1783080" cy="566928"/>
+            <a:off x="6565392" y="3822192"/>
+            <a:ext cx="1938528" cy="749808"/>
           </a:xfrm>
           <a:prstGeom prst="roundRect">
             <a:avLst>
-              <a:gd name="adj" fmla="val 8065"/>
+              <a:gd name="adj" fmla="val 6098"/>
             </a:avLst>
           </a:prstGeom>
           <a:solidFill>
@@ -5917,13 +6030,6 @@
             <a:prstDash val="solid"/>
           </a:ln>
         </p:spPr>
-        <p:txBody>
-          <a:bodyPr/>
-          <a:lstStyle/>
-          <a:p>
-            <a:endParaRPr lang="zh-CN" altLang="en-US"/>
-          </a:p>
-        </p:txBody>
       </p:sp>
       <p:sp>
         <p:nvSpPr>
@@ -5933,8 +6039,8 @@
         </p:nvSpPr>
         <p:spPr>
           <a:xfrm>
-            <a:off x="6656832" y="4270248"/>
-            <a:ext cx="1636776" cy="201168"/>
+            <a:off x="6638544" y="3931920"/>
+            <a:ext cx="1792224" cy="201168"/>
           </a:xfrm>
           <a:prstGeom prst="rect">
             <a:avLst/>
@@ -5946,7 +6052,7 @@
           <a:bodyPr wrap="square" lIns="0" tIns="0" rIns="0" bIns="0" rtlCol="0" anchor="ctr"/>
           <a:lstStyle/>
           <a:p>
-            <a:pPr marL="0" indent="0" algn="ctr">
+            <a:pPr algn="ctr" indent="0" marL="0">
               <a:buNone/>
             </a:pPr>
             <a:r>
@@ -5954,9 +6060,9 @@
                 <a:solidFill>
                   <a:srgbClr val="FFFFFF"/>
                 </a:solidFill>
-                <a:latin typeface="Georgia" pitchFamily="34" charset="0"/>
-                <a:ea typeface="Georgia" pitchFamily="34" charset="-122"/>
-                <a:cs typeface="Georgia" pitchFamily="34" charset="-120"/>
+                <a:latin typeface="Times New Roman" pitchFamily="34" charset="0"/>
+                <a:ea typeface="Times New Roman" pitchFamily="34" charset="-122"/>
+                <a:cs typeface="Times New Roman" pitchFamily="34" charset="-120"/>
               </a:rPr>
               <a:t>Delete</a:t>
             </a:r>
@@ -5972,8 +6078,8 @@
         </p:nvSpPr>
         <p:spPr>
           <a:xfrm>
-            <a:off x="6656832" y="4544568"/>
-            <a:ext cx="1636776" cy="137160"/>
+            <a:off x="6638544" y="4206240"/>
+            <a:ext cx="1792224" cy="320040"/>
           </a:xfrm>
           <a:prstGeom prst="rect">
             <a:avLst/>
@@ -5987,7 +6093,7 @@
           </a:bodyPr>
           <a:lstStyle/>
           <a:p>
-            <a:pPr marL="0" indent="0" algn="ctr">
+            <a:pPr algn="ctr" indent="0" marL="0">
               <a:buNone/>
             </a:pPr>
             <a:r>
@@ -5995,9 +6101,9 @@
                 <a:solidFill>
                   <a:srgbClr val="F7F5F1"/>
                 </a:solidFill>
-                <a:latin typeface="Calibri" pitchFamily="34" charset="0"/>
-                <a:ea typeface="Calibri" pitchFamily="34" charset="-122"/>
-                <a:cs typeface="Calibri" pitchFamily="34" charset="-120"/>
+                <a:latin typeface="Times New Roman" pitchFamily="34" charset="0"/>
+                <a:ea typeface="Times New Roman" pitchFamily="34" charset="-122"/>
+                <a:cs typeface="Times New Roman" pitchFamily="34" charset="-120"/>
               </a:rPr>
               <a:t>Compliance tool and attack interface</a:t>
             </a:r>
@@ -6021,7 +6127,6 @@
         <a:solidFill>
           <a:srgbClr val="FFFFFF"/>
         </a:solidFill>
-        <a:effectLst/>
       </p:bgPr>
     </p:bg>
     <p:spTree>
@@ -6064,13 +6169,6 @@
             <a:prstDash val="solid"/>
           </a:ln>
         </p:spPr>
-        <p:txBody>
-          <a:bodyPr/>
-          <a:lstStyle/>
-          <a:p>
-            <a:endParaRPr lang="zh-CN" altLang="en-US"/>
-          </a:p>
-        </p:txBody>
       </p:sp>
       <p:sp>
         <p:nvSpPr>
@@ -6093,7 +6191,7 @@
           <a:bodyPr wrap="square" lIns="0" tIns="0" rIns="0" bIns="0" rtlCol="0" anchor="ctr"/>
           <a:lstStyle/>
           <a:p>
-            <a:pPr marL="0" indent="0">
+            <a:pPr indent="0" marL="0">
               <a:buNone/>
             </a:pPr>
             <a:r>
@@ -6101,9 +6199,9 @@
                 <a:solidFill>
                   <a:srgbClr val="FFFFFF"/>
                 </a:solidFill>
-                <a:latin typeface="Georgia" pitchFamily="34" charset="0"/>
-                <a:ea typeface="Georgia" pitchFamily="34" charset="-122"/>
-                <a:cs typeface="Georgia" pitchFamily="34" charset="-120"/>
+                <a:latin typeface="Times New Roman" pitchFamily="34" charset="0"/>
+                <a:ea typeface="Times New Roman" pitchFamily="34" charset="-122"/>
+                <a:cs typeface="Times New Roman" pitchFamily="34" charset="-120"/>
               </a:rPr>
               <a:t>Research Question And Objectives</a:t>
             </a:r>
@@ -6132,7 +6230,7 @@
           <a:bodyPr wrap="square" lIns="0" tIns="0" rIns="0" bIns="0" rtlCol="0" anchor="ctr"/>
           <a:lstStyle/>
           <a:p>
-            <a:pPr marL="0" indent="0" algn="r">
+            <a:pPr algn="r" indent="0" marL="0">
               <a:buNone/>
             </a:pPr>
             <a:r>
@@ -6140,9 +6238,9 @@
                 <a:solidFill>
                   <a:srgbClr val="F7F5F1"/>
                 </a:solidFill>
-                <a:latin typeface="Calibri" pitchFamily="34" charset="0"/>
-                <a:ea typeface="Calibri" pitchFamily="34" charset="-122"/>
-                <a:cs typeface="Calibri" pitchFamily="34" charset="-120"/>
+                <a:latin typeface="Times New Roman" pitchFamily="34" charset="0"/>
+                <a:ea typeface="Times New Roman" pitchFamily="34" charset="-122"/>
+                <a:cs typeface="Times New Roman" pitchFamily="34" charset="-120"/>
               </a:rPr>
               <a:t>03 / 14</a:t>
             </a:r>
@@ -6171,7 +6269,7 @@
           <a:bodyPr wrap="square" lIns="0" tIns="0" rIns="0" bIns="0" rtlCol="0" anchor="ctr"/>
           <a:lstStyle/>
           <a:p>
-            <a:pPr marL="0" indent="0">
+            <a:pPr indent="0" marL="0">
               <a:buNone/>
             </a:pPr>
             <a:r>
@@ -6179,9 +6277,9 @@
                 <a:solidFill>
                   <a:srgbClr val="667085"/>
                 </a:solidFill>
-                <a:latin typeface="Calibri" pitchFamily="34" charset="0"/>
-                <a:ea typeface="Calibri" pitchFamily="34" charset="-122"/>
-                <a:cs typeface="Calibri" pitchFamily="34" charset="-120"/>
+                <a:latin typeface="Times New Roman" pitchFamily="34" charset="0"/>
+                <a:ea typeface="Times New Roman" pitchFamily="34" charset="-122"/>
+                <a:cs typeface="Times New Roman" pitchFamily="34" charset="-120"/>
               </a:rPr>
               <a:t>EE5003 MSc Project | Liu Chengyu</a:t>
             </a:r>
@@ -6210,7 +6308,7 @@
           <a:bodyPr wrap="square" lIns="0" tIns="0" rIns="0" bIns="0" rtlCol="0" anchor="ctr"/>
           <a:lstStyle/>
           <a:p>
-            <a:pPr marL="0" indent="0" algn="r">
+            <a:pPr algn="r" indent="0" marL="0">
               <a:buNone/>
             </a:pPr>
             <a:r>
@@ -6218,9 +6316,9 @@
                 <a:solidFill>
                   <a:srgbClr val="667085"/>
                 </a:solidFill>
-                <a:latin typeface="Calibri" pitchFamily="34" charset="0"/>
-                <a:ea typeface="Calibri" pitchFamily="34" charset="-122"/>
-                <a:cs typeface="Calibri" pitchFamily="34" charset="-120"/>
+                <a:latin typeface="Times New Roman" pitchFamily="34" charset="0"/>
+                <a:ea typeface="Times New Roman" pitchFamily="34" charset="-122"/>
+                <a:cs typeface="Times New Roman" pitchFamily="34" charset="-120"/>
               </a:rPr>
               <a:t>Approximate Graph Unlearning Audit</a:t>
             </a:r>
@@ -6254,13 +6352,6 @@
             <a:prstDash val="solid"/>
           </a:ln>
         </p:spPr>
-        <p:txBody>
-          <a:bodyPr/>
-          <a:lstStyle/>
-          <a:p>
-            <a:endParaRPr lang="zh-CN" altLang="en-US"/>
-          </a:p>
-        </p:txBody>
       </p:sp>
       <p:sp>
         <p:nvSpPr>
@@ -6283,7 +6374,7 @@
           <a:bodyPr wrap="square" lIns="0" tIns="0" rIns="0" bIns="0" rtlCol="0" anchor="ctr"/>
           <a:lstStyle/>
           <a:p>
-            <a:pPr marL="0" indent="0">
+            <a:pPr indent="0" marL="0">
               <a:buNone/>
             </a:pPr>
             <a:r>
@@ -6291,9 +6382,9 @@
                 <a:solidFill>
                   <a:srgbClr val="F7F5F1"/>
                 </a:solidFill>
-                <a:latin typeface="Georgia" pitchFamily="34" charset="0"/>
-                <a:ea typeface="Georgia" pitchFamily="34" charset="-122"/>
-                <a:cs typeface="Georgia" pitchFamily="34" charset="-120"/>
+                <a:latin typeface="Times New Roman" pitchFamily="34" charset="0"/>
+                <a:ea typeface="Times New Roman" pitchFamily="34" charset="-122"/>
+                <a:cs typeface="Times New Roman" pitchFamily="34" charset="-120"/>
               </a:rPr>
               <a:t>Research question</a:t>
             </a:r>
@@ -6324,7 +6415,7 @@
           </a:bodyPr>
           <a:lstStyle/>
           <a:p>
-            <a:pPr marL="0" indent="0">
+            <a:pPr indent="0" marL="0">
               <a:buNone/>
             </a:pPr>
             <a:r>
@@ -6332,9 +6423,9 @@
                 <a:solidFill>
                   <a:srgbClr val="FFFFFF"/>
                 </a:solidFill>
-                <a:latin typeface="Calibri" pitchFamily="34" charset="0"/>
-                <a:ea typeface="Calibri" pitchFamily="34" charset="-122"/>
-                <a:cs typeface="Calibri" pitchFamily="34" charset="-120"/>
+                <a:latin typeface="Times New Roman" pitchFamily="34" charset="0"/>
+                <a:ea typeface="Times New Roman" pitchFamily="34" charset="-122"/>
+                <a:cs typeface="Times New Roman" pitchFamily="34" charset="-120"/>
               </a:rPr>
               <a:t>Can malicious deletion requests amplify approximation error and degrade retained-model utility beyond ordinary deletion at the same budget?</a:t>
             </a:r>
@@ -6368,13 +6459,6 @@
             <a:prstDash val="solid"/>
           </a:ln>
         </p:spPr>
-        <p:txBody>
-          <a:bodyPr/>
-          <a:lstStyle/>
-          <a:p>
-            <a:endParaRPr lang="zh-CN" altLang="en-US"/>
-          </a:p>
-        </p:txBody>
       </p:sp>
       <p:sp>
         <p:nvSpPr>
@@ -6397,7 +6481,7 @@
           <a:bodyPr wrap="square" lIns="0" tIns="0" rIns="0" bIns="0" rtlCol="0" anchor="ctr"/>
           <a:lstStyle/>
           <a:p>
-            <a:pPr marL="0" indent="0">
+            <a:pPr indent="0" marL="0">
               <a:buNone/>
             </a:pPr>
             <a:r>
@@ -6405,9 +6489,9 @@
                 <a:solidFill>
                   <a:srgbClr val="223A5E"/>
                 </a:solidFill>
-                <a:latin typeface="Georgia" pitchFamily="34" charset="0"/>
-                <a:ea typeface="Georgia" pitchFamily="34" charset="-122"/>
-                <a:cs typeface="Georgia" pitchFamily="34" charset="-120"/>
+                <a:latin typeface="Times New Roman" pitchFamily="34" charset="0"/>
+                <a:ea typeface="Times New Roman" pitchFamily="34" charset="-122"/>
+                <a:cs typeface="Times New Roman" pitchFamily="34" charset="-120"/>
               </a:rPr>
               <a:t>Objective 1</a:t>
             </a:r>
@@ -6438,7 +6522,7 @@
           </a:bodyPr>
           <a:lstStyle/>
           <a:p>
-            <a:pPr marL="0" indent="0">
+            <a:pPr indent="0" marL="0">
               <a:buNone/>
             </a:pPr>
             <a:r>
@@ -6446,9 +6530,9 @@
                 <a:solidFill>
                   <a:srgbClr val="1E2630"/>
                 </a:solidFill>
-                <a:latin typeface="Calibri" pitchFamily="34" charset="0"/>
-                <a:ea typeface="Calibri" pitchFamily="34" charset="-122"/>
-                <a:cs typeface="Calibri" pitchFamily="34" charset="-120"/>
+                <a:latin typeface="Times New Roman" pitchFamily="34" charset="0"/>
+                <a:ea typeface="Times New Roman" pitchFamily="34" charset="-122"/>
+                <a:cs typeface="Times New Roman" pitchFamily="34" charset="-120"/>
               </a:rPr>
               <a:t>Build an attack pipeline with multiple deletion strategies.</a:t>
             </a:r>
@@ -6482,13 +6566,6 @@
             <a:prstDash val="solid"/>
           </a:ln>
         </p:spPr>
-        <p:txBody>
-          <a:bodyPr/>
-          <a:lstStyle/>
-          <a:p>
-            <a:endParaRPr lang="zh-CN" altLang="en-US"/>
-          </a:p>
-        </p:txBody>
       </p:sp>
       <p:sp>
         <p:nvSpPr>
@@ -6511,7 +6588,7 @@
           <a:bodyPr wrap="square" lIns="0" tIns="0" rIns="0" bIns="0" rtlCol="0" anchor="ctr"/>
           <a:lstStyle/>
           <a:p>
-            <a:pPr marL="0" indent="0">
+            <a:pPr indent="0" marL="0">
               <a:buNone/>
             </a:pPr>
             <a:r>
@@ -6519,9 +6596,9 @@
                 <a:solidFill>
                   <a:srgbClr val="223A5E"/>
                 </a:solidFill>
-                <a:latin typeface="Georgia" pitchFamily="34" charset="0"/>
-                <a:ea typeface="Georgia" pitchFamily="34" charset="-122"/>
-                <a:cs typeface="Georgia" pitchFamily="34" charset="-120"/>
+                <a:latin typeface="Times New Roman" pitchFamily="34" charset="0"/>
+                <a:ea typeface="Times New Roman" pitchFamily="34" charset="-122"/>
+                <a:cs typeface="Times New Roman" pitchFamily="34" charset="-120"/>
               </a:rPr>
               <a:t>Objective 2</a:t>
             </a:r>
@@ -6552,7 +6629,7 @@
           </a:bodyPr>
           <a:lstStyle/>
           <a:p>
-            <a:pPr marL="0" indent="0">
+            <a:pPr indent="0" marL="0">
               <a:buNone/>
             </a:pPr>
             <a:r>
@@ -6560,9 +6637,9 @@
                 <a:solidFill>
                   <a:srgbClr val="1E2630"/>
                 </a:solidFill>
-                <a:latin typeface="Calibri" pitchFamily="34" charset="0"/>
-                <a:ea typeface="Calibri" pitchFamily="34" charset="-122"/>
-                <a:cs typeface="Calibri" pitchFamily="34" charset="-120"/>
+                <a:latin typeface="Times New Roman" pitchFamily="34" charset="0"/>
+                <a:ea typeface="Times New Roman" pitchFamily="34" charset="-122"/>
+                <a:cs typeface="Times New Roman" pitchFamily="34" charset="-120"/>
               </a:rPr>
               <a:t>Compare vulnerability across method families, not just one algorithm.</a:t>
             </a:r>
@@ -6596,13 +6673,6 @@
             <a:prstDash val="solid"/>
           </a:ln>
         </p:spPr>
-        <p:txBody>
-          <a:bodyPr/>
-          <a:lstStyle/>
-          <a:p>
-            <a:endParaRPr lang="zh-CN" altLang="en-US"/>
-          </a:p>
-        </p:txBody>
       </p:sp>
       <p:sp>
         <p:nvSpPr>
@@ -6625,7 +6695,7 @@
           <a:bodyPr wrap="square" lIns="0" tIns="0" rIns="0" bIns="0" rtlCol="0" anchor="ctr"/>
           <a:lstStyle/>
           <a:p>
-            <a:pPr marL="0" indent="0">
+            <a:pPr indent="0" marL="0">
               <a:buNone/>
             </a:pPr>
             <a:r>
@@ -6633,9 +6703,9 @@
                 <a:solidFill>
                   <a:srgbClr val="223A5E"/>
                 </a:solidFill>
-                <a:latin typeface="Georgia" pitchFamily="34" charset="0"/>
-                <a:ea typeface="Georgia" pitchFamily="34" charset="-122"/>
-                <a:cs typeface="Georgia" pitchFamily="34" charset="-120"/>
+                <a:latin typeface="Times New Roman" pitchFamily="34" charset="0"/>
+                <a:ea typeface="Times New Roman" pitchFamily="34" charset="-122"/>
+                <a:cs typeface="Times New Roman" pitchFamily="34" charset="-120"/>
               </a:rPr>
               <a:t>Objective 3</a:t>
             </a:r>
@@ -6666,7 +6736,7 @@
           </a:bodyPr>
           <a:lstStyle/>
           <a:p>
-            <a:pPr marL="0" indent="0">
+            <a:pPr indent="0" marL="0">
               <a:buNone/>
             </a:pPr>
             <a:r>
@@ -6674,9 +6744,9 @@
                 <a:solidFill>
                   <a:srgbClr val="1E2630"/>
                 </a:solidFill>
-                <a:latin typeface="Calibri" pitchFamily="34" charset="0"/>
-                <a:ea typeface="Calibri" pitchFamily="34" charset="-122"/>
-                <a:cs typeface="Calibri" pitchFamily="34" charset="-120"/>
+                <a:latin typeface="Times New Roman" pitchFamily="34" charset="0"/>
+                <a:ea typeface="Times New Roman" pitchFamily="34" charset="-122"/>
+                <a:cs typeface="Times New Roman" pitchFamily="34" charset="-120"/>
               </a:rPr>
               <a:t>Add attribution metrics for collateral and retrain gap.</a:t>
             </a:r>
@@ -6710,13 +6780,6 @@
             <a:prstDash val="solid"/>
           </a:ln>
         </p:spPr>
-        <p:txBody>
-          <a:bodyPr/>
-          <a:lstStyle/>
-          <a:p>
-            <a:endParaRPr lang="zh-CN" altLang="en-US"/>
-          </a:p>
-        </p:txBody>
       </p:sp>
       <p:sp>
         <p:nvSpPr>
@@ -6739,7 +6802,7 @@
           <a:bodyPr wrap="square" lIns="0" tIns="0" rIns="0" bIns="0" rtlCol="0" anchor="ctr"/>
           <a:lstStyle/>
           <a:p>
-            <a:pPr marL="0" indent="0">
+            <a:pPr indent="0" marL="0">
               <a:buNone/>
             </a:pPr>
             <a:r>
@@ -6747,9 +6810,9 @@
                 <a:solidFill>
                   <a:srgbClr val="223A5E"/>
                 </a:solidFill>
-                <a:latin typeface="Georgia" pitchFamily="34" charset="0"/>
-                <a:ea typeface="Georgia" pitchFamily="34" charset="-122"/>
-                <a:cs typeface="Georgia" pitchFamily="34" charset="-120"/>
+                <a:latin typeface="Times New Roman" pitchFamily="34" charset="0"/>
+                <a:ea typeface="Times New Roman" pitchFamily="34" charset="-122"/>
+                <a:cs typeface="Times New Roman" pitchFamily="34" charset="-120"/>
               </a:rPr>
               <a:t>Objective 4</a:t>
             </a:r>
@@ -6780,7 +6843,7 @@
           </a:bodyPr>
           <a:lstStyle/>
           <a:p>
-            <a:pPr marL="0" indent="0">
+            <a:pPr indent="0" marL="0">
               <a:buNone/>
             </a:pPr>
             <a:r>
@@ -6788,9 +6851,9 @@
                 <a:solidFill>
                   <a:srgbClr val="1E2630"/>
                 </a:solidFill>
-                <a:latin typeface="Calibri" pitchFamily="34" charset="0"/>
-                <a:ea typeface="Calibri" pitchFamily="34" charset="-122"/>
-                <a:cs typeface="Calibri" pitchFamily="34" charset="-120"/>
+                <a:latin typeface="Times New Roman" pitchFamily="34" charset="0"/>
+                <a:ea typeface="Times New Roman" pitchFamily="34" charset="-122"/>
+                <a:cs typeface="Times New Roman" pitchFamily="34" charset="-120"/>
               </a:rPr>
               <a:t>Measure whether adversarial node selection is practically efficient.</a:t>
             </a:r>
@@ -6814,7 +6877,6 @@
         <a:solidFill>
           <a:srgbClr val="F7F5F1"/>
         </a:solidFill>
-        <a:effectLst/>
       </p:bgPr>
     </p:bg>
     <p:spTree>
@@ -6857,13 +6919,6 @@
             <a:prstDash val="solid"/>
           </a:ln>
         </p:spPr>
-        <p:txBody>
-          <a:bodyPr/>
-          <a:lstStyle/>
-          <a:p>
-            <a:endParaRPr lang="zh-CN" altLang="en-US"/>
-          </a:p>
-        </p:txBody>
       </p:sp>
       <p:sp>
         <p:nvSpPr>
@@ -6886,7 +6941,7 @@
           <a:bodyPr wrap="square" lIns="0" tIns="0" rIns="0" bIns="0" rtlCol="0" anchor="ctr"/>
           <a:lstStyle/>
           <a:p>
-            <a:pPr marL="0" indent="0">
+            <a:pPr indent="0" marL="0">
               <a:buNone/>
             </a:pPr>
             <a:r>
@@ -6894,9 +6949,9 @@
                 <a:solidFill>
                   <a:srgbClr val="FFFFFF"/>
                 </a:solidFill>
-                <a:latin typeface="Georgia" pitchFamily="34" charset="0"/>
-                <a:ea typeface="Georgia" pitchFamily="34" charset="-122"/>
-                <a:cs typeface="Georgia" pitchFamily="34" charset="-120"/>
+                <a:latin typeface="Times New Roman" pitchFamily="34" charset="0"/>
+                <a:ea typeface="Times New Roman" pitchFamily="34" charset="-122"/>
+                <a:cs typeface="Times New Roman" pitchFamily="34" charset="-120"/>
               </a:rPr>
               <a:t>Method Families And Threat Model</a:t>
             </a:r>
@@ -6925,7 +6980,7 @@
           <a:bodyPr wrap="square" lIns="0" tIns="0" rIns="0" bIns="0" rtlCol="0" anchor="ctr"/>
           <a:lstStyle/>
           <a:p>
-            <a:pPr marL="0" indent="0" algn="r">
+            <a:pPr algn="r" indent="0" marL="0">
               <a:buNone/>
             </a:pPr>
             <a:r>
@@ -6933,9 +6988,9 @@
                 <a:solidFill>
                   <a:srgbClr val="F7F5F1"/>
                 </a:solidFill>
-                <a:latin typeface="Calibri" pitchFamily="34" charset="0"/>
-                <a:ea typeface="Calibri" pitchFamily="34" charset="-122"/>
-                <a:cs typeface="Calibri" pitchFamily="34" charset="-120"/>
+                <a:latin typeface="Times New Roman" pitchFamily="34" charset="0"/>
+                <a:ea typeface="Times New Roman" pitchFamily="34" charset="-122"/>
+                <a:cs typeface="Times New Roman" pitchFamily="34" charset="-120"/>
               </a:rPr>
               <a:t>04 / 14</a:t>
             </a:r>
@@ -6964,7 +7019,7 @@
           <a:bodyPr wrap="square" lIns="0" tIns="0" rIns="0" bIns="0" rtlCol="0" anchor="ctr"/>
           <a:lstStyle/>
           <a:p>
-            <a:pPr marL="0" indent="0">
+            <a:pPr indent="0" marL="0">
               <a:buNone/>
             </a:pPr>
             <a:r>
@@ -6972,9 +7027,9 @@
                 <a:solidFill>
                   <a:srgbClr val="667085"/>
                 </a:solidFill>
-                <a:latin typeface="Calibri" pitchFamily="34" charset="0"/>
-                <a:ea typeface="Calibri" pitchFamily="34" charset="-122"/>
-                <a:cs typeface="Calibri" pitchFamily="34" charset="-120"/>
+                <a:latin typeface="Times New Roman" pitchFamily="34" charset="0"/>
+                <a:ea typeface="Times New Roman" pitchFamily="34" charset="-122"/>
+                <a:cs typeface="Times New Roman" pitchFamily="34" charset="-120"/>
               </a:rPr>
               <a:t>EE5003 MSc Project | Liu Chengyu</a:t>
             </a:r>
@@ -7003,7 +7058,7 @@
           <a:bodyPr wrap="square" lIns="0" tIns="0" rIns="0" bIns="0" rtlCol="0" anchor="ctr"/>
           <a:lstStyle/>
           <a:p>
-            <a:pPr marL="0" indent="0" algn="r">
+            <a:pPr algn="r" indent="0" marL="0">
               <a:buNone/>
             </a:pPr>
             <a:r>
@@ -7011,9 +7066,9 @@
                 <a:solidFill>
                   <a:srgbClr val="667085"/>
                 </a:solidFill>
-                <a:latin typeface="Calibri" pitchFamily="34" charset="0"/>
-                <a:ea typeface="Calibri" pitchFamily="34" charset="-122"/>
-                <a:cs typeface="Calibri" pitchFamily="34" charset="-120"/>
+                <a:latin typeface="Times New Roman" pitchFamily="34" charset="0"/>
+                <a:ea typeface="Times New Roman" pitchFamily="34" charset="-122"/>
+                <a:cs typeface="Times New Roman" pitchFamily="34" charset="-120"/>
               </a:rPr>
               <a:t>Approximate Graph Unlearning Audit</a:t>
             </a:r>
@@ -7042,7 +7097,7 @@
           <a:bodyPr wrap="square" lIns="0" tIns="0" rIns="0" bIns="0" rtlCol="0" anchor="ctr"/>
           <a:lstStyle/>
           <a:p>
-            <a:pPr marL="0" indent="0">
+            <a:pPr indent="0" marL="0">
               <a:buNone/>
             </a:pPr>
             <a:r>
@@ -7050,9 +7105,9 @@
                 <a:solidFill>
                   <a:srgbClr val="223A5E"/>
                 </a:solidFill>
-                <a:latin typeface="Georgia" pitchFamily="34" charset="0"/>
-                <a:ea typeface="Georgia" pitchFamily="34" charset="-122"/>
-                <a:cs typeface="Georgia" pitchFamily="34" charset="-120"/>
+                <a:latin typeface="Times New Roman" pitchFamily="34" charset="0"/>
+                <a:ea typeface="Times New Roman" pitchFamily="34" charset="-122"/>
+                <a:cs typeface="Times New Roman" pitchFamily="34" charset="-120"/>
               </a:rPr>
               <a:t>Families under test</a:t>
             </a:r>
@@ -7086,13 +7141,6 @@
             <a:prstDash val="solid"/>
           </a:ln>
         </p:spPr>
-        <p:txBody>
-          <a:bodyPr/>
-          <a:lstStyle/>
-          <a:p>
-            <a:endParaRPr lang="zh-CN" altLang="en-US"/>
-          </a:p>
-        </p:txBody>
       </p:sp>
       <p:sp>
         <p:nvSpPr>
@@ -7115,7 +7163,7 @@
           <a:bodyPr wrap="square" lIns="0" tIns="0" rIns="0" bIns="0" rtlCol="0" anchor="ctr"/>
           <a:lstStyle/>
           <a:p>
-            <a:pPr marL="0" indent="0">
+            <a:pPr indent="0" marL="0">
               <a:buNone/>
             </a:pPr>
             <a:r>
@@ -7123,9 +7171,9 @@
                 <a:solidFill>
                   <a:srgbClr val="223A5E"/>
                 </a:solidFill>
-                <a:latin typeface="Georgia" pitchFamily="34" charset="0"/>
-                <a:ea typeface="Georgia" pitchFamily="34" charset="-122"/>
-                <a:cs typeface="Georgia" pitchFamily="34" charset="-120"/>
+                <a:latin typeface="Times New Roman" pitchFamily="34" charset="0"/>
+                <a:ea typeface="Times New Roman" pitchFamily="34" charset="-122"/>
+                <a:cs typeface="Times New Roman" pitchFamily="34" charset="-120"/>
               </a:rPr>
               <a:t>Learning-based</a:t>
             </a:r>
@@ -7156,7 +7204,7 @@
           </a:bodyPr>
           <a:lstStyle/>
           <a:p>
-            <a:pPr marL="0" indent="0">
+            <a:pPr indent="0" marL="0">
               <a:buNone/>
             </a:pPr>
             <a:r>
@@ -7164,9 +7212,9 @@
                 <a:solidFill>
                   <a:srgbClr val="1E2630"/>
                 </a:solidFill>
-                <a:latin typeface="Calibri" pitchFamily="34" charset="0"/>
-                <a:ea typeface="Calibri" pitchFamily="34" charset="-122"/>
-                <a:cs typeface="Calibri" pitchFamily="34" charset="-120"/>
+                <a:latin typeface="Times New Roman" pitchFamily="34" charset="0"/>
+                <a:ea typeface="Times New Roman" pitchFamily="34" charset="-122"/>
+                <a:cs typeface="Times New Roman" pitchFamily="34" charset="-120"/>
               </a:rPr>
               <a:t>GNNDelete is the main fragile representative in this study.</a:t>
             </a:r>
@@ -7200,13 +7248,6 @@
             <a:prstDash val="solid"/>
           </a:ln>
         </p:spPr>
-        <p:txBody>
-          <a:bodyPr/>
-          <a:lstStyle/>
-          <a:p>
-            <a:endParaRPr lang="zh-CN" altLang="en-US"/>
-          </a:p>
-        </p:txBody>
       </p:sp>
       <p:sp>
         <p:nvSpPr>
@@ -7229,7 +7270,7 @@
           <a:bodyPr wrap="square" lIns="0" tIns="0" rIns="0" bIns="0" rtlCol="0" anchor="ctr"/>
           <a:lstStyle/>
           <a:p>
-            <a:pPr marL="0" indent="0">
+            <a:pPr indent="0" marL="0">
               <a:buNone/>
             </a:pPr>
             <a:r>
@@ -7237,9 +7278,9 @@
                 <a:solidFill>
                   <a:srgbClr val="223A5E"/>
                 </a:solidFill>
-                <a:latin typeface="Georgia" pitchFamily="34" charset="0"/>
-                <a:ea typeface="Georgia" pitchFamily="34" charset="-122"/>
-                <a:cs typeface="Georgia" pitchFamily="34" charset="-120"/>
+                <a:latin typeface="Times New Roman" pitchFamily="34" charset="0"/>
+                <a:ea typeface="Times New Roman" pitchFamily="34" charset="-122"/>
+                <a:cs typeface="Times New Roman" pitchFamily="34" charset="-120"/>
               </a:rPr>
               <a:t>IF-based</a:t>
             </a:r>
@@ -7270,7 +7311,7 @@
           </a:bodyPr>
           <a:lstStyle/>
           <a:p>
-            <a:pPr marL="0" indent="0">
+            <a:pPr indent="0" marL="0">
               <a:buNone/>
             </a:pPr>
             <a:r>
@@ -7278,9 +7319,9 @@
                 <a:solidFill>
                   <a:srgbClr val="1E2630"/>
                 </a:solidFill>
-                <a:latin typeface="Calibri" pitchFamily="34" charset="0"/>
-                <a:ea typeface="Calibri" pitchFamily="34" charset="-122"/>
-                <a:cs typeface="Calibri" pitchFamily="34" charset="-120"/>
+                <a:latin typeface="Times New Roman" pitchFamily="34" charset="0"/>
+                <a:ea typeface="Times New Roman" pitchFamily="34" charset="-122"/>
+                <a:cs typeface="Times New Roman" pitchFamily="34" charset="-120"/>
               </a:rPr>
               <a:t>GIF remains comparatively stable under adversarial selection.</a:t>
             </a:r>
@@ -7314,13 +7355,6 @@
             <a:prstDash val="solid"/>
           </a:ln>
         </p:spPr>
-        <p:txBody>
-          <a:bodyPr/>
-          <a:lstStyle/>
-          <a:p>
-            <a:endParaRPr lang="zh-CN" altLang="en-US"/>
-          </a:p>
-        </p:txBody>
       </p:sp>
       <p:sp>
         <p:nvSpPr>
@@ -7343,7 +7377,7 @@
           <a:bodyPr wrap="square" lIns="0" tIns="0" rIns="0" bIns="0" rtlCol="0" anchor="ctr"/>
           <a:lstStyle/>
           <a:p>
-            <a:pPr marL="0" indent="0">
+            <a:pPr indent="0" marL="0">
               <a:buNone/>
             </a:pPr>
             <a:r>
@@ -7351,9 +7385,9 @@
                 <a:solidFill>
                   <a:srgbClr val="223A5E"/>
                 </a:solidFill>
-                <a:latin typeface="Georgia" pitchFamily="34" charset="0"/>
-                <a:ea typeface="Georgia" pitchFamily="34" charset="-122"/>
-                <a:cs typeface="Georgia" pitchFamily="34" charset="-120"/>
+                <a:latin typeface="Times New Roman" pitchFamily="34" charset="0"/>
+                <a:ea typeface="Times New Roman" pitchFamily="34" charset="-122"/>
+                <a:cs typeface="Times New Roman" pitchFamily="34" charset="-120"/>
               </a:rPr>
               <a:t>Shard-based</a:t>
             </a:r>
@@ -7384,7 +7418,7 @@
           </a:bodyPr>
           <a:lstStyle/>
           <a:p>
-            <a:pPr marL="0" indent="0">
+            <a:pPr indent="0" marL="0">
               <a:buNone/>
             </a:pPr>
             <a:r>
@@ -7392,9 +7426,9 @@
                 <a:solidFill>
                   <a:srgbClr val="1E2630"/>
                 </a:solidFill>
-                <a:latin typeface="Calibri" pitchFamily="34" charset="0"/>
-                <a:ea typeface="Calibri" pitchFamily="34" charset="-122"/>
-                <a:cs typeface="Calibri" pitchFamily="34" charset="-120"/>
+                <a:latin typeface="Times New Roman" pitchFamily="34" charset="0"/>
+                <a:ea typeface="Times New Roman" pitchFamily="34" charset="-122"/>
+                <a:cs typeface="Times New Roman" pitchFamily="34" charset="-120"/>
               </a:rPr>
               <a:t>GraphEraser behaves differently and often improves in the tested settings.</a:t>
             </a:r>
@@ -7428,13 +7462,6 @@
             <a:prstDash val="solid"/>
           </a:ln>
         </p:spPr>
-        <p:txBody>
-          <a:bodyPr/>
-          <a:lstStyle/>
-          <a:p>
-            <a:endParaRPr lang="zh-CN" altLang="en-US"/>
-          </a:p>
-        </p:txBody>
       </p:sp>
       <p:sp>
         <p:nvSpPr>
@@ -7457,7 +7484,7 @@
           <a:bodyPr wrap="square" lIns="0" tIns="0" rIns="0" bIns="0" rtlCol="0" anchor="ctr"/>
           <a:lstStyle/>
           <a:p>
-            <a:pPr marL="0" indent="0">
+            <a:pPr indent="0" marL="0">
               <a:buNone/>
             </a:pPr>
             <a:r>
@@ -7465,9 +7492,9 @@
                 <a:solidFill>
                   <a:srgbClr val="F7F5F1"/>
                 </a:solidFill>
-                <a:latin typeface="Georgia" pitchFamily="34" charset="0"/>
-                <a:ea typeface="Georgia" pitchFamily="34" charset="-122"/>
-                <a:cs typeface="Georgia" pitchFamily="34" charset="-120"/>
+                <a:latin typeface="Times New Roman" pitchFamily="34" charset="0"/>
+                <a:ea typeface="Times New Roman" pitchFamily="34" charset="-122"/>
+                <a:cs typeface="Times New Roman" pitchFamily="34" charset="-120"/>
               </a:rPr>
               <a:t>Threat model</a:t>
             </a:r>
@@ -7498,7 +7525,7 @@
           </a:bodyPr>
           <a:lstStyle/>
           <a:p>
-            <a:pPr marL="0" indent="0">
+            <a:pPr indent="0" marL="0">
               <a:buNone/>
             </a:pPr>
             <a:r>
@@ -7506,22 +7533,22 @@
                 <a:solidFill>
                   <a:srgbClr val="FFFFFF"/>
                 </a:solidFill>
-                <a:latin typeface="Calibri" pitchFamily="34" charset="0"/>
-                <a:ea typeface="Calibri" pitchFamily="34" charset="-122"/>
-                <a:cs typeface="Calibri" pitchFamily="34" charset="-120"/>
+                <a:latin typeface="Times New Roman" pitchFamily="34" charset="0"/>
+                <a:ea typeface="Times New Roman" pitchFamily="34" charset="-122"/>
+                <a:cs typeface="Times New Roman" pitchFamily="34" charset="-120"/>
               </a:rPr>
               <a:t>Attacker capability: choose which nodes to delete through the normal interface.</a:t>
             </a:r>
             <a:endParaRPr lang="en-US" sz="1220" dirty="0"/>
           </a:p>
           <a:p>
-            <a:pPr marL="0" indent="0">
+            <a:pPr indent="0" marL="0">
               <a:buNone/>
             </a:pPr>
             <a:endParaRPr lang="en-US" sz="1220" dirty="0"/>
           </a:p>
           <a:p>
-            <a:pPr marL="0" indent="0">
+            <a:pPr indent="0" marL="0">
               <a:buNone/>
             </a:pPr>
             <a:r>
@@ -7529,22 +7556,22 @@
                 <a:solidFill>
                   <a:srgbClr val="FFFFFF"/>
                 </a:solidFill>
-                <a:latin typeface="Calibri" pitchFamily="34" charset="0"/>
-                <a:ea typeface="Calibri" pitchFamily="34" charset="-122"/>
-                <a:cs typeface="Calibri" pitchFamily="34" charset="-120"/>
+                <a:latin typeface="Times New Roman" pitchFamily="34" charset="0"/>
+                <a:ea typeface="Times New Roman" pitchFamily="34" charset="-122"/>
+                <a:cs typeface="Times New Roman" pitchFamily="34" charset="-120"/>
               </a:rPr>
               <a:t>Out of scope: poisoning labels, features, or hidden training code.</a:t>
             </a:r>
             <a:endParaRPr lang="en-US" sz="1220" dirty="0"/>
           </a:p>
           <a:p>
-            <a:pPr marL="0" indent="0">
+            <a:pPr indent="0" marL="0">
               <a:buNone/>
             </a:pPr>
             <a:endParaRPr lang="en-US" sz="1220" dirty="0"/>
           </a:p>
           <a:p>
-            <a:pPr marL="0" indent="0">
+            <a:pPr indent="0" marL="0">
               <a:buNone/>
             </a:pPr>
             <a:r>
@@ -7552,9 +7579,9 @@
                 <a:solidFill>
                   <a:srgbClr val="FFFFFF"/>
                 </a:solidFill>
-                <a:latin typeface="Calibri" pitchFamily="34" charset="0"/>
-                <a:ea typeface="Calibri" pitchFamily="34" charset="-122"/>
-                <a:cs typeface="Calibri" pitchFamily="34" charset="-120"/>
+                <a:latin typeface="Times New Roman" pitchFamily="34" charset="0"/>
+                <a:ea typeface="Times New Roman" pitchFamily="34" charset="-122"/>
+                <a:cs typeface="Times New Roman" pitchFamily="34" charset="-120"/>
               </a:rPr>
               <a:t>Target: maximize post-unlearning utility loss beyond random deletion.</a:t>
             </a:r>
@@ -7590,13 +7617,6 @@
             <a:prstDash val="solid"/>
           </a:ln>
         </p:spPr>
-        <p:txBody>
-          <a:bodyPr/>
-          <a:lstStyle/>
-          <a:p>
-            <a:endParaRPr lang="zh-CN" altLang="en-US"/>
-          </a:p>
-        </p:txBody>
       </p:sp>
       <p:sp>
         <p:nvSpPr>
@@ -7619,7 +7639,7 @@
           <a:bodyPr wrap="square" lIns="0" tIns="0" rIns="0" bIns="0" rtlCol="0" anchor="ctr"/>
           <a:lstStyle/>
           <a:p>
-            <a:pPr marL="0" indent="0" algn="ctr">
+            <a:pPr algn="ctr" indent="0" marL="0">
               <a:buNone/>
             </a:pPr>
             <a:r>
@@ -7627,9 +7647,9 @@
                 <a:solidFill>
                   <a:srgbClr val="FFFFFF"/>
                 </a:solidFill>
-                <a:latin typeface="Georgia" pitchFamily="34" charset="0"/>
-                <a:ea typeface="Georgia" pitchFamily="34" charset="-122"/>
-                <a:cs typeface="Georgia" pitchFamily="34" charset="-120"/>
+                <a:latin typeface="Times New Roman" pitchFamily="34" charset="0"/>
+                <a:ea typeface="Times New Roman" pitchFamily="34" charset="-122"/>
+                <a:cs typeface="Times New Roman" pitchFamily="34" charset="-120"/>
               </a:rPr>
               <a:t>ΔF1</a:t>
             </a:r>
@@ -7660,7 +7680,7 @@
           </a:bodyPr>
           <a:lstStyle/>
           <a:p>
-            <a:pPr marL="0" indent="0" algn="ctr">
+            <a:pPr algn="ctr" indent="0" marL="0">
               <a:buNone/>
             </a:pPr>
             <a:r>
@@ -7668,9 +7688,9 @@
                 <a:solidFill>
                   <a:srgbClr val="F7F5F1"/>
                 </a:solidFill>
-                <a:latin typeface="Calibri" pitchFamily="34" charset="0"/>
-                <a:ea typeface="Calibri" pitchFamily="34" charset="-122"/>
-                <a:cs typeface="Calibri" pitchFamily="34" charset="-120"/>
+                <a:latin typeface="Times New Roman" pitchFamily="34" charset="0"/>
+                <a:ea typeface="Times New Roman" pitchFamily="34" charset="-122"/>
+                <a:cs typeface="Times New Roman" pitchFamily="34" charset="-120"/>
               </a:rPr>
               <a:t>attack-over-random</a:t>
             </a:r>
@@ -7706,13 +7726,6 @@
             <a:prstDash val="solid"/>
           </a:ln>
         </p:spPr>
-        <p:txBody>
-          <a:bodyPr/>
-          <a:lstStyle/>
-          <a:p>
-            <a:endParaRPr lang="zh-CN" altLang="en-US"/>
-          </a:p>
-        </p:txBody>
       </p:sp>
       <p:sp>
         <p:nvSpPr>
@@ -7735,7 +7748,7 @@
           <a:bodyPr wrap="square" lIns="0" tIns="0" rIns="0" bIns="0" rtlCol="0" anchor="ctr"/>
           <a:lstStyle/>
           <a:p>
-            <a:pPr marL="0" indent="0" algn="ctr">
+            <a:pPr algn="ctr" indent="0" marL="0">
               <a:buNone/>
             </a:pPr>
             <a:r>
@@ -7743,9 +7756,9 @@
                 <a:solidFill>
                   <a:srgbClr val="FFFFFF"/>
                 </a:solidFill>
-                <a:latin typeface="Georgia" pitchFamily="34" charset="0"/>
-                <a:ea typeface="Georgia" pitchFamily="34" charset="-122"/>
-                <a:cs typeface="Georgia" pitchFamily="34" charset="-120"/>
+                <a:latin typeface="Times New Roman" pitchFamily="34" charset="0"/>
+                <a:ea typeface="Times New Roman" pitchFamily="34" charset="-122"/>
+                <a:cs typeface="Times New Roman" pitchFamily="34" charset="-120"/>
               </a:rPr>
               <a:t>Gap</a:t>
             </a:r>
@@ -7776,7 +7789,7 @@
           </a:bodyPr>
           <a:lstStyle/>
           <a:p>
-            <a:pPr marL="0" indent="0" algn="ctr">
+            <a:pPr algn="ctr" indent="0" marL="0">
               <a:buNone/>
             </a:pPr>
             <a:r>
@@ -7784,9 +7797,9 @@
                 <a:solidFill>
                   <a:srgbClr val="F7F5F1"/>
                 </a:solidFill>
-                <a:latin typeface="Calibri" pitchFamily="34" charset="0"/>
-                <a:ea typeface="Calibri" pitchFamily="34" charset="-122"/>
-                <a:cs typeface="Calibri" pitchFamily="34" charset="-120"/>
+                <a:latin typeface="Times New Roman" pitchFamily="34" charset="0"/>
+                <a:ea typeface="Times New Roman" pitchFamily="34" charset="-122"/>
+                <a:cs typeface="Times New Roman" pitchFamily="34" charset="-120"/>
               </a:rPr>
               <a:t>vs exact retrain</a:t>
             </a:r>
@@ -7822,13 +7835,6 @@
             <a:prstDash val="solid"/>
           </a:ln>
         </p:spPr>
-        <p:txBody>
-          <a:bodyPr/>
-          <a:lstStyle/>
-          <a:p>
-            <a:endParaRPr lang="zh-CN" altLang="en-US"/>
-          </a:p>
-        </p:txBody>
       </p:sp>
       <p:sp>
         <p:nvSpPr>
@@ -7851,7 +7857,7 @@
           <a:bodyPr wrap="square" lIns="0" tIns="0" rIns="0" bIns="0" rtlCol="0" anchor="ctr"/>
           <a:lstStyle/>
           <a:p>
-            <a:pPr marL="0" indent="0" algn="ctr">
+            <a:pPr algn="ctr" indent="0" marL="0">
               <a:buNone/>
             </a:pPr>
             <a:r>
@@ -7859,9 +7865,9 @@
                 <a:solidFill>
                   <a:srgbClr val="223A5E"/>
                 </a:solidFill>
-                <a:latin typeface="Georgia" pitchFamily="34" charset="0"/>
-                <a:ea typeface="Georgia" pitchFamily="34" charset="-122"/>
-                <a:cs typeface="Georgia" pitchFamily="34" charset="-120"/>
+                <a:latin typeface="Times New Roman" pitchFamily="34" charset="0"/>
+                <a:ea typeface="Times New Roman" pitchFamily="34" charset="-122"/>
+                <a:cs typeface="Times New Roman" pitchFamily="34" charset="-120"/>
               </a:rPr>
               <a:t>26.2%</a:t>
             </a:r>
@@ -7892,7 +7898,7 @@
           </a:bodyPr>
           <a:lstStyle/>
           <a:p>
-            <a:pPr marL="0" indent="0" algn="ctr">
+            <a:pPr algn="ctr" indent="0" marL="0">
               <a:buNone/>
             </a:pPr>
             <a:r>
@@ -7900,9 +7906,9 @@
                 <a:solidFill>
                   <a:srgbClr val="223A5E"/>
                 </a:solidFill>
-                <a:latin typeface="Calibri" pitchFamily="34" charset="0"/>
-                <a:ea typeface="Calibri" pitchFamily="34" charset="-122"/>
-                <a:cs typeface="Calibri" pitchFamily="34" charset="-120"/>
+                <a:latin typeface="Times New Roman" pitchFamily="34" charset="0"/>
+                <a:ea typeface="Times New Roman" pitchFamily="34" charset="-122"/>
+                <a:cs typeface="Times New Roman" pitchFamily="34" charset="-120"/>
               </a:rPr>
               <a:t>non-target changes</a:t>
             </a:r>
@@ -7926,7 +7932,6 @@
         <a:solidFill>
           <a:srgbClr val="FFFFFF"/>
         </a:solidFill>
-        <a:effectLst/>
       </p:bgPr>
     </p:bg>
     <p:spTree>
@@ -7969,13 +7974,6 @@
             <a:prstDash val="solid"/>
           </a:ln>
         </p:spPr>
-        <p:txBody>
-          <a:bodyPr/>
-          <a:lstStyle/>
-          <a:p>
-            <a:endParaRPr lang="zh-CN" altLang="en-US"/>
-          </a:p>
-        </p:txBody>
       </p:sp>
       <p:sp>
         <p:nvSpPr>
@@ -7998,7 +7996,7 @@
           <a:bodyPr wrap="square" lIns="0" tIns="0" rIns="0" bIns="0" rtlCol="0" anchor="ctr"/>
           <a:lstStyle/>
           <a:p>
-            <a:pPr marL="0" indent="0">
+            <a:pPr indent="0" marL="0">
               <a:buNone/>
             </a:pPr>
             <a:r>
@@ -8006,9 +8004,9 @@
                 <a:solidFill>
                   <a:srgbClr val="FFFFFF"/>
                 </a:solidFill>
-                <a:latin typeface="Georgia" pitchFamily="34" charset="0"/>
-                <a:ea typeface="Georgia" pitchFamily="34" charset="-122"/>
-                <a:cs typeface="Georgia" pitchFamily="34" charset="-120"/>
+                <a:latin typeface="Times New Roman" pitchFamily="34" charset="0"/>
+                <a:ea typeface="Times New Roman" pitchFamily="34" charset="-122"/>
+                <a:cs typeface="Times New Roman" pitchFamily="34" charset="-120"/>
               </a:rPr>
               <a:t>Attack Pipeline And Experimental Matrix</a:t>
             </a:r>
@@ -8037,7 +8035,7 @@
           <a:bodyPr wrap="square" lIns="0" tIns="0" rIns="0" bIns="0" rtlCol="0" anchor="ctr"/>
           <a:lstStyle/>
           <a:p>
-            <a:pPr marL="0" indent="0" algn="r">
+            <a:pPr algn="r" indent="0" marL="0">
               <a:buNone/>
             </a:pPr>
             <a:r>
@@ -8045,9 +8043,9 @@
                 <a:solidFill>
                   <a:srgbClr val="F7F5F1"/>
                 </a:solidFill>
-                <a:latin typeface="Calibri" pitchFamily="34" charset="0"/>
-                <a:ea typeface="Calibri" pitchFamily="34" charset="-122"/>
-                <a:cs typeface="Calibri" pitchFamily="34" charset="-120"/>
+                <a:latin typeface="Times New Roman" pitchFamily="34" charset="0"/>
+                <a:ea typeface="Times New Roman" pitchFamily="34" charset="-122"/>
+                <a:cs typeface="Times New Roman" pitchFamily="34" charset="-120"/>
               </a:rPr>
               <a:t>05 / 14</a:t>
             </a:r>
@@ -8076,7 +8074,7 @@
           <a:bodyPr wrap="square" lIns="0" tIns="0" rIns="0" bIns="0" rtlCol="0" anchor="ctr"/>
           <a:lstStyle/>
           <a:p>
-            <a:pPr marL="0" indent="0">
+            <a:pPr indent="0" marL="0">
               <a:buNone/>
             </a:pPr>
             <a:r>
@@ -8084,9 +8082,9 @@
                 <a:solidFill>
                   <a:srgbClr val="667085"/>
                 </a:solidFill>
-                <a:latin typeface="Calibri" pitchFamily="34" charset="0"/>
-                <a:ea typeface="Calibri" pitchFamily="34" charset="-122"/>
-                <a:cs typeface="Calibri" pitchFamily="34" charset="-120"/>
+                <a:latin typeface="Times New Roman" pitchFamily="34" charset="0"/>
+                <a:ea typeface="Times New Roman" pitchFamily="34" charset="-122"/>
+                <a:cs typeface="Times New Roman" pitchFamily="34" charset="-120"/>
               </a:rPr>
               <a:t>EE5003 MSc Project | Liu Chengyu</a:t>
             </a:r>
@@ -8115,7 +8113,7 @@
           <a:bodyPr wrap="square" lIns="0" tIns="0" rIns="0" bIns="0" rtlCol="0" anchor="ctr"/>
           <a:lstStyle/>
           <a:p>
-            <a:pPr marL="0" indent="0" algn="r">
+            <a:pPr algn="r" indent="0" marL="0">
               <a:buNone/>
             </a:pPr>
             <a:r>
@@ -8123,9 +8121,9 @@
                 <a:solidFill>
                   <a:srgbClr val="667085"/>
                 </a:solidFill>
-                <a:latin typeface="Calibri" pitchFamily="34" charset="0"/>
-                <a:ea typeface="Calibri" pitchFamily="34" charset="-122"/>
-                <a:cs typeface="Calibri" pitchFamily="34" charset="-120"/>
+                <a:latin typeface="Times New Roman" pitchFamily="34" charset="0"/>
+                <a:ea typeface="Times New Roman" pitchFamily="34" charset="-122"/>
+                <a:cs typeface="Times New Roman" pitchFamily="34" charset="-120"/>
               </a:rPr>
               <a:t>Approximate Graph Unlearning Audit</a:t>
             </a:r>
@@ -8154,7 +8152,7 @@
           <a:bodyPr wrap="square" lIns="0" tIns="0" rIns="0" bIns="0" rtlCol="0" anchor="ctr"/>
           <a:lstStyle/>
           <a:p>
-            <a:pPr marL="0" indent="0">
+            <a:pPr indent="0" marL="0">
               <a:buNone/>
             </a:pPr>
             <a:r>
@@ -8162,9 +8160,9 @@
                 <a:solidFill>
                   <a:srgbClr val="223A5E"/>
                 </a:solidFill>
-                <a:latin typeface="Georgia" pitchFamily="34" charset="0"/>
-                <a:ea typeface="Georgia" pitchFamily="34" charset="-122"/>
-                <a:cs typeface="Georgia" pitchFamily="34" charset="-120"/>
+                <a:latin typeface="Times New Roman" pitchFamily="34" charset="0"/>
+                <a:ea typeface="Times New Roman" pitchFamily="34" charset="-122"/>
+                <a:cs typeface="Times New Roman" pitchFamily="34" charset="-120"/>
               </a:rPr>
               <a:t>The workflow compares approximate unlearning against an exact-retrain control on the same deletion set.</a:t>
             </a:r>
@@ -8198,13 +8196,6 @@
             <a:prstDash val="solid"/>
           </a:ln>
         </p:spPr>
-        <p:txBody>
-          <a:bodyPr/>
-          <a:lstStyle/>
-          <a:p>
-            <a:endParaRPr lang="zh-CN" altLang="en-US"/>
-          </a:p>
-        </p:txBody>
       </p:sp>
       <p:sp>
         <p:nvSpPr>
@@ -8232,13 +8223,6 @@
             <a:prstDash val="solid"/>
           </a:ln>
         </p:spPr>
-        <p:txBody>
-          <a:bodyPr/>
-          <a:lstStyle/>
-          <a:p>
-            <a:endParaRPr lang="zh-CN" altLang="en-US"/>
-          </a:p>
-        </p:txBody>
       </p:sp>
       <p:sp>
         <p:nvSpPr>
@@ -8261,7 +8245,7 @@
           <a:bodyPr wrap="square" lIns="0" tIns="0" rIns="0" bIns="0" rtlCol="0" anchor="ctr"/>
           <a:lstStyle/>
           <a:p>
-            <a:pPr marL="0" indent="0" algn="ctr">
+            <a:pPr algn="ctr" indent="0" marL="0">
               <a:buNone/>
             </a:pPr>
             <a:r>
@@ -8269,9 +8253,9 @@
                 <a:solidFill>
                   <a:srgbClr val="FFFFFF"/>
                 </a:solidFill>
-                <a:latin typeface="Calibri" pitchFamily="34" charset="0"/>
-                <a:ea typeface="Calibri" pitchFamily="34" charset="-122"/>
-                <a:cs typeface="Calibri" pitchFamily="34" charset="-120"/>
+                <a:latin typeface="Times New Roman" pitchFamily="34" charset="0"/>
+                <a:ea typeface="Times New Roman" pitchFamily="34" charset="-122"/>
+                <a:cs typeface="Times New Roman" pitchFamily="34" charset="-120"/>
               </a:rPr>
               <a:t>1</a:t>
             </a:r>
@@ -8300,7 +8284,7 @@
           <a:bodyPr wrap="square" lIns="0" tIns="0" rIns="0" bIns="0" rtlCol="0" anchor="ctr"/>
           <a:lstStyle/>
           <a:p>
-            <a:pPr marL="0" indent="0">
+            <a:pPr indent="0" marL="0">
               <a:buNone/>
             </a:pPr>
             <a:r>
@@ -8308,9 +8292,9 @@
                 <a:solidFill>
                   <a:srgbClr val="223A5E"/>
                 </a:solidFill>
-                <a:latin typeface="Georgia" pitchFamily="34" charset="0"/>
-                <a:ea typeface="Georgia" pitchFamily="34" charset="-122"/>
-                <a:cs typeface="Georgia" pitchFamily="34" charset="-120"/>
+                <a:latin typeface="Times New Roman" pitchFamily="34" charset="0"/>
+                <a:ea typeface="Times New Roman" pitchFamily="34" charset="-122"/>
+                <a:cs typeface="Times New Roman" pitchFamily="34" charset="-120"/>
               </a:rPr>
               <a:t>Select nodes</a:t>
             </a:r>
@@ -8341,7 +8325,7 @@
           </a:bodyPr>
           <a:lstStyle/>
           <a:p>
-            <a:pPr marL="0" indent="0">
+            <a:pPr indent="0" marL="0">
               <a:buNone/>
             </a:pPr>
             <a:r>
@@ -8349,9 +8333,9 @@
                 <a:solidFill>
                   <a:srgbClr val="1E2630"/>
                 </a:solidFill>
-                <a:latin typeface="Calibri" pitchFamily="34" charset="0"/>
-                <a:ea typeface="Calibri" pitchFamily="34" charset="-122"/>
-                <a:cs typeface="Calibri" pitchFamily="34" charset="-120"/>
+                <a:latin typeface="Times New Roman" pitchFamily="34" charset="0"/>
+                <a:ea typeface="Times New Roman" pitchFamily="34" charset="-122"/>
+                <a:cs typeface="Times New Roman" pitchFamily="34" charset="-120"/>
               </a:rPr>
               <a:t>Use random or structured attack targets.</a:t>
             </a:r>
@@ -8385,13 +8369,6 @@
             <a:prstDash val="solid"/>
           </a:ln>
         </p:spPr>
-        <p:txBody>
-          <a:bodyPr/>
-          <a:lstStyle/>
-          <a:p>
-            <a:endParaRPr lang="zh-CN" altLang="en-US"/>
-          </a:p>
-        </p:txBody>
       </p:sp>
       <p:sp>
         <p:nvSpPr>
@@ -8419,13 +8396,6 @@
             <a:prstDash val="solid"/>
           </a:ln>
         </p:spPr>
-        <p:txBody>
-          <a:bodyPr/>
-          <a:lstStyle/>
-          <a:p>
-            <a:endParaRPr lang="zh-CN" altLang="en-US"/>
-          </a:p>
-        </p:txBody>
       </p:sp>
       <p:sp>
         <p:nvSpPr>
@@ -8448,7 +8418,7 @@
           <a:bodyPr wrap="square" lIns="0" tIns="0" rIns="0" bIns="0" rtlCol="0" anchor="ctr"/>
           <a:lstStyle/>
           <a:p>
-            <a:pPr marL="0" indent="0" algn="ctr">
+            <a:pPr algn="ctr" indent="0" marL="0">
               <a:buNone/>
             </a:pPr>
             <a:r>
@@ -8456,9 +8426,9 @@
                 <a:solidFill>
                   <a:srgbClr val="FFFFFF"/>
                 </a:solidFill>
-                <a:latin typeface="Calibri" pitchFamily="34" charset="0"/>
-                <a:ea typeface="Calibri" pitchFamily="34" charset="-122"/>
-                <a:cs typeface="Calibri" pitchFamily="34" charset="-120"/>
+                <a:latin typeface="Times New Roman" pitchFamily="34" charset="0"/>
+                <a:ea typeface="Times New Roman" pitchFamily="34" charset="-122"/>
+                <a:cs typeface="Times New Roman" pitchFamily="34" charset="-120"/>
               </a:rPr>
               <a:t>2</a:t>
             </a:r>
@@ -8487,7 +8457,7 @@
           <a:bodyPr wrap="square" lIns="0" tIns="0" rIns="0" bIns="0" rtlCol="0" anchor="ctr"/>
           <a:lstStyle/>
           <a:p>
-            <a:pPr marL="0" indent="0">
+            <a:pPr indent="0" marL="0">
               <a:buNone/>
             </a:pPr>
             <a:r>
@@ -8495,9 +8465,9 @@
                 <a:solidFill>
                   <a:srgbClr val="223A5E"/>
                 </a:solidFill>
-                <a:latin typeface="Georgia" pitchFamily="34" charset="0"/>
-                <a:ea typeface="Georgia" pitchFamily="34" charset="-122"/>
-                <a:cs typeface="Georgia" pitchFamily="34" charset="-120"/>
+                <a:latin typeface="Times New Roman" pitchFamily="34" charset="0"/>
+                <a:ea typeface="Times New Roman" pitchFamily="34" charset="-122"/>
+                <a:cs typeface="Times New Roman" pitchFamily="34" charset="-120"/>
               </a:rPr>
               <a:t>Apply unlearning</a:t>
             </a:r>
@@ -8528,7 +8498,7 @@
           </a:bodyPr>
           <a:lstStyle/>
           <a:p>
-            <a:pPr marL="0" indent="0">
+            <a:pPr indent="0" marL="0">
               <a:buNone/>
             </a:pPr>
             <a:r>
@@ -8536,9 +8506,9 @@
                 <a:solidFill>
                   <a:srgbClr val="1E2630"/>
                 </a:solidFill>
-                <a:latin typeface="Calibri" pitchFamily="34" charset="0"/>
-                <a:ea typeface="Calibri" pitchFamily="34" charset="-122"/>
-                <a:cs typeface="Calibri" pitchFamily="34" charset="-120"/>
+                <a:latin typeface="Times New Roman" pitchFamily="34" charset="0"/>
+                <a:ea typeface="Times New Roman" pitchFamily="34" charset="-122"/>
+                <a:cs typeface="Times New Roman" pitchFamily="34" charset="-120"/>
               </a:rPr>
               <a:t>Run the selected graph unlearning method.</a:t>
             </a:r>
@@ -8572,13 +8542,6 @@
             <a:prstDash val="solid"/>
           </a:ln>
         </p:spPr>
-        <p:txBody>
-          <a:bodyPr/>
-          <a:lstStyle/>
-          <a:p>
-            <a:endParaRPr lang="zh-CN" altLang="en-US"/>
-          </a:p>
-        </p:txBody>
       </p:sp>
       <p:sp>
         <p:nvSpPr>
@@ -8606,13 +8569,6 @@
             <a:prstDash val="solid"/>
           </a:ln>
         </p:spPr>
-        <p:txBody>
-          <a:bodyPr/>
-          <a:lstStyle/>
-          <a:p>
-            <a:endParaRPr lang="zh-CN" altLang="en-US"/>
-          </a:p>
-        </p:txBody>
       </p:sp>
       <p:sp>
         <p:nvSpPr>
@@ -8635,7 +8591,7 @@
           <a:bodyPr wrap="square" lIns="0" tIns="0" rIns="0" bIns="0" rtlCol="0" anchor="ctr"/>
           <a:lstStyle/>
           <a:p>
-            <a:pPr marL="0" indent="0" algn="ctr">
+            <a:pPr algn="ctr" indent="0" marL="0">
               <a:buNone/>
             </a:pPr>
             <a:r>
@@ -8643,9 +8599,9 @@
                 <a:solidFill>
                   <a:srgbClr val="223A5E"/>
                 </a:solidFill>
-                <a:latin typeface="Calibri" pitchFamily="34" charset="0"/>
-                <a:ea typeface="Calibri" pitchFamily="34" charset="-122"/>
-                <a:cs typeface="Calibri" pitchFamily="34" charset="-120"/>
+                <a:latin typeface="Times New Roman" pitchFamily="34" charset="0"/>
+                <a:ea typeface="Times New Roman" pitchFamily="34" charset="-122"/>
+                <a:cs typeface="Times New Roman" pitchFamily="34" charset="-120"/>
               </a:rPr>
               <a:t>3</a:t>
             </a:r>
@@ -8674,7 +8630,7 @@
           <a:bodyPr wrap="square" lIns="0" tIns="0" rIns="0" bIns="0" rtlCol="0" anchor="ctr"/>
           <a:lstStyle/>
           <a:p>
-            <a:pPr marL="0" indent="0">
+            <a:pPr indent="0" marL="0">
               <a:buNone/>
             </a:pPr>
             <a:r>
@@ -8682,9 +8638,9 @@
                 <a:solidFill>
                   <a:srgbClr val="223A5E"/>
                 </a:solidFill>
-                <a:latin typeface="Georgia" pitchFamily="34" charset="0"/>
-                <a:ea typeface="Georgia" pitchFamily="34" charset="-122"/>
-                <a:cs typeface="Georgia" pitchFamily="34" charset="-120"/>
+                <a:latin typeface="Times New Roman" pitchFamily="34" charset="0"/>
+                <a:ea typeface="Times New Roman" pitchFamily="34" charset="-122"/>
+                <a:cs typeface="Times New Roman" pitchFamily="34" charset="-120"/>
               </a:rPr>
               <a:t>Exact retrain control</a:t>
             </a:r>
@@ -8715,7 +8671,7 @@
           </a:bodyPr>
           <a:lstStyle/>
           <a:p>
-            <a:pPr marL="0" indent="0">
+            <a:pPr indent="0" marL="0">
               <a:buNone/>
             </a:pPr>
             <a:r>
@@ -8723,9 +8679,9 @@
                 <a:solidFill>
                   <a:srgbClr val="1E2630"/>
                 </a:solidFill>
-                <a:latin typeface="Calibri" pitchFamily="34" charset="0"/>
-                <a:ea typeface="Calibri" pitchFamily="34" charset="-122"/>
-                <a:cs typeface="Calibri" pitchFamily="34" charset="-120"/>
+                <a:latin typeface="Times New Roman" pitchFamily="34" charset="0"/>
+                <a:ea typeface="Times New Roman" pitchFamily="34" charset="-122"/>
+                <a:cs typeface="Times New Roman" pitchFamily="34" charset="-120"/>
               </a:rPr>
               <a:t>Retrain on the same deletions for the gold-standard reference.</a:t>
             </a:r>
@@ -8759,13 +8715,6 @@
             <a:prstDash val="solid"/>
           </a:ln>
         </p:spPr>
-        <p:txBody>
-          <a:bodyPr/>
-          <a:lstStyle/>
-          <a:p>
-            <a:endParaRPr lang="zh-CN" altLang="en-US"/>
-          </a:p>
-        </p:txBody>
       </p:sp>
       <p:sp>
         <p:nvSpPr>
@@ -8793,13 +8742,6 @@
             <a:prstDash val="solid"/>
           </a:ln>
         </p:spPr>
-        <p:txBody>
-          <a:bodyPr/>
-          <a:lstStyle/>
-          <a:p>
-            <a:endParaRPr lang="zh-CN" altLang="en-US"/>
-          </a:p>
-        </p:txBody>
       </p:sp>
       <p:sp>
         <p:nvSpPr>
@@ -8822,7 +8764,7 @@
           <a:bodyPr wrap="square" lIns="0" tIns="0" rIns="0" bIns="0" rtlCol="0" anchor="ctr"/>
           <a:lstStyle/>
           <a:p>
-            <a:pPr marL="0" indent="0" algn="ctr">
+            <a:pPr algn="ctr" indent="0" marL="0">
               <a:buNone/>
             </a:pPr>
             <a:r>
@@ -8830,9 +8772,9 @@
                 <a:solidFill>
                   <a:srgbClr val="FFFFFF"/>
                 </a:solidFill>
-                <a:latin typeface="Calibri" pitchFamily="34" charset="0"/>
-                <a:ea typeface="Calibri" pitchFamily="34" charset="-122"/>
-                <a:cs typeface="Calibri" pitchFamily="34" charset="-120"/>
+                <a:latin typeface="Times New Roman" pitchFamily="34" charset="0"/>
+                <a:ea typeface="Times New Roman" pitchFamily="34" charset="-122"/>
+                <a:cs typeface="Times New Roman" pitchFamily="34" charset="-120"/>
               </a:rPr>
               <a:t>4</a:t>
             </a:r>
@@ -8861,7 +8803,7 @@
           <a:bodyPr wrap="square" lIns="0" tIns="0" rIns="0" bIns="0" rtlCol="0" anchor="ctr"/>
           <a:lstStyle/>
           <a:p>
-            <a:pPr marL="0" indent="0">
+            <a:pPr indent="0" marL="0">
               <a:buNone/>
             </a:pPr>
             <a:r>
@@ -8869,9 +8811,9 @@
                 <a:solidFill>
                   <a:srgbClr val="223A5E"/>
                 </a:solidFill>
-                <a:latin typeface="Georgia" pitchFamily="34" charset="0"/>
-                <a:ea typeface="Georgia" pitchFamily="34" charset="-122"/>
-                <a:cs typeface="Georgia" pitchFamily="34" charset="-120"/>
+                <a:latin typeface="Times New Roman" pitchFamily="34" charset="0"/>
+                <a:ea typeface="Times New Roman" pitchFamily="34" charset="-122"/>
+                <a:cs typeface="Times New Roman" pitchFamily="34" charset="-120"/>
               </a:rPr>
               <a:t>Compare outcomes</a:t>
             </a:r>
@@ -8902,7 +8844,7 @@
           </a:bodyPr>
           <a:lstStyle/>
           <a:p>
-            <a:pPr marL="0" indent="0">
+            <a:pPr indent="0" marL="0">
               <a:buNone/>
             </a:pPr>
             <a:r>
@@ -8910,9 +8852,9 @@
                 <a:solidFill>
                   <a:srgbClr val="1E2630"/>
                 </a:solidFill>
-                <a:latin typeface="Calibri" pitchFamily="34" charset="0"/>
-                <a:ea typeface="Calibri" pitchFamily="34" charset="-122"/>
-                <a:cs typeface="Calibri" pitchFamily="34" charset="-120"/>
+                <a:latin typeface="Times New Roman" pitchFamily="34" charset="0"/>
+                <a:ea typeface="Times New Roman" pitchFamily="34" charset="-122"/>
+                <a:cs typeface="Times New Roman" pitchFamily="34" charset="-120"/>
               </a:rPr>
               <a:t>Read utility loss, retrain gap, and collateral damage.</a:t>
             </a:r>
@@ -8946,13 +8888,6 @@
             <a:prstDash val="solid"/>
           </a:ln>
         </p:spPr>
-        <p:txBody>
-          <a:bodyPr/>
-          <a:lstStyle/>
-          <a:p>
-            <a:endParaRPr lang="zh-CN" altLang="en-US"/>
-          </a:p>
-        </p:txBody>
       </p:sp>
       <p:sp>
         <p:nvSpPr>
@@ -8975,7 +8910,7 @@
           <a:bodyPr wrap="square" lIns="0" tIns="0" rIns="0" bIns="0" rtlCol="0" anchor="ctr"/>
           <a:lstStyle/>
           <a:p>
-            <a:pPr marL="0" indent="0">
+            <a:pPr indent="0" marL="0">
               <a:buNone/>
             </a:pPr>
             <a:r>
@@ -8983,9 +8918,9 @@
                 <a:solidFill>
                   <a:srgbClr val="223A5E"/>
                 </a:solidFill>
-                <a:latin typeface="Georgia" pitchFamily="34" charset="0"/>
-                <a:ea typeface="Georgia" pitchFamily="34" charset="-122"/>
-                <a:cs typeface="Georgia" pitchFamily="34" charset="-120"/>
+                <a:latin typeface="Times New Roman" pitchFamily="34" charset="0"/>
+                <a:ea typeface="Times New Roman" pitchFamily="34" charset="-122"/>
+                <a:cs typeface="Times New Roman" pitchFamily="34" charset="-120"/>
               </a:rPr>
               <a:t>Experimental matrix</a:t>
             </a:r>
@@ -9016,7 +8951,7 @@
           </a:bodyPr>
           <a:lstStyle/>
           <a:p>
-            <a:pPr marL="0" indent="0">
+            <a:pPr indent="0" marL="0">
               <a:buNone/>
             </a:pPr>
             <a:r>
@@ -9024,16 +8959,16 @@
                 <a:solidFill>
                   <a:srgbClr val="1E2630"/>
                 </a:solidFill>
-                <a:latin typeface="Calibri" pitchFamily="34" charset="0"/>
-                <a:ea typeface="Calibri" pitchFamily="34" charset="-122"/>
-                <a:cs typeface="Calibri" pitchFamily="34" charset="-120"/>
+                <a:latin typeface="Times New Roman" pitchFamily="34" charset="0"/>
+                <a:ea typeface="Times New Roman" pitchFamily="34" charset="-122"/>
+                <a:cs typeface="Times New Roman" pitchFamily="34" charset="-120"/>
               </a:rPr>
               <a:t>Methods: 5</a:t>
             </a:r>
             <a:endParaRPr lang="en-US" sz="1220" dirty="0"/>
           </a:p>
           <a:p>
-            <a:pPr marL="0" indent="0">
+            <a:pPr indent="0" marL="0">
               <a:buNone/>
             </a:pPr>
             <a:r>
@@ -9041,16 +8976,16 @@
                 <a:solidFill>
                   <a:srgbClr val="1E2630"/>
                 </a:solidFill>
-                <a:latin typeface="Calibri" pitchFamily="34" charset="0"/>
-                <a:ea typeface="Calibri" pitchFamily="34" charset="-122"/>
-                <a:cs typeface="Calibri" pitchFamily="34" charset="-120"/>
+                <a:latin typeface="Times New Roman" pitchFamily="34" charset="0"/>
+                <a:ea typeface="Times New Roman" pitchFamily="34" charset="-122"/>
+                <a:cs typeface="Times New Roman" pitchFamily="34" charset="-120"/>
               </a:rPr>
               <a:t>Datasets: 2 citation graphs</a:t>
             </a:r>
             <a:endParaRPr lang="en-US" sz="1220" dirty="0"/>
           </a:p>
           <a:p>
-            <a:pPr marL="0" indent="0">
+            <a:pPr indent="0" marL="0">
               <a:buNone/>
             </a:pPr>
             <a:r>
@@ -9058,16 +8993,16 @@
                 <a:solidFill>
                   <a:srgbClr val="1E2630"/>
                 </a:solidFill>
-                <a:latin typeface="Calibri" pitchFamily="34" charset="0"/>
-                <a:ea typeface="Calibri" pitchFamily="34" charset="-122"/>
-                <a:cs typeface="Calibri" pitchFamily="34" charset="-120"/>
+                <a:latin typeface="Times New Roman" pitchFamily="34" charset="0"/>
+                <a:ea typeface="Times New Roman" pitchFamily="34" charset="-122"/>
+                <a:cs typeface="Times New Roman" pitchFamily="34" charset="-120"/>
               </a:rPr>
               <a:t>Backbones: 3 GNN architectures</a:t>
             </a:r>
             <a:endParaRPr lang="en-US" sz="1220" dirty="0"/>
           </a:p>
           <a:p>
-            <a:pPr marL="0" indent="0">
+            <a:pPr indent="0" marL="0">
               <a:buNone/>
             </a:pPr>
             <a:r>
@@ -9075,16 +9010,16 @@
                 <a:solidFill>
                   <a:srgbClr val="1E2630"/>
                 </a:solidFill>
-                <a:latin typeface="Calibri" pitchFamily="34" charset="0"/>
-                <a:ea typeface="Calibri" pitchFamily="34" charset="-122"/>
-                <a:cs typeface="Calibri" pitchFamily="34" charset="-120"/>
+                <a:latin typeface="Times New Roman" pitchFamily="34" charset="0"/>
+                <a:ea typeface="Times New Roman" pitchFamily="34" charset="-122"/>
+                <a:cs typeface="Times New Roman" pitchFamily="34" charset="-120"/>
               </a:rPr>
               <a:t>Strategies: 6 node-selection methods</a:t>
             </a:r>
             <a:endParaRPr lang="en-US" sz="1220" dirty="0"/>
           </a:p>
           <a:p>
-            <a:pPr marL="0" indent="0">
+            <a:pPr indent="0" marL="0">
               <a:buNone/>
             </a:pPr>
             <a:r>
@@ -9092,22 +9027,22 @@
                 <a:solidFill>
                   <a:srgbClr val="1E2630"/>
                 </a:solidFill>
-                <a:latin typeface="Calibri" pitchFamily="34" charset="0"/>
-                <a:ea typeface="Calibri" pitchFamily="34" charset="-122"/>
-                <a:cs typeface="Calibri" pitchFamily="34" charset="-120"/>
+                <a:latin typeface="Times New Roman" pitchFamily="34" charset="0"/>
+                <a:ea typeface="Times New Roman" pitchFamily="34" charset="-122"/>
+                <a:cs typeface="Times New Roman" pitchFamily="34" charset="-120"/>
               </a:rPr>
               <a:t>Runs: 950 experiment executions</a:t>
             </a:r>
             <a:endParaRPr lang="en-US" sz="1220" dirty="0"/>
           </a:p>
           <a:p>
-            <a:pPr marL="0" indent="0">
+            <a:pPr indent="0" marL="0">
               <a:buNone/>
             </a:pPr>
             <a:endParaRPr lang="en-US" sz="1220" dirty="0"/>
           </a:p>
           <a:p>
-            <a:pPr marL="0" indent="0">
+            <a:pPr indent="0" marL="0">
               <a:buNone/>
             </a:pPr>
             <a:r>
@@ -9115,9 +9050,9 @@
                 <a:solidFill>
                   <a:srgbClr val="1E2630"/>
                 </a:solidFill>
-                <a:latin typeface="Calibri" pitchFamily="34" charset="0"/>
-                <a:ea typeface="Calibri" pitchFamily="34" charset="-122"/>
-                <a:cs typeface="Calibri" pitchFamily="34" charset="-120"/>
+                <a:latin typeface="Times New Roman" pitchFamily="34" charset="0"/>
+                <a:ea typeface="Times New Roman" pitchFamily="34" charset="-122"/>
+                <a:cs typeface="Times New Roman" pitchFamily="34" charset="-120"/>
               </a:rPr>
               <a:t>Story: spectrum, deep dive, attribution, and efficiency.</a:t>
             </a:r>
@@ -9141,7 +9076,6 @@
         <a:solidFill>
           <a:srgbClr val="F7F5F1"/>
         </a:solidFill>
-        <a:effectLst/>
       </p:bgPr>
     </p:bg>
     <p:spTree>
@@ -9184,13 +9118,6 @@
             <a:prstDash val="solid"/>
           </a:ln>
         </p:spPr>
-        <p:txBody>
-          <a:bodyPr/>
-          <a:lstStyle/>
-          <a:p>
-            <a:endParaRPr lang="zh-CN" altLang="en-US"/>
-          </a:p>
-        </p:txBody>
       </p:sp>
       <p:sp>
         <p:nvSpPr>
@@ -9213,7 +9140,7 @@
           <a:bodyPr wrap="square" lIns="0" tIns="0" rIns="0" bIns="0" rtlCol="0" anchor="ctr"/>
           <a:lstStyle/>
           <a:p>
-            <a:pPr marL="0" indent="0">
+            <a:pPr indent="0" marL="0">
               <a:buNone/>
             </a:pPr>
             <a:r>
@@ -9221,9 +9148,9 @@
                 <a:solidFill>
                   <a:srgbClr val="FFFFFF"/>
                 </a:solidFill>
-                <a:latin typeface="Georgia" pitchFamily="34" charset="0"/>
-                <a:ea typeface="Georgia" pitchFamily="34" charset="-122"/>
-                <a:cs typeface="Georgia" pitchFamily="34" charset="-120"/>
+                <a:latin typeface="Times New Roman" pitchFamily="34" charset="0"/>
+                <a:ea typeface="Times New Roman" pitchFamily="34" charset="-122"/>
+                <a:cs typeface="Times New Roman" pitchFamily="34" charset="-120"/>
               </a:rPr>
               <a:t>What Was Built In OpenGU</a:t>
             </a:r>
@@ -9252,7 +9179,7 @@
           <a:bodyPr wrap="square" lIns="0" tIns="0" rIns="0" bIns="0" rtlCol="0" anchor="ctr"/>
           <a:lstStyle/>
           <a:p>
-            <a:pPr marL="0" indent="0" algn="r">
+            <a:pPr algn="r" indent="0" marL="0">
               <a:buNone/>
             </a:pPr>
             <a:r>
@@ -9260,9 +9187,9 @@
                 <a:solidFill>
                   <a:srgbClr val="F7F5F1"/>
                 </a:solidFill>
-                <a:latin typeface="Calibri" pitchFamily="34" charset="0"/>
-                <a:ea typeface="Calibri" pitchFamily="34" charset="-122"/>
-                <a:cs typeface="Calibri" pitchFamily="34" charset="-120"/>
+                <a:latin typeface="Times New Roman" pitchFamily="34" charset="0"/>
+                <a:ea typeface="Times New Roman" pitchFamily="34" charset="-122"/>
+                <a:cs typeface="Times New Roman" pitchFamily="34" charset="-120"/>
               </a:rPr>
               <a:t>06 / 14</a:t>
             </a:r>
@@ -9291,7 +9218,7 @@
           <a:bodyPr wrap="square" lIns="0" tIns="0" rIns="0" bIns="0" rtlCol="0" anchor="ctr"/>
           <a:lstStyle/>
           <a:p>
-            <a:pPr marL="0" indent="0">
+            <a:pPr indent="0" marL="0">
               <a:buNone/>
             </a:pPr>
             <a:r>
@@ -9299,9 +9226,9 @@
                 <a:solidFill>
                   <a:srgbClr val="667085"/>
                 </a:solidFill>
-                <a:latin typeface="Calibri" pitchFamily="34" charset="0"/>
-                <a:ea typeface="Calibri" pitchFamily="34" charset="-122"/>
-                <a:cs typeface="Calibri" pitchFamily="34" charset="-120"/>
+                <a:latin typeface="Times New Roman" pitchFamily="34" charset="0"/>
+                <a:ea typeface="Times New Roman" pitchFamily="34" charset="-122"/>
+                <a:cs typeface="Times New Roman" pitchFamily="34" charset="-120"/>
               </a:rPr>
               <a:t>EE5003 MSc Project | Liu Chengyu</a:t>
             </a:r>
@@ -9330,7 +9257,7 @@
           <a:bodyPr wrap="square" lIns="0" tIns="0" rIns="0" bIns="0" rtlCol="0" anchor="ctr"/>
           <a:lstStyle/>
           <a:p>
-            <a:pPr marL="0" indent="0" algn="r">
+            <a:pPr algn="r" indent="0" marL="0">
               <a:buNone/>
             </a:pPr>
             <a:r>
@@ -9338,9 +9265,9 @@
                 <a:solidFill>
                   <a:srgbClr val="667085"/>
                 </a:solidFill>
-                <a:latin typeface="Calibri" pitchFamily="34" charset="0"/>
-                <a:ea typeface="Calibri" pitchFamily="34" charset="-122"/>
-                <a:cs typeface="Calibri" pitchFamily="34" charset="-120"/>
+                <a:latin typeface="Times New Roman" pitchFamily="34" charset="0"/>
+                <a:ea typeface="Times New Roman" pitchFamily="34" charset="-122"/>
+                <a:cs typeface="Times New Roman" pitchFamily="34" charset="-120"/>
               </a:rPr>
               <a:t>Approximate Graph Unlearning Audit</a:t>
             </a:r>
@@ -9369,7 +9296,7 @@
           <a:bodyPr wrap="square" lIns="0" tIns="0" rIns="0" bIns="0" rtlCol="0" anchor="ctr"/>
           <a:lstStyle/>
           <a:p>
-            <a:pPr marL="0" indent="0">
+            <a:pPr indent="0" marL="0">
               <a:buNone/>
             </a:pPr>
             <a:r>
@@ -9377,9 +9304,9 @@
                 <a:solidFill>
                   <a:srgbClr val="223A5E"/>
                 </a:solidFill>
-                <a:latin typeface="Georgia" pitchFamily="34" charset="0"/>
-                <a:ea typeface="Georgia" pitchFamily="34" charset="-122"/>
-                <a:cs typeface="Georgia" pitchFamily="34" charset="-120"/>
+                <a:latin typeface="Times New Roman" pitchFamily="34" charset="0"/>
+                <a:ea typeface="Times New Roman" pitchFamily="34" charset="-122"/>
+                <a:cs typeface="Times New Roman" pitchFamily="34" charset="-120"/>
               </a:rPr>
               <a:t>The project contribution is a reusable adversarial-audit workflow, not only a single batch of experiments.</a:t>
             </a:r>
@@ -9413,13 +9340,6 @@
             <a:prstDash val="solid"/>
           </a:ln>
         </p:spPr>
-        <p:txBody>
-          <a:bodyPr/>
-          <a:lstStyle/>
-          <a:p>
-            <a:endParaRPr lang="zh-CN" altLang="en-US"/>
-          </a:p>
-        </p:txBody>
       </p:sp>
       <p:sp>
         <p:nvSpPr>
@@ -9442,7 +9362,7 @@
           <a:bodyPr wrap="square" lIns="0" tIns="0" rIns="0" bIns="0" rtlCol="0" anchor="ctr"/>
           <a:lstStyle/>
           <a:p>
-            <a:pPr marL="0" indent="0">
+            <a:pPr indent="0" marL="0">
               <a:buNone/>
             </a:pPr>
             <a:r>
@@ -9450,9 +9370,9 @@
                 <a:solidFill>
                   <a:srgbClr val="223A5E"/>
                 </a:solidFill>
-                <a:latin typeface="Georgia" pitchFamily="34" charset="0"/>
-                <a:ea typeface="Georgia" pitchFamily="34" charset="-122"/>
-                <a:cs typeface="Georgia" pitchFamily="34" charset="-120"/>
+                <a:latin typeface="Times New Roman" pitchFamily="34" charset="0"/>
+                <a:ea typeface="Times New Roman" pitchFamily="34" charset="-122"/>
+                <a:cs typeface="Times New Roman" pitchFamily="34" charset="-120"/>
               </a:rPr>
               <a:t>Execution</a:t>
             </a:r>
@@ -9483,7 +9403,7 @@
           </a:bodyPr>
           <a:lstStyle/>
           <a:p>
-            <a:pPr marL="0" indent="0">
+            <a:pPr indent="0" marL="0">
               <a:buNone/>
             </a:pPr>
             <a:r>
@@ -9491,9 +9411,9 @@
                 <a:solidFill>
                   <a:srgbClr val="1E2630"/>
                 </a:solidFill>
-                <a:latin typeface="Calibri" pitchFamily="34" charset="0"/>
-                <a:ea typeface="Calibri" pitchFamily="34" charset="-122"/>
-                <a:cs typeface="Calibri" pitchFamily="34" charset="-120"/>
+                <a:latin typeface="Times New Roman" pitchFamily="34" charset="0"/>
+                <a:ea typeface="Times New Roman" pitchFamily="34" charset="-122"/>
+                <a:cs typeface="Times New Roman" pitchFamily="34" charset="-120"/>
               </a:rPr>
               <a:t>Structured batch experiment runs across methods, datasets, and deletion ratios.</a:t>
             </a:r>
@@ -9527,13 +9447,6 @@
             <a:prstDash val="solid"/>
           </a:ln>
         </p:spPr>
-        <p:txBody>
-          <a:bodyPr/>
-          <a:lstStyle/>
-          <a:p>
-            <a:endParaRPr lang="zh-CN" altLang="en-US"/>
-          </a:p>
-        </p:txBody>
       </p:sp>
       <p:sp>
         <p:nvSpPr>
@@ -9556,7 +9469,7 @@
           <a:bodyPr wrap="square" lIns="0" tIns="0" rIns="0" bIns="0" rtlCol="0" anchor="ctr"/>
           <a:lstStyle/>
           <a:p>
-            <a:pPr marL="0" indent="0">
+            <a:pPr indent="0" marL="0">
               <a:buNone/>
             </a:pPr>
             <a:r>
@@ -9564,9 +9477,9 @@
                 <a:solidFill>
                   <a:srgbClr val="223A5E"/>
                 </a:solidFill>
-                <a:latin typeface="Georgia" pitchFamily="34" charset="0"/>
-                <a:ea typeface="Georgia" pitchFamily="34" charset="-122"/>
-                <a:cs typeface="Georgia" pitchFamily="34" charset="-120"/>
+                <a:latin typeface="Times New Roman" pitchFamily="34" charset="0"/>
+                <a:ea typeface="Times New Roman" pitchFamily="34" charset="-122"/>
+                <a:cs typeface="Times New Roman" pitchFamily="34" charset="-120"/>
               </a:rPr>
               <a:t>Result discovery</a:t>
             </a:r>
@@ -9597,7 +9510,7 @@
           </a:bodyPr>
           <a:lstStyle/>
           <a:p>
-            <a:pPr marL="0" indent="0">
+            <a:pPr indent="0" marL="0">
               <a:buNone/>
             </a:pPr>
             <a:r>
@@ -9605,9 +9518,9 @@
                 <a:solidFill>
                   <a:srgbClr val="1E2630"/>
                 </a:solidFill>
-                <a:latin typeface="Calibri" pitchFamily="34" charset="0"/>
-                <a:ea typeface="Calibri" pitchFamily="34" charset="-122"/>
-                <a:cs typeface="Calibri" pitchFamily="34" charset="-120"/>
+                <a:latin typeface="Times New Roman" pitchFamily="34" charset="0"/>
+                <a:ea typeface="Times New Roman" pitchFamily="34" charset="-122"/>
+                <a:cs typeface="Times New Roman" pitchFamily="34" charset="-120"/>
               </a:rPr>
               <a:t>Auto-discovery of stored outputs to reduce manual bookkeeping.</a:t>
             </a:r>
@@ -9641,13 +9554,6 @@
             <a:prstDash val="solid"/>
           </a:ln>
         </p:spPr>
-        <p:txBody>
-          <a:bodyPr/>
-          <a:lstStyle/>
-          <a:p>
-            <a:endParaRPr lang="zh-CN" altLang="en-US"/>
-          </a:p>
-        </p:txBody>
       </p:sp>
       <p:sp>
         <p:nvSpPr>
@@ -9670,7 +9576,7 @@
           <a:bodyPr wrap="square" lIns="0" tIns="0" rIns="0" bIns="0" rtlCol="0" anchor="ctr"/>
           <a:lstStyle/>
           <a:p>
-            <a:pPr marL="0" indent="0">
+            <a:pPr indent="0" marL="0">
               <a:buNone/>
             </a:pPr>
             <a:r>
@@ -9678,9 +9584,9 @@
                 <a:solidFill>
                   <a:srgbClr val="223A5E"/>
                 </a:solidFill>
-                <a:latin typeface="Georgia" pitchFamily="34" charset="0"/>
-                <a:ea typeface="Georgia" pitchFamily="34" charset="-122"/>
-                <a:cs typeface="Georgia" pitchFamily="34" charset="-120"/>
+                <a:latin typeface="Times New Roman" pitchFamily="34" charset="0"/>
+                <a:ea typeface="Times New Roman" pitchFamily="34" charset="-122"/>
+                <a:cs typeface="Times New Roman" pitchFamily="34" charset="-120"/>
               </a:rPr>
               <a:t>Collateral analysis</a:t>
             </a:r>
@@ -9711,7 +9617,7 @@
           </a:bodyPr>
           <a:lstStyle/>
           <a:p>
-            <a:pPr marL="0" indent="0">
+            <a:pPr indent="0" marL="0">
               <a:buNone/>
             </a:pPr>
             <a:r>
@@ -9719,9 +9625,9 @@
                 <a:solidFill>
                   <a:srgbClr val="1E2630"/>
                 </a:solidFill>
-                <a:latin typeface="Calibri" pitchFamily="34" charset="0"/>
-                <a:ea typeface="Calibri" pitchFamily="34" charset="-122"/>
-                <a:cs typeface="Calibri" pitchFamily="34" charset="-120"/>
+                <a:latin typeface="Times New Roman" pitchFamily="34" charset="0"/>
+                <a:ea typeface="Times New Roman" pitchFamily="34" charset="-122"/>
+                <a:cs typeface="Times New Roman" pitchFamily="34" charset="-120"/>
               </a:rPr>
               <a:t>Retained-node prediction tracking to reveal spillover.</a:t>
             </a:r>
@@ -9755,13 +9661,6 @@
             <a:prstDash val="solid"/>
           </a:ln>
         </p:spPr>
-        <p:txBody>
-          <a:bodyPr/>
-          <a:lstStyle/>
-          <a:p>
-            <a:endParaRPr lang="zh-CN" altLang="en-US"/>
-          </a:p>
-        </p:txBody>
       </p:sp>
       <p:sp>
         <p:nvSpPr>
@@ -9784,7 +9683,7 @@
           <a:bodyPr wrap="square" lIns="0" tIns="0" rIns="0" bIns="0" rtlCol="0" anchor="ctr"/>
           <a:lstStyle/>
           <a:p>
-            <a:pPr marL="0" indent="0">
+            <a:pPr indent="0" marL="0">
               <a:buNone/>
             </a:pPr>
             <a:r>
@@ -9792,9 +9691,9 @@
                 <a:solidFill>
                   <a:srgbClr val="223A5E"/>
                 </a:solidFill>
-                <a:latin typeface="Georgia" pitchFamily="34" charset="0"/>
-                <a:ea typeface="Georgia" pitchFamily="34" charset="-122"/>
-                <a:cs typeface="Georgia" pitchFamily="34" charset="-120"/>
+                <a:latin typeface="Times New Roman" pitchFamily="34" charset="0"/>
+                <a:ea typeface="Times New Roman" pitchFamily="34" charset="-122"/>
+                <a:cs typeface="Times New Roman" pitchFamily="34" charset="-120"/>
               </a:rPr>
               <a:t>Statistical summary</a:t>
             </a:r>
@@ -9825,7 +9724,7 @@
           </a:bodyPr>
           <a:lstStyle/>
           <a:p>
-            <a:pPr marL="0" indent="0">
+            <a:pPr indent="0" marL="0">
               <a:buNone/>
             </a:pPr>
             <a:r>
@@ -9833,9 +9732,9 @@
                 <a:solidFill>
                   <a:srgbClr val="1E2630"/>
                 </a:solidFill>
-                <a:latin typeface="Calibri" pitchFamily="34" charset="0"/>
-                <a:ea typeface="Calibri" pitchFamily="34" charset="-122"/>
-                <a:cs typeface="Calibri" pitchFamily="34" charset="-120"/>
+                <a:latin typeface="Times New Roman" pitchFamily="34" charset="0"/>
+                <a:ea typeface="Times New Roman" pitchFamily="34" charset="-122"/>
+                <a:cs typeface="Times New Roman" pitchFamily="34" charset="-120"/>
               </a:rPr>
               <a:t>Relative F1 drop, support thresholds, and effect-size comparisons.</a:t>
             </a:r>
@@ -9869,13 +9768,6 @@
             <a:prstDash val="solid"/>
           </a:ln>
         </p:spPr>
-        <p:txBody>
-          <a:bodyPr/>
-          <a:lstStyle/>
-          <a:p>
-            <a:endParaRPr lang="zh-CN" altLang="en-US"/>
-          </a:p>
-        </p:txBody>
       </p:sp>
       <p:sp>
         <p:nvSpPr>
@@ -9898,7 +9790,7 @@
           <a:bodyPr wrap="square" lIns="0" tIns="0" rIns="0" bIns="0" rtlCol="0" anchor="ctr"/>
           <a:lstStyle/>
           <a:p>
-            <a:pPr marL="0" indent="0">
+            <a:pPr indent="0" marL="0">
               <a:buNone/>
             </a:pPr>
             <a:r>
@@ -9906,9 +9798,9 @@
                 <a:solidFill>
                   <a:srgbClr val="223A5E"/>
                 </a:solidFill>
-                <a:latin typeface="Georgia" pitchFamily="34" charset="0"/>
-                <a:ea typeface="Georgia" pitchFamily="34" charset="-122"/>
-                <a:cs typeface="Georgia" pitchFamily="34" charset="-120"/>
+                <a:latin typeface="Times New Roman" pitchFamily="34" charset="0"/>
+                <a:ea typeface="Times New Roman" pitchFamily="34" charset="-122"/>
+                <a:cs typeface="Times New Roman" pitchFamily="34" charset="-120"/>
               </a:rPr>
               <a:t>Figure generation</a:t>
             </a:r>
@@ -9939,7 +9831,7 @@
           </a:bodyPr>
           <a:lstStyle/>
           <a:p>
-            <a:pPr marL="0" indent="0">
+            <a:pPr indent="0" marL="0">
               <a:buNone/>
             </a:pPr>
             <a:r>
@@ -9947,9 +9839,9 @@
                 <a:solidFill>
                   <a:srgbClr val="1E2630"/>
                 </a:solidFill>
-                <a:latin typeface="Calibri" pitchFamily="34" charset="0"/>
-                <a:ea typeface="Calibri" pitchFamily="34" charset="-122"/>
-                <a:cs typeface="Calibri" pitchFamily="34" charset="-120"/>
+                <a:latin typeface="Times New Roman" pitchFamily="34" charset="0"/>
+                <a:ea typeface="Times New Roman" pitchFamily="34" charset="-122"/>
+                <a:cs typeface="Times New Roman" pitchFamily="34" charset="-120"/>
               </a:rPr>
               <a:t>Reusable plotting scripts that turn stored outputs into report figures.</a:t>
             </a:r>
@@ -9985,13 +9877,6 @@
             <a:prstDash val="solid"/>
           </a:ln>
         </p:spPr>
-        <p:txBody>
-          <a:bodyPr/>
-          <a:lstStyle/>
-          <a:p>
-            <a:endParaRPr lang="zh-CN" altLang="en-US"/>
-          </a:p>
-        </p:txBody>
       </p:sp>
       <p:sp>
         <p:nvSpPr>
@@ -10014,7 +9899,7 @@
           <a:bodyPr wrap="square" lIns="0" tIns="0" rIns="0" bIns="0" rtlCol="0" anchor="ctr"/>
           <a:lstStyle/>
           <a:p>
-            <a:pPr marL="0" indent="0" algn="ctr">
+            <a:pPr algn="ctr" indent="0" marL="0">
               <a:buNone/>
             </a:pPr>
             <a:r>
@@ -10022,9 +9907,9 @@
                 <a:solidFill>
                   <a:srgbClr val="FFFFFF"/>
                 </a:solidFill>
-                <a:latin typeface="Georgia" pitchFamily="34" charset="0"/>
-                <a:ea typeface="Georgia" pitchFamily="34" charset="-122"/>
-                <a:cs typeface="Georgia" pitchFamily="34" charset="-120"/>
+                <a:latin typeface="Times New Roman" pitchFamily="34" charset="0"/>
+                <a:ea typeface="Times New Roman" pitchFamily="34" charset="-122"/>
+                <a:cs typeface="Times New Roman" pitchFamily="34" charset="-120"/>
               </a:rPr>
               <a:t>Reproducible</a:t>
             </a:r>
@@ -10055,7 +9940,7 @@
           </a:bodyPr>
           <a:lstStyle/>
           <a:p>
-            <a:pPr marL="0" indent="0" algn="ctr">
+            <a:pPr algn="ctr" indent="0" marL="0">
               <a:buNone/>
             </a:pPr>
             <a:r>
@@ -10063,9 +9948,9 @@
                 <a:solidFill>
                   <a:srgbClr val="F7F5F1"/>
                 </a:solidFill>
-                <a:latin typeface="Calibri" pitchFamily="34" charset="0"/>
-                <a:ea typeface="Calibri" pitchFamily="34" charset="-122"/>
-                <a:cs typeface="Calibri" pitchFamily="34" charset="-120"/>
+                <a:latin typeface="Times New Roman" pitchFamily="34" charset="0"/>
+                <a:ea typeface="Times New Roman" pitchFamily="34" charset="-122"/>
+                <a:cs typeface="Times New Roman" pitchFamily="34" charset="-120"/>
               </a:rPr>
               <a:t>analysis from stored outputs</a:t>
             </a:r>
@@ -10089,7 +9974,6 @@
         <a:solidFill>
           <a:srgbClr val="FFFFFF"/>
         </a:solidFill>
-        <a:effectLst/>
       </p:bgPr>
     </p:bg>
     <p:spTree>
@@ -10132,13 +10016,6 @@
             <a:prstDash val="solid"/>
           </a:ln>
         </p:spPr>
-        <p:txBody>
-          <a:bodyPr/>
-          <a:lstStyle/>
-          <a:p>
-            <a:endParaRPr lang="zh-CN" altLang="en-US"/>
-          </a:p>
-        </p:txBody>
       </p:sp>
       <p:sp>
         <p:nvSpPr>
@@ -10161,7 +10038,7 @@
           <a:bodyPr wrap="square" lIns="0" tIns="0" rIns="0" bIns="0" rtlCol="0" anchor="ctr"/>
           <a:lstStyle/>
           <a:p>
-            <a:pPr marL="0" indent="0">
+            <a:pPr indent="0" marL="0">
               <a:buNone/>
             </a:pPr>
             <a:r>
@@ -10169,9 +10046,9 @@
                 <a:solidFill>
                   <a:srgbClr val="FFFFFF"/>
                 </a:solidFill>
-                <a:latin typeface="Georgia" pitchFamily="34" charset="0"/>
-                <a:ea typeface="Georgia" pitchFamily="34" charset="-122"/>
-                <a:cs typeface="Georgia" pitchFamily="34" charset="-120"/>
+                <a:latin typeface="Times New Roman" pitchFamily="34" charset="0"/>
+                <a:ea typeface="Times New Roman" pitchFamily="34" charset="-122"/>
+                <a:cs typeface="Times New Roman" pitchFamily="34" charset="-120"/>
               </a:rPr>
               <a:t>Main Finding: Vulnerability Spectrum</a:t>
             </a:r>
@@ -10200,7 +10077,7 @@
           <a:bodyPr wrap="square" lIns="0" tIns="0" rIns="0" bIns="0" rtlCol="0" anchor="ctr"/>
           <a:lstStyle/>
           <a:p>
-            <a:pPr marL="0" indent="0" algn="r">
+            <a:pPr algn="r" indent="0" marL="0">
               <a:buNone/>
             </a:pPr>
             <a:r>
@@ -10208,9 +10085,9 @@
                 <a:solidFill>
                   <a:srgbClr val="F7F5F1"/>
                 </a:solidFill>
-                <a:latin typeface="Calibri" pitchFamily="34" charset="0"/>
-                <a:ea typeface="Calibri" pitchFamily="34" charset="-122"/>
-                <a:cs typeface="Calibri" pitchFamily="34" charset="-120"/>
+                <a:latin typeface="Times New Roman" pitchFamily="34" charset="0"/>
+                <a:ea typeface="Times New Roman" pitchFamily="34" charset="-122"/>
+                <a:cs typeface="Times New Roman" pitchFamily="34" charset="-120"/>
               </a:rPr>
               <a:t>07 / 14</a:t>
             </a:r>
@@ -10239,7 +10116,7 @@
           <a:bodyPr wrap="square" lIns="0" tIns="0" rIns="0" bIns="0" rtlCol="0" anchor="ctr"/>
           <a:lstStyle/>
           <a:p>
-            <a:pPr marL="0" indent="0">
+            <a:pPr indent="0" marL="0">
               <a:buNone/>
             </a:pPr>
             <a:r>
@@ -10247,9 +10124,9 @@
                 <a:solidFill>
                   <a:srgbClr val="667085"/>
                 </a:solidFill>
-                <a:latin typeface="Calibri" pitchFamily="34" charset="0"/>
-                <a:ea typeface="Calibri" pitchFamily="34" charset="-122"/>
-                <a:cs typeface="Calibri" pitchFamily="34" charset="-120"/>
+                <a:latin typeface="Times New Roman" pitchFamily="34" charset="0"/>
+                <a:ea typeface="Times New Roman" pitchFamily="34" charset="-122"/>
+                <a:cs typeface="Times New Roman" pitchFamily="34" charset="-120"/>
               </a:rPr>
               <a:t>EE5003 MSc Project | Liu Chengyu</a:t>
             </a:r>
@@ -10278,7 +10155,7 @@
           <a:bodyPr wrap="square" lIns="0" tIns="0" rIns="0" bIns="0" rtlCol="0" anchor="ctr"/>
           <a:lstStyle/>
           <a:p>
-            <a:pPr marL="0" indent="0" algn="r">
+            <a:pPr algn="r" indent="0" marL="0">
               <a:buNone/>
             </a:pPr>
             <a:r>
@@ -10286,9 +10163,9 @@
                 <a:solidFill>
                   <a:srgbClr val="667085"/>
                 </a:solidFill>
-                <a:latin typeface="Calibri" pitchFamily="34" charset="0"/>
-                <a:ea typeface="Calibri" pitchFamily="34" charset="-122"/>
-                <a:cs typeface="Calibri" pitchFamily="34" charset="-120"/>
+                <a:latin typeface="Times New Roman" pitchFamily="34" charset="0"/>
+                <a:ea typeface="Times New Roman" pitchFamily="34" charset="-122"/>
+                <a:cs typeface="Times New Roman" pitchFamily="34" charset="-120"/>
               </a:rPr>
               <a:t>Approximate Graph Unlearning Audit</a:t>
             </a:r>
@@ -10298,14 +10175,14 @@
       </p:sp>
       <p:pic>
         <p:nvPicPr>
-          <p:cNvPr id="7" name="Image 0" descr="H:\project\OpenGU\GULib-master\report\0417_5003report\figures\paper_figures\FIG-1_Generalization.png"/>
+          <p:cNvPr id="7" name="Image 0" descr="H:\project\OpenGU\GULib-master\report\0417_5003report\figures\paper_figures\FIG-1_Generalization.png">    </p:cNvPr>
           <p:cNvPicPr>
             <a:picLocks noChangeAspect="1"/>
           </p:cNvPicPr>
           <p:nvPr/>
         </p:nvPicPr>
         <p:blipFill>
-          <a:blip r:embed="rId3"/>
+          <a:blip r:embed="rId1"/>
           <a:stretch>
             <a:fillRect/>
           </a:stretch>
@@ -10341,7 +10218,7 @@
           <a:bodyPr wrap="square" lIns="0" tIns="0" rIns="0" bIns="0" rtlCol="0" anchor="ctr"/>
           <a:lstStyle/>
           <a:p>
-            <a:pPr marL="0" indent="0">
+            <a:pPr indent="0" marL="0">
               <a:buNone/>
             </a:pPr>
             <a:r>
@@ -10349,9 +10226,9 @@
                 <a:solidFill>
                   <a:srgbClr val="667085"/>
                 </a:solidFill>
-                <a:latin typeface="Calibri" pitchFamily="34" charset="0"/>
-                <a:ea typeface="Calibri" pitchFamily="34" charset="-122"/>
-                <a:cs typeface="Calibri" pitchFamily="34" charset="-120"/>
+                <a:latin typeface="Times New Roman" pitchFamily="34" charset="0"/>
+                <a:ea typeface="Times New Roman" pitchFamily="34" charset="-122"/>
+                <a:cs typeface="Times New Roman" pitchFamily="34" charset="-120"/>
               </a:rPr>
               <a:t>Figure 1. Relative F1 drop across datasets and backbones at ratio = 0.05.</a:t>
             </a:r>
@@ -10385,13 +10262,6 @@
             <a:prstDash val="solid"/>
           </a:ln>
         </p:spPr>
-        <p:txBody>
-          <a:bodyPr/>
-          <a:lstStyle/>
-          <a:p>
-            <a:endParaRPr lang="zh-CN" altLang="en-US"/>
-          </a:p>
-        </p:txBody>
       </p:sp>
       <p:sp>
         <p:nvSpPr>
@@ -10414,7 +10284,7 @@
           <a:bodyPr wrap="square" lIns="0" tIns="0" rIns="0" bIns="0" rtlCol="0" anchor="ctr"/>
           <a:lstStyle/>
           <a:p>
-            <a:pPr marL="0" indent="0">
+            <a:pPr indent="0" marL="0">
               <a:buNone/>
             </a:pPr>
             <a:r>
@@ -10422,9 +10292,9 @@
                 <a:solidFill>
                   <a:srgbClr val="F7F5F1"/>
                 </a:solidFill>
-                <a:latin typeface="Georgia" pitchFamily="34" charset="0"/>
-                <a:ea typeface="Georgia" pitchFamily="34" charset="-122"/>
-                <a:cs typeface="Georgia" pitchFamily="34" charset="-120"/>
+                <a:latin typeface="Times New Roman" pitchFamily="34" charset="0"/>
+                <a:ea typeface="Times New Roman" pitchFamily="34" charset="-122"/>
+                <a:cs typeface="Times New Roman" pitchFamily="34" charset="-120"/>
               </a:rPr>
               <a:t>Core read</a:t>
             </a:r>
@@ -10455,7 +10325,7 @@
           </a:bodyPr>
           <a:lstStyle/>
           <a:p>
-            <a:pPr marL="0" indent="0">
+            <a:pPr indent="0" marL="0">
               <a:buNone/>
             </a:pPr>
             <a:r>
@@ -10463,9 +10333,9 @@
                 <a:solidFill>
                   <a:srgbClr val="FFFFFF"/>
                 </a:solidFill>
-                <a:latin typeface="Calibri" pitchFamily="34" charset="0"/>
-                <a:ea typeface="Calibri" pitchFamily="34" charset="-122"/>
-                <a:cs typeface="Calibri" pitchFamily="34" charset="-120"/>
+                <a:latin typeface="Times New Roman" pitchFamily="34" charset="0"/>
+                <a:ea typeface="Times New Roman" pitchFamily="34" charset="-122"/>
+                <a:cs typeface="Times New Roman" pitchFamily="34" charset="-120"/>
               </a:rPr>
               <a:t>Approximate graph unlearning does not fail uniformly. Vulnerability depends strongly on the mechanism family.</a:t>
             </a:r>
@@ -10499,13 +10369,6 @@
             <a:prstDash val="solid"/>
           </a:ln>
         </p:spPr>
-        <p:txBody>
-          <a:bodyPr/>
-          <a:lstStyle/>
-          <a:p>
-            <a:endParaRPr lang="zh-CN" altLang="en-US"/>
-          </a:p>
-        </p:txBody>
       </p:sp>
       <p:sp>
         <p:nvSpPr>
@@ -10528,7 +10391,7 @@
           <a:bodyPr wrap="square" lIns="0" tIns="0" rIns="0" bIns="0" rtlCol="0" anchor="ctr"/>
           <a:lstStyle/>
           <a:p>
-            <a:pPr marL="0" indent="0">
+            <a:pPr indent="0" marL="0">
               <a:buNone/>
             </a:pPr>
             <a:r>
@@ -10536,9 +10399,9 @@
                 <a:solidFill>
                   <a:srgbClr val="A6404B"/>
                 </a:solidFill>
-                <a:latin typeface="Georgia" pitchFamily="34" charset="0"/>
-                <a:ea typeface="Georgia" pitchFamily="34" charset="-122"/>
-                <a:cs typeface="Georgia" pitchFamily="34" charset="-120"/>
+                <a:latin typeface="Times New Roman" pitchFamily="34" charset="0"/>
+                <a:ea typeface="Times New Roman" pitchFamily="34" charset="-122"/>
+                <a:cs typeface="Times New Roman" pitchFamily="34" charset="-120"/>
               </a:rPr>
               <a:t>Readout</a:t>
             </a:r>
@@ -10569,7 +10432,7 @@
           </a:bodyPr>
           <a:lstStyle/>
           <a:p>
-            <a:pPr marL="0" indent="0">
+            <a:pPr indent="0" marL="0">
               <a:buNone/>
             </a:pPr>
             <a:r>
@@ -10577,16 +10440,16 @@
                 <a:solidFill>
                   <a:srgbClr val="1E2630"/>
                 </a:solidFill>
-                <a:latin typeface="Calibri" pitchFamily="34" charset="0"/>
-                <a:ea typeface="Calibri" pitchFamily="34" charset="-122"/>
-                <a:cs typeface="Calibri" pitchFamily="34" charset="-120"/>
+                <a:latin typeface="Times New Roman" pitchFamily="34" charset="0"/>
+                <a:ea typeface="Times New Roman" pitchFamily="34" charset="-122"/>
+                <a:cs typeface="Times New Roman" pitchFamily="34" charset="-120"/>
               </a:rPr>
               <a:t>GNNDelete highest.</a:t>
             </a:r>
             <a:endParaRPr lang="en-US" sz="1220" dirty="0"/>
           </a:p>
           <a:p>
-            <a:pPr marL="0" indent="0">
+            <a:pPr indent="0" marL="0">
               <a:buNone/>
             </a:pPr>
             <a:r>
@@ -10594,16 +10457,16 @@
                 <a:solidFill>
                   <a:srgbClr val="1E2630"/>
                 </a:solidFill>
-                <a:latin typeface="Calibri" pitchFamily="34" charset="0"/>
-                <a:ea typeface="Calibri" pitchFamily="34" charset="-122"/>
-                <a:cs typeface="Calibri" pitchFamily="34" charset="-120"/>
+                <a:latin typeface="Times New Roman" pitchFamily="34" charset="0"/>
+                <a:ea typeface="Times New Roman" pitchFamily="34" charset="-122"/>
+                <a:cs typeface="Times New Roman" pitchFamily="34" charset="-120"/>
               </a:rPr>
               <a:t>GIF comparatively stable.</a:t>
             </a:r>
             <a:endParaRPr lang="en-US" sz="1220" dirty="0"/>
           </a:p>
           <a:p>
-            <a:pPr marL="0" indent="0">
+            <a:pPr indent="0" marL="0">
               <a:buNone/>
             </a:pPr>
             <a:r>
@@ -10611,9 +10474,9 @@
                 <a:solidFill>
                   <a:srgbClr val="1E2630"/>
                 </a:solidFill>
-                <a:latin typeface="Calibri" pitchFamily="34" charset="0"/>
-                <a:ea typeface="Calibri" pitchFamily="34" charset="-122"/>
-                <a:cs typeface="Calibri" pitchFamily="34" charset="-120"/>
+                <a:latin typeface="Times New Roman" pitchFamily="34" charset="0"/>
+                <a:ea typeface="Times New Roman" pitchFamily="34" charset="-122"/>
+                <a:cs typeface="Times New Roman" pitchFamily="34" charset="-120"/>
               </a:rPr>
               <a:t>GraphEraser shows no collapse.</a:t>
             </a:r>
@@ -10651,9 +10514,9 @@
                 <a:solidFill>
                   <a:srgbClr val="1E2630"/>
                 </a:solidFill>
-                <a:latin typeface="Calibri" pitchFamily="34" charset="0"/>
-                <a:ea typeface="Calibri" pitchFamily="34" charset="-122"/>
-                <a:cs typeface="Calibri" pitchFamily="34" charset="-120"/>
+                <a:latin typeface="Times New Roman" pitchFamily="34" charset="0"/>
+                <a:ea typeface="Times New Roman" pitchFamily="34" charset="-122"/>
+                <a:cs typeface="Times New Roman" pitchFamily="34" charset="-120"/>
               </a:rPr>
               <a:t>The family-level pattern is consistent across the tested settings.</a:t>
             </a:r>
@@ -10669,9 +10532,9 @@
                 <a:solidFill>
                   <a:srgbClr val="1E2630"/>
                 </a:solidFill>
-                <a:latin typeface="Calibri" pitchFamily="34" charset="0"/>
-                <a:ea typeface="Calibri" pitchFamily="34" charset="-122"/>
-                <a:cs typeface="Calibri" pitchFamily="34" charset="-120"/>
+                <a:latin typeface="Times New Roman" pitchFamily="34" charset="0"/>
+                <a:ea typeface="Times New Roman" pitchFamily="34" charset="-122"/>
+                <a:cs typeface="Times New Roman" pitchFamily="34" charset="-120"/>
               </a:rPr>
               <a:t>Mechanism choice, not just deletion budget, determines fragility.</a:t>
             </a:r>
@@ -10695,7 +10558,6 @@
         <a:solidFill>
           <a:srgbClr val="F7F5F1"/>
         </a:solidFill>
-        <a:effectLst/>
       </p:bgPr>
     </p:bg>
     <p:spTree>
@@ -10738,13 +10600,6 @@
             <a:prstDash val="solid"/>
           </a:ln>
         </p:spPr>
-        <p:txBody>
-          <a:bodyPr/>
-          <a:lstStyle/>
-          <a:p>
-            <a:endParaRPr lang="zh-CN" altLang="en-US"/>
-          </a:p>
-        </p:txBody>
       </p:sp>
       <p:sp>
         <p:nvSpPr>
@@ -10767,7 +10622,7 @@
           <a:bodyPr wrap="square" lIns="0" tIns="0" rIns="0" bIns="0" rtlCol="0" anchor="ctr"/>
           <a:lstStyle/>
           <a:p>
-            <a:pPr marL="0" indent="0">
+            <a:pPr indent="0" marL="0">
               <a:buNone/>
             </a:pPr>
             <a:r>
@@ -10775,9 +10630,9 @@
                 <a:solidFill>
                   <a:srgbClr val="FFFFFF"/>
                 </a:solidFill>
-                <a:latin typeface="Georgia" pitchFamily="34" charset="0"/>
-                <a:ea typeface="Georgia" pitchFamily="34" charset="-122"/>
-                <a:cs typeface="Georgia" pitchFamily="34" charset="-120"/>
+                <a:latin typeface="Times New Roman" pitchFamily="34" charset="0"/>
+                <a:ea typeface="Times New Roman" pitchFamily="34" charset="-122"/>
+                <a:cs typeface="Times New Roman" pitchFamily="34" charset="-120"/>
               </a:rPr>
               <a:t>Deep Dive: GNNDelete Fragility</a:t>
             </a:r>
@@ -10806,7 +10661,7 @@
           <a:bodyPr wrap="square" lIns="0" tIns="0" rIns="0" bIns="0" rtlCol="0" anchor="ctr"/>
           <a:lstStyle/>
           <a:p>
-            <a:pPr marL="0" indent="0" algn="r">
+            <a:pPr algn="r" indent="0" marL="0">
               <a:buNone/>
             </a:pPr>
             <a:r>
@@ -10814,9 +10669,9 @@
                 <a:solidFill>
                   <a:srgbClr val="F7F5F1"/>
                 </a:solidFill>
-                <a:latin typeface="Calibri" pitchFamily="34" charset="0"/>
-                <a:ea typeface="Calibri" pitchFamily="34" charset="-122"/>
-                <a:cs typeface="Calibri" pitchFamily="34" charset="-120"/>
+                <a:latin typeface="Times New Roman" pitchFamily="34" charset="0"/>
+                <a:ea typeface="Times New Roman" pitchFamily="34" charset="-122"/>
+                <a:cs typeface="Times New Roman" pitchFamily="34" charset="-120"/>
               </a:rPr>
               <a:t>08 / 14</a:t>
             </a:r>
@@ -10845,7 +10700,7 @@
           <a:bodyPr wrap="square" lIns="0" tIns="0" rIns="0" bIns="0" rtlCol="0" anchor="ctr"/>
           <a:lstStyle/>
           <a:p>
-            <a:pPr marL="0" indent="0">
+            <a:pPr indent="0" marL="0">
               <a:buNone/>
             </a:pPr>
             <a:r>
@@ -10853,9 +10708,9 @@
                 <a:solidFill>
                   <a:srgbClr val="667085"/>
                 </a:solidFill>
-                <a:latin typeface="Calibri" pitchFamily="34" charset="0"/>
-                <a:ea typeface="Calibri" pitchFamily="34" charset="-122"/>
-                <a:cs typeface="Calibri" pitchFamily="34" charset="-120"/>
+                <a:latin typeface="Times New Roman" pitchFamily="34" charset="0"/>
+                <a:ea typeface="Times New Roman" pitchFamily="34" charset="-122"/>
+                <a:cs typeface="Times New Roman" pitchFamily="34" charset="-120"/>
               </a:rPr>
               <a:t>EE5003 MSc Project | Liu Chengyu</a:t>
             </a:r>
@@ -10884,7 +10739,7 @@
           <a:bodyPr wrap="square" lIns="0" tIns="0" rIns="0" bIns="0" rtlCol="0" anchor="ctr"/>
           <a:lstStyle/>
           <a:p>
-            <a:pPr marL="0" indent="0" algn="r">
+            <a:pPr algn="r" indent="0" marL="0">
               <a:buNone/>
             </a:pPr>
             <a:r>
@@ -10892,9 +10747,9 @@
                 <a:solidFill>
                   <a:srgbClr val="667085"/>
                 </a:solidFill>
-                <a:latin typeface="Calibri" pitchFamily="34" charset="0"/>
-                <a:ea typeface="Calibri" pitchFamily="34" charset="-122"/>
-                <a:cs typeface="Calibri" pitchFamily="34" charset="-120"/>
+                <a:latin typeface="Times New Roman" pitchFamily="34" charset="0"/>
+                <a:ea typeface="Times New Roman" pitchFamily="34" charset="-122"/>
+                <a:cs typeface="Times New Roman" pitchFamily="34" charset="-120"/>
               </a:rPr>
               <a:t>Approximate Graph Unlearning Audit</a:t>
             </a:r>
@@ -10904,14 +10759,14 @@
       </p:sp>
       <p:pic>
         <p:nvPicPr>
-          <p:cNvPr id="7" name="Image 0" descr="H:\project\OpenGU\GULib-master\report\0417_5003report\figures\paper_figures\FIG-2_Scaling.png"/>
+          <p:cNvPr id="7" name="Image 0" descr="H:\project\OpenGU\GULib-master\report\0417_5003report\figures\paper_figures\FIG-2_Scaling.png">    </p:cNvPr>
           <p:cNvPicPr>
             <a:picLocks noChangeAspect="1"/>
           </p:cNvPicPr>
           <p:nvPr/>
         </p:nvPicPr>
         <p:blipFill>
-          <a:blip r:embed="rId3"/>
+          <a:blip r:embed="rId1"/>
           <a:stretch>
             <a:fillRect/>
           </a:stretch>
@@ -10947,7 +10802,7 @@
           <a:bodyPr wrap="square" lIns="0" tIns="0" rIns="0" bIns="0" rtlCol="0" anchor="ctr"/>
           <a:lstStyle/>
           <a:p>
-            <a:pPr marL="0" indent="0">
+            <a:pPr indent="0" marL="0">
               <a:buNone/>
             </a:pPr>
             <a:r>
@@ -10955,9 +10810,9 @@
                 <a:solidFill>
                   <a:srgbClr val="667085"/>
                 </a:solidFill>
-                <a:latin typeface="Calibri" pitchFamily="34" charset="0"/>
-                <a:ea typeface="Calibri" pitchFamily="34" charset="-122"/>
-                <a:cs typeface="Calibri" pitchFamily="34" charset="-120"/>
+                <a:latin typeface="Times New Roman" pitchFamily="34" charset="0"/>
+                <a:ea typeface="Times New Roman" pitchFamily="34" charset="-122"/>
+                <a:cs typeface="Times New Roman" pitchFamily="34" charset="-120"/>
               </a:rPr>
               <a:t>Figure 2. Ratio sensitivity view for GIF and GNNDelete on Cora/GCN.</a:t>
             </a:r>
@@ -10993,13 +10848,6 @@
             <a:prstDash val="solid"/>
           </a:ln>
         </p:spPr>
-        <p:txBody>
-          <a:bodyPr/>
-          <a:lstStyle/>
-          <a:p>
-            <a:endParaRPr lang="zh-CN" altLang="en-US"/>
-          </a:p>
-        </p:txBody>
       </p:sp>
       <p:sp>
         <p:nvSpPr>
@@ -11022,7 +10870,7 @@
           <a:bodyPr wrap="square" lIns="0" tIns="0" rIns="0" bIns="0" rtlCol="0" anchor="ctr"/>
           <a:lstStyle/>
           <a:p>
-            <a:pPr marL="0" indent="0" algn="ctr">
+            <a:pPr algn="ctr" indent="0" marL="0">
               <a:buNone/>
             </a:pPr>
             <a:r>
@@ -11030,9 +10878,9 @@
                 <a:solidFill>
                   <a:srgbClr val="FFFFFF"/>
                 </a:solidFill>
-                <a:latin typeface="Georgia" pitchFamily="34" charset="0"/>
-                <a:ea typeface="Georgia" pitchFamily="34" charset="-122"/>
-                <a:cs typeface="Georgia" pitchFamily="34" charset="-120"/>
+                <a:latin typeface="Times New Roman" pitchFamily="34" charset="0"/>
+                <a:ea typeface="Times New Roman" pitchFamily="34" charset="-122"/>
+                <a:cs typeface="Times New Roman" pitchFamily="34" charset="-120"/>
               </a:rPr>
               <a:t>21.53%</a:t>
             </a:r>
@@ -11063,7 +10911,7 @@
           </a:bodyPr>
           <a:lstStyle/>
           <a:p>
-            <a:pPr marL="0" indent="0" algn="ctr">
+            <a:pPr algn="ctr" indent="0" marL="0">
               <a:buNone/>
             </a:pPr>
             <a:r>
@@ -11071,9 +10919,9 @@
                 <a:solidFill>
                   <a:srgbClr val="F7F5F1"/>
                 </a:solidFill>
-                <a:latin typeface="Calibri" pitchFamily="34" charset="0"/>
-                <a:ea typeface="Calibri" pitchFamily="34" charset="-122"/>
-                <a:cs typeface="Calibri" pitchFamily="34" charset="-120"/>
+                <a:latin typeface="Times New Roman" pitchFamily="34" charset="0"/>
+                <a:ea typeface="Times New Roman" pitchFamily="34" charset="-122"/>
+                <a:cs typeface="Times New Roman" pitchFamily="34" charset="-120"/>
               </a:rPr>
               <a:t>retrain gap at ratio 0.01 on Cora</a:t>
             </a:r>
@@ -11109,13 +10957,6 @@
             <a:prstDash val="solid"/>
           </a:ln>
         </p:spPr>
-        <p:txBody>
-          <a:bodyPr/>
-          <a:lstStyle/>
-          <a:p>
-            <a:endParaRPr lang="zh-CN" altLang="en-US"/>
-          </a:p>
-        </p:txBody>
       </p:sp>
       <p:sp>
         <p:nvSpPr>
@@ -11138,7 +10979,7 @@
           <a:bodyPr wrap="square" lIns="0" tIns="0" rIns="0" bIns="0" rtlCol="0" anchor="ctr"/>
           <a:lstStyle/>
           <a:p>
-            <a:pPr marL="0" indent="0" algn="ctr">
+            <a:pPr algn="ctr" indent="0" marL="0">
               <a:buNone/>
             </a:pPr>
             <a:r>
@@ -11146,9 +10987,9 @@
                 <a:solidFill>
                   <a:srgbClr val="FFFFFF"/>
                 </a:solidFill>
-                <a:latin typeface="Georgia" pitchFamily="34" charset="0"/>
-                <a:ea typeface="Georgia" pitchFamily="34" charset="-122"/>
-                <a:cs typeface="Georgia" pitchFamily="34" charset="-120"/>
+                <a:latin typeface="Times New Roman" pitchFamily="34" charset="0"/>
+                <a:ea typeface="Times New Roman" pitchFamily="34" charset="-122"/>
+                <a:cs typeface="Times New Roman" pitchFamily="34" charset="-120"/>
               </a:rPr>
               <a:t>26.2%</a:t>
             </a:r>
@@ -11179,7 +11020,7 @@
           </a:bodyPr>
           <a:lstStyle/>
           <a:p>
-            <a:pPr marL="0" indent="0" algn="ctr">
+            <a:pPr algn="ctr" indent="0" marL="0">
               <a:buNone/>
             </a:pPr>
             <a:r>
@@ -11187,9 +11028,9 @@
                 <a:solidFill>
                   <a:srgbClr val="F7F5F1"/>
                 </a:solidFill>
-                <a:latin typeface="Calibri" pitchFamily="34" charset="0"/>
-                <a:ea typeface="Calibri" pitchFamily="34" charset="-122"/>
-                <a:cs typeface="Calibri" pitchFamily="34" charset="-120"/>
+                <a:latin typeface="Times New Roman" pitchFamily="34" charset="0"/>
+                <a:ea typeface="Times New Roman" pitchFamily="34" charset="-122"/>
+                <a:cs typeface="Times New Roman" pitchFamily="34" charset="-120"/>
               </a:rPr>
               <a:t>non-target prediction changes</a:t>
             </a:r>
@@ -11223,13 +11064,6 @@
             <a:prstDash val="solid"/>
           </a:ln>
         </p:spPr>
-        <p:txBody>
-          <a:bodyPr/>
-          <a:lstStyle/>
-          <a:p>
-            <a:endParaRPr lang="zh-CN" altLang="en-US"/>
-          </a:p>
-        </p:txBody>
       </p:sp>
       <p:sp>
         <p:nvSpPr>
@@ -11252,7 +11086,7 @@
           <a:bodyPr wrap="square" lIns="0" tIns="0" rIns="0" bIns="0" rtlCol="0" anchor="ctr"/>
           <a:lstStyle/>
           <a:p>
-            <a:pPr marL="0" indent="0">
+            <a:pPr indent="0" marL="0">
               <a:buNone/>
             </a:pPr>
             <a:r>
@@ -11260,9 +11094,9 @@
                 <a:solidFill>
                   <a:srgbClr val="223A5E"/>
                 </a:solidFill>
-                <a:latin typeface="Georgia" pitchFamily="34" charset="0"/>
-                <a:ea typeface="Georgia" pitchFamily="34" charset="-122"/>
-                <a:cs typeface="Georgia" pitchFamily="34" charset="-120"/>
+                <a:latin typeface="Times New Roman" pitchFamily="34" charset="0"/>
+                <a:ea typeface="Times New Roman" pitchFamily="34" charset="-122"/>
+                <a:cs typeface="Times New Roman" pitchFamily="34" charset="-120"/>
               </a:rPr>
               <a:t>Interpretation</a:t>
             </a:r>
@@ -11293,7 +11127,7 @@
           </a:bodyPr>
           <a:lstStyle/>
           <a:p>
-            <a:pPr marL="0" indent="0">
+            <a:pPr indent="0" marL="0">
               <a:buNone/>
             </a:pPr>
             <a:r>
@@ -11301,9 +11135,9 @@
                 <a:solidFill>
                   <a:srgbClr val="1E2630"/>
                 </a:solidFill>
-                <a:latin typeface="Calibri" pitchFamily="34" charset="0"/>
-                <a:ea typeface="Calibri" pitchFamily="34" charset="-122"/>
-                <a:cs typeface="Calibri" pitchFamily="34" charset="-120"/>
+                <a:latin typeface="Times New Roman" pitchFamily="34" charset="0"/>
+                <a:ea typeface="Times New Roman" pitchFamily="34" charset="-122"/>
+                <a:cs typeface="Times New Roman" pitchFamily="34" charset="-120"/>
               </a:rPr>
               <a:t>Exact retraining on the same deletion set shows only a small intrinsic decrease. The large collapse is therefore mainly approximation error, not simply node importance.</a:t>
             </a:r>
@@ -11327,7 +11161,6 @@
         <a:solidFill>
           <a:srgbClr val="FFFFFF"/>
         </a:solidFill>
-        <a:effectLst/>
       </p:bgPr>
     </p:bg>
     <p:spTree>
@@ -11370,13 +11203,6 @@
             <a:prstDash val="solid"/>
           </a:ln>
         </p:spPr>
-        <p:txBody>
-          <a:bodyPr/>
-          <a:lstStyle/>
-          <a:p>
-            <a:endParaRPr lang="zh-CN" altLang="en-US"/>
-          </a:p>
-        </p:txBody>
       </p:sp>
       <p:sp>
         <p:nvSpPr>
@@ -11399,7 +11225,7 @@
           <a:bodyPr wrap="square" lIns="0" tIns="0" rIns="0" bIns="0" rtlCol="0" anchor="ctr"/>
           <a:lstStyle/>
           <a:p>
-            <a:pPr marL="0" indent="0">
+            <a:pPr indent="0" marL="0">
               <a:buNone/>
             </a:pPr>
             <a:r>
@@ -11407,9 +11233,9 @@
                 <a:solidFill>
                   <a:srgbClr val="FFFFFF"/>
                 </a:solidFill>
-                <a:latin typeface="Georgia" pitchFamily="34" charset="0"/>
-                <a:ea typeface="Georgia" pitchFamily="34" charset="-122"/>
-                <a:cs typeface="Georgia" pitchFamily="34" charset="-120"/>
+                <a:latin typeface="Times New Roman" pitchFamily="34" charset="0"/>
+                <a:ea typeface="Times New Roman" pitchFamily="34" charset="-122"/>
+                <a:cs typeface="Times New Roman" pitchFamily="34" charset="-120"/>
               </a:rPr>
               <a:t>Attribution And Collateral Damage</a:t>
             </a:r>
@@ -11438,7 +11264,7 @@
           <a:bodyPr wrap="square" lIns="0" tIns="0" rIns="0" bIns="0" rtlCol="0" anchor="ctr"/>
           <a:lstStyle/>
           <a:p>
-            <a:pPr marL="0" indent="0" algn="r">
+            <a:pPr algn="r" indent="0" marL="0">
               <a:buNone/>
             </a:pPr>
             <a:r>
@@ -11446,9 +11272,9 @@
                 <a:solidFill>
                   <a:srgbClr val="F7F5F1"/>
                 </a:solidFill>
-                <a:latin typeface="Calibri" pitchFamily="34" charset="0"/>
-                <a:ea typeface="Calibri" pitchFamily="34" charset="-122"/>
-                <a:cs typeface="Calibri" pitchFamily="34" charset="-120"/>
+                <a:latin typeface="Times New Roman" pitchFamily="34" charset="0"/>
+                <a:ea typeface="Times New Roman" pitchFamily="34" charset="-122"/>
+                <a:cs typeface="Times New Roman" pitchFamily="34" charset="-120"/>
               </a:rPr>
               <a:t>09 / 14</a:t>
             </a:r>
@@ -11477,7 +11303,7 @@
           <a:bodyPr wrap="square" lIns="0" tIns="0" rIns="0" bIns="0" rtlCol="0" anchor="ctr"/>
           <a:lstStyle/>
           <a:p>
-            <a:pPr marL="0" indent="0">
+            <a:pPr indent="0" marL="0">
               <a:buNone/>
             </a:pPr>
             <a:r>
@@ -11485,9 +11311,9 @@
                 <a:solidFill>
                   <a:srgbClr val="667085"/>
                 </a:solidFill>
-                <a:latin typeface="Calibri" pitchFamily="34" charset="0"/>
-                <a:ea typeface="Calibri" pitchFamily="34" charset="-122"/>
-                <a:cs typeface="Calibri" pitchFamily="34" charset="-120"/>
+                <a:latin typeface="Times New Roman" pitchFamily="34" charset="0"/>
+                <a:ea typeface="Times New Roman" pitchFamily="34" charset="-122"/>
+                <a:cs typeface="Times New Roman" pitchFamily="34" charset="-120"/>
               </a:rPr>
               <a:t>EE5003 MSc Project | Liu Chengyu</a:t>
             </a:r>
@@ -11516,7 +11342,7 @@
           <a:bodyPr wrap="square" lIns="0" tIns="0" rIns="0" bIns="0" rtlCol="0" anchor="ctr"/>
           <a:lstStyle/>
           <a:p>
-            <a:pPr marL="0" indent="0" algn="r">
+            <a:pPr algn="r" indent="0" marL="0">
               <a:buNone/>
             </a:pPr>
             <a:r>
@@ -11524,9 +11350,9 @@
                 <a:solidFill>
                   <a:srgbClr val="667085"/>
                 </a:solidFill>
-                <a:latin typeface="Calibri" pitchFamily="34" charset="0"/>
-                <a:ea typeface="Calibri" pitchFamily="34" charset="-122"/>
-                <a:cs typeface="Calibri" pitchFamily="34" charset="-120"/>
+                <a:latin typeface="Times New Roman" pitchFamily="34" charset="0"/>
+                <a:ea typeface="Times New Roman" pitchFamily="34" charset="-122"/>
+                <a:cs typeface="Times New Roman" pitchFamily="34" charset="-120"/>
               </a:rPr>
               <a:t>Approximate Graph Unlearning Audit</a:t>
             </a:r>
@@ -11555,7 +11381,7 @@
           <a:bodyPr wrap="square" lIns="0" tIns="0" rIns="0" bIns="0" rtlCol="0" anchor="ctr"/>
           <a:lstStyle/>
           <a:p>
-            <a:pPr marL="0" indent="0">
+            <a:pPr indent="0" marL="0">
               <a:buNone/>
             </a:pPr>
             <a:r>
@@ -11563,9 +11389,9 @@
                 <a:solidFill>
                   <a:srgbClr val="223A5E"/>
                 </a:solidFill>
-                <a:latin typeface="Georgia" pitchFamily="34" charset="0"/>
-                <a:ea typeface="Georgia" pitchFamily="34" charset="-122"/>
-                <a:cs typeface="Georgia" pitchFamily="34" charset="-120"/>
+                <a:latin typeface="Times New Roman" pitchFamily="34" charset="0"/>
+                <a:ea typeface="Times New Roman" pitchFamily="34" charset="-122"/>
+                <a:cs typeface="Times New Roman" pitchFamily="34" charset="-120"/>
               </a:rPr>
               <a:t>Exact retraining tells us what the deletion should have done. The remaining gap is mechanism-induced spillover.</a:t>
             </a:r>
@@ -11599,13 +11425,6 @@
             <a:prstDash val="solid"/>
           </a:ln>
         </p:spPr>
-        <p:txBody>
-          <a:bodyPr/>
-          <a:lstStyle/>
-          <a:p>
-            <a:endParaRPr lang="zh-CN" altLang="en-US"/>
-          </a:p>
-        </p:txBody>
       </p:sp>
       <p:sp>
         <p:nvSpPr>
@@ -11628,7 +11447,7 @@
           <a:bodyPr wrap="square" lIns="0" tIns="0" rIns="0" bIns="0" rtlCol="0" anchor="ctr"/>
           <a:lstStyle/>
           <a:p>
-            <a:pPr marL="0" indent="0">
+            <a:pPr indent="0" marL="0">
               <a:buNone/>
             </a:pPr>
             <a:r>
@@ -11636,9 +11455,9 @@
                 <a:solidFill>
                   <a:srgbClr val="223A5E"/>
                 </a:solidFill>
-                <a:latin typeface="Georgia" pitchFamily="34" charset="0"/>
-                <a:ea typeface="Georgia" pitchFamily="34" charset="-122"/>
-                <a:cs typeface="Georgia" pitchFamily="34" charset="-120"/>
+                <a:latin typeface="Times New Roman" pitchFamily="34" charset="0"/>
+                <a:ea typeface="Times New Roman" pitchFamily="34" charset="-122"/>
+                <a:cs typeface="Times New Roman" pitchFamily="34" charset="-120"/>
               </a:rPr>
               <a:t>Deleted targets</a:t>
             </a:r>
@@ -11669,7 +11488,7 @@
           </a:bodyPr>
           <a:lstStyle/>
           <a:p>
-            <a:pPr marL="0" indent="0">
+            <a:pPr indent="0" marL="0">
               <a:buNone/>
             </a:pPr>
             <a:r>
@@ -11677,9 +11496,9 @@
                 <a:solidFill>
                   <a:srgbClr val="1E2630"/>
                 </a:solidFill>
-                <a:latin typeface="Calibri" pitchFamily="34" charset="0"/>
-                <a:ea typeface="Calibri" pitchFamily="34" charset="-122"/>
-                <a:cs typeface="Calibri" pitchFamily="34" charset="-120"/>
+                <a:latin typeface="Times New Roman" pitchFamily="34" charset="0"/>
+                <a:ea typeface="Times New Roman" pitchFamily="34" charset="-122"/>
+                <a:cs typeface="Times New Roman" pitchFamily="34" charset="-120"/>
               </a:rPr>
               <a:t>Some drop is legitimate because removed nodes can be informative. A correct system may still lose a small amount of utility when those nodes disappear. </a:t>
             </a:r>
@@ -11713,13 +11532,6 @@
             <a:prstDash val="solid"/>
           </a:ln>
         </p:spPr>
-        <p:txBody>
-          <a:bodyPr/>
-          <a:lstStyle/>
-          <a:p>
-            <a:endParaRPr lang="zh-CN" altLang="en-US"/>
-          </a:p>
-        </p:txBody>
       </p:sp>
       <p:sp>
         <p:nvSpPr>
@@ -11742,7 +11554,7 @@
           <a:bodyPr wrap="square" lIns="0" tIns="0" rIns="0" bIns="0" rtlCol="0" anchor="ctr"/>
           <a:lstStyle/>
           <a:p>
-            <a:pPr marL="0" indent="0">
+            <a:pPr indent="0" marL="0">
               <a:buNone/>
             </a:pPr>
             <a:r>
@@ -11750,9 +11562,9 @@
                 <a:solidFill>
                   <a:srgbClr val="223A5E"/>
                 </a:solidFill>
-                <a:latin typeface="Georgia" pitchFamily="34" charset="0"/>
-                <a:ea typeface="Georgia" pitchFamily="34" charset="-122"/>
-                <a:cs typeface="Georgia" pitchFamily="34" charset="-120"/>
+                <a:latin typeface="Times New Roman" pitchFamily="34" charset="0"/>
+                <a:ea typeface="Times New Roman" pitchFamily="34" charset="-122"/>
+                <a:cs typeface="Times New Roman" pitchFamily="34" charset="-120"/>
               </a:rPr>
               <a:t>Retained nodes</a:t>
             </a:r>
@@ -11783,7 +11595,7 @@
           </a:bodyPr>
           <a:lstStyle/>
           <a:p>
-            <a:pPr marL="0" indent="0">
+            <a:pPr indent="0" marL="0">
               <a:buNone/>
             </a:pPr>
             <a:r>
@@ -11791,9 +11603,9 @@
                 <a:solidFill>
                   <a:srgbClr val="1E2630"/>
                 </a:solidFill>
-                <a:latin typeface="Calibri" pitchFamily="34" charset="0"/>
-                <a:ea typeface="Calibri" pitchFamily="34" charset="-122"/>
-                <a:cs typeface="Calibri" pitchFamily="34" charset="-120"/>
+                <a:latin typeface="Times New Roman" pitchFamily="34" charset="0"/>
+                <a:ea typeface="Times New Roman" pitchFamily="34" charset="-122"/>
+                <a:cs typeface="Times New Roman" pitchFamily="34" charset="-120"/>
               </a:rPr>
               <a:t>When predictions on non-target retained nodes shift substantially, the damage is no longer only about the deleted nodes. It indicates spillover from the approximate unlearning mechanism.</a:t>
             </a:r>
@@ -11827,13 +11639,6 @@
             <a:prstDash val="solid"/>
           </a:ln>
         </p:spPr>
-        <p:txBody>
-          <a:bodyPr/>
-          <a:lstStyle/>
-          <a:p>
-            <a:endParaRPr lang="zh-CN" altLang="en-US"/>
-          </a:p>
-        </p:txBody>
       </p:sp>
       <p:sp>
         <p:nvSpPr>
@@ -11856,7 +11661,7 @@
           <a:bodyPr wrap="square" lIns="0" tIns="0" rIns="0" bIns="0" rtlCol="0" anchor="ctr"/>
           <a:lstStyle/>
           <a:p>
-            <a:pPr marL="0" indent="0">
+            <a:pPr indent="0" marL="0">
               <a:buNone/>
             </a:pPr>
             <a:r>
@@ -11864,9 +11669,9 @@
                 <a:solidFill>
                   <a:srgbClr val="F7F5F1"/>
                 </a:solidFill>
-                <a:latin typeface="Georgia" pitchFamily="34" charset="0"/>
-                <a:ea typeface="Georgia" pitchFamily="34" charset="-122"/>
-                <a:cs typeface="Georgia" pitchFamily="34" charset="-120"/>
+                <a:latin typeface="Times New Roman" pitchFamily="34" charset="0"/>
+                <a:ea typeface="Times New Roman" pitchFamily="34" charset="-122"/>
+                <a:cs typeface="Times New Roman" pitchFamily="34" charset="-120"/>
               </a:rPr>
               <a:t>Bottom line</a:t>
             </a:r>
@@ -11897,7 +11702,7 @@
           </a:bodyPr>
           <a:lstStyle/>
           <a:p>
-            <a:pPr marL="0" indent="0">
+            <a:pPr indent="0" marL="0">
               <a:buNone/>
             </a:pPr>
             <a:r>
@@ -11905,9 +11710,9 @@
                 <a:solidFill>
                   <a:srgbClr val="FFFFFF"/>
                 </a:solidFill>
-                <a:latin typeface="Calibri" pitchFamily="34" charset="0"/>
-                <a:ea typeface="Calibri" pitchFamily="34" charset="-122"/>
-                <a:cs typeface="Calibri" pitchFamily="34" charset="-120"/>
+                <a:latin typeface="Times New Roman" pitchFamily="34" charset="0"/>
+                <a:ea typeface="Times New Roman" pitchFamily="34" charset="-122"/>
+                <a:cs typeface="Times New Roman" pitchFamily="34" charset="-120"/>
               </a:rPr>
               <a:t>Approximate unlearning vs exact retrain is the attribution lens; collateral-damage metrics show how far the error propagates beyond the requested deletion.</a:t>
             </a:r>
@@ -12216,319 +12021,4 @@
     </a:ext>
   </a:extLst>
 </a:theme>
-</file>
-
-<file path=ppt/theme/theme2.xml><?xml version="1.0" encoding="utf-8"?>
-<a:theme xmlns:a="http://schemas.openxmlformats.org/drawingml/2006/main" name="Office 主题​​">
-  <a:themeElements>
-    <a:clrScheme name="Office">
-      <a:dk1>
-        <a:sysClr val="windowText" lastClr="000000"/>
-      </a:dk1>
-      <a:lt1>
-        <a:sysClr val="window" lastClr="FFFFFF"/>
-      </a:lt1>
-      <a:dk2>
-        <a:srgbClr val="0E2841"/>
-      </a:dk2>
-      <a:lt2>
-        <a:srgbClr val="E8E8E8"/>
-      </a:lt2>
-      <a:accent1>
-        <a:srgbClr val="156082"/>
-      </a:accent1>
-      <a:accent2>
-        <a:srgbClr val="E97132"/>
-      </a:accent2>
-      <a:accent3>
-        <a:srgbClr val="196B24"/>
-      </a:accent3>
-      <a:accent4>
-        <a:srgbClr val="0F9ED5"/>
-      </a:accent4>
-      <a:accent5>
-        <a:srgbClr val="A02B93"/>
-      </a:accent5>
-      <a:accent6>
-        <a:srgbClr val="4EA72E"/>
-      </a:accent6>
-      <a:hlink>
-        <a:srgbClr val="467886"/>
-      </a:hlink>
-      <a:folHlink>
-        <a:srgbClr val="96607D"/>
-      </a:folHlink>
-    </a:clrScheme>
-    <a:fontScheme name="Office">
-      <a:majorFont>
-        <a:latin typeface="等线 Light" panose="02110004020202020204"/>
-        <a:ea typeface=""/>
-        <a:cs typeface=""/>
-        <a:font script="Jpan" typeface="游ゴシック Light"/>
-        <a:font script="Hang" typeface="맑은 고딕"/>
-        <a:font script="Hans" typeface="等线 Light"/>
-        <a:font script="Hant" typeface="新細明體"/>
-        <a:font script="Arab" typeface="Times New Roman"/>
-        <a:font script="Hebr" typeface="Times New Roman"/>
-        <a:font script="Thai" typeface="Angsana New"/>
-        <a:font script="Ethi" typeface="Nyala"/>
-        <a:font script="Beng" typeface="Vrinda"/>
-        <a:font script="Gujr" typeface="Shruti"/>
-        <a:font script="Khmr" typeface="MoolBoran"/>
-        <a:font script="Knda" typeface="Tunga"/>
-        <a:font script="Guru" typeface="Raavi"/>
-        <a:font script="Cans" typeface="Euphemia"/>
-        <a:font script="Cher" typeface="Plantagenet Cherokee"/>
-        <a:font script="Yiii" typeface="Microsoft Yi Baiti"/>
-        <a:font script="Tibt" typeface="Microsoft Himalaya"/>
-        <a:font script="Thaa" typeface="MV Boli"/>
-        <a:font script="Deva" typeface="Mangal"/>
-        <a:font script="Telu" typeface="Gautami"/>
-        <a:font script="Taml" typeface="Latha"/>
-        <a:font script="Syrc" typeface="Estrangelo Edessa"/>
-        <a:font script="Orya" typeface="Kalinga"/>
-        <a:font script="Mlym" typeface="Kartika"/>
-        <a:font script="Laoo" typeface="DokChampa"/>
-        <a:font script="Sinh" typeface="Iskoola Pota"/>
-        <a:font script="Mong" typeface="Mongolian Baiti"/>
-        <a:font script="Viet" typeface="Times New Roman"/>
-        <a:font script="Uigh" typeface="Microsoft Uighur"/>
-        <a:font script="Geor" typeface="Sylfaen"/>
-        <a:font script="Armn" typeface="Arial"/>
-        <a:font script="Bugi" typeface="Leelawadee UI"/>
-        <a:font script="Bopo" typeface="Microsoft JhengHei"/>
-        <a:font script="Java" typeface="Javanese Text"/>
-        <a:font script="Lisu" typeface="Segoe UI"/>
-        <a:font script="Mymr" typeface="Myanmar Text"/>
-        <a:font script="Nkoo" typeface="Ebrima"/>
-        <a:font script="Olck" typeface="Nirmala UI"/>
-        <a:font script="Osma" typeface="Ebrima"/>
-        <a:font script="Phag" typeface="Phagspa"/>
-        <a:font script="Syrn" typeface="Estrangelo Edessa"/>
-        <a:font script="Syrj" typeface="Estrangelo Edessa"/>
-        <a:font script="Syre" typeface="Estrangelo Edessa"/>
-        <a:font script="Sora" typeface="Nirmala UI"/>
-        <a:font script="Tale" typeface="Microsoft Tai Le"/>
-        <a:font script="Talu" typeface="Microsoft New Tai Lue"/>
-        <a:font script="Tfng" typeface="Ebrima"/>
-      </a:majorFont>
-      <a:minorFont>
-        <a:latin typeface="等线" panose="02110004020202020204"/>
-        <a:ea typeface=""/>
-        <a:cs typeface=""/>
-        <a:font script="Jpan" typeface="游ゴシック"/>
-        <a:font script="Hang" typeface="맑은 고딕"/>
-        <a:font script="Hans" typeface="等线"/>
-        <a:font script="Hant" typeface="新細明體"/>
-        <a:font script="Arab" typeface="Arial"/>
-        <a:font script="Hebr" typeface="Arial"/>
-        <a:font script="Thai" typeface="Cordia New"/>
-        <a:font script="Ethi" typeface="Nyala"/>
-        <a:font script="Beng" typeface="Vrinda"/>
-        <a:font script="Gujr" typeface="Shruti"/>
-        <a:font script="Khmr" typeface="DaunPenh"/>
-        <a:font script="Knda" typeface="Tunga"/>
-        <a:font script="Guru" typeface="Raavi"/>
-        <a:font script="Cans" typeface="Euphemia"/>
-        <a:font script="Cher" typeface="Plantagenet Cherokee"/>
-        <a:font script="Yiii" typeface="Microsoft Yi Baiti"/>
-        <a:font script="Tibt" typeface="Microsoft Himalaya"/>
-        <a:font script="Thaa" typeface="MV Boli"/>
-        <a:font script="Deva" typeface="Mangal"/>
-        <a:font script="Telu" typeface="Gautami"/>
-        <a:font script="Taml" typeface="Latha"/>
-        <a:font script="Syrc" typeface="Estrangelo Edessa"/>
-        <a:font script="Orya" typeface="Kalinga"/>
-        <a:font script="Mlym" typeface="Kartika"/>
-        <a:font script="Laoo" typeface="DokChampa"/>
-        <a:font script="Sinh" typeface="Iskoola Pota"/>
-        <a:font script="Mong" typeface="Mongolian Baiti"/>
-        <a:font script="Viet" typeface="Arial"/>
-        <a:font script="Uigh" typeface="Microsoft Uighur"/>
-        <a:font script="Geor" typeface="Sylfaen"/>
-        <a:font script="Armn" typeface="Arial"/>
-        <a:font script="Bugi" typeface="Leelawadee UI"/>
-        <a:font script="Bopo" typeface="Microsoft JhengHei"/>
-        <a:font script="Java" typeface="Javanese Text"/>
-        <a:font script="Lisu" typeface="Segoe UI"/>
-        <a:font script="Mymr" typeface="Myanmar Text"/>
-        <a:font script="Nkoo" typeface="Ebrima"/>
-        <a:font script="Olck" typeface="Nirmala UI"/>
-        <a:font script="Osma" typeface="Ebrima"/>
-        <a:font script="Phag" typeface="Phagspa"/>
-        <a:font script="Syrn" typeface="Estrangelo Edessa"/>
-        <a:font script="Syrj" typeface="Estrangelo Edessa"/>
-        <a:font script="Syre" typeface="Estrangelo Edessa"/>
-        <a:font script="Sora" typeface="Nirmala UI"/>
-        <a:font script="Tale" typeface="Microsoft Tai Le"/>
-        <a:font script="Talu" typeface="Microsoft New Tai Lue"/>
-        <a:font script="Tfng" typeface="Ebrima"/>
-      </a:minorFont>
-    </a:fontScheme>
-    <a:fmtScheme name="Office">
-      <a:fillStyleLst>
-        <a:solidFill>
-          <a:schemeClr val="phClr"/>
-        </a:solidFill>
-        <a:gradFill rotWithShape="1">
-          <a:gsLst>
-            <a:gs pos="0">
-              <a:schemeClr val="phClr">
-                <a:lumMod val="110000"/>
-                <a:satMod val="105000"/>
-                <a:tint val="67000"/>
-              </a:schemeClr>
-            </a:gs>
-            <a:gs pos="50000">
-              <a:schemeClr val="phClr">
-                <a:lumMod val="105000"/>
-                <a:satMod val="103000"/>
-                <a:tint val="73000"/>
-              </a:schemeClr>
-            </a:gs>
-            <a:gs pos="100000">
-              <a:schemeClr val="phClr">
-                <a:lumMod val="105000"/>
-                <a:satMod val="109000"/>
-                <a:tint val="81000"/>
-              </a:schemeClr>
-            </a:gs>
-          </a:gsLst>
-          <a:lin ang="5400000" scaled="0"/>
-        </a:gradFill>
-        <a:gradFill rotWithShape="1">
-          <a:gsLst>
-            <a:gs pos="0">
-              <a:schemeClr val="phClr">
-                <a:satMod val="103000"/>
-                <a:lumMod val="102000"/>
-                <a:tint val="94000"/>
-              </a:schemeClr>
-            </a:gs>
-            <a:gs pos="50000">
-              <a:schemeClr val="phClr">
-                <a:satMod val="110000"/>
-                <a:lumMod val="100000"/>
-                <a:shade val="100000"/>
-              </a:schemeClr>
-            </a:gs>
-            <a:gs pos="100000">
-              <a:schemeClr val="phClr">
-                <a:lumMod val="99000"/>
-                <a:satMod val="120000"/>
-                <a:shade val="78000"/>
-              </a:schemeClr>
-            </a:gs>
-          </a:gsLst>
-          <a:lin ang="5400000" scaled="0"/>
-        </a:gradFill>
-      </a:fillStyleLst>
-      <a:lnStyleLst>
-        <a:ln w="12700" cap="flat" cmpd="sng" algn="ctr">
-          <a:solidFill>
-            <a:schemeClr val="phClr"/>
-          </a:solidFill>
-          <a:prstDash val="solid"/>
-          <a:miter lim="800000"/>
-        </a:ln>
-        <a:ln w="19050" cap="flat" cmpd="sng" algn="ctr">
-          <a:solidFill>
-            <a:schemeClr val="phClr"/>
-          </a:solidFill>
-          <a:prstDash val="solid"/>
-          <a:miter lim="800000"/>
-        </a:ln>
-        <a:ln w="25400" cap="flat" cmpd="sng" algn="ctr">
-          <a:solidFill>
-            <a:schemeClr val="phClr"/>
-          </a:solidFill>
-          <a:prstDash val="solid"/>
-          <a:miter lim="800000"/>
-        </a:ln>
-      </a:lnStyleLst>
-      <a:effectStyleLst>
-        <a:effectStyle>
-          <a:effectLst/>
-        </a:effectStyle>
-        <a:effectStyle>
-          <a:effectLst/>
-        </a:effectStyle>
-        <a:effectStyle>
-          <a:effectLst>
-            <a:outerShdw blurRad="57150" dist="19050" dir="5400000" algn="ctr" rotWithShape="0">
-              <a:srgbClr val="000000">
-                <a:alpha val="63000"/>
-              </a:srgbClr>
-            </a:outerShdw>
-          </a:effectLst>
-        </a:effectStyle>
-      </a:effectStyleLst>
-      <a:bgFillStyleLst>
-        <a:solidFill>
-          <a:schemeClr val="phClr"/>
-        </a:solidFill>
-        <a:solidFill>
-          <a:schemeClr val="phClr">
-            <a:tint val="95000"/>
-            <a:satMod val="170000"/>
-          </a:schemeClr>
-        </a:solidFill>
-        <a:gradFill rotWithShape="1">
-          <a:gsLst>
-            <a:gs pos="0">
-              <a:schemeClr val="phClr">
-                <a:tint val="93000"/>
-                <a:satMod val="150000"/>
-                <a:shade val="98000"/>
-                <a:lumMod val="102000"/>
-              </a:schemeClr>
-            </a:gs>
-            <a:gs pos="50000">
-              <a:schemeClr val="phClr">
-                <a:tint val="98000"/>
-                <a:satMod val="130000"/>
-                <a:shade val="90000"/>
-                <a:lumMod val="103000"/>
-              </a:schemeClr>
-            </a:gs>
-            <a:gs pos="100000">
-              <a:schemeClr val="phClr">
-                <a:shade val="63000"/>
-                <a:satMod val="120000"/>
-              </a:schemeClr>
-            </a:gs>
-          </a:gsLst>
-          <a:lin ang="5400000" scaled="0"/>
-        </a:gradFill>
-      </a:bgFillStyleLst>
-    </a:fmtScheme>
-  </a:themeElements>
-  <a:objectDefaults>
-    <a:lnDef>
-      <a:spPr/>
-      <a:bodyPr/>
-      <a:lstStyle/>
-      <a:style>
-        <a:lnRef idx="2">
-          <a:schemeClr val="accent1"/>
-        </a:lnRef>
-        <a:fillRef idx="0">
-          <a:schemeClr val="accent1"/>
-        </a:fillRef>
-        <a:effectRef idx="1">
-          <a:schemeClr val="accent1"/>
-        </a:effectRef>
-        <a:fontRef idx="minor">
-          <a:schemeClr val="tx1"/>
-        </a:fontRef>
-      </a:style>
-    </a:lnDef>
-  </a:objectDefaults>
-  <a:extraClrSchemeLst/>
-  <a:extLst>
-    <a:ext uri="{05A4C25C-085E-4340-85A3-A5531E510DB2}">
-      <thm15:themeFamily xmlns:thm15="http://schemas.microsoft.com/office/thememl/2012/main" name="Office Theme" id="{2E142A2C-CD16-42D6-873A-C26D2A0506FA}" vid="{1BDDFF52-6CD6-40A5-AB3C-68EB2F1E4D0A}"/>
-    </a:ext>
-  </a:extLst>
-</a:theme>
 </file>
--- a/GULib-master/report/0417_5003report/ppt/out-test/final_15min_defense.pptx
+++ b/GULib-master/report/0417_5003report/ppt/out-test/final_15min_defense.pptx
@@ -2508,7 +2508,7 @@
                 <a:ea typeface="Times New Roman" pitchFamily="34" charset="-122"/>
                 <a:cs typeface="Times New Roman" pitchFamily="34" charset="-120"/>
               </a:rPr>
-              <a:t>Why GraphEraser Behaves Differently</a:t>
+              <a:t>GraphEraser And Shard Protection</a:t>
             </a:r>
             <a:endParaRPr lang="en-US" sz="2400" dirty="0"/>
           </a:p>
@@ -2795,7 +2795,7 @@
                 <a:ea typeface="Times New Roman" pitchFamily="34" charset="-122"/>
                 <a:cs typeface="Times New Roman" pitchFamily="34" charset="-120"/>
               </a:rPr>
-              <a:t>After-unlearning scores shift upward across the tested attack strategies, matching the non-collapse pattern seen in the main results.</a:t>
+              <a:t>After-unlearning scores shift upward across the tested strategies, which is evidence for a shard protection effect in these settings.</a:t>
             </a:r>
             <a:endParaRPr lang="en-US" sz="1220" dirty="0"/>
           </a:p>
@@ -2810,11 +2810,11 @@
         <p:spPr>
           <a:xfrm>
             <a:off x="5669280" y="2148840"/>
-            <a:ext cx="2697480" cy="1143000"/>
+            <a:ext cx="2697480" cy="1060704"/>
           </a:xfrm>
           <a:prstGeom prst="roundRect">
             <a:avLst>
-              <a:gd name="adj" fmla="val 4000"/>
+              <a:gd name="adj" fmla="val 4310"/>
             </a:avLst>
           </a:prstGeom>
           <a:solidFill>
@@ -2861,7 +2861,7 @@
                 <a:ea typeface="Times New Roman" pitchFamily="34" charset="-122"/>
                 <a:cs typeface="Times New Roman" pitchFamily="34" charset="-120"/>
               </a:rPr>
-              <a:t>Interpretation</a:t>
+              <a:t>Why it matters</a:t>
             </a:r>
             <a:endParaRPr lang="en-US" sz="1700" dirty="0"/>
           </a:p>
@@ -2876,7 +2876,7 @@
         <p:spPr>
           <a:xfrm>
             <a:off x="5806440" y="2487168"/>
-            <a:ext cx="2423160" cy="713232"/>
+            <a:ext cx="2423160" cy="630936"/>
           </a:xfrm>
           <a:prstGeom prst="rect">
             <a:avLst/>
@@ -2902,7 +2902,7 @@
                 <a:ea typeface="Times New Roman" pitchFamily="34" charset="-122"/>
                 <a:cs typeface="Times New Roman" pitchFamily="34" charset="-120"/>
               </a:rPr>
-              <a:t>A plausible reading is that deleting bridge or hub nodes can simplify shard-local classification and reduce cross-shard interference.</a:t>
+              <a:t>This is why raw utility drop alone is not the right cross-family metric here; the k=5 relative baseline is the cleaner comparison lens.</a:t>
             </a:r>
             <a:endParaRPr lang="en-US" sz="1220" dirty="0"/>
           </a:p>
@@ -2916,12 +2916,12 @@
         </p:nvSpPr>
         <p:spPr>
           <a:xfrm>
-            <a:off x="5669280" y="3584448"/>
-            <a:ext cx="2697480" cy="804672"/>
+            <a:off x="5669280" y="3520440"/>
+            <a:ext cx="2697480" cy="868680"/>
           </a:xfrm>
           <a:prstGeom prst="roundRect">
             <a:avLst>
-              <a:gd name="adj" fmla="val 5682"/>
+              <a:gd name="adj" fmla="val 5263"/>
             </a:avLst>
           </a:prstGeom>
           <a:solidFill>
@@ -2943,7 +2943,7 @@
         </p:nvSpPr>
         <p:spPr>
           <a:xfrm>
-            <a:off x="5806440" y="3675888"/>
+            <a:off x="5806440" y="3611880"/>
             <a:ext cx="2423160" cy="182880"/>
           </a:xfrm>
           <a:prstGeom prst="rect">
@@ -2982,8 +2982,8 @@
         </p:nvSpPr>
         <p:spPr>
           <a:xfrm>
-            <a:off x="5806440" y="3922776"/>
-            <a:ext cx="2423160" cy="374904"/>
+            <a:off x="5806440" y="3858768"/>
+            <a:ext cx="2423160" cy="438912"/>
           </a:xfrm>
           <a:prstGeom prst="rect">
             <a:avLst/>
@@ -3009,7 +3009,7 @@
                 <a:ea typeface="Times New Roman" pitchFamily="34" charset="-122"/>
                 <a:cs typeface="Times New Roman" pitchFamily="34" charset="-120"/>
               </a:rPr>
-              <a:t>This is setting-specific evidence, not a claim of universal robustness.</a:t>
+              <a:t>This remains setting-specific evidence, not a claim of universal robustness.</a:t>
             </a:r>
             <a:endParaRPr lang="en-US" sz="1220" dirty="0"/>
           </a:p>
@@ -3287,7 +3287,7 @@
                 <a:ea typeface="Times New Roman" pitchFamily="34" charset="-122"/>
                 <a:cs typeface="Times New Roman" pitchFamily="34" charset="-120"/>
               </a:rPr>
-              <a:t>Figure 3. Cross-family comparison of the main attack strategies at ratio = 0.05.</a:t>
+              <a:t>Figure 3. Strategy comparison in relative_f1_drop at ratio = 0.05 using the k=5 baseline.</a:t>
             </a:r>
             <a:endParaRPr lang="en-US" sz="900" dirty="0"/>
           </a:p>
@@ -3394,7 +3394,7 @@
                 <a:ea typeface="Times New Roman" pitchFamily="34" charset="-122"/>
                 <a:cs typeface="Times New Roman" pitchFamily="34" charset="-120"/>
               </a:rPr>
-              <a:t>Relative F1 drop measures the attack-over-random advantage at the same budget.</a:t>
+              <a:t>relative_f1_drop already incorporates the k=5 baseline, so this page focuses on strategy ranking and runtime.</a:t>
             </a:r>
             <a:endParaRPr lang="en-US" sz="1220" dirty="0"/>
           </a:p>
@@ -3759,7 +3759,7 @@
                 <a:ea typeface="Times New Roman" pitchFamily="34" charset="-122"/>
                 <a:cs typeface="Times New Roman" pitchFamily="34" charset="-120"/>
               </a:rPr>
-              <a:t>Structured attacks outperform random deletion most clearly on GNNDelete.</a:t>
+              <a:t>Structured attacks create the largest extra drop beyond the k=5 baseline on GNNDelete.</a:t>
             </a:r>
             <a:endParaRPr lang="en-US" sz="1120" dirty="0"/>
           </a:p>
@@ -9152,7 +9152,7 @@
                 <a:ea typeface="Times New Roman" pitchFamily="34" charset="-122"/>
                 <a:cs typeface="Times New Roman" pitchFamily="34" charset="-120"/>
               </a:rPr>
-              <a:t>What Was Built In OpenGU</a:t>
+              <a:t>Metrics Framework</a:t>
             </a:r>
             <a:endParaRPr lang="en-US" sz="2400" dirty="0"/>
           </a:p>
@@ -9284,7 +9284,7 @@
         <p:spPr>
           <a:xfrm>
             <a:off x="621792" y="768096"/>
-            <a:ext cx="6675120" cy="228600"/>
+            <a:ext cx="7406640" cy="256032"/>
           </a:xfrm>
           <a:prstGeom prst="rect">
             <a:avLst/>
@@ -9300,7 +9300,7 @@
               <a:buNone/>
             </a:pPr>
             <a:r>
-              <a:rPr lang="en-US" sz="1800" b="1" dirty="0">
+              <a:rPr lang="en-US" sz="1620" b="1" dirty="0">
                 <a:solidFill>
                   <a:srgbClr val="223A5E"/>
                 </a:solidFill>
@@ -9308,9 +9308,9 @@
                 <a:ea typeface="Times New Roman" pitchFamily="34" charset="-122"/>
                 <a:cs typeface="Times New Roman" pitchFamily="34" charset="-120"/>
               </a:rPr>
-              <a:t>The project contribution is a reusable adversarial-audit workflow, not only a single batch of experiments.</a:t>
-            </a:r>
-            <a:endParaRPr lang="en-US" sz="1800" dirty="0"/>
+              <a:t>Three metrics answer three different questions: how much extra damage appears beyond a k=5 baseline, where it comes from, and how far it spreads.</a:t>
+            </a:r>
+            <a:endParaRPr lang="en-US" sz="1620" dirty="0"/>
           </a:p>
         </p:txBody>
       </p:sp>
@@ -9322,12 +9322,12 @@
         </p:nvSpPr>
         <p:spPr>
           <a:xfrm>
-            <a:off x="731520" y="1325880"/>
-            <a:ext cx="3657600" cy="822960"/>
+            <a:off x="713232" y="1325880"/>
+            <a:ext cx="2542032" cy="2011680"/>
           </a:xfrm>
           <a:prstGeom prst="roundRect">
             <a:avLst>
-              <a:gd name="adj" fmla="val 5556"/>
+              <a:gd name="adj" fmla="val 2273"/>
             </a:avLst>
           </a:prstGeom>
           <a:solidFill>
@@ -9349,8 +9349,8 @@
         </p:nvSpPr>
         <p:spPr>
           <a:xfrm>
-            <a:off x="868680" y="1417320"/>
-            <a:ext cx="3383280" cy="182880"/>
+            <a:off x="850392" y="1417320"/>
+            <a:ext cx="2267712" cy="182880"/>
           </a:xfrm>
           <a:prstGeom prst="rect">
             <a:avLst/>
@@ -9374,7 +9374,7 @@
                 <a:ea typeface="Times New Roman" pitchFamily="34" charset="-122"/>
                 <a:cs typeface="Times New Roman" pitchFamily="34" charset="-120"/>
               </a:rPr>
-              <a:t>Execution</a:t>
+              <a:t>Utility</a:t>
             </a:r>
             <a:endParaRPr lang="en-US" sz="1700" dirty="0"/>
           </a:p>
@@ -9388,8 +9388,8 @@
         </p:nvSpPr>
         <p:spPr>
           <a:xfrm>
-            <a:off x="868680" y="1664208"/>
-            <a:ext cx="3383280" cy="393192"/>
+            <a:off x="850392" y="1664208"/>
+            <a:ext cx="2267712" cy="1581912"/>
           </a:xfrm>
           <a:prstGeom prst="rect">
             <a:avLst/>
@@ -9415,10 +9415,33 @@
                 <a:ea typeface="Times New Roman" pitchFamily="34" charset="-122"/>
                 <a:cs typeface="Times New Roman" pitchFamily="34" charset="-120"/>
               </a:rPr>
-              <a:t>Structured batch experiment runs across methods, datasets, and deletion ratios.</a:t>
+              <a:t>relative_f1_drop = F1_after(k=5, random) - F1_after(attack)</a:t>
             </a:r>
             <a:endParaRPr lang="en-US" sz="1220" dirty="0"/>
           </a:p>
+          <a:p>
+            <a:pPr indent="0" marL="0">
+              <a:buNone/>
+            </a:pPr>
+            <a:endParaRPr lang="en-US" sz="1220" dirty="0"/>
+          </a:p>
+          <a:p>
+            <a:pPr indent="0" marL="0">
+              <a:buNone/>
+            </a:pPr>
+            <a:r>
+              <a:rPr lang="en-US" sz="1220" dirty="0">
+                <a:solidFill>
+                  <a:srgbClr val="1E2630"/>
+                </a:solidFill>
+                <a:latin typeface="Times New Roman" pitchFamily="34" charset="0"/>
+                <a:ea typeface="Times New Roman" pitchFamily="34" charset="-122"/>
+                <a:cs typeface="Times New Roman" pitchFamily="34" charset="-120"/>
+              </a:rPr>
+              <a:t>Use a tiny random-trigger baseline because raw drop can mislead on shard-based methods.</a:t>
+            </a:r>
+            <a:endParaRPr lang="en-US" sz="1220" dirty="0"/>
+          </a:p>
         </p:txBody>
       </p:sp>
       <p:sp>
@@ -9429,12 +9452,142 @@
         </p:nvSpPr>
         <p:spPr>
           <a:xfrm>
-            <a:off x="4754880" y="1325880"/>
-            <a:ext cx="3657600" cy="822960"/>
+            <a:off x="3328416" y="1325880"/>
+            <a:ext cx="2542032" cy="2011680"/>
           </a:xfrm>
           <a:prstGeom prst="roundRect">
             <a:avLst>
-              <a:gd name="adj" fmla="val 5556"/>
+              <a:gd name="adj" fmla="val 2273"/>
+            </a:avLst>
+          </a:prstGeom>
+          <a:solidFill>
+            <a:srgbClr val="E8EEF5"/>
+          </a:solidFill>
+          <a:ln w="13970">
+            <a:solidFill>
+              <a:srgbClr val="E8EEF5"/>
+            </a:solidFill>
+            <a:prstDash val="solid"/>
+          </a:ln>
+        </p:spPr>
+      </p:sp>
+      <p:sp>
+        <p:nvSpPr>
+          <p:cNvPr id="12" name="Text 10"/>
+          <p:cNvSpPr/>
+          <p:nvPr/>
+        </p:nvSpPr>
+        <p:spPr>
+          <a:xfrm>
+            <a:off x="3465576" y="1417320"/>
+            <a:ext cx="2267712" cy="182880"/>
+          </a:xfrm>
+          <a:prstGeom prst="rect">
+            <a:avLst/>
+          </a:prstGeom>
+          <a:noFill/>
+          <a:ln/>
+        </p:spPr>
+        <p:txBody>
+          <a:bodyPr wrap="square" lIns="0" tIns="0" rIns="0" bIns="0" rtlCol="0" anchor="ctr"/>
+          <a:lstStyle/>
+          <a:p>
+            <a:pPr indent="0" marL="0">
+              <a:buNone/>
+            </a:pPr>
+            <a:r>
+              <a:rPr lang="en-US" sz="1700" b="1" dirty="0">
+                <a:solidFill>
+                  <a:srgbClr val="223A5E"/>
+                </a:solidFill>
+                <a:latin typeface="Times New Roman" pitchFamily="34" charset="0"/>
+                <a:ea typeface="Times New Roman" pitchFamily="34" charset="-122"/>
+                <a:cs typeface="Times New Roman" pitchFamily="34" charset="-120"/>
+              </a:rPr>
+              <a:t>Fidelity</a:t>
+            </a:r>
+            <a:endParaRPr lang="en-US" sz="1700" dirty="0"/>
+          </a:p>
+        </p:txBody>
+      </p:sp>
+      <p:sp>
+        <p:nvSpPr>
+          <p:cNvPr id="13" name="Text 11"/>
+          <p:cNvSpPr/>
+          <p:nvPr/>
+        </p:nvSpPr>
+        <p:spPr>
+          <a:xfrm>
+            <a:off x="3465576" y="1664208"/>
+            <a:ext cx="2267712" cy="1581912"/>
+          </a:xfrm>
+          <a:prstGeom prst="rect">
+            <a:avLst/>
+          </a:prstGeom>
+          <a:noFill/>
+          <a:ln/>
+        </p:spPr>
+        <p:txBody>
+          <a:bodyPr wrap="square" lIns="0" tIns="0" rIns="0" bIns="0" rtlCol="0" anchor="ctr">
+            <a:normAutofit/>
+          </a:bodyPr>
+          <a:lstStyle/>
+          <a:p>
+            <a:pPr indent="0" marL="0">
+              <a:buNone/>
+            </a:pPr>
+            <a:r>
+              <a:rPr lang="en-US" sz="1220" dirty="0">
+                <a:solidFill>
+                  <a:srgbClr val="1E2630"/>
+                </a:solidFill>
+                <a:latin typeface="Times New Roman" pitchFamily="34" charset="0"/>
+                <a:ea typeface="Times New Roman" pitchFamily="34" charset="-122"/>
+                <a:cs typeface="Times New Roman" pitchFamily="34" charset="-120"/>
+              </a:rPr>
+              <a:t>retrain_gap = F1_retrain - F1_unlearn</a:t>
+            </a:r>
+            <a:endParaRPr lang="en-US" sz="1220" dirty="0"/>
+          </a:p>
+          <a:p>
+            <a:pPr indent="0" marL="0">
+              <a:buNone/>
+            </a:pPr>
+            <a:endParaRPr lang="en-US" sz="1220" dirty="0"/>
+          </a:p>
+          <a:p>
+            <a:pPr indent="0" marL="0">
+              <a:buNone/>
+            </a:pPr>
+            <a:r>
+              <a:rPr lang="en-US" sz="1220" dirty="0">
+                <a:solidFill>
+                  <a:srgbClr val="1E2630"/>
+                </a:solidFill>
+                <a:latin typeface="Times New Roman" pitchFamily="34" charset="0"/>
+                <a:ea typeface="Times New Roman" pitchFamily="34" charset="-122"/>
+                <a:cs typeface="Times New Roman" pitchFamily="34" charset="-120"/>
+              </a:rPr>
+              <a:t>total_drop = drop_retrain + retrain_gap</a:t>
+            </a:r>
+            <a:endParaRPr lang="en-US" sz="1220" dirty="0"/>
+          </a:p>
+        </p:txBody>
+      </p:sp>
+      <p:sp>
+        <p:nvSpPr>
+          <p:cNvPr id="14" name="Shape 12"/>
+          <p:cNvSpPr/>
+          <p:nvPr/>
+        </p:nvSpPr>
+        <p:spPr>
+          <a:xfrm>
+            <a:off x="5943600" y="1325880"/>
+            <a:ext cx="2542032" cy="2011680"/>
+          </a:xfrm>
+          <a:prstGeom prst="roundRect">
+            <a:avLst>
+              <a:gd name="adj" fmla="val 2273"/>
             </a:avLst>
           </a:prstGeom>
           <a:solidFill>
@@ -9450,14 +9603,14 @@
       </p:sp>
       <p:sp>
         <p:nvSpPr>
-          <p:cNvPr id="12" name="Text 10"/>
-          <p:cNvSpPr/>
-          <p:nvPr/>
-        </p:nvSpPr>
-        <p:spPr>
-          <a:xfrm>
-            <a:off x="4892040" y="1417320"/>
-            <a:ext cx="3383280" cy="182880"/>
+          <p:cNvPr id="15" name="Text 13"/>
+          <p:cNvSpPr/>
+          <p:nvPr/>
+        </p:nvSpPr>
+        <p:spPr>
+          <a:xfrm>
+            <a:off x="6080760" y="1417320"/>
+            <a:ext cx="2267712" cy="182880"/>
           </a:xfrm>
           <a:prstGeom prst="rect">
             <a:avLst/>
@@ -9481,7 +9634,7 @@
                 <a:ea typeface="Times New Roman" pitchFamily="34" charset="-122"/>
                 <a:cs typeface="Times New Roman" pitchFamily="34" charset="-120"/>
               </a:rPr>
-              <a:t>Result discovery</a:t>
+              <a:t>Collateral</a:t>
             </a:r>
             <a:endParaRPr lang="en-US" sz="1700" dirty="0"/>
           </a:p>
@@ -9489,14 +9642,14 @@
       </p:sp>
       <p:sp>
         <p:nvSpPr>
-          <p:cNvPr id="13" name="Text 11"/>
-          <p:cNvSpPr/>
-          <p:nvPr/>
-        </p:nvSpPr>
-        <p:spPr>
-          <a:xfrm>
-            <a:off x="4892040" y="1664208"/>
-            <a:ext cx="3383280" cy="393192"/>
+          <p:cNvPr id="16" name="Text 14"/>
+          <p:cNvSpPr/>
+          <p:nvPr/>
+        </p:nvSpPr>
+        <p:spPr>
+          <a:xfrm>
+            <a:off x="6080760" y="1664208"/>
+            <a:ext cx="2267712" cy="1581912"/>
           </a:xfrm>
           <a:prstGeom prst="rect">
             <a:avLst/>
@@ -9522,34 +9675,74 @@
                 <a:ea typeface="Times New Roman" pitchFamily="34" charset="-122"/>
                 <a:cs typeface="Times New Roman" pitchFamily="34" charset="-120"/>
               </a:rPr>
-              <a:t>Auto-discovery of stored outputs to reduce manual bookkeeping.</a:t>
+              <a:t>fraction_flipped</a:t>
             </a:r>
             <a:endParaRPr lang="en-US" sz="1220" dirty="0"/>
           </a:p>
-        </p:txBody>
-      </p:sp>
-      <p:sp>
-        <p:nvSpPr>
-          <p:cNvPr id="14" name="Shape 12"/>
-          <p:cNvSpPr/>
-          <p:nvPr/>
-        </p:nvSpPr>
-        <p:spPr>
-          <a:xfrm>
-            <a:off x="731520" y="2313432"/>
-            <a:ext cx="3657600" cy="822960"/>
+          <a:p>
+            <a:pPr indent="0" marL="0">
+              <a:buNone/>
+            </a:pPr>
+            <a:r>
+              <a:rPr lang="en-US" sz="1220" dirty="0">
+                <a:solidFill>
+                  <a:srgbClr val="1E2630"/>
+                </a:solidFill>
+                <a:latin typeface="Times New Roman" pitchFamily="34" charset="0"/>
+                <a:ea typeface="Times New Roman" pitchFamily="34" charset="-122"/>
+                <a:cs typeface="Times New Roman" pitchFamily="34" charset="-120"/>
+              </a:rPr>
+              <a:t>mean_pred_shift</a:t>
+            </a:r>
+            <a:endParaRPr lang="en-US" sz="1220" dirty="0"/>
+          </a:p>
+          <a:p>
+            <a:pPr indent="0" marL="0">
+              <a:buNone/>
+            </a:pPr>
+            <a:endParaRPr lang="en-US" sz="1220" dirty="0"/>
+          </a:p>
+          <a:p>
+            <a:pPr indent="0" marL="0">
+              <a:buNone/>
+            </a:pPr>
+            <a:r>
+              <a:rPr lang="en-US" sz="1220" dirty="0">
+                <a:solidFill>
+                  <a:srgbClr val="1E2630"/>
+                </a:solidFill>
+                <a:latin typeface="Times New Roman" pitchFamily="34" charset="0"/>
+                <a:ea typeface="Times New Roman" pitchFamily="34" charset="-122"/>
+                <a:cs typeface="Times New Roman" pitchFamily="34" charset="-120"/>
+              </a:rPr>
+              <a:t>These show how strongly retained nodes are disturbed.</a:t>
+            </a:r>
+            <a:endParaRPr lang="en-US" sz="1220" dirty="0"/>
+          </a:p>
+        </p:txBody>
+      </p:sp>
+      <p:sp>
+        <p:nvSpPr>
+          <p:cNvPr id="17" name="Shape 15"/>
+          <p:cNvSpPr/>
+          <p:nvPr/>
+        </p:nvSpPr>
+        <p:spPr>
+          <a:xfrm>
+            <a:off x="987552" y="3785616"/>
+            <a:ext cx="7095744" cy="768096"/>
           </a:xfrm>
           <a:prstGeom prst="roundRect">
             <a:avLst>
-              <a:gd name="adj" fmla="val 5556"/>
+              <a:gd name="adj" fmla="val 5952"/>
             </a:avLst>
           </a:prstGeom>
           <a:solidFill>
-            <a:srgbClr val="FFFFFF"/>
+            <a:srgbClr val="223A5E"/>
           </a:solidFill>
           <a:ln w="13970">
             <a:solidFill>
-              <a:srgbClr val="D9DEE7"/>
+              <a:srgbClr val="223A5E"/>
             </a:solidFill>
             <a:prstDash val="solid"/>
           </a:ln>
@@ -9557,14 +9750,14 @@
       </p:sp>
       <p:sp>
         <p:nvSpPr>
-          <p:cNvPr id="15" name="Text 13"/>
-          <p:cNvSpPr/>
-          <p:nvPr/>
-        </p:nvSpPr>
-        <p:spPr>
-          <a:xfrm>
-            <a:off x="868680" y="2404872"/>
-            <a:ext cx="3383280" cy="182880"/>
+          <p:cNvPr id="18" name="Text 16"/>
+          <p:cNvSpPr/>
+          <p:nvPr/>
+        </p:nvSpPr>
+        <p:spPr>
+          <a:xfrm>
+            <a:off x="1124712" y="3877056"/>
+            <a:ext cx="6821424" cy="182880"/>
           </a:xfrm>
           <a:prstGeom prst="rect">
             <a:avLst/>
@@ -9582,13 +9775,13 @@
             <a:r>
               <a:rPr lang="en-US" sz="1700" b="1" dirty="0">
                 <a:solidFill>
-                  <a:srgbClr val="223A5E"/>
-                </a:solidFill>
-                <a:latin typeface="Times New Roman" pitchFamily="34" charset="0"/>
-                <a:ea typeface="Times New Roman" pitchFamily="34" charset="-122"/>
-                <a:cs typeface="Times New Roman" pitchFamily="34" charset="-120"/>
-              </a:rPr>
-              <a:t>Collateral analysis</a:t>
+                  <a:srgbClr val="F7F5F1"/>
+                </a:solidFill>
+                <a:latin typeface="Times New Roman" pitchFamily="34" charset="0"/>
+                <a:ea typeface="Times New Roman" pitchFamily="34" charset="-122"/>
+                <a:cs typeface="Times New Roman" pitchFamily="34" charset="-120"/>
+              </a:rPr>
+              <a:t>Reading rule</a:t>
             </a:r>
             <a:endParaRPr lang="en-US" sz="1700" dirty="0"/>
           </a:p>
@@ -9596,14 +9789,14 @@
       </p:sp>
       <p:sp>
         <p:nvSpPr>
-          <p:cNvPr id="16" name="Text 14"/>
-          <p:cNvSpPr/>
-          <p:nvPr/>
-        </p:nvSpPr>
-        <p:spPr>
-          <a:xfrm>
-            <a:off x="868680" y="2651760"/>
-            <a:ext cx="3383280" cy="393192"/>
+          <p:cNvPr id="19" name="Text 17"/>
+          <p:cNvSpPr/>
+          <p:nvPr/>
+        </p:nvSpPr>
+        <p:spPr>
+          <a:xfrm>
+            <a:off x="1124712" y="4123944"/>
+            <a:ext cx="6821424" cy="338328"/>
           </a:xfrm>
           <a:prstGeom prst="rect">
             <a:avLst/>
@@ -9623,338 +9816,15 @@
             <a:r>
               <a:rPr lang="en-US" sz="1220" dirty="0">
                 <a:solidFill>
-                  <a:srgbClr val="1E2630"/>
-                </a:solidFill>
-                <a:latin typeface="Times New Roman" pitchFamily="34" charset="0"/>
-                <a:ea typeface="Times New Roman" pitchFamily="34" charset="-122"/>
-                <a:cs typeface="Times New Roman" pitchFamily="34" charset="-120"/>
-              </a:rPr>
-              <a:t>Retained-node prediction tracking to reveal spillover.</a:t>
+                  <a:srgbClr val="FFFFFF"/>
+                </a:solidFill>
+                <a:latin typeface="Times New Roman" pitchFamily="34" charset="0"/>
+                <a:ea typeface="Times New Roman" pitchFamily="34" charset="-122"/>
+                <a:cs typeface="Times New Roman" pitchFamily="34" charset="-120"/>
+              </a:rPr>
+              <a:t>First trigger each method with a tiny random deletion, k=5, and use that post-unlearning F1 as the reference point. Then compare stronger attacks against that baseline; retrain_gap and collateral metrics explain why the utility changes appear.</a:t>
             </a:r>
             <a:endParaRPr lang="en-US" sz="1220" dirty="0"/>
-          </a:p>
-        </p:txBody>
-      </p:sp>
-      <p:sp>
-        <p:nvSpPr>
-          <p:cNvPr id="17" name="Shape 15"/>
-          <p:cNvSpPr/>
-          <p:nvPr/>
-        </p:nvSpPr>
-        <p:spPr>
-          <a:xfrm>
-            <a:off x="4754880" y="2313432"/>
-            <a:ext cx="3657600" cy="822960"/>
-          </a:xfrm>
-          <a:prstGeom prst="roundRect">
-            <a:avLst>
-              <a:gd name="adj" fmla="val 5556"/>
-            </a:avLst>
-          </a:prstGeom>
-          <a:solidFill>
-            <a:srgbClr val="FFFFFF"/>
-          </a:solidFill>
-          <a:ln w="13970">
-            <a:solidFill>
-              <a:srgbClr val="D9DEE7"/>
-            </a:solidFill>
-            <a:prstDash val="solid"/>
-          </a:ln>
-        </p:spPr>
-      </p:sp>
-      <p:sp>
-        <p:nvSpPr>
-          <p:cNvPr id="18" name="Text 16"/>
-          <p:cNvSpPr/>
-          <p:nvPr/>
-        </p:nvSpPr>
-        <p:spPr>
-          <a:xfrm>
-            <a:off x="4892040" y="2404872"/>
-            <a:ext cx="3383280" cy="182880"/>
-          </a:xfrm>
-          <a:prstGeom prst="rect">
-            <a:avLst/>
-          </a:prstGeom>
-          <a:noFill/>
-          <a:ln/>
-        </p:spPr>
-        <p:txBody>
-          <a:bodyPr wrap="square" lIns="0" tIns="0" rIns="0" bIns="0" rtlCol="0" anchor="ctr"/>
-          <a:lstStyle/>
-          <a:p>
-            <a:pPr indent="0" marL="0">
-              <a:buNone/>
-            </a:pPr>
-            <a:r>
-              <a:rPr lang="en-US" sz="1700" b="1" dirty="0">
-                <a:solidFill>
-                  <a:srgbClr val="223A5E"/>
-                </a:solidFill>
-                <a:latin typeface="Times New Roman" pitchFamily="34" charset="0"/>
-                <a:ea typeface="Times New Roman" pitchFamily="34" charset="-122"/>
-                <a:cs typeface="Times New Roman" pitchFamily="34" charset="-120"/>
-              </a:rPr>
-              <a:t>Statistical summary</a:t>
-            </a:r>
-            <a:endParaRPr lang="en-US" sz="1700" dirty="0"/>
-          </a:p>
-        </p:txBody>
-      </p:sp>
-      <p:sp>
-        <p:nvSpPr>
-          <p:cNvPr id="19" name="Text 17"/>
-          <p:cNvSpPr/>
-          <p:nvPr/>
-        </p:nvSpPr>
-        <p:spPr>
-          <a:xfrm>
-            <a:off x="4892040" y="2651760"/>
-            <a:ext cx="3383280" cy="393192"/>
-          </a:xfrm>
-          <a:prstGeom prst="rect">
-            <a:avLst/>
-          </a:prstGeom>
-          <a:noFill/>
-          <a:ln/>
-        </p:spPr>
-        <p:txBody>
-          <a:bodyPr wrap="square" lIns="0" tIns="0" rIns="0" bIns="0" rtlCol="0" anchor="ctr">
-            <a:normAutofit/>
-          </a:bodyPr>
-          <a:lstStyle/>
-          <a:p>
-            <a:pPr indent="0" marL="0">
-              <a:buNone/>
-            </a:pPr>
-            <a:r>
-              <a:rPr lang="en-US" sz="1220" dirty="0">
-                <a:solidFill>
-                  <a:srgbClr val="1E2630"/>
-                </a:solidFill>
-                <a:latin typeface="Times New Roman" pitchFamily="34" charset="0"/>
-                <a:ea typeface="Times New Roman" pitchFamily="34" charset="-122"/>
-                <a:cs typeface="Times New Roman" pitchFamily="34" charset="-120"/>
-              </a:rPr>
-              <a:t>Relative F1 drop, support thresholds, and effect-size comparisons.</a:t>
-            </a:r>
-            <a:endParaRPr lang="en-US" sz="1220" dirty="0"/>
-          </a:p>
-        </p:txBody>
-      </p:sp>
-      <p:sp>
-        <p:nvSpPr>
-          <p:cNvPr id="20" name="Shape 18"/>
-          <p:cNvSpPr/>
-          <p:nvPr/>
-        </p:nvSpPr>
-        <p:spPr>
-          <a:xfrm>
-            <a:off x="731520" y="3300984"/>
-            <a:ext cx="3657600" cy="822960"/>
-          </a:xfrm>
-          <a:prstGeom prst="roundRect">
-            <a:avLst>
-              <a:gd name="adj" fmla="val 5556"/>
-            </a:avLst>
-          </a:prstGeom>
-          <a:solidFill>
-            <a:srgbClr val="FFFFFF"/>
-          </a:solidFill>
-          <a:ln w="13970">
-            <a:solidFill>
-              <a:srgbClr val="D9DEE7"/>
-            </a:solidFill>
-            <a:prstDash val="solid"/>
-          </a:ln>
-        </p:spPr>
-      </p:sp>
-      <p:sp>
-        <p:nvSpPr>
-          <p:cNvPr id="21" name="Text 19"/>
-          <p:cNvSpPr/>
-          <p:nvPr/>
-        </p:nvSpPr>
-        <p:spPr>
-          <a:xfrm>
-            <a:off x="868680" y="3392424"/>
-            <a:ext cx="3383280" cy="182880"/>
-          </a:xfrm>
-          <a:prstGeom prst="rect">
-            <a:avLst/>
-          </a:prstGeom>
-          <a:noFill/>
-          <a:ln/>
-        </p:spPr>
-        <p:txBody>
-          <a:bodyPr wrap="square" lIns="0" tIns="0" rIns="0" bIns="0" rtlCol="0" anchor="ctr"/>
-          <a:lstStyle/>
-          <a:p>
-            <a:pPr indent="0" marL="0">
-              <a:buNone/>
-            </a:pPr>
-            <a:r>
-              <a:rPr lang="en-US" sz="1700" b="1" dirty="0">
-                <a:solidFill>
-                  <a:srgbClr val="223A5E"/>
-                </a:solidFill>
-                <a:latin typeface="Times New Roman" pitchFamily="34" charset="0"/>
-                <a:ea typeface="Times New Roman" pitchFamily="34" charset="-122"/>
-                <a:cs typeface="Times New Roman" pitchFamily="34" charset="-120"/>
-              </a:rPr>
-              <a:t>Figure generation</a:t>
-            </a:r>
-            <a:endParaRPr lang="en-US" sz="1700" dirty="0"/>
-          </a:p>
-        </p:txBody>
-      </p:sp>
-      <p:sp>
-        <p:nvSpPr>
-          <p:cNvPr id="22" name="Text 20"/>
-          <p:cNvSpPr/>
-          <p:nvPr/>
-        </p:nvSpPr>
-        <p:spPr>
-          <a:xfrm>
-            <a:off x="868680" y="3639312"/>
-            <a:ext cx="3383280" cy="393192"/>
-          </a:xfrm>
-          <a:prstGeom prst="rect">
-            <a:avLst/>
-          </a:prstGeom>
-          <a:noFill/>
-          <a:ln/>
-        </p:spPr>
-        <p:txBody>
-          <a:bodyPr wrap="square" lIns="0" tIns="0" rIns="0" bIns="0" rtlCol="0" anchor="ctr">
-            <a:normAutofit/>
-          </a:bodyPr>
-          <a:lstStyle/>
-          <a:p>
-            <a:pPr indent="0" marL="0">
-              <a:buNone/>
-            </a:pPr>
-            <a:r>
-              <a:rPr lang="en-US" sz="1220" dirty="0">
-                <a:solidFill>
-                  <a:srgbClr val="1E2630"/>
-                </a:solidFill>
-                <a:latin typeface="Times New Roman" pitchFamily="34" charset="0"/>
-                <a:ea typeface="Times New Roman" pitchFamily="34" charset="-122"/>
-                <a:cs typeface="Times New Roman" pitchFamily="34" charset="-120"/>
-              </a:rPr>
-              <a:t>Reusable plotting scripts that turn stored outputs into report figures.</a:t>
-            </a:r>
-            <a:endParaRPr lang="en-US" sz="1220" dirty="0"/>
-          </a:p>
-        </p:txBody>
-      </p:sp>
-      <p:sp>
-        <p:nvSpPr>
-          <p:cNvPr id="23" name="Shape 21"/>
-          <p:cNvSpPr/>
-          <p:nvPr/>
-        </p:nvSpPr>
-        <p:spPr>
-          <a:xfrm>
-            <a:off x="6629400" y="4114800"/>
-            <a:ext cx="1600200" cy="566928"/>
-          </a:xfrm>
-          <a:prstGeom prst="roundRect">
-            <a:avLst>
-              <a:gd name="adj" fmla="val 8065"/>
-            </a:avLst>
-          </a:prstGeom>
-          <a:solidFill>
-            <a:srgbClr val="223A5E"/>
-          </a:solidFill>
-          <a:ln w="12700">
-            <a:solidFill>
-              <a:srgbClr val="223A5E">
-                <a:alpha val="0"/>
-              </a:srgbClr>
-            </a:solidFill>
-            <a:prstDash val="solid"/>
-          </a:ln>
-        </p:spPr>
-      </p:sp>
-      <p:sp>
-        <p:nvSpPr>
-          <p:cNvPr id="24" name="Text 22"/>
-          <p:cNvSpPr/>
-          <p:nvPr/>
-        </p:nvSpPr>
-        <p:spPr>
-          <a:xfrm>
-            <a:off x="6702552" y="4224528"/>
-            <a:ext cx="1453896" cy="201168"/>
-          </a:xfrm>
-          <a:prstGeom prst="rect">
-            <a:avLst/>
-          </a:prstGeom>
-          <a:noFill/>
-          <a:ln/>
-        </p:spPr>
-        <p:txBody>
-          <a:bodyPr wrap="square" lIns="0" tIns="0" rIns="0" bIns="0" rtlCol="0" anchor="ctr"/>
-          <a:lstStyle/>
-          <a:p>
-            <a:pPr algn="ctr" indent="0" marL="0">
-              <a:buNone/>
-            </a:pPr>
-            <a:r>
-              <a:rPr lang="en-US" sz="1900" b="1" dirty="0">
-                <a:solidFill>
-                  <a:srgbClr val="FFFFFF"/>
-                </a:solidFill>
-                <a:latin typeface="Times New Roman" pitchFamily="34" charset="0"/>
-                <a:ea typeface="Times New Roman" pitchFamily="34" charset="-122"/>
-                <a:cs typeface="Times New Roman" pitchFamily="34" charset="-120"/>
-              </a:rPr>
-              <a:t>Reproducible</a:t>
-            </a:r>
-            <a:endParaRPr lang="en-US" sz="1900" dirty="0"/>
-          </a:p>
-        </p:txBody>
-      </p:sp>
-      <p:sp>
-        <p:nvSpPr>
-          <p:cNvPr id="25" name="Text 23"/>
-          <p:cNvSpPr/>
-          <p:nvPr/>
-        </p:nvSpPr>
-        <p:spPr>
-          <a:xfrm>
-            <a:off x="6702552" y="4498848"/>
-            <a:ext cx="1453896" cy="137160"/>
-          </a:xfrm>
-          <a:prstGeom prst="rect">
-            <a:avLst/>
-          </a:prstGeom>
-          <a:noFill/>
-          <a:ln/>
-        </p:spPr>
-        <p:txBody>
-          <a:bodyPr wrap="square" lIns="0" tIns="0" rIns="0" bIns="0" rtlCol="0" anchor="ctr">
-            <a:normAutofit/>
-          </a:bodyPr>
-          <a:lstStyle/>
-          <a:p>
-            <a:pPr algn="ctr" indent="0" marL="0">
-              <a:buNone/>
-            </a:pPr>
-            <a:r>
-              <a:rPr lang="en-US" sz="1000" dirty="0">
-                <a:solidFill>
-                  <a:srgbClr val="F7F5F1"/>
-                </a:solidFill>
-                <a:latin typeface="Times New Roman" pitchFamily="34" charset="0"/>
-                <a:ea typeface="Times New Roman" pitchFamily="34" charset="-122"/>
-                <a:cs typeface="Times New Roman" pitchFamily="34" charset="-120"/>
-              </a:rPr>
-              <a:t>analysis from stored outputs</a:t>
-            </a:r>
-            <a:endParaRPr lang="en-US" sz="1000" dirty="0"/>
           </a:p>
         </p:txBody>
       </p:sp>
@@ -10230,7 +10100,7 @@
                 <a:ea typeface="Times New Roman" pitchFamily="34" charset="-122"/>
                 <a:cs typeface="Times New Roman" pitchFamily="34" charset="-120"/>
               </a:rPr>
-              <a:t>Figure 1. Relative F1 drop across datasets and backbones at ratio = 0.05.</a:t>
+              <a:t>Figure 1. Family-level spectrum using relative F1 drop at ratio = 0.05.</a:t>
             </a:r>
             <a:endParaRPr lang="en-US" sz="900" dirty="0"/>
           </a:p>
@@ -10245,11 +10115,11 @@
         <p:spPr>
           <a:xfrm>
             <a:off x="6126480" y="932688"/>
-            <a:ext cx="2377440" cy="1078992"/>
+            <a:ext cx="2377440" cy="960120"/>
           </a:xfrm>
           <a:prstGeom prst="roundRect">
             <a:avLst>
-              <a:gd name="adj" fmla="val 4237"/>
+              <a:gd name="adj" fmla="val 4762"/>
             </a:avLst>
           </a:prstGeom>
           <a:solidFill>
@@ -10311,7 +10181,7 @@
         <p:spPr>
           <a:xfrm>
             <a:off x="6263640" y="1271016"/>
-            <a:ext cx="2103120" cy="649224"/>
+            <a:ext cx="2103120" cy="530352"/>
           </a:xfrm>
           <a:prstGeom prst="rect">
             <a:avLst/>
@@ -10337,7 +10207,7 @@
                 <a:ea typeface="Times New Roman" pitchFamily="34" charset="-122"/>
                 <a:cs typeface="Times New Roman" pitchFamily="34" charset="-120"/>
               </a:rPr>
-              <a:t>Approximate graph unlearning does not fail uniformly. Vulnerability depends strongly on the mechanism family.</a:t>
+              <a:t>Relative_f1_drop reveals a clear family-level vulnerability spectrum rather than one shared failure pattern.</a:t>
             </a:r>
             <a:endParaRPr lang="en-US" sz="1220" dirty="0"/>
           </a:p>
@@ -10351,12 +10221,12 @@
         </p:nvSpPr>
         <p:spPr>
           <a:xfrm>
-            <a:off x="6144768" y="2212848"/>
-            <a:ext cx="2331720" cy="914400"/>
+            <a:off x="6144768" y="2057400"/>
+            <a:ext cx="2331720" cy="960120"/>
           </a:xfrm>
           <a:prstGeom prst="roundRect">
             <a:avLst>
-              <a:gd name="adj" fmla="val 5000"/>
+              <a:gd name="adj" fmla="val 4762"/>
             </a:avLst>
           </a:prstGeom>
           <a:solidFill>
@@ -10378,7 +10248,7 @@
         </p:nvSpPr>
         <p:spPr>
           <a:xfrm>
-            <a:off x="6281928" y="2304288"/>
+            <a:off x="6281928" y="2148840"/>
             <a:ext cx="2057400" cy="182880"/>
           </a:xfrm>
           <a:prstGeom prst="rect">
@@ -10417,8 +10287,8 @@
         </p:nvSpPr>
         <p:spPr>
           <a:xfrm>
-            <a:off x="6281928" y="2551176"/>
-            <a:ext cx="2057400" cy="484632"/>
+            <a:off x="6281928" y="2395728"/>
+            <a:ext cx="2057400" cy="530352"/>
           </a:xfrm>
           <a:prstGeom prst="rect">
             <a:avLst/>
@@ -10478,7 +10348,7 @@
                 <a:ea typeface="Times New Roman" pitchFamily="34" charset="-122"/>
                 <a:cs typeface="Times New Roman" pitchFamily="34" charset="-120"/>
               </a:rPr>
-              <a:t>GraphEraser shows no collapse.</a:t>
+              <a:t>GraphEraser shows shard protection.</a:t>
             </a:r>
             <a:endParaRPr lang="en-US" sz="1220" dirty="0"/>
           </a:p>
@@ -10486,14 +10356,41 @@
       </p:sp>
       <p:sp>
         <p:nvSpPr>
-          <p:cNvPr id="15" name="Text 12"/>
-          <p:cNvSpPr/>
-          <p:nvPr/>
-        </p:nvSpPr>
-        <p:spPr>
-          <a:xfrm>
-            <a:off x="6254496" y="3456432"/>
-            <a:ext cx="1920240" cy="868680"/>
+          <p:cNvPr id="15" name="Shape 12"/>
+          <p:cNvSpPr/>
+          <p:nvPr/>
+        </p:nvSpPr>
+        <p:spPr>
+          <a:xfrm>
+            <a:off x="6144768" y="3255264"/>
+            <a:ext cx="2331720" cy="914400"/>
+          </a:xfrm>
+          <a:prstGeom prst="roundRect">
+            <a:avLst>
+              <a:gd name="adj" fmla="val 5000"/>
+            </a:avLst>
+          </a:prstGeom>
+          <a:solidFill>
+            <a:srgbClr val="E8EEF5"/>
+          </a:solidFill>
+          <a:ln w="13970">
+            <a:solidFill>
+              <a:srgbClr val="E8EEF5"/>
+            </a:solidFill>
+            <a:prstDash val="solid"/>
+          </a:ln>
+        </p:spPr>
+      </p:sp>
+      <p:sp>
+        <p:nvSpPr>
+          <p:cNvPr id="16" name="Text 13"/>
+          <p:cNvSpPr/>
+          <p:nvPr/>
+        </p:nvSpPr>
+        <p:spPr>
+          <a:xfrm>
+            <a:off x="6281928" y="3346704"/>
+            <a:ext cx="2057400" cy="182880"/>
           </a:xfrm>
           <a:prstGeom prst="rect">
             <a:avLst/>
@@ -10505,12 +10402,52 @@
           <a:bodyPr wrap="square" lIns="0" tIns="0" rIns="0" bIns="0" rtlCol="0" anchor="ctr"/>
           <a:lstStyle/>
           <a:p>
-            <a:pPr marL="203200" indent="-203200">
-              <a:buSzPct val="100000"/>
-              <a:buChar char="•"/>
-            </a:pPr>
-            <a:r>
-              <a:rPr lang="en-US" sz="1160" dirty="0">
+            <a:pPr indent="0" marL="0">
+              <a:buNone/>
+            </a:pPr>
+            <a:r>
+              <a:rPr lang="en-US" sz="1700" b="1" dirty="0">
+                <a:solidFill>
+                  <a:srgbClr val="223A5E"/>
+                </a:solidFill>
+                <a:latin typeface="Times New Roman" pitchFamily="34" charset="0"/>
+                <a:ea typeface="Times New Roman" pitchFamily="34" charset="-122"/>
+                <a:cs typeface="Times New Roman" pitchFamily="34" charset="-120"/>
+              </a:rPr>
+              <a:t>Why this metric?</a:t>
+            </a:r>
+            <a:endParaRPr lang="en-US" sz="1700" dirty="0"/>
+          </a:p>
+        </p:txBody>
+      </p:sp>
+      <p:sp>
+        <p:nvSpPr>
+          <p:cNvPr id="17" name="Text 14"/>
+          <p:cNvSpPr/>
+          <p:nvPr/>
+        </p:nvSpPr>
+        <p:spPr>
+          <a:xfrm>
+            <a:off x="6281928" y="3593592"/>
+            <a:ext cx="2057400" cy="484632"/>
+          </a:xfrm>
+          <a:prstGeom prst="rect">
+            <a:avLst/>
+          </a:prstGeom>
+          <a:noFill/>
+          <a:ln/>
+        </p:spPr>
+        <p:txBody>
+          <a:bodyPr wrap="square" lIns="0" tIns="0" rIns="0" bIns="0" rtlCol="0" anchor="ctr">
+            <a:normAutofit/>
+          </a:bodyPr>
+          <a:lstStyle/>
+          <a:p>
+            <a:pPr indent="0" marL="0">
+              <a:buNone/>
+            </a:pPr>
+            <a:r>
+              <a:rPr lang="en-US" sz="1220" dirty="0">
                 <a:solidFill>
                   <a:srgbClr val="1E2630"/>
                 </a:solidFill>
@@ -10518,27 +10455,9 @@
                 <a:ea typeface="Times New Roman" pitchFamily="34" charset="-122"/>
                 <a:cs typeface="Times New Roman" pitchFamily="34" charset="-120"/>
               </a:rPr>
-              <a:t>The family-level pattern is consistent across the tested settings.</a:t>
-            </a:r>
-            <a:endParaRPr lang="en-US" sz="1160" dirty="0"/>
-          </a:p>
-          <a:p>
-            <a:pPr marL="203200" indent="-203200">
-              <a:buSzPct val="100000"/>
-              <a:buChar char="•"/>
-            </a:pPr>
-            <a:r>
-              <a:rPr lang="en-US" sz="1160" dirty="0">
-                <a:solidFill>
-                  <a:srgbClr val="1E2630"/>
-                </a:solidFill>
-                <a:latin typeface="Times New Roman" pitchFamily="34" charset="0"/>
-                <a:ea typeface="Times New Roman" pitchFamily="34" charset="-122"/>
-                <a:cs typeface="Times New Roman" pitchFamily="34" charset="-120"/>
-              </a:rPr>
-              <a:t>Mechanism choice, not just deletion budget, determines fragility.</a:t>
-            </a:r>
-            <a:endParaRPr lang="en-US" sz="1160" dirty="0"/>
+              <a:t>raw drop can mislead on shard-based methods, so a k=5 post-unlearning baseline is the cleaner cross-family lens.</a:t>
+            </a:r>
+            <a:endParaRPr lang="en-US" sz="1220" dirty="0"/>
           </a:p>
         </p:txBody>
       </p:sp>
@@ -10634,7 +10553,7 @@
                 <a:ea typeface="Times New Roman" pitchFamily="34" charset="-122"/>
                 <a:cs typeface="Times New Roman" pitchFamily="34" charset="-120"/>
               </a:rPr>
-              <a:t>Deep Dive: GNNDelete Fragility</a:t>
+              <a:t>Ratio Sensitivity And Ablation</a:t>
             </a:r>
             <a:endParaRPr lang="en-US" sz="2400" dirty="0"/>
           </a:p>
@@ -10814,7 +10733,7 @@
                 <a:ea typeface="Times New Roman" pitchFamily="34" charset="-122"/>
                 <a:cs typeface="Times New Roman" pitchFamily="34" charset="-120"/>
               </a:rPr>
-              <a:t>Figure 2. Ratio sensitivity view for GIF and GNNDelete on Cora/GCN.</a:t>
+              <a:t>Figure 2. Ratio-sensitivity view for GIF and GNNDelete on Cora/GCN.</a:t>
             </a:r>
             <a:endParaRPr lang="en-US" sz="900" dirty="0"/>
           </a:p>
@@ -10828,230 +10747,12 @@
         </p:nvSpPr>
         <p:spPr>
           <a:xfrm>
-            <a:off x="6172200" y="1097280"/>
-            <a:ext cx="1920240" cy="731520"/>
+            <a:off x="6016752" y="1005840"/>
+            <a:ext cx="2359152" cy="960120"/>
           </a:xfrm>
           <a:prstGeom prst="roundRect">
             <a:avLst>
-              <a:gd name="adj" fmla="val 6250"/>
-            </a:avLst>
-          </a:prstGeom>
-          <a:solidFill>
-            <a:srgbClr val="A6404B"/>
-          </a:solidFill>
-          <a:ln w="12700">
-            <a:solidFill>
-              <a:srgbClr val="A6404B">
-                <a:alpha val="0"/>
-              </a:srgbClr>
-            </a:solidFill>
-            <a:prstDash val="solid"/>
-          </a:ln>
-        </p:spPr>
-      </p:sp>
-      <p:sp>
-        <p:nvSpPr>
-          <p:cNvPr id="10" name="Text 7"/>
-          <p:cNvSpPr/>
-          <p:nvPr/>
-        </p:nvSpPr>
-        <p:spPr>
-          <a:xfrm>
-            <a:off x="6245352" y="1207008"/>
-            <a:ext cx="1773936" cy="201168"/>
-          </a:xfrm>
-          <a:prstGeom prst="rect">
-            <a:avLst/>
-          </a:prstGeom>
-          <a:noFill/>
-          <a:ln/>
-        </p:spPr>
-        <p:txBody>
-          <a:bodyPr wrap="square" lIns="0" tIns="0" rIns="0" bIns="0" rtlCol="0" anchor="ctr"/>
-          <a:lstStyle/>
-          <a:p>
-            <a:pPr algn="ctr" indent="0" marL="0">
-              <a:buNone/>
-            </a:pPr>
-            <a:r>
-              <a:rPr lang="en-US" sz="1900" b="1" dirty="0">
-                <a:solidFill>
-                  <a:srgbClr val="FFFFFF"/>
-                </a:solidFill>
-                <a:latin typeface="Times New Roman" pitchFamily="34" charset="0"/>
-                <a:ea typeface="Times New Roman" pitchFamily="34" charset="-122"/>
-                <a:cs typeface="Times New Roman" pitchFamily="34" charset="-120"/>
-              </a:rPr>
-              <a:t>21.53%</a:t>
-            </a:r>
-            <a:endParaRPr lang="en-US" sz="1900" dirty="0"/>
-          </a:p>
-        </p:txBody>
-      </p:sp>
-      <p:sp>
-        <p:nvSpPr>
-          <p:cNvPr id="11" name="Text 8"/>
-          <p:cNvSpPr/>
-          <p:nvPr/>
-        </p:nvSpPr>
-        <p:spPr>
-          <a:xfrm>
-            <a:off x="6245352" y="1481328"/>
-            <a:ext cx="1773936" cy="301752"/>
-          </a:xfrm>
-          <a:prstGeom prst="rect">
-            <a:avLst/>
-          </a:prstGeom>
-          <a:noFill/>
-          <a:ln/>
-        </p:spPr>
-        <p:txBody>
-          <a:bodyPr wrap="square" lIns="0" tIns="0" rIns="0" bIns="0" rtlCol="0" anchor="ctr">
-            <a:normAutofit/>
-          </a:bodyPr>
-          <a:lstStyle/>
-          <a:p>
-            <a:pPr algn="ctr" indent="0" marL="0">
-              <a:buNone/>
-            </a:pPr>
-            <a:r>
-              <a:rPr lang="en-US" sz="1000" dirty="0">
-                <a:solidFill>
-                  <a:srgbClr val="F7F5F1"/>
-                </a:solidFill>
-                <a:latin typeface="Times New Roman" pitchFamily="34" charset="0"/>
-                <a:ea typeface="Times New Roman" pitchFamily="34" charset="-122"/>
-                <a:cs typeface="Times New Roman" pitchFamily="34" charset="-120"/>
-              </a:rPr>
-              <a:t>retrain gap at ratio 0.01 on Cora</a:t>
-            </a:r>
-            <a:endParaRPr lang="en-US" sz="1000" dirty="0"/>
-          </a:p>
-        </p:txBody>
-      </p:sp>
-      <p:sp>
-        <p:nvSpPr>
-          <p:cNvPr id="12" name="Shape 9"/>
-          <p:cNvSpPr/>
-          <p:nvPr/>
-        </p:nvSpPr>
-        <p:spPr>
-          <a:xfrm>
-            <a:off x="6172200" y="2011680"/>
-            <a:ext cx="1920240" cy="731520"/>
-          </a:xfrm>
-          <a:prstGeom prst="roundRect">
-            <a:avLst>
-              <a:gd name="adj" fmla="val 6250"/>
-            </a:avLst>
-          </a:prstGeom>
-          <a:solidFill>
-            <a:srgbClr val="223A5E"/>
-          </a:solidFill>
-          <a:ln w="12700">
-            <a:solidFill>
-              <a:srgbClr val="223A5E">
-                <a:alpha val="0"/>
-              </a:srgbClr>
-            </a:solidFill>
-            <a:prstDash val="solid"/>
-          </a:ln>
-        </p:spPr>
-      </p:sp>
-      <p:sp>
-        <p:nvSpPr>
-          <p:cNvPr id="13" name="Text 10"/>
-          <p:cNvSpPr/>
-          <p:nvPr/>
-        </p:nvSpPr>
-        <p:spPr>
-          <a:xfrm>
-            <a:off x="6245352" y="2121408"/>
-            <a:ext cx="1773936" cy="201168"/>
-          </a:xfrm>
-          <a:prstGeom prst="rect">
-            <a:avLst/>
-          </a:prstGeom>
-          <a:noFill/>
-          <a:ln/>
-        </p:spPr>
-        <p:txBody>
-          <a:bodyPr wrap="square" lIns="0" tIns="0" rIns="0" bIns="0" rtlCol="0" anchor="ctr"/>
-          <a:lstStyle/>
-          <a:p>
-            <a:pPr algn="ctr" indent="0" marL="0">
-              <a:buNone/>
-            </a:pPr>
-            <a:r>
-              <a:rPr lang="en-US" sz="1900" b="1" dirty="0">
-                <a:solidFill>
-                  <a:srgbClr val="FFFFFF"/>
-                </a:solidFill>
-                <a:latin typeface="Times New Roman" pitchFamily="34" charset="0"/>
-                <a:ea typeface="Times New Roman" pitchFamily="34" charset="-122"/>
-                <a:cs typeface="Times New Roman" pitchFamily="34" charset="-120"/>
-              </a:rPr>
-              <a:t>26.2%</a:t>
-            </a:r>
-            <a:endParaRPr lang="en-US" sz="1900" dirty="0"/>
-          </a:p>
-        </p:txBody>
-      </p:sp>
-      <p:sp>
-        <p:nvSpPr>
-          <p:cNvPr id="14" name="Text 11"/>
-          <p:cNvSpPr/>
-          <p:nvPr/>
-        </p:nvSpPr>
-        <p:spPr>
-          <a:xfrm>
-            <a:off x="6245352" y="2395728"/>
-            <a:ext cx="1773936" cy="301752"/>
-          </a:xfrm>
-          <a:prstGeom prst="rect">
-            <a:avLst/>
-          </a:prstGeom>
-          <a:noFill/>
-          <a:ln/>
-        </p:spPr>
-        <p:txBody>
-          <a:bodyPr wrap="square" lIns="0" tIns="0" rIns="0" bIns="0" rtlCol="0" anchor="ctr">
-            <a:normAutofit/>
-          </a:bodyPr>
-          <a:lstStyle/>
-          <a:p>
-            <a:pPr algn="ctr" indent="0" marL="0">
-              <a:buNone/>
-            </a:pPr>
-            <a:r>
-              <a:rPr lang="en-US" sz="1000" dirty="0">
-                <a:solidFill>
-                  <a:srgbClr val="F7F5F1"/>
-                </a:solidFill>
-                <a:latin typeface="Times New Roman" pitchFamily="34" charset="0"/>
-                <a:ea typeface="Times New Roman" pitchFamily="34" charset="-122"/>
-                <a:cs typeface="Times New Roman" pitchFamily="34" charset="-120"/>
-              </a:rPr>
-              <a:t>non-target prediction changes</a:t>
-            </a:r>
-            <a:endParaRPr lang="en-US" sz="1000" dirty="0"/>
-          </a:p>
-        </p:txBody>
-      </p:sp>
-      <p:sp>
-        <p:nvSpPr>
-          <p:cNvPr id="15" name="Shape 12"/>
-          <p:cNvSpPr/>
-          <p:nvPr/>
-        </p:nvSpPr>
-        <p:spPr>
-          <a:xfrm>
-            <a:off x="5989320" y="2971800"/>
-            <a:ext cx="2331720" cy="1325880"/>
-          </a:xfrm>
-          <a:prstGeom prst="roundRect">
-            <a:avLst>
-              <a:gd name="adj" fmla="val 3448"/>
+              <a:gd name="adj" fmla="val 4762"/>
             </a:avLst>
           </a:prstGeom>
           <a:solidFill>
@@ -11067,14 +10768,14 @@
       </p:sp>
       <p:sp>
         <p:nvSpPr>
-          <p:cNvPr id="16" name="Text 13"/>
-          <p:cNvSpPr/>
-          <p:nvPr/>
-        </p:nvSpPr>
-        <p:spPr>
-          <a:xfrm>
-            <a:off x="6126480" y="3063240"/>
-            <a:ext cx="2057400" cy="182880"/>
+          <p:cNvPr id="10" name="Text 7"/>
+          <p:cNvSpPr/>
+          <p:nvPr/>
+        </p:nvSpPr>
+        <p:spPr>
+          <a:xfrm>
+            <a:off x="6153912" y="1097280"/>
+            <a:ext cx="2084832" cy="182880"/>
           </a:xfrm>
           <a:prstGeom prst="rect">
             <a:avLst/>
@@ -11098,7 +10799,7 @@
                 <a:ea typeface="Times New Roman" pitchFamily="34" charset="-122"/>
                 <a:cs typeface="Times New Roman" pitchFamily="34" charset="-120"/>
               </a:rPr>
-              <a:t>Interpretation</a:t>
+              <a:t>Ablation read</a:t>
             </a:r>
             <a:endParaRPr lang="en-US" sz="1700" dirty="0"/>
           </a:p>
@@ -11106,14 +10807,14 @@
       </p:sp>
       <p:sp>
         <p:nvSpPr>
-          <p:cNvPr id="17" name="Text 14"/>
-          <p:cNvSpPr/>
-          <p:nvPr/>
-        </p:nvSpPr>
-        <p:spPr>
-          <a:xfrm>
-            <a:off x="6126480" y="3310128"/>
-            <a:ext cx="2057400" cy="896112"/>
+          <p:cNvPr id="11" name="Text 8"/>
+          <p:cNvSpPr/>
+          <p:nvPr/>
+        </p:nvSpPr>
+        <p:spPr>
+          <a:xfrm>
+            <a:off x="6153912" y="1344168"/>
+            <a:ext cx="2084832" cy="530352"/>
           </a:xfrm>
           <a:prstGeom prst="rect">
             <a:avLst/>
@@ -11139,7 +10840,221 @@
                 <a:ea typeface="Times New Roman" pitchFamily="34" charset="-122"/>
                 <a:cs typeface="Times New Roman" pitchFamily="34" charset="-120"/>
               </a:rPr>
-              <a:t>Exact retraining on the same deletion set shows only a small intrinsic decrease. The large collapse is therefore mainly approximation error, not simply node importance.</a:t>
+              <a:t>This page asks how attack strength changes as the deletion ratio increases, not only who wins at one fixed point.</a:t>
+            </a:r>
+            <a:endParaRPr lang="en-US" sz="1220" dirty="0"/>
+          </a:p>
+        </p:txBody>
+      </p:sp>
+      <p:sp>
+        <p:nvSpPr>
+          <p:cNvPr id="12" name="Shape 9"/>
+          <p:cNvSpPr/>
+          <p:nvPr/>
+        </p:nvSpPr>
+        <p:spPr>
+          <a:xfrm>
+            <a:off x="6016752" y="2240280"/>
+            <a:ext cx="2359152" cy="960120"/>
+          </a:xfrm>
+          <a:prstGeom prst="roundRect">
+            <a:avLst>
+              <a:gd name="adj" fmla="val 4762"/>
+            </a:avLst>
+          </a:prstGeom>
+          <a:solidFill>
+            <a:srgbClr val="E8EEF5"/>
+          </a:solidFill>
+          <a:ln w="13970">
+            <a:solidFill>
+              <a:srgbClr val="E8EEF5"/>
+            </a:solidFill>
+            <a:prstDash val="solid"/>
+          </a:ln>
+        </p:spPr>
+      </p:sp>
+      <p:sp>
+        <p:nvSpPr>
+          <p:cNvPr id="13" name="Text 10"/>
+          <p:cNvSpPr/>
+          <p:nvPr/>
+        </p:nvSpPr>
+        <p:spPr>
+          <a:xfrm>
+            <a:off x="6153912" y="2331720"/>
+            <a:ext cx="2084832" cy="182880"/>
+          </a:xfrm>
+          <a:prstGeom prst="rect">
+            <a:avLst/>
+          </a:prstGeom>
+          <a:noFill/>
+          <a:ln/>
+        </p:spPr>
+        <p:txBody>
+          <a:bodyPr wrap="square" lIns="0" tIns="0" rIns="0" bIns="0" rtlCol="0" anchor="ctr"/>
+          <a:lstStyle/>
+          <a:p>
+            <a:pPr indent="0" marL="0">
+              <a:buNone/>
+            </a:pPr>
+            <a:r>
+              <a:rPr lang="en-US" sz="1700" b="1" dirty="0">
+                <a:solidFill>
+                  <a:srgbClr val="223A5E"/>
+                </a:solidFill>
+                <a:latin typeface="Times New Roman" pitchFamily="34" charset="0"/>
+                <a:ea typeface="Times New Roman" pitchFamily="34" charset="-122"/>
+                <a:cs typeface="Times New Roman" pitchFamily="34" charset="-120"/>
+              </a:rPr>
+              <a:t>Observed pattern</a:t>
+            </a:r>
+            <a:endParaRPr lang="en-US" sz="1700" dirty="0"/>
+          </a:p>
+        </p:txBody>
+      </p:sp>
+      <p:sp>
+        <p:nvSpPr>
+          <p:cNvPr id="14" name="Text 11"/>
+          <p:cNvSpPr/>
+          <p:nvPr/>
+        </p:nvSpPr>
+        <p:spPr>
+          <a:xfrm>
+            <a:off x="6153912" y="2578608"/>
+            <a:ext cx="2084832" cy="530352"/>
+          </a:xfrm>
+          <a:prstGeom prst="rect">
+            <a:avLst/>
+          </a:prstGeom>
+          <a:noFill/>
+          <a:ln/>
+        </p:spPr>
+        <p:txBody>
+          <a:bodyPr wrap="square" lIns="0" tIns="0" rIns="0" bIns="0" rtlCol="0" anchor="ctr">
+            <a:normAutofit/>
+          </a:bodyPr>
+          <a:lstStyle/>
+          <a:p>
+            <a:pPr indent="0" marL="0">
+              <a:buNone/>
+            </a:pPr>
+            <a:r>
+              <a:rPr lang="en-US" sz="1220" dirty="0">
+                <a:solidFill>
+                  <a:srgbClr val="1E2630"/>
+                </a:solidFill>
+                <a:latin typeface="Times New Roman" pitchFamily="34" charset="0"/>
+                <a:ea typeface="Times New Roman" pitchFamily="34" charset="-122"/>
+                <a:cs typeface="Times New Roman" pitchFamily="34" charset="-120"/>
+              </a:rPr>
+              <a:t>GNNDelete stays sensitive even at small ratios, while GIF remains much flatter across the same range.</a:t>
+            </a:r>
+            <a:endParaRPr lang="en-US" sz="1220" dirty="0"/>
+          </a:p>
+        </p:txBody>
+      </p:sp>
+      <p:sp>
+        <p:nvSpPr>
+          <p:cNvPr id="15" name="Shape 12"/>
+          <p:cNvSpPr/>
+          <p:nvPr/>
+        </p:nvSpPr>
+        <p:spPr>
+          <a:xfrm>
+            <a:off x="6016752" y="3474720"/>
+            <a:ext cx="2359152" cy="749808"/>
+          </a:xfrm>
+          <a:prstGeom prst="roundRect">
+            <a:avLst>
+              <a:gd name="adj" fmla="val 6098"/>
+            </a:avLst>
+          </a:prstGeom>
+          <a:solidFill>
+            <a:srgbClr val="223A5E"/>
+          </a:solidFill>
+          <a:ln w="13970">
+            <a:solidFill>
+              <a:srgbClr val="223A5E"/>
+            </a:solidFill>
+            <a:prstDash val="solid"/>
+          </a:ln>
+        </p:spPr>
+      </p:sp>
+      <p:sp>
+        <p:nvSpPr>
+          <p:cNvPr id="16" name="Text 13"/>
+          <p:cNvSpPr/>
+          <p:nvPr/>
+        </p:nvSpPr>
+        <p:spPr>
+          <a:xfrm>
+            <a:off x="6153912" y="3566160"/>
+            <a:ext cx="2084832" cy="182880"/>
+          </a:xfrm>
+          <a:prstGeom prst="rect">
+            <a:avLst/>
+          </a:prstGeom>
+          <a:noFill/>
+          <a:ln/>
+        </p:spPr>
+        <p:txBody>
+          <a:bodyPr wrap="square" lIns="0" tIns="0" rIns="0" bIns="0" rtlCol="0" anchor="ctr"/>
+          <a:lstStyle/>
+          <a:p>
+            <a:pPr indent="0" marL="0">
+              <a:buNone/>
+            </a:pPr>
+            <a:r>
+              <a:rPr lang="en-US" sz="1700" b="1" dirty="0">
+                <a:solidFill>
+                  <a:srgbClr val="F7F5F1"/>
+                </a:solidFill>
+                <a:latin typeface="Times New Roman" pitchFamily="34" charset="0"/>
+                <a:ea typeface="Times New Roman" pitchFamily="34" charset="-122"/>
+                <a:cs typeface="Times New Roman" pitchFamily="34" charset="-120"/>
+              </a:rPr>
+              <a:t>Takeaway</a:t>
+            </a:r>
+            <a:endParaRPr lang="en-US" sz="1700" dirty="0"/>
+          </a:p>
+        </p:txBody>
+      </p:sp>
+      <p:sp>
+        <p:nvSpPr>
+          <p:cNvPr id="17" name="Text 14"/>
+          <p:cNvSpPr/>
+          <p:nvPr/>
+        </p:nvSpPr>
+        <p:spPr>
+          <a:xfrm>
+            <a:off x="6153912" y="3813048"/>
+            <a:ext cx="2084832" cy="320040"/>
+          </a:xfrm>
+          <a:prstGeom prst="rect">
+            <a:avLst/>
+          </a:prstGeom>
+          <a:noFill/>
+          <a:ln/>
+        </p:spPr>
+        <p:txBody>
+          <a:bodyPr wrap="square" lIns="0" tIns="0" rIns="0" bIns="0" rtlCol="0" anchor="ctr">
+            <a:normAutofit/>
+          </a:bodyPr>
+          <a:lstStyle/>
+          <a:p>
+            <a:pPr indent="0" marL="0">
+              <a:buNone/>
+            </a:pPr>
+            <a:r>
+              <a:rPr lang="en-US" sz="1220" dirty="0">
+                <a:solidFill>
+                  <a:srgbClr val="FFFFFF"/>
+                </a:solidFill>
+                <a:latin typeface="Times New Roman" pitchFamily="34" charset="0"/>
+                <a:ea typeface="Times New Roman" pitchFamily="34" charset="-122"/>
+                <a:cs typeface="Times New Roman" pitchFamily="34" charset="-120"/>
+              </a:rPr>
+              <a:t>The family difference is structural rather than a one-point artifact of the chosen ratio.</a:t>
             </a:r>
             <a:endParaRPr lang="en-US" sz="1220" dirty="0"/>
           </a:p>
@@ -11385,7 +11300,7 @@
               <a:buNone/>
             </a:pPr>
             <a:r>
-              <a:rPr lang="en-US" sz="1800" b="1" dirty="0">
+              <a:rPr lang="en-US" sz="1670" b="1" dirty="0">
                 <a:solidFill>
                   <a:srgbClr val="223A5E"/>
                 </a:solidFill>
@@ -11393,9 +11308,9 @@
                 <a:ea typeface="Times New Roman" pitchFamily="34" charset="-122"/>
                 <a:cs typeface="Times New Roman" pitchFamily="34" charset="-120"/>
               </a:rPr>
-              <a:t>Exact retraining tells us what the deletion should have done. The remaining gap is mechanism-induced spillover.</a:t>
-            </a:r>
-            <a:endParaRPr lang="en-US" sz="1800" dirty="0"/>
+              <a:t>relative_f1_drop says the attack beats the k=5 method baseline; retrain_gap and collateral metrics explain where the extra damage comes from.</a:t>
+            </a:r>
+            <a:endParaRPr lang="en-US" sz="1670" dirty="0"/>
           </a:p>
         </p:txBody>
       </p:sp>
@@ -11408,11 +11323,11 @@
         <p:spPr>
           <a:xfrm>
             <a:off x="713232" y="1371600"/>
-            <a:ext cx="3611880" cy="2606040"/>
+            <a:ext cx="2487168" cy="2542032"/>
           </a:xfrm>
           <a:prstGeom prst="roundRect">
             <a:avLst>
-              <a:gd name="adj" fmla="val 1754"/>
+              <a:gd name="adj" fmla="val 1838"/>
             </a:avLst>
           </a:prstGeom>
           <a:solidFill>
@@ -11435,7 +11350,7 @@
         <p:spPr>
           <a:xfrm>
             <a:off x="850392" y="1463040"/>
-            <a:ext cx="3337560" cy="182880"/>
+            <a:ext cx="2212848" cy="182880"/>
           </a:xfrm>
           <a:prstGeom prst="rect">
             <a:avLst/>
@@ -11459,7 +11374,7 @@
                 <a:ea typeface="Times New Roman" pitchFamily="34" charset="-122"/>
                 <a:cs typeface="Times New Roman" pitchFamily="34" charset="-120"/>
               </a:rPr>
-              <a:t>Deleted targets</a:t>
+              <a:t>Attack success</a:t>
             </a:r>
             <a:endParaRPr lang="en-US" sz="1700" dirty="0"/>
           </a:p>
@@ -11474,7 +11389,7 @@
         <p:spPr>
           <a:xfrm>
             <a:off x="850392" y="1709928"/>
-            <a:ext cx="3337560" cy="2176272"/>
+            <a:ext cx="2212848" cy="2112264"/>
           </a:xfrm>
           <a:prstGeom prst="rect">
             <a:avLst/>
@@ -11500,7 +11415,7 @@
                 <a:ea typeface="Times New Roman" pitchFamily="34" charset="-122"/>
                 <a:cs typeface="Times New Roman" pitchFamily="34" charset="-120"/>
               </a:rPr>
-              <a:t>Some drop is legitimate because removed nodes can be informative. A correct system may still lose a small amount of utility when those nodes disappear. </a:t>
+              <a:t>relative_f1_drop tells us whether a structured attack causes more loss than the small random-trigger baseline.</a:t>
             </a:r>
             <a:endParaRPr lang="en-US" sz="1220" dirty="0"/>
           </a:p>
@@ -11514,12 +11429,119 @@
         </p:nvSpPr>
         <p:spPr>
           <a:xfrm>
-            <a:off x="4663440" y="1371600"/>
-            <a:ext cx="3611880" cy="2606040"/>
+            <a:off x="3337560" y="1371600"/>
+            <a:ext cx="2487168" cy="2542032"/>
           </a:xfrm>
           <a:prstGeom prst="roundRect">
             <a:avLst>
-              <a:gd name="adj" fmla="val 1754"/>
+              <a:gd name="adj" fmla="val 1838"/>
+            </a:avLst>
+          </a:prstGeom>
+          <a:solidFill>
+            <a:srgbClr val="E8EEF5"/>
+          </a:solidFill>
+          <a:ln w="13970">
+            <a:solidFill>
+              <a:srgbClr val="E8EEF5"/>
+            </a:solidFill>
+            <a:prstDash val="solid"/>
+          </a:ln>
+        </p:spPr>
+      </p:sp>
+      <p:sp>
+        <p:nvSpPr>
+          <p:cNvPr id="12" name="Text 10"/>
+          <p:cNvSpPr/>
+          <p:nvPr/>
+        </p:nvSpPr>
+        <p:spPr>
+          <a:xfrm>
+            <a:off x="3474720" y="1463040"/>
+            <a:ext cx="2212848" cy="182880"/>
+          </a:xfrm>
+          <a:prstGeom prst="rect">
+            <a:avLst/>
+          </a:prstGeom>
+          <a:noFill/>
+          <a:ln/>
+        </p:spPr>
+        <p:txBody>
+          <a:bodyPr wrap="square" lIns="0" tIns="0" rIns="0" bIns="0" rtlCol="0" anchor="ctr"/>
+          <a:lstStyle/>
+          <a:p>
+            <a:pPr indent="0" marL="0">
+              <a:buNone/>
+            </a:pPr>
+            <a:r>
+              <a:rPr lang="en-US" sz="1700" b="1" dirty="0">
+                <a:solidFill>
+                  <a:srgbClr val="223A5E"/>
+                </a:solidFill>
+                <a:latin typeface="Times New Roman" pitchFamily="34" charset="0"/>
+                <a:ea typeface="Times New Roman" pitchFamily="34" charset="-122"/>
+                <a:cs typeface="Times New Roman" pitchFamily="34" charset="-120"/>
+              </a:rPr>
+              <a:t>Attribution</a:t>
+            </a:r>
+            <a:endParaRPr lang="en-US" sz="1700" dirty="0"/>
+          </a:p>
+        </p:txBody>
+      </p:sp>
+      <p:sp>
+        <p:nvSpPr>
+          <p:cNvPr id="13" name="Text 11"/>
+          <p:cNvSpPr/>
+          <p:nvPr/>
+        </p:nvSpPr>
+        <p:spPr>
+          <a:xfrm>
+            <a:off x="3474720" y="1709928"/>
+            <a:ext cx="2212848" cy="2112264"/>
+          </a:xfrm>
+          <a:prstGeom prst="rect">
+            <a:avLst/>
+          </a:prstGeom>
+          <a:noFill/>
+          <a:ln/>
+        </p:spPr>
+        <p:txBody>
+          <a:bodyPr wrap="square" lIns="0" tIns="0" rIns="0" bIns="0" rtlCol="0" anchor="ctr">
+            <a:normAutofit/>
+          </a:bodyPr>
+          <a:lstStyle/>
+          <a:p>
+            <a:pPr indent="0" marL="0">
+              <a:buNone/>
+            </a:pPr>
+            <a:r>
+              <a:rPr lang="en-US" sz="1220" dirty="0">
+                <a:solidFill>
+                  <a:srgbClr val="1E2630"/>
+                </a:solidFill>
+                <a:latin typeface="Times New Roman" pitchFamily="34" charset="0"/>
+                <a:ea typeface="Times New Roman" pitchFamily="34" charset="-122"/>
+                <a:cs typeface="Times New Roman" pitchFamily="34" charset="-120"/>
+              </a:rPr>
+              <a:t>retrain_gap isolates the additional approximation error by comparing approximate unlearning with exact retraining on the same deletion set.</a:t>
+            </a:r>
+            <a:endParaRPr lang="en-US" sz="1220" dirty="0"/>
+          </a:p>
+        </p:txBody>
+      </p:sp>
+      <p:sp>
+        <p:nvSpPr>
+          <p:cNvPr id="14" name="Shape 12"/>
+          <p:cNvSpPr/>
+          <p:nvPr/>
+        </p:nvSpPr>
+        <p:spPr>
+          <a:xfrm>
+            <a:off x="5961888" y="1371600"/>
+            <a:ext cx="2487168" cy="2542032"/>
+          </a:xfrm>
+          <a:prstGeom prst="roundRect">
+            <a:avLst>
+              <a:gd name="adj" fmla="val 1838"/>
             </a:avLst>
           </a:prstGeom>
           <a:solidFill>
@@ -11535,14 +11557,14 @@
       </p:sp>
       <p:sp>
         <p:nvSpPr>
-          <p:cNvPr id="12" name="Text 10"/>
-          <p:cNvSpPr/>
-          <p:nvPr/>
-        </p:nvSpPr>
-        <p:spPr>
-          <a:xfrm>
-            <a:off x="4800600" y="1463040"/>
-            <a:ext cx="3337560" cy="182880"/>
+          <p:cNvPr id="15" name="Text 13"/>
+          <p:cNvSpPr/>
+          <p:nvPr/>
+        </p:nvSpPr>
+        <p:spPr>
+          <a:xfrm>
+            <a:off x="6099048" y="1463040"/>
+            <a:ext cx="2212848" cy="182880"/>
           </a:xfrm>
           <a:prstGeom prst="rect">
             <a:avLst/>
@@ -11566,7 +11588,7 @@
                 <a:ea typeface="Times New Roman" pitchFamily="34" charset="-122"/>
                 <a:cs typeface="Times New Roman" pitchFamily="34" charset="-120"/>
               </a:rPr>
-              <a:t>Retained nodes</a:t>
+              <a:t>Spillover</a:t>
             </a:r>
             <a:endParaRPr lang="en-US" sz="1700" dirty="0"/>
           </a:p>
@@ -11574,14 +11596,14 @@
       </p:sp>
       <p:sp>
         <p:nvSpPr>
-          <p:cNvPr id="13" name="Text 11"/>
-          <p:cNvSpPr/>
-          <p:nvPr/>
-        </p:nvSpPr>
-        <p:spPr>
-          <a:xfrm>
-            <a:off x="4800600" y="1709928"/>
-            <a:ext cx="3337560" cy="2176272"/>
+          <p:cNvPr id="16" name="Text 14"/>
+          <p:cNvSpPr/>
+          <p:nvPr/>
+        </p:nvSpPr>
+        <p:spPr>
+          <a:xfrm>
+            <a:off x="6099048" y="1709928"/>
+            <a:ext cx="2212848" cy="2112264"/>
           </a:xfrm>
           <a:prstGeom prst="rect">
             <a:avLst/>
@@ -11607,7 +11629,7 @@
                 <a:ea typeface="Times New Roman" pitchFamily="34" charset="-122"/>
                 <a:cs typeface="Times New Roman" pitchFamily="34" charset="-120"/>
               </a:rPr>
-              <a:t>When predictions on non-target retained nodes shift substantially, the damage is no longer only about the deleted nodes. It indicates spillover from the approximate unlearning mechanism.</a:t>
+              <a:t>fraction_flipped and mean_pred_shift show how strongly retained non-target nodes are disturbed.</a:t>
             </a:r>
             <a:endParaRPr lang="en-US" sz="1220" dirty="0"/>
           </a:p>
@@ -11615,26 +11637,28 @@
       </p:sp>
       <p:sp>
         <p:nvSpPr>
-          <p:cNvPr id="14" name="Shape 12"/>
-          <p:cNvSpPr/>
-          <p:nvPr/>
-        </p:nvSpPr>
-        <p:spPr>
-          <a:xfrm>
-            <a:off x="1508760" y="4160520"/>
-            <a:ext cx="6080760" cy="502920"/>
+          <p:cNvPr id="17" name="Shape 15"/>
+          <p:cNvSpPr/>
+          <p:nvPr/>
+        </p:nvSpPr>
+        <p:spPr>
+          <a:xfrm>
+            <a:off x="1353312" y="3950208"/>
+            <a:ext cx="6419088" cy="768096"/>
           </a:xfrm>
           <a:prstGeom prst="roundRect">
             <a:avLst>
-              <a:gd name="adj" fmla="val 9091"/>
+              <a:gd name="adj" fmla="val 5952"/>
             </a:avLst>
           </a:prstGeom>
           <a:solidFill>
             <a:srgbClr val="223A5E"/>
           </a:solidFill>
-          <a:ln w="13970">
+          <a:ln w="12700">
             <a:solidFill>
-              <a:srgbClr val="223A5E"/>
+              <a:srgbClr val="223A5E">
+                <a:alpha val="0"/>
+              </a:srgbClr>
             </a:solidFill>
             <a:prstDash val="solid"/>
           </a:ln>
@@ -11642,14 +11666,14 @@
       </p:sp>
       <p:sp>
         <p:nvSpPr>
-          <p:cNvPr id="15" name="Text 13"/>
-          <p:cNvSpPr/>
-          <p:nvPr/>
-        </p:nvSpPr>
-        <p:spPr>
-          <a:xfrm>
-            <a:off x="1645920" y="4251960"/>
-            <a:ext cx="5806440" cy="182880"/>
+          <p:cNvPr id="18" name="Text 16"/>
+          <p:cNvSpPr/>
+          <p:nvPr/>
+        </p:nvSpPr>
+        <p:spPr>
+          <a:xfrm>
+            <a:off x="1517904" y="4069080"/>
+            <a:ext cx="1234440" cy="164592"/>
           </a:xfrm>
           <a:prstGeom prst="rect">
             <a:avLst/>
@@ -11665,7 +11689,7 @@
               <a:buNone/>
             </a:pPr>
             <a:r>
-              <a:rPr lang="en-US" sz="1700" b="1" dirty="0">
+              <a:rPr lang="en-US" sz="1380" b="1" dirty="0">
                 <a:solidFill>
                   <a:srgbClr val="F7F5F1"/>
                 </a:solidFill>
@@ -11675,20 +11699,20 @@
               </a:rPr>
               <a:t>Bottom line</a:t>
             </a:r>
-            <a:endParaRPr lang="en-US" sz="1700" dirty="0"/>
-          </a:p>
-        </p:txBody>
-      </p:sp>
-      <p:sp>
-        <p:nvSpPr>
-          <p:cNvPr id="16" name="Text 14"/>
-          <p:cNvSpPr/>
-          <p:nvPr/>
-        </p:nvSpPr>
-        <p:spPr>
-          <a:xfrm>
-            <a:off x="1645920" y="4498848"/>
-            <a:ext cx="5806440" cy="73152"/>
+            <a:endParaRPr lang="en-US" sz="1380" dirty="0"/>
+          </a:p>
+        </p:txBody>
+      </p:sp>
+      <p:sp>
+        <p:nvSpPr>
+          <p:cNvPr id="19" name="Text 17"/>
+          <p:cNvSpPr/>
+          <p:nvPr/>
+        </p:nvSpPr>
+        <p:spPr>
+          <a:xfrm>
+            <a:off x="1517904" y="4315968"/>
+            <a:ext cx="6053328" cy="256032"/>
           </a:xfrm>
           <a:prstGeom prst="rect">
             <a:avLst/>
@@ -11706,17 +11730,17 @@
               <a:buNone/>
             </a:pPr>
             <a:r>
-              <a:rPr lang="en-US" sz="1220" dirty="0">
-                <a:solidFill>
-                  <a:srgbClr val="FFFFFF"/>
-                </a:solidFill>
-                <a:latin typeface="Times New Roman" pitchFamily="34" charset="0"/>
-                <a:ea typeface="Times New Roman" pitchFamily="34" charset="-122"/>
-                <a:cs typeface="Times New Roman" pitchFamily="34" charset="-120"/>
-              </a:rPr>
-              <a:t>Approximate unlearning vs exact retrain is the attribution lens; collateral-damage metrics show how far the error propagates beyond the requested deletion.</a:t>
-            </a:r>
-            <a:endParaRPr lang="en-US" sz="1220" dirty="0"/>
+              <a:rPr lang="en-US" sz="1100" dirty="0">
+                <a:solidFill>
+                  <a:srgbClr val="F7F5F1"/>
+                </a:solidFill>
+                <a:latin typeface="Times New Roman" pitchFamily="34" charset="0"/>
+                <a:ea typeface="Times New Roman" pitchFamily="34" charset="-122"/>
+                <a:cs typeface="Times New Roman" pitchFamily="34" charset="-120"/>
+              </a:rPr>
+              <a:t>If total_drop = drop_retrain + retrain_gap, then large retrain gaps and large retained-node shifts indicate mechanism-induced spillover rather than only intrinsic node importance.</a:t>
+            </a:r>
+            <a:endParaRPr lang="en-US" sz="1100" dirty="0"/>
           </a:p>
         </p:txBody>
       </p:sp>

--- a/GULib-master/report/0417_5003report/ppt/out-test/final_15min_defense.pptx
+++ b/GULib-master/report/0417_5003report/ppt/out-test/final_15min_defense.pptx
@@ -19,9 +19,10 @@
     <p:sldId id="267" r:id="rId13"/>
     <p:sldId id="268" r:id="rId14"/>
     <p:sldId id="269" r:id="rId15"/>
+    <p:sldId id="270" r:id="rId16"/>
   </p:sldIdLst>
   <p:notesMasterIdLst>
-    <p:notesMasterId r:id="rId16"/>
+    <p:notesMasterId r:id="rId17"/>
   </p:notesMasterIdLst>
   <p:sldSz cx="9144000" cy="5143500"/>
   <p:notesSz cx="5143500" cy="9144000"/>
@@ -979,6 +980,94 @@
             <a:fld id="{F7021451-1387-4CA6-816F-3879F97B5CBC}" type="slidenum">
               <a:rPr lang="en-US"/>
               <a:t>14</a:t>
+            </a:fld>
+            <a:endParaRPr lang="en-US"/>
+          </a:p>
+        </p:txBody>
+      </p:sp>
+    </p:spTree>
+    <p:extLst>
+      <p:ext uri="{BB962C8B-B14F-4D97-AF65-F5344CB8AC3E}">
+        <p14:creationId xmlns:p14="http://schemas.microsoft.com/office/powerpoint/2010/main" val="1024086991"/>
+      </p:ext>
+    </p:extLst>
+  </p:cSld>
+  <p:clrMapOvr>
+    <a:masterClrMapping/>
+  </p:clrMapOvr>
+</p:notes>
+</file>
+
+<file path=ppt/notesSlides/notesSlide15.xml><?xml version="1.0" encoding="utf-8"?>
+<p:notes xmlns:a="http://schemas.openxmlformats.org/drawingml/2006/main" xmlns:r="http://schemas.openxmlformats.org/officeDocument/2006/relationships" xmlns:p="http://schemas.openxmlformats.org/presentationml/2006/main">
+  <p:cSld>
+    <p:spTree>
+      <p:nvGrpSpPr>
+        <p:cNvPr id="1" name=""/>
+        <p:cNvGrpSpPr/>
+        <p:nvPr/>
+      </p:nvGrpSpPr>
+      <p:grpSpPr>
+        <a:xfrm>
+          <a:off x="0" y="0"/>
+          <a:ext cx="0" cy="0"/>
+          <a:chOff x="0" y="0"/>
+          <a:chExt cx="0" cy="0"/>
+        </a:xfrm>
+      </p:grpSpPr>
+      <p:sp>
+        <p:nvSpPr>
+          <p:cNvPr id="2" name="Slide Image Placeholder 1"/>
+          <p:cNvSpPr>
+            <a:spLocks noGrp="1" noRot="1" noChangeAspect="1"/>
+          </p:cNvSpPr>
+          <p:nvPr>
+            <p:ph type="sldImg"/>
+          </p:nvPr>
+        </p:nvSpPr>
+        <p:spPr/>
+      </p:sp>
+      <p:sp>
+        <p:nvSpPr>
+          <p:cNvPr id="3" name="Notes Placeholder 2"/>
+          <p:cNvSpPr>
+            <a:spLocks noGrp="1"/>
+          </p:cNvSpPr>
+          <p:nvPr>
+            <p:ph type="body" idx="1"/>
+          </p:nvPr>
+        </p:nvSpPr>
+        <p:spPr/>
+        <p:txBody>
+          <a:bodyPr/>
+          <a:lstStyle/>
+          <a:p>
+            <a:r>
+              <a:rPr lang="en-US" dirty="0"/>
+              <a:t/>
+            </a:r>
+            <a:endParaRPr lang="en-US" dirty="0"/>
+          </a:p>
+        </p:txBody>
+      </p:sp>
+      <p:sp>
+        <p:nvSpPr>
+          <p:cNvPr id="4" name="Slide Number Placeholder 3"/>
+          <p:cNvSpPr>
+            <a:spLocks noGrp="1"/>
+          </p:cNvSpPr>
+          <p:nvPr>
+            <p:ph type="sldNum" sz="quarter" idx="10"/>
+          </p:nvPr>
+        </p:nvSpPr>
+        <p:spPr/>
+        <p:txBody>
+          <a:bodyPr/>
+          <a:lstStyle/>
+          <a:p>
+            <a:fld id="{F7021451-1387-4CA6-816F-3879F97B5CBC}" type="slidenum">
+              <a:rPr lang="en-US"/>
+              <a:t>15</a:t>
             </a:fld>
             <a:endParaRPr lang="en-US"/>
           </a:p>
@@ -2278,12 +2367,12 @@
         </p:nvSpPr>
         <p:spPr>
           <a:xfrm>
-            <a:off x="6355080" y="1005840"/>
-            <a:ext cx="2057400" cy="1828800"/>
+            <a:off x="6473952" y="1188720"/>
+            <a:ext cx="1965960" cy="1645920"/>
           </a:xfrm>
           <a:prstGeom prst="roundRect">
             <a:avLst>
-              <a:gd name="adj" fmla="val 2500"/>
+              <a:gd name="adj" fmla="val 2778"/>
             </a:avLst>
           </a:prstGeom>
           <a:solidFill>
@@ -2305,8 +2394,8 @@
         </p:nvSpPr>
         <p:spPr>
           <a:xfrm>
-            <a:off x="6492240" y="1097280"/>
-            <a:ext cx="1783080" cy="182880"/>
+            <a:off x="6611112" y="1280160"/>
+            <a:ext cx="1691640" cy="182880"/>
           </a:xfrm>
           <a:prstGeom prst="rect">
             <a:avLst/>
@@ -2344,8 +2433,8 @@
         </p:nvSpPr>
         <p:spPr>
           <a:xfrm>
-            <a:off x="6492240" y="1344168"/>
-            <a:ext cx="1783080" cy="1399032"/>
+            <a:off x="6611112" y="1527048"/>
+            <a:ext cx="1691640" cy="1216152"/>
           </a:xfrm>
           <a:prstGeom prst="rect">
             <a:avLst/>
@@ -2379,14 +2468,41 @@
       </p:sp>
       <p:sp>
         <p:nvSpPr>
-          <p:cNvPr id="10" name="Text 8"/>
-          <p:cNvSpPr/>
-          <p:nvPr/>
-        </p:nvSpPr>
-        <p:spPr>
-          <a:xfrm>
-            <a:off x="6309360" y="3255264"/>
-            <a:ext cx="2103120" cy="182880"/>
+          <p:cNvPr id="10" name="Shape 8"/>
+          <p:cNvSpPr/>
+          <p:nvPr/>
+        </p:nvSpPr>
+        <p:spPr>
+          <a:xfrm>
+            <a:off x="6510528" y="3154680"/>
+            <a:ext cx="877824" cy="310896"/>
+          </a:xfrm>
+          <a:prstGeom prst="roundRect">
+            <a:avLst>
+              <a:gd name="adj" fmla="val 11765"/>
+            </a:avLst>
+          </a:prstGeom>
+          <a:solidFill>
+            <a:srgbClr val="FFFFFF"/>
+          </a:solidFill>
+          <a:ln w="12700">
+            <a:solidFill>
+              <a:srgbClr val="D9DEE7"/>
+            </a:solidFill>
+            <a:prstDash val="solid"/>
+          </a:ln>
+        </p:spPr>
+      </p:sp>
+      <p:sp>
+        <p:nvSpPr>
+          <p:cNvPr id="11" name="Text 9"/>
+          <p:cNvSpPr/>
+          <p:nvPr/>
+        </p:nvSpPr>
+        <p:spPr>
+          <a:xfrm>
+            <a:off x="6547104" y="3227832"/>
+            <a:ext cx="804672" cy="109728"/>
           </a:xfrm>
           <a:prstGeom prst="rect">
             <a:avLst/>
@@ -2402,7 +2518,73 @@
               <a:buNone/>
             </a:pPr>
             <a:r>
-              <a:rPr lang="en-US" sz="1200" dirty="0">
+              <a:rPr lang="en-US" sz="1120" b="1" dirty="0">
+                <a:solidFill>
+                  <a:srgbClr val="16263F"/>
+                </a:solidFill>
+                <a:latin typeface="Times New Roman" pitchFamily="34" charset="0"/>
+                <a:ea typeface="Times New Roman" pitchFamily="34" charset="-122"/>
+                <a:cs typeface="Times New Roman" pitchFamily="34" charset="-120"/>
+              </a:rPr>
+              <a:t>Problem</a:t>
+            </a:r>
+            <a:endParaRPr lang="en-US" sz="1120" dirty="0"/>
+          </a:p>
+        </p:txBody>
+      </p:sp>
+      <p:sp>
+        <p:nvSpPr>
+          <p:cNvPr id="12" name="Shape 10"/>
+          <p:cNvSpPr/>
+          <p:nvPr/>
+        </p:nvSpPr>
+        <p:spPr>
+          <a:xfrm>
+            <a:off x="7534656" y="3154680"/>
+            <a:ext cx="877824" cy="310896"/>
+          </a:xfrm>
+          <a:prstGeom prst="roundRect">
+            <a:avLst>
+              <a:gd name="adj" fmla="val 11765"/>
+            </a:avLst>
+          </a:prstGeom>
+          <a:solidFill>
+            <a:srgbClr val="E8EEF5"/>
+          </a:solidFill>
+          <a:ln w="12700">
+            <a:solidFill>
+              <a:srgbClr val="E8EEF5"/>
+            </a:solidFill>
+            <a:prstDash val="solid"/>
+          </a:ln>
+        </p:spPr>
+      </p:sp>
+      <p:sp>
+        <p:nvSpPr>
+          <p:cNvPr id="13" name="Text 11"/>
+          <p:cNvSpPr/>
+          <p:nvPr/>
+        </p:nvSpPr>
+        <p:spPr>
+          <a:xfrm>
+            <a:off x="7571232" y="3227832"/>
+            <a:ext cx="804672" cy="109728"/>
+          </a:xfrm>
+          <a:prstGeom prst="rect">
+            <a:avLst/>
+          </a:prstGeom>
+          <a:noFill/>
+          <a:ln/>
+        </p:spPr>
+        <p:txBody>
+          <a:bodyPr wrap="square" lIns="0" tIns="0" rIns="0" bIns="0" rtlCol="0" anchor="ctr"/>
+          <a:lstStyle/>
+          <a:p>
+            <a:pPr algn="ctr" indent="0" marL="0">
+              <a:buNone/>
+            </a:pPr>
+            <a:r>
+              <a:rPr lang="en-US" sz="1120" b="1" dirty="0">
                 <a:solidFill>
                   <a:srgbClr val="223A5E"/>
                 </a:solidFill>
@@ -2410,9 +2592,141 @@
                 <a:ea typeface="Times New Roman" pitchFamily="34" charset="-122"/>
                 <a:cs typeface="Times New Roman" pitchFamily="34" charset="-120"/>
               </a:rPr>
-              <a:t>Problem -&gt; Method -&gt; Results -&gt; Takeaway</a:t>
-            </a:r>
-            <a:endParaRPr lang="en-US" sz="1200" dirty="0"/>
+              <a:t>Method</a:t>
+            </a:r>
+            <a:endParaRPr lang="en-US" sz="1120" dirty="0"/>
+          </a:p>
+        </p:txBody>
+      </p:sp>
+      <p:sp>
+        <p:nvSpPr>
+          <p:cNvPr id="14" name="Shape 12"/>
+          <p:cNvSpPr/>
+          <p:nvPr/>
+        </p:nvSpPr>
+        <p:spPr>
+          <a:xfrm>
+            <a:off x="6510528" y="3639312"/>
+            <a:ext cx="877824" cy="310896"/>
+          </a:xfrm>
+          <a:prstGeom prst="roundRect">
+            <a:avLst>
+              <a:gd name="adj" fmla="val 11765"/>
+            </a:avLst>
+          </a:prstGeom>
+          <a:solidFill>
+            <a:srgbClr val="E8EEF5"/>
+          </a:solidFill>
+          <a:ln w="12700">
+            <a:solidFill>
+              <a:srgbClr val="E8EEF5"/>
+            </a:solidFill>
+            <a:prstDash val="solid"/>
+          </a:ln>
+        </p:spPr>
+      </p:sp>
+      <p:sp>
+        <p:nvSpPr>
+          <p:cNvPr id="15" name="Text 13"/>
+          <p:cNvSpPr/>
+          <p:nvPr/>
+        </p:nvSpPr>
+        <p:spPr>
+          <a:xfrm>
+            <a:off x="6547104" y="3712464"/>
+            <a:ext cx="804672" cy="109728"/>
+          </a:xfrm>
+          <a:prstGeom prst="rect">
+            <a:avLst/>
+          </a:prstGeom>
+          <a:noFill/>
+          <a:ln/>
+        </p:spPr>
+        <p:txBody>
+          <a:bodyPr wrap="square" lIns="0" tIns="0" rIns="0" bIns="0" rtlCol="0" anchor="ctr"/>
+          <a:lstStyle/>
+          <a:p>
+            <a:pPr algn="ctr" indent="0" marL="0">
+              <a:buNone/>
+            </a:pPr>
+            <a:r>
+              <a:rPr lang="en-US" sz="1120" b="1" dirty="0">
+                <a:solidFill>
+                  <a:srgbClr val="223A5E"/>
+                </a:solidFill>
+                <a:latin typeface="Times New Roman" pitchFamily="34" charset="0"/>
+                <a:ea typeface="Times New Roman" pitchFamily="34" charset="-122"/>
+                <a:cs typeface="Times New Roman" pitchFamily="34" charset="-120"/>
+              </a:rPr>
+              <a:t>Results</a:t>
+            </a:r>
+            <a:endParaRPr lang="en-US" sz="1120" dirty="0"/>
+          </a:p>
+        </p:txBody>
+      </p:sp>
+      <p:sp>
+        <p:nvSpPr>
+          <p:cNvPr id="16" name="Shape 14"/>
+          <p:cNvSpPr/>
+          <p:nvPr/>
+        </p:nvSpPr>
+        <p:spPr>
+          <a:xfrm>
+            <a:off x="7534656" y="3639312"/>
+            <a:ext cx="877824" cy="310896"/>
+          </a:xfrm>
+          <a:prstGeom prst="roundRect">
+            <a:avLst>
+              <a:gd name="adj" fmla="val 11765"/>
+            </a:avLst>
+          </a:prstGeom>
+          <a:solidFill>
+            <a:srgbClr val="FFFFFF"/>
+          </a:solidFill>
+          <a:ln w="12700">
+            <a:solidFill>
+              <a:srgbClr val="D9DEE7"/>
+            </a:solidFill>
+            <a:prstDash val="solid"/>
+          </a:ln>
+        </p:spPr>
+      </p:sp>
+      <p:sp>
+        <p:nvSpPr>
+          <p:cNvPr id="17" name="Text 15"/>
+          <p:cNvSpPr/>
+          <p:nvPr/>
+        </p:nvSpPr>
+        <p:spPr>
+          <a:xfrm>
+            <a:off x="7571232" y="3712464"/>
+            <a:ext cx="804672" cy="109728"/>
+          </a:xfrm>
+          <a:prstGeom prst="rect">
+            <a:avLst/>
+          </a:prstGeom>
+          <a:noFill/>
+          <a:ln/>
+        </p:spPr>
+        <p:txBody>
+          <a:bodyPr wrap="square" lIns="0" tIns="0" rIns="0" bIns="0" rtlCol="0" anchor="ctr"/>
+          <a:lstStyle/>
+          <a:p>
+            <a:pPr algn="ctr" indent="0" marL="0">
+              <a:buNone/>
+            </a:pPr>
+            <a:r>
+              <a:rPr lang="en-US" sz="1120" b="1" dirty="0">
+                <a:solidFill>
+                  <a:srgbClr val="16263F"/>
+                </a:solidFill>
+                <a:latin typeface="Times New Roman" pitchFamily="34" charset="0"/>
+                <a:ea typeface="Times New Roman" pitchFamily="34" charset="-122"/>
+                <a:cs typeface="Times New Roman" pitchFamily="34" charset="-120"/>
+              </a:rPr>
+              <a:t>Takeaway</a:t>
+            </a:r>
+            <a:endParaRPr lang="en-US" sz="1120" dirty="0"/>
           </a:p>
         </p:txBody>
       </p:sp>
@@ -2427,6 +2741,690 @@
 <file path=ppt/slides/slide10.xml><?xml version="1.0" encoding="utf-8"?>
 <p:sld xmlns:a="http://schemas.openxmlformats.org/drawingml/2006/main" xmlns:r="http://schemas.openxmlformats.org/officeDocument/2006/relationships" xmlns:p="http://schemas.openxmlformats.org/presentationml/2006/main">
   <p:cSld name="Slide 10">
+    <p:bg>
+      <p:bgPr>
+        <a:solidFill>
+          <a:srgbClr val="FFFFFF"/>
+        </a:solidFill>
+      </p:bgPr>
+    </p:bg>
+    <p:spTree>
+      <p:nvGrpSpPr>
+        <p:cNvPr id="1" name=""/>
+        <p:cNvGrpSpPr/>
+        <p:nvPr/>
+      </p:nvGrpSpPr>
+      <p:grpSpPr>
+        <a:xfrm>
+          <a:off x="0" y="0"/>
+          <a:ext cx="0" cy="0"/>
+          <a:chOff x="0" y="0"/>
+          <a:chExt cx="0" cy="0"/>
+        </a:xfrm>
+      </p:grpSpPr>
+      <p:sp>
+        <p:nvSpPr>
+          <p:cNvPr id="2" name="Shape 0"/>
+          <p:cNvSpPr/>
+          <p:nvPr/>
+        </p:nvSpPr>
+        <p:spPr>
+          <a:xfrm>
+            <a:off x="0" y="0"/>
+            <a:ext cx="9144000" cy="530352"/>
+          </a:xfrm>
+          <a:prstGeom prst="rect">
+            <a:avLst/>
+          </a:prstGeom>
+          <a:solidFill>
+            <a:srgbClr val="223A5E"/>
+          </a:solidFill>
+          <a:ln w="12700">
+            <a:solidFill>
+              <a:srgbClr val="223A5E">
+                <a:alpha val="0"/>
+              </a:srgbClr>
+            </a:solidFill>
+            <a:prstDash val="solid"/>
+          </a:ln>
+        </p:spPr>
+      </p:sp>
+      <p:sp>
+        <p:nvSpPr>
+          <p:cNvPr id="3" name="Text 1"/>
+          <p:cNvSpPr/>
+          <p:nvPr/>
+        </p:nvSpPr>
+        <p:spPr>
+          <a:xfrm>
+            <a:off x="502920" y="100584"/>
+            <a:ext cx="6583680" cy="219456"/>
+          </a:xfrm>
+          <a:prstGeom prst="rect">
+            <a:avLst/>
+          </a:prstGeom>
+          <a:noFill/>
+          <a:ln/>
+        </p:spPr>
+        <p:txBody>
+          <a:bodyPr wrap="square" lIns="0" tIns="0" rIns="0" bIns="0" rtlCol="0" anchor="ctr"/>
+          <a:lstStyle/>
+          <a:p>
+            <a:pPr indent="0" marL="0">
+              <a:buNone/>
+            </a:pPr>
+            <a:r>
+              <a:rPr lang="en-US" sz="2400" b="1" dirty="0">
+                <a:solidFill>
+                  <a:srgbClr val="FFFFFF"/>
+                </a:solidFill>
+                <a:latin typeface="Times New Roman" pitchFamily="34" charset="0"/>
+                <a:ea typeface="Times New Roman" pitchFamily="34" charset="-122"/>
+                <a:cs typeface="Times New Roman" pitchFamily="34" charset="-120"/>
+              </a:rPr>
+              <a:t>Attribution And Collateral Damage</a:t>
+            </a:r>
+            <a:endParaRPr lang="en-US" sz="2400" dirty="0"/>
+          </a:p>
+        </p:txBody>
+      </p:sp>
+      <p:sp>
+        <p:nvSpPr>
+          <p:cNvPr id="4" name="Text 2"/>
+          <p:cNvSpPr/>
+          <p:nvPr/>
+        </p:nvSpPr>
+        <p:spPr>
+          <a:xfrm>
+            <a:off x="7955280" y="118872"/>
+            <a:ext cx="640080" cy="137160"/>
+          </a:xfrm>
+          <a:prstGeom prst="rect">
+            <a:avLst/>
+          </a:prstGeom>
+          <a:noFill/>
+          <a:ln/>
+        </p:spPr>
+        <p:txBody>
+          <a:bodyPr wrap="square" lIns="0" tIns="0" rIns="0" bIns="0" rtlCol="0" anchor="ctr"/>
+          <a:lstStyle/>
+          <a:p>
+            <a:pPr algn="r" indent="0" marL="0">
+              <a:buNone/>
+            </a:pPr>
+            <a:r>
+              <a:rPr lang="en-US" sz="1000" dirty="0">
+                <a:solidFill>
+                  <a:srgbClr val="F7F5F1"/>
+                </a:solidFill>
+                <a:latin typeface="Times New Roman" pitchFamily="34" charset="0"/>
+                <a:ea typeface="Times New Roman" pitchFamily="34" charset="-122"/>
+                <a:cs typeface="Times New Roman" pitchFamily="34" charset="-120"/>
+              </a:rPr>
+              <a:t>10 / 15</a:t>
+            </a:r>
+            <a:endParaRPr lang="en-US" sz="1000" dirty="0"/>
+          </a:p>
+        </p:txBody>
+      </p:sp>
+      <p:sp>
+        <p:nvSpPr>
+          <p:cNvPr id="5" name="Text 3"/>
+          <p:cNvSpPr/>
+          <p:nvPr/>
+        </p:nvSpPr>
+        <p:spPr>
+          <a:xfrm>
+            <a:off x="502920" y="4736592"/>
+            <a:ext cx="2743200" cy="137160"/>
+          </a:xfrm>
+          <a:prstGeom prst="rect">
+            <a:avLst/>
+          </a:prstGeom>
+          <a:noFill/>
+          <a:ln/>
+        </p:spPr>
+        <p:txBody>
+          <a:bodyPr wrap="square" lIns="0" tIns="0" rIns="0" bIns="0" rtlCol="0" anchor="ctr"/>
+          <a:lstStyle/>
+          <a:p>
+            <a:pPr indent="0" marL="0">
+              <a:buNone/>
+            </a:pPr>
+            <a:r>
+              <a:rPr lang="en-US" sz="900" dirty="0">
+                <a:solidFill>
+                  <a:srgbClr val="667085"/>
+                </a:solidFill>
+                <a:latin typeface="Times New Roman" pitchFamily="34" charset="0"/>
+                <a:ea typeface="Times New Roman" pitchFamily="34" charset="-122"/>
+                <a:cs typeface="Times New Roman" pitchFamily="34" charset="-120"/>
+              </a:rPr>
+              <a:t>EE5003 MSc Project | Liu Chengyu</a:t>
+            </a:r>
+            <a:endParaRPr lang="en-US" sz="900" dirty="0"/>
+          </a:p>
+        </p:txBody>
+      </p:sp>
+      <p:sp>
+        <p:nvSpPr>
+          <p:cNvPr id="6" name="Text 4"/>
+          <p:cNvSpPr/>
+          <p:nvPr/>
+        </p:nvSpPr>
+        <p:spPr>
+          <a:xfrm>
+            <a:off x="5577840" y="4736592"/>
+            <a:ext cx="3017520" cy="137160"/>
+          </a:xfrm>
+          <a:prstGeom prst="rect">
+            <a:avLst/>
+          </a:prstGeom>
+          <a:noFill/>
+          <a:ln/>
+        </p:spPr>
+        <p:txBody>
+          <a:bodyPr wrap="square" lIns="0" tIns="0" rIns="0" bIns="0" rtlCol="0" anchor="ctr"/>
+          <a:lstStyle/>
+          <a:p>
+            <a:pPr algn="r" indent="0" marL="0">
+              <a:buNone/>
+            </a:pPr>
+            <a:r>
+              <a:rPr lang="en-US" sz="900" dirty="0">
+                <a:solidFill>
+                  <a:srgbClr val="667085"/>
+                </a:solidFill>
+                <a:latin typeface="Times New Roman" pitchFamily="34" charset="0"/>
+                <a:ea typeface="Times New Roman" pitchFamily="34" charset="-122"/>
+                <a:cs typeface="Times New Roman" pitchFamily="34" charset="-120"/>
+              </a:rPr>
+              <a:t>Approximate Graph Unlearning Audit</a:t>
+            </a:r>
+            <a:endParaRPr lang="en-US" sz="900" dirty="0"/>
+          </a:p>
+        </p:txBody>
+      </p:sp>
+      <p:sp>
+        <p:nvSpPr>
+          <p:cNvPr id="7" name="Text 5"/>
+          <p:cNvSpPr/>
+          <p:nvPr/>
+        </p:nvSpPr>
+        <p:spPr>
+          <a:xfrm>
+            <a:off x="621792" y="768096"/>
+            <a:ext cx="7498080" cy="228600"/>
+          </a:xfrm>
+          <a:prstGeom prst="rect">
+            <a:avLst/>
+          </a:prstGeom>
+          <a:noFill/>
+          <a:ln/>
+        </p:spPr>
+        <p:txBody>
+          <a:bodyPr wrap="square" lIns="0" tIns="0" rIns="0" bIns="0" rtlCol="0" anchor="ctr"/>
+          <a:lstStyle/>
+          <a:p>
+            <a:pPr indent="0" marL="0">
+              <a:buNone/>
+            </a:pPr>
+            <a:r>
+              <a:rPr lang="en-US" sz="1670" b="1" dirty="0">
+                <a:solidFill>
+                  <a:srgbClr val="223A5E"/>
+                </a:solidFill>
+                <a:latin typeface="Times New Roman" pitchFamily="34" charset="0"/>
+                <a:ea typeface="Times New Roman" pitchFamily="34" charset="-122"/>
+                <a:cs typeface="Times New Roman" pitchFamily="34" charset="-120"/>
+              </a:rPr>
+              <a:t>relative_f1_drop says the attack beats the k=5 method baseline; retrain_gap and collateral metrics explain where the extra damage comes from.</a:t>
+            </a:r>
+            <a:endParaRPr lang="en-US" sz="1670" dirty="0"/>
+          </a:p>
+        </p:txBody>
+      </p:sp>
+      <p:sp>
+        <p:nvSpPr>
+          <p:cNvPr id="8" name="Shape 6"/>
+          <p:cNvSpPr/>
+          <p:nvPr/>
+        </p:nvSpPr>
+        <p:spPr>
+          <a:xfrm>
+            <a:off x="713232" y="1371600"/>
+            <a:ext cx="2487168" cy="2542032"/>
+          </a:xfrm>
+          <a:prstGeom prst="roundRect">
+            <a:avLst>
+              <a:gd name="adj" fmla="val 1838"/>
+            </a:avLst>
+          </a:prstGeom>
+          <a:solidFill>
+            <a:srgbClr val="FFFFFF"/>
+          </a:solidFill>
+          <a:ln w="13970">
+            <a:solidFill>
+              <a:srgbClr val="D9DEE7"/>
+            </a:solidFill>
+            <a:prstDash val="solid"/>
+          </a:ln>
+        </p:spPr>
+      </p:sp>
+      <p:sp>
+        <p:nvSpPr>
+          <p:cNvPr id="9" name="Text 7"/>
+          <p:cNvSpPr/>
+          <p:nvPr/>
+        </p:nvSpPr>
+        <p:spPr>
+          <a:xfrm>
+            <a:off x="850392" y="1463040"/>
+            <a:ext cx="2212848" cy="182880"/>
+          </a:xfrm>
+          <a:prstGeom prst="rect">
+            <a:avLst/>
+          </a:prstGeom>
+          <a:noFill/>
+          <a:ln/>
+        </p:spPr>
+        <p:txBody>
+          <a:bodyPr wrap="square" lIns="0" tIns="0" rIns="0" bIns="0" rtlCol="0" anchor="ctr"/>
+          <a:lstStyle/>
+          <a:p>
+            <a:pPr indent="0" marL="0">
+              <a:buNone/>
+            </a:pPr>
+            <a:r>
+              <a:rPr lang="en-US" sz="1700" b="1" dirty="0">
+                <a:solidFill>
+                  <a:srgbClr val="223A5E"/>
+                </a:solidFill>
+                <a:latin typeface="Times New Roman" pitchFamily="34" charset="0"/>
+                <a:ea typeface="Times New Roman" pitchFamily="34" charset="-122"/>
+                <a:cs typeface="Times New Roman" pitchFamily="34" charset="-120"/>
+              </a:rPr>
+              <a:t>Attack success</a:t>
+            </a:r>
+            <a:endParaRPr lang="en-US" sz="1700" dirty="0"/>
+          </a:p>
+        </p:txBody>
+      </p:sp>
+      <p:sp>
+        <p:nvSpPr>
+          <p:cNvPr id="10" name="Text 8"/>
+          <p:cNvSpPr/>
+          <p:nvPr/>
+        </p:nvSpPr>
+        <p:spPr>
+          <a:xfrm>
+            <a:off x="850392" y="1709928"/>
+            <a:ext cx="2212848" cy="2112264"/>
+          </a:xfrm>
+          <a:prstGeom prst="rect">
+            <a:avLst/>
+          </a:prstGeom>
+          <a:noFill/>
+          <a:ln/>
+        </p:spPr>
+        <p:txBody>
+          <a:bodyPr wrap="square" lIns="0" tIns="0" rIns="0" bIns="0" rtlCol="0" anchor="ctr">
+            <a:normAutofit/>
+          </a:bodyPr>
+          <a:lstStyle/>
+          <a:p>
+            <a:pPr indent="0" marL="0">
+              <a:buNone/>
+            </a:pPr>
+            <a:r>
+              <a:rPr lang="en-US" sz="1220" dirty="0">
+                <a:solidFill>
+                  <a:srgbClr val="1E2630"/>
+                </a:solidFill>
+                <a:latin typeface="Times New Roman" pitchFamily="34" charset="0"/>
+                <a:ea typeface="Times New Roman" pitchFamily="34" charset="-122"/>
+                <a:cs typeface="Times New Roman" pitchFamily="34" charset="-120"/>
+              </a:rPr>
+              <a:t>relative_f1_drop tells us whether a structured attack causes more loss than the small random-trigger baseline.</a:t>
+            </a:r>
+            <a:endParaRPr lang="en-US" sz="1220" dirty="0"/>
+          </a:p>
+        </p:txBody>
+      </p:sp>
+      <p:sp>
+        <p:nvSpPr>
+          <p:cNvPr id="11" name="Shape 9"/>
+          <p:cNvSpPr/>
+          <p:nvPr/>
+        </p:nvSpPr>
+        <p:spPr>
+          <a:xfrm>
+            <a:off x="3337560" y="1371600"/>
+            <a:ext cx="2487168" cy="2542032"/>
+          </a:xfrm>
+          <a:prstGeom prst="roundRect">
+            <a:avLst>
+              <a:gd name="adj" fmla="val 1838"/>
+            </a:avLst>
+          </a:prstGeom>
+          <a:solidFill>
+            <a:srgbClr val="E8EEF5"/>
+          </a:solidFill>
+          <a:ln w="13970">
+            <a:solidFill>
+              <a:srgbClr val="E8EEF5"/>
+            </a:solidFill>
+            <a:prstDash val="solid"/>
+          </a:ln>
+        </p:spPr>
+      </p:sp>
+      <p:sp>
+        <p:nvSpPr>
+          <p:cNvPr id="12" name="Text 10"/>
+          <p:cNvSpPr/>
+          <p:nvPr/>
+        </p:nvSpPr>
+        <p:spPr>
+          <a:xfrm>
+            <a:off x="3474720" y="1463040"/>
+            <a:ext cx="2212848" cy="182880"/>
+          </a:xfrm>
+          <a:prstGeom prst="rect">
+            <a:avLst/>
+          </a:prstGeom>
+          <a:noFill/>
+          <a:ln/>
+        </p:spPr>
+        <p:txBody>
+          <a:bodyPr wrap="square" lIns="0" tIns="0" rIns="0" bIns="0" rtlCol="0" anchor="ctr"/>
+          <a:lstStyle/>
+          <a:p>
+            <a:pPr indent="0" marL="0">
+              <a:buNone/>
+            </a:pPr>
+            <a:r>
+              <a:rPr lang="en-US" sz="1700" b="1" dirty="0">
+                <a:solidFill>
+                  <a:srgbClr val="223A5E"/>
+                </a:solidFill>
+                <a:latin typeface="Times New Roman" pitchFamily="34" charset="0"/>
+                <a:ea typeface="Times New Roman" pitchFamily="34" charset="-122"/>
+                <a:cs typeface="Times New Roman" pitchFamily="34" charset="-120"/>
+              </a:rPr>
+              <a:t>Attribution</a:t>
+            </a:r>
+            <a:endParaRPr lang="en-US" sz="1700" dirty="0"/>
+          </a:p>
+        </p:txBody>
+      </p:sp>
+      <p:sp>
+        <p:nvSpPr>
+          <p:cNvPr id="13" name="Text 11"/>
+          <p:cNvSpPr/>
+          <p:nvPr/>
+        </p:nvSpPr>
+        <p:spPr>
+          <a:xfrm>
+            <a:off x="3474720" y="1709928"/>
+            <a:ext cx="2212848" cy="2112264"/>
+          </a:xfrm>
+          <a:prstGeom prst="rect">
+            <a:avLst/>
+          </a:prstGeom>
+          <a:noFill/>
+          <a:ln/>
+        </p:spPr>
+        <p:txBody>
+          <a:bodyPr wrap="square" lIns="0" tIns="0" rIns="0" bIns="0" rtlCol="0" anchor="ctr">
+            <a:normAutofit/>
+          </a:bodyPr>
+          <a:lstStyle/>
+          <a:p>
+            <a:pPr indent="0" marL="0">
+              <a:buNone/>
+            </a:pPr>
+            <a:r>
+              <a:rPr lang="en-US" sz="1220" dirty="0">
+                <a:solidFill>
+                  <a:srgbClr val="1E2630"/>
+                </a:solidFill>
+                <a:latin typeface="Times New Roman" pitchFamily="34" charset="0"/>
+                <a:ea typeface="Times New Roman" pitchFamily="34" charset="-122"/>
+                <a:cs typeface="Times New Roman" pitchFamily="34" charset="-120"/>
+              </a:rPr>
+              <a:t>retrain_gap isolates the additional approximation error by comparing approximate unlearning with exact retraining on the same deletion set.</a:t>
+            </a:r>
+            <a:endParaRPr lang="en-US" sz="1220" dirty="0"/>
+          </a:p>
+        </p:txBody>
+      </p:sp>
+      <p:sp>
+        <p:nvSpPr>
+          <p:cNvPr id="14" name="Shape 12"/>
+          <p:cNvSpPr/>
+          <p:nvPr/>
+        </p:nvSpPr>
+        <p:spPr>
+          <a:xfrm>
+            <a:off x="5961888" y="1371600"/>
+            <a:ext cx="2487168" cy="2542032"/>
+          </a:xfrm>
+          <a:prstGeom prst="roundRect">
+            <a:avLst>
+              <a:gd name="adj" fmla="val 1838"/>
+            </a:avLst>
+          </a:prstGeom>
+          <a:solidFill>
+            <a:srgbClr val="FFFFFF"/>
+          </a:solidFill>
+          <a:ln w="13970">
+            <a:solidFill>
+              <a:srgbClr val="D9DEE7"/>
+            </a:solidFill>
+            <a:prstDash val="solid"/>
+          </a:ln>
+        </p:spPr>
+      </p:sp>
+      <p:sp>
+        <p:nvSpPr>
+          <p:cNvPr id="15" name="Text 13"/>
+          <p:cNvSpPr/>
+          <p:nvPr/>
+        </p:nvSpPr>
+        <p:spPr>
+          <a:xfrm>
+            <a:off x="6099048" y="1463040"/>
+            <a:ext cx="2212848" cy="182880"/>
+          </a:xfrm>
+          <a:prstGeom prst="rect">
+            <a:avLst/>
+          </a:prstGeom>
+          <a:noFill/>
+          <a:ln/>
+        </p:spPr>
+        <p:txBody>
+          <a:bodyPr wrap="square" lIns="0" tIns="0" rIns="0" bIns="0" rtlCol="0" anchor="ctr"/>
+          <a:lstStyle/>
+          <a:p>
+            <a:pPr indent="0" marL="0">
+              <a:buNone/>
+            </a:pPr>
+            <a:r>
+              <a:rPr lang="en-US" sz="1700" b="1" dirty="0">
+                <a:solidFill>
+                  <a:srgbClr val="223A5E"/>
+                </a:solidFill>
+                <a:latin typeface="Times New Roman" pitchFamily="34" charset="0"/>
+                <a:ea typeface="Times New Roman" pitchFamily="34" charset="-122"/>
+                <a:cs typeface="Times New Roman" pitchFamily="34" charset="-120"/>
+              </a:rPr>
+              <a:t>Spillover</a:t>
+            </a:r>
+            <a:endParaRPr lang="en-US" sz="1700" dirty="0"/>
+          </a:p>
+        </p:txBody>
+      </p:sp>
+      <p:sp>
+        <p:nvSpPr>
+          <p:cNvPr id="16" name="Text 14"/>
+          <p:cNvSpPr/>
+          <p:nvPr/>
+        </p:nvSpPr>
+        <p:spPr>
+          <a:xfrm>
+            <a:off x="6099048" y="1709928"/>
+            <a:ext cx="2212848" cy="2112264"/>
+          </a:xfrm>
+          <a:prstGeom prst="rect">
+            <a:avLst/>
+          </a:prstGeom>
+          <a:noFill/>
+          <a:ln/>
+        </p:spPr>
+        <p:txBody>
+          <a:bodyPr wrap="square" lIns="0" tIns="0" rIns="0" bIns="0" rtlCol="0" anchor="ctr">
+            <a:normAutofit/>
+          </a:bodyPr>
+          <a:lstStyle/>
+          <a:p>
+            <a:pPr indent="0" marL="0">
+              <a:buNone/>
+            </a:pPr>
+            <a:r>
+              <a:rPr lang="en-US" sz="1220" dirty="0">
+                <a:solidFill>
+                  <a:srgbClr val="1E2630"/>
+                </a:solidFill>
+                <a:latin typeface="Times New Roman" pitchFamily="34" charset="0"/>
+                <a:ea typeface="Times New Roman" pitchFamily="34" charset="-122"/>
+                <a:cs typeface="Times New Roman" pitchFamily="34" charset="-120"/>
+              </a:rPr>
+              <a:t>fraction_flipped and mean_pred_shift show how strongly retained non-target nodes are disturbed.</a:t>
+            </a:r>
+            <a:endParaRPr lang="en-US" sz="1220" dirty="0"/>
+          </a:p>
+        </p:txBody>
+      </p:sp>
+      <p:sp>
+        <p:nvSpPr>
+          <p:cNvPr id="17" name="Shape 15"/>
+          <p:cNvSpPr/>
+          <p:nvPr/>
+        </p:nvSpPr>
+        <p:spPr>
+          <a:xfrm>
+            <a:off x="1353312" y="3950208"/>
+            <a:ext cx="6419088" cy="768096"/>
+          </a:xfrm>
+          <a:prstGeom prst="roundRect">
+            <a:avLst>
+              <a:gd name="adj" fmla="val 5952"/>
+            </a:avLst>
+          </a:prstGeom>
+          <a:solidFill>
+            <a:srgbClr val="223A5E"/>
+          </a:solidFill>
+          <a:ln w="12700">
+            <a:solidFill>
+              <a:srgbClr val="223A5E">
+                <a:alpha val="0"/>
+              </a:srgbClr>
+            </a:solidFill>
+            <a:prstDash val="solid"/>
+          </a:ln>
+        </p:spPr>
+      </p:sp>
+      <p:sp>
+        <p:nvSpPr>
+          <p:cNvPr id="18" name="Text 16"/>
+          <p:cNvSpPr/>
+          <p:nvPr/>
+        </p:nvSpPr>
+        <p:spPr>
+          <a:xfrm>
+            <a:off x="1517904" y="4069080"/>
+            <a:ext cx="1234440" cy="164592"/>
+          </a:xfrm>
+          <a:prstGeom prst="rect">
+            <a:avLst/>
+          </a:prstGeom>
+          <a:noFill/>
+          <a:ln/>
+        </p:spPr>
+        <p:txBody>
+          <a:bodyPr wrap="square" lIns="0" tIns="0" rIns="0" bIns="0" rtlCol="0" anchor="ctr"/>
+          <a:lstStyle/>
+          <a:p>
+            <a:pPr indent="0" marL="0">
+              <a:buNone/>
+            </a:pPr>
+            <a:r>
+              <a:rPr lang="en-US" sz="1380" b="1" dirty="0">
+                <a:solidFill>
+                  <a:srgbClr val="F7F5F1"/>
+                </a:solidFill>
+                <a:latin typeface="Times New Roman" pitchFamily="34" charset="0"/>
+                <a:ea typeface="Times New Roman" pitchFamily="34" charset="-122"/>
+                <a:cs typeface="Times New Roman" pitchFamily="34" charset="-120"/>
+              </a:rPr>
+              <a:t>Bottom line</a:t>
+            </a:r>
+            <a:endParaRPr lang="en-US" sz="1380" dirty="0"/>
+          </a:p>
+        </p:txBody>
+      </p:sp>
+      <p:sp>
+        <p:nvSpPr>
+          <p:cNvPr id="19" name="Text 17"/>
+          <p:cNvSpPr/>
+          <p:nvPr/>
+        </p:nvSpPr>
+        <p:spPr>
+          <a:xfrm>
+            <a:off x="1517904" y="4315968"/>
+            <a:ext cx="6053328" cy="256032"/>
+          </a:xfrm>
+          <a:prstGeom prst="rect">
+            <a:avLst/>
+          </a:prstGeom>
+          <a:noFill/>
+          <a:ln/>
+        </p:spPr>
+        <p:txBody>
+          <a:bodyPr wrap="square" lIns="0" tIns="0" rIns="0" bIns="0" rtlCol="0" anchor="ctr">
+            <a:normAutofit/>
+          </a:bodyPr>
+          <a:lstStyle/>
+          <a:p>
+            <a:pPr indent="0" marL="0">
+              <a:buNone/>
+            </a:pPr>
+            <a:r>
+              <a:rPr lang="en-US" sz="1100" dirty="0">
+                <a:solidFill>
+                  <a:srgbClr val="F7F5F1"/>
+                </a:solidFill>
+                <a:latin typeface="Times New Roman" pitchFamily="34" charset="0"/>
+                <a:ea typeface="Times New Roman" pitchFamily="34" charset="-122"/>
+                <a:cs typeface="Times New Roman" pitchFamily="34" charset="-120"/>
+              </a:rPr>
+              <a:t>If total_drop = drop_retrain + retrain_gap, then large retrain gaps and large retained-node shifts indicate mechanism-induced spillover rather than only intrinsic node importance.</a:t>
+            </a:r>
+            <a:endParaRPr lang="en-US" sz="1100" dirty="0"/>
+          </a:p>
+        </p:txBody>
+      </p:sp>
+    </p:spTree>
+  </p:cSld>
+  <p:clrMapOvr>
+    <a:masterClrMapping/>
+  </p:clrMapOvr>
+</p:sld>
+</file>
+
+<file path=ppt/slides/slide11.xml><?xml version="1.0" encoding="utf-8"?>
+<p:sld xmlns:a="http://schemas.openxmlformats.org/drawingml/2006/main" xmlns:r="http://schemas.openxmlformats.org/officeDocument/2006/relationships" xmlns:p="http://schemas.openxmlformats.org/presentationml/2006/main">
+  <p:cSld name="Slide 11">
     <p:bg>
       <p:bgPr>
         <a:solidFill>
@@ -2547,7 +3545,7 @@
                 <a:ea typeface="Times New Roman" pitchFamily="34" charset="-122"/>
                 <a:cs typeface="Times New Roman" pitchFamily="34" charset="-120"/>
               </a:rPr>
-              <a:t>10 / 14</a:t>
+              <a:t>11 / 15</a:t>
             </a:r>
             <a:endParaRPr lang="en-US" sz="1000" dirty="0"/>
           </a:p>
@@ -3023,9 +4021,9 @@
 </p:sld>
 </file>
 
-<file path=ppt/slides/slide11.xml><?xml version="1.0" encoding="utf-8"?>
+<file path=ppt/slides/slide12.xml><?xml version="1.0" encoding="utf-8"?>
 <p:sld xmlns:a="http://schemas.openxmlformats.org/drawingml/2006/main" xmlns:r="http://schemas.openxmlformats.org/officeDocument/2006/relationships" xmlns:p="http://schemas.openxmlformats.org/presentationml/2006/main">
-  <p:cSld name="Slide 11">
+  <p:cSld name="Slide 12">
     <p:bg>
       <p:bgPr>
         <a:solidFill>
@@ -3107,7 +4105,7 @@
                 <a:ea typeface="Times New Roman" pitchFamily="34" charset="-122"/>
                 <a:cs typeface="Times New Roman" pitchFamily="34" charset="-120"/>
               </a:rPr>
-              <a:t>Attack Strength And Practicality</a:t>
+              <a:t>Statistical Support And Effect Size</a:t>
             </a:r>
             <a:endParaRPr lang="en-US" sz="2400" dirty="0"/>
           </a:p>
@@ -3146,7 +4144,7 @@
                 <a:ea typeface="Times New Roman" pitchFamily="34" charset="-122"/>
                 <a:cs typeface="Times New Roman" pitchFamily="34" charset="-120"/>
               </a:rPr>
-              <a:t>11 / 14</a:t>
+              <a:t>12 / 15</a:t>
             </a:r>
             <a:endParaRPr lang="en-US" sz="1000" dirty="0"/>
           </a:p>
@@ -3232,7 +4230,7 @@
       </p:sp>
       <p:pic>
         <p:nvPicPr>
-          <p:cNvPr id="7" name="Image 0" descr="H:\project\OpenGU\GULib-master\report\0417_5003report\figures\paper_figures\FIG-3_Spectrum.png">    </p:cNvPr>
+          <p:cNvPr id="7" name="Image 0" descr="H:\project\OpenGU\GULib-master\report\0417_5003report\figures\paper_figures\FIG-4a_Significance.png">    </p:cNvPr>
           <p:cNvPicPr>
             <a:picLocks noChangeAspect="1"/>
           </p:cNvPicPr>
@@ -3246,24 +4244,48 @@
         </p:blipFill>
         <p:spPr>
           <a:xfrm>
-            <a:off x="548640" y="914400"/>
-            <a:ext cx="5349240" cy="3383280"/>
+            <a:off x="530352" y="932688"/>
+            <a:ext cx="3794760" cy="3035808"/>
           </a:xfrm>
           <a:prstGeom prst="rect">
             <a:avLst/>
           </a:prstGeom>
         </p:spPr>
       </p:pic>
-      <p:sp>
-        <p:nvSpPr>
-          <p:cNvPr id="8" name="Text 5"/>
-          <p:cNvSpPr/>
-          <p:nvPr/>
-        </p:nvSpPr>
-        <p:spPr>
-          <a:xfrm>
-            <a:off x="576072" y="4389120"/>
-            <a:ext cx="5303520" cy="146304"/>
+      <p:pic>
+        <p:nvPicPr>
+          <p:cNvPr id="8" name="Image 1" descr="H:\project\OpenGU\GULib-master\report\0417_5003report\figures\paper_figures\FIG-4b_Effect.png">    </p:cNvPr>
+          <p:cNvPicPr>
+            <a:picLocks noChangeAspect="1"/>
+          </p:cNvPicPr>
+          <p:nvPr/>
+        </p:nvPicPr>
+        <p:blipFill>
+          <a:blip r:embed="rId2"/>
+          <a:stretch>
+            <a:fillRect/>
+          </a:stretch>
+        </p:blipFill>
+        <p:spPr>
+          <a:xfrm>
+            <a:off x="4754880" y="932688"/>
+            <a:ext cx="3794760" cy="3035808"/>
+          </a:xfrm>
+          <a:prstGeom prst="rect">
+            <a:avLst/>
+          </a:prstGeom>
+        </p:spPr>
+      </p:pic>
+      <p:sp>
+        <p:nvSpPr>
+          <p:cNvPr id="9" name="Text 5"/>
+          <p:cNvSpPr/>
+          <p:nvPr/>
+        </p:nvSpPr>
+        <p:spPr>
+          <a:xfrm>
+            <a:off x="548640" y="4078224"/>
+            <a:ext cx="3730752" cy="146304"/>
           </a:xfrm>
           <a:prstGeom prst="rect">
             <a:avLst/>
@@ -3287,7 +4309,7 @@
                 <a:ea typeface="Times New Roman" pitchFamily="34" charset="-122"/>
                 <a:cs typeface="Times New Roman" pitchFamily="34" charset="-120"/>
               </a:rPr>
-              <a:t>Figure 3. Strategy comparison in relative_f1_drop at ratio = 0.05 using the k=5 baseline.</a:t>
+              <a:t>Figure 4a. Statistical support against random deletion.</a:t>
             </a:r>
             <a:endParaRPr lang="en-US" sz="900" dirty="0"/>
           </a:p>
@@ -3295,18 +4317,57 @@
       </p:sp>
       <p:sp>
         <p:nvSpPr>
-          <p:cNvPr id="9" name="Shape 6"/>
-          <p:cNvSpPr/>
-          <p:nvPr/>
-        </p:nvSpPr>
-        <p:spPr>
-          <a:xfrm>
-            <a:off x="6144768" y="914400"/>
-            <a:ext cx="2331720" cy="868680"/>
+          <p:cNvPr id="10" name="Text 6"/>
+          <p:cNvSpPr/>
+          <p:nvPr/>
+        </p:nvSpPr>
+        <p:spPr>
+          <a:xfrm>
+            <a:off x="4773168" y="4078224"/>
+            <a:ext cx="3730752" cy="146304"/>
+          </a:xfrm>
+          <a:prstGeom prst="rect">
+            <a:avLst/>
+          </a:prstGeom>
+          <a:noFill/>
+          <a:ln/>
+        </p:spPr>
+        <p:txBody>
+          <a:bodyPr wrap="square" lIns="0" tIns="0" rIns="0" bIns="0" rtlCol="0" anchor="ctr"/>
+          <a:lstStyle/>
+          <a:p>
+            <a:pPr indent="0" marL="0">
+              <a:buNone/>
+            </a:pPr>
+            <a:r>
+              <a:rPr lang="en-US" sz="900" i="1" dirty="0">
+                <a:solidFill>
+                  <a:srgbClr val="667085"/>
+                </a:solidFill>
+                <a:latin typeface="Times New Roman" pitchFamily="34" charset="0"/>
+                <a:ea typeface="Times New Roman" pitchFamily="34" charset="-122"/>
+                <a:cs typeface="Times New Roman" pitchFamily="34" charset="-120"/>
+              </a:rPr>
+              <a:t>Figure 4b. Effect size beyond random deletion.</a:t>
+            </a:r>
+            <a:endParaRPr lang="en-US" sz="900" dirty="0"/>
+          </a:p>
+        </p:txBody>
+      </p:sp>
+      <p:sp>
+        <p:nvSpPr>
+          <p:cNvPr id="11" name="Shape 7"/>
+          <p:cNvSpPr/>
+          <p:nvPr/>
+        </p:nvSpPr>
+        <p:spPr>
+          <a:xfrm>
+            <a:off x="822960" y="4370832"/>
+            <a:ext cx="3246120" cy="384048"/>
           </a:xfrm>
           <a:prstGeom prst="roundRect">
             <a:avLst>
-              <a:gd name="adj" fmla="val 5263"/>
+              <a:gd name="adj" fmla="val 11905"/>
             </a:avLst>
           </a:prstGeom>
           <a:solidFill>
@@ -3322,14 +4383,14 @@
       </p:sp>
       <p:sp>
         <p:nvSpPr>
-          <p:cNvPr id="10" name="Text 7"/>
-          <p:cNvSpPr/>
-          <p:nvPr/>
-        </p:nvSpPr>
-        <p:spPr>
-          <a:xfrm>
-            <a:off x="6281928" y="1005840"/>
-            <a:ext cx="2057400" cy="182880"/>
+          <p:cNvPr id="12" name="Text 8"/>
+          <p:cNvSpPr/>
+          <p:nvPr/>
+        </p:nvSpPr>
+        <p:spPr>
+          <a:xfrm>
+            <a:off x="960120" y="4462272"/>
+            <a:ext cx="2971800" cy="182880"/>
           </a:xfrm>
           <a:prstGeom prst="rect">
             <a:avLst/>
@@ -3353,7 +4414,7 @@
                 <a:ea typeface="Times New Roman" pitchFamily="34" charset="-122"/>
                 <a:cs typeface="Times New Roman" pitchFamily="34" charset="-120"/>
               </a:rPr>
-              <a:t>Reading key</a:t>
+              <a:t>Support</a:t>
             </a:r>
             <a:endParaRPr lang="en-US" sz="1700" dirty="0"/>
           </a:p>
@@ -3361,14 +4422,14 @@
       </p:sp>
       <p:sp>
         <p:nvSpPr>
-          <p:cNvPr id="11" name="Text 8"/>
-          <p:cNvSpPr/>
-          <p:nvPr/>
-        </p:nvSpPr>
-        <p:spPr>
-          <a:xfrm>
-            <a:off x="6281928" y="1252728"/>
-            <a:ext cx="2057400" cy="438912"/>
+          <p:cNvPr id="13" name="Text 9"/>
+          <p:cNvSpPr/>
+          <p:nvPr/>
+        </p:nvSpPr>
+        <p:spPr>
+          <a:xfrm>
+            <a:off x="960120" y="4709160"/>
+            <a:ext cx="2971800" cy="-45720"/>
           </a:xfrm>
           <a:prstGeom prst="rect">
             <a:avLst/>
@@ -3394,7 +4455,7 @@
                 <a:ea typeface="Times New Roman" pitchFamily="34" charset="-122"/>
                 <a:cs typeface="Times New Roman" pitchFamily="34" charset="-120"/>
               </a:rPr>
-              <a:t>relative_f1_drop already incorporates the k=5 baseline, so this page focuses on strategy ranking and runtime.</a:t>
+              <a:t>Figure 4a asks how strongly the attack-over-random difference is supported.</a:t>
             </a:r>
             <a:endParaRPr lang="en-US" sz="1220" dirty="0"/>
           </a:p>
@@ -3402,28 +4463,26 @@
       </p:sp>
       <p:sp>
         <p:nvSpPr>
-          <p:cNvPr id="12" name="Shape 9"/>
-          <p:cNvSpPr/>
-          <p:nvPr/>
-        </p:nvSpPr>
-        <p:spPr>
-          <a:xfrm>
-            <a:off x="6199632" y="1993392"/>
-            <a:ext cx="960120" cy="914400"/>
+          <p:cNvPr id="14" name="Shape 10"/>
+          <p:cNvSpPr/>
+          <p:nvPr/>
+        </p:nvSpPr>
+        <p:spPr>
+          <a:xfrm>
+            <a:off x="4983480" y="4370832"/>
+            <a:ext cx="3246120" cy="384048"/>
           </a:xfrm>
           <a:prstGeom prst="roundRect">
             <a:avLst>
-              <a:gd name="adj" fmla="val 5000"/>
+              <a:gd name="adj" fmla="val 11905"/>
             </a:avLst>
           </a:prstGeom>
           <a:solidFill>
-            <a:srgbClr val="223A5E"/>
+            <a:srgbClr val="E8EEF5"/>
           </a:solidFill>
-          <a:ln w="12700">
+          <a:ln w="13970">
             <a:solidFill>
-              <a:srgbClr val="223A5E">
-                <a:alpha val="0"/>
-              </a:srgbClr>
+              <a:srgbClr val="E8EEF5"/>
             </a:solidFill>
             <a:prstDash val="solid"/>
           </a:ln>
@@ -3431,14 +4490,14 @@
       </p:sp>
       <p:sp>
         <p:nvSpPr>
-          <p:cNvPr id="13" name="Text 10"/>
-          <p:cNvSpPr/>
-          <p:nvPr/>
-        </p:nvSpPr>
-        <p:spPr>
-          <a:xfrm>
-            <a:off x="6272784" y="2103120"/>
-            <a:ext cx="813816" cy="201168"/>
+          <p:cNvPr id="15" name="Text 11"/>
+          <p:cNvSpPr/>
+          <p:nvPr/>
+        </p:nvSpPr>
+        <p:spPr>
+          <a:xfrm>
+            <a:off x="5120640" y="4462272"/>
+            <a:ext cx="2971800" cy="182880"/>
           </a:xfrm>
           <a:prstGeom prst="rect">
             <a:avLst/>
@@ -3450,34 +4509,34 @@
           <a:bodyPr wrap="square" lIns="0" tIns="0" rIns="0" bIns="0" rtlCol="0" anchor="ctr"/>
           <a:lstStyle/>
           <a:p>
-            <a:pPr algn="ctr" indent="0" marL="0">
-              <a:buNone/>
-            </a:pPr>
-            <a:r>
-              <a:rPr lang="en-US" sz="1900" b="1" dirty="0">
-                <a:solidFill>
-                  <a:srgbClr val="FFFFFF"/>
-                </a:solidFill>
-                <a:latin typeface="Times New Roman" pitchFamily="34" charset="0"/>
-                <a:ea typeface="Times New Roman" pitchFamily="34" charset="-122"/>
-                <a:cs typeface="Times New Roman" pitchFamily="34" charset="-120"/>
-              </a:rPr>
-              <a:t>18.9s</a:t>
-            </a:r>
-            <a:endParaRPr lang="en-US" sz="1900" dirty="0"/>
-          </a:p>
-        </p:txBody>
-      </p:sp>
-      <p:sp>
-        <p:nvSpPr>
-          <p:cNvPr id="14" name="Text 11"/>
-          <p:cNvSpPr/>
-          <p:nvPr/>
-        </p:nvSpPr>
-        <p:spPr>
-          <a:xfrm>
-            <a:off x="6272784" y="2377440"/>
-            <a:ext cx="813816" cy="484632"/>
+            <a:pPr indent="0" marL="0">
+              <a:buNone/>
+            </a:pPr>
+            <a:r>
+              <a:rPr lang="en-US" sz="1700" b="1" dirty="0">
+                <a:solidFill>
+                  <a:srgbClr val="223A5E"/>
+                </a:solidFill>
+                <a:latin typeface="Times New Roman" pitchFamily="34" charset="0"/>
+                <a:ea typeface="Times New Roman" pitchFamily="34" charset="-122"/>
+                <a:cs typeface="Times New Roman" pitchFamily="34" charset="-120"/>
+              </a:rPr>
+              <a:t>Effect</a:t>
+            </a:r>
+            <a:endParaRPr lang="en-US" sz="1700" dirty="0"/>
+          </a:p>
+        </p:txBody>
+      </p:sp>
+      <p:sp>
+        <p:nvSpPr>
+          <p:cNvPr id="16" name="Text 12"/>
+          <p:cNvSpPr/>
+          <p:nvPr/>
+        </p:nvSpPr>
+        <p:spPr>
+          <a:xfrm>
+            <a:off x="5120640" y="4709160"/>
+            <a:ext cx="2971800" cy="-45720"/>
           </a:xfrm>
           <a:prstGeom prst="rect">
             <a:avLst/>
@@ -3491,222 +4550,6 @@
           </a:bodyPr>
           <a:lstStyle/>
           <a:p>
-            <a:pPr algn="ctr" indent="0" marL="0">
-              <a:buNone/>
-            </a:pPr>
-            <a:r>
-              <a:rPr lang="en-US" sz="1000" dirty="0">
-                <a:solidFill>
-                  <a:srgbClr val="F7F5F1"/>
-                </a:solidFill>
-                <a:latin typeface="Times New Roman" pitchFamily="34" charset="0"/>
-                <a:ea typeface="Times New Roman" pitchFamily="34" charset="-122"/>
-                <a:cs typeface="Times New Roman" pitchFamily="34" charset="-120"/>
-              </a:rPr>
-              <a:t>IM-v4 selection time</a:t>
-            </a:r>
-            <a:endParaRPr lang="en-US" sz="1000" dirty="0"/>
-          </a:p>
-        </p:txBody>
-      </p:sp>
-      <p:sp>
-        <p:nvSpPr>
-          <p:cNvPr id="15" name="Shape 12"/>
-          <p:cNvSpPr/>
-          <p:nvPr/>
-        </p:nvSpPr>
-        <p:spPr>
-          <a:xfrm>
-            <a:off x="7296912" y="1993392"/>
-            <a:ext cx="960120" cy="914400"/>
-          </a:xfrm>
-          <a:prstGeom prst="roundRect">
-            <a:avLst>
-              <a:gd name="adj" fmla="val 5000"/>
-            </a:avLst>
-          </a:prstGeom>
-          <a:solidFill>
-            <a:srgbClr val="E8EEF5"/>
-          </a:solidFill>
-          <a:ln w="12700">
-            <a:solidFill>
-              <a:srgbClr val="E8EEF5">
-                <a:alpha val="0"/>
-              </a:srgbClr>
-            </a:solidFill>
-            <a:prstDash val="solid"/>
-          </a:ln>
-        </p:spPr>
-      </p:sp>
-      <p:sp>
-        <p:nvSpPr>
-          <p:cNvPr id="16" name="Text 13"/>
-          <p:cNvSpPr/>
-          <p:nvPr/>
-        </p:nvSpPr>
-        <p:spPr>
-          <a:xfrm>
-            <a:off x="7370064" y="2103120"/>
-            <a:ext cx="813816" cy="201168"/>
-          </a:xfrm>
-          <a:prstGeom prst="rect">
-            <a:avLst/>
-          </a:prstGeom>
-          <a:noFill/>
-          <a:ln/>
-        </p:spPr>
-        <p:txBody>
-          <a:bodyPr wrap="square" lIns="0" tIns="0" rIns="0" bIns="0" rtlCol="0" anchor="ctr"/>
-          <a:lstStyle/>
-          <a:p>
-            <a:pPr algn="ctr" indent="0" marL="0">
-              <a:buNone/>
-            </a:pPr>
-            <a:r>
-              <a:rPr lang="en-US" sz="1900" b="1" dirty="0">
-                <a:solidFill>
-                  <a:srgbClr val="223A5E"/>
-                </a:solidFill>
-                <a:latin typeface="Times New Roman" pitchFamily="34" charset="0"/>
-                <a:ea typeface="Times New Roman" pitchFamily="34" charset="-122"/>
-                <a:cs typeface="Times New Roman" pitchFamily="34" charset="-120"/>
-              </a:rPr>
-              <a:t>1.3%</a:t>
-            </a:r>
-            <a:endParaRPr lang="en-US" sz="1900" dirty="0"/>
-          </a:p>
-        </p:txBody>
-      </p:sp>
-      <p:sp>
-        <p:nvSpPr>
-          <p:cNvPr id="17" name="Text 14"/>
-          <p:cNvSpPr/>
-          <p:nvPr/>
-        </p:nvSpPr>
-        <p:spPr>
-          <a:xfrm>
-            <a:off x="7370064" y="2377440"/>
-            <a:ext cx="813816" cy="484632"/>
-          </a:xfrm>
-          <a:prstGeom prst="rect">
-            <a:avLst/>
-          </a:prstGeom>
-          <a:noFill/>
-          <a:ln/>
-        </p:spPr>
-        <p:txBody>
-          <a:bodyPr wrap="square" lIns="0" tIns="0" rIns="0" bIns="0" rtlCol="0" anchor="ctr">
-            <a:normAutofit/>
-          </a:bodyPr>
-          <a:lstStyle/>
-          <a:p>
-            <a:pPr algn="ctr" indent="0" marL="0">
-              <a:buNone/>
-            </a:pPr>
-            <a:r>
-              <a:rPr lang="en-US" sz="1000" dirty="0">
-                <a:solidFill>
-                  <a:srgbClr val="223A5E"/>
-                </a:solidFill>
-                <a:latin typeface="Times New Roman" pitchFamily="34" charset="0"/>
-                <a:ea typeface="Times New Roman" pitchFamily="34" charset="-122"/>
-                <a:cs typeface="Times New Roman" pitchFamily="34" charset="-120"/>
-              </a:rPr>
-              <a:t>spread loss vs CELF</a:t>
-            </a:r>
-            <a:endParaRPr lang="en-US" sz="1000" dirty="0"/>
-          </a:p>
-        </p:txBody>
-      </p:sp>
-      <p:sp>
-        <p:nvSpPr>
-          <p:cNvPr id="18" name="Shape 15"/>
-          <p:cNvSpPr/>
-          <p:nvPr/>
-        </p:nvSpPr>
-        <p:spPr>
-          <a:xfrm>
-            <a:off x="6199632" y="3063240"/>
-            <a:ext cx="2057400" cy="658368"/>
-          </a:xfrm>
-          <a:prstGeom prst="roundRect">
-            <a:avLst>
-              <a:gd name="adj" fmla="val 6944"/>
-            </a:avLst>
-          </a:prstGeom>
-          <a:solidFill>
-            <a:srgbClr val="FFFFFF"/>
-          </a:solidFill>
-          <a:ln w="13970">
-            <a:solidFill>
-              <a:srgbClr val="D9DEE7"/>
-            </a:solidFill>
-            <a:prstDash val="solid"/>
-          </a:ln>
-        </p:spPr>
-      </p:sp>
-      <p:sp>
-        <p:nvSpPr>
-          <p:cNvPr id="19" name="Text 16"/>
-          <p:cNvSpPr/>
-          <p:nvPr/>
-        </p:nvSpPr>
-        <p:spPr>
-          <a:xfrm>
-            <a:off x="6336792" y="3154680"/>
-            <a:ext cx="1783080" cy="182880"/>
-          </a:xfrm>
-          <a:prstGeom prst="rect">
-            <a:avLst/>
-          </a:prstGeom>
-          <a:noFill/>
-          <a:ln/>
-        </p:spPr>
-        <p:txBody>
-          <a:bodyPr wrap="square" lIns="0" tIns="0" rIns="0" bIns="0" rtlCol="0" anchor="ctr"/>
-          <a:lstStyle/>
-          <a:p>
-            <a:pPr indent="0" marL="0">
-              <a:buNone/>
-            </a:pPr>
-            <a:r>
-              <a:rPr lang="en-US" sz="1700" b="1" dirty="0">
-                <a:solidFill>
-                  <a:srgbClr val="223A5E"/>
-                </a:solidFill>
-                <a:latin typeface="Times New Roman" pitchFamily="34" charset="0"/>
-                <a:ea typeface="Times New Roman" pitchFamily="34" charset="-122"/>
-                <a:cs typeface="Times New Roman" pitchFamily="34" charset="-120"/>
-              </a:rPr>
-              <a:t>Practical</a:t>
-            </a:r>
-            <a:endParaRPr lang="en-US" sz="1700" dirty="0"/>
-          </a:p>
-        </p:txBody>
-      </p:sp>
-      <p:sp>
-        <p:nvSpPr>
-          <p:cNvPr id="20" name="Text 17"/>
-          <p:cNvSpPr/>
-          <p:nvPr/>
-        </p:nvSpPr>
-        <p:spPr>
-          <a:xfrm>
-            <a:off x="6336792" y="3401568"/>
-            <a:ext cx="1783080" cy="228600"/>
-          </a:xfrm>
-          <a:prstGeom prst="rect">
-            <a:avLst/>
-          </a:prstGeom>
-          <a:noFill/>
-          <a:ln/>
-        </p:spPr>
-        <p:txBody>
-          <a:bodyPr wrap="square" lIns="0" tIns="0" rIns="0" bIns="0" rtlCol="0" anchor="ctr">
-            <a:normAutofit/>
-          </a:bodyPr>
-          <a:lstStyle/>
-          <a:p>
             <a:pPr indent="0" marL="0">
               <a:buNone/>
             </a:pPr>
@@ -3719,67 +4562,9 @@
                 <a:ea typeface="Times New Roman" pitchFamily="34" charset="-122"/>
                 <a:cs typeface="Times New Roman" pitchFamily="34" charset="-120"/>
               </a:rPr>
-              <a:t>Selection is operationally feasible.</a:t>
+              <a:t>Figure 4b asks how large that extra damage is once support is established.</a:t>
             </a:r>
             <a:endParaRPr lang="en-US" sz="1220" dirty="0"/>
-          </a:p>
-        </p:txBody>
-      </p:sp>
-      <p:sp>
-        <p:nvSpPr>
-          <p:cNvPr id="21" name="Text 18"/>
-          <p:cNvSpPr/>
-          <p:nvPr/>
-        </p:nvSpPr>
-        <p:spPr>
-          <a:xfrm>
-            <a:off x="6254496" y="3931920"/>
-            <a:ext cx="1920240" cy="594360"/>
-          </a:xfrm>
-          <a:prstGeom prst="rect">
-            <a:avLst/>
-          </a:prstGeom>
-          <a:noFill/>
-          <a:ln/>
-        </p:spPr>
-        <p:txBody>
-          <a:bodyPr wrap="square" lIns="0" tIns="0" rIns="0" bIns="0" rtlCol="0" anchor="ctr"/>
-          <a:lstStyle/>
-          <a:p>
-            <a:pPr marL="203200" indent="-203200">
-              <a:buSzPct val="100000"/>
-              <a:buChar char="•"/>
-            </a:pPr>
-            <a:r>
-              <a:rPr lang="en-US" sz="1120" dirty="0">
-                <a:solidFill>
-                  <a:srgbClr val="1E2630"/>
-                </a:solidFill>
-                <a:latin typeface="Times New Roman" pitchFamily="34" charset="0"/>
-                <a:ea typeface="Times New Roman" pitchFamily="34" charset="-122"/>
-                <a:cs typeface="Times New Roman" pitchFamily="34" charset="-120"/>
-              </a:rPr>
-              <a:t>Structured attacks create the largest extra drop beyond the k=5 baseline on GNNDelete.</a:t>
-            </a:r>
-            <a:endParaRPr lang="en-US" sz="1120" dirty="0"/>
-          </a:p>
-          <a:p>
-            <a:pPr marL="203200" indent="-203200">
-              <a:buSzPct val="100000"/>
-              <a:buChar char="•"/>
-            </a:pPr>
-            <a:r>
-              <a:rPr lang="en-US" sz="1120" dirty="0">
-                <a:solidFill>
-                  <a:srgbClr val="1E2630"/>
-                </a:solidFill>
-                <a:latin typeface="Times New Roman" pitchFamily="34" charset="0"/>
-                <a:ea typeface="Times New Roman" pitchFamily="34" charset="-122"/>
-                <a:cs typeface="Times New Roman" pitchFamily="34" charset="-120"/>
-              </a:rPr>
-              <a:t>IM-v4 makes attack selection fast enough to matter in practice.</a:t>
-            </a:r>
-            <a:endParaRPr lang="en-US" sz="1120" dirty="0"/>
           </a:p>
         </p:txBody>
       </p:sp>
@@ -3791,9 +4576,9 @@
 </p:sld>
 </file>
 
-<file path=ppt/slides/slide12.xml><?xml version="1.0" encoding="utf-8"?>
+<file path=ppt/slides/slide13.xml><?xml version="1.0" encoding="utf-8"?>
 <p:sld xmlns:a="http://schemas.openxmlformats.org/drawingml/2006/main" xmlns:r="http://schemas.openxmlformats.org/officeDocument/2006/relationships" xmlns:p="http://schemas.openxmlformats.org/presentationml/2006/main">
-  <p:cSld name="Slide 12">
+  <p:cSld name="Slide 13">
     <p:bg>
       <p:bgPr>
         <a:solidFill>
@@ -3914,7 +4699,7 @@
                 <a:ea typeface="Times New Roman" pitchFamily="34" charset="-122"/>
                 <a:cs typeface="Times New Roman" pitchFamily="34" charset="-120"/>
               </a:rPr>
-              <a:t>12 / 14</a:t>
+              <a:t>13 / 15</a:t>
             </a:r>
             <a:endParaRPr lang="en-US" sz="1000" dirty="0"/>
           </a:p>
@@ -4599,9 +5384,9 @@
 </p:sld>
 </file>
 
-<file path=ppt/slides/slide13.xml><?xml version="1.0" encoding="utf-8"?>
+<file path=ppt/slides/slide14.xml><?xml version="1.0" encoding="utf-8"?>
 <p:sld xmlns:a="http://schemas.openxmlformats.org/drawingml/2006/main" xmlns:r="http://schemas.openxmlformats.org/officeDocument/2006/relationships" xmlns:p="http://schemas.openxmlformats.org/presentationml/2006/main">
-  <p:cSld name="Slide 13">
+  <p:cSld name="Slide 14">
     <p:bg>
       <p:bgPr>
         <a:solidFill>
@@ -5069,9 +5854,9 @@
 </p:sld>
 </file>
 
-<file path=ppt/slides/slide14.xml><?xml version="1.0" encoding="utf-8"?>
+<file path=ppt/slides/slide15.xml><?xml version="1.0" encoding="utf-8"?>
 <p:sld xmlns:a="http://schemas.openxmlformats.org/drawingml/2006/main" xmlns:r="http://schemas.openxmlformats.org/officeDocument/2006/relationships" xmlns:p="http://schemas.openxmlformats.org/presentationml/2006/main">
-  <p:cSld name="Slide 14">
+  <p:cSld name="Slide 15">
     <p:bg>
       <p:bgPr>
         <a:solidFill>
@@ -5153,7 +5938,7 @@
                 <a:ea typeface="Times New Roman" pitchFamily="34" charset="-122"/>
                 <a:cs typeface="Times New Roman" pitchFamily="34" charset="-120"/>
               </a:rPr>
-              <a:t>Backup Appendix: Statistical Support</a:t>
+              <a:t>Backup Appendix: Full Strategy Spectrum</a:t>
             </a:r>
             <a:endParaRPr lang="en-US" sz="2400" dirty="0"/>
           </a:p>
@@ -5192,7 +5977,7 @@
                 <a:ea typeface="Times New Roman" pitchFamily="34" charset="-122"/>
                 <a:cs typeface="Times New Roman" pitchFamily="34" charset="-120"/>
               </a:rPr>
-              <a:t>14 / 14</a:t>
+              <a:t>15 / 15</a:t>
             </a:r>
             <a:endParaRPr lang="en-US" sz="1000" dirty="0"/>
           </a:p>
@@ -5278,7 +6063,7 @@
       </p:sp>
       <p:pic>
         <p:nvPicPr>
-          <p:cNvPr id="7" name="Image 0" descr="H:\project\OpenGU\GULib-master\report\0417_5003report\figures\paper_figures\FIG-4a_Significance.png">    </p:cNvPr>
+          <p:cNvPr id="7" name="Image 0" descr="H:\project\OpenGU\GULib-master\report\0417_5003report\figures\paper_figures\FIG-3_Spectrum.png">    </p:cNvPr>
           <p:cNvPicPr>
             <a:picLocks noChangeAspect="1"/>
           </p:cNvPicPr>
@@ -5292,48 +6077,24 @@
         </p:blipFill>
         <p:spPr>
           <a:xfrm>
-            <a:off x="548640" y="1005840"/>
-            <a:ext cx="3794760" cy="3154680"/>
+            <a:off x="658368" y="932688"/>
+            <a:ext cx="7818120" cy="3566160"/>
           </a:xfrm>
           <a:prstGeom prst="rect">
             <a:avLst/>
           </a:prstGeom>
         </p:spPr>
       </p:pic>
-      <p:pic>
-        <p:nvPicPr>
-          <p:cNvPr id="8" name="Image 1" descr="H:\project\OpenGU\GULib-master\report\0417_5003report\figures\paper_figures\FIG-4b_Effect.png">    </p:cNvPr>
-          <p:cNvPicPr>
-            <a:picLocks noChangeAspect="1"/>
-          </p:cNvPicPr>
-          <p:nvPr/>
-        </p:nvPicPr>
-        <p:blipFill>
-          <a:blip r:embed="rId2"/>
-          <a:stretch>
-            <a:fillRect/>
-          </a:stretch>
-        </p:blipFill>
-        <p:spPr>
-          <a:xfrm>
-            <a:off x="4709160" y="1005840"/>
-            <a:ext cx="3794760" cy="3154680"/>
-          </a:xfrm>
-          <a:prstGeom prst="rect">
-            <a:avLst/>
-          </a:prstGeom>
-        </p:spPr>
-      </p:pic>
-      <p:sp>
-        <p:nvSpPr>
-          <p:cNvPr id="9" name="Text 5"/>
-          <p:cNvSpPr/>
-          <p:nvPr/>
-        </p:nvSpPr>
-        <p:spPr>
-          <a:xfrm>
-            <a:off x="566928" y="4297680"/>
-            <a:ext cx="3749040" cy="146304"/>
+      <p:sp>
+        <p:nvSpPr>
+          <p:cNvPr id="8" name="Text 5"/>
+          <p:cNvSpPr/>
+          <p:nvPr/>
+        </p:nvSpPr>
+        <p:spPr>
+          <a:xfrm>
+            <a:off x="713232" y="4590288"/>
+            <a:ext cx="7543800" cy="146304"/>
           </a:xfrm>
           <a:prstGeom prst="rect">
             <a:avLst/>
@@ -5357,46 +6118,7 @@
                 <a:ea typeface="Times New Roman" pitchFamily="34" charset="-122"/>
                 <a:cs typeface="Times New Roman" pitchFamily="34" charset="-120"/>
               </a:rPr>
-              <a:t>Figure 4a. -log10(p) support against random deletion.</a:t>
-            </a:r>
-            <a:endParaRPr lang="en-US" sz="900" dirty="0"/>
-          </a:p>
-        </p:txBody>
-      </p:sp>
-      <p:sp>
-        <p:nvSpPr>
-          <p:cNvPr id="10" name="Text 6"/>
-          <p:cNvSpPr/>
-          <p:nvPr/>
-        </p:nvSpPr>
-        <p:spPr>
-          <a:xfrm>
-            <a:off x="4727448" y="4297680"/>
-            <a:ext cx="3749040" cy="146304"/>
-          </a:xfrm>
-          <a:prstGeom prst="rect">
-            <a:avLst/>
-          </a:prstGeom>
-          <a:noFill/>
-          <a:ln/>
-        </p:spPr>
-        <p:txBody>
-          <a:bodyPr wrap="square" lIns="0" tIns="0" rIns="0" bIns="0" rtlCol="0" anchor="ctr"/>
-          <a:lstStyle/>
-          <a:p>
-            <a:pPr indent="0" marL="0">
-              <a:buNone/>
-            </a:pPr>
-            <a:r>
-              <a:rPr lang="en-US" sz="900" i="1" dirty="0">
-                <a:solidFill>
-                  <a:srgbClr val="667085"/>
-                </a:solidFill>
-                <a:latin typeface="Times New Roman" pitchFamily="34" charset="0"/>
-                <a:ea typeface="Times New Roman" pitchFamily="34" charset="-122"/>
-                <a:cs typeface="Times New Roman" pitchFamily="34" charset="-120"/>
-              </a:rPr>
-              <a:t>Figure 4b. Effect size beyond random deletion.</a:t>
+              <a:t>Full Figure 3. Strategy comparison in relative_f1_drop at ratio = 0.05 using the k=5 baseline.</a:t>
             </a:r>
             <a:endParaRPr lang="en-US" sz="900" dirty="0"/>
           </a:p>
@@ -5533,7 +6255,7 @@
                 <a:ea typeface="Times New Roman" pitchFamily="34" charset="-122"/>
                 <a:cs typeface="Times New Roman" pitchFamily="34" charset="-120"/>
               </a:rPr>
-              <a:t>02 / 14</a:t>
+              <a:t>02 / 15</a:t>
             </a:r>
             <a:endParaRPr lang="en-US" sz="1000" dirty="0"/>
           </a:p>
@@ -6242,7 +6964,7 @@
                 <a:ea typeface="Times New Roman" pitchFamily="34" charset="-122"/>
                 <a:cs typeface="Times New Roman" pitchFamily="34" charset="-120"/>
               </a:rPr>
-              <a:t>03 / 14</a:t>
+              <a:t>03 / 15</a:t>
             </a:r>
             <a:endParaRPr lang="en-US" sz="1000" dirty="0"/>
           </a:p>
@@ -6992,7 +7714,7 @@
                 <a:ea typeface="Times New Roman" pitchFamily="34" charset="-122"/>
                 <a:cs typeface="Times New Roman" pitchFamily="34" charset="-120"/>
               </a:rPr>
-              <a:t>04 / 14</a:t>
+              <a:t>04 / 15</a:t>
             </a:r>
             <a:endParaRPr lang="en-US" sz="1000" dirty="0"/>
           </a:p>
@@ -7216,7 +7938,7 @@
                 <a:ea typeface="Times New Roman" pitchFamily="34" charset="-122"/>
                 <a:cs typeface="Times New Roman" pitchFamily="34" charset="-120"/>
               </a:rPr>
-              <a:t>GNNDelete is the main fragile representative in this study.</a:t>
+              <a:t>Learn a direct unlearning correction; GNNDelete is the fragile representative here.</a:t>
             </a:r>
             <a:endParaRPr lang="en-US" sz="1220" dirty="0"/>
           </a:p>
@@ -7323,7 +8045,7 @@
                 <a:ea typeface="Times New Roman" pitchFamily="34" charset="-122"/>
                 <a:cs typeface="Times New Roman" pitchFamily="34" charset="-120"/>
               </a:rPr>
-              <a:t>GIF remains comparatively stable under adversarial selection.</a:t>
+              <a:t>Approximate deletion through local influence-style updates; GIF stays comparatively stable.</a:t>
             </a:r>
             <a:endParaRPr lang="en-US" sz="1220" dirty="0"/>
           </a:p>
@@ -7430,7 +8152,7 @@
                 <a:ea typeface="Times New Roman" pitchFamily="34" charset="-122"/>
                 <a:cs typeface="Times New Roman" pitchFamily="34" charset="-120"/>
               </a:rPr>
-              <a:t>GraphEraser behaves differently and often improves in the tested settings.</a:t>
+              <a:t>Partition the graph and retrain affected shards; GraphEraser behaves differently in the tested settings.</a:t>
             </a:r>
             <a:endParaRPr lang="en-US" sz="1220" dirty="0"/>
           </a:p>
@@ -8047,7 +8769,7 @@
                 <a:ea typeface="Times New Roman" pitchFamily="34" charset="-122"/>
                 <a:cs typeface="Times New Roman" pitchFamily="34" charset="-120"/>
               </a:rPr>
-              <a:t>05 / 14</a:t>
+              <a:t>05 / 15</a:t>
             </a:r>
             <a:endParaRPr lang="en-US" sz="1000" dirty="0"/>
           </a:p>
@@ -9054,7 +9776,7 @@
                 <a:ea typeface="Times New Roman" pitchFamily="34" charset="-122"/>
                 <a:cs typeface="Times New Roman" pitchFamily="34" charset="-120"/>
               </a:rPr>
-              <a:t>Story: spectrum, deep dive, attribution, and efficiency.</a:t>
+              <a:t>Outputs: relative_f1_drop, retrain_gap, collateral damage, and efficiency.</a:t>
             </a:r>
             <a:endParaRPr lang="en-US" sz="1220" dirty="0"/>
           </a:p>
@@ -9152,7 +9874,7 @@
                 <a:ea typeface="Times New Roman" pitchFamily="34" charset="-122"/>
                 <a:cs typeface="Times New Roman" pitchFamily="34" charset="-120"/>
               </a:rPr>
-              <a:t>Metrics Framework</a:t>
+              <a:t>Attack Selection Logic</a:t>
             </a:r>
             <a:endParaRPr lang="en-US" sz="2400" dirty="0"/>
           </a:p>
@@ -9191,7 +9913,7 @@
                 <a:ea typeface="Times New Roman" pitchFamily="34" charset="-122"/>
                 <a:cs typeface="Times New Roman" pitchFamily="34" charset="-120"/>
               </a:rPr>
-              <a:t>06 / 14</a:t>
+              <a:t>06 / 15</a:t>
             </a:r>
             <a:endParaRPr lang="en-US" sz="1000" dirty="0"/>
           </a:p>
@@ -9300,7 +10022,7 @@
               <a:buNone/>
             </a:pPr>
             <a:r>
-              <a:rPr lang="en-US" sz="1620" b="1" dirty="0">
+              <a:rPr lang="en-US" sz="1660" b="1" dirty="0">
                 <a:solidFill>
                   <a:srgbClr val="223A5E"/>
                 </a:solidFill>
@@ -9308,9 +10030,9 @@
                 <a:ea typeface="Times New Roman" pitchFamily="34" charset="-122"/>
                 <a:cs typeface="Times New Roman" pitchFamily="34" charset="-120"/>
               </a:rPr>
-              <a:t>Three metrics answer three different questions: how much extra damage appears beyond a k=5 baseline, where it comes from, and how far it spreads.</a:t>
-            </a:r>
-            <a:endParaRPr lang="en-US" sz="1620" dirty="0"/>
+              <a:t>The attack is not only about how many nodes are deleted, but about what logic is used to choose them.</a:t>
+            </a:r>
+            <a:endParaRPr lang="en-US" sz="1660" dirty="0"/>
           </a:p>
         </p:txBody>
       </p:sp>
@@ -9323,11 +10045,11 @@
         <p:spPr>
           <a:xfrm>
             <a:off x="713232" y="1325880"/>
-            <a:ext cx="2542032" cy="2011680"/>
+            <a:ext cx="2487168" cy="2029968"/>
           </a:xfrm>
           <a:prstGeom prst="roundRect">
             <a:avLst>
-              <a:gd name="adj" fmla="val 2273"/>
+              <a:gd name="adj" fmla="val 2252"/>
             </a:avLst>
           </a:prstGeom>
           <a:solidFill>
@@ -9350,7 +10072,7 @@
         <p:spPr>
           <a:xfrm>
             <a:off x="850392" y="1417320"/>
-            <a:ext cx="2267712" cy="182880"/>
+            <a:ext cx="2212848" cy="182880"/>
           </a:xfrm>
           <a:prstGeom prst="rect">
             <a:avLst/>
@@ -9374,7 +10096,7 @@
                 <a:ea typeface="Times New Roman" pitchFamily="34" charset="-122"/>
                 <a:cs typeface="Times New Roman" pitchFamily="34" charset="-120"/>
               </a:rPr>
-              <a:t>Utility</a:t>
+              <a:t>TracIn / IF-style</a:t>
             </a:r>
             <a:endParaRPr lang="en-US" sz="1700" dirty="0"/>
           </a:p>
@@ -9389,7 +10111,7 @@
         <p:spPr>
           <a:xfrm>
             <a:off x="850392" y="1664208"/>
-            <a:ext cx="2267712" cy="1581912"/>
+            <a:ext cx="2212848" cy="1600200"/>
           </a:xfrm>
           <a:prstGeom prst="rect">
             <a:avLst/>
@@ -9415,7 +10137,7 @@
                 <a:ea typeface="Times New Roman" pitchFamily="34" charset="-122"/>
                 <a:cs typeface="Times New Roman" pitchFamily="34" charset="-120"/>
               </a:rPr>
-              <a:t>relative_f1_drop = F1_after(k=5, random) - F1_after(attack)</a:t>
+              <a:t>Model-aware logic.</a:t>
             </a:r>
             <a:endParaRPr lang="en-US" sz="1220" dirty="0"/>
           </a:p>
@@ -9423,12 +10145,29 @@
             <a:pPr indent="0" marL="0">
               <a:buNone/>
             </a:pPr>
+            <a:r>
+              <a:rPr lang="en-US" sz="1220" dirty="0">
+                <a:solidFill>
+                  <a:srgbClr val="1E2630"/>
+                </a:solidFill>
+                <a:latin typeface="Times New Roman" pitchFamily="34" charset="0"/>
+                <a:ea typeface="Times New Roman" pitchFamily="34" charset="-122"/>
+                <a:cs typeface="Times New Roman" pitchFamily="34" charset="-120"/>
+              </a:rPr>
+              <a:t>Pick nodes with high training influence on the learned model.</a:t>
+            </a:r>
             <a:endParaRPr lang="en-US" sz="1220" dirty="0"/>
           </a:p>
           <a:p>
             <a:pPr indent="0" marL="0">
               <a:buNone/>
             </a:pPr>
+            <a:endParaRPr lang="en-US" sz="1220" dirty="0"/>
+          </a:p>
+          <a:p>
+            <a:pPr indent="0" marL="0">
+              <a:buNone/>
+            </a:pPr>
             <a:r>
               <a:rPr lang="en-US" sz="1220" dirty="0">
                 <a:solidFill>
@@ -9438,7 +10177,7 @@
                 <a:ea typeface="Times New Roman" pitchFamily="34" charset="-122"/>
                 <a:cs typeface="Times New Roman" pitchFamily="34" charset="-120"/>
               </a:rPr>
-              <a:t>Use a tiny random-trigger baseline because raw drop can mislead on shard-based methods.</a:t>
+              <a:t>Shorthand: score(v) ≈ I_train(v)</a:t>
             </a:r>
             <a:endParaRPr lang="en-US" sz="1220" dirty="0"/>
           </a:p>
@@ -9453,11 +10192,11 @@
         <p:spPr>
           <a:xfrm>
             <a:off x="3328416" y="1325880"/>
-            <a:ext cx="2542032" cy="2011680"/>
+            <a:ext cx="2487168" cy="2029968"/>
           </a:xfrm>
           <a:prstGeom prst="roundRect">
             <a:avLst>
-              <a:gd name="adj" fmla="val 2273"/>
+              <a:gd name="adj" fmla="val 2252"/>
             </a:avLst>
           </a:prstGeom>
           <a:solidFill>
@@ -9480,7 +10219,7 @@
         <p:spPr>
           <a:xfrm>
             <a:off x="3465576" y="1417320"/>
-            <a:ext cx="2267712" cy="182880"/>
+            <a:ext cx="2212848" cy="182880"/>
           </a:xfrm>
           <a:prstGeom prst="rect">
             <a:avLst/>
@@ -9504,7 +10243,7 @@
                 <a:ea typeface="Times New Roman" pitchFamily="34" charset="-122"/>
                 <a:cs typeface="Times New Roman" pitchFamily="34" charset="-120"/>
               </a:rPr>
-              <a:t>Fidelity</a:t>
+              <a:t>IM-v4</a:t>
             </a:r>
             <a:endParaRPr lang="en-US" sz="1700" dirty="0"/>
           </a:p>
@@ -9519,7 +10258,7 @@
         <p:spPr>
           <a:xfrm>
             <a:off x="3465576" y="1664208"/>
-            <a:ext cx="2267712" cy="1581912"/>
+            <a:ext cx="2212848" cy="1600200"/>
           </a:xfrm>
           <a:prstGeom prst="rect">
             <a:avLst/>
@@ -9545,7 +10284,7 @@
                 <a:ea typeface="Times New Roman" pitchFamily="34" charset="-122"/>
                 <a:cs typeface="Times New Roman" pitchFamily="34" charset="-120"/>
               </a:rPr>
-              <a:t>retrain_gap = F1_retrain - F1_unlearn</a:t>
+              <a:t>Graph-structural logic.</a:t>
             </a:r>
             <a:endParaRPr lang="en-US" sz="1220" dirty="0"/>
           </a:p>
@@ -9553,12 +10292,29 @@
             <a:pPr indent="0" marL="0">
               <a:buNone/>
             </a:pPr>
+            <a:r>
+              <a:rPr lang="en-US" sz="1220" dirty="0">
+                <a:solidFill>
+                  <a:srgbClr val="1E2630"/>
+                </a:solidFill>
+                <a:latin typeface="Times New Roman" pitchFamily="34" charset="0"/>
+                <a:ea typeface="Times New Roman" pitchFamily="34" charset="-122"/>
+                <a:cs typeface="Times New Roman" pitchFamily="34" charset="-120"/>
+              </a:rPr>
+              <a:t>Pick nodes that maximize spread or disruption in the graph.</a:t>
+            </a:r>
             <a:endParaRPr lang="en-US" sz="1220" dirty="0"/>
           </a:p>
           <a:p>
             <a:pPr indent="0" marL="0">
               <a:buNone/>
             </a:pPr>
+            <a:endParaRPr lang="en-US" sz="1220" dirty="0"/>
+          </a:p>
+          <a:p>
+            <a:pPr indent="0" marL="0">
+              <a:buNone/>
+            </a:pPr>
             <a:r>
               <a:rPr lang="en-US" sz="1220" dirty="0">
                 <a:solidFill>
@@ -9568,7 +10324,7 @@
                 <a:ea typeface="Times New Roman" pitchFamily="34" charset="-122"/>
                 <a:cs typeface="Times New Roman" pitchFamily="34" charset="-120"/>
               </a:rPr>
-              <a:t>total_drop = drop_retrain + retrain_gap</a:t>
+              <a:t>Shorthand: score(S) = spread(S)</a:t>
             </a:r>
             <a:endParaRPr lang="en-US" sz="1220" dirty="0"/>
           </a:p>
@@ -9583,11 +10339,11 @@
         <p:spPr>
           <a:xfrm>
             <a:off x="5943600" y="1325880"/>
-            <a:ext cx="2542032" cy="2011680"/>
+            <a:ext cx="2487168" cy="2029968"/>
           </a:xfrm>
           <a:prstGeom prst="roundRect">
             <a:avLst>
-              <a:gd name="adj" fmla="val 2273"/>
+              <a:gd name="adj" fmla="val 2252"/>
             </a:avLst>
           </a:prstGeom>
           <a:solidFill>
@@ -9610,7 +10366,7 @@
         <p:spPr>
           <a:xfrm>
             <a:off x="6080760" y="1417320"/>
-            <a:ext cx="2267712" cy="182880"/>
+            <a:ext cx="2212848" cy="182880"/>
           </a:xfrm>
           <a:prstGeom prst="rect">
             <a:avLst/>
@@ -9634,7 +10390,7 @@
                 <a:ea typeface="Times New Roman" pitchFamily="34" charset="-122"/>
                 <a:cs typeface="Times New Roman" pitchFamily="34" charset="-120"/>
               </a:rPr>
-              <a:t>Collateral</a:t>
+              <a:t>Hybrid</a:t>
             </a:r>
             <a:endParaRPr lang="en-US" sz="1700" dirty="0"/>
           </a:p>
@@ -9649,7 +10405,7 @@
         <p:spPr>
           <a:xfrm>
             <a:off x="6080760" y="1664208"/>
-            <a:ext cx="2267712" cy="1581912"/>
+            <a:ext cx="2212848" cy="1600200"/>
           </a:xfrm>
           <a:prstGeom prst="rect">
             <a:avLst/>
@@ -9675,7 +10431,7 @@
                 <a:ea typeface="Times New Roman" pitchFamily="34" charset="-122"/>
                 <a:cs typeface="Times New Roman" pitchFamily="34" charset="-120"/>
               </a:rPr>
-              <a:t>fraction_flipped</a:t>
+              <a:t>Combine model-side influence with topology-side spread to search for stronger targets.</a:t>
             </a:r>
             <a:endParaRPr lang="en-US" sz="1220" dirty="0"/>
           </a:p>
@@ -9683,6 +10439,12 @@
             <a:pPr indent="0" marL="0">
               <a:buNone/>
             </a:pPr>
+            <a:endParaRPr lang="en-US" sz="1220" dirty="0"/>
+          </a:p>
+          <a:p>
+            <a:pPr indent="0" marL="0">
+              <a:buNone/>
+            </a:pPr>
             <a:r>
               <a:rPr lang="en-US" sz="1220" dirty="0">
                 <a:solidFill>
@@ -9692,33 +10454,10 @@
                 <a:ea typeface="Times New Roman" pitchFamily="34" charset="-122"/>
                 <a:cs typeface="Times New Roman" pitchFamily="34" charset="-120"/>
               </a:rPr>
-              <a:t>mean_pred_shift</a:t>
+              <a:t>Shorthand: score(v) = α·z_IF(v) + (1-α)·z_IM(v)</a:t>
             </a:r>
             <a:endParaRPr lang="en-US" sz="1220" dirty="0"/>
           </a:p>
-          <a:p>
-            <a:pPr indent="0" marL="0">
-              <a:buNone/>
-            </a:pPr>
-            <a:endParaRPr lang="en-US" sz="1220" dirty="0"/>
-          </a:p>
-          <a:p>
-            <a:pPr indent="0" marL="0">
-              <a:buNone/>
-            </a:pPr>
-            <a:r>
-              <a:rPr lang="en-US" sz="1220" dirty="0">
-                <a:solidFill>
-                  <a:srgbClr val="1E2630"/>
-                </a:solidFill>
-                <a:latin typeface="Times New Roman" pitchFamily="34" charset="0"/>
-                <a:ea typeface="Times New Roman" pitchFamily="34" charset="-122"/>
-                <a:cs typeface="Times New Roman" pitchFamily="34" charset="-120"/>
-              </a:rPr>
-              <a:t>These show how strongly retained nodes are disturbed.</a:t>
-            </a:r>
-            <a:endParaRPr lang="en-US" sz="1220" dirty="0"/>
-          </a:p>
         </p:txBody>
       </p:sp>
       <p:sp>
@@ -9729,12 +10468,12 @@
         </p:nvSpPr>
         <p:spPr>
           <a:xfrm>
-            <a:off x="987552" y="3785616"/>
-            <a:ext cx="7095744" cy="768096"/>
+            <a:off x="1078992" y="3803904"/>
+            <a:ext cx="6912864" cy="694944"/>
           </a:xfrm>
           <a:prstGeom prst="roundRect">
             <a:avLst>
-              <a:gd name="adj" fmla="val 5952"/>
+              <a:gd name="adj" fmla="val 6579"/>
             </a:avLst>
           </a:prstGeom>
           <a:solidFill>
@@ -9756,8 +10495,8 @@
         </p:nvSpPr>
         <p:spPr>
           <a:xfrm>
-            <a:off x="1124712" y="3877056"/>
-            <a:ext cx="6821424" cy="182880"/>
+            <a:off x="1216152" y="3895344"/>
+            <a:ext cx="6638544" cy="182880"/>
           </a:xfrm>
           <a:prstGeom prst="rect">
             <a:avLst/>
@@ -9795,8 +10534,8 @@
         </p:nvSpPr>
         <p:spPr>
           <a:xfrm>
-            <a:off x="1124712" y="4123944"/>
-            <a:ext cx="6821424" cy="338328"/>
+            <a:off x="1216152" y="4142232"/>
+            <a:ext cx="6638544" cy="265176"/>
           </a:xfrm>
           <a:prstGeom prst="rect">
             <a:avLst/>
@@ -9822,7 +10561,7 @@
                 <a:ea typeface="Times New Roman" pitchFamily="34" charset="-122"/>
                 <a:cs typeface="Times New Roman" pitchFamily="34" charset="-120"/>
               </a:rPr>
-              <a:t>First trigger each method with a tiny random deletion, k=5, and use that post-unlearning F1 as the reference point. Then compare stronger attacks against that baseline; retrain_gap and collateral metrics explain why the utility changes appear.</a:t>
+              <a:t>Read these formulas only as intuition. The benchmark compares attacker logics: model-aware selection, graph-structural selection, and a hybrid of the two.</a:t>
             </a:r>
             <a:endParaRPr lang="en-US" sz="1220" dirty="0"/>
           </a:p>
@@ -9839,6 +10578,774 @@
 <file path=ppt/slides/slide7.xml><?xml version="1.0" encoding="utf-8"?>
 <p:sld xmlns:a="http://schemas.openxmlformats.org/drawingml/2006/main" xmlns:r="http://schemas.openxmlformats.org/officeDocument/2006/relationships" xmlns:p="http://schemas.openxmlformats.org/presentationml/2006/main">
   <p:cSld name="Slide 7">
+    <p:bg>
+      <p:bgPr>
+        <a:solidFill>
+          <a:srgbClr val="F7F5F1"/>
+        </a:solidFill>
+      </p:bgPr>
+    </p:bg>
+    <p:spTree>
+      <p:nvGrpSpPr>
+        <p:cNvPr id="1" name=""/>
+        <p:cNvGrpSpPr/>
+        <p:nvPr/>
+      </p:nvGrpSpPr>
+      <p:grpSpPr>
+        <a:xfrm>
+          <a:off x="0" y="0"/>
+          <a:ext cx="0" cy="0"/>
+          <a:chOff x="0" y="0"/>
+          <a:chExt cx="0" cy="0"/>
+        </a:xfrm>
+      </p:grpSpPr>
+      <p:sp>
+        <p:nvSpPr>
+          <p:cNvPr id="2" name="Shape 0"/>
+          <p:cNvSpPr/>
+          <p:nvPr/>
+        </p:nvSpPr>
+        <p:spPr>
+          <a:xfrm>
+            <a:off x="0" y="0"/>
+            <a:ext cx="9144000" cy="530352"/>
+          </a:xfrm>
+          <a:prstGeom prst="rect">
+            <a:avLst/>
+          </a:prstGeom>
+          <a:solidFill>
+            <a:srgbClr val="223A5E"/>
+          </a:solidFill>
+          <a:ln w="12700">
+            <a:solidFill>
+              <a:srgbClr val="223A5E">
+                <a:alpha val="0"/>
+              </a:srgbClr>
+            </a:solidFill>
+            <a:prstDash val="solid"/>
+          </a:ln>
+        </p:spPr>
+      </p:sp>
+      <p:sp>
+        <p:nvSpPr>
+          <p:cNvPr id="3" name="Text 1"/>
+          <p:cNvSpPr/>
+          <p:nvPr/>
+        </p:nvSpPr>
+        <p:spPr>
+          <a:xfrm>
+            <a:off x="502920" y="100584"/>
+            <a:ext cx="6583680" cy="219456"/>
+          </a:xfrm>
+          <a:prstGeom prst="rect">
+            <a:avLst/>
+          </a:prstGeom>
+          <a:noFill/>
+          <a:ln/>
+        </p:spPr>
+        <p:txBody>
+          <a:bodyPr wrap="square" lIns="0" tIns="0" rIns="0" bIns="0" rtlCol="0" anchor="ctr"/>
+          <a:lstStyle/>
+          <a:p>
+            <a:pPr indent="0" marL="0">
+              <a:buNone/>
+            </a:pPr>
+            <a:r>
+              <a:rPr lang="en-US" sz="2400" b="1" dirty="0">
+                <a:solidFill>
+                  <a:srgbClr val="FFFFFF"/>
+                </a:solidFill>
+                <a:latin typeface="Times New Roman" pitchFamily="34" charset="0"/>
+                <a:ea typeface="Times New Roman" pitchFamily="34" charset="-122"/>
+                <a:cs typeface="Times New Roman" pitchFamily="34" charset="-120"/>
+              </a:rPr>
+              <a:t>Metrics Framework</a:t>
+            </a:r>
+            <a:endParaRPr lang="en-US" sz="2400" dirty="0"/>
+          </a:p>
+        </p:txBody>
+      </p:sp>
+      <p:sp>
+        <p:nvSpPr>
+          <p:cNvPr id="4" name="Text 2"/>
+          <p:cNvSpPr/>
+          <p:nvPr/>
+        </p:nvSpPr>
+        <p:spPr>
+          <a:xfrm>
+            <a:off x="7955280" y="118872"/>
+            <a:ext cx="640080" cy="137160"/>
+          </a:xfrm>
+          <a:prstGeom prst="rect">
+            <a:avLst/>
+          </a:prstGeom>
+          <a:noFill/>
+          <a:ln/>
+        </p:spPr>
+        <p:txBody>
+          <a:bodyPr wrap="square" lIns="0" tIns="0" rIns="0" bIns="0" rtlCol="0" anchor="ctr"/>
+          <a:lstStyle/>
+          <a:p>
+            <a:pPr algn="r" indent="0" marL="0">
+              <a:buNone/>
+            </a:pPr>
+            <a:r>
+              <a:rPr lang="en-US" sz="1000" dirty="0">
+                <a:solidFill>
+                  <a:srgbClr val="F7F5F1"/>
+                </a:solidFill>
+                <a:latin typeface="Times New Roman" pitchFamily="34" charset="0"/>
+                <a:ea typeface="Times New Roman" pitchFamily="34" charset="-122"/>
+                <a:cs typeface="Times New Roman" pitchFamily="34" charset="-120"/>
+              </a:rPr>
+              <a:t>07 / 15</a:t>
+            </a:r>
+            <a:endParaRPr lang="en-US" sz="1000" dirty="0"/>
+          </a:p>
+        </p:txBody>
+      </p:sp>
+      <p:sp>
+        <p:nvSpPr>
+          <p:cNvPr id="5" name="Text 3"/>
+          <p:cNvSpPr/>
+          <p:nvPr/>
+        </p:nvSpPr>
+        <p:spPr>
+          <a:xfrm>
+            <a:off x="502920" y="4736592"/>
+            <a:ext cx="2743200" cy="137160"/>
+          </a:xfrm>
+          <a:prstGeom prst="rect">
+            <a:avLst/>
+          </a:prstGeom>
+          <a:noFill/>
+          <a:ln/>
+        </p:spPr>
+        <p:txBody>
+          <a:bodyPr wrap="square" lIns="0" tIns="0" rIns="0" bIns="0" rtlCol="0" anchor="ctr"/>
+          <a:lstStyle/>
+          <a:p>
+            <a:pPr indent="0" marL="0">
+              <a:buNone/>
+            </a:pPr>
+            <a:r>
+              <a:rPr lang="en-US" sz="900" dirty="0">
+                <a:solidFill>
+                  <a:srgbClr val="667085"/>
+                </a:solidFill>
+                <a:latin typeface="Times New Roman" pitchFamily="34" charset="0"/>
+                <a:ea typeface="Times New Roman" pitchFamily="34" charset="-122"/>
+                <a:cs typeface="Times New Roman" pitchFamily="34" charset="-120"/>
+              </a:rPr>
+              <a:t>EE5003 MSc Project | Liu Chengyu</a:t>
+            </a:r>
+            <a:endParaRPr lang="en-US" sz="900" dirty="0"/>
+          </a:p>
+        </p:txBody>
+      </p:sp>
+      <p:sp>
+        <p:nvSpPr>
+          <p:cNvPr id="6" name="Text 4"/>
+          <p:cNvSpPr/>
+          <p:nvPr/>
+        </p:nvSpPr>
+        <p:spPr>
+          <a:xfrm>
+            <a:off x="5577840" y="4736592"/>
+            <a:ext cx="3017520" cy="137160"/>
+          </a:xfrm>
+          <a:prstGeom prst="rect">
+            <a:avLst/>
+          </a:prstGeom>
+          <a:noFill/>
+          <a:ln/>
+        </p:spPr>
+        <p:txBody>
+          <a:bodyPr wrap="square" lIns="0" tIns="0" rIns="0" bIns="0" rtlCol="0" anchor="ctr"/>
+          <a:lstStyle/>
+          <a:p>
+            <a:pPr algn="r" indent="0" marL="0">
+              <a:buNone/>
+            </a:pPr>
+            <a:r>
+              <a:rPr lang="en-US" sz="900" dirty="0">
+                <a:solidFill>
+                  <a:srgbClr val="667085"/>
+                </a:solidFill>
+                <a:latin typeface="Times New Roman" pitchFamily="34" charset="0"/>
+                <a:ea typeface="Times New Roman" pitchFamily="34" charset="-122"/>
+                <a:cs typeface="Times New Roman" pitchFamily="34" charset="-120"/>
+              </a:rPr>
+              <a:t>Approximate Graph Unlearning Audit</a:t>
+            </a:r>
+            <a:endParaRPr lang="en-US" sz="900" dirty="0"/>
+          </a:p>
+        </p:txBody>
+      </p:sp>
+      <p:sp>
+        <p:nvSpPr>
+          <p:cNvPr id="7" name="Text 5"/>
+          <p:cNvSpPr/>
+          <p:nvPr/>
+        </p:nvSpPr>
+        <p:spPr>
+          <a:xfrm>
+            <a:off x="621792" y="768096"/>
+            <a:ext cx="7406640" cy="256032"/>
+          </a:xfrm>
+          <a:prstGeom prst="rect">
+            <a:avLst/>
+          </a:prstGeom>
+          <a:noFill/>
+          <a:ln/>
+        </p:spPr>
+        <p:txBody>
+          <a:bodyPr wrap="square" lIns="0" tIns="0" rIns="0" bIns="0" rtlCol="0" anchor="ctr"/>
+          <a:lstStyle/>
+          <a:p>
+            <a:pPr indent="0" marL="0">
+              <a:buNone/>
+            </a:pPr>
+            <a:r>
+              <a:rPr lang="en-US" sz="1620" b="1" dirty="0">
+                <a:solidFill>
+                  <a:srgbClr val="223A5E"/>
+                </a:solidFill>
+                <a:latin typeface="Times New Roman" pitchFamily="34" charset="0"/>
+                <a:ea typeface="Times New Roman" pitchFamily="34" charset="-122"/>
+                <a:cs typeface="Times New Roman" pitchFamily="34" charset="-120"/>
+              </a:rPr>
+              <a:t>Three metrics answer three different questions: how much extra damage appears beyond a k=5 baseline, where it comes from, and how far it spreads.</a:t>
+            </a:r>
+            <a:endParaRPr lang="en-US" sz="1620" dirty="0"/>
+          </a:p>
+        </p:txBody>
+      </p:sp>
+      <p:sp>
+        <p:nvSpPr>
+          <p:cNvPr id="8" name="Shape 6"/>
+          <p:cNvSpPr/>
+          <p:nvPr/>
+        </p:nvSpPr>
+        <p:spPr>
+          <a:xfrm>
+            <a:off x="713232" y="1325880"/>
+            <a:ext cx="2542032" cy="2011680"/>
+          </a:xfrm>
+          <a:prstGeom prst="roundRect">
+            <a:avLst>
+              <a:gd name="adj" fmla="val 2273"/>
+            </a:avLst>
+          </a:prstGeom>
+          <a:solidFill>
+            <a:srgbClr val="FFFFFF"/>
+          </a:solidFill>
+          <a:ln w="13970">
+            <a:solidFill>
+              <a:srgbClr val="D9DEE7"/>
+            </a:solidFill>
+            <a:prstDash val="solid"/>
+          </a:ln>
+        </p:spPr>
+      </p:sp>
+      <p:sp>
+        <p:nvSpPr>
+          <p:cNvPr id="9" name="Text 7"/>
+          <p:cNvSpPr/>
+          <p:nvPr/>
+        </p:nvSpPr>
+        <p:spPr>
+          <a:xfrm>
+            <a:off x="850392" y="1417320"/>
+            <a:ext cx="2267712" cy="182880"/>
+          </a:xfrm>
+          <a:prstGeom prst="rect">
+            <a:avLst/>
+          </a:prstGeom>
+          <a:noFill/>
+          <a:ln/>
+        </p:spPr>
+        <p:txBody>
+          <a:bodyPr wrap="square" lIns="0" tIns="0" rIns="0" bIns="0" rtlCol="0" anchor="ctr"/>
+          <a:lstStyle/>
+          <a:p>
+            <a:pPr indent="0" marL="0">
+              <a:buNone/>
+            </a:pPr>
+            <a:r>
+              <a:rPr lang="en-US" sz="1700" b="1" dirty="0">
+                <a:solidFill>
+                  <a:srgbClr val="223A5E"/>
+                </a:solidFill>
+                <a:latin typeface="Times New Roman" pitchFamily="34" charset="0"/>
+                <a:ea typeface="Times New Roman" pitchFamily="34" charset="-122"/>
+                <a:cs typeface="Times New Roman" pitchFamily="34" charset="-120"/>
+              </a:rPr>
+              <a:t>Utility</a:t>
+            </a:r>
+            <a:endParaRPr lang="en-US" sz="1700" dirty="0"/>
+          </a:p>
+        </p:txBody>
+      </p:sp>
+      <p:sp>
+        <p:nvSpPr>
+          <p:cNvPr id="10" name="Text 8"/>
+          <p:cNvSpPr/>
+          <p:nvPr/>
+        </p:nvSpPr>
+        <p:spPr>
+          <a:xfrm>
+            <a:off x="850392" y="1664208"/>
+            <a:ext cx="2267712" cy="1581912"/>
+          </a:xfrm>
+          <a:prstGeom prst="rect">
+            <a:avLst/>
+          </a:prstGeom>
+          <a:noFill/>
+          <a:ln/>
+        </p:spPr>
+        <p:txBody>
+          <a:bodyPr wrap="square" lIns="0" tIns="0" rIns="0" bIns="0" rtlCol="0" anchor="ctr">
+            <a:normAutofit/>
+          </a:bodyPr>
+          <a:lstStyle/>
+          <a:p>
+            <a:pPr indent="0" marL="0">
+              <a:buNone/>
+            </a:pPr>
+            <a:r>
+              <a:rPr lang="en-US" sz="1220" dirty="0">
+                <a:solidFill>
+                  <a:srgbClr val="1E2630"/>
+                </a:solidFill>
+                <a:latin typeface="Times New Roman" pitchFamily="34" charset="0"/>
+                <a:ea typeface="Times New Roman" pitchFamily="34" charset="-122"/>
+                <a:cs typeface="Times New Roman" pitchFamily="34" charset="-120"/>
+              </a:rPr>
+              <a:t>relative_f1_drop = F1_after(k=5, random) - F1_after(attack)</a:t>
+            </a:r>
+            <a:endParaRPr lang="en-US" sz="1220" dirty="0"/>
+          </a:p>
+          <a:p>
+            <a:pPr indent="0" marL="0">
+              <a:buNone/>
+            </a:pPr>
+            <a:endParaRPr lang="en-US" sz="1220" dirty="0"/>
+          </a:p>
+          <a:p>
+            <a:pPr indent="0" marL="0">
+              <a:buNone/>
+            </a:pPr>
+            <a:r>
+              <a:rPr lang="en-US" sz="1220" dirty="0">
+                <a:solidFill>
+                  <a:srgbClr val="1E2630"/>
+                </a:solidFill>
+                <a:latin typeface="Times New Roman" pitchFamily="34" charset="0"/>
+                <a:ea typeface="Times New Roman" pitchFamily="34" charset="-122"/>
+                <a:cs typeface="Times New Roman" pitchFamily="34" charset="-120"/>
+              </a:rPr>
+              <a:t>Use a tiny random-trigger baseline because raw drop can mislead on shard-based methods.</a:t>
+            </a:r>
+            <a:endParaRPr lang="en-US" sz="1220" dirty="0"/>
+          </a:p>
+        </p:txBody>
+      </p:sp>
+      <p:sp>
+        <p:nvSpPr>
+          <p:cNvPr id="11" name="Shape 9"/>
+          <p:cNvSpPr/>
+          <p:nvPr/>
+        </p:nvSpPr>
+        <p:spPr>
+          <a:xfrm>
+            <a:off x="3328416" y="1325880"/>
+            <a:ext cx="2542032" cy="2011680"/>
+          </a:xfrm>
+          <a:prstGeom prst="roundRect">
+            <a:avLst>
+              <a:gd name="adj" fmla="val 2273"/>
+            </a:avLst>
+          </a:prstGeom>
+          <a:solidFill>
+            <a:srgbClr val="E8EEF5"/>
+          </a:solidFill>
+          <a:ln w="13970">
+            <a:solidFill>
+              <a:srgbClr val="E8EEF5"/>
+            </a:solidFill>
+            <a:prstDash val="solid"/>
+          </a:ln>
+        </p:spPr>
+      </p:sp>
+      <p:sp>
+        <p:nvSpPr>
+          <p:cNvPr id="12" name="Text 10"/>
+          <p:cNvSpPr/>
+          <p:nvPr/>
+        </p:nvSpPr>
+        <p:spPr>
+          <a:xfrm>
+            <a:off x="3465576" y="1417320"/>
+            <a:ext cx="2267712" cy="182880"/>
+          </a:xfrm>
+          <a:prstGeom prst="rect">
+            <a:avLst/>
+          </a:prstGeom>
+          <a:noFill/>
+          <a:ln/>
+        </p:spPr>
+        <p:txBody>
+          <a:bodyPr wrap="square" lIns="0" tIns="0" rIns="0" bIns="0" rtlCol="0" anchor="ctr"/>
+          <a:lstStyle/>
+          <a:p>
+            <a:pPr indent="0" marL="0">
+              <a:buNone/>
+            </a:pPr>
+            <a:r>
+              <a:rPr lang="en-US" sz="1700" b="1" dirty="0">
+                <a:solidFill>
+                  <a:srgbClr val="223A5E"/>
+                </a:solidFill>
+                <a:latin typeface="Times New Roman" pitchFamily="34" charset="0"/>
+                <a:ea typeface="Times New Roman" pitchFamily="34" charset="-122"/>
+                <a:cs typeface="Times New Roman" pitchFamily="34" charset="-120"/>
+              </a:rPr>
+              <a:t>Fidelity</a:t>
+            </a:r>
+            <a:endParaRPr lang="en-US" sz="1700" dirty="0"/>
+          </a:p>
+        </p:txBody>
+      </p:sp>
+      <p:sp>
+        <p:nvSpPr>
+          <p:cNvPr id="13" name="Text 11"/>
+          <p:cNvSpPr/>
+          <p:nvPr/>
+        </p:nvSpPr>
+        <p:spPr>
+          <a:xfrm>
+            <a:off x="3465576" y="1664208"/>
+            <a:ext cx="2267712" cy="1581912"/>
+          </a:xfrm>
+          <a:prstGeom prst="rect">
+            <a:avLst/>
+          </a:prstGeom>
+          <a:noFill/>
+          <a:ln/>
+        </p:spPr>
+        <p:txBody>
+          <a:bodyPr wrap="square" lIns="0" tIns="0" rIns="0" bIns="0" rtlCol="0" anchor="ctr">
+            <a:normAutofit/>
+          </a:bodyPr>
+          <a:lstStyle/>
+          <a:p>
+            <a:pPr indent="0" marL="0">
+              <a:buNone/>
+            </a:pPr>
+            <a:r>
+              <a:rPr lang="en-US" sz="1220" dirty="0">
+                <a:solidFill>
+                  <a:srgbClr val="1E2630"/>
+                </a:solidFill>
+                <a:latin typeface="Times New Roman" pitchFamily="34" charset="0"/>
+                <a:ea typeface="Times New Roman" pitchFamily="34" charset="-122"/>
+                <a:cs typeface="Times New Roman" pitchFamily="34" charset="-120"/>
+              </a:rPr>
+              <a:t>retrain_gap = F1_retrain - F1_unlearn</a:t>
+            </a:r>
+            <a:endParaRPr lang="en-US" sz="1220" dirty="0"/>
+          </a:p>
+          <a:p>
+            <a:pPr indent="0" marL="0">
+              <a:buNone/>
+            </a:pPr>
+            <a:endParaRPr lang="en-US" sz="1220" dirty="0"/>
+          </a:p>
+          <a:p>
+            <a:pPr indent="0" marL="0">
+              <a:buNone/>
+            </a:pPr>
+            <a:r>
+              <a:rPr lang="en-US" sz="1220" dirty="0">
+                <a:solidFill>
+                  <a:srgbClr val="1E2630"/>
+                </a:solidFill>
+                <a:latin typeface="Times New Roman" pitchFamily="34" charset="0"/>
+                <a:ea typeface="Times New Roman" pitchFamily="34" charset="-122"/>
+                <a:cs typeface="Times New Roman" pitchFamily="34" charset="-120"/>
+              </a:rPr>
+              <a:t>total_drop = drop_retrain + retrain_gap</a:t>
+            </a:r>
+            <a:endParaRPr lang="en-US" sz="1220" dirty="0"/>
+          </a:p>
+        </p:txBody>
+      </p:sp>
+      <p:sp>
+        <p:nvSpPr>
+          <p:cNvPr id="14" name="Shape 12"/>
+          <p:cNvSpPr/>
+          <p:nvPr/>
+        </p:nvSpPr>
+        <p:spPr>
+          <a:xfrm>
+            <a:off x="5943600" y="1325880"/>
+            <a:ext cx="2542032" cy="2011680"/>
+          </a:xfrm>
+          <a:prstGeom prst="roundRect">
+            <a:avLst>
+              <a:gd name="adj" fmla="val 2273"/>
+            </a:avLst>
+          </a:prstGeom>
+          <a:solidFill>
+            <a:srgbClr val="FFFFFF"/>
+          </a:solidFill>
+          <a:ln w="13970">
+            <a:solidFill>
+              <a:srgbClr val="D9DEE7"/>
+            </a:solidFill>
+            <a:prstDash val="solid"/>
+          </a:ln>
+        </p:spPr>
+      </p:sp>
+      <p:sp>
+        <p:nvSpPr>
+          <p:cNvPr id="15" name="Text 13"/>
+          <p:cNvSpPr/>
+          <p:nvPr/>
+        </p:nvSpPr>
+        <p:spPr>
+          <a:xfrm>
+            <a:off x="6080760" y="1417320"/>
+            <a:ext cx="2267712" cy="182880"/>
+          </a:xfrm>
+          <a:prstGeom prst="rect">
+            <a:avLst/>
+          </a:prstGeom>
+          <a:noFill/>
+          <a:ln/>
+        </p:spPr>
+        <p:txBody>
+          <a:bodyPr wrap="square" lIns="0" tIns="0" rIns="0" bIns="0" rtlCol="0" anchor="ctr"/>
+          <a:lstStyle/>
+          <a:p>
+            <a:pPr indent="0" marL="0">
+              <a:buNone/>
+            </a:pPr>
+            <a:r>
+              <a:rPr lang="en-US" sz="1700" b="1" dirty="0">
+                <a:solidFill>
+                  <a:srgbClr val="223A5E"/>
+                </a:solidFill>
+                <a:latin typeface="Times New Roman" pitchFamily="34" charset="0"/>
+                <a:ea typeface="Times New Roman" pitchFamily="34" charset="-122"/>
+                <a:cs typeface="Times New Roman" pitchFamily="34" charset="-120"/>
+              </a:rPr>
+              <a:t>Collateral</a:t>
+            </a:r>
+            <a:endParaRPr lang="en-US" sz="1700" dirty="0"/>
+          </a:p>
+        </p:txBody>
+      </p:sp>
+      <p:sp>
+        <p:nvSpPr>
+          <p:cNvPr id="16" name="Text 14"/>
+          <p:cNvSpPr/>
+          <p:nvPr/>
+        </p:nvSpPr>
+        <p:spPr>
+          <a:xfrm>
+            <a:off x="6080760" y="1664208"/>
+            <a:ext cx="2267712" cy="1581912"/>
+          </a:xfrm>
+          <a:prstGeom prst="rect">
+            <a:avLst/>
+          </a:prstGeom>
+          <a:noFill/>
+          <a:ln/>
+        </p:spPr>
+        <p:txBody>
+          <a:bodyPr wrap="square" lIns="0" tIns="0" rIns="0" bIns="0" rtlCol="0" anchor="ctr">
+            <a:normAutofit/>
+          </a:bodyPr>
+          <a:lstStyle/>
+          <a:p>
+            <a:pPr indent="0" marL="0">
+              <a:buNone/>
+            </a:pPr>
+            <a:r>
+              <a:rPr lang="en-US" sz="1220" dirty="0">
+                <a:solidFill>
+                  <a:srgbClr val="1E2630"/>
+                </a:solidFill>
+                <a:latin typeface="Times New Roman" pitchFamily="34" charset="0"/>
+                <a:ea typeface="Times New Roman" pitchFamily="34" charset="-122"/>
+                <a:cs typeface="Times New Roman" pitchFamily="34" charset="-120"/>
+              </a:rPr>
+              <a:t>fraction_flipped</a:t>
+            </a:r>
+            <a:endParaRPr lang="en-US" sz="1220" dirty="0"/>
+          </a:p>
+          <a:p>
+            <a:pPr indent="0" marL="0">
+              <a:buNone/>
+            </a:pPr>
+            <a:r>
+              <a:rPr lang="en-US" sz="1220" dirty="0">
+                <a:solidFill>
+                  <a:srgbClr val="1E2630"/>
+                </a:solidFill>
+                <a:latin typeface="Times New Roman" pitchFamily="34" charset="0"/>
+                <a:ea typeface="Times New Roman" pitchFamily="34" charset="-122"/>
+                <a:cs typeface="Times New Roman" pitchFamily="34" charset="-120"/>
+              </a:rPr>
+              <a:t>mean_pred_shift</a:t>
+            </a:r>
+            <a:endParaRPr lang="en-US" sz="1220" dirty="0"/>
+          </a:p>
+          <a:p>
+            <a:pPr indent="0" marL="0">
+              <a:buNone/>
+            </a:pPr>
+            <a:endParaRPr lang="en-US" sz="1220" dirty="0"/>
+          </a:p>
+          <a:p>
+            <a:pPr indent="0" marL="0">
+              <a:buNone/>
+            </a:pPr>
+            <a:r>
+              <a:rPr lang="en-US" sz="1220" dirty="0">
+                <a:solidFill>
+                  <a:srgbClr val="1E2630"/>
+                </a:solidFill>
+                <a:latin typeface="Times New Roman" pitchFamily="34" charset="0"/>
+                <a:ea typeface="Times New Roman" pitchFamily="34" charset="-122"/>
+                <a:cs typeface="Times New Roman" pitchFamily="34" charset="-120"/>
+              </a:rPr>
+              <a:t>These show how strongly retained nodes are disturbed.</a:t>
+            </a:r>
+            <a:endParaRPr lang="en-US" sz="1220" dirty="0"/>
+          </a:p>
+        </p:txBody>
+      </p:sp>
+      <p:sp>
+        <p:nvSpPr>
+          <p:cNvPr id="17" name="Shape 15"/>
+          <p:cNvSpPr/>
+          <p:nvPr/>
+        </p:nvSpPr>
+        <p:spPr>
+          <a:xfrm>
+            <a:off x="987552" y="3785616"/>
+            <a:ext cx="7095744" cy="768096"/>
+          </a:xfrm>
+          <a:prstGeom prst="roundRect">
+            <a:avLst>
+              <a:gd name="adj" fmla="val 5952"/>
+            </a:avLst>
+          </a:prstGeom>
+          <a:solidFill>
+            <a:srgbClr val="223A5E"/>
+          </a:solidFill>
+          <a:ln w="13970">
+            <a:solidFill>
+              <a:srgbClr val="223A5E"/>
+            </a:solidFill>
+            <a:prstDash val="solid"/>
+          </a:ln>
+        </p:spPr>
+      </p:sp>
+      <p:sp>
+        <p:nvSpPr>
+          <p:cNvPr id="18" name="Text 16"/>
+          <p:cNvSpPr/>
+          <p:nvPr/>
+        </p:nvSpPr>
+        <p:spPr>
+          <a:xfrm>
+            <a:off x="1124712" y="3877056"/>
+            <a:ext cx="6821424" cy="182880"/>
+          </a:xfrm>
+          <a:prstGeom prst="rect">
+            <a:avLst/>
+          </a:prstGeom>
+          <a:noFill/>
+          <a:ln/>
+        </p:spPr>
+        <p:txBody>
+          <a:bodyPr wrap="square" lIns="0" tIns="0" rIns="0" bIns="0" rtlCol="0" anchor="ctr"/>
+          <a:lstStyle/>
+          <a:p>
+            <a:pPr indent="0" marL="0">
+              <a:buNone/>
+            </a:pPr>
+            <a:r>
+              <a:rPr lang="en-US" sz="1700" b="1" dirty="0">
+                <a:solidFill>
+                  <a:srgbClr val="F7F5F1"/>
+                </a:solidFill>
+                <a:latin typeface="Times New Roman" pitchFamily="34" charset="0"/>
+                <a:ea typeface="Times New Roman" pitchFamily="34" charset="-122"/>
+                <a:cs typeface="Times New Roman" pitchFamily="34" charset="-120"/>
+              </a:rPr>
+              <a:t>Reading rule</a:t>
+            </a:r>
+            <a:endParaRPr lang="en-US" sz="1700" dirty="0"/>
+          </a:p>
+        </p:txBody>
+      </p:sp>
+      <p:sp>
+        <p:nvSpPr>
+          <p:cNvPr id="19" name="Text 17"/>
+          <p:cNvSpPr/>
+          <p:nvPr/>
+        </p:nvSpPr>
+        <p:spPr>
+          <a:xfrm>
+            <a:off x="1124712" y="4123944"/>
+            <a:ext cx="6821424" cy="338328"/>
+          </a:xfrm>
+          <a:prstGeom prst="rect">
+            <a:avLst/>
+          </a:prstGeom>
+          <a:noFill/>
+          <a:ln/>
+        </p:spPr>
+        <p:txBody>
+          <a:bodyPr wrap="square" lIns="0" tIns="0" rIns="0" bIns="0" rtlCol="0" anchor="ctr">
+            <a:normAutofit/>
+          </a:bodyPr>
+          <a:lstStyle/>
+          <a:p>
+            <a:pPr indent="0" marL="0">
+              <a:buNone/>
+            </a:pPr>
+            <a:r>
+              <a:rPr lang="en-US" sz="1220" dirty="0">
+                <a:solidFill>
+                  <a:srgbClr val="FFFFFF"/>
+                </a:solidFill>
+                <a:latin typeface="Times New Roman" pitchFamily="34" charset="0"/>
+                <a:ea typeface="Times New Roman" pitchFamily="34" charset="-122"/>
+                <a:cs typeface="Times New Roman" pitchFamily="34" charset="-120"/>
+              </a:rPr>
+              <a:t>First trigger each method with a tiny random deletion, k=5, and use that post-unlearning F1 as the reference point. Then compare stronger attacks against that baseline; retrain_gap and collateral metrics explain why the utility changes appear.</a:t>
+            </a:r>
+            <a:endParaRPr lang="en-US" sz="1220" dirty="0"/>
+          </a:p>
+        </p:txBody>
+      </p:sp>
+    </p:spTree>
+  </p:cSld>
+  <p:clrMapOvr>
+    <a:masterClrMapping/>
+  </p:clrMapOvr>
+</p:sld>
+</file>
+
+<file path=ppt/slides/slide8.xml><?xml version="1.0" encoding="utf-8"?>
+<p:sld xmlns:a="http://schemas.openxmlformats.org/drawingml/2006/main" xmlns:r="http://schemas.openxmlformats.org/officeDocument/2006/relationships" xmlns:p="http://schemas.openxmlformats.org/presentationml/2006/main">
+  <p:cSld name="Slide 8">
     <p:bg>
       <p:bgPr>
         <a:solidFill>
@@ -9920,7 +11427,7 @@
                 <a:ea typeface="Times New Roman" pitchFamily="34" charset="-122"/>
                 <a:cs typeface="Times New Roman" pitchFamily="34" charset="-120"/>
               </a:rPr>
-              <a:t>Main Finding: Vulnerability Spectrum</a:t>
+              <a:t>Main Finding: Family Spectrum</a:t>
             </a:r>
             <a:endParaRPr lang="en-US" sz="2400" dirty="0"/>
           </a:p>
@@ -9959,7 +11466,7 @@
                 <a:ea typeface="Times New Roman" pitchFamily="34" charset="-122"/>
                 <a:cs typeface="Times New Roman" pitchFamily="34" charset="-120"/>
               </a:rPr>
-              <a:t>07 / 14</a:t>
+              <a:t>08 / 15</a:t>
             </a:r>
             <a:endParaRPr lang="en-US" sz="1000" dirty="0"/>
           </a:p>
@@ -10060,7 +11567,7 @@
         <p:spPr>
           <a:xfrm>
             <a:off x="548640" y="914400"/>
-            <a:ext cx="5303520" cy="3383280"/>
+            <a:ext cx="4983480" cy="3154680"/>
           </a:xfrm>
           <a:prstGeom prst="rect">
             <a:avLst/>
@@ -10075,8 +11582,8 @@
         </p:nvSpPr>
         <p:spPr>
           <a:xfrm>
-            <a:off x="566928" y="4389120"/>
-            <a:ext cx="5257800" cy="146304"/>
+            <a:off x="566928" y="4187952"/>
+            <a:ext cx="4937760" cy="146304"/>
           </a:xfrm>
           <a:prstGeom prst="rect">
             <a:avLst/>
@@ -10114,12 +11621,12 @@
         </p:nvSpPr>
         <p:spPr>
           <a:xfrm>
-            <a:off x="6126480" y="932688"/>
-            <a:ext cx="2377440" cy="960120"/>
+            <a:off x="5650992" y="932688"/>
+            <a:ext cx="2788920" cy="914400"/>
           </a:xfrm>
           <a:prstGeom prst="roundRect">
             <a:avLst>
-              <a:gd name="adj" fmla="val 4762"/>
+              <a:gd name="adj" fmla="val 5000"/>
             </a:avLst>
           </a:prstGeom>
           <a:solidFill>
@@ -10141,8 +11648,8 @@
         </p:nvSpPr>
         <p:spPr>
           <a:xfrm>
-            <a:off x="6263640" y="1024128"/>
-            <a:ext cx="2103120" cy="182880"/>
+            <a:off x="5788152" y="1024128"/>
+            <a:ext cx="2514600" cy="182880"/>
           </a:xfrm>
           <a:prstGeom prst="rect">
             <a:avLst/>
@@ -10180,8 +11687,8 @@
         </p:nvSpPr>
         <p:spPr>
           <a:xfrm>
-            <a:off x="6263640" y="1271016"/>
-            <a:ext cx="2103120" cy="530352"/>
+            <a:off x="5788152" y="1271016"/>
+            <a:ext cx="2514600" cy="484632"/>
           </a:xfrm>
           <a:prstGeom prst="rect">
             <a:avLst/>
@@ -10207,7 +11714,7 @@
                 <a:ea typeface="Times New Roman" pitchFamily="34" charset="-122"/>
                 <a:cs typeface="Times New Roman" pitchFamily="34" charset="-120"/>
               </a:rPr>
-              <a:t>Relative_f1_drop reveals a clear family-level vulnerability spectrum rather than one shared failure pattern.</a:t>
+              <a:t>Relative_f1_drop reveals a family-level vulnerability spectrum rather than one shared failure pattern.</a:t>
             </a:r>
             <a:endParaRPr lang="en-US" sz="1220" dirty="0"/>
           </a:p>
@@ -10221,12 +11728,12 @@
         </p:nvSpPr>
         <p:spPr>
           <a:xfrm>
-            <a:off x="6144768" y="2057400"/>
-            <a:ext cx="2331720" cy="960120"/>
+            <a:off x="5650992" y="1993392"/>
+            <a:ext cx="2788920" cy="987552"/>
           </a:xfrm>
           <a:prstGeom prst="roundRect">
             <a:avLst>
-              <a:gd name="adj" fmla="val 4762"/>
+              <a:gd name="adj" fmla="val 4630"/>
             </a:avLst>
           </a:prstGeom>
           <a:solidFill>
@@ -10248,8 +11755,8 @@
         </p:nvSpPr>
         <p:spPr>
           <a:xfrm>
-            <a:off x="6281928" y="2148840"/>
-            <a:ext cx="2057400" cy="182880"/>
+            <a:off x="5788152" y="2084832"/>
+            <a:ext cx="2514600" cy="182880"/>
           </a:xfrm>
           <a:prstGeom prst="rect">
             <a:avLst/>
@@ -10273,7 +11780,7 @@
                 <a:ea typeface="Times New Roman" pitchFamily="34" charset="-122"/>
                 <a:cs typeface="Times New Roman" pitchFamily="34" charset="-120"/>
               </a:rPr>
-              <a:t>Readout</a:t>
+              <a:t>Family readout</a:t>
             </a:r>
             <a:endParaRPr lang="en-US" sz="1700" dirty="0"/>
           </a:p>
@@ -10287,8 +11794,8 @@
         </p:nvSpPr>
         <p:spPr>
           <a:xfrm>
-            <a:off x="6281928" y="2395728"/>
-            <a:ext cx="2057400" cy="530352"/>
+            <a:off x="5788152" y="2331720"/>
+            <a:ext cx="2514600" cy="557784"/>
           </a:xfrm>
           <a:prstGeom prst="rect">
             <a:avLst/>
@@ -10362,12 +11869,12 @@
         </p:nvSpPr>
         <p:spPr>
           <a:xfrm>
-            <a:off x="6144768" y="3255264"/>
-            <a:ext cx="2331720" cy="914400"/>
+            <a:off x="5650992" y="3163824"/>
+            <a:ext cx="2788920" cy="1078992"/>
           </a:xfrm>
           <a:prstGeom prst="roundRect">
             <a:avLst>
-              <a:gd name="adj" fmla="val 5000"/>
+              <a:gd name="adj" fmla="val 4237"/>
             </a:avLst>
           </a:prstGeom>
           <a:solidFill>
@@ -10389,8 +11896,8 @@
         </p:nvSpPr>
         <p:spPr>
           <a:xfrm>
-            <a:off x="6281928" y="3346704"/>
-            <a:ext cx="2057400" cy="182880"/>
+            <a:off x="5788152" y="3255264"/>
+            <a:ext cx="2514600" cy="182880"/>
           </a:xfrm>
           <a:prstGeom prst="rect">
             <a:avLst/>
@@ -10414,7 +11921,7 @@
                 <a:ea typeface="Times New Roman" pitchFamily="34" charset="-122"/>
                 <a:cs typeface="Times New Roman" pitchFamily="34" charset="-120"/>
               </a:rPr>
-              <a:t>Why this metric?</a:t>
+              <a:t>Strategy readout</a:t>
             </a:r>
             <a:endParaRPr lang="en-US" sz="1700" dirty="0"/>
           </a:p>
@@ -10428,8 +11935,8 @@
         </p:nvSpPr>
         <p:spPr>
           <a:xfrm>
-            <a:off x="6281928" y="3593592"/>
-            <a:ext cx="2057400" cy="484632"/>
+            <a:off x="5788152" y="3502152"/>
+            <a:ext cx="2514600" cy="649224"/>
           </a:xfrm>
           <a:prstGeom prst="rect">
             <a:avLst/>
@@ -10455,7 +11962,7 @@
                 <a:ea typeface="Times New Roman" pitchFamily="34" charset="-122"/>
                 <a:cs typeface="Times New Roman" pitchFamily="34" charset="-120"/>
               </a:rPr>
-              <a:t>raw drop can mislead on shard-based methods, so a k=5 post-unlearning baseline is the cleaner cross-family lens.</a:t>
+              <a:t>Across the same figure family and the companion strategy view, the strongest extra damage still concentrates on GNNDelete rather than spreading evenly across methods.</a:t>
             </a:r>
             <a:endParaRPr lang="en-US" sz="1220" dirty="0"/>
           </a:p>
@@ -10469,9 +11976,9 @@
 </p:sld>
 </file>
 
-<file path=ppt/slides/slide8.xml><?xml version="1.0" encoding="utf-8"?>
+<file path=ppt/slides/slide9.xml><?xml version="1.0" encoding="utf-8"?>
 <p:sld xmlns:a="http://schemas.openxmlformats.org/drawingml/2006/main" xmlns:r="http://schemas.openxmlformats.org/officeDocument/2006/relationships" xmlns:p="http://schemas.openxmlformats.org/presentationml/2006/main">
-  <p:cSld name="Slide 8">
+  <p:cSld name="Slide 9">
     <p:bg>
       <p:bgPr>
         <a:solidFill>
@@ -10592,7 +12099,7 @@
                 <a:ea typeface="Times New Roman" pitchFamily="34" charset="-122"/>
                 <a:cs typeface="Times New Roman" pitchFamily="34" charset="-120"/>
               </a:rPr>
-              <a:t>08 / 14</a:t>
+              <a:t>09 / 15</a:t>
             </a:r>
             <a:endParaRPr lang="en-US" sz="1000" dirty="0"/>
           </a:p>
@@ -11057,690 +12564,6 @@
               <a:t>The family difference is structural rather than a one-point artifact of the chosen ratio.</a:t>
             </a:r>
             <a:endParaRPr lang="en-US" sz="1220" dirty="0"/>
-          </a:p>
-        </p:txBody>
-      </p:sp>
-    </p:spTree>
-  </p:cSld>
-  <p:clrMapOvr>
-    <a:masterClrMapping/>
-  </p:clrMapOvr>
-</p:sld>
-</file>
-
-<file path=ppt/slides/slide9.xml><?xml version="1.0" encoding="utf-8"?>
-<p:sld xmlns:a="http://schemas.openxmlformats.org/drawingml/2006/main" xmlns:r="http://schemas.openxmlformats.org/officeDocument/2006/relationships" xmlns:p="http://schemas.openxmlformats.org/presentationml/2006/main">
-  <p:cSld name="Slide 9">
-    <p:bg>
-      <p:bgPr>
-        <a:solidFill>
-          <a:srgbClr val="FFFFFF"/>
-        </a:solidFill>
-      </p:bgPr>
-    </p:bg>
-    <p:spTree>
-      <p:nvGrpSpPr>
-        <p:cNvPr id="1" name=""/>
-        <p:cNvGrpSpPr/>
-        <p:nvPr/>
-      </p:nvGrpSpPr>
-      <p:grpSpPr>
-        <a:xfrm>
-          <a:off x="0" y="0"/>
-          <a:ext cx="0" cy="0"/>
-          <a:chOff x="0" y="0"/>
-          <a:chExt cx="0" cy="0"/>
-        </a:xfrm>
-      </p:grpSpPr>
-      <p:sp>
-        <p:nvSpPr>
-          <p:cNvPr id="2" name="Shape 0"/>
-          <p:cNvSpPr/>
-          <p:nvPr/>
-        </p:nvSpPr>
-        <p:spPr>
-          <a:xfrm>
-            <a:off x="0" y="0"/>
-            <a:ext cx="9144000" cy="530352"/>
-          </a:xfrm>
-          <a:prstGeom prst="rect">
-            <a:avLst/>
-          </a:prstGeom>
-          <a:solidFill>
-            <a:srgbClr val="223A5E"/>
-          </a:solidFill>
-          <a:ln w="12700">
-            <a:solidFill>
-              <a:srgbClr val="223A5E">
-                <a:alpha val="0"/>
-              </a:srgbClr>
-            </a:solidFill>
-            <a:prstDash val="solid"/>
-          </a:ln>
-        </p:spPr>
-      </p:sp>
-      <p:sp>
-        <p:nvSpPr>
-          <p:cNvPr id="3" name="Text 1"/>
-          <p:cNvSpPr/>
-          <p:nvPr/>
-        </p:nvSpPr>
-        <p:spPr>
-          <a:xfrm>
-            <a:off x="502920" y="100584"/>
-            <a:ext cx="6583680" cy="219456"/>
-          </a:xfrm>
-          <a:prstGeom prst="rect">
-            <a:avLst/>
-          </a:prstGeom>
-          <a:noFill/>
-          <a:ln/>
-        </p:spPr>
-        <p:txBody>
-          <a:bodyPr wrap="square" lIns="0" tIns="0" rIns="0" bIns="0" rtlCol="0" anchor="ctr"/>
-          <a:lstStyle/>
-          <a:p>
-            <a:pPr indent="0" marL="0">
-              <a:buNone/>
-            </a:pPr>
-            <a:r>
-              <a:rPr lang="en-US" sz="2400" b="1" dirty="0">
-                <a:solidFill>
-                  <a:srgbClr val="FFFFFF"/>
-                </a:solidFill>
-                <a:latin typeface="Times New Roman" pitchFamily="34" charset="0"/>
-                <a:ea typeface="Times New Roman" pitchFamily="34" charset="-122"/>
-                <a:cs typeface="Times New Roman" pitchFamily="34" charset="-120"/>
-              </a:rPr>
-              <a:t>Attribution And Collateral Damage</a:t>
-            </a:r>
-            <a:endParaRPr lang="en-US" sz="2400" dirty="0"/>
-          </a:p>
-        </p:txBody>
-      </p:sp>
-      <p:sp>
-        <p:nvSpPr>
-          <p:cNvPr id="4" name="Text 2"/>
-          <p:cNvSpPr/>
-          <p:nvPr/>
-        </p:nvSpPr>
-        <p:spPr>
-          <a:xfrm>
-            <a:off x="7955280" y="118872"/>
-            <a:ext cx="640080" cy="137160"/>
-          </a:xfrm>
-          <a:prstGeom prst="rect">
-            <a:avLst/>
-          </a:prstGeom>
-          <a:noFill/>
-          <a:ln/>
-        </p:spPr>
-        <p:txBody>
-          <a:bodyPr wrap="square" lIns="0" tIns="0" rIns="0" bIns="0" rtlCol="0" anchor="ctr"/>
-          <a:lstStyle/>
-          <a:p>
-            <a:pPr algn="r" indent="0" marL="0">
-              <a:buNone/>
-            </a:pPr>
-            <a:r>
-              <a:rPr lang="en-US" sz="1000" dirty="0">
-                <a:solidFill>
-                  <a:srgbClr val="F7F5F1"/>
-                </a:solidFill>
-                <a:latin typeface="Times New Roman" pitchFamily="34" charset="0"/>
-                <a:ea typeface="Times New Roman" pitchFamily="34" charset="-122"/>
-                <a:cs typeface="Times New Roman" pitchFamily="34" charset="-120"/>
-              </a:rPr>
-              <a:t>09 / 14</a:t>
-            </a:r>
-            <a:endParaRPr lang="en-US" sz="1000" dirty="0"/>
-          </a:p>
-        </p:txBody>
-      </p:sp>
-      <p:sp>
-        <p:nvSpPr>
-          <p:cNvPr id="5" name="Text 3"/>
-          <p:cNvSpPr/>
-          <p:nvPr/>
-        </p:nvSpPr>
-        <p:spPr>
-          <a:xfrm>
-            <a:off x="502920" y="4736592"/>
-            <a:ext cx="2743200" cy="137160"/>
-          </a:xfrm>
-          <a:prstGeom prst="rect">
-            <a:avLst/>
-          </a:prstGeom>
-          <a:noFill/>
-          <a:ln/>
-        </p:spPr>
-        <p:txBody>
-          <a:bodyPr wrap="square" lIns="0" tIns="0" rIns="0" bIns="0" rtlCol="0" anchor="ctr"/>
-          <a:lstStyle/>
-          <a:p>
-            <a:pPr indent="0" marL="0">
-              <a:buNone/>
-            </a:pPr>
-            <a:r>
-              <a:rPr lang="en-US" sz="900" dirty="0">
-                <a:solidFill>
-                  <a:srgbClr val="667085"/>
-                </a:solidFill>
-                <a:latin typeface="Times New Roman" pitchFamily="34" charset="0"/>
-                <a:ea typeface="Times New Roman" pitchFamily="34" charset="-122"/>
-                <a:cs typeface="Times New Roman" pitchFamily="34" charset="-120"/>
-              </a:rPr>
-              <a:t>EE5003 MSc Project | Liu Chengyu</a:t>
-            </a:r>
-            <a:endParaRPr lang="en-US" sz="900" dirty="0"/>
-          </a:p>
-        </p:txBody>
-      </p:sp>
-      <p:sp>
-        <p:nvSpPr>
-          <p:cNvPr id="6" name="Text 4"/>
-          <p:cNvSpPr/>
-          <p:nvPr/>
-        </p:nvSpPr>
-        <p:spPr>
-          <a:xfrm>
-            <a:off x="5577840" y="4736592"/>
-            <a:ext cx="3017520" cy="137160"/>
-          </a:xfrm>
-          <a:prstGeom prst="rect">
-            <a:avLst/>
-          </a:prstGeom>
-          <a:noFill/>
-          <a:ln/>
-        </p:spPr>
-        <p:txBody>
-          <a:bodyPr wrap="square" lIns="0" tIns="0" rIns="0" bIns="0" rtlCol="0" anchor="ctr"/>
-          <a:lstStyle/>
-          <a:p>
-            <a:pPr algn="r" indent="0" marL="0">
-              <a:buNone/>
-            </a:pPr>
-            <a:r>
-              <a:rPr lang="en-US" sz="900" dirty="0">
-                <a:solidFill>
-                  <a:srgbClr val="667085"/>
-                </a:solidFill>
-                <a:latin typeface="Times New Roman" pitchFamily="34" charset="0"/>
-                <a:ea typeface="Times New Roman" pitchFamily="34" charset="-122"/>
-                <a:cs typeface="Times New Roman" pitchFamily="34" charset="-120"/>
-              </a:rPr>
-              <a:t>Approximate Graph Unlearning Audit</a:t>
-            </a:r>
-            <a:endParaRPr lang="en-US" sz="900" dirty="0"/>
-          </a:p>
-        </p:txBody>
-      </p:sp>
-      <p:sp>
-        <p:nvSpPr>
-          <p:cNvPr id="7" name="Text 5"/>
-          <p:cNvSpPr/>
-          <p:nvPr/>
-        </p:nvSpPr>
-        <p:spPr>
-          <a:xfrm>
-            <a:off x="621792" y="768096"/>
-            <a:ext cx="7498080" cy="228600"/>
-          </a:xfrm>
-          <a:prstGeom prst="rect">
-            <a:avLst/>
-          </a:prstGeom>
-          <a:noFill/>
-          <a:ln/>
-        </p:spPr>
-        <p:txBody>
-          <a:bodyPr wrap="square" lIns="0" tIns="0" rIns="0" bIns="0" rtlCol="0" anchor="ctr"/>
-          <a:lstStyle/>
-          <a:p>
-            <a:pPr indent="0" marL="0">
-              <a:buNone/>
-            </a:pPr>
-            <a:r>
-              <a:rPr lang="en-US" sz="1670" b="1" dirty="0">
-                <a:solidFill>
-                  <a:srgbClr val="223A5E"/>
-                </a:solidFill>
-                <a:latin typeface="Times New Roman" pitchFamily="34" charset="0"/>
-                <a:ea typeface="Times New Roman" pitchFamily="34" charset="-122"/>
-                <a:cs typeface="Times New Roman" pitchFamily="34" charset="-120"/>
-              </a:rPr>
-              <a:t>relative_f1_drop says the attack beats the k=5 method baseline; retrain_gap and collateral metrics explain where the extra damage comes from.</a:t>
-            </a:r>
-            <a:endParaRPr lang="en-US" sz="1670" dirty="0"/>
-          </a:p>
-        </p:txBody>
-      </p:sp>
-      <p:sp>
-        <p:nvSpPr>
-          <p:cNvPr id="8" name="Shape 6"/>
-          <p:cNvSpPr/>
-          <p:nvPr/>
-        </p:nvSpPr>
-        <p:spPr>
-          <a:xfrm>
-            <a:off x="713232" y="1371600"/>
-            <a:ext cx="2487168" cy="2542032"/>
-          </a:xfrm>
-          <a:prstGeom prst="roundRect">
-            <a:avLst>
-              <a:gd name="adj" fmla="val 1838"/>
-            </a:avLst>
-          </a:prstGeom>
-          <a:solidFill>
-            <a:srgbClr val="FFFFFF"/>
-          </a:solidFill>
-          <a:ln w="13970">
-            <a:solidFill>
-              <a:srgbClr val="D9DEE7"/>
-            </a:solidFill>
-            <a:prstDash val="solid"/>
-          </a:ln>
-        </p:spPr>
-      </p:sp>
-      <p:sp>
-        <p:nvSpPr>
-          <p:cNvPr id="9" name="Text 7"/>
-          <p:cNvSpPr/>
-          <p:nvPr/>
-        </p:nvSpPr>
-        <p:spPr>
-          <a:xfrm>
-            <a:off x="850392" y="1463040"/>
-            <a:ext cx="2212848" cy="182880"/>
-          </a:xfrm>
-          <a:prstGeom prst="rect">
-            <a:avLst/>
-          </a:prstGeom>
-          <a:noFill/>
-          <a:ln/>
-        </p:spPr>
-        <p:txBody>
-          <a:bodyPr wrap="square" lIns="0" tIns="0" rIns="0" bIns="0" rtlCol="0" anchor="ctr"/>
-          <a:lstStyle/>
-          <a:p>
-            <a:pPr indent="0" marL="0">
-              <a:buNone/>
-            </a:pPr>
-            <a:r>
-              <a:rPr lang="en-US" sz="1700" b="1" dirty="0">
-                <a:solidFill>
-                  <a:srgbClr val="223A5E"/>
-                </a:solidFill>
-                <a:latin typeface="Times New Roman" pitchFamily="34" charset="0"/>
-                <a:ea typeface="Times New Roman" pitchFamily="34" charset="-122"/>
-                <a:cs typeface="Times New Roman" pitchFamily="34" charset="-120"/>
-              </a:rPr>
-              <a:t>Attack success</a:t>
-            </a:r>
-            <a:endParaRPr lang="en-US" sz="1700" dirty="0"/>
-          </a:p>
-        </p:txBody>
-      </p:sp>
-      <p:sp>
-        <p:nvSpPr>
-          <p:cNvPr id="10" name="Text 8"/>
-          <p:cNvSpPr/>
-          <p:nvPr/>
-        </p:nvSpPr>
-        <p:spPr>
-          <a:xfrm>
-            <a:off x="850392" y="1709928"/>
-            <a:ext cx="2212848" cy="2112264"/>
-          </a:xfrm>
-          <a:prstGeom prst="rect">
-            <a:avLst/>
-          </a:prstGeom>
-          <a:noFill/>
-          <a:ln/>
-        </p:spPr>
-        <p:txBody>
-          <a:bodyPr wrap="square" lIns="0" tIns="0" rIns="0" bIns="0" rtlCol="0" anchor="ctr">
-            <a:normAutofit/>
-          </a:bodyPr>
-          <a:lstStyle/>
-          <a:p>
-            <a:pPr indent="0" marL="0">
-              <a:buNone/>
-            </a:pPr>
-            <a:r>
-              <a:rPr lang="en-US" sz="1220" dirty="0">
-                <a:solidFill>
-                  <a:srgbClr val="1E2630"/>
-                </a:solidFill>
-                <a:latin typeface="Times New Roman" pitchFamily="34" charset="0"/>
-                <a:ea typeface="Times New Roman" pitchFamily="34" charset="-122"/>
-                <a:cs typeface="Times New Roman" pitchFamily="34" charset="-120"/>
-              </a:rPr>
-              <a:t>relative_f1_drop tells us whether a structured attack causes more loss than the small random-trigger baseline.</a:t>
-            </a:r>
-            <a:endParaRPr lang="en-US" sz="1220" dirty="0"/>
-          </a:p>
-        </p:txBody>
-      </p:sp>
-      <p:sp>
-        <p:nvSpPr>
-          <p:cNvPr id="11" name="Shape 9"/>
-          <p:cNvSpPr/>
-          <p:nvPr/>
-        </p:nvSpPr>
-        <p:spPr>
-          <a:xfrm>
-            <a:off x="3337560" y="1371600"/>
-            <a:ext cx="2487168" cy="2542032"/>
-          </a:xfrm>
-          <a:prstGeom prst="roundRect">
-            <a:avLst>
-              <a:gd name="adj" fmla="val 1838"/>
-            </a:avLst>
-          </a:prstGeom>
-          <a:solidFill>
-            <a:srgbClr val="E8EEF5"/>
-          </a:solidFill>
-          <a:ln w="13970">
-            <a:solidFill>
-              <a:srgbClr val="E8EEF5"/>
-            </a:solidFill>
-            <a:prstDash val="solid"/>
-          </a:ln>
-        </p:spPr>
-      </p:sp>
-      <p:sp>
-        <p:nvSpPr>
-          <p:cNvPr id="12" name="Text 10"/>
-          <p:cNvSpPr/>
-          <p:nvPr/>
-        </p:nvSpPr>
-        <p:spPr>
-          <a:xfrm>
-            <a:off x="3474720" y="1463040"/>
-            <a:ext cx="2212848" cy="182880"/>
-          </a:xfrm>
-          <a:prstGeom prst="rect">
-            <a:avLst/>
-          </a:prstGeom>
-          <a:noFill/>
-          <a:ln/>
-        </p:spPr>
-        <p:txBody>
-          <a:bodyPr wrap="square" lIns="0" tIns="0" rIns="0" bIns="0" rtlCol="0" anchor="ctr"/>
-          <a:lstStyle/>
-          <a:p>
-            <a:pPr indent="0" marL="0">
-              <a:buNone/>
-            </a:pPr>
-            <a:r>
-              <a:rPr lang="en-US" sz="1700" b="1" dirty="0">
-                <a:solidFill>
-                  <a:srgbClr val="223A5E"/>
-                </a:solidFill>
-                <a:latin typeface="Times New Roman" pitchFamily="34" charset="0"/>
-                <a:ea typeface="Times New Roman" pitchFamily="34" charset="-122"/>
-                <a:cs typeface="Times New Roman" pitchFamily="34" charset="-120"/>
-              </a:rPr>
-              <a:t>Attribution</a:t>
-            </a:r>
-            <a:endParaRPr lang="en-US" sz="1700" dirty="0"/>
-          </a:p>
-        </p:txBody>
-      </p:sp>
-      <p:sp>
-        <p:nvSpPr>
-          <p:cNvPr id="13" name="Text 11"/>
-          <p:cNvSpPr/>
-          <p:nvPr/>
-        </p:nvSpPr>
-        <p:spPr>
-          <a:xfrm>
-            <a:off x="3474720" y="1709928"/>
-            <a:ext cx="2212848" cy="2112264"/>
-          </a:xfrm>
-          <a:prstGeom prst="rect">
-            <a:avLst/>
-          </a:prstGeom>
-          <a:noFill/>
-          <a:ln/>
-        </p:spPr>
-        <p:txBody>
-          <a:bodyPr wrap="square" lIns="0" tIns="0" rIns="0" bIns="0" rtlCol="0" anchor="ctr">
-            <a:normAutofit/>
-          </a:bodyPr>
-          <a:lstStyle/>
-          <a:p>
-            <a:pPr indent="0" marL="0">
-              <a:buNone/>
-            </a:pPr>
-            <a:r>
-              <a:rPr lang="en-US" sz="1220" dirty="0">
-                <a:solidFill>
-                  <a:srgbClr val="1E2630"/>
-                </a:solidFill>
-                <a:latin typeface="Times New Roman" pitchFamily="34" charset="0"/>
-                <a:ea typeface="Times New Roman" pitchFamily="34" charset="-122"/>
-                <a:cs typeface="Times New Roman" pitchFamily="34" charset="-120"/>
-              </a:rPr>
-              <a:t>retrain_gap isolates the additional approximation error by comparing approximate unlearning with exact retraining on the same deletion set.</a:t>
-            </a:r>
-            <a:endParaRPr lang="en-US" sz="1220" dirty="0"/>
-          </a:p>
-        </p:txBody>
-      </p:sp>
-      <p:sp>
-        <p:nvSpPr>
-          <p:cNvPr id="14" name="Shape 12"/>
-          <p:cNvSpPr/>
-          <p:nvPr/>
-        </p:nvSpPr>
-        <p:spPr>
-          <a:xfrm>
-            <a:off x="5961888" y="1371600"/>
-            <a:ext cx="2487168" cy="2542032"/>
-          </a:xfrm>
-          <a:prstGeom prst="roundRect">
-            <a:avLst>
-              <a:gd name="adj" fmla="val 1838"/>
-            </a:avLst>
-          </a:prstGeom>
-          <a:solidFill>
-            <a:srgbClr val="FFFFFF"/>
-          </a:solidFill>
-          <a:ln w="13970">
-            <a:solidFill>
-              <a:srgbClr val="D9DEE7"/>
-            </a:solidFill>
-            <a:prstDash val="solid"/>
-          </a:ln>
-        </p:spPr>
-      </p:sp>
-      <p:sp>
-        <p:nvSpPr>
-          <p:cNvPr id="15" name="Text 13"/>
-          <p:cNvSpPr/>
-          <p:nvPr/>
-        </p:nvSpPr>
-        <p:spPr>
-          <a:xfrm>
-            <a:off x="6099048" y="1463040"/>
-            <a:ext cx="2212848" cy="182880"/>
-          </a:xfrm>
-          <a:prstGeom prst="rect">
-            <a:avLst/>
-          </a:prstGeom>
-          <a:noFill/>
-          <a:ln/>
-        </p:spPr>
-        <p:txBody>
-          <a:bodyPr wrap="square" lIns="0" tIns="0" rIns="0" bIns="0" rtlCol="0" anchor="ctr"/>
-          <a:lstStyle/>
-          <a:p>
-            <a:pPr indent="0" marL="0">
-              <a:buNone/>
-            </a:pPr>
-            <a:r>
-              <a:rPr lang="en-US" sz="1700" b="1" dirty="0">
-                <a:solidFill>
-                  <a:srgbClr val="223A5E"/>
-                </a:solidFill>
-                <a:latin typeface="Times New Roman" pitchFamily="34" charset="0"/>
-                <a:ea typeface="Times New Roman" pitchFamily="34" charset="-122"/>
-                <a:cs typeface="Times New Roman" pitchFamily="34" charset="-120"/>
-              </a:rPr>
-              <a:t>Spillover</a:t>
-            </a:r>
-            <a:endParaRPr lang="en-US" sz="1700" dirty="0"/>
-          </a:p>
-        </p:txBody>
-      </p:sp>
-      <p:sp>
-        <p:nvSpPr>
-          <p:cNvPr id="16" name="Text 14"/>
-          <p:cNvSpPr/>
-          <p:nvPr/>
-        </p:nvSpPr>
-        <p:spPr>
-          <a:xfrm>
-            <a:off x="6099048" y="1709928"/>
-            <a:ext cx="2212848" cy="2112264"/>
-          </a:xfrm>
-          <a:prstGeom prst="rect">
-            <a:avLst/>
-          </a:prstGeom>
-          <a:noFill/>
-          <a:ln/>
-        </p:spPr>
-        <p:txBody>
-          <a:bodyPr wrap="square" lIns="0" tIns="0" rIns="0" bIns="0" rtlCol="0" anchor="ctr">
-            <a:normAutofit/>
-          </a:bodyPr>
-          <a:lstStyle/>
-          <a:p>
-            <a:pPr indent="0" marL="0">
-              <a:buNone/>
-            </a:pPr>
-            <a:r>
-              <a:rPr lang="en-US" sz="1220" dirty="0">
-                <a:solidFill>
-                  <a:srgbClr val="1E2630"/>
-                </a:solidFill>
-                <a:latin typeface="Times New Roman" pitchFamily="34" charset="0"/>
-                <a:ea typeface="Times New Roman" pitchFamily="34" charset="-122"/>
-                <a:cs typeface="Times New Roman" pitchFamily="34" charset="-120"/>
-              </a:rPr>
-              <a:t>fraction_flipped and mean_pred_shift show how strongly retained non-target nodes are disturbed.</a:t>
-            </a:r>
-            <a:endParaRPr lang="en-US" sz="1220" dirty="0"/>
-          </a:p>
-        </p:txBody>
-      </p:sp>
-      <p:sp>
-        <p:nvSpPr>
-          <p:cNvPr id="17" name="Shape 15"/>
-          <p:cNvSpPr/>
-          <p:nvPr/>
-        </p:nvSpPr>
-        <p:spPr>
-          <a:xfrm>
-            <a:off x="1353312" y="3950208"/>
-            <a:ext cx="6419088" cy="768096"/>
-          </a:xfrm>
-          <a:prstGeom prst="roundRect">
-            <a:avLst>
-              <a:gd name="adj" fmla="val 5952"/>
-            </a:avLst>
-          </a:prstGeom>
-          <a:solidFill>
-            <a:srgbClr val="223A5E"/>
-          </a:solidFill>
-          <a:ln w="12700">
-            <a:solidFill>
-              <a:srgbClr val="223A5E">
-                <a:alpha val="0"/>
-              </a:srgbClr>
-            </a:solidFill>
-            <a:prstDash val="solid"/>
-          </a:ln>
-        </p:spPr>
-      </p:sp>
-      <p:sp>
-        <p:nvSpPr>
-          <p:cNvPr id="18" name="Text 16"/>
-          <p:cNvSpPr/>
-          <p:nvPr/>
-        </p:nvSpPr>
-        <p:spPr>
-          <a:xfrm>
-            <a:off x="1517904" y="4069080"/>
-            <a:ext cx="1234440" cy="164592"/>
-          </a:xfrm>
-          <a:prstGeom prst="rect">
-            <a:avLst/>
-          </a:prstGeom>
-          <a:noFill/>
-          <a:ln/>
-        </p:spPr>
-        <p:txBody>
-          <a:bodyPr wrap="square" lIns="0" tIns="0" rIns="0" bIns="0" rtlCol="0" anchor="ctr"/>
-          <a:lstStyle/>
-          <a:p>
-            <a:pPr indent="0" marL="0">
-              <a:buNone/>
-            </a:pPr>
-            <a:r>
-              <a:rPr lang="en-US" sz="1380" b="1" dirty="0">
-                <a:solidFill>
-                  <a:srgbClr val="F7F5F1"/>
-                </a:solidFill>
-                <a:latin typeface="Times New Roman" pitchFamily="34" charset="0"/>
-                <a:ea typeface="Times New Roman" pitchFamily="34" charset="-122"/>
-                <a:cs typeface="Times New Roman" pitchFamily="34" charset="-120"/>
-              </a:rPr>
-              <a:t>Bottom line</a:t>
-            </a:r>
-            <a:endParaRPr lang="en-US" sz="1380" dirty="0"/>
-          </a:p>
-        </p:txBody>
-      </p:sp>
-      <p:sp>
-        <p:nvSpPr>
-          <p:cNvPr id="19" name="Text 17"/>
-          <p:cNvSpPr/>
-          <p:nvPr/>
-        </p:nvSpPr>
-        <p:spPr>
-          <a:xfrm>
-            <a:off x="1517904" y="4315968"/>
-            <a:ext cx="6053328" cy="256032"/>
-          </a:xfrm>
-          <a:prstGeom prst="rect">
-            <a:avLst/>
-          </a:prstGeom>
-          <a:noFill/>
-          <a:ln/>
-        </p:spPr>
-        <p:txBody>
-          <a:bodyPr wrap="square" lIns="0" tIns="0" rIns="0" bIns="0" rtlCol="0" anchor="ctr">
-            <a:normAutofit/>
-          </a:bodyPr>
-          <a:lstStyle/>
-          <a:p>
-            <a:pPr indent="0" marL="0">
-              <a:buNone/>
-            </a:pPr>
-            <a:r>
-              <a:rPr lang="en-US" sz="1100" dirty="0">
-                <a:solidFill>
-                  <a:srgbClr val="F7F5F1"/>
-                </a:solidFill>
-                <a:latin typeface="Times New Roman" pitchFamily="34" charset="0"/>
-                <a:ea typeface="Times New Roman" pitchFamily="34" charset="-122"/>
-                <a:cs typeface="Times New Roman" pitchFamily="34" charset="-120"/>
-              </a:rPr>
-              <a:t>If total_drop = drop_retrain + retrain_gap, then large retrain gaps and large retained-node shifts indicate mechanism-induced spillover rather than only intrinsic node importance.</a:t>
-            </a:r>
-            <a:endParaRPr lang="en-US" sz="1100" dirty="0"/>
           </a:p>
         </p:txBody>
       </p:sp>

--- a/GULib-master/report/0417_5003report/ppt/out-test/final_15min_defense.pptx
+++ b/GULib-master/report/0417_5003report/ppt/out-test/final_15min_defense.pptx
@@ -10243,7 +10243,7 @@
                 <a:ea typeface="Times New Roman" pitchFamily="34" charset="-122"/>
                 <a:cs typeface="Times New Roman" pitchFamily="34" charset="-120"/>
               </a:rPr>
-              <a:t>IM-v4</a:t>
+              <a:t>IM</a:t>
             </a:r>
             <a:endParaRPr lang="en-US" sz="1700" dirty="0"/>
           </a:p>

--- a/GULib-master/report/0417_5003report/ppt/out-test/final_15min_defense.pptx
+++ b/GULib-master/report/0417_5003report/ppt/out-test/final_15min_defense.pptx
@@ -4,6 +4,9 @@
   <p:sldMasterIdLst>
     <p:sldMasterId id="2147483648" r:id="rId1"/>
   </p:sldMasterIdLst>
+  <p:notesMasterIdLst>
+    <p:notesMasterId r:id="rId17"/>
+  </p:notesMasterIdLst>
   <p:sldIdLst>
     <p:sldId id="256" r:id="rId2"/>
     <p:sldId id="257" r:id="rId3"/>
@@ -21,10 +24,7 @@
     <p:sldId id="269" r:id="rId15"/>
     <p:sldId id="270" r:id="rId16"/>
   </p:sldIdLst>
-  <p:notesMasterIdLst>
-    <p:notesMasterId r:id="rId17"/>
-  </p:notesMasterIdLst>
-  <p:sldSz cx="9144000" cy="5143500"/>
+  <p:sldSz cx="9144000" cy="5143500" type="screen16x9"/>
   <p:notesSz cx="5143500" cy="9144000"/>
   <p:defaultTextStyle>
     <a:lvl1pPr marL="0" algn="l" defTabSz="914400" rtl="0" eaLnBrk="1" latinLnBrk="0" hangingPunct="1">
@@ -118,6 +118,11 @@
       </a:defRPr>
     </a:lvl9pPr>
   </p:defaultTextStyle>
+  <p:extLst>
+    <p:ext uri="{EFAFB233-063F-42B5-8137-9DF3F51BA10A}">
+      <p15:sldGuideLst xmlns:p15="http://schemas.microsoft.com/office/powerpoint/2012/main"/>
+    </p:ext>
+  </p:extLst>
 </p:presentation>
 </file>
 
@@ -143,234 +148,10 @@
           <a:chExt cx="0" cy="0"/>
         </a:xfrm>
       </p:grpSpPr>
-      <p:sp>
-        <p:nvSpPr>
-          <p:cNvPr id="2" name="Header Placeholder 1"/>
-          <p:cNvSpPr>
-            <a:spLocks noGrp="1"/>
-          </p:cNvSpPr>
-          <p:nvPr>
-            <p:ph type="hdr" sz="quarter"/>
-          </p:nvPr>
-        </p:nvSpPr>
-        <p:spPr>
-          <a:xfrm>
-            <a:off x="0" y="0"/>
-            <a:ext cx="2971800" cy="458788"/>
-          </a:xfrm>
-          <a:prstGeom prst="rect">
-            <a:avLst/>
-          </a:prstGeom>
-        </p:spPr>
-        <p:txBody>
-          <a:bodyPr vert="horz" lIns="91440" tIns="45720" rIns="91440" bIns="45720" rtlCol="0"/>
-          <a:lstStyle>
-            <a:lvl1pPr algn="l">
-              <a:defRPr sz="1200"/>
-            </a:lvl1pPr>
-          </a:lstStyle>
-          <a:p>
-            <a:endParaRPr lang="en-US"/>
-          </a:p>
-        </p:txBody>
-      </p:sp>
-      <p:sp>
-        <p:nvSpPr>
-          <p:cNvPr id="3" name="Date Placeholder 2"/>
-          <p:cNvSpPr>
-            <a:spLocks noGrp="1"/>
-          </p:cNvSpPr>
-          <p:nvPr>
-            <p:ph type="dt" idx="1"/>
-          </p:nvPr>
-        </p:nvSpPr>
-        <p:spPr>
-          <a:xfrm>
-            <a:off x="3884613" y="0"/>
-            <a:ext cx="2971800" cy="458788"/>
-          </a:xfrm>
-          <a:prstGeom prst="rect">
-            <a:avLst/>
-          </a:prstGeom>
-        </p:spPr>
-        <p:txBody>
-          <a:bodyPr vert="horz" lIns="91440" tIns="45720" rIns="91440" bIns="45720" rtlCol="0"/>
-          <a:lstStyle>
-            <a:lvl1pPr algn="r">
-              <a:defRPr sz="1200"/>
-            </a:lvl1pPr>
-          </a:lstStyle>
-          <a:p>
-            <a:fld id="{5282F153-3F37-0F45-9E97-73ACFA13230C}" type="datetimeFigureOut">
-              <a:rPr lang="en-US"/>
-              <a:t>7/23/19</a:t>
-            </a:fld>
-            <a:endParaRPr lang="en-US"/>
-          </a:p>
-        </p:txBody>
-      </p:sp>
-      <p:sp>
-        <p:nvSpPr>
-          <p:cNvPr id="4" name="Slide Image Placeholder 3"/>
-          <p:cNvSpPr>
-            <a:spLocks noGrp="1" noRot="1" noChangeAspect="1"/>
-          </p:cNvSpPr>
-          <p:nvPr>
-            <p:ph type="sldImg" idx="2"/>
-          </p:nvPr>
-        </p:nvSpPr>
-        <p:spPr>
-          <a:xfrm>
-            <a:off x="685800" y="1143000"/>
-            <a:ext cx="5486400" cy="3086100"/>
-          </a:xfrm>
-          <a:prstGeom prst="rect">
-            <a:avLst/>
-          </a:prstGeom>
-          <a:noFill/>
-          <a:ln w="12700">
-            <a:solidFill>
-              <a:prstClr val="black"/>
-            </a:solidFill>
-          </a:ln>
-        </p:spPr>
-        <p:txBody>
-          <a:bodyPr vert="horz" lIns="91440" tIns="45720" rIns="91440" bIns="45720" rtlCol="0" anchor="ctr"/>
-          <a:lstStyle/>
-          <a:p>
-            <a:endParaRPr lang="en-US"/>
-          </a:p>
-        </p:txBody>
-      </p:sp>
-      <p:sp>
-        <p:nvSpPr>
-          <p:cNvPr id="5" name="Notes Placeholder 4"/>
-          <p:cNvSpPr>
-            <a:spLocks noGrp="1"/>
-          </p:cNvSpPr>
-          <p:nvPr>
-            <p:ph type="body" sz="quarter" idx="3"/>
-          </p:nvPr>
-        </p:nvSpPr>
-        <p:spPr>
-          <a:xfrm>
-            <a:off x="685800" y="4400550"/>
-            <a:ext cx="5486400" cy="3600450"/>
-          </a:xfrm>
-          <a:prstGeom prst="rect">
-            <a:avLst/>
-          </a:prstGeom>
-        </p:spPr>
-        <p:txBody>
-          <a:bodyPr vert="horz" lIns="91440" tIns="45720" rIns="91440" bIns="45720" rtlCol="0"/>
-          <a:lstStyle/>
-          <a:p>
-            <a:pPr lvl="0"/>
-            <a:r>
-              <a:rPr lang="en-US"/>
-              <a:t>Click to edit Master text styles</a:t>
-            </a:r>
-          </a:p>
-          <a:p>
-            <a:pPr lvl="1"/>
-            <a:r>
-              <a:rPr lang="en-US"/>
-              <a:t>Second level</a:t>
-            </a:r>
-          </a:p>
-          <a:p>
-            <a:pPr lvl="2"/>
-            <a:r>
-              <a:rPr lang="en-US"/>
-              <a:t>Third level</a:t>
-            </a:r>
-          </a:p>
-          <a:p>
-            <a:pPr lvl="3"/>
-            <a:r>
-              <a:rPr lang="en-US"/>
-              <a:t>Fourth level</a:t>
-            </a:r>
-          </a:p>
-          <a:p>
-            <a:pPr lvl="4"/>
-            <a:r>
-              <a:rPr lang="en-US"/>
-              <a:t>Fifth level</a:t>
-            </a:r>
-          </a:p>
-        </p:txBody>
-      </p:sp>
-      <p:sp>
-        <p:nvSpPr>
-          <p:cNvPr id="6" name="Footer Placeholder 5"/>
-          <p:cNvSpPr>
-            <a:spLocks noGrp="1"/>
-          </p:cNvSpPr>
-          <p:nvPr>
-            <p:ph type="ftr" sz="quarter" idx="4"/>
-          </p:nvPr>
-        </p:nvSpPr>
-        <p:spPr>
-          <a:xfrm>
-            <a:off x="0" y="8685213"/>
-            <a:ext cx="2971800" cy="458787"/>
-          </a:xfrm>
-          <a:prstGeom prst="rect">
-            <a:avLst/>
-          </a:prstGeom>
-        </p:spPr>
-        <p:txBody>
-          <a:bodyPr vert="horz" lIns="91440" tIns="45720" rIns="91440" bIns="45720" rtlCol="0" anchor="b"/>
-          <a:lstStyle>
-            <a:lvl1pPr algn="l">
-              <a:defRPr sz="1200"/>
-            </a:lvl1pPr>
-          </a:lstStyle>
-          <a:p>
-            <a:endParaRPr lang="en-US"/>
-          </a:p>
-        </p:txBody>
-      </p:sp>
-      <p:sp>
-        <p:nvSpPr>
-          <p:cNvPr id="7" name="Slide Number Placeholder 6"/>
-          <p:cNvSpPr>
-            <a:spLocks noGrp="1"/>
-          </p:cNvSpPr>
-          <p:nvPr>
-            <p:ph type="sldNum" sz="quarter" idx="5"/>
-          </p:nvPr>
-        </p:nvSpPr>
-        <p:spPr>
-          <a:xfrm>
-            <a:off x="3884613" y="8685213"/>
-            <a:ext cx="2971800" cy="458787"/>
-          </a:xfrm>
-          <a:prstGeom prst="rect">
-            <a:avLst/>
-          </a:prstGeom>
-        </p:spPr>
-        <p:txBody>
-          <a:bodyPr vert="horz" lIns="91440" tIns="45720" rIns="91440" bIns="45720" rtlCol="0" anchor="b"/>
-          <a:lstStyle>
-            <a:lvl1pPr algn="r">
-              <a:defRPr sz="1200"/>
-            </a:lvl1pPr>
-          </a:lstStyle>
-          <a:p>
-            <a:fld id="{CE5E9CC1-C706-0F49-92D6-E571CC5EEA8F}" type="slidenum">
-              <a:rPr lang="en-US"/>
-              <a:t>‹#›</a:t>
-            </a:fld>
-            <a:endParaRPr lang="en-US"/>
-          </a:p>
-        </p:txBody>
-      </p:sp>
     </p:spTree>
     <p:extLst>
       <p:ext uri="{BB962C8B-B14F-4D97-AF65-F5344CB8AC3E}">
-        <p14:creationId xmlns:p14="http://schemas.microsoft.com/office/powerpoint/2010/main" val="1024086991"/>
+        <p14:creationId xmlns:p14="http://schemas.microsoft.com/office/powerpoint/2010/main" val="1389526677"/>
       </p:ext>
     </p:extLst>
   </p:cSld>
@@ -514,10 +295,6 @@
           <a:bodyPr/>
           <a:lstStyle/>
           <a:p>
-            <a:r>
-              <a:rPr lang="en-US" dirty="0"/>
-              <a:t/>
-            </a:r>
             <a:endParaRPr lang="en-US" dirty="0"/>
           </a:p>
         </p:txBody>
@@ -602,10 +379,6 @@
           <a:bodyPr/>
           <a:lstStyle/>
           <a:p>
-            <a:r>
-              <a:rPr lang="en-US" dirty="0"/>
-              <a:t/>
-            </a:r>
             <a:endParaRPr lang="en-US" dirty="0"/>
           </a:p>
         </p:txBody>
@@ -690,10 +463,6 @@
           <a:bodyPr/>
           <a:lstStyle/>
           <a:p>
-            <a:r>
-              <a:rPr lang="en-US" dirty="0"/>
-              <a:t/>
-            </a:r>
             <a:endParaRPr lang="en-US" dirty="0"/>
           </a:p>
         </p:txBody>
@@ -778,10 +547,6 @@
           <a:bodyPr/>
           <a:lstStyle/>
           <a:p>
-            <a:r>
-              <a:rPr lang="en-US" dirty="0"/>
-              <a:t/>
-            </a:r>
             <a:endParaRPr lang="en-US" dirty="0"/>
           </a:p>
         </p:txBody>
@@ -866,10 +631,6 @@
           <a:bodyPr/>
           <a:lstStyle/>
           <a:p>
-            <a:r>
-              <a:rPr lang="en-US" dirty="0"/>
-              <a:t/>
-            </a:r>
             <a:endParaRPr lang="en-US" dirty="0"/>
           </a:p>
         </p:txBody>
@@ -954,10 +715,6 @@
           <a:bodyPr/>
           <a:lstStyle/>
           <a:p>
-            <a:r>
-              <a:rPr lang="en-US" dirty="0"/>
-              <a:t/>
-            </a:r>
             <a:endParaRPr lang="en-US" dirty="0"/>
           </a:p>
         </p:txBody>
@@ -1042,10 +799,6 @@
           <a:bodyPr/>
           <a:lstStyle/>
           <a:p>
-            <a:r>
-              <a:rPr lang="en-US" dirty="0"/>
-              <a:t/>
-            </a:r>
             <a:endParaRPr lang="en-US" dirty="0"/>
           </a:p>
         </p:txBody>
@@ -1130,10 +883,6 @@
           <a:bodyPr/>
           <a:lstStyle/>
           <a:p>
-            <a:r>
-              <a:rPr lang="en-US" dirty="0"/>
-              <a:t/>
-            </a:r>
             <a:endParaRPr lang="en-US" dirty="0"/>
           </a:p>
         </p:txBody>
@@ -1218,10 +967,6 @@
           <a:bodyPr/>
           <a:lstStyle/>
           <a:p>
-            <a:r>
-              <a:rPr lang="en-US" dirty="0"/>
-              <a:t/>
-            </a:r>
             <a:endParaRPr lang="en-US" dirty="0"/>
           </a:p>
         </p:txBody>
@@ -1306,10 +1051,6 @@
           <a:bodyPr/>
           <a:lstStyle/>
           <a:p>
-            <a:r>
-              <a:rPr lang="en-US" dirty="0"/>
-              <a:t/>
-            </a:r>
             <a:endParaRPr lang="en-US" dirty="0"/>
           </a:p>
         </p:txBody>
@@ -1394,10 +1135,6 @@
           <a:bodyPr/>
           <a:lstStyle/>
           <a:p>
-            <a:r>
-              <a:rPr lang="en-US" dirty="0"/>
-              <a:t/>
-            </a:r>
             <a:endParaRPr lang="en-US" dirty="0"/>
           </a:p>
         </p:txBody>
@@ -1482,10 +1219,6 @@
           <a:bodyPr/>
           <a:lstStyle/>
           <a:p>
-            <a:r>
-              <a:rPr lang="en-US" dirty="0"/>
-              <a:t/>
-            </a:r>
             <a:endParaRPr lang="en-US" dirty="0"/>
           </a:p>
         </p:txBody>
@@ -1570,10 +1303,6 @@
           <a:bodyPr/>
           <a:lstStyle/>
           <a:p>
-            <a:r>
-              <a:rPr lang="en-US" dirty="0"/>
-              <a:t/>
-            </a:r>
             <a:endParaRPr lang="en-US" dirty="0"/>
           </a:p>
         </p:txBody>
@@ -1658,10 +1387,6 @@
           <a:bodyPr/>
           <a:lstStyle/>
           <a:p>
-            <a:r>
-              <a:rPr lang="en-US" dirty="0"/>
-              <a:t/>
-            </a:r>
             <a:endParaRPr lang="en-US" dirty="0"/>
           </a:p>
         </p:txBody>
@@ -1746,10 +1471,6 @@
           <a:bodyPr/>
           <a:lstStyle/>
           <a:p>
-            <a:r>
-              <a:rPr lang="en-US" dirty="0"/>
-              <a:t/>
-            </a:r>
             <a:endParaRPr lang="en-US" dirty="0"/>
           </a:p>
         </p:txBody>
@@ -1823,6 +1544,11 @@
 <file path=ppt/slideMasters/slideMaster1.xml><?xml version="1.0" encoding="utf-8"?>
 <p:sldMaster xmlns:a="http://schemas.openxmlformats.org/drawingml/2006/main" xmlns:r="http://schemas.openxmlformats.org/officeDocument/2006/relationships" xmlns:p="http://schemas.openxmlformats.org/presentationml/2006/main">
   <p:cSld>
+    <p:bg>
+      <p:bgRef idx="1001">
+        <a:schemeClr val="bg1"/>
+      </p:bgRef>
+    </p:bg>
     <p:spTree>
       <p:nvGrpSpPr>
         <p:cNvPr id="1" name=""/>
@@ -2105,6 +1831,7 @@
         <a:solidFill>
           <a:srgbClr val="16263F"/>
         </a:solidFill>
+        <a:effectLst/>
       </p:bgPr>
     </p:bg>
     <p:spTree>
@@ -2149,6 +1876,13 @@
             <a:prstDash val="solid"/>
           </a:ln>
         </p:spPr>
+        <p:txBody>
+          <a:bodyPr/>
+          <a:lstStyle/>
+          <a:p>
+            <a:endParaRPr lang="zh-CN" altLang="en-US"/>
+          </a:p>
+        </p:txBody>
       </p:sp>
       <p:sp>
         <p:nvSpPr>
@@ -2173,7 +1907,7 @@
           </a:bodyPr>
           <a:lstStyle/>
           <a:p>
-            <a:pPr indent="0" marL="0">
+            <a:pPr marL="0" indent="0">
               <a:buNone/>
             </a:pPr>
             <a:r>
@@ -2190,7 +1924,7 @@
             <a:endParaRPr lang="en-US" sz="2400" dirty="0"/>
           </a:p>
           <a:p>
-            <a:pPr indent="0" marL="0">
+            <a:pPr marL="0" indent="0">
               <a:buNone/>
             </a:pPr>
             <a:r>
@@ -2229,7 +1963,7 @@
           <a:bodyPr wrap="square" lIns="0" tIns="0" rIns="0" bIns="0" rtlCol="0" anchor="ctr"/>
           <a:lstStyle/>
           <a:p>
-            <a:pPr indent="0" marL="0">
+            <a:pPr marL="0" indent="0">
               <a:buNone/>
             </a:pPr>
             <a:r>
@@ -2268,7 +2002,7 @@
           <a:bodyPr wrap="square" lIns="0" tIns="0" rIns="0" bIns="0" rtlCol="0" anchor="ctr"/>
           <a:lstStyle/>
           <a:p>
-            <a:pPr indent="0" marL="0">
+            <a:pPr marL="0" indent="0">
               <a:buNone/>
             </a:pPr>
             <a:r>
@@ -2285,7 +2019,7 @@
             <a:endParaRPr lang="en-US" sz="1500" dirty="0"/>
           </a:p>
           <a:p>
-            <a:pPr indent="0" marL="0">
+            <a:pPr marL="0" indent="0">
               <a:buNone/>
             </a:pPr>
             <a:r>
@@ -2324,7 +2058,7 @@
           <a:bodyPr wrap="square" lIns="0" tIns="0" rIns="0" bIns="0" rtlCol="0" anchor="ctr"/>
           <a:lstStyle/>
           <a:p>
-            <a:pPr indent="0" marL="0">
+            <a:pPr marL="0" indent="0">
               <a:buNone/>
             </a:pPr>
             <a:r>
@@ -2341,7 +2075,7 @@
             <a:endParaRPr lang="en-US" sz="1400" dirty="0"/>
           </a:p>
           <a:p>
-            <a:pPr indent="0" marL="0">
+            <a:pPr marL="0" indent="0">
               <a:buNone/>
             </a:pPr>
             <a:r>
@@ -2385,6 +2119,13 @@
             <a:prstDash val="solid"/>
           </a:ln>
         </p:spPr>
+        <p:txBody>
+          <a:bodyPr/>
+          <a:lstStyle/>
+          <a:p>
+            <a:endParaRPr lang="zh-CN" altLang="en-US"/>
+          </a:p>
+        </p:txBody>
       </p:sp>
       <p:sp>
         <p:nvSpPr>
@@ -2394,7 +2135,7 @@
         </p:nvSpPr>
         <p:spPr>
           <a:xfrm>
-            <a:off x="6611112" y="1280160"/>
+            <a:off x="6611112" y="1353312"/>
             <a:ext cx="1691640" cy="182880"/>
           </a:xfrm>
           <a:prstGeom prst="rect">
@@ -2407,7 +2148,7 @@
           <a:bodyPr wrap="square" lIns="0" tIns="0" rIns="0" bIns="0" rtlCol="0" anchor="ctr"/>
           <a:lstStyle/>
           <a:p>
-            <a:pPr indent="0" marL="0">
+            <a:pPr marL="0" indent="0">
               <a:buNone/>
             </a:pPr>
             <a:r>
@@ -2433,8 +2174,8 @@
         </p:nvSpPr>
         <p:spPr>
           <a:xfrm>
-            <a:off x="6611112" y="1527048"/>
-            <a:ext cx="1691640" cy="1216152"/>
+            <a:off x="6611112" y="1600200"/>
+            <a:ext cx="1691640" cy="1143000"/>
           </a:xfrm>
           <a:prstGeom prst="rect">
             <a:avLst/>
@@ -2448,7 +2189,7 @@
           </a:bodyPr>
           <a:lstStyle/>
           <a:p>
-            <a:pPr indent="0" marL="0">
+            <a:pPr marL="0" indent="0">
               <a:buNone/>
             </a:pPr>
             <a:r>
@@ -2492,6 +2233,13 @@
             <a:prstDash val="solid"/>
           </a:ln>
         </p:spPr>
+        <p:txBody>
+          <a:bodyPr/>
+          <a:lstStyle/>
+          <a:p>
+            <a:endParaRPr lang="zh-CN" altLang="en-US"/>
+          </a:p>
+        </p:txBody>
       </p:sp>
       <p:sp>
         <p:nvSpPr>
@@ -2514,7 +2262,7 @@
           <a:bodyPr wrap="square" lIns="0" tIns="0" rIns="0" bIns="0" rtlCol="0" anchor="ctr"/>
           <a:lstStyle/>
           <a:p>
-            <a:pPr algn="ctr" indent="0" marL="0">
+            <a:pPr marL="0" indent="0" algn="ctr">
               <a:buNone/>
             </a:pPr>
             <a:r>
@@ -2558,6 +2306,13 @@
             <a:prstDash val="solid"/>
           </a:ln>
         </p:spPr>
+        <p:txBody>
+          <a:bodyPr/>
+          <a:lstStyle/>
+          <a:p>
+            <a:endParaRPr lang="zh-CN" altLang="en-US"/>
+          </a:p>
+        </p:txBody>
       </p:sp>
       <p:sp>
         <p:nvSpPr>
@@ -2580,7 +2335,7 @@
           <a:bodyPr wrap="square" lIns="0" tIns="0" rIns="0" bIns="0" rtlCol="0" anchor="ctr"/>
           <a:lstStyle/>
           <a:p>
-            <a:pPr algn="ctr" indent="0" marL="0">
+            <a:pPr marL="0" indent="0" algn="ctr">
               <a:buNone/>
             </a:pPr>
             <a:r>
@@ -2624,6 +2379,13 @@
             <a:prstDash val="solid"/>
           </a:ln>
         </p:spPr>
+        <p:txBody>
+          <a:bodyPr/>
+          <a:lstStyle/>
+          <a:p>
+            <a:endParaRPr lang="zh-CN" altLang="en-US"/>
+          </a:p>
+        </p:txBody>
       </p:sp>
       <p:sp>
         <p:nvSpPr>
@@ -2646,7 +2408,7 @@
           <a:bodyPr wrap="square" lIns="0" tIns="0" rIns="0" bIns="0" rtlCol="0" anchor="ctr"/>
           <a:lstStyle/>
           <a:p>
-            <a:pPr algn="ctr" indent="0" marL="0">
+            <a:pPr marL="0" indent="0" algn="ctr">
               <a:buNone/>
             </a:pPr>
             <a:r>
@@ -2690,6 +2452,13 @@
             <a:prstDash val="solid"/>
           </a:ln>
         </p:spPr>
+        <p:txBody>
+          <a:bodyPr/>
+          <a:lstStyle/>
+          <a:p>
+            <a:endParaRPr lang="zh-CN" altLang="en-US"/>
+          </a:p>
+        </p:txBody>
       </p:sp>
       <p:sp>
         <p:nvSpPr>
@@ -2712,7 +2481,7 @@
           <a:bodyPr wrap="square" lIns="0" tIns="0" rIns="0" bIns="0" rtlCol="0" anchor="ctr"/>
           <a:lstStyle/>
           <a:p>
-            <a:pPr algn="ctr" indent="0" marL="0">
+            <a:pPr marL="0" indent="0" algn="ctr">
               <a:buNone/>
             </a:pPr>
             <a:r>
@@ -2744,8 +2513,9 @@
     <p:bg>
       <p:bgPr>
         <a:solidFill>
-          <a:srgbClr val="FFFFFF"/>
+          <a:srgbClr val="F7F5F1"/>
         </a:solidFill>
+        <a:effectLst/>
       </p:bgPr>
     </p:bg>
     <p:spTree>
@@ -2788,6 +2558,13 @@
             <a:prstDash val="solid"/>
           </a:ln>
         </p:spPr>
+        <p:txBody>
+          <a:bodyPr/>
+          <a:lstStyle/>
+          <a:p>
+            <a:endParaRPr lang="zh-CN" altLang="en-US"/>
+          </a:p>
+        </p:txBody>
       </p:sp>
       <p:sp>
         <p:nvSpPr>
@@ -2810,7 +2587,7 @@
           <a:bodyPr wrap="square" lIns="0" tIns="0" rIns="0" bIns="0" rtlCol="0" anchor="ctr"/>
           <a:lstStyle/>
           <a:p>
-            <a:pPr indent="0" marL="0">
+            <a:pPr marL="0" indent="0">
               <a:buNone/>
             </a:pPr>
             <a:r>
@@ -2822,7 +2599,7 @@
                 <a:ea typeface="Times New Roman" pitchFamily="34" charset="-122"/>
                 <a:cs typeface="Times New Roman" pitchFamily="34" charset="-120"/>
               </a:rPr>
-              <a:t>Attribution And Collateral Damage</a:t>
+              <a:t>Ratio Sensitivity And Ablation</a:t>
             </a:r>
             <a:endParaRPr lang="en-US" sz="2400" dirty="0"/>
           </a:p>
@@ -2849,7 +2626,7 @@
           <a:bodyPr wrap="square" lIns="0" tIns="0" rIns="0" bIns="0" rtlCol="0" anchor="ctr"/>
           <a:lstStyle/>
           <a:p>
-            <a:pPr algn="r" indent="0" marL="0">
+            <a:pPr marL="0" indent="0" algn="r">
               <a:buNone/>
             </a:pPr>
             <a:r>
@@ -2888,7 +2665,7 @@
           <a:bodyPr wrap="square" lIns="0" tIns="0" rIns="0" bIns="0" rtlCol="0" anchor="ctr"/>
           <a:lstStyle/>
           <a:p>
-            <a:pPr indent="0" marL="0">
+            <a:pPr marL="0" indent="0">
               <a:buNone/>
             </a:pPr>
             <a:r>
@@ -2927,7 +2704,7 @@
           <a:bodyPr wrap="square" lIns="0" tIns="0" rIns="0" bIns="0" rtlCol="0" anchor="ctr"/>
           <a:lstStyle/>
           <a:p>
-            <a:pPr algn="r" indent="0" marL="0">
+            <a:pPr marL="0" indent="0" algn="r">
               <a:buNone/>
             </a:pPr>
             <a:r>
@@ -2945,16 +2722,40 @@
           </a:p>
         </p:txBody>
       </p:sp>
-      <p:sp>
-        <p:nvSpPr>
-          <p:cNvPr id="7" name="Text 5"/>
-          <p:cNvSpPr/>
-          <p:nvPr/>
-        </p:nvSpPr>
-        <p:spPr>
-          <a:xfrm>
-            <a:off x="621792" y="768096"/>
-            <a:ext cx="7498080" cy="228600"/>
+      <p:pic>
+        <p:nvPicPr>
+          <p:cNvPr id="7" name="Image 0" descr="H:\project\OpenGU\GULib-master\report\0417_5003report\figures\paper_figures\FIG-2_Scaling.png"/>
+          <p:cNvPicPr>
+            <a:picLocks noChangeAspect="1"/>
+          </p:cNvPicPr>
+          <p:nvPr/>
+        </p:nvPicPr>
+        <p:blipFill>
+          <a:blip r:embed="rId3"/>
+          <a:stretch>
+            <a:fillRect/>
+          </a:stretch>
+        </p:blipFill>
+        <p:spPr>
+          <a:xfrm>
+            <a:off x="566928" y="914400"/>
+            <a:ext cx="5257800" cy="3291840"/>
+          </a:xfrm>
+          <a:prstGeom prst="rect">
+            <a:avLst/>
+          </a:prstGeom>
+        </p:spPr>
+      </p:pic>
+      <p:sp>
+        <p:nvSpPr>
+          <p:cNvPr id="8" name="Text 5"/>
+          <p:cNvSpPr/>
+          <p:nvPr/>
+        </p:nvSpPr>
+        <p:spPr>
+          <a:xfrm>
+            <a:off x="585216" y="4297680"/>
+            <a:ext cx="5212080" cy="146304"/>
           </a:xfrm>
           <a:prstGeom prst="rect">
             <a:avLst/>
@@ -2966,38 +2767,38 @@
           <a:bodyPr wrap="square" lIns="0" tIns="0" rIns="0" bIns="0" rtlCol="0" anchor="ctr"/>
           <a:lstStyle/>
           <a:p>
-            <a:pPr indent="0" marL="0">
-              <a:buNone/>
-            </a:pPr>
-            <a:r>
-              <a:rPr lang="en-US" sz="1670" b="1" dirty="0">
-                <a:solidFill>
-                  <a:srgbClr val="223A5E"/>
-                </a:solidFill>
-                <a:latin typeface="Times New Roman" pitchFamily="34" charset="0"/>
-                <a:ea typeface="Times New Roman" pitchFamily="34" charset="-122"/>
-                <a:cs typeface="Times New Roman" pitchFamily="34" charset="-120"/>
-              </a:rPr>
-              <a:t>relative_f1_drop says the attack beats the k=5 method baseline; retrain_gap and collateral metrics explain where the extra damage comes from.</a:t>
-            </a:r>
-            <a:endParaRPr lang="en-US" sz="1670" dirty="0"/>
-          </a:p>
-        </p:txBody>
-      </p:sp>
-      <p:sp>
-        <p:nvSpPr>
-          <p:cNvPr id="8" name="Shape 6"/>
-          <p:cNvSpPr/>
-          <p:nvPr/>
-        </p:nvSpPr>
-        <p:spPr>
-          <a:xfrm>
-            <a:off x="713232" y="1371600"/>
-            <a:ext cx="2487168" cy="2542032"/>
+            <a:pPr marL="0" indent="0">
+              <a:buNone/>
+            </a:pPr>
+            <a:r>
+              <a:rPr lang="en-US" sz="900" i="1" dirty="0">
+                <a:solidFill>
+                  <a:srgbClr val="667085"/>
+                </a:solidFill>
+                <a:latin typeface="Times New Roman" pitchFamily="34" charset="0"/>
+                <a:ea typeface="Times New Roman" pitchFamily="34" charset="-122"/>
+                <a:cs typeface="Times New Roman" pitchFamily="34" charset="-120"/>
+              </a:rPr>
+              <a:t>Figure 2. Ratio-sensitivity view for GIF and GNNDelete on Cora/GCN.</a:t>
+            </a:r>
+            <a:endParaRPr lang="en-US" sz="900" dirty="0"/>
+          </a:p>
+        </p:txBody>
+      </p:sp>
+      <p:sp>
+        <p:nvSpPr>
+          <p:cNvPr id="9" name="Shape 6"/>
+          <p:cNvSpPr/>
+          <p:nvPr/>
+        </p:nvSpPr>
+        <p:spPr>
+          <a:xfrm>
+            <a:off x="6016752" y="960120"/>
+            <a:ext cx="2359152" cy="1005840"/>
           </a:xfrm>
           <a:prstGeom prst="roundRect">
             <a:avLst>
-              <a:gd name="adj" fmla="val 1838"/>
+              <a:gd name="adj" fmla="val 4545"/>
             </a:avLst>
           </a:prstGeom>
           <a:solidFill>
@@ -3010,17 +2811,24 @@
             <a:prstDash val="solid"/>
           </a:ln>
         </p:spPr>
-      </p:sp>
-      <p:sp>
-        <p:nvSpPr>
-          <p:cNvPr id="9" name="Text 7"/>
-          <p:cNvSpPr/>
-          <p:nvPr/>
-        </p:nvSpPr>
-        <p:spPr>
-          <a:xfrm>
-            <a:off x="850392" y="1463040"/>
-            <a:ext cx="2212848" cy="182880"/>
+        <p:txBody>
+          <a:bodyPr/>
+          <a:lstStyle/>
+          <a:p>
+            <a:endParaRPr lang="zh-CN" altLang="en-US"/>
+          </a:p>
+        </p:txBody>
+      </p:sp>
+      <p:sp>
+        <p:nvSpPr>
+          <p:cNvPr id="10" name="Text 7"/>
+          <p:cNvSpPr/>
+          <p:nvPr/>
+        </p:nvSpPr>
+        <p:spPr>
+          <a:xfrm>
+            <a:off x="6153912" y="1124712"/>
+            <a:ext cx="2084832" cy="182880"/>
           </a:xfrm>
           <a:prstGeom prst="rect">
             <a:avLst/>
@@ -3032,7 +2840,7 @@
           <a:bodyPr wrap="square" lIns="0" tIns="0" rIns="0" bIns="0" rtlCol="0" anchor="ctr"/>
           <a:lstStyle/>
           <a:p>
-            <a:pPr indent="0" marL="0">
+            <a:pPr marL="0" indent="0">
               <a:buNone/>
             </a:pPr>
             <a:r>
@@ -3044,7 +2852,7 @@
                 <a:ea typeface="Times New Roman" pitchFamily="34" charset="-122"/>
                 <a:cs typeface="Times New Roman" pitchFamily="34" charset="-120"/>
               </a:rPr>
-              <a:t>Attack success</a:t>
+              <a:t>Ablation read</a:t>
             </a:r>
             <a:endParaRPr lang="en-US" sz="1700" dirty="0"/>
           </a:p>
@@ -3052,14 +2860,14 @@
       </p:sp>
       <p:sp>
         <p:nvSpPr>
-          <p:cNvPr id="10" name="Text 8"/>
-          <p:cNvSpPr/>
-          <p:nvPr/>
-        </p:nvSpPr>
-        <p:spPr>
-          <a:xfrm>
-            <a:off x="850392" y="1709928"/>
-            <a:ext cx="2212848" cy="2112264"/>
+          <p:cNvPr id="11" name="Text 8"/>
+          <p:cNvSpPr/>
+          <p:nvPr/>
+        </p:nvSpPr>
+        <p:spPr>
+          <a:xfrm>
+            <a:off x="6153912" y="1371600"/>
+            <a:ext cx="2084832" cy="502920"/>
           </a:xfrm>
           <a:prstGeom prst="rect">
             <a:avLst/>
@@ -3073,7 +2881,7 @@
           </a:bodyPr>
           <a:lstStyle/>
           <a:p>
-            <a:pPr indent="0" marL="0">
+            <a:pPr marL="0" indent="0">
               <a:buNone/>
             </a:pPr>
             <a:r>
@@ -3085,7 +2893,7 @@
                 <a:ea typeface="Times New Roman" pitchFamily="34" charset="-122"/>
                 <a:cs typeface="Times New Roman" pitchFamily="34" charset="-120"/>
               </a:rPr>
-              <a:t>relative_f1_drop tells us whether a structured attack causes more loss than the small random-trigger baseline.</a:t>
+              <a:t>This page asks how attack strength changes as the deletion ratio increases, not only who wins at one fixed point.</a:t>
             </a:r>
             <a:endParaRPr lang="en-US" sz="1220" dirty="0"/>
           </a:p>
@@ -3093,18 +2901,18 @@
       </p:sp>
       <p:sp>
         <p:nvSpPr>
-          <p:cNvPr id="11" name="Shape 9"/>
-          <p:cNvSpPr/>
-          <p:nvPr/>
-        </p:nvSpPr>
-        <p:spPr>
-          <a:xfrm>
-            <a:off x="3337560" y="1371600"/>
-            <a:ext cx="2487168" cy="2542032"/>
+          <p:cNvPr id="12" name="Shape 9"/>
+          <p:cNvSpPr/>
+          <p:nvPr/>
+        </p:nvSpPr>
+        <p:spPr>
+          <a:xfrm>
+            <a:off x="6016752" y="2057400"/>
+            <a:ext cx="2359152" cy="1051560"/>
           </a:xfrm>
           <a:prstGeom prst="roundRect">
             <a:avLst>
-              <a:gd name="adj" fmla="val 1838"/>
+              <a:gd name="adj" fmla="val 4348"/>
             </a:avLst>
           </a:prstGeom>
           <a:solidFill>
@@ -3117,17 +2925,24 @@
             <a:prstDash val="solid"/>
           </a:ln>
         </p:spPr>
-      </p:sp>
-      <p:sp>
-        <p:nvSpPr>
-          <p:cNvPr id="12" name="Text 10"/>
-          <p:cNvSpPr/>
-          <p:nvPr/>
-        </p:nvSpPr>
-        <p:spPr>
-          <a:xfrm>
-            <a:off x="3474720" y="1463040"/>
-            <a:ext cx="2212848" cy="182880"/>
+        <p:txBody>
+          <a:bodyPr/>
+          <a:lstStyle/>
+          <a:p>
+            <a:endParaRPr lang="zh-CN" altLang="en-US"/>
+          </a:p>
+        </p:txBody>
+      </p:sp>
+      <p:sp>
+        <p:nvSpPr>
+          <p:cNvPr id="13" name="Text 10"/>
+          <p:cNvSpPr/>
+          <p:nvPr/>
+        </p:nvSpPr>
+        <p:spPr>
+          <a:xfrm>
+            <a:off x="6153912" y="2221992"/>
+            <a:ext cx="2084832" cy="182880"/>
           </a:xfrm>
           <a:prstGeom prst="rect">
             <a:avLst/>
@@ -3139,7 +2954,7 @@
           <a:bodyPr wrap="square" lIns="0" tIns="0" rIns="0" bIns="0" rtlCol="0" anchor="ctr"/>
           <a:lstStyle/>
           <a:p>
-            <a:pPr indent="0" marL="0">
+            <a:pPr marL="0" indent="0">
               <a:buNone/>
             </a:pPr>
             <a:r>
@@ -3151,7 +2966,7 @@
                 <a:ea typeface="Times New Roman" pitchFamily="34" charset="-122"/>
                 <a:cs typeface="Times New Roman" pitchFamily="34" charset="-120"/>
               </a:rPr>
-              <a:t>Attribution</a:t>
+              <a:t>Observed pattern</a:t>
             </a:r>
             <a:endParaRPr lang="en-US" sz="1700" dirty="0"/>
           </a:p>
@@ -3159,14 +2974,14 @@
       </p:sp>
       <p:sp>
         <p:nvSpPr>
-          <p:cNvPr id="13" name="Text 11"/>
-          <p:cNvSpPr/>
-          <p:nvPr/>
-        </p:nvSpPr>
-        <p:spPr>
-          <a:xfrm>
-            <a:off x="3474720" y="1709928"/>
-            <a:ext cx="2212848" cy="2112264"/>
+          <p:cNvPr id="14" name="Text 11"/>
+          <p:cNvSpPr/>
+          <p:nvPr/>
+        </p:nvSpPr>
+        <p:spPr>
+          <a:xfrm>
+            <a:off x="6153912" y="2468880"/>
+            <a:ext cx="2084832" cy="548640"/>
           </a:xfrm>
           <a:prstGeom prst="rect">
             <a:avLst/>
@@ -3180,7 +2995,7 @@
           </a:bodyPr>
           <a:lstStyle/>
           <a:p>
-            <a:pPr indent="0" marL="0">
+            <a:pPr marL="0" indent="0">
               <a:buNone/>
             </a:pPr>
             <a:r>
@@ -3192,7 +3007,7 @@
                 <a:ea typeface="Times New Roman" pitchFamily="34" charset="-122"/>
                 <a:cs typeface="Times New Roman" pitchFamily="34" charset="-120"/>
               </a:rPr>
-              <a:t>retrain_gap isolates the additional approximation error by comparing approximate unlearning with exact retraining on the same deletion set.</a:t>
+              <a:t>GNNDelete stays sensitive even at small ratios, while GIF remains much flatter across the same range.</a:t>
             </a:r>
             <a:endParaRPr lang="en-US" sz="1220" dirty="0"/>
           </a:p>
@@ -3200,41 +3015,48 @@
       </p:sp>
       <p:sp>
         <p:nvSpPr>
-          <p:cNvPr id="14" name="Shape 12"/>
-          <p:cNvSpPr/>
-          <p:nvPr/>
-        </p:nvSpPr>
-        <p:spPr>
-          <a:xfrm>
-            <a:off x="5961888" y="1371600"/>
-            <a:ext cx="2487168" cy="2542032"/>
+          <p:cNvPr id="15" name="Shape 12"/>
+          <p:cNvSpPr/>
+          <p:nvPr/>
+        </p:nvSpPr>
+        <p:spPr>
+          <a:xfrm>
+            <a:off x="6016752" y="3200400"/>
+            <a:ext cx="2359152" cy="1051560"/>
           </a:xfrm>
           <a:prstGeom prst="roundRect">
             <a:avLst>
-              <a:gd name="adj" fmla="val 1838"/>
+              <a:gd name="adj" fmla="val 4348"/>
             </a:avLst>
           </a:prstGeom>
           <a:solidFill>
-            <a:srgbClr val="FFFFFF"/>
+            <a:srgbClr val="223A5E"/>
           </a:solidFill>
           <a:ln w="13970">
             <a:solidFill>
-              <a:srgbClr val="D9DEE7"/>
+              <a:srgbClr val="223A5E"/>
             </a:solidFill>
             <a:prstDash val="solid"/>
           </a:ln>
         </p:spPr>
-      </p:sp>
-      <p:sp>
-        <p:nvSpPr>
-          <p:cNvPr id="15" name="Text 13"/>
-          <p:cNvSpPr/>
-          <p:nvPr/>
-        </p:nvSpPr>
-        <p:spPr>
-          <a:xfrm>
-            <a:off x="6099048" y="1463040"/>
-            <a:ext cx="2212848" cy="182880"/>
+        <p:txBody>
+          <a:bodyPr/>
+          <a:lstStyle/>
+          <a:p>
+            <a:endParaRPr lang="zh-CN" altLang="en-US"/>
+          </a:p>
+        </p:txBody>
+      </p:sp>
+      <p:sp>
+        <p:nvSpPr>
+          <p:cNvPr id="16" name="Text 13"/>
+          <p:cNvSpPr/>
+          <p:nvPr/>
+        </p:nvSpPr>
+        <p:spPr>
+          <a:xfrm>
+            <a:off x="6153912" y="3364992"/>
+            <a:ext cx="2084832" cy="182880"/>
           </a:xfrm>
           <a:prstGeom prst="rect">
             <a:avLst/>
@@ -3246,19 +3068,19 @@
           <a:bodyPr wrap="square" lIns="0" tIns="0" rIns="0" bIns="0" rtlCol="0" anchor="ctr"/>
           <a:lstStyle/>
           <a:p>
-            <a:pPr indent="0" marL="0">
+            <a:pPr marL="0" indent="0">
               <a:buNone/>
             </a:pPr>
             <a:r>
               <a:rPr lang="en-US" sz="1700" b="1" dirty="0">
                 <a:solidFill>
-                  <a:srgbClr val="223A5E"/>
-                </a:solidFill>
-                <a:latin typeface="Times New Roman" pitchFamily="34" charset="0"/>
-                <a:ea typeface="Times New Roman" pitchFamily="34" charset="-122"/>
-                <a:cs typeface="Times New Roman" pitchFamily="34" charset="-120"/>
-              </a:rPr>
-              <a:t>Spillover</a:t>
+                  <a:srgbClr val="F7F5F1"/>
+                </a:solidFill>
+                <a:latin typeface="Times New Roman" pitchFamily="34" charset="0"/>
+                <a:ea typeface="Times New Roman" pitchFamily="34" charset="-122"/>
+                <a:cs typeface="Times New Roman" pitchFamily="34" charset="-120"/>
+              </a:rPr>
+              <a:t>Takeaway</a:t>
             </a:r>
             <a:endParaRPr lang="en-US" sz="1700" dirty="0"/>
           </a:p>
@@ -3266,14 +3088,14 @@
       </p:sp>
       <p:sp>
         <p:nvSpPr>
-          <p:cNvPr id="16" name="Text 14"/>
-          <p:cNvSpPr/>
-          <p:nvPr/>
-        </p:nvSpPr>
-        <p:spPr>
-          <a:xfrm>
-            <a:off x="6099048" y="1709928"/>
-            <a:ext cx="2212848" cy="2112264"/>
+          <p:cNvPr id="17" name="Text 14"/>
+          <p:cNvSpPr/>
+          <p:nvPr/>
+        </p:nvSpPr>
+        <p:spPr>
+          <a:xfrm>
+            <a:off x="6153912" y="3611880"/>
+            <a:ext cx="2084832" cy="548640"/>
           </a:xfrm>
           <a:prstGeom prst="rect">
             <a:avLst/>
@@ -3287,130 +3109,21 @@
           </a:bodyPr>
           <a:lstStyle/>
           <a:p>
-            <a:pPr indent="0" marL="0">
+            <a:pPr marL="0" indent="0">
               <a:buNone/>
             </a:pPr>
             <a:r>
               <a:rPr lang="en-US" sz="1220" dirty="0">
                 <a:solidFill>
-                  <a:srgbClr val="1E2630"/>
-                </a:solidFill>
-                <a:latin typeface="Times New Roman" pitchFamily="34" charset="0"/>
-                <a:ea typeface="Times New Roman" pitchFamily="34" charset="-122"/>
-                <a:cs typeface="Times New Roman" pitchFamily="34" charset="-120"/>
-              </a:rPr>
-              <a:t>fraction_flipped and mean_pred_shift show how strongly retained non-target nodes are disturbed.</a:t>
+                  <a:srgbClr val="FFFFFF"/>
+                </a:solidFill>
+                <a:latin typeface="Times New Roman" pitchFamily="34" charset="0"/>
+                <a:ea typeface="Times New Roman" pitchFamily="34" charset="-122"/>
+                <a:cs typeface="Times New Roman" pitchFamily="34" charset="-120"/>
+              </a:rPr>
+              <a:t>The family difference is structural rather than a one-point artifact of the chosen ratio.</a:t>
             </a:r>
             <a:endParaRPr lang="en-US" sz="1220" dirty="0"/>
-          </a:p>
-        </p:txBody>
-      </p:sp>
-      <p:sp>
-        <p:nvSpPr>
-          <p:cNvPr id="17" name="Shape 15"/>
-          <p:cNvSpPr/>
-          <p:nvPr/>
-        </p:nvSpPr>
-        <p:spPr>
-          <a:xfrm>
-            <a:off x="1353312" y="3950208"/>
-            <a:ext cx="6419088" cy="768096"/>
-          </a:xfrm>
-          <a:prstGeom prst="roundRect">
-            <a:avLst>
-              <a:gd name="adj" fmla="val 5952"/>
-            </a:avLst>
-          </a:prstGeom>
-          <a:solidFill>
-            <a:srgbClr val="223A5E"/>
-          </a:solidFill>
-          <a:ln w="12700">
-            <a:solidFill>
-              <a:srgbClr val="223A5E">
-                <a:alpha val="0"/>
-              </a:srgbClr>
-            </a:solidFill>
-            <a:prstDash val="solid"/>
-          </a:ln>
-        </p:spPr>
-      </p:sp>
-      <p:sp>
-        <p:nvSpPr>
-          <p:cNvPr id="18" name="Text 16"/>
-          <p:cNvSpPr/>
-          <p:nvPr/>
-        </p:nvSpPr>
-        <p:spPr>
-          <a:xfrm>
-            <a:off x="1517904" y="4069080"/>
-            <a:ext cx="1234440" cy="164592"/>
-          </a:xfrm>
-          <a:prstGeom prst="rect">
-            <a:avLst/>
-          </a:prstGeom>
-          <a:noFill/>
-          <a:ln/>
-        </p:spPr>
-        <p:txBody>
-          <a:bodyPr wrap="square" lIns="0" tIns="0" rIns="0" bIns="0" rtlCol="0" anchor="ctr"/>
-          <a:lstStyle/>
-          <a:p>
-            <a:pPr indent="0" marL="0">
-              <a:buNone/>
-            </a:pPr>
-            <a:r>
-              <a:rPr lang="en-US" sz="1380" b="1" dirty="0">
-                <a:solidFill>
-                  <a:srgbClr val="F7F5F1"/>
-                </a:solidFill>
-                <a:latin typeface="Times New Roman" pitchFamily="34" charset="0"/>
-                <a:ea typeface="Times New Roman" pitchFamily="34" charset="-122"/>
-                <a:cs typeface="Times New Roman" pitchFamily="34" charset="-120"/>
-              </a:rPr>
-              <a:t>Bottom line</a:t>
-            </a:r>
-            <a:endParaRPr lang="en-US" sz="1380" dirty="0"/>
-          </a:p>
-        </p:txBody>
-      </p:sp>
-      <p:sp>
-        <p:nvSpPr>
-          <p:cNvPr id="19" name="Text 17"/>
-          <p:cNvSpPr/>
-          <p:nvPr/>
-        </p:nvSpPr>
-        <p:spPr>
-          <a:xfrm>
-            <a:off x="1517904" y="4315968"/>
-            <a:ext cx="6053328" cy="256032"/>
-          </a:xfrm>
-          <a:prstGeom prst="rect">
-            <a:avLst/>
-          </a:prstGeom>
-          <a:noFill/>
-          <a:ln/>
-        </p:spPr>
-        <p:txBody>
-          <a:bodyPr wrap="square" lIns="0" tIns="0" rIns="0" bIns="0" rtlCol="0" anchor="ctr">
-            <a:normAutofit/>
-          </a:bodyPr>
-          <a:lstStyle/>
-          <a:p>
-            <a:pPr indent="0" marL="0">
-              <a:buNone/>
-            </a:pPr>
-            <a:r>
-              <a:rPr lang="en-US" sz="1100" dirty="0">
-                <a:solidFill>
-                  <a:srgbClr val="F7F5F1"/>
-                </a:solidFill>
-                <a:latin typeface="Times New Roman" pitchFamily="34" charset="0"/>
-                <a:ea typeface="Times New Roman" pitchFamily="34" charset="-122"/>
-                <a:cs typeface="Times New Roman" pitchFamily="34" charset="-120"/>
-              </a:rPr>
-              <a:t>If total_drop = drop_retrain + retrain_gap, then large retrain gaps and large retained-node shifts indicate mechanism-induced spillover rather than only intrinsic node importance.</a:t>
-            </a:r>
-            <a:endParaRPr lang="en-US" sz="1100" dirty="0"/>
           </a:p>
         </p:txBody>
       </p:sp>
@@ -3428,8 +3141,9 @@
     <p:bg>
       <p:bgPr>
         <a:solidFill>
-          <a:srgbClr val="F7F5F1"/>
+          <a:srgbClr val="FFFFFF"/>
         </a:solidFill>
+        <a:effectLst/>
       </p:bgPr>
     </p:bg>
     <p:spTree>
@@ -3472,6 +3186,13 @@
             <a:prstDash val="solid"/>
           </a:ln>
         </p:spPr>
+        <p:txBody>
+          <a:bodyPr/>
+          <a:lstStyle/>
+          <a:p>
+            <a:endParaRPr lang="zh-CN" altLang="en-US"/>
+          </a:p>
+        </p:txBody>
       </p:sp>
       <p:sp>
         <p:nvSpPr>
@@ -3494,7 +3215,7 @@
           <a:bodyPr wrap="square" lIns="0" tIns="0" rIns="0" bIns="0" rtlCol="0" anchor="ctr"/>
           <a:lstStyle/>
           <a:p>
-            <a:pPr indent="0" marL="0">
+            <a:pPr marL="0" indent="0">
               <a:buNone/>
             </a:pPr>
             <a:r>
@@ -3506,7 +3227,7 @@
                 <a:ea typeface="Times New Roman" pitchFamily="34" charset="-122"/>
                 <a:cs typeface="Times New Roman" pitchFamily="34" charset="-120"/>
               </a:rPr>
-              <a:t>GraphEraser And Shard Protection</a:t>
+              <a:t>Attribution And Collateral Damage</a:t>
             </a:r>
             <a:endParaRPr lang="en-US" sz="2400" dirty="0"/>
           </a:p>
@@ -3533,7 +3254,7 @@
           <a:bodyPr wrap="square" lIns="0" tIns="0" rIns="0" bIns="0" rtlCol="0" anchor="ctr"/>
           <a:lstStyle/>
           <a:p>
-            <a:pPr algn="r" indent="0" marL="0">
+            <a:pPr marL="0" indent="0" algn="r">
               <a:buNone/>
             </a:pPr>
             <a:r>
@@ -3572,7 +3293,7 @@
           <a:bodyPr wrap="square" lIns="0" tIns="0" rIns="0" bIns="0" rtlCol="0" anchor="ctr"/>
           <a:lstStyle/>
           <a:p>
-            <a:pPr indent="0" marL="0">
+            <a:pPr marL="0" indent="0">
               <a:buNone/>
             </a:pPr>
             <a:r>
@@ -3611,7 +3332,7 @@
           <a:bodyPr wrap="square" lIns="0" tIns="0" rIns="0" bIns="0" rtlCol="0" anchor="ctr"/>
           <a:lstStyle/>
           <a:p>
-            <a:pPr algn="r" indent="0" marL="0">
+            <a:pPr marL="0" indent="0" algn="r">
               <a:buNone/>
             </a:pPr>
             <a:r>
@@ -3629,40 +3350,16 @@
           </a:p>
         </p:txBody>
       </p:sp>
-      <p:pic>
-        <p:nvPicPr>
-          <p:cNvPr id="7" name="Image 0" descr="H:\project\OpenGU\GULib-master\report\0417_5003report\figures\report_figures\fig2_grapheraser_shard.png">    </p:cNvPr>
-          <p:cNvPicPr>
-            <a:picLocks noChangeAspect="1"/>
-          </p:cNvPicPr>
-          <p:nvPr/>
-        </p:nvPicPr>
-        <p:blipFill>
-          <a:blip r:embed="rId1"/>
-          <a:stretch>
-            <a:fillRect/>
-          </a:stretch>
-        </p:blipFill>
-        <p:spPr>
-          <a:xfrm>
-            <a:off x="621792" y="1024128"/>
-            <a:ext cx="4800600" cy="3401568"/>
-          </a:xfrm>
-          <a:prstGeom prst="rect">
-            <a:avLst/>
-          </a:prstGeom>
-        </p:spPr>
-      </p:pic>
-      <p:sp>
-        <p:nvSpPr>
-          <p:cNvPr id="8" name="Text 5"/>
-          <p:cNvSpPr/>
-          <p:nvPr/>
-        </p:nvSpPr>
-        <p:spPr>
-          <a:xfrm>
-            <a:off x="658368" y="4462272"/>
-            <a:ext cx="4709160" cy="146304"/>
+      <p:sp>
+        <p:nvSpPr>
+          <p:cNvPr id="7" name="Text 5"/>
+          <p:cNvSpPr/>
+          <p:nvPr/>
+        </p:nvSpPr>
+        <p:spPr>
+          <a:xfrm>
+            <a:off x="621792" y="768096"/>
+            <a:ext cx="7498080" cy="228600"/>
           </a:xfrm>
           <a:prstGeom prst="rect">
             <a:avLst/>
@@ -3674,38 +3371,152 @@
           <a:bodyPr wrap="square" lIns="0" tIns="0" rIns="0" bIns="0" rtlCol="0" anchor="ctr"/>
           <a:lstStyle/>
           <a:p>
-            <a:pPr indent="0" marL="0">
-              <a:buNone/>
-            </a:pPr>
-            <a:r>
-              <a:rPr lang="en-US" sz="900" i="1" dirty="0">
-                <a:solidFill>
-                  <a:srgbClr val="667085"/>
-                </a:solidFill>
-                <a:latin typeface="Times New Roman" pitchFamily="34" charset="0"/>
-                <a:ea typeface="Times New Roman" pitchFamily="34" charset="-122"/>
-                <a:cs typeface="Times New Roman" pitchFamily="34" charset="-120"/>
-              </a:rPr>
-              <a:t>Observed shard-level score shift for GraphEraser on Cora/GCN.</a:t>
-            </a:r>
-            <a:endParaRPr lang="en-US" sz="900" dirty="0"/>
-          </a:p>
-        </p:txBody>
-      </p:sp>
-      <p:sp>
-        <p:nvSpPr>
-          <p:cNvPr id="9" name="Shape 6"/>
-          <p:cNvSpPr/>
-          <p:nvPr/>
-        </p:nvSpPr>
-        <p:spPr>
-          <a:xfrm>
-            <a:off x="5669280" y="1051560"/>
-            <a:ext cx="2697480" cy="896112"/>
+            <a:pPr marL="0" indent="0">
+              <a:buNone/>
+            </a:pPr>
+            <a:r>
+              <a:rPr lang="en-US" sz="1670" b="1" dirty="0">
+                <a:solidFill>
+                  <a:srgbClr val="223A5E"/>
+                </a:solidFill>
+                <a:latin typeface="Times New Roman" pitchFamily="34" charset="0"/>
+                <a:ea typeface="Times New Roman" pitchFamily="34" charset="-122"/>
+                <a:cs typeface="Times New Roman" pitchFamily="34" charset="-120"/>
+              </a:rPr>
+              <a:t>relative_f1_drop says the attack beats the k=5 method baseline; retrain_gap and collateral metrics explain where the extra damage comes from.</a:t>
+            </a:r>
+            <a:endParaRPr lang="en-US" sz="1670" dirty="0"/>
+          </a:p>
+        </p:txBody>
+      </p:sp>
+      <p:sp>
+        <p:nvSpPr>
+          <p:cNvPr id="8" name="Shape 6"/>
+          <p:cNvSpPr/>
+          <p:nvPr/>
+        </p:nvSpPr>
+        <p:spPr>
+          <a:xfrm>
+            <a:off x="713232" y="1371600"/>
+            <a:ext cx="2487168" cy="2267712"/>
           </a:xfrm>
           <a:prstGeom prst="roundRect">
             <a:avLst>
-              <a:gd name="adj" fmla="val 5102"/>
+              <a:gd name="adj" fmla="val 2016"/>
+            </a:avLst>
+          </a:prstGeom>
+          <a:solidFill>
+            <a:srgbClr val="FFFFFF"/>
+          </a:solidFill>
+          <a:ln w="13970">
+            <a:solidFill>
+              <a:srgbClr val="D9DEE7"/>
+            </a:solidFill>
+            <a:prstDash val="solid"/>
+          </a:ln>
+        </p:spPr>
+        <p:txBody>
+          <a:bodyPr/>
+          <a:lstStyle/>
+          <a:p>
+            <a:endParaRPr lang="zh-CN" altLang="en-US"/>
+          </a:p>
+        </p:txBody>
+      </p:sp>
+      <p:sp>
+        <p:nvSpPr>
+          <p:cNvPr id="9" name="Text 7"/>
+          <p:cNvSpPr/>
+          <p:nvPr/>
+        </p:nvSpPr>
+        <p:spPr>
+          <a:xfrm>
+            <a:off x="850392" y="1536192"/>
+            <a:ext cx="2212848" cy="182880"/>
+          </a:xfrm>
+          <a:prstGeom prst="rect">
+            <a:avLst/>
+          </a:prstGeom>
+          <a:noFill/>
+          <a:ln/>
+        </p:spPr>
+        <p:txBody>
+          <a:bodyPr wrap="square" lIns="0" tIns="0" rIns="0" bIns="0" rtlCol="0" anchor="ctr"/>
+          <a:lstStyle/>
+          <a:p>
+            <a:pPr marL="0" indent="0">
+              <a:buNone/>
+            </a:pPr>
+            <a:r>
+              <a:rPr lang="en-US" sz="1700" b="1" dirty="0">
+                <a:solidFill>
+                  <a:srgbClr val="223A5E"/>
+                </a:solidFill>
+                <a:latin typeface="Times New Roman" pitchFamily="34" charset="0"/>
+                <a:ea typeface="Times New Roman" pitchFamily="34" charset="-122"/>
+                <a:cs typeface="Times New Roman" pitchFamily="34" charset="-120"/>
+              </a:rPr>
+              <a:t>Attack success</a:t>
+            </a:r>
+            <a:endParaRPr lang="en-US" sz="1700" dirty="0"/>
+          </a:p>
+        </p:txBody>
+      </p:sp>
+      <p:sp>
+        <p:nvSpPr>
+          <p:cNvPr id="10" name="Text 8"/>
+          <p:cNvSpPr/>
+          <p:nvPr/>
+        </p:nvSpPr>
+        <p:spPr>
+          <a:xfrm>
+            <a:off x="850392" y="1783080"/>
+            <a:ext cx="2212848" cy="1764792"/>
+          </a:xfrm>
+          <a:prstGeom prst="rect">
+            <a:avLst/>
+          </a:prstGeom>
+          <a:noFill/>
+          <a:ln/>
+        </p:spPr>
+        <p:txBody>
+          <a:bodyPr wrap="square" lIns="0" tIns="0" rIns="0" bIns="0" rtlCol="0" anchor="ctr">
+            <a:normAutofit/>
+          </a:bodyPr>
+          <a:lstStyle/>
+          <a:p>
+            <a:pPr marL="0" indent="0">
+              <a:buNone/>
+            </a:pPr>
+            <a:r>
+              <a:rPr lang="en-US" sz="1220" dirty="0">
+                <a:solidFill>
+                  <a:srgbClr val="1E2630"/>
+                </a:solidFill>
+                <a:latin typeface="Times New Roman" pitchFamily="34" charset="0"/>
+                <a:ea typeface="Times New Roman" pitchFamily="34" charset="-122"/>
+                <a:cs typeface="Times New Roman" pitchFamily="34" charset="-120"/>
+              </a:rPr>
+              <a:t>relative_f1_drop tells us whether a structured attack causes more loss than the small random-trigger baseline.</a:t>
+            </a:r>
+            <a:endParaRPr lang="en-US" sz="1220" dirty="0"/>
+          </a:p>
+        </p:txBody>
+      </p:sp>
+      <p:sp>
+        <p:nvSpPr>
+          <p:cNvPr id="11" name="Shape 9"/>
+          <p:cNvSpPr/>
+          <p:nvPr/>
+        </p:nvSpPr>
+        <p:spPr>
+          <a:xfrm>
+            <a:off x="3337560" y="1371600"/>
+            <a:ext cx="2487168" cy="2267712"/>
+          </a:xfrm>
+          <a:prstGeom prst="roundRect">
+            <a:avLst>
+              <a:gd name="adj" fmla="val 2016"/>
             </a:avLst>
           </a:prstGeom>
           <a:solidFill>
@@ -3718,17 +3529,24 @@
             <a:prstDash val="solid"/>
           </a:ln>
         </p:spPr>
-      </p:sp>
-      <p:sp>
-        <p:nvSpPr>
-          <p:cNvPr id="10" name="Text 7"/>
-          <p:cNvSpPr/>
-          <p:nvPr/>
-        </p:nvSpPr>
-        <p:spPr>
-          <a:xfrm>
-            <a:off x="5806440" y="1143000"/>
-            <a:ext cx="2423160" cy="182880"/>
+        <p:txBody>
+          <a:bodyPr/>
+          <a:lstStyle/>
+          <a:p>
+            <a:endParaRPr lang="zh-CN" altLang="en-US"/>
+          </a:p>
+        </p:txBody>
+      </p:sp>
+      <p:sp>
+        <p:nvSpPr>
+          <p:cNvPr id="12" name="Text 10"/>
+          <p:cNvSpPr/>
+          <p:nvPr/>
+        </p:nvSpPr>
+        <p:spPr>
+          <a:xfrm>
+            <a:off x="3474720" y="1536192"/>
+            <a:ext cx="2212848" cy="182880"/>
           </a:xfrm>
           <a:prstGeom prst="rect">
             <a:avLst/>
@@ -3740,7 +3558,7 @@
           <a:bodyPr wrap="square" lIns="0" tIns="0" rIns="0" bIns="0" rtlCol="0" anchor="ctr"/>
           <a:lstStyle/>
           <a:p>
-            <a:pPr indent="0" marL="0">
+            <a:pPr marL="0" indent="0">
               <a:buNone/>
             </a:pPr>
             <a:r>
@@ -3752,7 +3570,7 @@
                 <a:ea typeface="Times New Roman" pitchFamily="34" charset="-122"/>
                 <a:cs typeface="Times New Roman" pitchFamily="34" charset="-120"/>
               </a:rPr>
-              <a:t>Observed pattern</a:t>
+              <a:t>Attribution</a:t>
             </a:r>
             <a:endParaRPr lang="en-US" sz="1700" dirty="0"/>
           </a:p>
@@ -3760,14 +3578,14 @@
       </p:sp>
       <p:sp>
         <p:nvSpPr>
-          <p:cNvPr id="11" name="Text 8"/>
-          <p:cNvSpPr/>
-          <p:nvPr/>
-        </p:nvSpPr>
-        <p:spPr>
-          <a:xfrm>
-            <a:off x="5806440" y="1389888"/>
-            <a:ext cx="2423160" cy="466344"/>
+          <p:cNvPr id="13" name="Text 11"/>
+          <p:cNvSpPr/>
+          <p:nvPr/>
+        </p:nvSpPr>
+        <p:spPr>
+          <a:xfrm>
+            <a:off x="3474720" y="1783080"/>
+            <a:ext cx="2212848" cy="1764792"/>
           </a:xfrm>
           <a:prstGeom prst="rect">
             <a:avLst/>
@@ -3781,7 +3599,7 @@
           </a:bodyPr>
           <a:lstStyle/>
           <a:p>
-            <a:pPr indent="0" marL="0">
+            <a:pPr marL="0" indent="0">
               <a:buNone/>
             </a:pPr>
             <a:r>
@@ -3793,7 +3611,7 @@
                 <a:ea typeface="Times New Roman" pitchFamily="34" charset="-122"/>
                 <a:cs typeface="Times New Roman" pitchFamily="34" charset="-120"/>
               </a:rPr>
-              <a:t>After-unlearning scores shift upward across the tested strategies, which is evidence for a shard protection effect in these settings.</a:t>
+              <a:t>retrain_gap isolates the additional approximation error by comparing approximate unlearning with exact retraining on the same deletion set.</a:t>
             </a:r>
             <a:endParaRPr lang="en-US" sz="1220" dirty="0"/>
           </a:p>
@@ -3801,18 +3619,18 @@
       </p:sp>
       <p:sp>
         <p:nvSpPr>
-          <p:cNvPr id="12" name="Shape 9"/>
-          <p:cNvSpPr/>
-          <p:nvPr/>
-        </p:nvSpPr>
-        <p:spPr>
-          <a:xfrm>
-            <a:off x="5669280" y="2148840"/>
-            <a:ext cx="2697480" cy="1060704"/>
+          <p:cNvPr id="14" name="Shape 12"/>
+          <p:cNvSpPr/>
+          <p:nvPr/>
+        </p:nvSpPr>
+        <p:spPr>
+          <a:xfrm>
+            <a:off x="5961888" y="1371600"/>
+            <a:ext cx="2487168" cy="2267712"/>
           </a:xfrm>
           <a:prstGeom prst="roundRect">
             <a:avLst>
-              <a:gd name="adj" fmla="val 4310"/>
+              <a:gd name="adj" fmla="val 2016"/>
             </a:avLst>
           </a:prstGeom>
           <a:solidFill>
@@ -3825,17 +3643,24 @@
             <a:prstDash val="solid"/>
           </a:ln>
         </p:spPr>
-      </p:sp>
-      <p:sp>
-        <p:nvSpPr>
-          <p:cNvPr id="13" name="Text 10"/>
-          <p:cNvSpPr/>
-          <p:nvPr/>
-        </p:nvSpPr>
-        <p:spPr>
-          <a:xfrm>
-            <a:off x="5806440" y="2240280"/>
-            <a:ext cx="2423160" cy="182880"/>
+        <p:txBody>
+          <a:bodyPr/>
+          <a:lstStyle/>
+          <a:p>
+            <a:endParaRPr lang="zh-CN" altLang="en-US"/>
+          </a:p>
+        </p:txBody>
+      </p:sp>
+      <p:sp>
+        <p:nvSpPr>
+          <p:cNvPr id="15" name="Text 13"/>
+          <p:cNvSpPr/>
+          <p:nvPr/>
+        </p:nvSpPr>
+        <p:spPr>
+          <a:xfrm>
+            <a:off x="6099048" y="1536192"/>
+            <a:ext cx="2212848" cy="182880"/>
           </a:xfrm>
           <a:prstGeom prst="rect">
             <a:avLst/>
@@ -3847,7 +3672,7 @@
           <a:bodyPr wrap="square" lIns="0" tIns="0" rIns="0" bIns="0" rtlCol="0" anchor="ctr"/>
           <a:lstStyle/>
           <a:p>
-            <a:pPr indent="0" marL="0">
+            <a:pPr marL="0" indent="0">
               <a:buNone/>
             </a:pPr>
             <a:r>
@@ -3859,7 +3684,7 @@
                 <a:ea typeface="Times New Roman" pitchFamily="34" charset="-122"/>
                 <a:cs typeface="Times New Roman" pitchFamily="34" charset="-120"/>
               </a:rPr>
-              <a:t>Why it matters</a:t>
+              <a:t>Spillover</a:t>
             </a:r>
             <a:endParaRPr lang="en-US" sz="1700" dirty="0"/>
           </a:p>
@@ -3867,14 +3692,14 @@
       </p:sp>
       <p:sp>
         <p:nvSpPr>
-          <p:cNvPr id="14" name="Text 11"/>
-          <p:cNvSpPr/>
-          <p:nvPr/>
-        </p:nvSpPr>
-        <p:spPr>
-          <a:xfrm>
-            <a:off x="5806440" y="2487168"/>
-            <a:ext cx="2423160" cy="630936"/>
+          <p:cNvPr id="16" name="Text 14"/>
+          <p:cNvSpPr/>
+          <p:nvPr/>
+        </p:nvSpPr>
+        <p:spPr>
+          <a:xfrm>
+            <a:off x="6099048" y="1783080"/>
+            <a:ext cx="2212848" cy="1764792"/>
           </a:xfrm>
           <a:prstGeom prst="rect">
             <a:avLst/>
@@ -3888,7 +3713,7 @@
           </a:bodyPr>
           <a:lstStyle/>
           <a:p>
-            <a:pPr indent="0" marL="0">
+            <a:pPr marL="0" indent="0">
               <a:buNone/>
             </a:pPr>
             <a:r>
@@ -3900,7 +3725,7 @@
                 <a:ea typeface="Times New Roman" pitchFamily="34" charset="-122"/>
                 <a:cs typeface="Times New Roman" pitchFamily="34" charset="-120"/>
               </a:rPr>
-              <a:t>This is why raw utility drop alone is not the right cross-family metric here; the k=5 relative baseline is the cleaner comparison lens.</a:t>
+              <a:t>fraction_flipped and mean_pred_shift show how strongly retained non-target nodes are disturbed.</a:t>
             </a:r>
             <a:endParaRPr lang="en-US" sz="1220" dirty="0"/>
           </a:p>
@@ -3908,41 +3733,89 @@
       </p:sp>
       <p:sp>
         <p:nvSpPr>
-          <p:cNvPr id="15" name="Shape 12"/>
-          <p:cNvSpPr/>
-          <p:nvPr/>
-        </p:nvSpPr>
-        <p:spPr>
-          <a:xfrm>
-            <a:off x="5669280" y="3520440"/>
-            <a:ext cx="2697480" cy="868680"/>
+          <p:cNvPr id="17" name="Text 15"/>
+          <p:cNvSpPr/>
+          <p:nvPr/>
+        </p:nvSpPr>
+        <p:spPr>
+          <a:xfrm>
+            <a:off x="749808" y="3749040"/>
+            <a:ext cx="1737360" cy="146304"/>
+          </a:xfrm>
+          <a:prstGeom prst="rect">
+            <a:avLst/>
+          </a:prstGeom>
+          <a:noFill/>
+          <a:ln/>
+        </p:spPr>
+        <p:txBody>
+          <a:bodyPr wrap="square" lIns="0" tIns="0" rIns="0" bIns="0" rtlCol="0" anchor="ctr"/>
+          <a:lstStyle/>
+          <a:p>
+            <a:pPr marL="0" indent="0">
+              <a:buNone/>
+            </a:pPr>
+            <a:r>
+              <a:rPr lang="en-US" sz="1340" b="1" dirty="0">
+                <a:solidFill>
+                  <a:srgbClr val="223A5E"/>
+                </a:solidFill>
+                <a:latin typeface="Times New Roman" pitchFamily="34" charset="0"/>
+                <a:ea typeface="Times New Roman" pitchFamily="34" charset="-122"/>
+                <a:cs typeface="Times New Roman" pitchFamily="34" charset="-120"/>
+              </a:rPr>
+              <a:t>Collateral evidence</a:t>
+            </a:r>
+            <a:endParaRPr lang="en-US" sz="1340" dirty="0"/>
+          </a:p>
+        </p:txBody>
+      </p:sp>
+      <p:sp>
+        <p:nvSpPr>
+          <p:cNvPr id="18" name="Shape 16"/>
+          <p:cNvSpPr/>
+          <p:nvPr/>
+        </p:nvSpPr>
+        <p:spPr>
+          <a:xfrm>
+            <a:off x="1847088" y="3658138"/>
+            <a:ext cx="6565392" cy="877824"/>
           </a:xfrm>
           <a:prstGeom prst="roundRect">
             <a:avLst>
-              <a:gd name="adj" fmla="val 5263"/>
+              <a:gd name="adj" fmla="val 4167"/>
             </a:avLst>
           </a:prstGeom>
           <a:solidFill>
-            <a:srgbClr val="A6404B"/>
+            <a:srgbClr val="223A5E"/>
           </a:solidFill>
-          <a:ln w="13970">
+          <a:ln w="12700">
             <a:solidFill>
-              <a:srgbClr val="A6404B"/>
+              <a:srgbClr val="223A5E">
+                <a:alpha val="0"/>
+              </a:srgbClr>
             </a:solidFill>
             <a:prstDash val="solid"/>
           </a:ln>
         </p:spPr>
-      </p:sp>
-      <p:sp>
-        <p:nvSpPr>
-          <p:cNvPr id="16" name="Text 13"/>
-          <p:cNvSpPr/>
-          <p:nvPr/>
-        </p:nvSpPr>
-        <p:spPr>
-          <a:xfrm>
-            <a:off x="5806440" y="3611880"/>
-            <a:ext cx="2423160" cy="182880"/>
+        <p:txBody>
+          <a:bodyPr/>
+          <a:lstStyle/>
+          <a:p>
+            <a:endParaRPr lang="zh-CN" altLang="en-US"/>
+          </a:p>
+        </p:txBody>
+      </p:sp>
+      <p:sp>
+        <p:nvSpPr>
+          <p:cNvPr id="19" name="Text 17"/>
+          <p:cNvSpPr/>
+          <p:nvPr/>
+        </p:nvSpPr>
+        <p:spPr>
+          <a:xfrm>
+            <a:off x="1993392" y="3767328"/>
+            <a:ext cx="6272784" cy="109728"/>
           </a:xfrm>
           <a:prstGeom prst="rect">
             <a:avLst/>
@@ -3954,34 +3827,151 @@
           <a:bodyPr wrap="square" lIns="0" tIns="0" rIns="0" bIns="0" rtlCol="0" anchor="ctr"/>
           <a:lstStyle/>
           <a:p>
-            <a:pPr indent="0" marL="0">
-              <a:buNone/>
-            </a:pPr>
-            <a:r>
-              <a:rPr lang="en-US" sz="1700" b="1" dirty="0">
-                <a:solidFill>
-                  <a:srgbClr val="FFFFFF"/>
-                </a:solidFill>
-                <a:latin typeface="Times New Roman" pitchFamily="34" charset="0"/>
-                <a:ea typeface="Times New Roman" pitchFamily="34" charset="-122"/>
-                <a:cs typeface="Times New Roman" pitchFamily="34" charset="-120"/>
-              </a:rPr>
-              <a:t>Caution</a:t>
-            </a:r>
-            <a:endParaRPr lang="en-US" sz="1700" dirty="0"/>
-          </a:p>
-        </p:txBody>
-      </p:sp>
-      <p:sp>
-        <p:nvSpPr>
-          <p:cNvPr id="17" name="Text 14"/>
-          <p:cNvSpPr/>
-          <p:nvPr/>
-        </p:nvSpPr>
-        <p:spPr>
-          <a:xfrm>
-            <a:off x="5806440" y="3858768"/>
-            <a:ext cx="2423160" cy="438912"/>
+            <a:pPr marL="0" indent="0">
+              <a:buNone/>
+            </a:pPr>
+            <a:r>
+              <a:rPr lang="en-US" sz="960" b="1" dirty="0">
+                <a:solidFill>
+                  <a:srgbClr val="F7F5F1"/>
+                </a:solidFill>
+                <a:latin typeface="Times New Roman" pitchFamily="34" charset="0"/>
+                <a:ea typeface="Times New Roman" pitchFamily="34" charset="-122"/>
+                <a:cs typeface="Times New Roman" pitchFamily="34" charset="-120"/>
+              </a:rPr>
+              <a:t>Method | Avg Gap | Pred Shift / Flip</a:t>
+            </a:r>
+            <a:endParaRPr lang="en-US" sz="960" dirty="0"/>
+          </a:p>
+        </p:txBody>
+      </p:sp>
+      <p:sp>
+        <p:nvSpPr>
+          <p:cNvPr id="20" name="Text 18"/>
+          <p:cNvSpPr/>
+          <p:nvPr/>
+        </p:nvSpPr>
+        <p:spPr>
+          <a:xfrm>
+            <a:off x="1993392" y="3941064"/>
+            <a:ext cx="6272784" cy="100584"/>
+          </a:xfrm>
+          <a:prstGeom prst="rect">
+            <a:avLst/>
+          </a:prstGeom>
+          <a:noFill/>
+          <a:ln/>
+        </p:spPr>
+        <p:txBody>
+          <a:bodyPr wrap="square" lIns="0" tIns="0" rIns="0" bIns="0" rtlCol="0" anchor="ctr"/>
+          <a:lstStyle/>
+          <a:p>
+            <a:pPr marL="0" indent="0">
+              <a:buNone/>
+            </a:pPr>
+            <a:r>
+              <a:rPr lang="en-US" sz="890" dirty="0">
+                <a:solidFill>
+                  <a:srgbClr val="F7F5F1"/>
+                </a:solidFill>
+                <a:latin typeface="Times New Roman" pitchFamily="34" charset="0"/>
+                <a:ea typeface="Times New Roman" pitchFamily="34" charset="-122"/>
+                <a:cs typeface="Times New Roman" pitchFamily="34" charset="-120"/>
+              </a:rPr>
+              <a:t>GNNDelete | 9.74% | 0.245 / 26.2%</a:t>
+            </a:r>
+            <a:endParaRPr lang="en-US" sz="890" dirty="0"/>
+          </a:p>
+        </p:txBody>
+      </p:sp>
+      <p:sp>
+        <p:nvSpPr>
+          <p:cNvPr id="21" name="Text 19"/>
+          <p:cNvSpPr/>
+          <p:nvPr/>
+        </p:nvSpPr>
+        <p:spPr>
+          <a:xfrm>
+            <a:off x="1993392" y="4105656"/>
+            <a:ext cx="6272784" cy="100584"/>
+          </a:xfrm>
+          <a:prstGeom prst="rect">
+            <a:avLst/>
+          </a:prstGeom>
+          <a:noFill/>
+          <a:ln/>
+        </p:spPr>
+        <p:txBody>
+          <a:bodyPr wrap="square" lIns="0" tIns="0" rIns="0" bIns="0" rtlCol="0" anchor="ctr"/>
+          <a:lstStyle/>
+          <a:p>
+            <a:pPr marL="0" indent="0">
+              <a:buNone/>
+            </a:pPr>
+            <a:r>
+              <a:rPr lang="en-US" sz="890" dirty="0">
+                <a:solidFill>
+                  <a:srgbClr val="F7F5F1"/>
+                </a:solidFill>
+                <a:latin typeface="Times New Roman" pitchFamily="34" charset="0"/>
+                <a:ea typeface="Times New Roman" pitchFamily="34" charset="-122"/>
+                <a:cs typeface="Times New Roman" pitchFamily="34" charset="-120"/>
+              </a:rPr>
+              <a:t>GraphEraser | 0.13% | 0.265 / 18.4%</a:t>
+            </a:r>
+            <a:endParaRPr lang="en-US" sz="890" dirty="0"/>
+          </a:p>
+        </p:txBody>
+      </p:sp>
+      <p:sp>
+        <p:nvSpPr>
+          <p:cNvPr id="22" name="Text 20"/>
+          <p:cNvSpPr/>
+          <p:nvPr/>
+        </p:nvSpPr>
+        <p:spPr>
+          <a:xfrm>
+            <a:off x="1993392" y="4270248"/>
+            <a:ext cx="6272784" cy="100584"/>
+          </a:xfrm>
+          <a:prstGeom prst="rect">
+            <a:avLst/>
+          </a:prstGeom>
+          <a:noFill/>
+          <a:ln/>
+        </p:spPr>
+        <p:txBody>
+          <a:bodyPr wrap="square" lIns="0" tIns="0" rIns="0" bIns="0" rtlCol="0" anchor="ctr"/>
+          <a:lstStyle/>
+          <a:p>
+            <a:pPr marL="0" indent="0">
+              <a:buNone/>
+            </a:pPr>
+            <a:r>
+              <a:rPr lang="en-US" sz="890" dirty="0">
+                <a:solidFill>
+                  <a:srgbClr val="F7F5F1"/>
+                </a:solidFill>
+                <a:latin typeface="Times New Roman" pitchFamily="34" charset="0"/>
+                <a:ea typeface="Times New Roman" pitchFamily="34" charset="-122"/>
+                <a:cs typeface="Times New Roman" pitchFamily="34" charset="-120"/>
+              </a:rPr>
+              <a:t>GIF | -0.34% | 0.024 / 3.1%</a:t>
+            </a:r>
+            <a:endParaRPr lang="en-US" sz="890" dirty="0"/>
+          </a:p>
+        </p:txBody>
+      </p:sp>
+      <p:sp>
+        <p:nvSpPr>
+          <p:cNvPr id="23" name="Text 21"/>
+          <p:cNvSpPr/>
+          <p:nvPr/>
+        </p:nvSpPr>
+        <p:spPr>
+          <a:xfrm>
+            <a:off x="749808" y="4572000"/>
+            <a:ext cx="7571232" cy="109728"/>
           </a:xfrm>
           <a:prstGeom prst="rect">
             <a:avLst/>
@@ -3995,21 +3985,21 @@
           </a:bodyPr>
           <a:lstStyle/>
           <a:p>
-            <a:pPr indent="0" marL="0">
-              <a:buNone/>
-            </a:pPr>
-            <a:r>
-              <a:rPr lang="en-US" sz="1220" dirty="0">
-                <a:solidFill>
-                  <a:srgbClr val="FFFFFF"/>
-                </a:solidFill>
-                <a:latin typeface="Times New Roman" pitchFamily="34" charset="0"/>
-                <a:ea typeface="Times New Roman" pitchFamily="34" charset="-122"/>
-                <a:cs typeface="Times New Roman" pitchFamily="34" charset="-120"/>
-              </a:rPr>
-              <a:t>This remains setting-specific evidence, not a claim of universal robustness.</a:t>
-            </a:r>
-            <a:endParaRPr lang="en-US" sz="1220" dirty="0"/>
+            <a:pPr marL="0" indent="0">
+              <a:buNone/>
+            </a:pPr>
+            <a:r>
+              <a:rPr lang="en-US" sz="950" dirty="0">
+                <a:solidFill>
+                  <a:srgbClr val="667085"/>
+                </a:solidFill>
+                <a:latin typeface="Times New Roman" pitchFamily="34" charset="0"/>
+                <a:ea typeface="Times New Roman" pitchFamily="34" charset="-122"/>
+                <a:cs typeface="Times New Roman" pitchFamily="34" charset="-120"/>
+              </a:rPr>
+              <a:t>Read this as a compact anchor from the report-level collateral table: GNNDelete combines the largest retrain gap with the strongest retained-node disturbance.</a:t>
+            </a:r>
+            <a:endParaRPr lang="en-US" sz="950" dirty="0"/>
           </a:p>
         </p:txBody>
       </p:sp>
@@ -4027,8 +4017,9 @@
     <p:bg>
       <p:bgPr>
         <a:solidFill>
-          <a:srgbClr val="FFFFFF"/>
+          <a:srgbClr val="F7F5F1"/>
         </a:solidFill>
+        <a:effectLst/>
       </p:bgPr>
     </p:bg>
     <p:spTree>
@@ -4071,6 +4062,13 @@
             <a:prstDash val="solid"/>
           </a:ln>
         </p:spPr>
+        <p:txBody>
+          <a:bodyPr/>
+          <a:lstStyle/>
+          <a:p>
+            <a:endParaRPr lang="zh-CN" altLang="en-US"/>
+          </a:p>
+        </p:txBody>
       </p:sp>
       <p:sp>
         <p:nvSpPr>
@@ -4093,7 +4091,7 @@
           <a:bodyPr wrap="square" lIns="0" tIns="0" rIns="0" bIns="0" rtlCol="0" anchor="ctr"/>
           <a:lstStyle/>
           <a:p>
-            <a:pPr indent="0" marL="0">
+            <a:pPr marL="0" indent="0">
               <a:buNone/>
             </a:pPr>
             <a:r>
@@ -4105,7 +4103,7 @@
                 <a:ea typeface="Times New Roman" pitchFamily="34" charset="-122"/>
                 <a:cs typeface="Times New Roman" pitchFamily="34" charset="-120"/>
               </a:rPr>
-              <a:t>Statistical Support And Effect Size</a:t>
+              <a:t>GraphEraser And Shard Protection</a:t>
             </a:r>
             <a:endParaRPr lang="en-US" sz="2400" dirty="0"/>
           </a:p>
@@ -4132,7 +4130,7 @@
           <a:bodyPr wrap="square" lIns="0" tIns="0" rIns="0" bIns="0" rtlCol="0" anchor="ctr"/>
           <a:lstStyle/>
           <a:p>
-            <a:pPr algn="r" indent="0" marL="0">
+            <a:pPr marL="0" indent="0" algn="r">
               <a:buNone/>
             </a:pPr>
             <a:r>
@@ -4171,7 +4169,7 @@
           <a:bodyPr wrap="square" lIns="0" tIns="0" rIns="0" bIns="0" rtlCol="0" anchor="ctr"/>
           <a:lstStyle/>
           <a:p>
-            <a:pPr indent="0" marL="0">
+            <a:pPr marL="0" indent="0">
               <a:buNone/>
             </a:pPr>
             <a:r>
@@ -4210,7 +4208,7 @@
           <a:bodyPr wrap="square" lIns="0" tIns="0" rIns="0" bIns="0" rtlCol="0" anchor="ctr"/>
           <a:lstStyle/>
           <a:p>
-            <a:pPr algn="r" indent="0" marL="0">
+            <a:pPr marL="0" indent="0" algn="r">
               <a:buNone/>
             </a:pPr>
             <a:r>
@@ -4230,62 +4228,38 @@
       </p:sp>
       <p:pic>
         <p:nvPicPr>
-          <p:cNvPr id="7" name="Image 0" descr="H:\project\OpenGU\GULib-master\report\0417_5003report\figures\paper_figures\FIG-4a_Significance.png">    </p:cNvPr>
+          <p:cNvPr id="7" name="Image 0" descr="H:\project\OpenGU\GULib-master\report\0417_5003report\figures\report_figures\fig2_grapheraser_shard.png"/>
           <p:cNvPicPr>
             <a:picLocks noChangeAspect="1"/>
           </p:cNvPicPr>
           <p:nvPr/>
         </p:nvPicPr>
         <p:blipFill>
-          <a:blip r:embed="rId1"/>
+          <a:blip r:embed="rId3"/>
           <a:stretch>
             <a:fillRect/>
           </a:stretch>
         </p:blipFill>
         <p:spPr>
           <a:xfrm>
-            <a:off x="530352" y="932688"/>
-            <a:ext cx="3794760" cy="3035808"/>
+            <a:off x="621792" y="1024128"/>
+            <a:ext cx="4800600" cy="3401568"/>
           </a:xfrm>
           <a:prstGeom prst="rect">
             <a:avLst/>
           </a:prstGeom>
         </p:spPr>
       </p:pic>
-      <p:pic>
-        <p:nvPicPr>
-          <p:cNvPr id="8" name="Image 1" descr="H:\project\OpenGU\GULib-master\report\0417_5003report\figures\paper_figures\FIG-4b_Effect.png">    </p:cNvPr>
-          <p:cNvPicPr>
-            <a:picLocks noChangeAspect="1"/>
-          </p:cNvPicPr>
-          <p:nvPr/>
-        </p:nvPicPr>
-        <p:blipFill>
-          <a:blip r:embed="rId2"/>
-          <a:stretch>
-            <a:fillRect/>
-          </a:stretch>
-        </p:blipFill>
-        <p:spPr>
-          <a:xfrm>
-            <a:off x="4754880" y="932688"/>
-            <a:ext cx="3794760" cy="3035808"/>
-          </a:xfrm>
-          <a:prstGeom prst="rect">
-            <a:avLst/>
-          </a:prstGeom>
-        </p:spPr>
-      </p:pic>
-      <p:sp>
-        <p:nvSpPr>
-          <p:cNvPr id="9" name="Text 5"/>
-          <p:cNvSpPr/>
-          <p:nvPr/>
-        </p:nvSpPr>
-        <p:spPr>
-          <a:xfrm>
-            <a:off x="548640" y="4078224"/>
-            <a:ext cx="3730752" cy="146304"/>
+      <p:sp>
+        <p:nvSpPr>
+          <p:cNvPr id="8" name="Text 5"/>
+          <p:cNvSpPr/>
+          <p:nvPr/>
+        </p:nvSpPr>
+        <p:spPr>
+          <a:xfrm>
+            <a:off x="658368" y="4462272"/>
+            <a:ext cx="4709160" cy="146304"/>
           </a:xfrm>
           <a:prstGeom prst="rect">
             <a:avLst/>
@@ -4297,7 +4271,7 @@
           <a:bodyPr wrap="square" lIns="0" tIns="0" rIns="0" bIns="0" rtlCol="0" anchor="ctr"/>
           <a:lstStyle/>
           <a:p>
-            <a:pPr indent="0" marL="0">
+            <a:pPr marL="0" indent="0">
               <a:buNone/>
             </a:pPr>
             <a:r>
@@ -4309,7 +4283,7 @@
                 <a:ea typeface="Times New Roman" pitchFamily="34" charset="-122"/>
                 <a:cs typeface="Times New Roman" pitchFamily="34" charset="-120"/>
               </a:rPr>
-              <a:t>Figure 4a. Statistical support against random deletion.</a:t>
+              <a:t>Observed shard-level score shift for GraphEraser on Cora/GCN.</a:t>
             </a:r>
             <a:endParaRPr lang="en-US" sz="900" dirty="0"/>
           </a:p>
@@ -4317,57 +4291,132 @@
       </p:sp>
       <p:sp>
         <p:nvSpPr>
-          <p:cNvPr id="10" name="Text 6"/>
-          <p:cNvSpPr/>
-          <p:nvPr/>
-        </p:nvSpPr>
-        <p:spPr>
-          <a:xfrm>
-            <a:off x="4773168" y="4078224"/>
-            <a:ext cx="3730752" cy="146304"/>
-          </a:xfrm>
-          <a:prstGeom prst="rect">
-            <a:avLst/>
-          </a:prstGeom>
-          <a:noFill/>
-          <a:ln/>
-        </p:spPr>
-        <p:txBody>
-          <a:bodyPr wrap="square" lIns="0" tIns="0" rIns="0" bIns="0" rtlCol="0" anchor="ctr"/>
-          <a:lstStyle/>
-          <a:p>
-            <a:pPr indent="0" marL="0">
-              <a:buNone/>
-            </a:pPr>
-            <a:r>
-              <a:rPr lang="en-US" sz="900" i="1" dirty="0">
-                <a:solidFill>
-                  <a:srgbClr val="667085"/>
-                </a:solidFill>
-                <a:latin typeface="Times New Roman" pitchFamily="34" charset="0"/>
-                <a:ea typeface="Times New Roman" pitchFamily="34" charset="-122"/>
-                <a:cs typeface="Times New Roman" pitchFamily="34" charset="-120"/>
-              </a:rPr>
-              <a:t>Figure 4b. Effect size beyond random deletion.</a:t>
-            </a:r>
-            <a:endParaRPr lang="en-US" sz="900" dirty="0"/>
-          </a:p>
-        </p:txBody>
-      </p:sp>
-      <p:sp>
-        <p:nvSpPr>
-          <p:cNvPr id="11" name="Shape 7"/>
-          <p:cNvSpPr/>
-          <p:nvPr/>
-        </p:nvSpPr>
-        <p:spPr>
-          <a:xfrm>
-            <a:off x="822960" y="4370832"/>
-            <a:ext cx="3246120" cy="384048"/>
+          <p:cNvPr id="9" name="Shape 6"/>
+          <p:cNvSpPr/>
+          <p:nvPr/>
+        </p:nvSpPr>
+        <p:spPr>
+          <a:xfrm>
+            <a:off x="5669280" y="1005840"/>
+            <a:ext cx="2697480" cy="1051560"/>
           </a:xfrm>
           <a:prstGeom prst="roundRect">
             <a:avLst>
-              <a:gd name="adj" fmla="val 11905"/>
+              <a:gd name="adj" fmla="val 4348"/>
+            </a:avLst>
+          </a:prstGeom>
+          <a:solidFill>
+            <a:srgbClr val="E8EEF5"/>
+          </a:solidFill>
+          <a:ln w="13970">
+            <a:solidFill>
+              <a:srgbClr val="E8EEF5"/>
+            </a:solidFill>
+            <a:prstDash val="solid"/>
+          </a:ln>
+        </p:spPr>
+        <p:txBody>
+          <a:bodyPr/>
+          <a:lstStyle/>
+          <a:p>
+            <a:endParaRPr lang="zh-CN" altLang="en-US"/>
+          </a:p>
+        </p:txBody>
+      </p:sp>
+      <p:sp>
+        <p:nvSpPr>
+          <p:cNvPr id="10" name="Text 7"/>
+          <p:cNvSpPr/>
+          <p:nvPr/>
+        </p:nvSpPr>
+        <p:spPr>
+          <a:xfrm>
+            <a:off x="5806440" y="1170432"/>
+            <a:ext cx="2423160" cy="182880"/>
+          </a:xfrm>
+          <a:prstGeom prst="rect">
+            <a:avLst/>
+          </a:prstGeom>
+          <a:noFill/>
+          <a:ln/>
+        </p:spPr>
+        <p:txBody>
+          <a:bodyPr wrap="square" lIns="0" tIns="0" rIns="0" bIns="0" rtlCol="0" anchor="ctr"/>
+          <a:lstStyle/>
+          <a:p>
+            <a:pPr marL="0" indent="0">
+              <a:buNone/>
+            </a:pPr>
+            <a:r>
+              <a:rPr lang="en-US" sz="1700" b="1" dirty="0">
+                <a:solidFill>
+                  <a:srgbClr val="223A5E"/>
+                </a:solidFill>
+                <a:latin typeface="Times New Roman" pitchFamily="34" charset="0"/>
+                <a:ea typeface="Times New Roman" pitchFamily="34" charset="-122"/>
+                <a:cs typeface="Times New Roman" pitchFamily="34" charset="-120"/>
+              </a:rPr>
+              <a:t>Observed pattern</a:t>
+            </a:r>
+            <a:endParaRPr lang="en-US" sz="1700" dirty="0"/>
+          </a:p>
+        </p:txBody>
+      </p:sp>
+      <p:sp>
+        <p:nvSpPr>
+          <p:cNvPr id="11" name="Text 8"/>
+          <p:cNvSpPr/>
+          <p:nvPr/>
+        </p:nvSpPr>
+        <p:spPr>
+          <a:xfrm>
+            <a:off x="5806440" y="1417320"/>
+            <a:ext cx="2423160" cy="548640"/>
+          </a:xfrm>
+          <a:prstGeom prst="rect">
+            <a:avLst/>
+          </a:prstGeom>
+          <a:noFill/>
+          <a:ln/>
+        </p:spPr>
+        <p:txBody>
+          <a:bodyPr wrap="square" lIns="0" tIns="0" rIns="0" bIns="0" rtlCol="0" anchor="ctr">
+            <a:normAutofit/>
+          </a:bodyPr>
+          <a:lstStyle/>
+          <a:p>
+            <a:pPr marL="0" indent="0">
+              <a:buNone/>
+            </a:pPr>
+            <a:r>
+              <a:rPr lang="en-US" sz="1220" dirty="0">
+                <a:solidFill>
+                  <a:srgbClr val="1E2630"/>
+                </a:solidFill>
+                <a:latin typeface="Times New Roman" pitchFamily="34" charset="0"/>
+                <a:ea typeface="Times New Roman" pitchFamily="34" charset="-122"/>
+                <a:cs typeface="Times New Roman" pitchFamily="34" charset="-120"/>
+              </a:rPr>
+              <a:t>After-unlearning scores shift upward across the tested strategies, which is evidence for a shard protection effect in these settings.</a:t>
+            </a:r>
+            <a:endParaRPr lang="en-US" sz="1220" dirty="0"/>
+          </a:p>
+        </p:txBody>
+      </p:sp>
+      <p:sp>
+        <p:nvSpPr>
+          <p:cNvPr id="12" name="Shape 9"/>
+          <p:cNvSpPr/>
+          <p:nvPr/>
+        </p:nvSpPr>
+        <p:spPr>
+          <a:xfrm>
+            <a:off x="5669280" y="2148840"/>
+            <a:ext cx="2697480" cy="1051560"/>
+          </a:xfrm>
+          <a:prstGeom prst="roundRect">
+            <a:avLst>
+              <a:gd name="adj" fmla="val 4348"/>
             </a:avLst>
           </a:prstGeom>
           <a:solidFill>
@@ -4380,17 +4429,24 @@
             <a:prstDash val="solid"/>
           </a:ln>
         </p:spPr>
-      </p:sp>
-      <p:sp>
-        <p:nvSpPr>
-          <p:cNvPr id="12" name="Text 8"/>
-          <p:cNvSpPr/>
-          <p:nvPr/>
-        </p:nvSpPr>
-        <p:spPr>
-          <a:xfrm>
-            <a:off x="960120" y="4462272"/>
-            <a:ext cx="2971800" cy="182880"/>
+        <p:txBody>
+          <a:bodyPr/>
+          <a:lstStyle/>
+          <a:p>
+            <a:endParaRPr lang="zh-CN" altLang="en-US"/>
+          </a:p>
+        </p:txBody>
+      </p:sp>
+      <p:sp>
+        <p:nvSpPr>
+          <p:cNvPr id="13" name="Text 10"/>
+          <p:cNvSpPr/>
+          <p:nvPr/>
+        </p:nvSpPr>
+        <p:spPr>
+          <a:xfrm>
+            <a:off x="5806440" y="2313432"/>
+            <a:ext cx="2423160" cy="182880"/>
           </a:xfrm>
           <a:prstGeom prst="rect">
             <a:avLst/>
@@ -4402,7 +4458,7 @@
           <a:bodyPr wrap="square" lIns="0" tIns="0" rIns="0" bIns="0" rtlCol="0" anchor="ctr"/>
           <a:lstStyle/>
           <a:p>
-            <a:pPr indent="0" marL="0">
+            <a:pPr marL="0" indent="0">
               <a:buNone/>
             </a:pPr>
             <a:r>
@@ -4414,7 +4470,7 @@
                 <a:ea typeface="Times New Roman" pitchFamily="34" charset="-122"/>
                 <a:cs typeface="Times New Roman" pitchFamily="34" charset="-120"/>
               </a:rPr>
-              <a:t>Support</a:t>
+              <a:t>Why it matters</a:t>
             </a:r>
             <a:endParaRPr lang="en-US" sz="1700" dirty="0"/>
           </a:p>
@@ -4422,14 +4478,14 @@
       </p:sp>
       <p:sp>
         <p:nvSpPr>
-          <p:cNvPr id="13" name="Text 9"/>
-          <p:cNvSpPr/>
-          <p:nvPr/>
-        </p:nvSpPr>
-        <p:spPr>
-          <a:xfrm>
-            <a:off x="960120" y="4709160"/>
-            <a:ext cx="2971800" cy="-45720"/>
+          <p:cNvPr id="14" name="Text 11"/>
+          <p:cNvSpPr/>
+          <p:nvPr/>
+        </p:nvSpPr>
+        <p:spPr>
+          <a:xfrm>
+            <a:off x="5806440" y="2560320"/>
+            <a:ext cx="2423160" cy="548640"/>
           </a:xfrm>
           <a:prstGeom prst="rect">
             <a:avLst/>
@@ -4443,7 +4499,7 @@
           </a:bodyPr>
           <a:lstStyle/>
           <a:p>
-            <a:pPr indent="0" marL="0">
+            <a:pPr marL="0" indent="0">
               <a:buNone/>
             </a:pPr>
             <a:r>
@@ -4455,7 +4511,7 @@
                 <a:ea typeface="Times New Roman" pitchFamily="34" charset="-122"/>
                 <a:cs typeface="Times New Roman" pitchFamily="34" charset="-120"/>
               </a:rPr>
-              <a:t>Figure 4a asks how strongly the attack-over-random difference is supported.</a:t>
+              <a:t>This is why raw utility drop alone is not the right cross-family metric here; the k=5 relative baseline is the cleaner comparison lens.</a:t>
             </a:r>
             <a:endParaRPr lang="en-US" sz="1220" dirty="0"/>
           </a:p>
@@ -4463,41 +4519,48 @@
       </p:sp>
       <p:sp>
         <p:nvSpPr>
-          <p:cNvPr id="14" name="Shape 10"/>
-          <p:cNvSpPr/>
-          <p:nvPr/>
-        </p:nvSpPr>
-        <p:spPr>
-          <a:xfrm>
-            <a:off x="4983480" y="4370832"/>
-            <a:ext cx="3246120" cy="384048"/>
+          <p:cNvPr id="15" name="Shape 12"/>
+          <p:cNvSpPr/>
+          <p:nvPr/>
+        </p:nvSpPr>
+        <p:spPr>
+          <a:xfrm>
+            <a:off x="5669280" y="3291840"/>
+            <a:ext cx="2697480" cy="960120"/>
           </a:xfrm>
           <a:prstGeom prst="roundRect">
             <a:avLst>
-              <a:gd name="adj" fmla="val 11905"/>
+              <a:gd name="adj" fmla="val 4762"/>
             </a:avLst>
           </a:prstGeom>
           <a:solidFill>
-            <a:srgbClr val="E8EEF5"/>
+            <a:srgbClr val="A6404B"/>
           </a:solidFill>
           <a:ln w="13970">
             <a:solidFill>
-              <a:srgbClr val="E8EEF5"/>
+              <a:srgbClr val="A6404B"/>
             </a:solidFill>
             <a:prstDash val="solid"/>
           </a:ln>
         </p:spPr>
-      </p:sp>
-      <p:sp>
-        <p:nvSpPr>
-          <p:cNvPr id="15" name="Text 11"/>
-          <p:cNvSpPr/>
-          <p:nvPr/>
-        </p:nvSpPr>
-        <p:spPr>
-          <a:xfrm>
-            <a:off x="5120640" y="4462272"/>
-            <a:ext cx="2971800" cy="182880"/>
+        <p:txBody>
+          <a:bodyPr/>
+          <a:lstStyle/>
+          <a:p>
+            <a:endParaRPr lang="zh-CN" altLang="en-US"/>
+          </a:p>
+        </p:txBody>
+      </p:sp>
+      <p:sp>
+        <p:nvSpPr>
+          <p:cNvPr id="16" name="Text 13"/>
+          <p:cNvSpPr/>
+          <p:nvPr/>
+        </p:nvSpPr>
+        <p:spPr>
+          <a:xfrm>
+            <a:off x="5806440" y="3456432"/>
+            <a:ext cx="2423160" cy="182880"/>
           </a:xfrm>
           <a:prstGeom prst="rect">
             <a:avLst/>
@@ -4509,19 +4572,19 @@
           <a:bodyPr wrap="square" lIns="0" tIns="0" rIns="0" bIns="0" rtlCol="0" anchor="ctr"/>
           <a:lstStyle/>
           <a:p>
-            <a:pPr indent="0" marL="0">
+            <a:pPr marL="0" indent="0">
               <a:buNone/>
             </a:pPr>
             <a:r>
               <a:rPr lang="en-US" sz="1700" b="1" dirty="0">
                 <a:solidFill>
-                  <a:srgbClr val="223A5E"/>
-                </a:solidFill>
-                <a:latin typeface="Times New Roman" pitchFamily="34" charset="0"/>
-                <a:ea typeface="Times New Roman" pitchFamily="34" charset="-122"/>
-                <a:cs typeface="Times New Roman" pitchFamily="34" charset="-120"/>
-              </a:rPr>
-              <a:t>Effect</a:t>
+                  <a:srgbClr val="FFFFFF"/>
+                </a:solidFill>
+                <a:latin typeface="Times New Roman" pitchFamily="34" charset="0"/>
+                <a:ea typeface="Times New Roman" pitchFamily="34" charset="-122"/>
+                <a:cs typeface="Times New Roman" pitchFamily="34" charset="-120"/>
+              </a:rPr>
+              <a:t>Caution</a:t>
             </a:r>
             <a:endParaRPr lang="en-US" sz="1700" dirty="0"/>
           </a:p>
@@ -4529,14 +4592,14 @@
       </p:sp>
       <p:sp>
         <p:nvSpPr>
-          <p:cNvPr id="16" name="Text 12"/>
-          <p:cNvSpPr/>
-          <p:nvPr/>
-        </p:nvSpPr>
-        <p:spPr>
-          <a:xfrm>
-            <a:off x="5120640" y="4709160"/>
-            <a:ext cx="2971800" cy="-45720"/>
+          <p:cNvPr id="17" name="Text 14"/>
+          <p:cNvSpPr/>
+          <p:nvPr/>
+        </p:nvSpPr>
+        <p:spPr>
+          <a:xfrm>
+            <a:off x="5806440" y="3703320"/>
+            <a:ext cx="2423160" cy="457200"/>
           </a:xfrm>
           <a:prstGeom prst="rect">
             <a:avLst/>
@@ -4550,19 +4613,19 @@
           </a:bodyPr>
           <a:lstStyle/>
           <a:p>
-            <a:pPr indent="0" marL="0">
+            <a:pPr marL="0" indent="0">
               <a:buNone/>
             </a:pPr>
             <a:r>
               <a:rPr lang="en-US" sz="1220" dirty="0">
                 <a:solidFill>
-                  <a:srgbClr val="1E2630"/>
-                </a:solidFill>
-                <a:latin typeface="Times New Roman" pitchFamily="34" charset="0"/>
-                <a:ea typeface="Times New Roman" pitchFamily="34" charset="-122"/>
-                <a:cs typeface="Times New Roman" pitchFamily="34" charset="-120"/>
-              </a:rPr>
-              <a:t>Figure 4b asks how large that extra damage is once support is established.</a:t>
+                  <a:srgbClr val="FFFFFF"/>
+                </a:solidFill>
+                <a:latin typeface="Times New Roman" pitchFamily="34" charset="0"/>
+                <a:ea typeface="Times New Roman" pitchFamily="34" charset="-122"/>
+                <a:cs typeface="Times New Roman" pitchFamily="34" charset="-120"/>
+              </a:rPr>
+              <a:t>This remains setting-specific evidence, not a claim of universal robustness.</a:t>
             </a:r>
             <a:endParaRPr lang="en-US" sz="1220" dirty="0"/>
           </a:p>
@@ -4582,8 +4645,9 @@
     <p:bg>
       <p:bgPr>
         <a:solidFill>
-          <a:srgbClr val="F7F5F1"/>
+          <a:srgbClr val="FFFFFF"/>
         </a:solidFill>
+        <a:effectLst/>
       </p:bgPr>
     </p:bg>
     <p:spTree>
@@ -4626,6 +4690,13 @@
             <a:prstDash val="solid"/>
           </a:ln>
         </p:spPr>
+        <p:txBody>
+          <a:bodyPr/>
+          <a:lstStyle/>
+          <a:p>
+            <a:endParaRPr lang="zh-CN" altLang="en-US"/>
+          </a:p>
+        </p:txBody>
       </p:sp>
       <p:sp>
         <p:nvSpPr>
@@ -4648,7 +4719,7 @@
           <a:bodyPr wrap="square" lIns="0" tIns="0" rIns="0" bIns="0" rtlCol="0" anchor="ctr"/>
           <a:lstStyle/>
           <a:p>
-            <a:pPr indent="0" marL="0">
+            <a:pPr marL="0" indent="0">
               <a:buNone/>
             </a:pPr>
             <a:r>
@@ -4660,7 +4731,7 @@
                 <a:ea typeface="Times New Roman" pitchFamily="34" charset="-122"/>
                 <a:cs typeface="Times New Roman" pitchFamily="34" charset="-120"/>
               </a:rPr>
-              <a:t>Limitations And Future Work</a:t>
+              <a:t>Statistical Support And Effect Size</a:t>
             </a:r>
             <a:endParaRPr lang="en-US" sz="2400" dirty="0"/>
           </a:p>
@@ -4687,7 +4758,7 @@
           <a:bodyPr wrap="square" lIns="0" tIns="0" rIns="0" bIns="0" rtlCol="0" anchor="ctr"/>
           <a:lstStyle/>
           <a:p>
-            <a:pPr algn="r" indent="0" marL="0">
+            <a:pPr marL="0" indent="0" algn="r">
               <a:buNone/>
             </a:pPr>
             <a:r>
@@ -4726,7 +4797,7 @@
           <a:bodyPr wrap="square" lIns="0" tIns="0" rIns="0" bIns="0" rtlCol="0" anchor="ctr"/>
           <a:lstStyle/>
           <a:p>
-            <a:pPr indent="0" marL="0">
+            <a:pPr marL="0" indent="0">
               <a:buNone/>
             </a:pPr>
             <a:r>
@@ -4765,7 +4836,7 @@
           <a:bodyPr wrap="square" lIns="0" tIns="0" rIns="0" bIns="0" rtlCol="0" anchor="ctr"/>
           <a:lstStyle/>
           <a:p>
-            <a:pPr algn="r" indent="0" marL="0">
+            <a:pPr marL="0" indent="0" algn="r">
               <a:buNone/>
             </a:pPr>
             <a:r>
@@ -4783,16 +4854,64 @@
           </a:p>
         </p:txBody>
       </p:sp>
-      <p:sp>
-        <p:nvSpPr>
-          <p:cNvPr id="7" name="Text 5"/>
-          <p:cNvSpPr/>
-          <p:nvPr/>
-        </p:nvSpPr>
-        <p:spPr>
-          <a:xfrm>
-            <a:off x="621792" y="768096"/>
-            <a:ext cx="7498080" cy="228600"/>
+      <p:pic>
+        <p:nvPicPr>
+          <p:cNvPr id="7" name="Image 0" descr="H:\project\OpenGU\GULib-master\report\0417_5003report\figures\paper_figures\FIG-4a_Significance.png"/>
+          <p:cNvPicPr>
+            <a:picLocks noChangeAspect="1"/>
+          </p:cNvPicPr>
+          <p:nvPr/>
+        </p:nvPicPr>
+        <p:blipFill>
+          <a:blip r:embed="rId3"/>
+          <a:stretch>
+            <a:fillRect/>
+          </a:stretch>
+        </p:blipFill>
+        <p:spPr>
+          <a:xfrm>
+            <a:off x="530352" y="932688"/>
+            <a:ext cx="3794760" cy="2788920"/>
+          </a:xfrm>
+          <a:prstGeom prst="rect">
+            <a:avLst/>
+          </a:prstGeom>
+        </p:spPr>
+      </p:pic>
+      <p:pic>
+        <p:nvPicPr>
+          <p:cNvPr id="8" name="Image 1" descr="H:\project\OpenGU\GULib-master\report\0417_5003report\figures\paper_figures\FIG-4b_Effect.png"/>
+          <p:cNvPicPr>
+            <a:picLocks noChangeAspect="1"/>
+          </p:cNvPicPr>
+          <p:nvPr/>
+        </p:nvPicPr>
+        <p:blipFill>
+          <a:blip r:embed="rId4"/>
+          <a:stretch>
+            <a:fillRect/>
+          </a:stretch>
+        </p:blipFill>
+        <p:spPr>
+          <a:xfrm>
+            <a:off x="4754880" y="932688"/>
+            <a:ext cx="3794760" cy="2788920"/>
+          </a:xfrm>
+          <a:prstGeom prst="rect">
+            <a:avLst/>
+          </a:prstGeom>
+        </p:spPr>
+      </p:pic>
+      <p:sp>
+        <p:nvSpPr>
+          <p:cNvPr id="9" name="Text 5"/>
+          <p:cNvSpPr/>
+          <p:nvPr/>
+        </p:nvSpPr>
+        <p:spPr>
+          <a:xfrm>
+            <a:off x="548640" y="3794760"/>
+            <a:ext cx="3730752" cy="146304"/>
           </a:xfrm>
           <a:prstGeom prst="rect">
             <a:avLst/>
@@ -4804,38 +4923,77 @@
           <a:bodyPr wrap="square" lIns="0" tIns="0" rIns="0" bIns="0" rtlCol="0" anchor="ctr"/>
           <a:lstStyle/>
           <a:p>
-            <a:pPr indent="0" marL="0">
-              <a:buNone/>
-            </a:pPr>
-            <a:r>
-              <a:rPr lang="en-US" sz="1750" b="1" dirty="0">
-                <a:solidFill>
-                  <a:srgbClr val="223A5E"/>
-                </a:solidFill>
-                <a:latin typeface="Times New Roman" pitchFamily="34" charset="0"/>
-                <a:ea typeface="Times New Roman" pitchFamily="34" charset="-122"/>
-                <a:cs typeface="Times New Roman" pitchFamily="34" charset="-120"/>
-              </a:rPr>
-              <a:t>The project is complete; these scope limits and follow-up directions define what this report does and does not claim.</a:t>
-            </a:r>
-            <a:endParaRPr lang="en-US" sz="1750" dirty="0"/>
-          </a:p>
-        </p:txBody>
-      </p:sp>
-      <p:sp>
-        <p:nvSpPr>
-          <p:cNvPr id="8" name="Shape 6"/>
-          <p:cNvSpPr/>
-          <p:nvPr/>
-        </p:nvSpPr>
-        <p:spPr>
-          <a:xfrm>
-            <a:off x="749808" y="1389888"/>
-            <a:ext cx="2697480" cy="1024128"/>
+            <a:pPr marL="0" indent="0">
+              <a:buNone/>
+            </a:pPr>
+            <a:r>
+              <a:rPr lang="en-US" sz="900" i="1" dirty="0">
+                <a:solidFill>
+                  <a:srgbClr val="667085"/>
+                </a:solidFill>
+                <a:latin typeface="Times New Roman" pitchFamily="34" charset="0"/>
+                <a:ea typeface="Times New Roman" pitchFamily="34" charset="-122"/>
+                <a:cs typeface="Times New Roman" pitchFamily="34" charset="-120"/>
+              </a:rPr>
+              <a:t>Figure 4a. Statistical support against random deletion.</a:t>
+            </a:r>
+            <a:endParaRPr lang="en-US" sz="900" dirty="0"/>
+          </a:p>
+        </p:txBody>
+      </p:sp>
+      <p:sp>
+        <p:nvSpPr>
+          <p:cNvPr id="10" name="Text 6"/>
+          <p:cNvSpPr/>
+          <p:nvPr/>
+        </p:nvSpPr>
+        <p:spPr>
+          <a:xfrm>
+            <a:off x="4773168" y="3794760"/>
+            <a:ext cx="3730752" cy="146304"/>
+          </a:xfrm>
+          <a:prstGeom prst="rect">
+            <a:avLst/>
+          </a:prstGeom>
+          <a:noFill/>
+          <a:ln/>
+        </p:spPr>
+        <p:txBody>
+          <a:bodyPr wrap="square" lIns="0" tIns="0" rIns="0" bIns="0" rtlCol="0" anchor="ctr"/>
+          <a:lstStyle/>
+          <a:p>
+            <a:pPr marL="0" indent="0">
+              <a:buNone/>
+            </a:pPr>
+            <a:r>
+              <a:rPr lang="en-US" sz="900" i="1" dirty="0">
+                <a:solidFill>
+                  <a:srgbClr val="667085"/>
+                </a:solidFill>
+                <a:latin typeface="Times New Roman" pitchFamily="34" charset="0"/>
+                <a:ea typeface="Times New Roman" pitchFamily="34" charset="-122"/>
+                <a:cs typeface="Times New Roman" pitchFamily="34" charset="-120"/>
+              </a:rPr>
+              <a:t>Figure 4b. Effect size beyond random deletion.</a:t>
+            </a:r>
+            <a:endParaRPr lang="en-US" sz="900" dirty="0"/>
+          </a:p>
+        </p:txBody>
+      </p:sp>
+      <p:sp>
+        <p:nvSpPr>
+          <p:cNvPr id="11" name="Shape 7"/>
+          <p:cNvSpPr/>
+          <p:nvPr/>
+        </p:nvSpPr>
+        <p:spPr>
+          <a:xfrm>
+            <a:off x="822960" y="4023360"/>
+            <a:ext cx="3246120" cy="685800"/>
           </a:xfrm>
           <a:prstGeom prst="roundRect">
             <a:avLst>
-              <a:gd name="adj" fmla="val 4464"/>
+              <a:gd name="adj" fmla="val 6667"/>
             </a:avLst>
           </a:prstGeom>
           <a:solidFill>
@@ -4848,17 +5006,24 @@
             <a:prstDash val="solid"/>
           </a:ln>
         </p:spPr>
-      </p:sp>
-      <p:sp>
-        <p:nvSpPr>
-          <p:cNvPr id="9" name="Text 7"/>
-          <p:cNvSpPr/>
-          <p:nvPr/>
-        </p:nvSpPr>
-        <p:spPr>
-          <a:xfrm>
-            <a:off x="886968" y="1481328"/>
-            <a:ext cx="2423160" cy="182880"/>
+        <p:txBody>
+          <a:bodyPr/>
+          <a:lstStyle/>
+          <a:p>
+            <a:endParaRPr lang="zh-CN" altLang="en-US"/>
+          </a:p>
+        </p:txBody>
+      </p:sp>
+      <p:sp>
+        <p:nvSpPr>
+          <p:cNvPr id="12" name="Text 8"/>
+          <p:cNvSpPr/>
+          <p:nvPr/>
+        </p:nvSpPr>
+        <p:spPr>
+          <a:xfrm>
+            <a:off x="960120" y="4187952"/>
+            <a:ext cx="2971800" cy="182880"/>
           </a:xfrm>
           <a:prstGeom prst="rect">
             <a:avLst/>
@@ -4870,7 +5035,7 @@
           <a:bodyPr wrap="square" lIns="0" tIns="0" rIns="0" bIns="0" rtlCol="0" anchor="ctr"/>
           <a:lstStyle/>
           <a:p>
-            <a:pPr indent="0" marL="0">
+            <a:pPr marL="0" indent="0">
               <a:buNone/>
             </a:pPr>
             <a:r>
@@ -4882,7 +5047,7 @@
                 <a:ea typeface="Times New Roman" pitchFamily="34" charset="-122"/>
                 <a:cs typeface="Times New Roman" pitchFamily="34" charset="-120"/>
               </a:rPr>
-              <a:t>Limitation 1</a:t>
+              <a:t>Support</a:t>
             </a:r>
             <a:endParaRPr lang="en-US" sz="1700" dirty="0"/>
           </a:p>
@@ -4890,14 +5055,14 @@
       </p:sp>
       <p:sp>
         <p:nvSpPr>
-          <p:cNvPr id="10" name="Text 8"/>
-          <p:cNvSpPr/>
-          <p:nvPr/>
-        </p:nvSpPr>
-        <p:spPr>
-          <a:xfrm>
-            <a:off x="886968" y="1728216"/>
-            <a:ext cx="2423160" cy="594360"/>
+          <p:cNvPr id="13" name="Text 9"/>
+          <p:cNvSpPr/>
+          <p:nvPr/>
+        </p:nvSpPr>
+        <p:spPr>
+          <a:xfrm>
+            <a:off x="960120" y="4434840"/>
+            <a:ext cx="2971800" cy="182880"/>
           </a:xfrm>
           <a:prstGeom prst="rect">
             <a:avLst/>
@@ -4911,7 +5076,7 @@
           </a:bodyPr>
           <a:lstStyle/>
           <a:p>
-            <a:pPr indent="0" marL="0">
+            <a:pPr marL="0" indent="0">
               <a:buNone/>
             </a:pPr>
             <a:r>
@@ -4923,7 +5088,7 @@
                 <a:ea typeface="Times New Roman" pitchFamily="34" charset="-122"/>
                 <a:cs typeface="Times New Roman" pitchFamily="34" charset="-120"/>
               </a:rPr>
-              <a:t>Evidence is concentrated on the tested citation benchmarks and backbones.</a:t>
+              <a:t>Figure 4a asks how strongly the attack-over-random difference is supported.</a:t>
             </a:r>
             <a:endParaRPr lang="en-US" sz="1220" dirty="0"/>
           </a:p>
@@ -4931,41 +5096,48 @@
       </p:sp>
       <p:sp>
         <p:nvSpPr>
-          <p:cNvPr id="11" name="Shape 9"/>
-          <p:cNvSpPr/>
-          <p:nvPr/>
-        </p:nvSpPr>
-        <p:spPr>
-          <a:xfrm>
-            <a:off x="749808" y="2688336"/>
-            <a:ext cx="2697480" cy="1024128"/>
+          <p:cNvPr id="14" name="Shape 10"/>
+          <p:cNvSpPr/>
+          <p:nvPr/>
+        </p:nvSpPr>
+        <p:spPr>
+          <a:xfrm>
+            <a:off x="4983480" y="4023360"/>
+            <a:ext cx="3246120" cy="685800"/>
           </a:xfrm>
           <a:prstGeom prst="roundRect">
             <a:avLst>
-              <a:gd name="adj" fmla="val 4464"/>
+              <a:gd name="adj" fmla="val 6667"/>
             </a:avLst>
           </a:prstGeom>
           <a:solidFill>
-            <a:srgbClr val="FFFFFF"/>
+            <a:srgbClr val="E8EEF5"/>
           </a:solidFill>
           <a:ln w="13970">
             <a:solidFill>
-              <a:srgbClr val="D9DEE7"/>
+              <a:srgbClr val="E8EEF5"/>
             </a:solidFill>
             <a:prstDash val="solid"/>
           </a:ln>
         </p:spPr>
-      </p:sp>
-      <p:sp>
-        <p:nvSpPr>
-          <p:cNvPr id="12" name="Text 10"/>
-          <p:cNvSpPr/>
-          <p:nvPr/>
-        </p:nvSpPr>
-        <p:spPr>
-          <a:xfrm>
-            <a:off x="886968" y="2779776"/>
-            <a:ext cx="2423160" cy="182880"/>
+        <p:txBody>
+          <a:bodyPr/>
+          <a:lstStyle/>
+          <a:p>
+            <a:endParaRPr lang="zh-CN" altLang="en-US"/>
+          </a:p>
+        </p:txBody>
+      </p:sp>
+      <p:sp>
+        <p:nvSpPr>
+          <p:cNvPr id="15" name="Text 11"/>
+          <p:cNvSpPr/>
+          <p:nvPr/>
+        </p:nvSpPr>
+        <p:spPr>
+          <a:xfrm>
+            <a:off x="5120640" y="4187952"/>
+            <a:ext cx="2971800" cy="182880"/>
           </a:xfrm>
           <a:prstGeom prst="rect">
             <a:avLst/>
@@ -4977,7 +5149,7 @@
           <a:bodyPr wrap="square" lIns="0" tIns="0" rIns="0" bIns="0" rtlCol="0" anchor="ctr"/>
           <a:lstStyle/>
           <a:p>
-            <a:pPr indent="0" marL="0">
+            <a:pPr marL="0" indent="0">
               <a:buNone/>
             </a:pPr>
             <a:r>
@@ -4989,7 +5161,7 @@
                 <a:ea typeface="Times New Roman" pitchFamily="34" charset="-122"/>
                 <a:cs typeface="Times New Roman" pitchFamily="34" charset="-120"/>
               </a:rPr>
-              <a:t>Limitation 2</a:t>
+              <a:t>Effect</a:t>
             </a:r>
             <a:endParaRPr lang="en-US" sz="1700" dirty="0"/>
           </a:p>
@@ -4997,14 +5169,14 @@
       </p:sp>
       <p:sp>
         <p:nvSpPr>
-          <p:cNvPr id="13" name="Text 11"/>
-          <p:cNvSpPr/>
-          <p:nvPr/>
-        </p:nvSpPr>
-        <p:spPr>
-          <a:xfrm>
-            <a:off x="886968" y="3026664"/>
-            <a:ext cx="2423160" cy="594360"/>
+          <p:cNvPr id="16" name="Text 12"/>
+          <p:cNvSpPr/>
+          <p:nvPr/>
+        </p:nvSpPr>
+        <p:spPr>
+          <a:xfrm>
+            <a:off x="5120640" y="4434840"/>
+            <a:ext cx="2971800" cy="182880"/>
           </a:xfrm>
           <a:prstGeom prst="rect">
             <a:avLst/>
@@ -5018,7 +5190,7 @@
           </a:bodyPr>
           <a:lstStyle/>
           <a:p>
-            <a:pPr indent="0" marL="0">
+            <a:pPr marL="0" indent="0">
               <a:buNone/>
             </a:pPr>
             <a:r>
@@ -5030,349 +5202,9 @@
                 <a:ea typeface="Times New Roman" pitchFamily="34" charset="-122"/>
                 <a:cs typeface="Times New Roman" pitchFamily="34" charset="-120"/>
               </a:rPr>
-              <a:t>The mechanism-level explanation for GNNDelete fragility is still incomplete.</a:t>
+              <a:t>Figure 4b asks how large that extra damage is once support is established.</a:t>
             </a:r>
             <a:endParaRPr lang="en-US" sz="1220" dirty="0"/>
-          </a:p>
-        </p:txBody>
-      </p:sp>
-      <p:sp>
-        <p:nvSpPr>
-          <p:cNvPr id="14" name="Shape 12"/>
-          <p:cNvSpPr/>
-          <p:nvPr/>
-        </p:nvSpPr>
-        <p:spPr>
-          <a:xfrm>
-            <a:off x="3703320" y="1389888"/>
-            <a:ext cx="2697480" cy="1024128"/>
-          </a:xfrm>
-          <a:prstGeom prst="roundRect">
-            <a:avLst>
-              <a:gd name="adj" fmla="val 4464"/>
-            </a:avLst>
-          </a:prstGeom>
-          <a:solidFill>
-            <a:srgbClr val="FFFFFF"/>
-          </a:solidFill>
-          <a:ln w="13970">
-            <a:solidFill>
-              <a:srgbClr val="D9DEE7"/>
-            </a:solidFill>
-            <a:prstDash val="solid"/>
-          </a:ln>
-        </p:spPr>
-      </p:sp>
-      <p:sp>
-        <p:nvSpPr>
-          <p:cNvPr id="15" name="Text 13"/>
-          <p:cNvSpPr/>
-          <p:nvPr/>
-        </p:nvSpPr>
-        <p:spPr>
-          <a:xfrm>
-            <a:off x="3840480" y="1481328"/>
-            <a:ext cx="2423160" cy="182880"/>
-          </a:xfrm>
-          <a:prstGeom prst="rect">
-            <a:avLst/>
-          </a:prstGeom>
-          <a:noFill/>
-          <a:ln/>
-        </p:spPr>
-        <p:txBody>
-          <a:bodyPr wrap="square" lIns="0" tIns="0" rIns="0" bIns="0" rtlCol="0" anchor="ctr"/>
-          <a:lstStyle/>
-          <a:p>
-            <a:pPr indent="0" marL="0">
-              <a:buNone/>
-            </a:pPr>
-            <a:r>
-              <a:rPr lang="en-US" sz="1700" b="1" dirty="0">
-                <a:solidFill>
-                  <a:srgbClr val="223A5E"/>
-                </a:solidFill>
-                <a:latin typeface="Times New Roman" pitchFamily="34" charset="0"/>
-                <a:ea typeface="Times New Roman" pitchFamily="34" charset="-122"/>
-                <a:cs typeface="Times New Roman" pitchFamily="34" charset="-120"/>
-              </a:rPr>
-              <a:t>Future work 1</a:t>
-            </a:r>
-            <a:endParaRPr lang="en-US" sz="1700" dirty="0"/>
-          </a:p>
-        </p:txBody>
-      </p:sp>
-      <p:sp>
-        <p:nvSpPr>
-          <p:cNvPr id="16" name="Text 14"/>
-          <p:cNvSpPr/>
-          <p:nvPr/>
-        </p:nvSpPr>
-        <p:spPr>
-          <a:xfrm>
-            <a:off x="3840480" y="1728216"/>
-            <a:ext cx="2423160" cy="594360"/>
-          </a:xfrm>
-          <a:prstGeom prst="rect">
-            <a:avLst/>
-          </a:prstGeom>
-          <a:noFill/>
-          <a:ln/>
-        </p:spPr>
-        <p:txBody>
-          <a:bodyPr wrap="square" lIns="0" tIns="0" rIns="0" bIns="0" rtlCol="0" anchor="ctr">
-            <a:normAutofit/>
-          </a:bodyPr>
-          <a:lstStyle/>
-          <a:p>
-            <a:pPr indent="0" marL="0">
-              <a:buNone/>
-            </a:pPr>
-            <a:r>
-              <a:rPr lang="en-US" sz="1220" dirty="0">
-                <a:solidFill>
-                  <a:srgbClr val="1E2630"/>
-                </a:solidFill>
-                <a:latin typeface="Times New Roman" pitchFamily="34" charset="0"/>
-                <a:ea typeface="Times New Roman" pitchFamily="34" charset="-122"/>
-                <a:cs typeface="Times New Roman" pitchFamily="34" charset="-120"/>
-              </a:rPr>
-              <a:t>Validate the same pattern on larger graph benchmarks such as PubMed.</a:t>
-            </a:r>
-            <a:endParaRPr lang="en-US" sz="1220" dirty="0"/>
-          </a:p>
-        </p:txBody>
-      </p:sp>
-      <p:sp>
-        <p:nvSpPr>
-          <p:cNvPr id="17" name="Shape 15"/>
-          <p:cNvSpPr/>
-          <p:nvPr/>
-        </p:nvSpPr>
-        <p:spPr>
-          <a:xfrm>
-            <a:off x="3703320" y="2688336"/>
-            <a:ext cx="2697480" cy="1024128"/>
-          </a:xfrm>
-          <a:prstGeom prst="roundRect">
-            <a:avLst>
-              <a:gd name="adj" fmla="val 4464"/>
-            </a:avLst>
-          </a:prstGeom>
-          <a:solidFill>
-            <a:srgbClr val="FFFFFF"/>
-          </a:solidFill>
-          <a:ln w="13970">
-            <a:solidFill>
-              <a:srgbClr val="D9DEE7"/>
-            </a:solidFill>
-            <a:prstDash val="solid"/>
-          </a:ln>
-        </p:spPr>
-      </p:sp>
-      <p:sp>
-        <p:nvSpPr>
-          <p:cNvPr id="18" name="Text 16"/>
-          <p:cNvSpPr/>
-          <p:nvPr/>
-        </p:nvSpPr>
-        <p:spPr>
-          <a:xfrm>
-            <a:off x="3840480" y="2779776"/>
-            <a:ext cx="2423160" cy="182880"/>
-          </a:xfrm>
-          <a:prstGeom prst="rect">
-            <a:avLst/>
-          </a:prstGeom>
-          <a:noFill/>
-          <a:ln/>
-        </p:spPr>
-        <p:txBody>
-          <a:bodyPr wrap="square" lIns="0" tIns="0" rIns="0" bIns="0" rtlCol="0" anchor="ctr"/>
-          <a:lstStyle/>
-          <a:p>
-            <a:pPr indent="0" marL="0">
-              <a:buNone/>
-            </a:pPr>
-            <a:r>
-              <a:rPr lang="en-US" sz="1700" b="1" dirty="0">
-                <a:solidFill>
-                  <a:srgbClr val="223A5E"/>
-                </a:solidFill>
-                <a:latin typeface="Times New Roman" pitchFamily="34" charset="0"/>
-                <a:ea typeface="Times New Roman" pitchFamily="34" charset="-122"/>
-                <a:cs typeface="Times New Roman" pitchFamily="34" charset="-120"/>
-              </a:rPr>
-              <a:t>Future work 2</a:t>
-            </a:r>
-            <a:endParaRPr lang="en-US" sz="1700" dirty="0"/>
-          </a:p>
-        </p:txBody>
-      </p:sp>
-      <p:sp>
-        <p:nvSpPr>
-          <p:cNvPr id="19" name="Text 17"/>
-          <p:cNvSpPr/>
-          <p:nvPr/>
-        </p:nvSpPr>
-        <p:spPr>
-          <a:xfrm>
-            <a:off x="3840480" y="3026664"/>
-            <a:ext cx="2423160" cy="594360"/>
-          </a:xfrm>
-          <a:prstGeom prst="rect">
-            <a:avLst/>
-          </a:prstGeom>
-          <a:noFill/>
-          <a:ln/>
-        </p:spPr>
-        <p:txBody>
-          <a:bodyPr wrap="square" lIns="0" tIns="0" rIns="0" bIns="0" rtlCol="0" anchor="ctr">
-            <a:normAutofit/>
-          </a:bodyPr>
-          <a:lstStyle/>
-          <a:p>
-            <a:pPr indent="0" marL="0">
-              <a:buNone/>
-            </a:pPr>
-            <a:r>
-              <a:rPr lang="en-US" sz="1220" dirty="0">
-                <a:solidFill>
-                  <a:srgbClr val="1E2630"/>
-                </a:solidFill>
-                <a:latin typeface="Times New Roman" pitchFamily="34" charset="0"/>
-                <a:ea typeface="Times New Roman" pitchFamily="34" charset="-122"/>
-                <a:cs typeface="Times New Roman" pitchFamily="34" charset="-120"/>
-              </a:rPr>
-              <a:t>Add targeted ablations that explain when and why GNNDelete fails.</a:t>
-            </a:r>
-            <a:endParaRPr lang="en-US" sz="1220" dirty="0"/>
-          </a:p>
-        </p:txBody>
-      </p:sp>
-      <p:sp>
-        <p:nvSpPr>
-          <p:cNvPr id="20" name="Shape 18"/>
-          <p:cNvSpPr/>
-          <p:nvPr/>
-        </p:nvSpPr>
-        <p:spPr>
-          <a:xfrm>
-            <a:off x="6510528" y="1792224"/>
-            <a:ext cx="1783080" cy="1417320"/>
-          </a:xfrm>
-          <a:prstGeom prst="roundRect">
-            <a:avLst>
-              <a:gd name="adj" fmla="val 3226"/>
-            </a:avLst>
-          </a:prstGeom>
-          <a:solidFill>
-            <a:srgbClr val="223A5E"/>
-          </a:solidFill>
-          <a:ln w="12700">
-            <a:solidFill>
-              <a:srgbClr val="223A5E">
-                <a:alpha val="0"/>
-              </a:srgbClr>
-            </a:solidFill>
-            <a:prstDash val="solid"/>
-          </a:ln>
-        </p:spPr>
-      </p:sp>
-      <p:sp>
-        <p:nvSpPr>
-          <p:cNvPr id="21" name="Text 19"/>
-          <p:cNvSpPr/>
-          <p:nvPr/>
-        </p:nvSpPr>
-        <p:spPr>
-          <a:xfrm>
-            <a:off x="6656832" y="1901952"/>
-            <a:ext cx="1481328" cy="164592"/>
-          </a:xfrm>
-          <a:prstGeom prst="rect">
-            <a:avLst/>
-          </a:prstGeom>
-          <a:noFill/>
-          <a:ln/>
-        </p:spPr>
-        <p:txBody>
-          <a:bodyPr wrap="square" lIns="0" tIns="0" rIns="0" bIns="0" rtlCol="0" anchor="ctr"/>
-          <a:lstStyle/>
-          <a:p>
-            <a:pPr indent="0" marL="0">
-              <a:buNone/>
-            </a:pPr>
-            <a:r>
-              <a:rPr lang="en-US" sz="1380" b="1" dirty="0">
-                <a:solidFill>
-                  <a:srgbClr val="F7F5F1"/>
-                </a:solidFill>
-                <a:latin typeface="Times New Roman" pitchFamily="34" charset="0"/>
-                <a:ea typeface="Times New Roman" pitchFamily="34" charset="-122"/>
-                <a:cs typeface="Times New Roman" pitchFamily="34" charset="-120"/>
-              </a:rPr>
-              <a:t>Project status</a:t>
-            </a:r>
-            <a:endParaRPr lang="en-US" sz="1380" dirty="0"/>
-          </a:p>
-        </p:txBody>
-      </p:sp>
-      <p:sp>
-        <p:nvSpPr>
-          <p:cNvPr id="22" name="Text 20"/>
-          <p:cNvSpPr/>
-          <p:nvPr/>
-        </p:nvSpPr>
-        <p:spPr>
-          <a:xfrm>
-            <a:off x="6656832" y="2157984"/>
-            <a:ext cx="1481328" cy="868680"/>
-          </a:xfrm>
-          <a:prstGeom prst="rect">
-            <a:avLst/>
-          </a:prstGeom>
-          <a:noFill/>
-          <a:ln/>
-        </p:spPr>
-        <p:txBody>
-          <a:bodyPr wrap="square" lIns="0" tIns="0" rIns="0" bIns="0" rtlCol="0" anchor="ctr">
-            <a:normAutofit/>
-          </a:bodyPr>
-          <a:lstStyle/>
-          <a:p>
-            <a:pPr indent="0" marL="0">
-              <a:buNone/>
-            </a:pPr>
-            <a:r>
-              <a:rPr lang="en-US" sz="1040" dirty="0">
-                <a:solidFill>
-                  <a:srgbClr val="F7F5F1"/>
-                </a:solidFill>
-                <a:latin typeface="Times New Roman" pitchFamily="34" charset="0"/>
-                <a:ea typeface="Times New Roman" pitchFamily="34" charset="-122"/>
-                <a:cs typeface="Times New Roman" pitchFamily="34" charset="-120"/>
-              </a:rPr>
-              <a:t>Completed MSc project</a:t>
-            </a:r>
-            <a:endParaRPr lang="en-US" sz="1040" dirty="0"/>
-          </a:p>
-          <a:p>
-            <a:pPr indent="0" marL="0">
-              <a:buNone/>
-            </a:pPr>
-            <a:r>
-              <a:rPr lang="en-US" sz="1040" dirty="0">
-                <a:solidFill>
-                  <a:srgbClr val="F7F5F1"/>
-                </a:solidFill>
-                <a:latin typeface="Times New Roman" pitchFamily="34" charset="0"/>
-                <a:ea typeface="Times New Roman" pitchFamily="34" charset="-122"/>
-                <a:cs typeface="Times New Roman" pitchFamily="34" charset="-120"/>
-              </a:rPr>
-              <a:t>Final course submission with a reusable audit workflow.</a:t>
-            </a:r>
-            <a:endParaRPr lang="en-US" sz="1040" dirty="0"/>
           </a:p>
         </p:txBody>
       </p:sp>
@@ -5390,8 +5222,9 @@
     <p:bg>
       <p:bgPr>
         <a:solidFill>
-          <a:srgbClr val="16263F"/>
+          <a:srgbClr val="F7F5F1"/>
         </a:solidFill>
+        <a:effectLst/>
       </p:bgPr>
     </p:bg>
     <p:spTree>
@@ -5410,14 +5243,48 @@
       </p:grpSpPr>
       <p:sp>
         <p:nvSpPr>
-          <p:cNvPr id="2" name="Text 0"/>
-          <p:cNvSpPr/>
-          <p:nvPr/>
-        </p:nvSpPr>
-        <p:spPr>
-          <a:xfrm>
-            <a:off x="640080" y="658368"/>
-            <a:ext cx="2011680" cy="274320"/>
+          <p:cNvPr id="2" name="Shape 0"/>
+          <p:cNvSpPr/>
+          <p:nvPr/>
+        </p:nvSpPr>
+        <p:spPr>
+          <a:xfrm>
+            <a:off x="0" y="0"/>
+            <a:ext cx="9144000" cy="530352"/>
+          </a:xfrm>
+          <a:prstGeom prst="rect">
+            <a:avLst/>
+          </a:prstGeom>
+          <a:solidFill>
+            <a:srgbClr val="223A5E"/>
+          </a:solidFill>
+          <a:ln w="12700">
+            <a:solidFill>
+              <a:srgbClr val="223A5E">
+                <a:alpha val="0"/>
+              </a:srgbClr>
+            </a:solidFill>
+            <a:prstDash val="solid"/>
+          </a:ln>
+        </p:spPr>
+        <p:txBody>
+          <a:bodyPr/>
+          <a:lstStyle/>
+          <a:p>
+            <a:endParaRPr lang="zh-CN" altLang="en-US"/>
+          </a:p>
+        </p:txBody>
+      </p:sp>
+      <p:sp>
+        <p:nvSpPr>
+          <p:cNvPr id="3" name="Text 1"/>
+          <p:cNvSpPr/>
+          <p:nvPr/>
+        </p:nvSpPr>
+        <p:spPr>
+          <a:xfrm>
+            <a:off x="502920" y="100584"/>
+            <a:ext cx="6583680" cy="219456"/>
           </a:xfrm>
           <a:prstGeom prst="rect">
             <a:avLst/>
@@ -5429,11 +5296,11 @@
           <a:bodyPr wrap="square" lIns="0" tIns="0" rIns="0" bIns="0" rtlCol="0" anchor="ctr"/>
           <a:lstStyle/>
           <a:p>
-            <a:pPr indent="0" marL="0">
-              <a:buNone/>
-            </a:pPr>
-            <a:r>
-              <a:rPr lang="en-US" sz="2800" b="1" dirty="0">
+            <a:pPr marL="0" indent="0">
+              <a:buNone/>
+            </a:pPr>
+            <a:r>
+              <a:rPr lang="en-US" sz="2400" b="1" dirty="0">
                 <a:solidFill>
                   <a:srgbClr val="FFFFFF"/>
                 </a:solidFill>
@@ -5441,26 +5308,182 @@
                 <a:ea typeface="Times New Roman" pitchFamily="34" charset="-122"/>
                 <a:cs typeface="Times New Roman" pitchFamily="34" charset="-120"/>
               </a:rPr>
-              <a:t>Takeaways</a:t>
-            </a:r>
-            <a:endParaRPr lang="en-US" sz="2800" dirty="0"/>
-          </a:p>
-        </p:txBody>
-      </p:sp>
-      <p:sp>
-        <p:nvSpPr>
-          <p:cNvPr id="3" name="Shape 1"/>
-          <p:cNvSpPr/>
-          <p:nvPr/>
-        </p:nvSpPr>
-        <p:spPr>
-          <a:xfrm>
-            <a:off x="777240" y="1325880"/>
-            <a:ext cx="2331720" cy="2194560"/>
+              <a:t>Limitations And Future Work</a:t>
+            </a:r>
+            <a:endParaRPr lang="en-US" sz="2400" dirty="0"/>
+          </a:p>
+        </p:txBody>
+      </p:sp>
+      <p:sp>
+        <p:nvSpPr>
+          <p:cNvPr id="4" name="Text 2"/>
+          <p:cNvSpPr/>
+          <p:nvPr/>
+        </p:nvSpPr>
+        <p:spPr>
+          <a:xfrm>
+            <a:off x="7955280" y="118872"/>
+            <a:ext cx="640080" cy="137160"/>
+          </a:xfrm>
+          <a:prstGeom prst="rect">
+            <a:avLst/>
+          </a:prstGeom>
+          <a:noFill/>
+          <a:ln/>
+        </p:spPr>
+        <p:txBody>
+          <a:bodyPr wrap="square" lIns="0" tIns="0" rIns="0" bIns="0" rtlCol="0" anchor="ctr"/>
+          <a:lstStyle/>
+          <a:p>
+            <a:pPr marL="0" indent="0" algn="r">
+              <a:buNone/>
+            </a:pPr>
+            <a:r>
+              <a:rPr lang="en-US" sz="1000" dirty="0">
+                <a:solidFill>
+                  <a:srgbClr val="F7F5F1"/>
+                </a:solidFill>
+                <a:latin typeface="Times New Roman" pitchFamily="34" charset="0"/>
+                <a:ea typeface="Times New Roman" pitchFamily="34" charset="-122"/>
+                <a:cs typeface="Times New Roman" pitchFamily="34" charset="-120"/>
+              </a:rPr>
+              <a:t>14 / 15</a:t>
+            </a:r>
+            <a:endParaRPr lang="en-US" sz="1000" dirty="0"/>
+          </a:p>
+        </p:txBody>
+      </p:sp>
+      <p:sp>
+        <p:nvSpPr>
+          <p:cNvPr id="5" name="Text 3"/>
+          <p:cNvSpPr/>
+          <p:nvPr/>
+        </p:nvSpPr>
+        <p:spPr>
+          <a:xfrm>
+            <a:off x="502920" y="4736592"/>
+            <a:ext cx="2743200" cy="137160"/>
+          </a:xfrm>
+          <a:prstGeom prst="rect">
+            <a:avLst/>
+          </a:prstGeom>
+          <a:noFill/>
+          <a:ln/>
+        </p:spPr>
+        <p:txBody>
+          <a:bodyPr wrap="square" lIns="0" tIns="0" rIns="0" bIns="0" rtlCol="0" anchor="ctr"/>
+          <a:lstStyle/>
+          <a:p>
+            <a:pPr marL="0" indent="0">
+              <a:buNone/>
+            </a:pPr>
+            <a:r>
+              <a:rPr lang="en-US" sz="900" dirty="0">
+                <a:solidFill>
+                  <a:srgbClr val="667085"/>
+                </a:solidFill>
+                <a:latin typeface="Times New Roman" pitchFamily="34" charset="0"/>
+                <a:ea typeface="Times New Roman" pitchFamily="34" charset="-122"/>
+                <a:cs typeface="Times New Roman" pitchFamily="34" charset="-120"/>
+              </a:rPr>
+              <a:t>EE5003 MSc Project | Liu Chengyu</a:t>
+            </a:r>
+            <a:endParaRPr lang="en-US" sz="900" dirty="0"/>
+          </a:p>
+        </p:txBody>
+      </p:sp>
+      <p:sp>
+        <p:nvSpPr>
+          <p:cNvPr id="6" name="Text 4"/>
+          <p:cNvSpPr/>
+          <p:nvPr/>
+        </p:nvSpPr>
+        <p:spPr>
+          <a:xfrm>
+            <a:off x="5577840" y="4736592"/>
+            <a:ext cx="3017520" cy="137160"/>
+          </a:xfrm>
+          <a:prstGeom prst="rect">
+            <a:avLst/>
+          </a:prstGeom>
+          <a:noFill/>
+          <a:ln/>
+        </p:spPr>
+        <p:txBody>
+          <a:bodyPr wrap="square" lIns="0" tIns="0" rIns="0" bIns="0" rtlCol="0" anchor="ctr"/>
+          <a:lstStyle/>
+          <a:p>
+            <a:pPr marL="0" indent="0" algn="r">
+              <a:buNone/>
+            </a:pPr>
+            <a:r>
+              <a:rPr lang="en-US" sz="900" dirty="0">
+                <a:solidFill>
+                  <a:srgbClr val="667085"/>
+                </a:solidFill>
+                <a:latin typeface="Times New Roman" pitchFamily="34" charset="0"/>
+                <a:ea typeface="Times New Roman" pitchFamily="34" charset="-122"/>
+                <a:cs typeface="Times New Roman" pitchFamily="34" charset="-120"/>
+              </a:rPr>
+              <a:t>Approximate Graph Unlearning Audit</a:t>
+            </a:r>
+            <a:endParaRPr lang="en-US" sz="900" dirty="0"/>
+          </a:p>
+        </p:txBody>
+      </p:sp>
+      <p:sp>
+        <p:nvSpPr>
+          <p:cNvPr id="7" name="Text 5"/>
+          <p:cNvSpPr/>
+          <p:nvPr/>
+        </p:nvSpPr>
+        <p:spPr>
+          <a:xfrm>
+            <a:off x="621792" y="768096"/>
+            <a:ext cx="7498080" cy="228600"/>
+          </a:xfrm>
+          <a:prstGeom prst="rect">
+            <a:avLst/>
+          </a:prstGeom>
+          <a:noFill/>
+          <a:ln/>
+        </p:spPr>
+        <p:txBody>
+          <a:bodyPr wrap="square" lIns="0" tIns="0" rIns="0" bIns="0" rtlCol="0" anchor="ctr"/>
+          <a:lstStyle/>
+          <a:p>
+            <a:pPr marL="0" indent="0">
+              <a:buNone/>
+            </a:pPr>
+            <a:r>
+              <a:rPr lang="en-US" sz="1750" b="1" dirty="0">
+                <a:solidFill>
+                  <a:srgbClr val="223A5E"/>
+                </a:solidFill>
+                <a:latin typeface="Times New Roman" pitchFamily="34" charset="0"/>
+                <a:ea typeface="Times New Roman" pitchFamily="34" charset="-122"/>
+                <a:cs typeface="Times New Roman" pitchFamily="34" charset="-120"/>
+              </a:rPr>
+              <a:t>The project is complete; these scope limits and follow-up directions define what this report does and does not claim.</a:t>
+            </a:r>
+            <a:endParaRPr lang="en-US" sz="1750" dirty="0"/>
+          </a:p>
+        </p:txBody>
+      </p:sp>
+      <p:sp>
+        <p:nvSpPr>
+          <p:cNvPr id="8" name="Shape 6"/>
+          <p:cNvSpPr/>
+          <p:nvPr/>
+        </p:nvSpPr>
+        <p:spPr>
+          <a:xfrm>
+            <a:off x="749808" y="1389888"/>
+            <a:ext cx="2697480" cy="1024128"/>
           </a:xfrm>
           <a:prstGeom prst="roundRect">
             <a:avLst>
-              <a:gd name="adj" fmla="val 2083"/>
+              <a:gd name="adj" fmla="val 4464"/>
             </a:avLst>
           </a:prstGeom>
           <a:solidFill>
@@ -5473,17 +5496,24 @@
             <a:prstDash val="solid"/>
           </a:ln>
         </p:spPr>
-      </p:sp>
-      <p:sp>
-        <p:nvSpPr>
-          <p:cNvPr id="4" name="Text 2"/>
-          <p:cNvSpPr/>
-          <p:nvPr/>
-        </p:nvSpPr>
-        <p:spPr>
-          <a:xfrm>
-            <a:off x="914400" y="1417320"/>
-            <a:ext cx="2057400" cy="182880"/>
+        <p:txBody>
+          <a:bodyPr/>
+          <a:lstStyle/>
+          <a:p>
+            <a:endParaRPr lang="zh-CN" altLang="en-US"/>
+          </a:p>
+        </p:txBody>
+      </p:sp>
+      <p:sp>
+        <p:nvSpPr>
+          <p:cNvPr id="9" name="Text 7"/>
+          <p:cNvSpPr/>
+          <p:nvPr/>
+        </p:nvSpPr>
+        <p:spPr>
+          <a:xfrm>
+            <a:off x="886968" y="1554480"/>
+            <a:ext cx="2423160" cy="182880"/>
           </a:xfrm>
           <a:prstGeom prst="rect">
             <a:avLst/>
@@ -5495,19 +5525,19 @@
           <a:bodyPr wrap="square" lIns="0" tIns="0" rIns="0" bIns="0" rtlCol="0" anchor="ctr"/>
           <a:lstStyle/>
           <a:p>
-            <a:pPr indent="0" marL="0">
+            <a:pPr marL="0" indent="0">
               <a:buNone/>
             </a:pPr>
             <a:r>
               <a:rPr lang="en-US" sz="1700" b="1" dirty="0">
                 <a:solidFill>
-                  <a:srgbClr val="16263F"/>
-                </a:solidFill>
-                <a:latin typeface="Times New Roman" pitchFamily="34" charset="0"/>
-                <a:ea typeface="Times New Roman" pitchFamily="34" charset="-122"/>
-                <a:cs typeface="Times New Roman" pitchFamily="34" charset="-120"/>
-              </a:rPr>
-              <a:t>1. Auditability matters</a:t>
+                  <a:srgbClr val="223A5E"/>
+                </a:solidFill>
+                <a:latin typeface="Times New Roman" pitchFamily="34" charset="0"/>
+                <a:ea typeface="Times New Roman" pitchFamily="34" charset="-122"/>
+                <a:cs typeface="Times New Roman" pitchFamily="34" charset="-120"/>
+              </a:rPr>
+              <a:t>Limitation 1</a:t>
             </a:r>
             <a:endParaRPr lang="en-US" sz="1700" dirty="0"/>
           </a:p>
@@ -5515,14 +5545,14 @@
       </p:sp>
       <p:sp>
         <p:nvSpPr>
-          <p:cNvPr id="5" name="Text 3"/>
-          <p:cNvSpPr/>
-          <p:nvPr/>
-        </p:nvSpPr>
-        <p:spPr>
-          <a:xfrm>
-            <a:off x="914400" y="1664208"/>
-            <a:ext cx="2057400" cy="1764792"/>
+          <p:cNvPr id="10" name="Text 8"/>
+          <p:cNvSpPr/>
+          <p:nvPr/>
+        </p:nvSpPr>
+        <p:spPr>
+          <a:xfrm>
+            <a:off x="886968" y="1801368"/>
+            <a:ext cx="2423160" cy="521208"/>
           </a:xfrm>
           <a:prstGeom prst="rect">
             <a:avLst/>
@@ -5536,7 +5566,7 @@
           </a:bodyPr>
           <a:lstStyle/>
           <a:p>
-            <a:pPr indent="0" marL="0">
+            <a:pPr marL="0" indent="0">
               <a:buNone/>
             </a:pPr>
             <a:r>
@@ -5548,7 +5578,7 @@
                 <a:ea typeface="Times New Roman" pitchFamily="34" charset="-122"/>
                 <a:cs typeface="Times New Roman" pitchFamily="34" charset="-120"/>
               </a:rPr>
-              <a:t>Approximate graph unlearning should be evaluated not only for accuracy but also for adversarial deletion robustness.</a:t>
+              <a:t>Evidence is concentrated on the tested citation benchmarks and backbones.</a:t>
             </a:r>
             <a:endParaRPr lang="en-US" sz="1220" dirty="0"/>
           </a:p>
@@ -5556,18 +5586,18 @@
       </p:sp>
       <p:sp>
         <p:nvSpPr>
-          <p:cNvPr id="6" name="Shape 4"/>
-          <p:cNvSpPr/>
-          <p:nvPr/>
-        </p:nvSpPr>
-        <p:spPr>
-          <a:xfrm>
-            <a:off x="3401568" y="1325880"/>
-            <a:ext cx="2331720" cy="2194560"/>
+          <p:cNvPr id="11" name="Shape 9"/>
+          <p:cNvSpPr/>
+          <p:nvPr/>
+        </p:nvSpPr>
+        <p:spPr>
+          <a:xfrm>
+            <a:off x="749808" y="2688336"/>
+            <a:ext cx="2697480" cy="1024128"/>
           </a:xfrm>
           <a:prstGeom prst="roundRect">
             <a:avLst>
-              <a:gd name="adj" fmla="val 2083"/>
+              <a:gd name="adj" fmla="val 4464"/>
             </a:avLst>
           </a:prstGeom>
           <a:solidFill>
@@ -5580,17 +5610,24 @@
             <a:prstDash val="solid"/>
           </a:ln>
         </p:spPr>
-      </p:sp>
-      <p:sp>
-        <p:nvSpPr>
-          <p:cNvPr id="7" name="Text 5"/>
-          <p:cNvSpPr/>
-          <p:nvPr/>
-        </p:nvSpPr>
-        <p:spPr>
-          <a:xfrm>
-            <a:off x="3538728" y="1417320"/>
-            <a:ext cx="2057400" cy="182880"/>
+        <p:txBody>
+          <a:bodyPr/>
+          <a:lstStyle/>
+          <a:p>
+            <a:endParaRPr lang="zh-CN" altLang="en-US"/>
+          </a:p>
+        </p:txBody>
+      </p:sp>
+      <p:sp>
+        <p:nvSpPr>
+          <p:cNvPr id="12" name="Text 10"/>
+          <p:cNvSpPr/>
+          <p:nvPr/>
+        </p:nvSpPr>
+        <p:spPr>
+          <a:xfrm>
+            <a:off x="886968" y="2852928"/>
+            <a:ext cx="2423160" cy="182880"/>
           </a:xfrm>
           <a:prstGeom prst="rect">
             <a:avLst/>
@@ -5602,19 +5639,19 @@
           <a:bodyPr wrap="square" lIns="0" tIns="0" rIns="0" bIns="0" rtlCol="0" anchor="ctr"/>
           <a:lstStyle/>
           <a:p>
-            <a:pPr indent="0" marL="0">
+            <a:pPr marL="0" indent="0">
               <a:buNone/>
             </a:pPr>
             <a:r>
               <a:rPr lang="en-US" sz="1700" b="1" dirty="0">
                 <a:solidFill>
-                  <a:srgbClr val="A6404B"/>
-                </a:solidFill>
-                <a:latin typeface="Times New Roman" pitchFamily="34" charset="0"/>
-                <a:ea typeface="Times New Roman" pitchFamily="34" charset="-122"/>
-                <a:cs typeface="Times New Roman" pitchFamily="34" charset="-120"/>
-              </a:rPr>
-              <a:t>2. Family behavior differs</a:t>
+                  <a:srgbClr val="223A5E"/>
+                </a:solidFill>
+                <a:latin typeface="Times New Roman" pitchFamily="34" charset="0"/>
+                <a:ea typeface="Times New Roman" pitchFamily="34" charset="-122"/>
+                <a:cs typeface="Times New Roman" pitchFamily="34" charset="-120"/>
+              </a:rPr>
+              <a:t>Limitation 2</a:t>
             </a:r>
             <a:endParaRPr lang="en-US" sz="1700" dirty="0"/>
           </a:p>
@@ -5622,14 +5659,14 @@
       </p:sp>
       <p:sp>
         <p:nvSpPr>
-          <p:cNvPr id="8" name="Text 6"/>
-          <p:cNvSpPr/>
-          <p:nvPr/>
-        </p:nvSpPr>
-        <p:spPr>
-          <a:xfrm>
-            <a:off x="3538728" y="1664208"/>
-            <a:ext cx="2057400" cy="1764792"/>
+          <p:cNvPr id="13" name="Text 11"/>
+          <p:cNvSpPr/>
+          <p:nvPr/>
+        </p:nvSpPr>
+        <p:spPr>
+          <a:xfrm>
+            <a:off x="886968" y="3099816"/>
+            <a:ext cx="2423160" cy="521208"/>
           </a:xfrm>
           <a:prstGeom prst="rect">
             <a:avLst/>
@@ -5643,7 +5680,7 @@
           </a:bodyPr>
           <a:lstStyle/>
           <a:p>
-            <a:pPr indent="0" marL="0">
+            <a:pPr marL="0" indent="0">
               <a:buNone/>
             </a:pPr>
             <a:r>
@@ -5655,7 +5692,7 @@
                 <a:ea typeface="Times New Roman" pitchFamily="34" charset="-122"/>
                 <a:cs typeface="Times New Roman" pitchFamily="34" charset="-120"/>
               </a:rPr>
-              <a:t>In the tested settings, GNNDelete is most fragile, GIF is comparatively stable, and GraphEraser exhibits shard protection.</a:t>
+              <a:t>The mechanism-level explanation for GNNDelete fragility is still incomplete.</a:t>
             </a:r>
             <a:endParaRPr lang="en-US" sz="1220" dirty="0"/>
           </a:p>
@@ -5663,41 +5700,48 @@
       </p:sp>
       <p:sp>
         <p:nvSpPr>
-          <p:cNvPr id="9" name="Shape 7"/>
-          <p:cNvSpPr/>
-          <p:nvPr/>
-        </p:nvSpPr>
-        <p:spPr>
-          <a:xfrm>
-            <a:off x="6025896" y="1325880"/>
-            <a:ext cx="2331720" cy="2194560"/>
+          <p:cNvPr id="14" name="Shape 12"/>
+          <p:cNvSpPr/>
+          <p:nvPr/>
+        </p:nvSpPr>
+        <p:spPr>
+          <a:xfrm>
+            <a:off x="3703320" y="1389888"/>
+            <a:ext cx="2697480" cy="1024128"/>
           </a:xfrm>
           <a:prstGeom prst="roundRect">
             <a:avLst>
-              <a:gd name="adj" fmla="val 2083"/>
+              <a:gd name="adj" fmla="val 4464"/>
             </a:avLst>
           </a:prstGeom>
           <a:solidFill>
-            <a:srgbClr val="E8EEF5"/>
+            <a:srgbClr val="FFFFFF"/>
           </a:solidFill>
           <a:ln w="13970">
             <a:solidFill>
-              <a:srgbClr val="E8EEF5"/>
+              <a:srgbClr val="D9DEE7"/>
             </a:solidFill>
             <a:prstDash val="solid"/>
           </a:ln>
         </p:spPr>
-      </p:sp>
-      <p:sp>
-        <p:nvSpPr>
-          <p:cNvPr id="10" name="Text 8"/>
-          <p:cNvSpPr/>
-          <p:nvPr/>
-        </p:nvSpPr>
-        <p:spPr>
-          <a:xfrm>
-            <a:off x="6163056" y="1417320"/>
-            <a:ext cx="2057400" cy="182880"/>
+        <p:txBody>
+          <a:bodyPr/>
+          <a:lstStyle/>
+          <a:p>
+            <a:endParaRPr lang="zh-CN" altLang="en-US"/>
+          </a:p>
+        </p:txBody>
+      </p:sp>
+      <p:sp>
+        <p:nvSpPr>
+          <p:cNvPr id="15" name="Text 13"/>
+          <p:cNvSpPr/>
+          <p:nvPr/>
+        </p:nvSpPr>
+        <p:spPr>
+          <a:xfrm>
+            <a:off x="3840480" y="1554480"/>
+            <a:ext cx="2423160" cy="182880"/>
           </a:xfrm>
           <a:prstGeom prst="rect">
             <a:avLst/>
@@ -5709,7 +5753,7 @@
           <a:bodyPr wrap="square" lIns="0" tIns="0" rIns="0" bIns="0" rtlCol="0" anchor="ctr"/>
           <a:lstStyle/>
           <a:p>
-            <a:pPr indent="0" marL="0">
+            <a:pPr marL="0" indent="0">
               <a:buNone/>
             </a:pPr>
             <a:r>
@@ -5721,7 +5765,7 @@
                 <a:ea typeface="Times New Roman" pitchFamily="34" charset="-122"/>
                 <a:cs typeface="Times New Roman" pitchFamily="34" charset="-120"/>
               </a:rPr>
-              <a:t>3. Workflow contribution</a:t>
+              <a:t>Future work 1</a:t>
             </a:r>
             <a:endParaRPr lang="en-US" sz="1700" dirty="0"/>
           </a:p>
@@ -5729,14 +5773,14 @@
       </p:sp>
       <p:sp>
         <p:nvSpPr>
-          <p:cNvPr id="11" name="Text 9"/>
-          <p:cNvSpPr/>
-          <p:nvPr/>
-        </p:nvSpPr>
-        <p:spPr>
-          <a:xfrm>
-            <a:off x="6163056" y="1664208"/>
-            <a:ext cx="2057400" cy="1764792"/>
+          <p:cNvPr id="16" name="Text 14"/>
+          <p:cNvSpPr/>
+          <p:nvPr/>
+        </p:nvSpPr>
+        <p:spPr>
+          <a:xfrm>
+            <a:off x="3840480" y="1801368"/>
+            <a:ext cx="2423160" cy="521208"/>
           </a:xfrm>
           <a:prstGeom prst="rect">
             <a:avLst/>
@@ -5750,7 +5794,7 @@
           </a:bodyPr>
           <a:lstStyle/>
           <a:p>
-            <a:pPr indent="0" marL="0">
+            <a:pPr marL="0" indent="0">
               <a:buNone/>
             </a:pPr>
             <a:r>
@@ -5762,7 +5806,7 @@
                 <a:ea typeface="Times New Roman" pitchFamily="34" charset="-122"/>
                 <a:cs typeface="Times New Roman" pitchFamily="34" charset="-120"/>
               </a:rPr>
-              <a:t>The project contributes a reusable OpenGU-based audit pipeline alongside the findings themselves.</a:t>
+              <a:t>Validate the same pattern on larger graph benchmarks such as PubMed.</a:t>
             </a:r>
             <a:endParaRPr lang="en-US" sz="1220" dirty="0"/>
           </a:p>
@@ -5770,14 +5814,48 @@
       </p:sp>
       <p:sp>
         <p:nvSpPr>
-          <p:cNvPr id="12" name="Text 10"/>
-          <p:cNvSpPr/>
-          <p:nvPr/>
-        </p:nvSpPr>
-        <p:spPr>
-          <a:xfrm>
-            <a:off x="713232" y="4160520"/>
-            <a:ext cx="7772400" cy="274320"/>
+          <p:cNvPr id="17" name="Shape 15"/>
+          <p:cNvSpPr/>
+          <p:nvPr/>
+        </p:nvSpPr>
+        <p:spPr>
+          <a:xfrm>
+            <a:off x="3703320" y="2688336"/>
+            <a:ext cx="2697480" cy="1024128"/>
+          </a:xfrm>
+          <a:prstGeom prst="roundRect">
+            <a:avLst>
+              <a:gd name="adj" fmla="val 4464"/>
+            </a:avLst>
+          </a:prstGeom>
+          <a:solidFill>
+            <a:srgbClr val="FFFFFF"/>
+          </a:solidFill>
+          <a:ln w="13970">
+            <a:solidFill>
+              <a:srgbClr val="D9DEE7"/>
+            </a:solidFill>
+            <a:prstDash val="solid"/>
+          </a:ln>
+        </p:spPr>
+        <p:txBody>
+          <a:bodyPr/>
+          <a:lstStyle/>
+          <a:p>
+            <a:endParaRPr lang="zh-CN" altLang="en-US"/>
+          </a:p>
+        </p:txBody>
+      </p:sp>
+      <p:sp>
+        <p:nvSpPr>
+          <p:cNvPr id="18" name="Text 16"/>
+          <p:cNvSpPr/>
+          <p:nvPr/>
+        </p:nvSpPr>
+        <p:spPr>
+          <a:xfrm>
+            <a:off x="3840480" y="2852928"/>
+            <a:ext cx="2423160" cy="182880"/>
           </a:xfrm>
           <a:prstGeom prst="rect">
             <a:avLst/>
@@ -5789,34 +5867,111 @@
           <a:bodyPr wrap="square" lIns="0" tIns="0" rIns="0" bIns="0" rtlCol="0" anchor="ctr"/>
           <a:lstStyle/>
           <a:p>
-            <a:pPr algn="ctr" indent="0" marL="0">
-              <a:buNone/>
-            </a:pPr>
-            <a:r>
-              <a:rPr lang="en-US" sz="2400" b="1" dirty="0">
-                <a:solidFill>
-                  <a:srgbClr val="FFFFFF"/>
-                </a:solidFill>
-                <a:latin typeface="Times New Roman" pitchFamily="34" charset="0"/>
-                <a:ea typeface="Times New Roman" pitchFamily="34" charset="-122"/>
-                <a:cs typeface="Times New Roman" pitchFamily="34" charset="-120"/>
-              </a:rPr>
-              <a:t>Thank you. Q&amp;A</a:t>
-            </a:r>
-            <a:endParaRPr lang="en-US" sz="2400" dirty="0"/>
-          </a:p>
-        </p:txBody>
-      </p:sp>
-      <p:sp>
-        <p:nvSpPr>
-          <p:cNvPr id="13" name="Text 11"/>
-          <p:cNvSpPr/>
-          <p:nvPr/>
-        </p:nvSpPr>
-        <p:spPr>
-          <a:xfrm>
-            <a:off x="658368" y="4681728"/>
-            <a:ext cx="2286000" cy="137160"/>
+            <a:pPr marL="0" indent="0">
+              <a:buNone/>
+            </a:pPr>
+            <a:r>
+              <a:rPr lang="en-US" sz="1700" b="1" dirty="0">
+                <a:solidFill>
+                  <a:srgbClr val="223A5E"/>
+                </a:solidFill>
+                <a:latin typeface="Times New Roman" pitchFamily="34" charset="0"/>
+                <a:ea typeface="Times New Roman" pitchFamily="34" charset="-122"/>
+                <a:cs typeface="Times New Roman" pitchFamily="34" charset="-120"/>
+              </a:rPr>
+              <a:t>Future work 2</a:t>
+            </a:r>
+            <a:endParaRPr lang="en-US" sz="1700" dirty="0"/>
+          </a:p>
+        </p:txBody>
+      </p:sp>
+      <p:sp>
+        <p:nvSpPr>
+          <p:cNvPr id="19" name="Text 17"/>
+          <p:cNvSpPr/>
+          <p:nvPr/>
+        </p:nvSpPr>
+        <p:spPr>
+          <a:xfrm>
+            <a:off x="3840480" y="3099816"/>
+            <a:ext cx="2423160" cy="521208"/>
+          </a:xfrm>
+          <a:prstGeom prst="rect">
+            <a:avLst/>
+          </a:prstGeom>
+          <a:noFill/>
+          <a:ln/>
+        </p:spPr>
+        <p:txBody>
+          <a:bodyPr wrap="square" lIns="0" tIns="0" rIns="0" bIns="0" rtlCol="0" anchor="ctr">
+            <a:normAutofit/>
+          </a:bodyPr>
+          <a:lstStyle/>
+          <a:p>
+            <a:pPr marL="0" indent="0">
+              <a:buNone/>
+            </a:pPr>
+            <a:r>
+              <a:rPr lang="en-US" sz="1220" dirty="0">
+                <a:solidFill>
+                  <a:srgbClr val="1E2630"/>
+                </a:solidFill>
+                <a:latin typeface="Times New Roman" pitchFamily="34" charset="0"/>
+                <a:ea typeface="Times New Roman" pitchFamily="34" charset="-122"/>
+                <a:cs typeface="Times New Roman" pitchFamily="34" charset="-120"/>
+              </a:rPr>
+              <a:t>Add targeted ablations that explain when and why GNNDelete fails.</a:t>
+            </a:r>
+            <a:endParaRPr lang="en-US" sz="1220" dirty="0"/>
+          </a:p>
+        </p:txBody>
+      </p:sp>
+      <p:sp>
+        <p:nvSpPr>
+          <p:cNvPr id="20" name="Shape 18"/>
+          <p:cNvSpPr/>
+          <p:nvPr/>
+        </p:nvSpPr>
+        <p:spPr>
+          <a:xfrm>
+            <a:off x="6510528" y="1792224"/>
+            <a:ext cx="1783080" cy="1417320"/>
+          </a:xfrm>
+          <a:prstGeom prst="roundRect">
+            <a:avLst>
+              <a:gd name="adj" fmla="val 3226"/>
+            </a:avLst>
+          </a:prstGeom>
+          <a:solidFill>
+            <a:srgbClr val="223A5E"/>
+          </a:solidFill>
+          <a:ln w="12700">
+            <a:solidFill>
+              <a:srgbClr val="223A5E">
+                <a:alpha val="0"/>
+              </a:srgbClr>
+            </a:solidFill>
+            <a:prstDash val="solid"/>
+          </a:ln>
+        </p:spPr>
+        <p:txBody>
+          <a:bodyPr/>
+          <a:lstStyle/>
+          <a:p>
+            <a:endParaRPr lang="zh-CN" altLang="en-US"/>
+          </a:p>
+        </p:txBody>
+      </p:sp>
+      <p:sp>
+        <p:nvSpPr>
+          <p:cNvPr id="21" name="Text 19"/>
+          <p:cNvSpPr/>
+          <p:nvPr/>
+        </p:nvSpPr>
+        <p:spPr>
+          <a:xfrm>
+            <a:off x="6656832" y="1901952"/>
+            <a:ext cx="1481328" cy="164592"/>
           </a:xfrm>
           <a:prstGeom prst="rect">
             <a:avLst/>
@@ -5828,11 +5983,11 @@
           <a:bodyPr wrap="square" lIns="0" tIns="0" rIns="0" bIns="0" rtlCol="0" anchor="ctr"/>
           <a:lstStyle/>
           <a:p>
-            <a:pPr indent="0" marL="0">
-              <a:buNone/>
-            </a:pPr>
-            <a:r>
-              <a:rPr lang="en-US" sz="900" dirty="0">
+            <a:pPr marL="0" indent="0">
+              <a:buNone/>
+            </a:pPr>
+            <a:r>
+              <a:rPr lang="en-US" sz="1380" b="1" dirty="0">
                 <a:solidFill>
                   <a:srgbClr val="F7F5F1"/>
                 </a:solidFill>
@@ -5840,9 +5995,67 @@
                 <a:ea typeface="Times New Roman" pitchFamily="34" charset="-122"/>
                 <a:cs typeface="Times New Roman" pitchFamily="34" charset="-120"/>
               </a:rPr>
-              <a:t>EE5003 MSc Project | Liu Chengyu</a:t>
-            </a:r>
-            <a:endParaRPr lang="en-US" sz="900" dirty="0"/>
+              <a:t>Project status</a:t>
+            </a:r>
+            <a:endParaRPr lang="en-US" sz="1380" dirty="0"/>
+          </a:p>
+        </p:txBody>
+      </p:sp>
+      <p:sp>
+        <p:nvSpPr>
+          <p:cNvPr id="22" name="Text 20"/>
+          <p:cNvSpPr/>
+          <p:nvPr/>
+        </p:nvSpPr>
+        <p:spPr>
+          <a:xfrm>
+            <a:off x="6656832" y="2157984"/>
+            <a:ext cx="1481328" cy="868680"/>
+          </a:xfrm>
+          <a:prstGeom prst="rect">
+            <a:avLst/>
+          </a:prstGeom>
+          <a:noFill/>
+          <a:ln/>
+        </p:spPr>
+        <p:txBody>
+          <a:bodyPr wrap="square" lIns="0" tIns="0" rIns="0" bIns="0" rtlCol="0" anchor="ctr">
+            <a:normAutofit/>
+          </a:bodyPr>
+          <a:lstStyle/>
+          <a:p>
+            <a:pPr marL="0" indent="0">
+              <a:buNone/>
+            </a:pPr>
+            <a:r>
+              <a:rPr lang="en-US" sz="1040" dirty="0">
+                <a:solidFill>
+                  <a:srgbClr val="F7F5F1"/>
+                </a:solidFill>
+                <a:latin typeface="Times New Roman" pitchFamily="34" charset="0"/>
+                <a:ea typeface="Times New Roman" pitchFamily="34" charset="-122"/>
+                <a:cs typeface="Times New Roman" pitchFamily="34" charset="-120"/>
+              </a:rPr>
+              <a:t>Completed MSc project</a:t>
+            </a:r>
+            <a:endParaRPr lang="en-US" sz="1040" dirty="0"/>
+          </a:p>
+          <a:p>
+            <a:pPr marL="0" indent="0">
+              <a:buNone/>
+            </a:pPr>
+            <a:r>
+              <a:rPr lang="en-US" sz="1040" dirty="0">
+                <a:solidFill>
+                  <a:srgbClr val="F7F5F1"/>
+                </a:solidFill>
+                <a:latin typeface="Times New Roman" pitchFamily="34" charset="0"/>
+                <a:ea typeface="Times New Roman" pitchFamily="34" charset="-122"/>
+                <a:cs typeface="Times New Roman" pitchFamily="34" charset="-120"/>
+              </a:rPr>
+              <a:t>Final course submission with a reusable audit workflow.</a:t>
+            </a:r>
+            <a:endParaRPr lang="en-US" sz="1040" dirty="0"/>
           </a:p>
         </p:txBody>
       </p:sp>
@@ -5860,8 +6073,9 @@
     <p:bg>
       <p:bgPr>
         <a:solidFill>
-          <a:srgbClr val="FFFFFF"/>
+          <a:srgbClr val="16263F"/>
         </a:solidFill>
+        <a:effectLst/>
       </p:bgPr>
     </p:bg>
     <p:spTree>
@@ -5880,41 +6094,87 @@
       </p:grpSpPr>
       <p:sp>
         <p:nvSpPr>
-          <p:cNvPr id="2" name="Shape 0"/>
-          <p:cNvSpPr/>
-          <p:nvPr/>
-        </p:nvSpPr>
-        <p:spPr>
-          <a:xfrm>
-            <a:off x="0" y="0"/>
-            <a:ext cx="9144000" cy="530352"/>
-          </a:xfrm>
-          <a:prstGeom prst="rect">
-            <a:avLst/>
+          <p:cNvPr id="2" name="Text 0"/>
+          <p:cNvSpPr/>
+          <p:nvPr/>
+        </p:nvSpPr>
+        <p:spPr>
+          <a:xfrm>
+            <a:off x="640080" y="658368"/>
+            <a:ext cx="2011680" cy="274320"/>
+          </a:xfrm>
+          <a:prstGeom prst="rect">
+            <a:avLst/>
+          </a:prstGeom>
+          <a:noFill/>
+          <a:ln/>
+        </p:spPr>
+        <p:txBody>
+          <a:bodyPr wrap="square" lIns="0" tIns="0" rIns="0" bIns="0" rtlCol="0" anchor="ctr"/>
+          <a:lstStyle/>
+          <a:p>
+            <a:pPr marL="0" indent="0">
+              <a:buNone/>
+            </a:pPr>
+            <a:r>
+              <a:rPr lang="en-US" sz="2800" b="1" dirty="0">
+                <a:solidFill>
+                  <a:srgbClr val="FFFFFF"/>
+                </a:solidFill>
+                <a:latin typeface="Times New Roman" pitchFamily="34" charset="0"/>
+                <a:ea typeface="Times New Roman" pitchFamily="34" charset="-122"/>
+                <a:cs typeface="Times New Roman" pitchFamily="34" charset="-120"/>
+              </a:rPr>
+              <a:t>Takeaways</a:t>
+            </a:r>
+            <a:endParaRPr lang="en-US" sz="2800" dirty="0"/>
+          </a:p>
+        </p:txBody>
+      </p:sp>
+      <p:sp>
+        <p:nvSpPr>
+          <p:cNvPr id="3" name="Shape 1"/>
+          <p:cNvSpPr/>
+          <p:nvPr/>
+        </p:nvSpPr>
+        <p:spPr>
+          <a:xfrm>
+            <a:off x="777240" y="1234440"/>
+            <a:ext cx="2331720" cy="2194560"/>
+          </a:xfrm>
+          <a:prstGeom prst="roundRect">
+            <a:avLst>
+              <a:gd name="adj" fmla="val 2083"/>
+            </a:avLst>
           </a:prstGeom>
           <a:solidFill>
-            <a:srgbClr val="223A5E"/>
+            <a:srgbClr val="FFFFFF"/>
           </a:solidFill>
-          <a:ln w="12700">
+          <a:ln w="13970">
             <a:solidFill>
-              <a:srgbClr val="223A5E">
-                <a:alpha val="0"/>
-              </a:srgbClr>
+              <a:srgbClr val="D9DEE7"/>
             </a:solidFill>
             <a:prstDash val="solid"/>
           </a:ln>
         </p:spPr>
-      </p:sp>
-      <p:sp>
-        <p:nvSpPr>
-          <p:cNvPr id="3" name="Text 1"/>
-          <p:cNvSpPr/>
-          <p:nvPr/>
-        </p:nvSpPr>
-        <p:spPr>
-          <a:xfrm>
-            <a:off x="502920" y="100584"/>
-            <a:ext cx="6583680" cy="219456"/>
+        <p:txBody>
+          <a:bodyPr/>
+          <a:lstStyle/>
+          <a:p>
+            <a:endParaRPr lang="zh-CN" altLang="en-US"/>
+          </a:p>
+        </p:txBody>
+      </p:sp>
+      <p:sp>
+        <p:nvSpPr>
+          <p:cNvPr id="4" name="Text 2"/>
+          <p:cNvSpPr/>
+          <p:nvPr/>
+        </p:nvSpPr>
+        <p:spPr>
+          <a:xfrm>
+            <a:off x="914400" y="1399032"/>
+            <a:ext cx="2057400" cy="182880"/>
           </a:xfrm>
           <a:prstGeom prst="rect">
             <a:avLst/>
@@ -5926,11 +6186,319 @@
           <a:bodyPr wrap="square" lIns="0" tIns="0" rIns="0" bIns="0" rtlCol="0" anchor="ctr"/>
           <a:lstStyle/>
           <a:p>
-            <a:pPr indent="0" marL="0">
-              <a:buNone/>
-            </a:pPr>
-            <a:r>
-              <a:rPr lang="en-US" sz="2400" b="1" dirty="0">
+            <a:pPr marL="0" indent="0">
+              <a:buNone/>
+            </a:pPr>
+            <a:r>
+              <a:rPr lang="en-US" sz="1700" b="1" dirty="0">
+                <a:solidFill>
+                  <a:srgbClr val="223A5E"/>
+                </a:solidFill>
+                <a:latin typeface="Times New Roman" pitchFamily="34" charset="0"/>
+                <a:ea typeface="Times New Roman" pitchFamily="34" charset="-122"/>
+                <a:cs typeface="Times New Roman" pitchFamily="34" charset="-120"/>
+              </a:rPr>
+              <a:t>1. Auditability matters</a:t>
+            </a:r>
+            <a:endParaRPr lang="en-US" sz="1700" dirty="0"/>
+          </a:p>
+        </p:txBody>
+      </p:sp>
+      <p:sp>
+        <p:nvSpPr>
+          <p:cNvPr id="5" name="Text 3"/>
+          <p:cNvSpPr/>
+          <p:nvPr/>
+        </p:nvSpPr>
+        <p:spPr>
+          <a:xfrm>
+            <a:off x="914400" y="1645920"/>
+            <a:ext cx="2057400" cy="1691640"/>
+          </a:xfrm>
+          <a:prstGeom prst="rect">
+            <a:avLst/>
+          </a:prstGeom>
+          <a:noFill/>
+          <a:ln/>
+        </p:spPr>
+        <p:txBody>
+          <a:bodyPr wrap="square" lIns="0" tIns="0" rIns="0" bIns="0" rtlCol="0" anchor="ctr">
+            <a:normAutofit/>
+          </a:bodyPr>
+          <a:lstStyle/>
+          <a:p>
+            <a:pPr marL="0" indent="0">
+              <a:buNone/>
+            </a:pPr>
+            <a:r>
+              <a:rPr lang="en-US" sz="1220" dirty="0">
+                <a:solidFill>
+                  <a:srgbClr val="1E2630"/>
+                </a:solidFill>
+                <a:latin typeface="Times New Roman" pitchFamily="34" charset="0"/>
+                <a:ea typeface="Times New Roman" pitchFamily="34" charset="-122"/>
+                <a:cs typeface="Times New Roman" pitchFamily="34" charset="-120"/>
+              </a:rPr>
+              <a:t>Approximate graph unlearning should be evaluated not only for accuracy but also for adversarial deletion robustness.</a:t>
+            </a:r>
+            <a:endParaRPr lang="en-US" sz="1220" dirty="0"/>
+          </a:p>
+        </p:txBody>
+      </p:sp>
+      <p:sp>
+        <p:nvSpPr>
+          <p:cNvPr id="6" name="Shape 4"/>
+          <p:cNvSpPr/>
+          <p:nvPr/>
+        </p:nvSpPr>
+        <p:spPr>
+          <a:xfrm>
+            <a:off x="3401568" y="1234440"/>
+            <a:ext cx="2331720" cy="2194560"/>
+          </a:xfrm>
+          <a:prstGeom prst="roundRect">
+            <a:avLst>
+              <a:gd name="adj" fmla="val 2083"/>
+            </a:avLst>
+          </a:prstGeom>
+          <a:solidFill>
+            <a:srgbClr val="FFFFFF"/>
+          </a:solidFill>
+          <a:ln w="13970">
+            <a:solidFill>
+              <a:srgbClr val="D9DEE7"/>
+            </a:solidFill>
+            <a:prstDash val="solid"/>
+          </a:ln>
+        </p:spPr>
+        <p:txBody>
+          <a:bodyPr/>
+          <a:lstStyle/>
+          <a:p>
+            <a:endParaRPr lang="zh-CN" altLang="en-US"/>
+          </a:p>
+        </p:txBody>
+      </p:sp>
+      <p:sp>
+        <p:nvSpPr>
+          <p:cNvPr id="7" name="Text 5"/>
+          <p:cNvSpPr/>
+          <p:nvPr/>
+        </p:nvSpPr>
+        <p:spPr>
+          <a:xfrm>
+            <a:off x="3538728" y="1399032"/>
+            <a:ext cx="2057400" cy="182880"/>
+          </a:xfrm>
+          <a:prstGeom prst="rect">
+            <a:avLst/>
+          </a:prstGeom>
+          <a:noFill/>
+          <a:ln/>
+        </p:spPr>
+        <p:txBody>
+          <a:bodyPr wrap="square" lIns="0" tIns="0" rIns="0" bIns="0" rtlCol="0" anchor="ctr"/>
+          <a:lstStyle/>
+          <a:p>
+            <a:pPr marL="0" indent="0">
+              <a:buNone/>
+            </a:pPr>
+            <a:r>
+              <a:rPr lang="en-US" sz="1700" b="1" dirty="0">
+                <a:solidFill>
+                  <a:srgbClr val="223A5E"/>
+                </a:solidFill>
+                <a:latin typeface="Times New Roman" pitchFamily="34" charset="0"/>
+                <a:ea typeface="Times New Roman" pitchFamily="34" charset="-122"/>
+                <a:cs typeface="Times New Roman" pitchFamily="34" charset="-120"/>
+              </a:rPr>
+              <a:t>2. Family behavior differs</a:t>
+            </a:r>
+            <a:endParaRPr lang="en-US" sz="1700" dirty="0"/>
+          </a:p>
+        </p:txBody>
+      </p:sp>
+      <p:sp>
+        <p:nvSpPr>
+          <p:cNvPr id="8" name="Text 6"/>
+          <p:cNvSpPr/>
+          <p:nvPr/>
+        </p:nvSpPr>
+        <p:spPr>
+          <a:xfrm>
+            <a:off x="3538728" y="1645920"/>
+            <a:ext cx="2057400" cy="1691640"/>
+          </a:xfrm>
+          <a:prstGeom prst="rect">
+            <a:avLst/>
+          </a:prstGeom>
+          <a:noFill/>
+          <a:ln/>
+        </p:spPr>
+        <p:txBody>
+          <a:bodyPr wrap="square" lIns="0" tIns="0" rIns="0" bIns="0" rtlCol="0" anchor="ctr">
+            <a:normAutofit/>
+          </a:bodyPr>
+          <a:lstStyle/>
+          <a:p>
+            <a:pPr marL="0" indent="0">
+              <a:buNone/>
+            </a:pPr>
+            <a:r>
+              <a:rPr lang="en-US" sz="1220" dirty="0">
+                <a:solidFill>
+                  <a:srgbClr val="1E2630"/>
+                </a:solidFill>
+                <a:latin typeface="Times New Roman" pitchFamily="34" charset="0"/>
+                <a:ea typeface="Times New Roman" pitchFamily="34" charset="-122"/>
+                <a:cs typeface="Times New Roman" pitchFamily="34" charset="-120"/>
+              </a:rPr>
+              <a:t>In the tested settings, GNNDelete is most fragile, GIF is comparatively stable, and GraphEraser exhibits shard protection.</a:t>
+            </a:r>
+            <a:endParaRPr lang="en-US" sz="1220" dirty="0"/>
+          </a:p>
+        </p:txBody>
+      </p:sp>
+      <p:sp>
+        <p:nvSpPr>
+          <p:cNvPr id="9" name="Shape 7"/>
+          <p:cNvSpPr/>
+          <p:nvPr/>
+        </p:nvSpPr>
+        <p:spPr>
+          <a:xfrm>
+            <a:off x="6025896" y="1234440"/>
+            <a:ext cx="2331720" cy="2194560"/>
+          </a:xfrm>
+          <a:prstGeom prst="roundRect">
+            <a:avLst>
+              <a:gd name="adj" fmla="val 2083"/>
+            </a:avLst>
+          </a:prstGeom>
+          <a:solidFill>
+            <a:srgbClr val="FFFFFF"/>
+          </a:solidFill>
+          <a:ln w="13970">
+            <a:solidFill>
+              <a:srgbClr val="D9DEE7"/>
+            </a:solidFill>
+            <a:prstDash val="solid"/>
+          </a:ln>
+        </p:spPr>
+        <p:txBody>
+          <a:bodyPr/>
+          <a:lstStyle/>
+          <a:p>
+            <a:endParaRPr lang="zh-CN" altLang="en-US"/>
+          </a:p>
+        </p:txBody>
+      </p:sp>
+      <p:sp>
+        <p:nvSpPr>
+          <p:cNvPr id="10" name="Text 8"/>
+          <p:cNvSpPr/>
+          <p:nvPr/>
+        </p:nvSpPr>
+        <p:spPr>
+          <a:xfrm>
+            <a:off x="6163056" y="1399032"/>
+            <a:ext cx="2057400" cy="182880"/>
+          </a:xfrm>
+          <a:prstGeom prst="rect">
+            <a:avLst/>
+          </a:prstGeom>
+          <a:noFill/>
+          <a:ln/>
+        </p:spPr>
+        <p:txBody>
+          <a:bodyPr wrap="square" lIns="0" tIns="0" rIns="0" bIns="0" rtlCol="0" anchor="ctr"/>
+          <a:lstStyle/>
+          <a:p>
+            <a:pPr marL="0" indent="0">
+              <a:buNone/>
+            </a:pPr>
+            <a:r>
+              <a:rPr lang="en-US" sz="1700" b="1" dirty="0">
+                <a:solidFill>
+                  <a:srgbClr val="223A5E"/>
+                </a:solidFill>
+                <a:latin typeface="Times New Roman" pitchFamily="34" charset="0"/>
+                <a:ea typeface="Times New Roman" pitchFamily="34" charset="-122"/>
+                <a:cs typeface="Times New Roman" pitchFamily="34" charset="-120"/>
+              </a:rPr>
+              <a:t>3. Workflow contribution</a:t>
+            </a:r>
+            <a:endParaRPr lang="en-US" sz="1700" dirty="0"/>
+          </a:p>
+        </p:txBody>
+      </p:sp>
+      <p:sp>
+        <p:nvSpPr>
+          <p:cNvPr id="11" name="Text 9"/>
+          <p:cNvSpPr/>
+          <p:nvPr/>
+        </p:nvSpPr>
+        <p:spPr>
+          <a:xfrm>
+            <a:off x="6163056" y="1645920"/>
+            <a:ext cx="2057400" cy="1691640"/>
+          </a:xfrm>
+          <a:prstGeom prst="rect">
+            <a:avLst/>
+          </a:prstGeom>
+          <a:noFill/>
+          <a:ln/>
+        </p:spPr>
+        <p:txBody>
+          <a:bodyPr wrap="square" lIns="0" tIns="0" rIns="0" bIns="0" rtlCol="0" anchor="ctr">
+            <a:normAutofit/>
+          </a:bodyPr>
+          <a:lstStyle/>
+          <a:p>
+            <a:pPr marL="0" indent="0">
+              <a:buNone/>
+            </a:pPr>
+            <a:r>
+              <a:rPr lang="en-US" sz="1220" dirty="0">
+                <a:solidFill>
+                  <a:srgbClr val="1E2630"/>
+                </a:solidFill>
+                <a:latin typeface="Times New Roman" pitchFamily="34" charset="0"/>
+                <a:ea typeface="Times New Roman" pitchFamily="34" charset="-122"/>
+                <a:cs typeface="Times New Roman" pitchFamily="34" charset="-120"/>
+              </a:rPr>
+              <a:t>The project contributes a reusable OpenGU-based audit pipeline alongside the findings themselves.</a:t>
+            </a:r>
+            <a:endParaRPr lang="en-US" sz="1220" dirty="0"/>
+          </a:p>
+        </p:txBody>
+      </p:sp>
+      <p:sp>
+        <p:nvSpPr>
+          <p:cNvPr id="12" name="Text 10"/>
+          <p:cNvSpPr/>
+          <p:nvPr/>
+        </p:nvSpPr>
+        <p:spPr>
+          <a:xfrm>
+            <a:off x="713232" y="3886200"/>
+            <a:ext cx="7772400" cy="411480"/>
+          </a:xfrm>
+          <a:prstGeom prst="rect">
+            <a:avLst/>
+          </a:prstGeom>
+          <a:noFill/>
+          <a:ln/>
+        </p:spPr>
+        <p:txBody>
+          <a:bodyPr wrap="square" lIns="0" tIns="0" rIns="0" bIns="0" rtlCol="0" anchor="ctr"/>
+          <a:lstStyle/>
+          <a:p>
+            <a:pPr marL="0" indent="0" algn="ctr">
+              <a:buNone/>
+            </a:pPr>
+            <a:r>
+              <a:rPr lang="en-US" sz="3200" b="1" dirty="0">
                 <a:solidFill>
                   <a:srgbClr val="FFFFFF"/>
                 </a:solidFill>
@@ -5938,22 +6506,22 @@
                 <a:ea typeface="Times New Roman" pitchFamily="34" charset="-122"/>
                 <a:cs typeface="Times New Roman" pitchFamily="34" charset="-120"/>
               </a:rPr>
-              <a:t>Backup Appendix: Full Strategy Spectrum</a:t>
-            </a:r>
-            <a:endParaRPr lang="en-US" sz="2400" dirty="0"/>
-          </a:p>
-        </p:txBody>
-      </p:sp>
-      <p:sp>
-        <p:nvSpPr>
-          <p:cNvPr id="4" name="Text 2"/>
-          <p:cNvSpPr/>
-          <p:nvPr/>
-        </p:nvSpPr>
-        <p:spPr>
-          <a:xfrm>
-            <a:off x="7955280" y="118872"/>
-            <a:ext cx="640080" cy="137160"/>
+              <a:t>Thank you. Q&amp;A</a:t>
+            </a:r>
+            <a:endParaRPr lang="en-US" sz="3200" dirty="0"/>
+          </a:p>
+        </p:txBody>
+      </p:sp>
+      <p:sp>
+        <p:nvSpPr>
+          <p:cNvPr id="13" name="Text 11"/>
+          <p:cNvSpPr/>
+          <p:nvPr/>
+        </p:nvSpPr>
+        <p:spPr>
+          <a:xfrm>
+            <a:off x="658368" y="4681728"/>
+            <a:ext cx="2286000" cy="137160"/>
           </a:xfrm>
           <a:prstGeom prst="rect">
             <a:avLst/>
@@ -5965,11 +6533,11 @@
           <a:bodyPr wrap="square" lIns="0" tIns="0" rIns="0" bIns="0" rtlCol="0" anchor="ctr"/>
           <a:lstStyle/>
           <a:p>
-            <a:pPr algn="r" indent="0" marL="0">
-              <a:buNone/>
-            </a:pPr>
-            <a:r>
-              <a:rPr lang="en-US" sz="1000" dirty="0">
+            <a:pPr marL="0" indent="0">
+              <a:buNone/>
+            </a:pPr>
+            <a:r>
+              <a:rPr lang="en-US" sz="900" dirty="0">
                 <a:solidFill>
                   <a:srgbClr val="F7F5F1"/>
                 </a:solidFill>
@@ -5977,148 +6545,7 @@
                 <a:ea typeface="Times New Roman" pitchFamily="34" charset="-122"/>
                 <a:cs typeface="Times New Roman" pitchFamily="34" charset="-120"/>
               </a:rPr>
-              <a:t>15 / 15</a:t>
-            </a:r>
-            <a:endParaRPr lang="en-US" sz="1000" dirty="0"/>
-          </a:p>
-        </p:txBody>
-      </p:sp>
-      <p:sp>
-        <p:nvSpPr>
-          <p:cNvPr id="5" name="Text 3"/>
-          <p:cNvSpPr/>
-          <p:nvPr/>
-        </p:nvSpPr>
-        <p:spPr>
-          <a:xfrm>
-            <a:off x="502920" y="4736592"/>
-            <a:ext cx="2743200" cy="137160"/>
-          </a:xfrm>
-          <a:prstGeom prst="rect">
-            <a:avLst/>
-          </a:prstGeom>
-          <a:noFill/>
-          <a:ln/>
-        </p:spPr>
-        <p:txBody>
-          <a:bodyPr wrap="square" lIns="0" tIns="0" rIns="0" bIns="0" rtlCol="0" anchor="ctr"/>
-          <a:lstStyle/>
-          <a:p>
-            <a:pPr indent="0" marL="0">
-              <a:buNone/>
-            </a:pPr>
-            <a:r>
-              <a:rPr lang="en-US" sz="900" dirty="0">
-                <a:solidFill>
-                  <a:srgbClr val="667085"/>
-                </a:solidFill>
-                <a:latin typeface="Times New Roman" pitchFamily="34" charset="0"/>
-                <a:ea typeface="Times New Roman" pitchFamily="34" charset="-122"/>
-                <a:cs typeface="Times New Roman" pitchFamily="34" charset="-120"/>
-              </a:rPr>
               <a:t>EE5003 MSc Project | Liu Chengyu</a:t>
-            </a:r>
-            <a:endParaRPr lang="en-US" sz="900" dirty="0"/>
-          </a:p>
-        </p:txBody>
-      </p:sp>
-      <p:sp>
-        <p:nvSpPr>
-          <p:cNvPr id="6" name="Text 4"/>
-          <p:cNvSpPr/>
-          <p:nvPr/>
-        </p:nvSpPr>
-        <p:spPr>
-          <a:xfrm>
-            <a:off x="5577840" y="4736592"/>
-            <a:ext cx="3017520" cy="137160"/>
-          </a:xfrm>
-          <a:prstGeom prst="rect">
-            <a:avLst/>
-          </a:prstGeom>
-          <a:noFill/>
-          <a:ln/>
-        </p:spPr>
-        <p:txBody>
-          <a:bodyPr wrap="square" lIns="0" tIns="0" rIns="0" bIns="0" rtlCol="0" anchor="ctr"/>
-          <a:lstStyle/>
-          <a:p>
-            <a:pPr algn="r" indent="0" marL="0">
-              <a:buNone/>
-            </a:pPr>
-            <a:r>
-              <a:rPr lang="en-US" sz="900" dirty="0">
-                <a:solidFill>
-                  <a:srgbClr val="667085"/>
-                </a:solidFill>
-                <a:latin typeface="Times New Roman" pitchFamily="34" charset="0"/>
-                <a:ea typeface="Times New Roman" pitchFamily="34" charset="-122"/>
-                <a:cs typeface="Times New Roman" pitchFamily="34" charset="-120"/>
-              </a:rPr>
-              <a:t>Approximate Graph Unlearning Audit</a:t>
-            </a:r>
-            <a:endParaRPr lang="en-US" sz="900" dirty="0"/>
-          </a:p>
-        </p:txBody>
-      </p:sp>
-      <p:pic>
-        <p:nvPicPr>
-          <p:cNvPr id="7" name="Image 0" descr="H:\project\OpenGU\GULib-master\report\0417_5003report\figures\paper_figures\FIG-3_Spectrum.png">    </p:cNvPr>
-          <p:cNvPicPr>
-            <a:picLocks noChangeAspect="1"/>
-          </p:cNvPicPr>
-          <p:nvPr/>
-        </p:nvPicPr>
-        <p:blipFill>
-          <a:blip r:embed="rId1"/>
-          <a:stretch>
-            <a:fillRect/>
-          </a:stretch>
-        </p:blipFill>
-        <p:spPr>
-          <a:xfrm>
-            <a:off x="658368" y="932688"/>
-            <a:ext cx="7818120" cy="3566160"/>
-          </a:xfrm>
-          <a:prstGeom prst="rect">
-            <a:avLst/>
-          </a:prstGeom>
-        </p:spPr>
-      </p:pic>
-      <p:sp>
-        <p:nvSpPr>
-          <p:cNvPr id="8" name="Text 5"/>
-          <p:cNvSpPr/>
-          <p:nvPr/>
-        </p:nvSpPr>
-        <p:spPr>
-          <a:xfrm>
-            <a:off x="713232" y="4590288"/>
-            <a:ext cx="7543800" cy="146304"/>
-          </a:xfrm>
-          <a:prstGeom prst="rect">
-            <a:avLst/>
-          </a:prstGeom>
-          <a:noFill/>
-          <a:ln/>
-        </p:spPr>
-        <p:txBody>
-          <a:bodyPr wrap="square" lIns="0" tIns="0" rIns="0" bIns="0" rtlCol="0" anchor="ctr"/>
-          <a:lstStyle/>
-          <a:p>
-            <a:pPr indent="0" marL="0">
-              <a:buNone/>
-            </a:pPr>
-            <a:r>
-              <a:rPr lang="en-US" sz="900" i="1" dirty="0">
-                <a:solidFill>
-                  <a:srgbClr val="667085"/>
-                </a:solidFill>
-                <a:latin typeface="Times New Roman" pitchFamily="34" charset="0"/>
-                <a:ea typeface="Times New Roman" pitchFamily="34" charset="-122"/>
-                <a:cs typeface="Times New Roman" pitchFamily="34" charset="-120"/>
-              </a:rPr>
-              <a:t>Full Figure 3. Strategy comparison in relative_f1_drop at ratio = 0.05 using the k=5 baseline.</a:t>
             </a:r>
             <a:endParaRPr lang="en-US" sz="900" dirty="0"/>
           </a:p>
@@ -6140,6 +6567,7 @@
         <a:solidFill>
           <a:srgbClr val="F7F5F1"/>
         </a:solidFill>
+        <a:effectLst/>
       </p:bgPr>
     </p:bg>
     <p:spTree>
@@ -6182,6 +6610,13 @@
             <a:prstDash val="solid"/>
           </a:ln>
         </p:spPr>
+        <p:txBody>
+          <a:bodyPr/>
+          <a:lstStyle/>
+          <a:p>
+            <a:endParaRPr lang="zh-CN" altLang="en-US"/>
+          </a:p>
+        </p:txBody>
       </p:sp>
       <p:sp>
         <p:nvSpPr>
@@ -6204,7 +6639,7 @@
           <a:bodyPr wrap="square" lIns="0" tIns="0" rIns="0" bIns="0" rtlCol="0" anchor="ctr"/>
           <a:lstStyle/>
           <a:p>
-            <a:pPr indent="0" marL="0">
+            <a:pPr marL="0" indent="0">
               <a:buNone/>
             </a:pPr>
             <a:r>
@@ -6243,7 +6678,7 @@
           <a:bodyPr wrap="square" lIns="0" tIns="0" rIns="0" bIns="0" rtlCol="0" anchor="ctr"/>
           <a:lstStyle/>
           <a:p>
-            <a:pPr algn="r" indent="0" marL="0">
+            <a:pPr marL="0" indent="0" algn="r">
               <a:buNone/>
             </a:pPr>
             <a:r>
@@ -6282,7 +6717,7 @@
           <a:bodyPr wrap="square" lIns="0" tIns="0" rIns="0" bIns="0" rtlCol="0" anchor="ctr"/>
           <a:lstStyle/>
           <a:p>
-            <a:pPr indent="0" marL="0">
+            <a:pPr marL="0" indent="0">
               <a:buNone/>
             </a:pPr>
             <a:r>
@@ -6321,7 +6756,7 @@
           <a:bodyPr wrap="square" lIns="0" tIns="0" rIns="0" bIns="0" rtlCol="0" anchor="ctr"/>
           <a:lstStyle/>
           <a:p>
-            <a:pPr algn="r" indent="0" marL="0">
+            <a:pPr marL="0" indent="0" algn="r">
               <a:buNone/>
             </a:pPr>
             <a:r>
@@ -6362,7 +6797,7 @@
           </a:bodyPr>
           <a:lstStyle/>
           <a:p>
-            <a:pPr indent="0" marL="0">
+            <a:pPr marL="0" indent="0">
               <a:buNone/>
             </a:pPr>
             <a:r>
@@ -6406,6 +6841,13 @@
             <a:prstDash val="solid"/>
           </a:ln>
         </p:spPr>
+        <p:txBody>
+          <a:bodyPr/>
+          <a:lstStyle/>
+          <a:p>
+            <a:endParaRPr lang="zh-CN" altLang="en-US"/>
+          </a:p>
+        </p:txBody>
       </p:sp>
       <p:sp>
         <p:nvSpPr>
@@ -6430,7 +6872,7 @@
           </a:bodyPr>
           <a:lstStyle/>
           <a:p>
-            <a:pPr indent="0" marL="0">
+            <a:pPr marL="0" indent="0">
               <a:buNone/>
             </a:pPr>
             <a:r>
@@ -6471,7 +6913,7 @@
           </a:bodyPr>
           <a:lstStyle/>
           <a:p>
-            <a:pPr indent="0" marL="0">
+            <a:pPr marL="0" indent="0">
               <a:buNone/>
             </a:pPr>
             <a:r>
@@ -6515,6 +6957,13 @@
             <a:prstDash val="solid"/>
           </a:ln>
         </p:spPr>
+        <p:txBody>
+          <a:bodyPr/>
+          <a:lstStyle/>
+          <a:p>
+            <a:endParaRPr lang="zh-CN" altLang="en-US"/>
+          </a:p>
+        </p:txBody>
       </p:sp>
       <p:sp>
         <p:nvSpPr>
@@ -6539,7 +6988,7 @@
           </a:bodyPr>
           <a:lstStyle/>
           <a:p>
-            <a:pPr indent="0" marL="0">
+            <a:pPr marL="0" indent="0">
               <a:buNone/>
             </a:pPr>
             <a:r>
@@ -6556,7 +7005,7 @@
             <a:endParaRPr lang="en-US" sz="1580" dirty="0"/>
           </a:p>
           <a:p>
-            <a:pPr indent="0" marL="0">
+            <a:pPr marL="0" indent="0">
               <a:buNone/>
             </a:pPr>
             <a:r>
@@ -6597,7 +7046,7 @@
           </a:bodyPr>
           <a:lstStyle/>
           <a:p>
-            <a:pPr indent="0" marL="0">
+            <a:pPr marL="0" indent="0">
               <a:buNone/>
             </a:pPr>
             <a:r>
@@ -6641,6 +7090,13 @@
             <a:prstDash val="solid"/>
           </a:ln>
         </p:spPr>
+        <p:txBody>
+          <a:bodyPr/>
+          <a:lstStyle/>
+          <a:p>
+            <a:endParaRPr lang="zh-CN" altLang="en-US"/>
+          </a:p>
+        </p:txBody>
       </p:sp>
       <p:sp>
         <p:nvSpPr>
@@ -6665,7 +7121,7 @@
           </a:bodyPr>
           <a:lstStyle/>
           <a:p>
-            <a:pPr indent="0" marL="0">
+            <a:pPr marL="0" indent="0">
               <a:buNone/>
             </a:pPr>
             <a:r>
@@ -6706,7 +7162,7 @@
           </a:bodyPr>
           <a:lstStyle/>
           <a:p>
-            <a:pPr indent="0" marL="0">
+            <a:pPr marL="0" indent="0">
               <a:buNone/>
             </a:pPr>
             <a:r>
@@ -6752,6 +7208,13 @@
             <a:prstDash val="solid"/>
           </a:ln>
         </p:spPr>
+        <p:txBody>
+          <a:bodyPr/>
+          <a:lstStyle/>
+          <a:p>
+            <a:endParaRPr lang="zh-CN" altLang="en-US"/>
+          </a:p>
+        </p:txBody>
       </p:sp>
       <p:sp>
         <p:nvSpPr>
@@ -6774,7 +7237,7 @@
           <a:bodyPr wrap="square" lIns="0" tIns="0" rIns="0" bIns="0" rtlCol="0" anchor="ctr"/>
           <a:lstStyle/>
           <a:p>
-            <a:pPr algn="ctr" indent="0" marL="0">
+            <a:pPr marL="0" indent="0" algn="ctr">
               <a:buNone/>
             </a:pPr>
             <a:r>
@@ -6815,7 +7278,7 @@
           </a:bodyPr>
           <a:lstStyle/>
           <a:p>
-            <a:pPr algn="ctr" indent="0" marL="0">
+            <a:pPr marL="0" indent="0" algn="ctr">
               <a:buNone/>
             </a:pPr>
             <a:r>
@@ -6849,6 +7312,7 @@
         <a:solidFill>
           <a:srgbClr val="FFFFFF"/>
         </a:solidFill>
+        <a:effectLst/>
       </p:bgPr>
     </p:bg>
     <p:spTree>
@@ -6891,6 +7355,13 @@
             <a:prstDash val="solid"/>
           </a:ln>
         </p:spPr>
+        <p:txBody>
+          <a:bodyPr/>
+          <a:lstStyle/>
+          <a:p>
+            <a:endParaRPr lang="zh-CN" altLang="en-US"/>
+          </a:p>
+        </p:txBody>
       </p:sp>
       <p:sp>
         <p:nvSpPr>
@@ -6913,7 +7384,7 @@
           <a:bodyPr wrap="square" lIns="0" tIns="0" rIns="0" bIns="0" rtlCol="0" anchor="ctr"/>
           <a:lstStyle/>
           <a:p>
-            <a:pPr indent="0" marL="0">
+            <a:pPr marL="0" indent="0">
               <a:buNone/>
             </a:pPr>
             <a:r>
@@ -6952,7 +7423,7 @@
           <a:bodyPr wrap="square" lIns="0" tIns="0" rIns="0" bIns="0" rtlCol="0" anchor="ctr"/>
           <a:lstStyle/>
           <a:p>
-            <a:pPr algn="r" indent="0" marL="0">
+            <a:pPr marL="0" indent="0" algn="r">
               <a:buNone/>
             </a:pPr>
             <a:r>
@@ -6991,7 +7462,7 @@
           <a:bodyPr wrap="square" lIns="0" tIns="0" rIns="0" bIns="0" rtlCol="0" anchor="ctr"/>
           <a:lstStyle/>
           <a:p>
-            <a:pPr indent="0" marL="0">
+            <a:pPr marL="0" indent="0">
               <a:buNone/>
             </a:pPr>
             <a:r>
@@ -7030,7 +7501,7 @@
           <a:bodyPr wrap="square" lIns="0" tIns="0" rIns="0" bIns="0" rtlCol="0" anchor="ctr"/>
           <a:lstStyle/>
           <a:p>
-            <a:pPr algn="r" indent="0" marL="0">
+            <a:pPr marL="0" indent="0" algn="r">
               <a:buNone/>
             </a:pPr>
             <a:r>
@@ -7074,6 +7545,13 @@
             <a:prstDash val="solid"/>
           </a:ln>
         </p:spPr>
+        <p:txBody>
+          <a:bodyPr/>
+          <a:lstStyle/>
+          <a:p>
+            <a:endParaRPr lang="zh-CN" altLang="en-US"/>
+          </a:p>
+        </p:txBody>
       </p:sp>
       <p:sp>
         <p:nvSpPr>
@@ -7083,7 +7561,7 @@
         </p:nvSpPr>
         <p:spPr>
           <a:xfrm>
-            <a:off x="777240" y="1005840"/>
+            <a:off x="777240" y="1078992"/>
             <a:ext cx="7589520" cy="182880"/>
           </a:xfrm>
           <a:prstGeom prst="rect">
@@ -7096,7 +7574,7 @@
           <a:bodyPr wrap="square" lIns="0" tIns="0" rIns="0" bIns="0" rtlCol="0" anchor="ctr"/>
           <a:lstStyle/>
           <a:p>
-            <a:pPr indent="0" marL="0">
+            <a:pPr marL="0" indent="0">
               <a:buNone/>
             </a:pPr>
             <a:r>
@@ -7122,8 +7600,8 @@
         </p:nvSpPr>
         <p:spPr>
           <a:xfrm>
-            <a:off x="777240" y="1252728"/>
-            <a:ext cx="7589520" cy="438912"/>
+            <a:off x="777240" y="1325880"/>
+            <a:ext cx="7589520" cy="365760"/>
           </a:xfrm>
           <a:prstGeom prst="rect">
             <a:avLst/>
@@ -7137,7 +7615,7 @@
           </a:bodyPr>
           <a:lstStyle/>
           <a:p>
-            <a:pPr indent="0" marL="0">
+            <a:pPr marL="0" indent="0">
               <a:buNone/>
             </a:pPr>
             <a:r>
@@ -7181,6 +7659,13 @@
             <a:prstDash val="solid"/>
           </a:ln>
         </p:spPr>
+        <p:txBody>
+          <a:bodyPr/>
+          <a:lstStyle/>
+          <a:p>
+            <a:endParaRPr lang="zh-CN" altLang="en-US"/>
+          </a:p>
+        </p:txBody>
       </p:sp>
       <p:sp>
         <p:nvSpPr>
@@ -7190,7 +7675,7 @@
         </p:nvSpPr>
         <p:spPr>
           <a:xfrm>
-            <a:off x="914400" y="2240280"/>
+            <a:off x="914400" y="2313432"/>
             <a:ext cx="3337560" cy="182880"/>
           </a:xfrm>
           <a:prstGeom prst="rect">
@@ -7203,7 +7688,7 @@
           <a:bodyPr wrap="square" lIns="0" tIns="0" rIns="0" bIns="0" rtlCol="0" anchor="ctr"/>
           <a:lstStyle/>
           <a:p>
-            <a:pPr indent="0" marL="0">
+            <a:pPr marL="0" indent="0">
               <a:buNone/>
             </a:pPr>
             <a:r>
@@ -7229,8 +7714,8 @@
         </p:nvSpPr>
         <p:spPr>
           <a:xfrm>
-            <a:off x="914400" y="2487168"/>
-            <a:ext cx="3337560" cy="466344"/>
+            <a:off x="914400" y="2560320"/>
+            <a:ext cx="3337560" cy="393192"/>
           </a:xfrm>
           <a:prstGeom prst="rect">
             <a:avLst/>
@@ -7244,7 +7729,7 @@
           </a:bodyPr>
           <a:lstStyle/>
           <a:p>
-            <a:pPr indent="0" marL="0">
+            <a:pPr marL="0" indent="0">
               <a:buNone/>
             </a:pPr>
             <a:r>
@@ -7288,6 +7773,13 @@
             <a:prstDash val="solid"/>
           </a:ln>
         </p:spPr>
+        <p:txBody>
+          <a:bodyPr/>
+          <a:lstStyle/>
+          <a:p>
+            <a:endParaRPr lang="zh-CN" altLang="en-US"/>
+          </a:p>
+        </p:txBody>
       </p:sp>
       <p:sp>
         <p:nvSpPr>
@@ -7297,7 +7789,7 @@
         </p:nvSpPr>
         <p:spPr>
           <a:xfrm>
-            <a:off x="4800600" y="2240280"/>
+            <a:off x="4800600" y="2313432"/>
             <a:ext cx="3337560" cy="182880"/>
           </a:xfrm>
           <a:prstGeom prst="rect">
@@ -7310,7 +7802,7 @@
           <a:bodyPr wrap="square" lIns="0" tIns="0" rIns="0" bIns="0" rtlCol="0" anchor="ctr"/>
           <a:lstStyle/>
           <a:p>
-            <a:pPr indent="0" marL="0">
+            <a:pPr marL="0" indent="0">
               <a:buNone/>
             </a:pPr>
             <a:r>
@@ -7336,8 +7828,8 @@
         </p:nvSpPr>
         <p:spPr>
           <a:xfrm>
-            <a:off x="4800600" y="2487168"/>
-            <a:ext cx="3337560" cy="466344"/>
+            <a:off x="4800600" y="2560320"/>
+            <a:ext cx="3337560" cy="393192"/>
           </a:xfrm>
           <a:prstGeom prst="rect">
             <a:avLst/>
@@ -7351,7 +7843,7 @@
           </a:bodyPr>
           <a:lstStyle/>
           <a:p>
-            <a:pPr indent="0" marL="0">
+            <a:pPr marL="0" indent="0">
               <a:buNone/>
             </a:pPr>
             <a:r>
@@ -7395,6 +7887,13 @@
             <a:prstDash val="solid"/>
           </a:ln>
         </p:spPr>
+        <p:txBody>
+          <a:bodyPr/>
+          <a:lstStyle/>
+          <a:p>
+            <a:endParaRPr lang="zh-CN" altLang="en-US"/>
+          </a:p>
+        </p:txBody>
       </p:sp>
       <p:sp>
         <p:nvSpPr>
@@ -7404,7 +7903,7 @@
         </p:nvSpPr>
         <p:spPr>
           <a:xfrm>
-            <a:off x="914400" y="3383280"/>
+            <a:off x="914400" y="3456432"/>
             <a:ext cx="3337560" cy="182880"/>
           </a:xfrm>
           <a:prstGeom prst="rect">
@@ -7417,7 +7916,7 @@
           <a:bodyPr wrap="square" lIns="0" tIns="0" rIns="0" bIns="0" rtlCol="0" anchor="ctr"/>
           <a:lstStyle/>
           <a:p>
-            <a:pPr indent="0" marL="0">
+            <a:pPr marL="0" indent="0">
               <a:buNone/>
             </a:pPr>
             <a:r>
@@ -7443,8 +7942,8 @@
         </p:nvSpPr>
         <p:spPr>
           <a:xfrm>
-            <a:off x="914400" y="3630168"/>
-            <a:ext cx="3337560" cy="466344"/>
+            <a:off x="914400" y="3703320"/>
+            <a:ext cx="3337560" cy="393192"/>
           </a:xfrm>
           <a:prstGeom prst="rect">
             <a:avLst/>
@@ -7458,7 +7957,7 @@
           </a:bodyPr>
           <a:lstStyle/>
           <a:p>
-            <a:pPr indent="0" marL="0">
+            <a:pPr marL="0" indent="0">
               <a:buNone/>
             </a:pPr>
             <a:r>
@@ -7502,6 +8001,13 @@
             <a:prstDash val="solid"/>
           </a:ln>
         </p:spPr>
+        <p:txBody>
+          <a:bodyPr/>
+          <a:lstStyle/>
+          <a:p>
+            <a:endParaRPr lang="zh-CN" altLang="en-US"/>
+          </a:p>
+        </p:txBody>
       </p:sp>
       <p:sp>
         <p:nvSpPr>
@@ -7511,7 +8017,7 @@
         </p:nvSpPr>
         <p:spPr>
           <a:xfrm>
-            <a:off x="4800600" y="3383280"/>
+            <a:off x="4800600" y="3456432"/>
             <a:ext cx="3337560" cy="182880"/>
           </a:xfrm>
           <a:prstGeom prst="rect">
@@ -7524,7 +8030,7 @@
           <a:bodyPr wrap="square" lIns="0" tIns="0" rIns="0" bIns="0" rtlCol="0" anchor="ctr"/>
           <a:lstStyle/>
           <a:p>
-            <a:pPr indent="0" marL="0">
+            <a:pPr marL="0" indent="0">
               <a:buNone/>
             </a:pPr>
             <a:r>
@@ -7550,8 +8056,8 @@
         </p:nvSpPr>
         <p:spPr>
           <a:xfrm>
-            <a:off x="4800600" y="3630168"/>
-            <a:ext cx="3337560" cy="466344"/>
+            <a:off x="4800600" y="3703320"/>
+            <a:ext cx="3337560" cy="393192"/>
           </a:xfrm>
           <a:prstGeom prst="rect">
             <a:avLst/>
@@ -7565,7 +8071,7 @@
           </a:bodyPr>
           <a:lstStyle/>
           <a:p>
-            <a:pPr indent="0" marL="0">
+            <a:pPr marL="0" indent="0">
               <a:buNone/>
             </a:pPr>
             <a:r>
@@ -7599,6 +8105,7 @@
         <a:solidFill>
           <a:srgbClr val="F7F5F1"/>
         </a:solidFill>
+        <a:effectLst/>
       </p:bgPr>
     </p:bg>
     <p:spTree>
@@ -7641,6 +8148,13 @@
             <a:prstDash val="solid"/>
           </a:ln>
         </p:spPr>
+        <p:txBody>
+          <a:bodyPr/>
+          <a:lstStyle/>
+          <a:p>
+            <a:endParaRPr lang="zh-CN" altLang="en-US"/>
+          </a:p>
+        </p:txBody>
       </p:sp>
       <p:sp>
         <p:nvSpPr>
@@ -7663,7 +8177,7 @@
           <a:bodyPr wrap="square" lIns="0" tIns="0" rIns="0" bIns="0" rtlCol="0" anchor="ctr"/>
           <a:lstStyle/>
           <a:p>
-            <a:pPr indent="0" marL="0">
+            <a:pPr marL="0" indent="0">
               <a:buNone/>
             </a:pPr>
             <a:r>
@@ -7702,7 +8216,7 @@
           <a:bodyPr wrap="square" lIns="0" tIns="0" rIns="0" bIns="0" rtlCol="0" anchor="ctr"/>
           <a:lstStyle/>
           <a:p>
-            <a:pPr algn="r" indent="0" marL="0">
+            <a:pPr marL="0" indent="0" algn="r">
               <a:buNone/>
             </a:pPr>
             <a:r>
@@ -7741,7 +8255,7 @@
           <a:bodyPr wrap="square" lIns="0" tIns="0" rIns="0" bIns="0" rtlCol="0" anchor="ctr"/>
           <a:lstStyle/>
           <a:p>
-            <a:pPr indent="0" marL="0">
+            <a:pPr marL="0" indent="0">
               <a:buNone/>
             </a:pPr>
             <a:r>
@@ -7780,7 +8294,7 @@
           <a:bodyPr wrap="square" lIns="0" tIns="0" rIns="0" bIns="0" rtlCol="0" anchor="ctr"/>
           <a:lstStyle/>
           <a:p>
-            <a:pPr algn="r" indent="0" marL="0">
+            <a:pPr marL="0" indent="0" algn="r">
               <a:buNone/>
             </a:pPr>
             <a:r>
@@ -7819,7 +8333,7 @@
           <a:bodyPr wrap="square" lIns="0" tIns="0" rIns="0" bIns="0" rtlCol="0" anchor="ctr"/>
           <a:lstStyle/>
           <a:p>
-            <a:pPr indent="0" marL="0">
+            <a:pPr marL="0" indent="0">
               <a:buNone/>
             </a:pPr>
             <a:r>
@@ -7863,6 +8377,13 @@
             <a:prstDash val="solid"/>
           </a:ln>
         </p:spPr>
+        <p:txBody>
+          <a:bodyPr/>
+          <a:lstStyle/>
+          <a:p>
+            <a:endParaRPr lang="zh-CN" altLang="en-US"/>
+          </a:p>
+        </p:txBody>
       </p:sp>
       <p:sp>
         <p:nvSpPr>
@@ -7872,7 +8393,7 @@
         </p:nvSpPr>
         <p:spPr>
           <a:xfrm>
-            <a:off x="795528" y="1143000"/>
+            <a:off x="795528" y="1216152"/>
             <a:ext cx="2606040" cy="182880"/>
           </a:xfrm>
           <a:prstGeom prst="rect">
@@ -7885,7 +8406,7 @@
           <a:bodyPr wrap="square" lIns="0" tIns="0" rIns="0" bIns="0" rtlCol="0" anchor="ctr"/>
           <a:lstStyle/>
           <a:p>
-            <a:pPr indent="0" marL="0">
+            <a:pPr marL="0" indent="0">
               <a:buNone/>
             </a:pPr>
             <a:r>
@@ -7911,8 +8432,8 @@
         </p:nvSpPr>
         <p:spPr>
           <a:xfrm>
-            <a:off x="795528" y="1389888"/>
-            <a:ext cx="2606040" cy="530352"/>
+            <a:off x="795528" y="1463040"/>
+            <a:ext cx="2606040" cy="457200"/>
           </a:xfrm>
           <a:prstGeom prst="rect">
             <a:avLst/>
@@ -7926,7 +8447,7 @@
           </a:bodyPr>
           <a:lstStyle/>
           <a:p>
-            <a:pPr indent="0" marL="0">
+            <a:pPr marL="0" indent="0">
               <a:buNone/>
             </a:pPr>
             <a:r>
@@ -7970,6 +8491,13 @@
             <a:prstDash val="solid"/>
           </a:ln>
         </p:spPr>
+        <p:txBody>
+          <a:bodyPr/>
+          <a:lstStyle/>
+          <a:p>
+            <a:endParaRPr lang="zh-CN" altLang="en-US"/>
+          </a:p>
+        </p:txBody>
       </p:sp>
       <p:sp>
         <p:nvSpPr>
@@ -7979,7 +8507,7 @@
         </p:nvSpPr>
         <p:spPr>
           <a:xfrm>
-            <a:off x="795528" y="2240280"/>
+            <a:off x="795528" y="2313432"/>
             <a:ext cx="2606040" cy="182880"/>
           </a:xfrm>
           <a:prstGeom prst="rect">
@@ -7992,7 +8520,7 @@
           <a:bodyPr wrap="square" lIns="0" tIns="0" rIns="0" bIns="0" rtlCol="0" anchor="ctr"/>
           <a:lstStyle/>
           <a:p>
-            <a:pPr indent="0" marL="0">
+            <a:pPr marL="0" indent="0">
               <a:buNone/>
             </a:pPr>
             <a:r>
@@ -8018,8 +8546,8 @@
         </p:nvSpPr>
         <p:spPr>
           <a:xfrm>
-            <a:off x="795528" y="2487168"/>
-            <a:ext cx="2606040" cy="530352"/>
+            <a:off x="795528" y="2560320"/>
+            <a:ext cx="2606040" cy="457200"/>
           </a:xfrm>
           <a:prstGeom prst="rect">
             <a:avLst/>
@@ -8033,7 +8561,7 @@
           </a:bodyPr>
           <a:lstStyle/>
           <a:p>
-            <a:pPr indent="0" marL="0">
+            <a:pPr marL="0" indent="0">
               <a:buNone/>
             </a:pPr>
             <a:r>
@@ -8077,6 +8605,13 @@
             <a:prstDash val="solid"/>
           </a:ln>
         </p:spPr>
+        <p:txBody>
+          <a:bodyPr/>
+          <a:lstStyle/>
+          <a:p>
+            <a:endParaRPr lang="zh-CN" altLang="en-US"/>
+          </a:p>
+        </p:txBody>
       </p:sp>
       <p:sp>
         <p:nvSpPr>
@@ -8086,7 +8621,7 @@
         </p:nvSpPr>
         <p:spPr>
           <a:xfrm>
-            <a:off x="795528" y="3337560"/>
+            <a:off x="795528" y="3410712"/>
             <a:ext cx="2606040" cy="182880"/>
           </a:xfrm>
           <a:prstGeom prst="rect">
@@ -8099,7 +8634,7 @@
           <a:bodyPr wrap="square" lIns="0" tIns="0" rIns="0" bIns="0" rtlCol="0" anchor="ctr"/>
           <a:lstStyle/>
           <a:p>
-            <a:pPr indent="0" marL="0">
+            <a:pPr marL="0" indent="0">
               <a:buNone/>
             </a:pPr>
             <a:r>
@@ -8125,8 +8660,8 @@
         </p:nvSpPr>
         <p:spPr>
           <a:xfrm>
-            <a:off x="795528" y="3584448"/>
-            <a:ext cx="2606040" cy="530352"/>
+            <a:off x="795528" y="3657600"/>
+            <a:ext cx="2606040" cy="457200"/>
           </a:xfrm>
           <a:prstGeom prst="rect">
             <a:avLst/>
@@ -8140,7 +8675,7 @@
           </a:bodyPr>
           <a:lstStyle/>
           <a:p>
-            <a:pPr indent="0" marL="0">
+            <a:pPr marL="0" indent="0">
               <a:buNone/>
             </a:pPr>
             <a:r>
@@ -8184,6 +8719,13 @@
             <a:prstDash val="solid"/>
           </a:ln>
         </p:spPr>
+        <p:txBody>
+          <a:bodyPr/>
+          <a:lstStyle/>
+          <a:p>
+            <a:endParaRPr lang="zh-CN" altLang="en-US"/>
+          </a:p>
+        </p:txBody>
       </p:sp>
       <p:sp>
         <p:nvSpPr>
@@ -8193,7 +8735,7 @@
         </p:nvSpPr>
         <p:spPr>
           <a:xfrm>
-            <a:off x="4069080" y="1143000"/>
+            <a:off x="4069080" y="1216152"/>
             <a:ext cx="4251960" cy="182880"/>
           </a:xfrm>
           <a:prstGeom prst="rect">
@@ -8206,7 +8748,7 @@
           <a:bodyPr wrap="square" lIns="0" tIns="0" rIns="0" bIns="0" rtlCol="0" anchor="ctr"/>
           <a:lstStyle/>
           <a:p>
-            <a:pPr indent="0" marL="0">
+            <a:pPr marL="0" indent="0">
               <a:buNone/>
             </a:pPr>
             <a:r>
@@ -8232,8 +8774,8 @@
         </p:nvSpPr>
         <p:spPr>
           <a:xfrm>
-            <a:off x="4069080" y="1389888"/>
-            <a:ext cx="4251960" cy="1490472"/>
+            <a:off x="4069080" y="1463040"/>
+            <a:ext cx="4251960" cy="1417320"/>
           </a:xfrm>
           <a:prstGeom prst="rect">
             <a:avLst/>
@@ -8247,7 +8789,7 @@
           </a:bodyPr>
           <a:lstStyle/>
           <a:p>
-            <a:pPr indent="0" marL="0">
+            <a:pPr marL="0" indent="0">
               <a:buNone/>
             </a:pPr>
             <a:r>
@@ -8264,13 +8806,13 @@
             <a:endParaRPr lang="en-US" sz="1220" dirty="0"/>
           </a:p>
           <a:p>
-            <a:pPr indent="0" marL="0">
+            <a:pPr marL="0" indent="0">
               <a:buNone/>
             </a:pPr>
             <a:endParaRPr lang="en-US" sz="1220" dirty="0"/>
           </a:p>
           <a:p>
-            <a:pPr indent="0" marL="0">
+            <a:pPr marL="0" indent="0">
               <a:buNone/>
             </a:pPr>
             <a:r>
@@ -8287,13 +8829,13 @@
             <a:endParaRPr lang="en-US" sz="1220" dirty="0"/>
           </a:p>
           <a:p>
-            <a:pPr indent="0" marL="0">
+            <a:pPr marL="0" indent="0">
               <a:buNone/>
             </a:pPr>
             <a:endParaRPr lang="en-US" sz="1220" dirty="0"/>
           </a:p>
           <a:p>
-            <a:pPr indent="0" marL="0">
+            <a:pPr marL="0" indent="0">
               <a:buNone/>
             </a:pPr>
             <a:r>
@@ -8339,6 +8881,13 @@
             <a:prstDash val="solid"/>
           </a:ln>
         </p:spPr>
+        <p:txBody>
+          <a:bodyPr/>
+          <a:lstStyle/>
+          <a:p>
+            <a:endParaRPr lang="zh-CN" altLang="en-US"/>
+          </a:p>
+        </p:txBody>
       </p:sp>
       <p:sp>
         <p:nvSpPr>
@@ -8361,7 +8910,7 @@
           <a:bodyPr wrap="square" lIns="0" tIns="0" rIns="0" bIns="0" rtlCol="0" anchor="ctr"/>
           <a:lstStyle/>
           <a:p>
-            <a:pPr algn="ctr" indent="0" marL="0">
+            <a:pPr marL="0" indent="0" algn="ctr">
               <a:buNone/>
             </a:pPr>
             <a:r>
@@ -8402,7 +8951,7 @@
           </a:bodyPr>
           <a:lstStyle/>
           <a:p>
-            <a:pPr algn="ctr" indent="0" marL="0">
+            <a:pPr marL="0" indent="0" algn="ctr">
               <a:buNone/>
             </a:pPr>
             <a:r>
@@ -8448,6 +8997,13 @@
             <a:prstDash val="solid"/>
           </a:ln>
         </p:spPr>
+        <p:txBody>
+          <a:bodyPr/>
+          <a:lstStyle/>
+          <a:p>
+            <a:endParaRPr lang="zh-CN" altLang="en-US"/>
+          </a:p>
+        </p:txBody>
       </p:sp>
       <p:sp>
         <p:nvSpPr>
@@ -8470,7 +9026,7 @@
           <a:bodyPr wrap="square" lIns="0" tIns="0" rIns="0" bIns="0" rtlCol="0" anchor="ctr"/>
           <a:lstStyle/>
           <a:p>
-            <a:pPr algn="ctr" indent="0" marL="0">
+            <a:pPr marL="0" indent="0" algn="ctr">
               <a:buNone/>
             </a:pPr>
             <a:r>
@@ -8511,7 +9067,7 @@
           </a:bodyPr>
           <a:lstStyle/>
           <a:p>
-            <a:pPr algn="ctr" indent="0" marL="0">
+            <a:pPr marL="0" indent="0" algn="ctr">
               <a:buNone/>
             </a:pPr>
             <a:r>
@@ -8557,6 +9113,13 @@
             <a:prstDash val="solid"/>
           </a:ln>
         </p:spPr>
+        <p:txBody>
+          <a:bodyPr/>
+          <a:lstStyle/>
+          <a:p>
+            <a:endParaRPr lang="zh-CN" altLang="en-US"/>
+          </a:p>
+        </p:txBody>
       </p:sp>
       <p:sp>
         <p:nvSpPr>
@@ -8579,7 +9142,7 @@
           <a:bodyPr wrap="square" lIns="0" tIns="0" rIns="0" bIns="0" rtlCol="0" anchor="ctr"/>
           <a:lstStyle/>
           <a:p>
-            <a:pPr algn="ctr" indent="0" marL="0">
+            <a:pPr marL="0" indent="0" algn="ctr">
               <a:buNone/>
             </a:pPr>
             <a:r>
@@ -8620,7 +9183,7 @@
           </a:bodyPr>
           <a:lstStyle/>
           <a:p>
-            <a:pPr algn="ctr" indent="0" marL="0">
+            <a:pPr marL="0" indent="0" algn="ctr">
               <a:buNone/>
             </a:pPr>
             <a:r>
@@ -8654,6 +9217,7 @@
         <a:solidFill>
           <a:srgbClr val="FFFFFF"/>
         </a:solidFill>
+        <a:effectLst/>
       </p:bgPr>
     </p:bg>
     <p:spTree>
@@ -8696,6 +9260,13 @@
             <a:prstDash val="solid"/>
           </a:ln>
         </p:spPr>
+        <p:txBody>
+          <a:bodyPr/>
+          <a:lstStyle/>
+          <a:p>
+            <a:endParaRPr lang="zh-CN" altLang="en-US"/>
+          </a:p>
+        </p:txBody>
       </p:sp>
       <p:sp>
         <p:nvSpPr>
@@ -8718,7 +9289,7 @@
           <a:bodyPr wrap="square" lIns="0" tIns="0" rIns="0" bIns="0" rtlCol="0" anchor="ctr"/>
           <a:lstStyle/>
           <a:p>
-            <a:pPr indent="0" marL="0">
+            <a:pPr marL="0" indent="0">
               <a:buNone/>
             </a:pPr>
             <a:r>
@@ -8757,7 +9328,7 @@
           <a:bodyPr wrap="square" lIns="0" tIns="0" rIns="0" bIns="0" rtlCol="0" anchor="ctr"/>
           <a:lstStyle/>
           <a:p>
-            <a:pPr algn="r" indent="0" marL="0">
+            <a:pPr marL="0" indent="0" algn="r">
               <a:buNone/>
             </a:pPr>
             <a:r>
@@ -8796,7 +9367,7 @@
           <a:bodyPr wrap="square" lIns="0" tIns="0" rIns="0" bIns="0" rtlCol="0" anchor="ctr"/>
           <a:lstStyle/>
           <a:p>
-            <a:pPr indent="0" marL="0">
+            <a:pPr marL="0" indent="0">
               <a:buNone/>
             </a:pPr>
             <a:r>
@@ -8835,7 +9406,7 @@
           <a:bodyPr wrap="square" lIns="0" tIns="0" rIns="0" bIns="0" rtlCol="0" anchor="ctr"/>
           <a:lstStyle/>
           <a:p>
-            <a:pPr algn="r" indent="0" marL="0">
+            <a:pPr marL="0" indent="0" algn="r">
               <a:buNone/>
             </a:pPr>
             <a:r>
@@ -8874,7 +9445,7 @@
           <a:bodyPr wrap="square" lIns="0" tIns="0" rIns="0" bIns="0" rtlCol="0" anchor="ctr"/>
           <a:lstStyle/>
           <a:p>
-            <a:pPr indent="0" marL="0">
+            <a:pPr marL="0" indent="0">
               <a:buNone/>
             </a:pPr>
             <a:r>
@@ -8918,6 +9489,13 @@
             <a:prstDash val="solid"/>
           </a:ln>
         </p:spPr>
+        <p:txBody>
+          <a:bodyPr/>
+          <a:lstStyle/>
+          <a:p>
+            <a:endParaRPr lang="zh-CN" altLang="en-US"/>
+          </a:p>
+        </p:txBody>
       </p:sp>
       <p:sp>
         <p:nvSpPr>
@@ -8945,6 +9523,13 @@
             <a:prstDash val="solid"/>
           </a:ln>
         </p:spPr>
+        <p:txBody>
+          <a:bodyPr/>
+          <a:lstStyle/>
+          <a:p>
+            <a:endParaRPr lang="zh-CN" altLang="en-US"/>
+          </a:p>
+        </p:txBody>
       </p:sp>
       <p:sp>
         <p:nvSpPr>
@@ -8967,7 +9552,7 @@
           <a:bodyPr wrap="square" lIns="0" tIns="0" rIns="0" bIns="0" rtlCol="0" anchor="ctr"/>
           <a:lstStyle/>
           <a:p>
-            <a:pPr algn="ctr" indent="0" marL="0">
+            <a:pPr marL="0" indent="0" algn="ctr">
               <a:buNone/>
             </a:pPr>
             <a:r>
@@ -9006,7 +9591,7 @@
           <a:bodyPr wrap="square" lIns="0" tIns="0" rIns="0" bIns="0" rtlCol="0" anchor="ctr"/>
           <a:lstStyle/>
           <a:p>
-            <a:pPr indent="0" marL="0">
+            <a:pPr marL="0" indent="0">
               <a:buNone/>
             </a:pPr>
             <a:r>
@@ -9047,7 +9632,7 @@
           </a:bodyPr>
           <a:lstStyle/>
           <a:p>
-            <a:pPr indent="0" marL="0">
+            <a:pPr marL="0" indent="0">
               <a:buNone/>
             </a:pPr>
             <a:r>
@@ -9091,6 +9676,13 @@
             <a:prstDash val="solid"/>
           </a:ln>
         </p:spPr>
+        <p:txBody>
+          <a:bodyPr/>
+          <a:lstStyle/>
+          <a:p>
+            <a:endParaRPr lang="zh-CN" altLang="en-US"/>
+          </a:p>
+        </p:txBody>
       </p:sp>
       <p:sp>
         <p:nvSpPr>
@@ -9118,6 +9710,13 @@
             <a:prstDash val="solid"/>
           </a:ln>
         </p:spPr>
+        <p:txBody>
+          <a:bodyPr/>
+          <a:lstStyle/>
+          <a:p>
+            <a:endParaRPr lang="zh-CN" altLang="en-US"/>
+          </a:p>
+        </p:txBody>
       </p:sp>
       <p:sp>
         <p:nvSpPr>
@@ -9140,7 +9739,7 @@
           <a:bodyPr wrap="square" lIns="0" tIns="0" rIns="0" bIns="0" rtlCol="0" anchor="ctr"/>
           <a:lstStyle/>
           <a:p>
-            <a:pPr algn="ctr" indent="0" marL="0">
+            <a:pPr marL="0" indent="0" algn="ctr">
               <a:buNone/>
             </a:pPr>
             <a:r>
@@ -9179,7 +9778,7 @@
           <a:bodyPr wrap="square" lIns="0" tIns="0" rIns="0" bIns="0" rtlCol="0" anchor="ctr"/>
           <a:lstStyle/>
           <a:p>
-            <a:pPr indent="0" marL="0">
+            <a:pPr marL="0" indent="0">
               <a:buNone/>
             </a:pPr>
             <a:r>
@@ -9220,7 +9819,7 @@
           </a:bodyPr>
           <a:lstStyle/>
           <a:p>
-            <a:pPr indent="0" marL="0">
+            <a:pPr marL="0" indent="0">
               <a:buNone/>
             </a:pPr>
             <a:r>
@@ -9264,6 +9863,13 @@
             <a:prstDash val="solid"/>
           </a:ln>
         </p:spPr>
+        <p:txBody>
+          <a:bodyPr/>
+          <a:lstStyle/>
+          <a:p>
+            <a:endParaRPr lang="zh-CN" altLang="en-US"/>
+          </a:p>
+        </p:txBody>
       </p:sp>
       <p:sp>
         <p:nvSpPr>
@@ -9291,6 +9897,13 @@
             <a:prstDash val="solid"/>
           </a:ln>
         </p:spPr>
+        <p:txBody>
+          <a:bodyPr/>
+          <a:lstStyle/>
+          <a:p>
+            <a:endParaRPr lang="zh-CN" altLang="en-US"/>
+          </a:p>
+        </p:txBody>
       </p:sp>
       <p:sp>
         <p:nvSpPr>
@@ -9313,7 +9926,7 @@
           <a:bodyPr wrap="square" lIns="0" tIns="0" rIns="0" bIns="0" rtlCol="0" anchor="ctr"/>
           <a:lstStyle/>
           <a:p>
-            <a:pPr algn="ctr" indent="0" marL="0">
+            <a:pPr marL="0" indent="0" algn="ctr">
               <a:buNone/>
             </a:pPr>
             <a:r>
@@ -9352,7 +9965,7 @@
           <a:bodyPr wrap="square" lIns="0" tIns="0" rIns="0" bIns="0" rtlCol="0" anchor="ctr"/>
           <a:lstStyle/>
           <a:p>
-            <a:pPr indent="0" marL="0">
+            <a:pPr marL="0" indent="0">
               <a:buNone/>
             </a:pPr>
             <a:r>
@@ -9393,7 +10006,7 @@
           </a:bodyPr>
           <a:lstStyle/>
           <a:p>
-            <a:pPr indent="0" marL="0">
+            <a:pPr marL="0" indent="0">
               <a:buNone/>
             </a:pPr>
             <a:r>
@@ -9437,6 +10050,13 @@
             <a:prstDash val="solid"/>
           </a:ln>
         </p:spPr>
+        <p:txBody>
+          <a:bodyPr/>
+          <a:lstStyle/>
+          <a:p>
+            <a:endParaRPr lang="zh-CN" altLang="en-US"/>
+          </a:p>
+        </p:txBody>
       </p:sp>
       <p:sp>
         <p:nvSpPr>
@@ -9464,6 +10084,13 @@
             <a:prstDash val="solid"/>
           </a:ln>
         </p:spPr>
+        <p:txBody>
+          <a:bodyPr/>
+          <a:lstStyle/>
+          <a:p>
+            <a:endParaRPr lang="zh-CN" altLang="en-US"/>
+          </a:p>
+        </p:txBody>
       </p:sp>
       <p:sp>
         <p:nvSpPr>
@@ -9486,7 +10113,7 @@
           <a:bodyPr wrap="square" lIns="0" tIns="0" rIns="0" bIns="0" rtlCol="0" anchor="ctr"/>
           <a:lstStyle/>
           <a:p>
-            <a:pPr algn="ctr" indent="0" marL="0">
+            <a:pPr marL="0" indent="0" algn="ctr">
               <a:buNone/>
             </a:pPr>
             <a:r>
@@ -9525,7 +10152,7 @@
           <a:bodyPr wrap="square" lIns="0" tIns="0" rIns="0" bIns="0" rtlCol="0" anchor="ctr"/>
           <a:lstStyle/>
           <a:p>
-            <a:pPr indent="0" marL="0">
+            <a:pPr marL="0" indent="0">
               <a:buNone/>
             </a:pPr>
             <a:r>
@@ -9566,7 +10193,7 @@
           </a:bodyPr>
           <a:lstStyle/>
           <a:p>
-            <a:pPr indent="0" marL="0">
+            <a:pPr marL="0" indent="0">
               <a:buNone/>
             </a:pPr>
             <a:r>
@@ -9610,6 +10237,13 @@
             <a:prstDash val="solid"/>
           </a:ln>
         </p:spPr>
+        <p:txBody>
+          <a:bodyPr/>
+          <a:lstStyle/>
+          <a:p>
+            <a:endParaRPr lang="zh-CN" altLang="en-US"/>
+          </a:p>
+        </p:txBody>
       </p:sp>
       <p:sp>
         <p:nvSpPr>
@@ -9619,7 +10253,7 @@
         </p:nvSpPr>
         <p:spPr>
           <a:xfrm>
-            <a:off x="4937760" y="1463040"/>
+            <a:off x="4937760" y="1536192"/>
             <a:ext cx="3337560" cy="182880"/>
           </a:xfrm>
           <a:prstGeom prst="rect">
@@ -9632,7 +10266,7 @@
           <a:bodyPr wrap="square" lIns="0" tIns="0" rIns="0" bIns="0" rtlCol="0" anchor="ctr"/>
           <a:lstStyle/>
           <a:p>
-            <a:pPr indent="0" marL="0">
+            <a:pPr marL="0" indent="0">
               <a:buNone/>
             </a:pPr>
             <a:r>
@@ -9658,8 +10292,8 @@
         </p:nvSpPr>
         <p:spPr>
           <a:xfrm>
-            <a:off x="4937760" y="1709928"/>
-            <a:ext cx="3337560" cy="2843784"/>
+            <a:off x="4937760" y="1783080"/>
+            <a:ext cx="3337560" cy="2770632"/>
           </a:xfrm>
           <a:prstGeom prst="rect">
             <a:avLst/>
@@ -9673,7 +10307,7 @@
           </a:bodyPr>
           <a:lstStyle/>
           <a:p>
-            <a:pPr indent="0" marL="0">
+            <a:pPr marL="0" indent="0">
               <a:buNone/>
             </a:pPr>
             <a:r>
@@ -9690,7 +10324,7 @@
             <a:endParaRPr lang="en-US" sz="1220" dirty="0"/>
           </a:p>
           <a:p>
-            <a:pPr indent="0" marL="0">
+            <a:pPr marL="0" indent="0">
               <a:buNone/>
             </a:pPr>
             <a:r>
@@ -9707,7 +10341,7 @@
             <a:endParaRPr lang="en-US" sz="1220" dirty="0"/>
           </a:p>
           <a:p>
-            <a:pPr indent="0" marL="0">
+            <a:pPr marL="0" indent="0">
               <a:buNone/>
             </a:pPr>
             <a:r>
@@ -9724,7 +10358,7 @@
             <a:endParaRPr lang="en-US" sz="1220" dirty="0"/>
           </a:p>
           <a:p>
-            <a:pPr indent="0" marL="0">
+            <a:pPr marL="0" indent="0">
               <a:buNone/>
             </a:pPr>
             <a:r>
@@ -9741,7 +10375,7 @@
             <a:endParaRPr lang="en-US" sz="1220" dirty="0"/>
           </a:p>
           <a:p>
-            <a:pPr indent="0" marL="0">
+            <a:pPr marL="0" indent="0">
               <a:buNone/>
             </a:pPr>
             <a:r>
@@ -9758,13 +10392,13 @@
             <a:endParaRPr lang="en-US" sz="1220" dirty="0"/>
           </a:p>
           <a:p>
-            <a:pPr indent="0" marL="0">
+            <a:pPr marL="0" indent="0">
               <a:buNone/>
             </a:pPr>
             <a:endParaRPr lang="en-US" sz="1220" dirty="0"/>
           </a:p>
           <a:p>
-            <a:pPr indent="0" marL="0">
+            <a:pPr marL="0" indent="0">
               <a:buNone/>
             </a:pPr>
             <a:r>
@@ -9798,6 +10432,7 @@
         <a:solidFill>
           <a:srgbClr val="F7F5F1"/>
         </a:solidFill>
+        <a:effectLst/>
       </p:bgPr>
     </p:bg>
     <p:spTree>
@@ -9840,6 +10475,13 @@
             <a:prstDash val="solid"/>
           </a:ln>
         </p:spPr>
+        <p:txBody>
+          <a:bodyPr/>
+          <a:lstStyle/>
+          <a:p>
+            <a:endParaRPr lang="zh-CN" altLang="en-US"/>
+          </a:p>
+        </p:txBody>
       </p:sp>
       <p:sp>
         <p:nvSpPr>
@@ -9862,7 +10504,7 @@
           <a:bodyPr wrap="square" lIns="0" tIns="0" rIns="0" bIns="0" rtlCol="0" anchor="ctr"/>
           <a:lstStyle/>
           <a:p>
-            <a:pPr indent="0" marL="0">
+            <a:pPr marL="0" indent="0">
               <a:buNone/>
             </a:pPr>
             <a:r>
@@ -9901,7 +10543,7 @@
           <a:bodyPr wrap="square" lIns="0" tIns="0" rIns="0" bIns="0" rtlCol="0" anchor="ctr"/>
           <a:lstStyle/>
           <a:p>
-            <a:pPr algn="r" indent="0" marL="0">
+            <a:pPr marL="0" indent="0" algn="r">
               <a:buNone/>
             </a:pPr>
             <a:r>
@@ -9940,7 +10582,7 @@
           <a:bodyPr wrap="square" lIns="0" tIns="0" rIns="0" bIns="0" rtlCol="0" anchor="ctr"/>
           <a:lstStyle/>
           <a:p>
-            <a:pPr indent="0" marL="0">
+            <a:pPr marL="0" indent="0">
               <a:buNone/>
             </a:pPr>
             <a:r>
@@ -9979,7 +10621,7 @@
           <a:bodyPr wrap="square" lIns="0" tIns="0" rIns="0" bIns="0" rtlCol="0" anchor="ctr"/>
           <a:lstStyle/>
           <a:p>
-            <a:pPr algn="r" indent="0" marL="0">
+            <a:pPr marL="0" indent="0" algn="r">
               <a:buNone/>
             </a:pPr>
             <a:r>
@@ -10018,7 +10660,7 @@
           <a:bodyPr wrap="square" lIns="0" tIns="0" rIns="0" bIns="0" rtlCol="0" anchor="ctr"/>
           <a:lstStyle/>
           <a:p>
-            <a:pPr indent="0" marL="0">
+            <a:pPr marL="0" indent="0">
               <a:buNone/>
             </a:pPr>
             <a:r>
@@ -10062,6 +10704,13 @@
             <a:prstDash val="solid"/>
           </a:ln>
         </p:spPr>
+        <p:txBody>
+          <a:bodyPr/>
+          <a:lstStyle/>
+          <a:p>
+            <a:endParaRPr lang="zh-CN" altLang="en-US"/>
+          </a:p>
+        </p:txBody>
       </p:sp>
       <p:sp>
         <p:nvSpPr>
@@ -10071,7 +10720,7 @@
         </p:nvSpPr>
         <p:spPr>
           <a:xfrm>
-            <a:off x="850392" y="1417320"/>
+            <a:off x="850392" y="1490472"/>
             <a:ext cx="2212848" cy="182880"/>
           </a:xfrm>
           <a:prstGeom prst="rect">
@@ -10084,7 +10733,7 @@
           <a:bodyPr wrap="square" lIns="0" tIns="0" rIns="0" bIns="0" rtlCol="0" anchor="ctr"/>
           <a:lstStyle/>
           <a:p>
-            <a:pPr indent="0" marL="0">
+            <a:pPr marL="0" indent="0">
               <a:buNone/>
             </a:pPr>
             <a:r>
@@ -10110,8 +10759,8 @@
         </p:nvSpPr>
         <p:spPr>
           <a:xfrm>
-            <a:off x="850392" y="1664208"/>
-            <a:ext cx="2212848" cy="1600200"/>
+            <a:off x="850392" y="1737360"/>
+            <a:ext cx="2212848" cy="1527048"/>
           </a:xfrm>
           <a:prstGeom prst="rect">
             <a:avLst/>
@@ -10125,7 +10774,7 @@
           </a:bodyPr>
           <a:lstStyle/>
           <a:p>
-            <a:pPr indent="0" marL="0">
+            <a:pPr marL="0" indent="0">
               <a:buNone/>
             </a:pPr>
             <a:r>
@@ -10142,7 +10791,7 @@
             <a:endParaRPr lang="en-US" sz="1220" dirty="0"/>
           </a:p>
           <a:p>
-            <a:pPr indent="0" marL="0">
+            <a:pPr marL="0" indent="0">
               <a:buNone/>
             </a:pPr>
             <a:r>
@@ -10159,13 +10808,13 @@
             <a:endParaRPr lang="en-US" sz="1220" dirty="0"/>
           </a:p>
           <a:p>
-            <a:pPr indent="0" marL="0">
+            <a:pPr marL="0" indent="0">
               <a:buNone/>
             </a:pPr>
             <a:endParaRPr lang="en-US" sz="1220" dirty="0"/>
           </a:p>
           <a:p>
-            <a:pPr indent="0" marL="0">
+            <a:pPr marL="0" indent="0">
               <a:buNone/>
             </a:pPr>
             <a:r>
@@ -10209,6 +10858,13 @@
             <a:prstDash val="solid"/>
           </a:ln>
         </p:spPr>
+        <p:txBody>
+          <a:bodyPr/>
+          <a:lstStyle/>
+          <a:p>
+            <a:endParaRPr lang="zh-CN" altLang="en-US"/>
+          </a:p>
+        </p:txBody>
       </p:sp>
       <p:sp>
         <p:nvSpPr>
@@ -10218,7 +10874,7 @@
         </p:nvSpPr>
         <p:spPr>
           <a:xfrm>
-            <a:off x="3465576" y="1417320"/>
+            <a:off x="3465576" y="1490472"/>
             <a:ext cx="2212848" cy="182880"/>
           </a:xfrm>
           <a:prstGeom prst="rect">
@@ -10231,7 +10887,7 @@
           <a:bodyPr wrap="square" lIns="0" tIns="0" rIns="0" bIns="0" rtlCol="0" anchor="ctr"/>
           <a:lstStyle/>
           <a:p>
-            <a:pPr indent="0" marL="0">
+            <a:pPr marL="0" indent="0">
               <a:buNone/>
             </a:pPr>
             <a:r>
@@ -10257,8 +10913,8 @@
         </p:nvSpPr>
         <p:spPr>
           <a:xfrm>
-            <a:off x="3465576" y="1664208"/>
-            <a:ext cx="2212848" cy="1600200"/>
+            <a:off x="3465576" y="1737360"/>
+            <a:ext cx="2212848" cy="1527048"/>
           </a:xfrm>
           <a:prstGeom prst="rect">
             <a:avLst/>
@@ -10272,7 +10928,7 @@
           </a:bodyPr>
           <a:lstStyle/>
           <a:p>
-            <a:pPr indent="0" marL="0">
+            <a:pPr marL="0" indent="0">
               <a:buNone/>
             </a:pPr>
             <a:r>
@@ -10289,7 +10945,7 @@
             <a:endParaRPr lang="en-US" sz="1220" dirty="0"/>
           </a:p>
           <a:p>
-            <a:pPr indent="0" marL="0">
+            <a:pPr marL="0" indent="0">
               <a:buNone/>
             </a:pPr>
             <a:r>
@@ -10306,13 +10962,13 @@
             <a:endParaRPr lang="en-US" sz="1220" dirty="0"/>
           </a:p>
           <a:p>
-            <a:pPr indent="0" marL="0">
+            <a:pPr marL="0" indent="0">
               <a:buNone/>
             </a:pPr>
             <a:endParaRPr lang="en-US" sz="1220" dirty="0"/>
           </a:p>
           <a:p>
-            <a:pPr indent="0" marL="0">
+            <a:pPr marL="0" indent="0">
               <a:buNone/>
             </a:pPr>
             <a:r>
@@ -10356,6 +11012,13 @@
             <a:prstDash val="solid"/>
           </a:ln>
         </p:spPr>
+        <p:txBody>
+          <a:bodyPr/>
+          <a:lstStyle/>
+          <a:p>
+            <a:endParaRPr lang="zh-CN" altLang="en-US"/>
+          </a:p>
+        </p:txBody>
       </p:sp>
       <p:sp>
         <p:nvSpPr>
@@ -10365,7 +11028,7 @@
         </p:nvSpPr>
         <p:spPr>
           <a:xfrm>
-            <a:off x="6080760" y="1417320"/>
+            <a:off x="6080760" y="1490472"/>
             <a:ext cx="2212848" cy="182880"/>
           </a:xfrm>
           <a:prstGeom prst="rect">
@@ -10378,7 +11041,7 @@
           <a:bodyPr wrap="square" lIns="0" tIns="0" rIns="0" bIns="0" rtlCol="0" anchor="ctr"/>
           <a:lstStyle/>
           <a:p>
-            <a:pPr indent="0" marL="0">
+            <a:pPr marL="0" indent="0">
               <a:buNone/>
             </a:pPr>
             <a:r>
@@ -10404,8 +11067,8 @@
         </p:nvSpPr>
         <p:spPr>
           <a:xfrm>
-            <a:off x="6080760" y="1664208"/>
-            <a:ext cx="2212848" cy="1600200"/>
+            <a:off x="6080760" y="1737360"/>
+            <a:ext cx="2212848" cy="1527048"/>
           </a:xfrm>
           <a:prstGeom prst="rect">
             <a:avLst/>
@@ -10419,7 +11082,7 @@
           </a:bodyPr>
           <a:lstStyle/>
           <a:p>
-            <a:pPr indent="0" marL="0">
+            <a:pPr marL="0" indent="0">
               <a:buNone/>
             </a:pPr>
             <a:r>
@@ -10436,13 +11099,13 @@
             <a:endParaRPr lang="en-US" sz="1220" dirty="0"/>
           </a:p>
           <a:p>
-            <a:pPr indent="0" marL="0">
+            <a:pPr marL="0" indent="0">
               <a:buNone/>
             </a:pPr>
             <a:endParaRPr lang="en-US" sz="1220" dirty="0"/>
           </a:p>
           <a:p>
-            <a:pPr indent="0" marL="0">
+            <a:pPr marL="0" indent="0">
               <a:buNone/>
             </a:pPr>
             <a:r>
@@ -10486,6 +11149,13 @@
             <a:prstDash val="solid"/>
           </a:ln>
         </p:spPr>
+        <p:txBody>
+          <a:bodyPr/>
+          <a:lstStyle/>
+          <a:p>
+            <a:endParaRPr lang="zh-CN" altLang="en-US"/>
+          </a:p>
+        </p:txBody>
       </p:sp>
       <p:sp>
         <p:nvSpPr>
@@ -10495,7 +11165,7 @@
         </p:nvSpPr>
         <p:spPr>
           <a:xfrm>
-            <a:off x="1216152" y="3895344"/>
+            <a:off x="1216152" y="3968496"/>
             <a:ext cx="6638544" cy="182880"/>
           </a:xfrm>
           <a:prstGeom prst="rect">
@@ -10508,7 +11178,7 @@
           <a:bodyPr wrap="square" lIns="0" tIns="0" rIns="0" bIns="0" rtlCol="0" anchor="ctr"/>
           <a:lstStyle/>
           <a:p>
-            <a:pPr indent="0" marL="0">
+            <a:pPr marL="0" indent="0">
               <a:buNone/>
             </a:pPr>
             <a:r>
@@ -10534,8 +11204,8 @@
         </p:nvSpPr>
         <p:spPr>
           <a:xfrm>
-            <a:off x="1216152" y="4142232"/>
-            <a:ext cx="6638544" cy="265176"/>
+            <a:off x="1216152" y="4215384"/>
+            <a:ext cx="6638544" cy="192024"/>
           </a:xfrm>
           <a:prstGeom prst="rect">
             <a:avLst/>
@@ -10549,7 +11219,7 @@
           </a:bodyPr>
           <a:lstStyle/>
           <a:p>
-            <a:pPr indent="0" marL="0">
+            <a:pPr marL="0" indent="0">
               <a:buNone/>
             </a:pPr>
             <a:r>
@@ -10583,6 +11253,7 @@
         <a:solidFill>
           <a:srgbClr val="F7F5F1"/>
         </a:solidFill>
+        <a:effectLst/>
       </p:bgPr>
     </p:bg>
     <p:spTree>
@@ -10625,6 +11296,13 @@
             <a:prstDash val="solid"/>
           </a:ln>
         </p:spPr>
+        <p:txBody>
+          <a:bodyPr/>
+          <a:lstStyle/>
+          <a:p>
+            <a:endParaRPr lang="zh-CN" altLang="en-US"/>
+          </a:p>
+        </p:txBody>
       </p:sp>
       <p:sp>
         <p:nvSpPr>
@@ -10647,7 +11325,7 @@
           <a:bodyPr wrap="square" lIns="0" tIns="0" rIns="0" bIns="0" rtlCol="0" anchor="ctr"/>
           <a:lstStyle/>
           <a:p>
-            <a:pPr indent="0" marL="0">
+            <a:pPr marL="0" indent="0">
               <a:buNone/>
             </a:pPr>
             <a:r>
@@ -10686,7 +11364,7 @@
           <a:bodyPr wrap="square" lIns="0" tIns="0" rIns="0" bIns="0" rtlCol="0" anchor="ctr"/>
           <a:lstStyle/>
           <a:p>
-            <a:pPr algn="r" indent="0" marL="0">
+            <a:pPr marL="0" indent="0" algn="r">
               <a:buNone/>
             </a:pPr>
             <a:r>
@@ -10725,7 +11403,7 @@
           <a:bodyPr wrap="square" lIns="0" tIns="0" rIns="0" bIns="0" rtlCol="0" anchor="ctr"/>
           <a:lstStyle/>
           <a:p>
-            <a:pPr indent="0" marL="0">
+            <a:pPr marL="0" indent="0">
               <a:buNone/>
             </a:pPr>
             <a:r>
@@ -10764,7 +11442,7 @@
           <a:bodyPr wrap="square" lIns="0" tIns="0" rIns="0" bIns="0" rtlCol="0" anchor="ctr"/>
           <a:lstStyle/>
           <a:p>
-            <a:pPr algn="r" indent="0" marL="0">
+            <a:pPr marL="0" indent="0" algn="r">
               <a:buNone/>
             </a:pPr>
             <a:r>
@@ -10803,7 +11481,7 @@
           <a:bodyPr wrap="square" lIns="0" tIns="0" rIns="0" bIns="0" rtlCol="0" anchor="ctr"/>
           <a:lstStyle/>
           <a:p>
-            <a:pPr indent="0" marL="0">
+            <a:pPr marL="0" indent="0">
               <a:buNone/>
             </a:pPr>
             <a:r>
@@ -10830,11 +11508,11 @@
         <p:spPr>
           <a:xfrm>
             <a:off x="713232" y="1325880"/>
-            <a:ext cx="2542032" cy="2011680"/>
+            <a:ext cx="2542032" cy="2148840"/>
           </a:xfrm>
           <a:prstGeom prst="roundRect">
             <a:avLst>
-              <a:gd name="adj" fmla="val 2273"/>
+              <a:gd name="adj" fmla="val 2128"/>
             </a:avLst>
           </a:prstGeom>
           <a:solidFill>
@@ -10847,6 +11525,13 @@
             <a:prstDash val="solid"/>
           </a:ln>
         </p:spPr>
+        <p:txBody>
+          <a:bodyPr/>
+          <a:lstStyle/>
+          <a:p>
+            <a:endParaRPr lang="zh-CN" altLang="en-US"/>
+          </a:p>
+        </p:txBody>
       </p:sp>
       <p:sp>
         <p:nvSpPr>
@@ -10856,7 +11541,7 @@
         </p:nvSpPr>
         <p:spPr>
           <a:xfrm>
-            <a:off x="850392" y="1417320"/>
+            <a:off x="850392" y="1490472"/>
             <a:ext cx="2267712" cy="182880"/>
           </a:xfrm>
           <a:prstGeom prst="rect">
@@ -10869,7 +11554,7 @@
           <a:bodyPr wrap="square" lIns="0" tIns="0" rIns="0" bIns="0" rtlCol="0" anchor="ctr"/>
           <a:lstStyle/>
           <a:p>
-            <a:pPr indent="0" marL="0">
+            <a:pPr marL="0" indent="0">
               <a:buNone/>
             </a:pPr>
             <a:r>
@@ -10895,8 +11580,8 @@
         </p:nvSpPr>
         <p:spPr>
           <a:xfrm>
-            <a:off x="850392" y="1664208"/>
-            <a:ext cx="2267712" cy="1581912"/>
+            <a:off x="850392" y="1737360"/>
+            <a:ext cx="2267712" cy="1645920"/>
           </a:xfrm>
           <a:prstGeom prst="rect">
             <a:avLst/>
@@ -10910,7 +11595,7 @@
           </a:bodyPr>
           <a:lstStyle/>
           <a:p>
-            <a:pPr indent="0" marL="0">
+            <a:pPr marL="0" indent="0">
               <a:buNone/>
             </a:pPr>
             <a:r>
@@ -10927,13 +11612,13 @@
             <a:endParaRPr lang="en-US" sz="1220" dirty="0"/>
           </a:p>
           <a:p>
-            <a:pPr indent="0" marL="0">
+            <a:pPr marL="0" indent="0">
               <a:buNone/>
             </a:pPr>
             <a:endParaRPr lang="en-US" sz="1220" dirty="0"/>
           </a:p>
           <a:p>
-            <a:pPr indent="0" marL="0">
+            <a:pPr marL="0" indent="0">
               <a:buNone/>
             </a:pPr>
             <a:r>
@@ -10960,11 +11645,11 @@
         <p:spPr>
           <a:xfrm>
             <a:off x="3328416" y="1325880"/>
-            <a:ext cx="2542032" cy="2011680"/>
+            <a:ext cx="2542032" cy="2148840"/>
           </a:xfrm>
           <a:prstGeom prst="roundRect">
             <a:avLst>
-              <a:gd name="adj" fmla="val 2273"/>
+              <a:gd name="adj" fmla="val 2128"/>
             </a:avLst>
           </a:prstGeom>
           <a:solidFill>
@@ -10977,6 +11662,13 @@
             <a:prstDash val="solid"/>
           </a:ln>
         </p:spPr>
+        <p:txBody>
+          <a:bodyPr/>
+          <a:lstStyle/>
+          <a:p>
+            <a:endParaRPr lang="zh-CN" altLang="en-US"/>
+          </a:p>
+        </p:txBody>
       </p:sp>
       <p:sp>
         <p:nvSpPr>
@@ -10986,7 +11678,7 @@
         </p:nvSpPr>
         <p:spPr>
           <a:xfrm>
-            <a:off x="3465576" y="1417320"/>
+            <a:off x="3465576" y="1490472"/>
             <a:ext cx="2267712" cy="182880"/>
           </a:xfrm>
           <a:prstGeom prst="rect">
@@ -10999,7 +11691,7 @@
           <a:bodyPr wrap="square" lIns="0" tIns="0" rIns="0" bIns="0" rtlCol="0" anchor="ctr"/>
           <a:lstStyle/>
           <a:p>
-            <a:pPr indent="0" marL="0">
+            <a:pPr marL="0" indent="0">
               <a:buNone/>
             </a:pPr>
             <a:r>
@@ -11025,8 +11717,8 @@
         </p:nvSpPr>
         <p:spPr>
           <a:xfrm>
-            <a:off x="3465576" y="1664208"/>
-            <a:ext cx="2267712" cy="1581912"/>
+            <a:off x="3465576" y="1737360"/>
+            <a:ext cx="2267712" cy="1645920"/>
           </a:xfrm>
           <a:prstGeom prst="rect">
             <a:avLst/>
@@ -11040,7 +11732,7 @@
           </a:bodyPr>
           <a:lstStyle/>
           <a:p>
-            <a:pPr indent="0" marL="0">
+            <a:pPr marL="0" indent="0">
               <a:buNone/>
             </a:pPr>
             <a:r>
@@ -11057,13 +11749,13 @@
             <a:endParaRPr lang="en-US" sz="1220" dirty="0"/>
           </a:p>
           <a:p>
-            <a:pPr indent="0" marL="0">
+            <a:pPr marL="0" indent="0">
               <a:buNone/>
             </a:pPr>
             <a:endParaRPr lang="en-US" sz="1220" dirty="0"/>
           </a:p>
           <a:p>
-            <a:pPr indent="0" marL="0">
+            <a:pPr marL="0" indent="0">
               <a:buNone/>
             </a:pPr>
             <a:r>
@@ -11090,11 +11782,11 @@
         <p:spPr>
           <a:xfrm>
             <a:off x="5943600" y="1325880"/>
-            <a:ext cx="2542032" cy="2011680"/>
+            <a:ext cx="2542032" cy="2148840"/>
           </a:xfrm>
           <a:prstGeom prst="roundRect">
             <a:avLst>
-              <a:gd name="adj" fmla="val 2273"/>
+              <a:gd name="adj" fmla="val 2128"/>
             </a:avLst>
           </a:prstGeom>
           <a:solidFill>
@@ -11107,6 +11799,13 @@
             <a:prstDash val="solid"/>
           </a:ln>
         </p:spPr>
+        <p:txBody>
+          <a:bodyPr/>
+          <a:lstStyle/>
+          <a:p>
+            <a:endParaRPr lang="zh-CN" altLang="en-US"/>
+          </a:p>
+        </p:txBody>
       </p:sp>
       <p:sp>
         <p:nvSpPr>
@@ -11116,7 +11815,7 @@
         </p:nvSpPr>
         <p:spPr>
           <a:xfrm>
-            <a:off x="6080760" y="1417320"/>
+            <a:off x="6080760" y="1490472"/>
             <a:ext cx="2267712" cy="182880"/>
           </a:xfrm>
           <a:prstGeom prst="rect">
@@ -11129,7 +11828,7 @@
           <a:bodyPr wrap="square" lIns="0" tIns="0" rIns="0" bIns="0" rtlCol="0" anchor="ctr"/>
           <a:lstStyle/>
           <a:p>
-            <a:pPr indent="0" marL="0">
+            <a:pPr marL="0" indent="0">
               <a:buNone/>
             </a:pPr>
             <a:r>
@@ -11155,8 +11854,8 @@
         </p:nvSpPr>
         <p:spPr>
           <a:xfrm>
-            <a:off x="6080760" y="1664208"/>
-            <a:ext cx="2267712" cy="1581912"/>
+            <a:off x="6080760" y="1737360"/>
+            <a:ext cx="2267712" cy="1645920"/>
           </a:xfrm>
           <a:prstGeom prst="rect">
             <a:avLst/>
@@ -11170,7 +11869,7 @@
           </a:bodyPr>
           <a:lstStyle/>
           <a:p>
-            <a:pPr indent="0" marL="0">
+            <a:pPr marL="0" indent="0">
               <a:buNone/>
             </a:pPr>
             <a:r>
@@ -11187,7 +11886,7 @@
             <a:endParaRPr lang="en-US" sz="1220" dirty="0"/>
           </a:p>
           <a:p>
-            <a:pPr indent="0" marL="0">
+            <a:pPr marL="0" indent="0">
               <a:buNone/>
             </a:pPr>
             <a:r>
@@ -11204,13 +11903,13 @@
             <a:endParaRPr lang="en-US" sz="1220" dirty="0"/>
           </a:p>
           <a:p>
-            <a:pPr indent="0" marL="0">
+            <a:pPr marL="0" indent="0">
               <a:buNone/>
             </a:pPr>
             <a:endParaRPr lang="en-US" sz="1220" dirty="0"/>
           </a:p>
           <a:p>
-            <a:pPr indent="0" marL="0">
+            <a:pPr marL="0" indent="0">
               <a:buNone/>
             </a:pPr>
             <a:r>
@@ -11236,12 +11935,12 @@
         </p:nvSpPr>
         <p:spPr>
           <a:xfrm>
-            <a:off x="987552" y="3785616"/>
-            <a:ext cx="7095744" cy="768096"/>
+            <a:off x="987552" y="3611880"/>
+            <a:ext cx="7095744" cy="914400"/>
           </a:xfrm>
           <a:prstGeom prst="roundRect">
             <a:avLst>
-              <a:gd name="adj" fmla="val 5952"/>
+              <a:gd name="adj" fmla="val 5000"/>
             </a:avLst>
           </a:prstGeom>
           <a:solidFill>
@@ -11254,6 +11953,13 @@
             <a:prstDash val="solid"/>
           </a:ln>
         </p:spPr>
+        <p:txBody>
+          <a:bodyPr/>
+          <a:lstStyle/>
+          <a:p>
+            <a:endParaRPr lang="zh-CN" altLang="en-US"/>
+          </a:p>
+        </p:txBody>
       </p:sp>
       <p:sp>
         <p:nvSpPr>
@@ -11263,7 +11969,7 @@
         </p:nvSpPr>
         <p:spPr>
           <a:xfrm>
-            <a:off x="1124712" y="3877056"/>
+            <a:off x="1124712" y="3776472"/>
             <a:ext cx="6821424" cy="182880"/>
           </a:xfrm>
           <a:prstGeom prst="rect">
@@ -11276,7 +11982,7 @@
           <a:bodyPr wrap="square" lIns="0" tIns="0" rIns="0" bIns="0" rtlCol="0" anchor="ctr"/>
           <a:lstStyle/>
           <a:p>
-            <a:pPr indent="0" marL="0">
+            <a:pPr marL="0" indent="0">
               <a:buNone/>
             </a:pPr>
             <a:r>
@@ -11302,8 +12008,8 @@
         </p:nvSpPr>
         <p:spPr>
           <a:xfrm>
-            <a:off x="1124712" y="4123944"/>
-            <a:ext cx="6821424" cy="338328"/>
+            <a:off x="1124712" y="4023360"/>
+            <a:ext cx="6821424" cy="411480"/>
           </a:xfrm>
           <a:prstGeom prst="rect">
             <a:avLst/>
@@ -11317,7 +12023,7 @@
           </a:bodyPr>
           <a:lstStyle/>
           <a:p>
-            <a:pPr indent="0" marL="0">
+            <a:pPr marL="0" indent="0">
               <a:buNone/>
             </a:pPr>
             <a:r>
@@ -11351,6 +12057,7 @@
         <a:solidFill>
           <a:srgbClr val="FFFFFF"/>
         </a:solidFill>
+        <a:effectLst/>
       </p:bgPr>
     </p:bg>
     <p:spTree>
@@ -11393,6 +12100,13 @@
             <a:prstDash val="solid"/>
           </a:ln>
         </p:spPr>
+        <p:txBody>
+          <a:bodyPr/>
+          <a:lstStyle/>
+          <a:p>
+            <a:endParaRPr lang="zh-CN" altLang="en-US"/>
+          </a:p>
+        </p:txBody>
       </p:sp>
       <p:sp>
         <p:nvSpPr>
@@ -11415,7 +12129,7 @@
           <a:bodyPr wrap="square" lIns="0" tIns="0" rIns="0" bIns="0" rtlCol="0" anchor="ctr"/>
           <a:lstStyle/>
           <a:p>
-            <a:pPr indent="0" marL="0">
+            <a:pPr marL="0" indent="0">
               <a:buNone/>
             </a:pPr>
             <a:r>
@@ -11454,7 +12168,7 @@
           <a:bodyPr wrap="square" lIns="0" tIns="0" rIns="0" bIns="0" rtlCol="0" anchor="ctr"/>
           <a:lstStyle/>
           <a:p>
-            <a:pPr algn="r" indent="0" marL="0">
+            <a:pPr marL="0" indent="0" algn="r">
               <a:buNone/>
             </a:pPr>
             <a:r>
@@ -11493,7 +12207,7 @@
           <a:bodyPr wrap="square" lIns="0" tIns="0" rIns="0" bIns="0" rtlCol="0" anchor="ctr"/>
           <a:lstStyle/>
           <a:p>
-            <a:pPr indent="0" marL="0">
+            <a:pPr marL="0" indent="0">
               <a:buNone/>
             </a:pPr>
             <a:r>
@@ -11532,7 +12246,7 @@
           <a:bodyPr wrap="square" lIns="0" tIns="0" rIns="0" bIns="0" rtlCol="0" anchor="ctr"/>
           <a:lstStyle/>
           <a:p>
-            <a:pPr algn="r" indent="0" marL="0">
+            <a:pPr marL="0" indent="0" algn="r">
               <a:buNone/>
             </a:pPr>
             <a:r>
@@ -11552,14 +12266,14 @@
       </p:sp>
       <p:pic>
         <p:nvPicPr>
-          <p:cNvPr id="7" name="Image 0" descr="H:\project\OpenGU\GULib-master\report\0417_5003report\figures\paper_figures\FIG-1_Generalization.png">    </p:cNvPr>
+          <p:cNvPr id="7" name="Image 0" descr="H:\project\OpenGU\GULib-master\report\0417_5003report\figures\paper_figures\FIG-1_Generalization.png"/>
           <p:cNvPicPr>
             <a:picLocks noChangeAspect="1"/>
           </p:cNvPicPr>
           <p:nvPr/>
         </p:nvPicPr>
         <p:blipFill>
-          <a:blip r:embed="rId1"/>
+          <a:blip r:embed="rId3"/>
           <a:stretch>
             <a:fillRect/>
           </a:stretch>
@@ -11595,7 +12309,7 @@
           <a:bodyPr wrap="square" lIns="0" tIns="0" rIns="0" bIns="0" rtlCol="0" anchor="ctr"/>
           <a:lstStyle/>
           <a:p>
-            <a:pPr indent="0" marL="0">
+            <a:pPr marL="0" indent="0">
               <a:buNone/>
             </a:pPr>
             <a:r>
@@ -11621,7 +12335,7 @@
         </p:nvSpPr>
         <p:spPr>
           <a:xfrm>
-            <a:off x="5650992" y="932688"/>
+            <a:off x="5650992" y="914400"/>
             <a:ext cx="2788920" cy="914400"/>
           </a:xfrm>
           <a:prstGeom prst="roundRect">
@@ -11639,6 +12353,13 @@
             <a:prstDash val="solid"/>
           </a:ln>
         </p:spPr>
+        <p:txBody>
+          <a:bodyPr/>
+          <a:lstStyle/>
+          <a:p>
+            <a:endParaRPr lang="zh-CN" altLang="en-US"/>
+          </a:p>
+        </p:txBody>
       </p:sp>
       <p:sp>
         <p:nvSpPr>
@@ -11648,7 +12369,7 @@
         </p:nvSpPr>
         <p:spPr>
           <a:xfrm>
-            <a:off x="5788152" y="1024128"/>
+            <a:off x="5788152" y="1078992"/>
             <a:ext cx="2514600" cy="182880"/>
           </a:xfrm>
           <a:prstGeom prst="rect">
@@ -11661,7 +12382,7 @@
           <a:bodyPr wrap="square" lIns="0" tIns="0" rIns="0" bIns="0" rtlCol="0" anchor="ctr"/>
           <a:lstStyle/>
           <a:p>
-            <a:pPr indent="0" marL="0">
+            <a:pPr marL="0" indent="0">
               <a:buNone/>
             </a:pPr>
             <a:r>
@@ -11687,8 +12408,8 @@
         </p:nvSpPr>
         <p:spPr>
           <a:xfrm>
-            <a:off x="5788152" y="1271016"/>
-            <a:ext cx="2514600" cy="484632"/>
+            <a:off x="5788152" y="1325880"/>
+            <a:ext cx="2514600" cy="411480"/>
           </a:xfrm>
           <a:prstGeom prst="rect">
             <a:avLst/>
@@ -11702,7 +12423,7 @@
           </a:bodyPr>
           <a:lstStyle/>
           <a:p>
-            <a:pPr indent="0" marL="0">
+            <a:pPr marL="0" indent="0">
               <a:buNone/>
             </a:pPr>
             <a:r>
@@ -11728,12 +12449,12 @@
         </p:nvSpPr>
         <p:spPr>
           <a:xfrm>
-            <a:off x="5650992" y="1993392"/>
-            <a:ext cx="2788920" cy="987552"/>
+            <a:off x="5650992" y="1965960"/>
+            <a:ext cx="2788920" cy="960120"/>
           </a:xfrm>
           <a:prstGeom prst="roundRect">
             <a:avLst>
-              <a:gd name="adj" fmla="val 4630"/>
+              <a:gd name="adj" fmla="val 4762"/>
             </a:avLst>
           </a:prstGeom>
           <a:solidFill>
@@ -11746,6 +12467,13 @@
             <a:prstDash val="solid"/>
           </a:ln>
         </p:spPr>
+        <p:txBody>
+          <a:bodyPr/>
+          <a:lstStyle/>
+          <a:p>
+            <a:endParaRPr lang="zh-CN" altLang="en-US"/>
+          </a:p>
+        </p:txBody>
       </p:sp>
       <p:sp>
         <p:nvSpPr>
@@ -11755,7 +12483,7 @@
         </p:nvSpPr>
         <p:spPr>
           <a:xfrm>
-            <a:off x="5788152" y="2084832"/>
+            <a:off x="5788152" y="2130552"/>
             <a:ext cx="2514600" cy="182880"/>
           </a:xfrm>
           <a:prstGeom prst="rect">
@@ -11768,7 +12496,7 @@
           <a:bodyPr wrap="square" lIns="0" tIns="0" rIns="0" bIns="0" rtlCol="0" anchor="ctr"/>
           <a:lstStyle/>
           <a:p>
-            <a:pPr indent="0" marL="0">
+            <a:pPr marL="0" indent="0">
               <a:buNone/>
             </a:pPr>
             <a:r>
@@ -11794,8 +12522,8 @@
         </p:nvSpPr>
         <p:spPr>
           <a:xfrm>
-            <a:off x="5788152" y="2331720"/>
-            <a:ext cx="2514600" cy="557784"/>
+            <a:off x="5788152" y="2377440"/>
+            <a:ext cx="2514600" cy="457200"/>
           </a:xfrm>
           <a:prstGeom prst="rect">
             <a:avLst/>
@@ -11809,7 +12537,7 @@
           </a:bodyPr>
           <a:lstStyle/>
           <a:p>
-            <a:pPr indent="0" marL="0">
+            <a:pPr marL="0" indent="0">
               <a:buNone/>
             </a:pPr>
             <a:r>
@@ -11826,7 +12554,7 @@
             <a:endParaRPr lang="en-US" sz="1220" dirty="0"/>
           </a:p>
           <a:p>
-            <a:pPr indent="0" marL="0">
+            <a:pPr marL="0" indent="0">
               <a:buNone/>
             </a:pPr>
             <a:r>
@@ -11843,7 +12571,7 @@
             <a:endParaRPr lang="en-US" sz="1220" dirty="0"/>
           </a:p>
           <a:p>
-            <a:pPr indent="0" marL="0">
+            <a:pPr marL="0" indent="0">
               <a:buNone/>
             </a:pPr>
             <a:r>
@@ -11869,12 +12597,12 @@
         </p:nvSpPr>
         <p:spPr>
           <a:xfrm>
-            <a:off x="5650992" y="3163824"/>
-            <a:ext cx="2788920" cy="1078992"/>
+            <a:off x="5650992" y="3063240"/>
+            <a:ext cx="2788920" cy="1280160"/>
           </a:xfrm>
           <a:prstGeom prst="roundRect">
             <a:avLst>
-              <a:gd name="adj" fmla="val 4237"/>
+              <a:gd name="adj" fmla="val 3571"/>
             </a:avLst>
           </a:prstGeom>
           <a:solidFill>
@@ -11887,6 +12615,13 @@
             <a:prstDash val="solid"/>
           </a:ln>
         </p:spPr>
+        <p:txBody>
+          <a:bodyPr/>
+          <a:lstStyle/>
+          <a:p>
+            <a:endParaRPr lang="zh-CN" altLang="en-US"/>
+          </a:p>
+        </p:txBody>
       </p:sp>
       <p:sp>
         <p:nvSpPr>
@@ -11896,7 +12631,7 @@
         </p:nvSpPr>
         <p:spPr>
           <a:xfrm>
-            <a:off x="5788152" y="3255264"/>
+            <a:off x="5788152" y="3227832"/>
             <a:ext cx="2514600" cy="182880"/>
           </a:xfrm>
           <a:prstGeom prst="rect">
@@ -11909,7 +12644,7 @@
           <a:bodyPr wrap="square" lIns="0" tIns="0" rIns="0" bIns="0" rtlCol="0" anchor="ctr"/>
           <a:lstStyle/>
           <a:p>
-            <a:pPr indent="0" marL="0">
+            <a:pPr marL="0" indent="0">
               <a:buNone/>
             </a:pPr>
             <a:r>
@@ -11935,8 +12670,8 @@
         </p:nvSpPr>
         <p:spPr>
           <a:xfrm>
-            <a:off x="5788152" y="3502152"/>
-            <a:ext cx="2514600" cy="649224"/>
+            <a:off x="5788152" y="3474720"/>
+            <a:ext cx="2514600" cy="777240"/>
           </a:xfrm>
           <a:prstGeom prst="rect">
             <a:avLst/>
@@ -11950,7 +12685,7 @@
           </a:bodyPr>
           <a:lstStyle/>
           <a:p>
-            <a:pPr indent="0" marL="0">
+            <a:pPr marL="0" indent="0">
               <a:buNone/>
             </a:pPr>
             <a:r>
@@ -11982,8 +12717,9 @@
     <p:bg>
       <p:bgPr>
         <a:solidFill>
-          <a:srgbClr val="F7F5F1"/>
+          <a:srgbClr val="FFFFFF"/>
         </a:solidFill>
+        <a:effectLst/>
       </p:bgPr>
     </p:bg>
     <p:spTree>
@@ -12026,6 +12762,13 @@
             <a:prstDash val="solid"/>
           </a:ln>
         </p:spPr>
+        <p:txBody>
+          <a:bodyPr/>
+          <a:lstStyle/>
+          <a:p>
+            <a:endParaRPr lang="zh-CN" altLang="en-US"/>
+          </a:p>
+        </p:txBody>
       </p:sp>
       <p:sp>
         <p:nvSpPr>
@@ -12048,7 +12791,7 @@
           <a:bodyPr wrap="square" lIns="0" tIns="0" rIns="0" bIns="0" rtlCol="0" anchor="ctr"/>
           <a:lstStyle/>
           <a:p>
-            <a:pPr indent="0" marL="0">
+            <a:pPr marL="0" indent="0">
               <a:buNone/>
             </a:pPr>
             <a:r>
@@ -12060,7 +12803,7 @@
                 <a:ea typeface="Times New Roman" pitchFamily="34" charset="-122"/>
                 <a:cs typeface="Times New Roman" pitchFamily="34" charset="-120"/>
               </a:rPr>
-              <a:t>Ratio Sensitivity And Ablation</a:t>
+              <a:t>Main Finding: Strategy Spectrum</a:t>
             </a:r>
             <a:endParaRPr lang="en-US" sz="2400" dirty="0"/>
           </a:p>
@@ -12087,7 +12830,7 @@
           <a:bodyPr wrap="square" lIns="0" tIns="0" rIns="0" bIns="0" rtlCol="0" anchor="ctr"/>
           <a:lstStyle/>
           <a:p>
-            <a:pPr algn="r" indent="0" marL="0">
+            <a:pPr marL="0" indent="0" algn="r">
               <a:buNone/>
             </a:pPr>
             <a:r>
@@ -12126,7 +12869,7 @@
           <a:bodyPr wrap="square" lIns="0" tIns="0" rIns="0" bIns="0" rtlCol="0" anchor="ctr"/>
           <a:lstStyle/>
           <a:p>
-            <a:pPr indent="0" marL="0">
+            <a:pPr marL="0" indent="0">
               <a:buNone/>
             </a:pPr>
             <a:r>
@@ -12165,7 +12908,7 @@
           <a:bodyPr wrap="square" lIns="0" tIns="0" rIns="0" bIns="0" rtlCol="0" anchor="ctr"/>
           <a:lstStyle/>
           <a:p>
-            <a:pPr algn="r" indent="0" marL="0">
+            <a:pPr marL="0" indent="0" algn="r">
               <a:buNone/>
             </a:pPr>
             <a:r>
@@ -12185,22 +12928,22 @@
       </p:sp>
       <p:pic>
         <p:nvPicPr>
-          <p:cNvPr id="7" name="Image 0" descr="H:\project\OpenGU\GULib-master\report\0417_5003report\figures\paper_figures\FIG-2_Scaling.png">    </p:cNvPr>
+          <p:cNvPr id="7" name="Image 0" descr="H:\project\OpenGU\GULib-master\report\0417_5003report\figures\paper_figures\FIG-3_Spectrum.png"/>
           <p:cNvPicPr>
             <a:picLocks noChangeAspect="1"/>
           </p:cNvPicPr>
           <p:nvPr/>
         </p:nvPicPr>
         <p:blipFill>
-          <a:blip r:embed="rId1"/>
+          <a:blip r:embed="rId3"/>
           <a:stretch>
             <a:fillRect/>
           </a:stretch>
         </p:blipFill>
         <p:spPr>
           <a:xfrm>
-            <a:off x="566928" y="914400"/>
-            <a:ext cx="5257800" cy="3291840"/>
+            <a:off x="658368" y="932688"/>
+            <a:ext cx="7818120" cy="3566160"/>
           </a:xfrm>
           <a:prstGeom prst="rect">
             <a:avLst/>
@@ -12215,8 +12958,8 @@
         </p:nvSpPr>
         <p:spPr>
           <a:xfrm>
-            <a:off x="585216" y="4297680"/>
-            <a:ext cx="5212080" cy="146304"/>
+            <a:off x="713232" y="4590288"/>
+            <a:ext cx="7543800" cy="146304"/>
           </a:xfrm>
           <a:prstGeom prst="rect">
             <a:avLst/>
@@ -12228,7 +12971,7 @@
           <a:bodyPr wrap="square" lIns="0" tIns="0" rIns="0" bIns="0" rtlCol="0" anchor="ctr"/>
           <a:lstStyle/>
           <a:p>
-            <a:pPr indent="0" marL="0">
+            <a:pPr marL="0" indent="0">
               <a:buNone/>
             </a:pPr>
             <a:r>
@@ -12240,330 +12983,9 @@
                 <a:ea typeface="Times New Roman" pitchFamily="34" charset="-122"/>
                 <a:cs typeface="Times New Roman" pitchFamily="34" charset="-120"/>
               </a:rPr>
-              <a:t>Figure 2. Ratio-sensitivity view for GIF and GNNDelete on Cora/GCN.</a:t>
+              <a:t>Full Figure 3. Strategy comparison in relative_f1_drop at ratio = 0.05 using the k=5 baseline.</a:t>
             </a:r>
             <a:endParaRPr lang="en-US" sz="900" dirty="0"/>
-          </a:p>
-        </p:txBody>
-      </p:sp>
-      <p:sp>
-        <p:nvSpPr>
-          <p:cNvPr id="9" name="Shape 6"/>
-          <p:cNvSpPr/>
-          <p:nvPr/>
-        </p:nvSpPr>
-        <p:spPr>
-          <a:xfrm>
-            <a:off x="6016752" y="1005840"/>
-            <a:ext cx="2359152" cy="960120"/>
-          </a:xfrm>
-          <a:prstGeom prst="roundRect">
-            <a:avLst>
-              <a:gd name="adj" fmla="val 4762"/>
-            </a:avLst>
-          </a:prstGeom>
-          <a:solidFill>
-            <a:srgbClr val="FFFFFF"/>
-          </a:solidFill>
-          <a:ln w="13970">
-            <a:solidFill>
-              <a:srgbClr val="D9DEE7"/>
-            </a:solidFill>
-            <a:prstDash val="solid"/>
-          </a:ln>
-        </p:spPr>
-      </p:sp>
-      <p:sp>
-        <p:nvSpPr>
-          <p:cNvPr id="10" name="Text 7"/>
-          <p:cNvSpPr/>
-          <p:nvPr/>
-        </p:nvSpPr>
-        <p:spPr>
-          <a:xfrm>
-            <a:off x="6153912" y="1097280"/>
-            <a:ext cx="2084832" cy="182880"/>
-          </a:xfrm>
-          <a:prstGeom prst="rect">
-            <a:avLst/>
-          </a:prstGeom>
-          <a:noFill/>
-          <a:ln/>
-        </p:spPr>
-        <p:txBody>
-          <a:bodyPr wrap="square" lIns="0" tIns="0" rIns="0" bIns="0" rtlCol="0" anchor="ctr"/>
-          <a:lstStyle/>
-          <a:p>
-            <a:pPr indent="0" marL="0">
-              <a:buNone/>
-            </a:pPr>
-            <a:r>
-              <a:rPr lang="en-US" sz="1700" b="1" dirty="0">
-                <a:solidFill>
-                  <a:srgbClr val="223A5E"/>
-                </a:solidFill>
-                <a:latin typeface="Times New Roman" pitchFamily="34" charset="0"/>
-                <a:ea typeface="Times New Roman" pitchFamily="34" charset="-122"/>
-                <a:cs typeface="Times New Roman" pitchFamily="34" charset="-120"/>
-              </a:rPr>
-              <a:t>Ablation read</a:t>
-            </a:r>
-            <a:endParaRPr lang="en-US" sz="1700" dirty="0"/>
-          </a:p>
-        </p:txBody>
-      </p:sp>
-      <p:sp>
-        <p:nvSpPr>
-          <p:cNvPr id="11" name="Text 8"/>
-          <p:cNvSpPr/>
-          <p:nvPr/>
-        </p:nvSpPr>
-        <p:spPr>
-          <a:xfrm>
-            <a:off x="6153912" y="1344168"/>
-            <a:ext cx="2084832" cy="530352"/>
-          </a:xfrm>
-          <a:prstGeom prst="rect">
-            <a:avLst/>
-          </a:prstGeom>
-          <a:noFill/>
-          <a:ln/>
-        </p:spPr>
-        <p:txBody>
-          <a:bodyPr wrap="square" lIns="0" tIns="0" rIns="0" bIns="0" rtlCol="0" anchor="ctr">
-            <a:normAutofit/>
-          </a:bodyPr>
-          <a:lstStyle/>
-          <a:p>
-            <a:pPr indent="0" marL="0">
-              <a:buNone/>
-            </a:pPr>
-            <a:r>
-              <a:rPr lang="en-US" sz="1220" dirty="0">
-                <a:solidFill>
-                  <a:srgbClr val="1E2630"/>
-                </a:solidFill>
-                <a:latin typeface="Times New Roman" pitchFamily="34" charset="0"/>
-                <a:ea typeface="Times New Roman" pitchFamily="34" charset="-122"/>
-                <a:cs typeface="Times New Roman" pitchFamily="34" charset="-120"/>
-              </a:rPr>
-              <a:t>This page asks how attack strength changes as the deletion ratio increases, not only who wins at one fixed point.</a:t>
-            </a:r>
-            <a:endParaRPr lang="en-US" sz="1220" dirty="0"/>
-          </a:p>
-        </p:txBody>
-      </p:sp>
-      <p:sp>
-        <p:nvSpPr>
-          <p:cNvPr id="12" name="Shape 9"/>
-          <p:cNvSpPr/>
-          <p:nvPr/>
-        </p:nvSpPr>
-        <p:spPr>
-          <a:xfrm>
-            <a:off x="6016752" y="2240280"/>
-            <a:ext cx="2359152" cy="960120"/>
-          </a:xfrm>
-          <a:prstGeom prst="roundRect">
-            <a:avLst>
-              <a:gd name="adj" fmla="val 4762"/>
-            </a:avLst>
-          </a:prstGeom>
-          <a:solidFill>
-            <a:srgbClr val="E8EEF5"/>
-          </a:solidFill>
-          <a:ln w="13970">
-            <a:solidFill>
-              <a:srgbClr val="E8EEF5"/>
-            </a:solidFill>
-            <a:prstDash val="solid"/>
-          </a:ln>
-        </p:spPr>
-      </p:sp>
-      <p:sp>
-        <p:nvSpPr>
-          <p:cNvPr id="13" name="Text 10"/>
-          <p:cNvSpPr/>
-          <p:nvPr/>
-        </p:nvSpPr>
-        <p:spPr>
-          <a:xfrm>
-            <a:off x="6153912" y="2331720"/>
-            <a:ext cx="2084832" cy="182880"/>
-          </a:xfrm>
-          <a:prstGeom prst="rect">
-            <a:avLst/>
-          </a:prstGeom>
-          <a:noFill/>
-          <a:ln/>
-        </p:spPr>
-        <p:txBody>
-          <a:bodyPr wrap="square" lIns="0" tIns="0" rIns="0" bIns="0" rtlCol="0" anchor="ctr"/>
-          <a:lstStyle/>
-          <a:p>
-            <a:pPr indent="0" marL="0">
-              <a:buNone/>
-            </a:pPr>
-            <a:r>
-              <a:rPr lang="en-US" sz="1700" b="1" dirty="0">
-                <a:solidFill>
-                  <a:srgbClr val="223A5E"/>
-                </a:solidFill>
-                <a:latin typeface="Times New Roman" pitchFamily="34" charset="0"/>
-                <a:ea typeface="Times New Roman" pitchFamily="34" charset="-122"/>
-                <a:cs typeface="Times New Roman" pitchFamily="34" charset="-120"/>
-              </a:rPr>
-              <a:t>Observed pattern</a:t>
-            </a:r>
-            <a:endParaRPr lang="en-US" sz="1700" dirty="0"/>
-          </a:p>
-        </p:txBody>
-      </p:sp>
-      <p:sp>
-        <p:nvSpPr>
-          <p:cNvPr id="14" name="Text 11"/>
-          <p:cNvSpPr/>
-          <p:nvPr/>
-        </p:nvSpPr>
-        <p:spPr>
-          <a:xfrm>
-            <a:off x="6153912" y="2578608"/>
-            <a:ext cx="2084832" cy="530352"/>
-          </a:xfrm>
-          <a:prstGeom prst="rect">
-            <a:avLst/>
-          </a:prstGeom>
-          <a:noFill/>
-          <a:ln/>
-        </p:spPr>
-        <p:txBody>
-          <a:bodyPr wrap="square" lIns="0" tIns="0" rIns="0" bIns="0" rtlCol="0" anchor="ctr">
-            <a:normAutofit/>
-          </a:bodyPr>
-          <a:lstStyle/>
-          <a:p>
-            <a:pPr indent="0" marL="0">
-              <a:buNone/>
-            </a:pPr>
-            <a:r>
-              <a:rPr lang="en-US" sz="1220" dirty="0">
-                <a:solidFill>
-                  <a:srgbClr val="1E2630"/>
-                </a:solidFill>
-                <a:latin typeface="Times New Roman" pitchFamily="34" charset="0"/>
-                <a:ea typeface="Times New Roman" pitchFamily="34" charset="-122"/>
-                <a:cs typeface="Times New Roman" pitchFamily="34" charset="-120"/>
-              </a:rPr>
-              <a:t>GNNDelete stays sensitive even at small ratios, while GIF remains much flatter across the same range.</a:t>
-            </a:r>
-            <a:endParaRPr lang="en-US" sz="1220" dirty="0"/>
-          </a:p>
-        </p:txBody>
-      </p:sp>
-      <p:sp>
-        <p:nvSpPr>
-          <p:cNvPr id="15" name="Shape 12"/>
-          <p:cNvSpPr/>
-          <p:nvPr/>
-        </p:nvSpPr>
-        <p:spPr>
-          <a:xfrm>
-            <a:off x="6016752" y="3474720"/>
-            <a:ext cx="2359152" cy="749808"/>
-          </a:xfrm>
-          <a:prstGeom prst="roundRect">
-            <a:avLst>
-              <a:gd name="adj" fmla="val 6098"/>
-            </a:avLst>
-          </a:prstGeom>
-          <a:solidFill>
-            <a:srgbClr val="223A5E"/>
-          </a:solidFill>
-          <a:ln w="13970">
-            <a:solidFill>
-              <a:srgbClr val="223A5E"/>
-            </a:solidFill>
-            <a:prstDash val="solid"/>
-          </a:ln>
-        </p:spPr>
-      </p:sp>
-      <p:sp>
-        <p:nvSpPr>
-          <p:cNvPr id="16" name="Text 13"/>
-          <p:cNvSpPr/>
-          <p:nvPr/>
-        </p:nvSpPr>
-        <p:spPr>
-          <a:xfrm>
-            <a:off x="6153912" y="3566160"/>
-            <a:ext cx="2084832" cy="182880"/>
-          </a:xfrm>
-          <a:prstGeom prst="rect">
-            <a:avLst/>
-          </a:prstGeom>
-          <a:noFill/>
-          <a:ln/>
-        </p:spPr>
-        <p:txBody>
-          <a:bodyPr wrap="square" lIns="0" tIns="0" rIns="0" bIns="0" rtlCol="0" anchor="ctr"/>
-          <a:lstStyle/>
-          <a:p>
-            <a:pPr indent="0" marL="0">
-              <a:buNone/>
-            </a:pPr>
-            <a:r>
-              <a:rPr lang="en-US" sz="1700" b="1" dirty="0">
-                <a:solidFill>
-                  <a:srgbClr val="F7F5F1"/>
-                </a:solidFill>
-                <a:latin typeface="Times New Roman" pitchFamily="34" charset="0"/>
-                <a:ea typeface="Times New Roman" pitchFamily="34" charset="-122"/>
-                <a:cs typeface="Times New Roman" pitchFamily="34" charset="-120"/>
-              </a:rPr>
-              <a:t>Takeaway</a:t>
-            </a:r>
-            <a:endParaRPr lang="en-US" sz="1700" dirty="0"/>
-          </a:p>
-        </p:txBody>
-      </p:sp>
-      <p:sp>
-        <p:nvSpPr>
-          <p:cNvPr id="17" name="Text 14"/>
-          <p:cNvSpPr/>
-          <p:nvPr/>
-        </p:nvSpPr>
-        <p:spPr>
-          <a:xfrm>
-            <a:off x="6153912" y="3813048"/>
-            <a:ext cx="2084832" cy="320040"/>
-          </a:xfrm>
-          <a:prstGeom prst="rect">
-            <a:avLst/>
-          </a:prstGeom>
-          <a:noFill/>
-          <a:ln/>
-        </p:spPr>
-        <p:txBody>
-          <a:bodyPr wrap="square" lIns="0" tIns="0" rIns="0" bIns="0" rtlCol="0" anchor="ctr">
-            <a:normAutofit/>
-          </a:bodyPr>
-          <a:lstStyle/>
-          <a:p>
-            <a:pPr indent="0" marL="0">
-              <a:buNone/>
-            </a:pPr>
-            <a:r>
-              <a:rPr lang="en-US" sz="1220" dirty="0">
-                <a:solidFill>
-                  <a:srgbClr val="FFFFFF"/>
-                </a:solidFill>
-                <a:latin typeface="Times New Roman" pitchFamily="34" charset="0"/>
-                <a:ea typeface="Times New Roman" pitchFamily="34" charset="-122"/>
-                <a:cs typeface="Times New Roman" pitchFamily="34" charset="-120"/>
-              </a:rPr>
-              <a:t>The family difference is structural rather than a one-point artifact of the chosen ratio.</a:t>
-            </a:r>
-            <a:endParaRPr lang="en-US" sz="1220" dirty="0"/>
           </a:p>
         </p:txBody>
       </p:sp>
@@ -12868,4 +13290,319 @@
     </a:ext>
   </a:extLst>
 </a:theme>
+</file>
+
+<file path=ppt/theme/theme2.xml><?xml version="1.0" encoding="utf-8"?>
+<a:theme xmlns:a="http://schemas.openxmlformats.org/drawingml/2006/main" name="Office 主题​​">
+  <a:themeElements>
+    <a:clrScheme name="Office">
+      <a:dk1>
+        <a:sysClr val="windowText" lastClr="000000"/>
+      </a:dk1>
+      <a:lt1>
+        <a:sysClr val="window" lastClr="FFFFFF"/>
+      </a:lt1>
+      <a:dk2>
+        <a:srgbClr val="0E2841"/>
+      </a:dk2>
+      <a:lt2>
+        <a:srgbClr val="E8E8E8"/>
+      </a:lt2>
+      <a:accent1>
+        <a:srgbClr val="156082"/>
+      </a:accent1>
+      <a:accent2>
+        <a:srgbClr val="E97132"/>
+      </a:accent2>
+      <a:accent3>
+        <a:srgbClr val="196B24"/>
+      </a:accent3>
+      <a:accent4>
+        <a:srgbClr val="0F9ED5"/>
+      </a:accent4>
+      <a:accent5>
+        <a:srgbClr val="A02B93"/>
+      </a:accent5>
+      <a:accent6>
+        <a:srgbClr val="4EA72E"/>
+      </a:accent6>
+      <a:hlink>
+        <a:srgbClr val="467886"/>
+      </a:hlink>
+      <a:folHlink>
+        <a:srgbClr val="96607D"/>
+      </a:folHlink>
+    </a:clrScheme>
+    <a:fontScheme name="Office">
+      <a:majorFont>
+        <a:latin typeface="等线 Light" panose="02110004020202020204"/>
+        <a:ea typeface=""/>
+        <a:cs typeface=""/>
+        <a:font script="Jpan" typeface="游ゴシック Light"/>
+        <a:font script="Hang" typeface="맑은 고딕"/>
+        <a:font script="Hans" typeface="等线 Light"/>
+        <a:font script="Hant" typeface="新細明體"/>
+        <a:font script="Arab" typeface="Times New Roman"/>
+        <a:font script="Hebr" typeface="Times New Roman"/>
+        <a:font script="Thai" typeface="Angsana New"/>
+        <a:font script="Ethi" typeface="Nyala"/>
+        <a:font script="Beng" typeface="Vrinda"/>
+        <a:font script="Gujr" typeface="Shruti"/>
+        <a:font script="Khmr" typeface="MoolBoran"/>
+        <a:font script="Knda" typeface="Tunga"/>
+        <a:font script="Guru" typeface="Raavi"/>
+        <a:font script="Cans" typeface="Euphemia"/>
+        <a:font script="Cher" typeface="Plantagenet Cherokee"/>
+        <a:font script="Yiii" typeface="Microsoft Yi Baiti"/>
+        <a:font script="Tibt" typeface="Microsoft Himalaya"/>
+        <a:font script="Thaa" typeface="MV Boli"/>
+        <a:font script="Deva" typeface="Mangal"/>
+        <a:font script="Telu" typeface="Gautami"/>
+        <a:font script="Taml" typeface="Latha"/>
+        <a:font script="Syrc" typeface="Estrangelo Edessa"/>
+        <a:font script="Orya" typeface="Kalinga"/>
+        <a:font script="Mlym" typeface="Kartika"/>
+        <a:font script="Laoo" typeface="DokChampa"/>
+        <a:font script="Sinh" typeface="Iskoola Pota"/>
+        <a:font script="Mong" typeface="Mongolian Baiti"/>
+        <a:font script="Viet" typeface="Times New Roman"/>
+        <a:font script="Uigh" typeface="Microsoft Uighur"/>
+        <a:font script="Geor" typeface="Sylfaen"/>
+        <a:font script="Armn" typeface="Arial"/>
+        <a:font script="Bugi" typeface="Leelawadee UI"/>
+        <a:font script="Bopo" typeface="Microsoft JhengHei"/>
+        <a:font script="Java" typeface="Javanese Text"/>
+        <a:font script="Lisu" typeface="Segoe UI"/>
+        <a:font script="Mymr" typeface="Myanmar Text"/>
+        <a:font script="Nkoo" typeface="Ebrima"/>
+        <a:font script="Olck" typeface="Nirmala UI"/>
+        <a:font script="Osma" typeface="Ebrima"/>
+        <a:font script="Phag" typeface="Phagspa"/>
+        <a:font script="Syrn" typeface="Estrangelo Edessa"/>
+        <a:font script="Syrj" typeface="Estrangelo Edessa"/>
+        <a:font script="Syre" typeface="Estrangelo Edessa"/>
+        <a:font script="Sora" typeface="Nirmala UI"/>
+        <a:font script="Tale" typeface="Microsoft Tai Le"/>
+        <a:font script="Talu" typeface="Microsoft New Tai Lue"/>
+        <a:font script="Tfng" typeface="Ebrima"/>
+      </a:majorFont>
+      <a:minorFont>
+        <a:latin typeface="等线" panose="02110004020202020204"/>
+        <a:ea typeface=""/>
+        <a:cs typeface=""/>
+        <a:font script="Jpan" typeface="游ゴシック"/>
+        <a:font script="Hang" typeface="맑은 고딕"/>
+        <a:font script="Hans" typeface="等线"/>
+        <a:font script="Hant" typeface="新細明體"/>
+        <a:font script="Arab" typeface="Arial"/>
+        <a:font script="Hebr" typeface="Arial"/>
+        <a:font script="Thai" typeface="Cordia New"/>
+        <a:font script="Ethi" typeface="Nyala"/>
+        <a:font script="Beng" typeface="Vrinda"/>
+        <a:font script="Gujr" typeface="Shruti"/>
+        <a:font script="Khmr" typeface="DaunPenh"/>
+        <a:font script="Knda" typeface="Tunga"/>
+        <a:font script="Guru" typeface="Raavi"/>
+        <a:font script="Cans" typeface="Euphemia"/>
+        <a:font script="Cher" typeface="Plantagenet Cherokee"/>
+        <a:font script="Yiii" typeface="Microsoft Yi Baiti"/>
+        <a:font script="Tibt" typeface="Microsoft Himalaya"/>
+        <a:font script="Thaa" typeface="MV Boli"/>
+        <a:font script="Deva" typeface="Mangal"/>
+        <a:font script="Telu" typeface="Gautami"/>
+        <a:font script="Taml" typeface="Latha"/>
+        <a:font script="Syrc" typeface="Estrangelo Edessa"/>
+        <a:font script="Orya" typeface="Kalinga"/>
+        <a:font script="Mlym" typeface="Kartika"/>
+        <a:font script="Laoo" typeface="DokChampa"/>
+        <a:font script="Sinh" typeface="Iskoola Pota"/>
+        <a:font script="Mong" typeface="Mongolian Baiti"/>
+        <a:font script="Viet" typeface="Arial"/>
+        <a:font script="Uigh" typeface="Microsoft Uighur"/>
+        <a:font script="Geor" typeface="Sylfaen"/>
+        <a:font script="Armn" typeface="Arial"/>
+        <a:font script="Bugi" typeface="Leelawadee UI"/>
+        <a:font script="Bopo" typeface="Microsoft JhengHei"/>
+        <a:font script="Java" typeface="Javanese Text"/>
+        <a:font script="Lisu" typeface="Segoe UI"/>
+        <a:font script="Mymr" typeface="Myanmar Text"/>
+        <a:font script="Nkoo" typeface="Ebrima"/>
+        <a:font script="Olck" typeface="Nirmala UI"/>
+        <a:font script="Osma" typeface="Ebrima"/>
+        <a:font script="Phag" typeface="Phagspa"/>
+        <a:font script="Syrn" typeface="Estrangelo Edessa"/>
+        <a:font script="Syrj" typeface="Estrangelo Edessa"/>
+        <a:font script="Syre" typeface="Estrangelo Edessa"/>
+        <a:font script="Sora" typeface="Nirmala UI"/>
+        <a:font script="Tale" typeface="Microsoft Tai Le"/>
+        <a:font script="Talu" typeface="Microsoft New Tai Lue"/>
+        <a:font script="Tfng" typeface="Ebrima"/>
+      </a:minorFont>
+    </a:fontScheme>
+    <a:fmtScheme name="Office">
+      <a:fillStyleLst>
+        <a:solidFill>
+          <a:schemeClr val="phClr"/>
+        </a:solidFill>
+        <a:gradFill rotWithShape="1">
+          <a:gsLst>
+            <a:gs pos="0">
+              <a:schemeClr val="phClr">
+                <a:lumMod val="110000"/>
+                <a:satMod val="105000"/>
+                <a:tint val="67000"/>
+              </a:schemeClr>
+            </a:gs>
+            <a:gs pos="50000">
+              <a:schemeClr val="phClr">
+                <a:lumMod val="105000"/>
+                <a:satMod val="103000"/>
+                <a:tint val="73000"/>
+              </a:schemeClr>
+            </a:gs>
+            <a:gs pos="100000">
+              <a:schemeClr val="phClr">
+                <a:lumMod val="105000"/>
+                <a:satMod val="109000"/>
+                <a:tint val="81000"/>
+              </a:schemeClr>
+            </a:gs>
+          </a:gsLst>
+          <a:lin ang="5400000" scaled="0"/>
+        </a:gradFill>
+        <a:gradFill rotWithShape="1">
+          <a:gsLst>
+            <a:gs pos="0">
+              <a:schemeClr val="phClr">
+                <a:satMod val="103000"/>
+                <a:lumMod val="102000"/>
+                <a:tint val="94000"/>
+              </a:schemeClr>
+            </a:gs>
+            <a:gs pos="50000">
+              <a:schemeClr val="phClr">
+                <a:satMod val="110000"/>
+                <a:lumMod val="100000"/>
+                <a:shade val="100000"/>
+              </a:schemeClr>
+            </a:gs>
+            <a:gs pos="100000">
+              <a:schemeClr val="phClr">
+                <a:lumMod val="99000"/>
+                <a:satMod val="120000"/>
+                <a:shade val="78000"/>
+              </a:schemeClr>
+            </a:gs>
+          </a:gsLst>
+          <a:lin ang="5400000" scaled="0"/>
+        </a:gradFill>
+      </a:fillStyleLst>
+      <a:lnStyleLst>
+        <a:ln w="12700" cap="flat" cmpd="sng" algn="ctr">
+          <a:solidFill>
+            <a:schemeClr val="phClr"/>
+          </a:solidFill>
+          <a:prstDash val="solid"/>
+          <a:miter lim="800000"/>
+        </a:ln>
+        <a:ln w="19050" cap="flat" cmpd="sng" algn="ctr">
+          <a:solidFill>
+            <a:schemeClr val="phClr"/>
+          </a:solidFill>
+          <a:prstDash val="solid"/>
+          <a:miter lim="800000"/>
+        </a:ln>
+        <a:ln w="25400" cap="flat" cmpd="sng" algn="ctr">
+          <a:solidFill>
+            <a:schemeClr val="phClr"/>
+          </a:solidFill>
+          <a:prstDash val="solid"/>
+          <a:miter lim="800000"/>
+        </a:ln>
+      </a:lnStyleLst>
+      <a:effectStyleLst>
+        <a:effectStyle>
+          <a:effectLst/>
+        </a:effectStyle>
+        <a:effectStyle>
+          <a:effectLst/>
+        </a:effectStyle>
+        <a:effectStyle>
+          <a:effectLst>
+            <a:outerShdw blurRad="57150" dist="19050" dir="5400000" algn="ctr" rotWithShape="0">
+              <a:srgbClr val="000000">
+                <a:alpha val="63000"/>
+              </a:srgbClr>
+            </a:outerShdw>
+          </a:effectLst>
+        </a:effectStyle>
+      </a:effectStyleLst>
+      <a:bgFillStyleLst>
+        <a:solidFill>
+          <a:schemeClr val="phClr"/>
+        </a:solidFill>
+        <a:solidFill>
+          <a:schemeClr val="phClr">
+            <a:tint val="95000"/>
+            <a:satMod val="170000"/>
+          </a:schemeClr>
+        </a:solidFill>
+        <a:gradFill rotWithShape="1">
+          <a:gsLst>
+            <a:gs pos="0">
+              <a:schemeClr val="phClr">
+                <a:tint val="93000"/>
+                <a:satMod val="150000"/>
+                <a:shade val="98000"/>
+                <a:lumMod val="102000"/>
+              </a:schemeClr>
+            </a:gs>
+            <a:gs pos="50000">
+              <a:schemeClr val="phClr">
+                <a:tint val="98000"/>
+                <a:satMod val="130000"/>
+                <a:shade val="90000"/>
+                <a:lumMod val="103000"/>
+              </a:schemeClr>
+            </a:gs>
+            <a:gs pos="100000">
+              <a:schemeClr val="phClr">
+                <a:shade val="63000"/>
+                <a:satMod val="120000"/>
+              </a:schemeClr>
+            </a:gs>
+          </a:gsLst>
+          <a:lin ang="5400000" scaled="0"/>
+        </a:gradFill>
+      </a:bgFillStyleLst>
+    </a:fmtScheme>
+  </a:themeElements>
+  <a:objectDefaults>
+    <a:lnDef>
+      <a:spPr/>
+      <a:bodyPr/>
+      <a:lstStyle/>
+      <a:style>
+        <a:lnRef idx="2">
+          <a:schemeClr val="accent1"/>
+        </a:lnRef>
+        <a:fillRef idx="0">
+          <a:schemeClr val="accent1"/>
+        </a:fillRef>
+        <a:effectRef idx="1">
+          <a:schemeClr val="accent1"/>
+        </a:effectRef>
+        <a:fontRef idx="minor">
+          <a:schemeClr val="tx1"/>
+        </a:fontRef>
+      </a:style>
+    </a:lnDef>
+  </a:objectDefaults>
+  <a:extraClrSchemeLst/>
+  <a:extLst>
+    <a:ext uri="{05A4C25C-085E-4340-85A3-A5531E510DB2}">
+      <thm15:themeFamily xmlns:thm15="http://schemas.microsoft.com/office/thememl/2012/main" name="Office Theme" id="{2E142A2C-CD16-42D6-873A-C26D2A0506FA}" vid="{1BDDFF52-6CD6-40A5-AB3C-68EB2F1E4D0A}"/>
+    </a:ext>
+  </a:extLst>
+</a:theme>
 </file>
--- a/GULib-master/report/0417_5003report/ppt/out-test/final_15min_defense.pptx
+++ b/GULib-master/report/0417_5003report/ppt/out-test/final_15min_defense.pptx
@@ -5,7 +5,7 @@
     <p:sldMasterId id="2147483648" r:id="rId1"/>
   </p:sldMasterIdLst>
   <p:notesMasterIdLst>
-    <p:notesMasterId r:id="rId16"/>
+    <p:notesMasterId r:id="rId17"/>
   </p:notesMasterIdLst>
   <p:sldIdLst>
     <p:sldId id="256" r:id="rId2"/>
@@ -22,6 +22,7 @@
     <p:sldId id="267" r:id="rId13"/>
     <p:sldId id="268" r:id="rId14"/>
     <p:sldId id="269" r:id="rId15"/>
+    <p:sldId id="270" r:id="rId16"/>
   </p:sldIdLst>
   <p:sldSz cx="9144000" cy="5143500" type="screen16x9"/>
   <p:notesSz cx="5143500" cy="9144000"/>
@@ -150,7 +151,7 @@
     </p:spTree>
     <p:extLst>
       <p:ext uri="{BB962C8B-B14F-4D97-AF65-F5344CB8AC3E}">
-        <p14:creationId xmlns:p14="http://schemas.microsoft.com/office/powerpoint/2010/main" val="3853904346"/>
+        <p14:creationId xmlns:p14="http://schemas.microsoft.com/office/powerpoint/2010/main" val="1389526677"/>
       </p:ext>
     </p:extLst>
   </p:cSld>
@@ -736,6 +737,90 @@
             <a:fld id="{F7021451-1387-4CA6-816F-3879F97B5CBC}" type="slidenum">
               <a:rPr lang="en-US"/>
               <a:t>14</a:t>
+            </a:fld>
+            <a:endParaRPr lang="en-US"/>
+          </a:p>
+        </p:txBody>
+      </p:sp>
+    </p:spTree>
+    <p:extLst>
+      <p:ext uri="{BB962C8B-B14F-4D97-AF65-F5344CB8AC3E}">
+        <p14:creationId xmlns:p14="http://schemas.microsoft.com/office/powerpoint/2010/main" val="1024086991"/>
+      </p:ext>
+    </p:extLst>
+  </p:cSld>
+  <p:clrMapOvr>
+    <a:masterClrMapping/>
+  </p:clrMapOvr>
+</p:notes>
+</file>
+
+<file path=ppt/notesSlides/notesSlide15.xml><?xml version="1.0" encoding="utf-8"?>
+<p:notes xmlns:a="http://schemas.openxmlformats.org/drawingml/2006/main" xmlns:r="http://schemas.openxmlformats.org/officeDocument/2006/relationships" xmlns:p="http://schemas.openxmlformats.org/presentationml/2006/main">
+  <p:cSld>
+    <p:spTree>
+      <p:nvGrpSpPr>
+        <p:cNvPr id="1" name=""/>
+        <p:cNvGrpSpPr/>
+        <p:nvPr/>
+      </p:nvGrpSpPr>
+      <p:grpSpPr>
+        <a:xfrm>
+          <a:off x="0" y="0"/>
+          <a:ext cx="0" cy="0"/>
+          <a:chOff x="0" y="0"/>
+          <a:chExt cx="0" cy="0"/>
+        </a:xfrm>
+      </p:grpSpPr>
+      <p:sp>
+        <p:nvSpPr>
+          <p:cNvPr id="2" name="Slide Image Placeholder 1"/>
+          <p:cNvSpPr>
+            <a:spLocks noGrp="1" noRot="1" noChangeAspect="1"/>
+          </p:cNvSpPr>
+          <p:nvPr>
+            <p:ph type="sldImg"/>
+          </p:nvPr>
+        </p:nvSpPr>
+        <p:spPr/>
+      </p:sp>
+      <p:sp>
+        <p:nvSpPr>
+          <p:cNvPr id="3" name="Notes Placeholder 2"/>
+          <p:cNvSpPr>
+            <a:spLocks noGrp="1"/>
+          </p:cNvSpPr>
+          <p:nvPr>
+            <p:ph type="body" idx="1"/>
+          </p:nvPr>
+        </p:nvSpPr>
+        <p:spPr/>
+        <p:txBody>
+          <a:bodyPr/>
+          <a:lstStyle/>
+          <a:p>
+            <a:endParaRPr lang="en-US" dirty="0"/>
+          </a:p>
+        </p:txBody>
+      </p:sp>
+      <p:sp>
+        <p:nvSpPr>
+          <p:cNvPr id="4" name="Slide Number Placeholder 3"/>
+          <p:cNvSpPr>
+            <a:spLocks noGrp="1"/>
+          </p:cNvSpPr>
+          <p:nvPr>
+            <p:ph type="sldNum" sz="quarter" idx="10"/>
+          </p:nvPr>
+        </p:nvSpPr>
+        <p:spPr/>
+        <p:txBody>
+          <a:bodyPr/>
+          <a:lstStyle/>
+          <a:p>
+            <a:fld id="{F7021451-1387-4CA6-816F-3879F97B5CBC}" type="slidenum">
+              <a:rPr lang="en-US"/>
+              <a:t>15</a:t>
             </a:fld>
             <a:endParaRPr lang="en-US"/>
           </a:p>
@@ -1830,9 +1915,9 @@
                 <a:solidFill>
                   <a:srgbClr val="FFFFFF"/>
                 </a:solidFill>
-                <a:latin typeface="Georgia" pitchFamily="34" charset="0"/>
-                <a:ea typeface="Georgia" pitchFamily="34" charset="-122"/>
-                <a:cs typeface="Georgia" pitchFamily="34" charset="-120"/>
+                <a:latin typeface="Times New Roman" pitchFamily="34" charset="0"/>
+                <a:ea typeface="Times New Roman" pitchFamily="34" charset="-122"/>
+                <a:cs typeface="Times New Roman" pitchFamily="34" charset="-120"/>
               </a:rPr>
               <a:t>Adversarial Deletion Attacks on</a:t>
             </a:r>
@@ -1847,9 +1932,9 @@
                 <a:solidFill>
                   <a:srgbClr val="FFFFFF"/>
                 </a:solidFill>
-                <a:latin typeface="Georgia" pitchFamily="34" charset="0"/>
-                <a:ea typeface="Georgia" pitchFamily="34" charset="-122"/>
-                <a:cs typeface="Georgia" pitchFamily="34" charset="-120"/>
+                <a:latin typeface="Times New Roman" pitchFamily="34" charset="0"/>
+                <a:ea typeface="Times New Roman" pitchFamily="34" charset="-122"/>
+                <a:cs typeface="Times New Roman" pitchFamily="34" charset="-120"/>
               </a:rPr>
               <a:t>Approximate Graph Unlearning</a:t>
             </a:r>
@@ -1886,9 +1971,9 @@
                 <a:solidFill>
                   <a:srgbClr val="F7F5F1"/>
                 </a:solidFill>
-                <a:latin typeface="Calibri" pitchFamily="34" charset="0"/>
-                <a:ea typeface="Calibri" pitchFamily="34" charset="-122"/>
-                <a:cs typeface="Calibri" pitchFamily="34" charset="-120"/>
+                <a:latin typeface="Times New Roman" pitchFamily="34" charset="0"/>
+                <a:ea typeface="Times New Roman" pitchFamily="34" charset="-122"/>
+                <a:cs typeface="Times New Roman" pitchFamily="34" charset="-120"/>
               </a:rPr>
               <a:t>The inheritance of safety behavior within graph unlearning families</a:t>
             </a:r>
@@ -1925,9 +2010,9 @@
                 <a:solidFill>
                   <a:srgbClr val="F7F5F1"/>
                 </a:solidFill>
-                <a:latin typeface="Calibri" pitchFamily="34" charset="0"/>
-                <a:ea typeface="Calibri" pitchFamily="34" charset="-122"/>
-                <a:cs typeface="Calibri" pitchFamily="34" charset="-120"/>
+                <a:latin typeface="Times New Roman" pitchFamily="34" charset="0"/>
+                <a:ea typeface="Times New Roman" pitchFamily="34" charset="-122"/>
+                <a:cs typeface="Times New Roman" pitchFamily="34" charset="-120"/>
               </a:rPr>
               <a:t>EE5003 MSc Project Report</a:t>
             </a:r>
@@ -1942,9 +2027,9 @@
                 <a:solidFill>
                   <a:srgbClr val="F7F5F1"/>
                 </a:solidFill>
-                <a:latin typeface="Calibri" pitchFamily="34" charset="0"/>
-                <a:ea typeface="Calibri" pitchFamily="34" charset="-122"/>
-                <a:cs typeface="Calibri" pitchFamily="34" charset="-120"/>
+                <a:latin typeface="Times New Roman" pitchFamily="34" charset="0"/>
+                <a:ea typeface="Times New Roman" pitchFamily="34" charset="-122"/>
+                <a:cs typeface="Times New Roman" pitchFamily="34" charset="-120"/>
               </a:rPr>
               <a:t>National University of Singapore</a:t>
             </a:r>
@@ -1981,9 +2066,9 @@
                 <a:solidFill>
                   <a:srgbClr val="FFFFFF"/>
                 </a:solidFill>
-                <a:latin typeface="Calibri" pitchFamily="34" charset="0"/>
-                <a:ea typeface="Calibri" pitchFamily="34" charset="-122"/>
-                <a:cs typeface="Calibri" pitchFamily="34" charset="-120"/>
+                <a:latin typeface="Times New Roman" pitchFamily="34" charset="0"/>
+                <a:ea typeface="Times New Roman" pitchFamily="34" charset="-122"/>
+                <a:cs typeface="Times New Roman" pitchFamily="34" charset="-120"/>
               </a:rPr>
               <a:t>Liu Chengyu</a:t>
             </a:r>
@@ -1998,9 +2083,9 @@
                 <a:solidFill>
                   <a:srgbClr val="FFFFFF"/>
                 </a:solidFill>
-                <a:latin typeface="Calibri" pitchFamily="34" charset="0"/>
-                <a:ea typeface="Calibri" pitchFamily="34" charset="-122"/>
-                <a:cs typeface="Calibri" pitchFamily="34" charset="-120"/>
+                <a:latin typeface="Times New Roman" pitchFamily="34" charset="0"/>
+                <a:ea typeface="Times New Roman" pitchFamily="34" charset="-122"/>
+                <a:cs typeface="Times New Roman" pitchFamily="34" charset="-120"/>
               </a:rPr>
               <a:t>April 2026</a:t>
             </a:r>
@@ -2016,12 +2101,12 @@
         </p:nvSpPr>
         <p:spPr>
           <a:xfrm>
-            <a:off x="6373368" y="973836"/>
-            <a:ext cx="2057400" cy="1828800"/>
+            <a:off x="6473952" y="1188720"/>
+            <a:ext cx="1965960" cy="1645920"/>
           </a:xfrm>
           <a:prstGeom prst="roundRect">
             <a:avLst>
-              <a:gd name="adj" fmla="val 2500"/>
+              <a:gd name="adj" fmla="val 2778"/>
             </a:avLst>
           </a:prstGeom>
           <a:solidFill>
@@ -2050,8 +2135,8 @@
         </p:nvSpPr>
         <p:spPr>
           <a:xfrm>
-            <a:off x="6492240" y="1097280"/>
-            <a:ext cx="1783080" cy="182880"/>
+            <a:off x="6611112" y="1353312"/>
+            <a:ext cx="1691640" cy="182880"/>
           </a:xfrm>
           <a:prstGeom prst="rect">
             <a:avLst/>
@@ -2071,9 +2156,9 @@
                 <a:solidFill>
                   <a:srgbClr val="16263F"/>
                 </a:solidFill>
-                <a:latin typeface="Georgia" pitchFamily="34" charset="0"/>
-                <a:ea typeface="Georgia" pitchFamily="34" charset="-122"/>
-                <a:cs typeface="Georgia" pitchFamily="34" charset="-120"/>
+                <a:latin typeface="Times New Roman" pitchFamily="34" charset="0"/>
+                <a:ea typeface="Times New Roman" pitchFamily="34" charset="-122"/>
+                <a:cs typeface="Times New Roman" pitchFamily="34" charset="-120"/>
               </a:rPr>
               <a:t>Thesis</a:t>
             </a:r>
@@ -2089,8 +2174,8 @@
         </p:nvSpPr>
         <p:spPr>
           <a:xfrm>
-            <a:off x="6492240" y="1344168"/>
-            <a:ext cx="1783080" cy="1399032"/>
+            <a:off x="6611112" y="1600200"/>
+            <a:ext cx="1691640" cy="1143000"/>
           </a:xfrm>
           <a:prstGeom prst="rect">
             <a:avLst/>
@@ -2112,9 +2197,9 @@
                 <a:solidFill>
                   <a:srgbClr val="1E2630"/>
                 </a:solidFill>
-                <a:latin typeface="Calibri" pitchFamily="34" charset="0"/>
-                <a:ea typeface="Calibri" pitchFamily="34" charset="-122"/>
-                <a:cs typeface="Calibri" pitchFamily="34" charset="-120"/>
+                <a:latin typeface="Times New Roman" pitchFamily="34" charset="0"/>
+                <a:ea typeface="Times New Roman" pitchFamily="34" charset="-122"/>
+                <a:cs typeface="Times New Roman" pitchFamily="34" charset="-120"/>
               </a:rPr>
               <a:t>Deletion interfaces in approximate graph unlearning can be exploited to amplify approximation error, and fragility differs sharply across method families.</a:t>
             </a:r>
@@ -2124,14 +2209,48 @@
       </p:sp>
       <p:sp>
         <p:nvSpPr>
-          <p:cNvPr id="10" name="Text 8"/>
-          <p:cNvSpPr/>
-          <p:nvPr/>
-        </p:nvSpPr>
-        <p:spPr>
-          <a:xfrm>
-            <a:off x="6309360" y="3255264"/>
-            <a:ext cx="2103120" cy="182880"/>
+          <p:cNvPr id="10" name="Shape 8"/>
+          <p:cNvSpPr/>
+          <p:nvPr/>
+        </p:nvSpPr>
+        <p:spPr>
+          <a:xfrm>
+            <a:off x="6510528" y="3154680"/>
+            <a:ext cx="877824" cy="310896"/>
+          </a:xfrm>
+          <a:prstGeom prst="roundRect">
+            <a:avLst>
+              <a:gd name="adj" fmla="val 11765"/>
+            </a:avLst>
+          </a:prstGeom>
+          <a:solidFill>
+            <a:srgbClr val="FFFFFF"/>
+          </a:solidFill>
+          <a:ln w="12700">
+            <a:solidFill>
+              <a:srgbClr val="D9DEE7"/>
+            </a:solidFill>
+            <a:prstDash val="solid"/>
+          </a:ln>
+        </p:spPr>
+        <p:txBody>
+          <a:bodyPr/>
+          <a:lstStyle/>
+          <a:p>
+            <a:endParaRPr lang="zh-CN" altLang="en-US"/>
+          </a:p>
+        </p:txBody>
+      </p:sp>
+      <p:sp>
+        <p:nvSpPr>
+          <p:cNvPr id="11" name="Text 9"/>
+          <p:cNvSpPr/>
+          <p:nvPr/>
+        </p:nvSpPr>
+        <p:spPr>
+          <a:xfrm>
+            <a:off x="6547104" y="3227832"/>
+            <a:ext cx="804672" cy="109728"/>
           </a:xfrm>
           <a:prstGeom prst="rect">
             <a:avLst/>
@@ -2147,17 +2266,236 @@
               <a:buNone/>
             </a:pPr>
             <a:r>
-              <a:rPr lang="en-US" sz="1200" dirty="0">
+              <a:rPr lang="en-US" sz="1120" b="1" dirty="0">
+                <a:solidFill>
+                  <a:srgbClr val="16263F"/>
+                </a:solidFill>
+                <a:latin typeface="Times New Roman" pitchFamily="34" charset="0"/>
+                <a:ea typeface="Times New Roman" pitchFamily="34" charset="-122"/>
+                <a:cs typeface="Times New Roman" pitchFamily="34" charset="-120"/>
+              </a:rPr>
+              <a:t>Problem</a:t>
+            </a:r>
+            <a:endParaRPr lang="en-US" sz="1120" dirty="0"/>
+          </a:p>
+        </p:txBody>
+      </p:sp>
+      <p:sp>
+        <p:nvSpPr>
+          <p:cNvPr id="12" name="Shape 10"/>
+          <p:cNvSpPr/>
+          <p:nvPr/>
+        </p:nvSpPr>
+        <p:spPr>
+          <a:xfrm>
+            <a:off x="7534656" y="3154680"/>
+            <a:ext cx="877824" cy="310896"/>
+          </a:xfrm>
+          <a:prstGeom prst="roundRect">
+            <a:avLst>
+              <a:gd name="adj" fmla="val 11765"/>
+            </a:avLst>
+          </a:prstGeom>
+          <a:solidFill>
+            <a:srgbClr val="E8EEF5"/>
+          </a:solidFill>
+          <a:ln w="12700">
+            <a:solidFill>
+              <a:srgbClr val="E8EEF5"/>
+            </a:solidFill>
+            <a:prstDash val="solid"/>
+          </a:ln>
+        </p:spPr>
+        <p:txBody>
+          <a:bodyPr/>
+          <a:lstStyle/>
+          <a:p>
+            <a:endParaRPr lang="zh-CN" altLang="en-US"/>
+          </a:p>
+        </p:txBody>
+      </p:sp>
+      <p:sp>
+        <p:nvSpPr>
+          <p:cNvPr id="13" name="Text 11"/>
+          <p:cNvSpPr/>
+          <p:nvPr/>
+        </p:nvSpPr>
+        <p:spPr>
+          <a:xfrm>
+            <a:off x="7571232" y="3227832"/>
+            <a:ext cx="804672" cy="109728"/>
+          </a:xfrm>
+          <a:prstGeom prst="rect">
+            <a:avLst/>
+          </a:prstGeom>
+          <a:noFill/>
+          <a:ln/>
+        </p:spPr>
+        <p:txBody>
+          <a:bodyPr wrap="square" lIns="0" tIns="0" rIns="0" bIns="0" rtlCol="0" anchor="ctr"/>
+          <a:lstStyle/>
+          <a:p>
+            <a:pPr marL="0" indent="0" algn="ctr">
+              <a:buNone/>
+            </a:pPr>
+            <a:r>
+              <a:rPr lang="en-US" sz="1120" b="1" dirty="0">
                 <a:solidFill>
                   <a:srgbClr val="223A5E"/>
                 </a:solidFill>
-                <a:latin typeface="Calibri" pitchFamily="34" charset="0"/>
-                <a:ea typeface="Calibri" pitchFamily="34" charset="-122"/>
-                <a:cs typeface="Calibri" pitchFamily="34" charset="-120"/>
-              </a:rPr>
-              <a:t>Problem -&gt; Method -&gt; Results -&gt; Takeaway</a:t>
-            </a:r>
-            <a:endParaRPr lang="en-US" sz="1200" dirty="0"/>
+                <a:latin typeface="Times New Roman" pitchFamily="34" charset="0"/>
+                <a:ea typeface="Times New Roman" pitchFamily="34" charset="-122"/>
+                <a:cs typeface="Times New Roman" pitchFamily="34" charset="-120"/>
+              </a:rPr>
+              <a:t>Method</a:t>
+            </a:r>
+            <a:endParaRPr lang="en-US" sz="1120" dirty="0"/>
+          </a:p>
+        </p:txBody>
+      </p:sp>
+      <p:sp>
+        <p:nvSpPr>
+          <p:cNvPr id="14" name="Shape 12"/>
+          <p:cNvSpPr/>
+          <p:nvPr/>
+        </p:nvSpPr>
+        <p:spPr>
+          <a:xfrm>
+            <a:off x="6510528" y="3639312"/>
+            <a:ext cx="877824" cy="310896"/>
+          </a:xfrm>
+          <a:prstGeom prst="roundRect">
+            <a:avLst>
+              <a:gd name="adj" fmla="val 11765"/>
+            </a:avLst>
+          </a:prstGeom>
+          <a:solidFill>
+            <a:srgbClr val="E8EEF5"/>
+          </a:solidFill>
+          <a:ln w="12700">
+            <a:solidFill>
+              <a:srgbClr val="E8EEF5"/>
+            </a:solidFill>
+            <a:prstDash val="solid"/>
+          </a:ln>
+        </p:spPr>
+        <p:txBody>
+          <a:bodyPr/>
+          <a:lstStyle/>
+          <a:p>
+            <a:endParaRPr lang="zh-CN" altLang="en-US"/>
+          </a:p>
+        </p:txBody>
+      </p:sp>
+      <p:sp>
+        <p:nvSpPr>
+          <p:cNvPr id="15" name="Text 13"/>
+          <p:cNvSpPr/>
+          <p:nvPr/>
+        </p:nvSpPr>
+        <p:spPr>
+          <a:xfrm>
+            <a:off x="6547104" y="3712464"/>
+            <a:ext cx="804672" cy="109728"/>
+          </a:xfrm>
+          <a:prstGeom prst="rect">
+            <a:avLst/>
+          </a:prstGeom>
+          <a:noFill/>
+          <a:ln/>
+        </p:spPr>
+        <p:txBody>
+          <a:bodyPr wrap="square" lIns="0" tIns="0" rIns="0" bIns="0" rtlCol="0" anchor="ctr"/>
+          <a:lstStyle/>
+          <a:p>
+            <a:pPr marL="0" indent="0" algn="ctr">
+              <a:buNone/>
+            </a:pPr>
+            <a:r>
+              <a:rPr lang="en-US" sz="1120" b="1" dirty="0">
+                <a:solidFill>
+                  <a:srgbClr val="223A5E"/>
+                </a:solidFill>
+                <a:latin typeface="Times New Roman" pitchFamily="34" charset="0"/>
+                <a:ea typeface="Times New Roman" pitchFamily="34" charset="-122"/>
+                <a:cs typeface="Times New Roman" pitchFamily="34" charset="-120"/>
+              </a:rPr>
+              <a:t>Results</a:t>
+            </a:r>
+            <a:endParaRPr lang="en-US" sz="1120" dirty="0"/>
+          </a:p>
+        </p:txBody>
+      </p:sp>
+      <p:sp>
+        <p:nvSpPr>
+          <p:cNvPr id="16" name="Shape 14"/>
+          <p:cNvSpPr/>
+          <p:nvPr/>
+        </p:nvSpPr>
+        <p:spPr>
+          <a:xfrm>
+            <a:off x="7534656" y="3639312"/>
+            <a:ext cx="877824" cy="310896"/>
+          </a:xfrm>
+          <a:prstGeom prst="roundRect">
+            <a:avLst>
+              <a:gd name="adj" fmla="val 11765"/>
+            </a:avLst>
+          </a:prstGeom>
+          <a:solidFill>
+            <a:srgbClr val="FFFFFF"/>
+          </a:solidFill>
+          <a:ln w="12700">
+            <a:solidFill>
+              <a:srgbClr val="D9DEE7"/>
+            </a:solidFill>
+            <a:prstDash val="solid"/>
+          </a:ln>
+        </p:spPr>
+        <p:txBody>
+          <a:bodyPr/>
+          <a:lstStyle/>
+          <a:p>
+            <a:endParaRPr lang="zh-CN" altLang="en-US"/>
+          </a:p>
+        </p:txBody>
+      </p:sp>
+      <p:sp>
+        <p:nvSpPr>
+          <p:cNvPr id="17" name="Text 15"/>
+          <p:cNvSpPr/>
+          <p:nvPr/>
+        </p:nvSpPr>
+        <p:spPr>
+          <a:xfrm>
+            <a:off x="7571232" y="3712464"/>
+            <a:ext cx="804672" cy="109728"/>
+          </a:xfrm>
+          <a:prstGeom prst="rect">
+            <a:avLst/>
+          </a:prstGeom>
+          <a:noFill/>
+          <a:ln/>
+        </p:spPr>
+        <p:txBody>
+          <a:bodyPr wrap="square" lIns="0" tIns="0" rIns="0" bIns="0" rtlCol="0" anchor="ctr"/>
+          <a:lstStyle/>
+          <a:p>
+            <a:pPr marL="0" indent="0" algn="ctr">
+              <a:buNone/>
+            </a:pPr>
+            <a:r>
+              <a:rPr lang="en-US" sz="1120" b="1" dirty="0">
+                <a:solidFill>
+                  <a:srgbClr val="16263F"/>
+                </a:solidFill>
+                <a:latin typeface="Times New Roman" pitchFamily="34" charset="0"/>
+                <a:ea typeface="Times New Roman" pitchFamily="34" charset="-122"/>
+                <a:cs typeface="Times New Roman" pitchFamily="34" charset="-120"/>
+              </a:rPr>
+              <a:t>Takeaway</a:t>
+            </a:r>
+            <a:endParaRPr lang="en-US" sz="1120" dirty="0"/>
           </a:p>
         </p:txBody>
       </p:sp>
@@ -2257,11 +2595,11 @@
                 <a:solidFill>
                   <a:srgbClr val="FFFFFF"/>
                 </a:solidFill>
-                <a:latin typeface="Georgia" pitchFamily="34" charset="0"/>
-                <a:ea typeface="Georgia" pitchFamily="34" charset="-122"/>
-                <a:cs typeface="Georgia" pitchFamily="34" charset="-120"/>
-              </a:rPr>
-              <a:t>Why GraphEraser Behaves Differently</a:t>
+                <a:latin typeface="Times New Roman" pitchFamily="34" charset="0"/>
+                <a:ea typeface="Times New Roman" pitchFamily="34" charset="-122"/>
+                <a:cs typeface="Times New Roman" pitchFamily="34" charset="-120"/>
+              </a:rPr>
+              <a:t>Ratio Sensitivity And Ablation</a:t>
             </a:r>
             <a:endParaRPr lang="en-US" sz="2400" dirty="0"/>
           </a:p>
@@ -2296,11 +2634,11 @@
                 <a:solidFill>
                   <a:srgbClr val="F7F5F1"/>
                 </a:solidFill>
-                <a:latin typeface="Calibri" pitchFamily="34" charset="0"/>
-                <a:ea typeface="Calibri" pitchFamily="34" charset="-122"/>
-                <a:cs typeface="Calibri" pitchFamily="34" charset="-120"/>
-              </a:rPr>
-              <a:t>10 / 14</a:t>
+                <a:latin typeface="Times New Roman" pitchFamily="34" charset="0"/>
+                <a:ea typeface="Times New Roman" pitchFamily="34" charset="-122"/>
+                <a:cs typeface="Times New Roman" pitchFamily="34" charset="-120"/>
+              </a:rPr>
+              <a:t>10 / 15</a:t>
             </a:r>
             <a:endParaRPr lang="en-US" sz="1000" dirty="0"/>
           </a:p>
@@ -2335,9 +2673,9 @@
                 <a:solidFill>
                   <a:srgbClr val="667085"/>
                 </a:solidFill>
-                <a:latin typeface="Calibri" pitchFamily="34" charset="0"/>
-                <a:ea typeface="Calibri" pitchFamily="34" charset="-122"/>
-                <a:cs typeface="Calibri" pitchFamily="34" charset="-120"/>
+                <a:latin typeface="Times New Roman" pitchFamily="34" charset="0"/>
+                <a:ea typeface="Times New Roman" pitchFamily="34" charset="-122"/>
+                <a:cs typeface="Times New Roman" pitchFamily="34" charset="-120"/>
               </a:rPr>
               <a:t>EE5003 MSc Project | Liu Chengyu</a:t>
             </a:r>
@@ -2374,9 +2712,9 @@
                 <a:solidFill>
                   <a:srgbClr val="667085"/>
                 </a:solidFill>
-                <a:latin typeface="Calibri" pitchFamily="34" charset="0"/>
-                <a:ea typeface="Calibri" pitchFamily="34" charset="-122"/>
-                <a:cs typeface="Calibri" pitchFamily="34" charset="-120"/>
+                <a:latin typeface="Times New Roman" pitchFamily="34" charset="0"/>
+                <a:ea typeface="Times New Roman" pitchFamily="34" charset="-122"/>
+                <a:cs typeface="Times New Roman" pitchFamily="34" charset="-120"/>
               </a:rPr>
               <a:t>Approximate Graph Unlearning Audit</a:t>
             </a:r>
@@ -2386,7 +2724,7 @@
       </p:sp>
       <p:pic>
         <p:nvPicPr>
-          <p:cNvPr id="7" name="Image 0" descr="H:\project\OpenGU\GULib-master\report\0417_5003report\figures\report_figures\fig2_grapheraser_shard.png"/>
+          <p:cNvPr id="7" name="Image 0" descr="H:\project\OpenGU\GULib-master\report\0417_5003report\figures\paper_figures\FIG-2_Scaling.png"/>
           <p:cNvPicPr>
             <a:picLocks noChangeAspect="1"/>
           </p:cNvPicPr>
@@ -2400,8 +2738,8 @@
         </p:blipFill>
         <p:spPr>
           <a:xfrm>
-            <a:off x="621792" y="1024128"/>
-            <a:ext cx="4800600" cy="3401568"/>
+            <a:off x="566928" y="914400"/>
+            <a:ext cx="5257800" cy="3291840"/>
           </a:xfrm>
           <a:prstGeom prst="rect">
             <a:avLst/>
@@ -2416,8 +2754,8 @@
         </p:nvSpPr>
         <p:spPr>
           <a:xfrm>
-            <a:off x="658368" y="4462272"/>
-            <a:ext cx="4709160" cy="146304"/>
+            <a:off x="585216" y="4297680"/>
+            <a:ext cx="5212080" cy="146304"/>
           </a:xfrm>
           <a:prstGeom prst="rect">
             <a:avLst/>
@@ -2437,11 +2775,11 @@
                 <a:solidFill>
                   <a:srgbClr val="667085"/>
                 </a:solidFill>
-                <a:latin typeface="Calibri" pitchFamily="34" charset="0"/>
-                <a:ea typeface="Calibri" pitchFamily="34" charset="-122"/>
-                <a:cs typeface="Calibri" pitchFamily="34" charset="-120"/>
-              </a:rPr>
-              <a:t>Observed shard-level score shift for GraphEraser on Cora/GCN.</a:t>
+                <a:latin typeface="Times New Roman" pitchFamily="34" charset="0"/>
+                <a:ea typeface="Times New Roman" pitchFamily="34" charset="-122"/>
+                <a:cs typeface="Times New Roman" pitchFamily="34" charset="-120"/>
+              </a:rPr>
+              <a:t>Figure 2. Ratio-sensitivity view for GIF and GNNDelete on Cora/GCN.</a:t>
             </a:r>
             <a:endParaRPr lang="en-US" sz="900" dirty="0"/>
           </a:p>
@@ -2455,12 +2793,126 @@
         </p:nvSpPr>
         <p:spPr>
           <a:xfrm>
-            <a:off x="5669280" y="1051560"/>
-            <a:ext cx="2697480" cy="896112"/>
+            <a:off x="6016752" y="960120"/>
+            <a:ext cx="2359152" cy="1005840"/>
           </a:xfrm>
           <a:prstGeom prst="roundRect">
             <a:avLst>
-              <a:gd name="adj" fmla="val 5102"/>
+              <a:gd name="adj" fmla="val 4545"/>
+            </a:avLst>
+          </a:prstGeom>
+          <a:solidFill>
+            <a:srgbClr val="FFFFFF"/>
+          </a:solidFill>
+          <a:ln w="13970">
+            <a:solidFill>
+              <a:srgbClr val="D9DEE7"/>
+            </a:solidFill>
+            <a:prstDash val="solid"/>
+          </a:ln>
+        </p:spPr>
+        <p:txBody>
+          <a:bodyPr/>
+          <a:lstStyle/>
+          <a:p>
+            <a:endParaRPr lang="zh-CN" altLang="en-US"/>
+          </a:p>
+        </p:txBody>
+      </p:sp>
+      <p:sp>
+        <p:nvSpPr>
+          <p:cNvPr id="10" name="Text 7"/>
+          <p:cNvSpPr/>
+          <p:nvPr/>
+        </p:nvSpPr>
+        <p:spPr>
+          <a:xfrm>
+            <a:off x="6153912" y="1124712"/>
+            <a:ext cx="2084832" cy="182880"/>
+          </a:xfrm>
+          <a:prstGeom prst="rect">
+            <a:avLst/>
+          </a:prstGeom>
+          <a:noFill/>
+          <a:ln/>
+        </p:spPr>
+        <p:txBody>
+          <a:bodyPr wrap="square" lIns="0" tIns="0" rIns="0" bIns="0" rtlCol="0" anchor="ctr"/>
+          <a:lstStyle/>
+          <a:p>
+            <a:pPr marL="0" indent="0">
+              <a:buNone/>
+            </a:pPr>
+            <a:r>
+              <a:rPr lang="en-US" sz="1700" b="1" dirty="0">
+                <a:solidFill>
+                  <a:srgbClr val="223A5E"/>
+                </a:solidFill>
+                <a:latin typeface="Times New Roman" pitchFamily="34" charset="0"/>
+                <a:ea typeface="Times New Roman" pitchFamily="34" charset="-122"/>
+                <a:cs typeface="Times New Roman" pitchFamily="34" charset="-120"/>
+              </a:rPr>
+              <a:t>Ablation read</a:t>
+            </a:r>
+            <a:endParaRPr lang="en-US" sz="1700" dirty="0"/>
+          </a:p>
+        </p:txBody>
+      </p:sp>
+      <p:sp>
+        <p:nvSpPr>
+          <p:cNvPr id="11" name="Text 8"/>
+          <p:cNvSpPr/>
+          <p:nvPr/>
+        </p:nvSpPr>
+        <p:spPr>
+          <a:xfrm>
+            <a:off x="6153912" y="1371600"/>
+            <a:ext cx="2084832" cy="502920"/>
+          </a:xfrm>
+          <a:prstGeom prst="rect">
+            <a:avLst/>
+          </a:prstGeom>
+          <a:noFill/>
+          <a:ln/>
+        </p:spPr>
+        <p:txBody>
+          <a:bodyPr wrap="square" lIns="0" tIns="0" rIns="0" bIns="0" rtlCol="0" anchor="ctr">
+            <a:normAutofit/>
+          </a:bodyPr>
+          <a:lstStyle/>
+          <a:p>
+            <a:pPr marL="0" indent="0">
+              <a:buNone/>
+            </a:pPr>
+            <a:r>
+              <a:rPr lang="en-US" sz="1220" dirty="0">
+                <a:solidFill>
+                  <a:srgbClr val="1E2630"/>
+                </a:solidFill>
+                <a:latin typeface="Times New Roman" pitchFamily="34" charset="0"/>
+                <a:ea typeface="Times New Roman" pitchFamily="34" charset="-122"/>
+                <a:cs typeface="Times New Roman" pitchFamily="34" charset="-120"/>
+              </a:rPr>
+              <a:t>This page asks how attack strength changes as the deletion ratio increases, not only who wins at one fixed point.</a:t>
+            </a:r>
+            <a:endParaRPr lang="en-US" sz="1220" dirty="0"/>
+          </a:p>
+        </p:txBody>
+      </p:sp>
+      <p:sp>
+        <p:nvSpPr>
+          <p:cNvPr id="12" name="Shape 9"/>
+          <p:cNvSpPr/>
+          <p:nvPr/>
+        </p:nvSpPr>
+        <p:spPr>
+          <a:xfrm>
+            <a:off x="6016752" y="2057400"/>
+            <a:ext cx="2359152" cy="1051560"/>
+          </a:xfrm>
+          <a:prstGeom prst="roundRect">
+            <a:avLst>
+              <a:gd name="adj" fmla="val 4348"/>
             </a:avLst>
           </a:prstGeom>
           <a:solidFill>
@@ -2483,14 +2935,14 @@
       </p:sp>
       <p:sp>
         <p:nvSpPr>
-          <p:cNvPr id="10" name="Text 7"/>
-          <p:cNvSpPr/>
-          <p:nvPr/>
-        </p:nvSpPr>
-        <p:spPr>
-          <a:xfrm>
-            <a:off x="5806440" y="1143000"/>
-            <a:ext cx="2423160" cy="182880"/>
+          <p:cNvPr id="13" name="Text 10"/>
+          <p:cNvSpPr/>
+          <p:nvPr/>
+        </p:nvSpPr>
+        <p:spPr>
+          <a:xfrm>
+            <a:off x="6153912" y="2221992"/>
+            <a:ext cx="2084832" cy="182880"/>
           </a:xfrm>
           <a:prstGeom prst="rect">
             <a:avLst/>
@@ -2510,9 +2962,9 @@
                 <a:solidFill>
                   <a:srgbClr val="223A5E"/>
                 </a:solidFill>
-                <a:latin typeface="Georgia" pitchFamily="34" charset="0"/>
-                <a:ea typeface="Georgia" pitchFamily="34" charset="-122"/>
-                <a:cs typeface="Georgia" pitchFamily="34" charset="-120"/>
+                <a:latin typeface="Times New Roman" pitchFamily="34" charset="0"/>
+                <a:ea typeface="Times New Roman" pitchFamily="34" charset="-122"/>
+                <a:cs typeface="Times New Roman" pitchFamily="34" charset="-120"/>
               </a:rPr>
               <a:t>Observed pattern</a:t>
             </a:r>
@@ -2522,14 +2974,14 @@
       </p:sp>
       <p:sp>
         <p:nvSpPr>
-          <p:cNvPr id="11" name="Text 8"/>
-          <p:cNvSpPr/>
-          <p:nvPr/>
-        </p:nvSpPr>
-        <p:spPr>
-          <a:xfrm>
-            <a:off x="5806440" y="1389888"/>
-            <a:ext cx="2423160" cy="466344"/>
+          <p:cNvPr id="14" name="Text 11"/>
+          <p:cNvSpPr/>
+          <p:nvPr/>
+        </p:nvSpPr>
+        <p:spPr>
+          <a:xfrm>
+            <a:off x="6153912" y="2468880"/>
+            <a:ext cx="2084832" cy="548640"/>
           </a:xfrm>
           <a:prstGeom prst="rect">
             <a:avLst/>
@@ -2551,11 +3003,11 @@
                 <a:solidFill>
                   <a:srgbClr val="1E2630"/>
                 </a:solidFill>
-                <a:latin typeface="Calibri" pitchFamily="34" charset="0"/>
-                <a:ea typeface="Calibri" pitchFamily="34" charset="-122"/>
-                <a:cs typeface="Calibri" pitchFamily="34" charset="-120"/>
-              </a:rPr>
-              <a:t>After-unlearning scores shift upward across the tested attack strategies, matching the non-collapse pattern seen in the main results.</a:t>
+                <a:latin typeface="Times New Roman" pitchFamily="34" charset="0"/>
+                <a:ea typeface="Times New Roman" pitchFamily="34" charset="-122"/>
+                <a:cs typeface="Times New Roman" pitchFamily="34" charset="-120"/>
+              </a:rPr>
+              <a:t>GNNDelete stays sensitive even at small ratios, while GIF remains much flatter across the same range.</a:t>
             </a:r>
             <a:endParaRPr lang="en-US" sz="1220" dirty="0"/>
           </a:p>
@@ -2563,26 +3015,26 @@
       </p:sp>
       <p:sp>
         <p:nvSpPr>
-          <p:cNvPr id="12" name="Shape 9"/>
-          <p:cNvSpPr/>
-          <p:nvPr/>
-        </p:nvSpPr>
-        <p:spPr>
-          <a:xfrm>
-            <a:off x="5669280" y="2148840"/>
-            <a:ext cx="2697480" cy="1143000"/>
+          <p:cNvPr id="15" name="Shape 12"/>
+          <p:cNvSpPr/>
+          <p:nvPr/>
+        </p:nvSpPr>
+        <p:spPr>
+          <a:xfrm>
+            <a:off x="6016752" y="3200400"/>
+            <a:ext cx="2359152" cy="1051560"/>
           </a:xfrm>
           <a:prstGeom prst="roundRect">
             <a:avLst>
-              <a:gd name="adj" fmla="val 4000"/>
+              <a:gd name="adj" fmla="val 4348"/>
             </a:avLst>
           </a:prstGeom>
           <a:solidFill>
-            <a:srgbClr val="FFFFFF"/>
+            <a:srgbClr val="223A5E"/>
           </a:solidFill>
           <a:ln w="13970">
             <a:solidFill>
-              <a:srgbClr val="D9DEE7"/>
+              <a:srgbClr val="223A5E"/>
             </a:solidFill>
             <a:prstDash val="solid"/>
           </a:ln>
@@ -2597,14 +3049,14 @@
       </p:sp>
       <p:sp>
         <p:nvSpPr>
-          <p:cNvPr id="13" name="Text 10"/>
-          <p:cNvSpPr/>
-          <p:nvPr/>
-        </p:nvSpPr>
-        <p:spPr>
-          <a:xfrm>
-            <a:off x="5806440" y="2240280"/>
-            <a:ext cx="2423160" cy="182880"/>
+          <p:cNvPr id="16" name="Text 13"/>
+          <p:cNvSpPr/>
+          <p:nvPr/>
+        </p:nvSpPr>
+        <p:spPr>
+          <a:xfrm>
+            <a:off x="6153912" y="3364992"/>
+            <a:ext cx="2084832" cy="182880"/>
           </a:xfrm>
           <a:prstGeom prst="rect">
             <a:avLst/>
@@ -2622,13 +3074,13 @@
             <a:r>
               <a:rPr lang="en-US" sz="1700" b="1" dirty="0">
                 <a:solidFill>
-                  <a:srgbClr val="223A5E"/>
-                </a:solidFill>
-                <a:latin typeface="Georgia" pitchFamily="34" charset="0"/>
-                <a:ea typeface="Georgia" pitchFamily="34" charset="-122"/>
-                <a:cs typeface="Georgia" pitchFamily="34" charset="-120"/>
-              </a:rPr>
-              <a:t>Interpretation</a:t>
+                  <a:srgbClr val="F7F5F1"/>
+                </a:solidFill>
+                <a:latin typeface="Times New Roman" pitchFamily="34" charset="0"/>
+                <a:ea typeface="Times New Roman" pitchFamily="34" charset="-122"/>
+                <a:cs typeface="Times New Roman" pitchFamily="34" charset="-120"/>
+              </a:rPr>
+              <a:t>Takeaway</a:t>
             </a:r>
             <a:endParaRPr lang="en-US" sz="1700" dirty="0"/>
           </a:p>
@@ -2636,14 +3088,14 @@
       </p:sp>
       <p:sp>
         <p:nvSpPr>
-          <p:cNvPr id="14" name="Text 11"/>
-          <p:cNvSpPr/>
-          <p:nvPr/>
-        </p:nvSpPr>
-        <p:spPr>
-          <a:xfrm>
-            <a:off x="5806440" y="2487168"/>
-            <a:ext cx="2423160" cy="713232"/>
+          <p:cNvPr id="17" name="Text 14"/>
+          <p:cNvSpPr/>
+          <p:nvPr/>
+        </p:nvSpPr>
+        <p:spPr>
+          <a:xfrm>
+            <a:off x="6153912" y="3611880"/>
+            <a:ext cx="2084832" cy="548640"/>
           </a:xfrm>
           <a:prstGeom prst="rect">
             <a:avLst/>
@@ -2663,127 +3115,13 @@
             <a:r>
               <a:rPr lang="en-US" sz="1220" dirty="0">
                 <a:solidFill>
-                  <a:srgbClr val="1E2630"/>
-                </a:solidFill>
-                <a:latin typeface="Calibri" pitchFamily="34" charset="0"/>
-                <a:ea typeface="Calibri" pitchFamily="34" charset="-122"/>
-                <a:cs typeface="Calibri" pitchFamily="34" charset="-120"/>
-              </a:rPr>
-              <a:t>A plausible reading is that deleting bridge or hub nodes can simplify shard-local classification and reduce cross-shard interference.</a:t>
-            </a:r>
-            <a:endParaRPr lang="en-US" sz="1220" dirty="0"/>
-          </a:p>
-        </p:txBody>
-      </p:sp>
-      <p:sp>
-        <p:nvSpPr>
-          <p:cNvPr id="15" name="Shape 12"/>
-          <p:cNvSpPr/>
-          <p:nvPr/>
-        </p:nvSpPr>
-        <p:spPr>
-          <a:xfrm>
-            <a:off x="5669280" y="3584448"/>
-            <a:ext cx="2697480" cy="804672"/>
-          </a:xfrm>
-          <a:prstGeom prst="roundRect">
-            <a:avLst>
-              <a:gd name="adj" fmla="val 5682"/>
-            </a:avLst>
-          </a:prstGeom>
-          <a:solidFill>
-            <a:srgbClr val="A6404B"/>
-          </a:solidFill>
-          <a:ln w="13970">
-            <a:solidFill>
-              <a:srgbClr val="A6404B"/>
-            </a:solidFill>
-            <a:prstDash val="solid"/>
-          </a:ln>
-        </p:spPr>
-        <p:txBody>
-          <a:bodyPr/>
-          <a:lstStyle/>
-          <a:p>
-            <a:endParaRPr lang="zh-CN" altLang="en-US"/>
-          </a:p>
-        </p:txBody>
-      </p:sp>
-      <p:sp>
-        <p:nvSpPr>
-          <p:cNvPr id="16" name="Text 13"/>
-          <p:cNvSpPr/>
-          <p:nvPr/>
-        </p:nvSpPr>
-        <p:spPr>
-          <a:xfrm>
-            <a:off x="5806440" y="3675888"/>
-            <a:ext cx="2423160" cy="182880"/>
-          </a:xfrm>
-          <a:prstGeom prst="rect">
-            <a:avLst/>
-          </a:prstGeom>
-          <a:noFill/>
-          <a:ln/>
-        </p:spPr>
-        <p:txBody>
-          <a:bodyPr wrap="square" lIns="0" tIns="0" rIns="0" bIns="0" rtlCol="0" anchor="ctr"/>
-          <a:lstStyle/>
-          <a:p>
-            <a:pPr marL="0" indent="0">
-              <a:buNone/>
-            </a:pPr>
-            <a:r>
-              <a:rPr lang="en-US" sz="1700" b="1" dirty="0">
-                <a:solidFill>
                   <a:srgbClr val="FFFFFF"/>
                 </a:solidFill>
-                <a:latin typeface="Georgia" pitchFamily="34" charset="0"/>
-                <a:ea typeface="Georgia" pitchFamily="34" charset="-122"/>
-                <a:cs typeface="Georgia" pitchFamily="34" charset="-120"/>
-              </a:rPr>
-              <a:t>Caution</a:t>
-            </a:r>
-            <a:endParaRPr lang="en-US" sz="1700" dirty="0"/>
-          </a:p>
-        </p:txBody>
-      </p:sp>
-      <p:sp>
-        <p:nvSpPr>
-          <p:cNvPr id="17" name="Text 14"/>
-          <p:cNvSpPr/>
-          <p:nvPr/>
-        </p:nvSpPr>
-        <p:spPr>
-          <a:xfrm>
-            <a:off x="5806440" y="3922776"/>
-            <a:ext cx="2423160" cy="374904"/>
-          </a:xfrm>
-          <a:prstGeom prst="rect">
-            <a:avLst/>
-          </a:prstGeom>
-          <a:noFill/>
-          <a:ln/>
-        </p:spPr>
-        <p:txBody>
-          <a:bodyPr wrap="square" lIns="0" tIns="0" rIns="0" bIns="0" rtlCol="0" anchor="ctr">
-            <a:normAutofit/>
-          </a:bodyPr>
-          <a:lstStyle/>
-          <a:p>
-            <a:pPr marL="0" indent="0">
-              <a:buNone/>
-            </a:pPr>
-            <a:r>
-              <a:rPr lang="en-US" sz="1220" dirty="0">
-                <a:solidFill>
-                  <a:srgbClr val="FFFFFF"/>
-                </a:solidFill>
-                <a:latin typeface="Calibri" pitchFamily="34" charset="0"/>
-                <a:ea typeface="Calibri" pitchFamily="34" charset="-122"/>
-                <a:cs typeface="Calibri" pitchFamily="34" charset="-120"/>
-              </a:rPr>
-              <a:t>This is setting-specific evidence, not a claim of universal robustness.</a:t>
+                <a:latin typeface="Times New Roman" pitchFamily="34" charset="0"/>
+                <a:ea typeface="Times New Roman" pitchFamily="34" charset="-122"/>
+                <a:cs typeface="Times New Roman" pitchFamily="34" charset="-120"/>
+              </a:rPr>
+              <a:t>The family difference is structural rather than a one-point artifact of the chosen ratio.</a:t>
             </a:r>
             <a:endParaRPr lang="en-US" sz="1220" dirty="0"/>
           </a:p>
@@ -2885,11 +3223,11 @@
                 <a:solidFill>
                   <a:srgbClr val="FFFFFF"/>
                 </a:solidFill>
-                <a:latin typeface="Georgia" pitchFamily="34" charset="0"/>
-                <a:ea typeface="Georgia" pitchFamily="34" charset="-122"/>
-                <a:cs typeface="Georgia" pitchFamily="34" charset="-120"/>
-              </a:rPr>
-              <a:t>Attack Strength And Practicality</a:t>
+                <a:latin typeface="Times New Roman" pitchFamily="34" charset="0"/>
+                <a:ea typeface="Times New Roman" pitchFamily="34" charset="-122"/>
+                <a:cs typeface="Times New Roman" pitchFamily="34" charset="-120"/>
+              </a:rPr>
+              <a:t>Attribution And Collateral Damage</a:t>
             </a:r>
             <a:endParaRPr lang="en-US" sz="2400" dirty="0"/>
           </a:p>
@@ -2924,11 +3262,11 @@
                 <a:solidFill>
                   <a:srgbClr val="F7F5F1"/>
                 </a:solidFill>
-                <a:latin typeface="Calibri" pitchFamily="34" charset="0"/>
-                <a:ea typeface="Calibri" pitchFamily="34" charset="-122"/>
-                <a:cs typeface="Calibri" pitchFamily="34" charset="-120"/>
-              </a:rPr>
-              <a:t>11 / 14</a:t>
+                <a:latin typeface="Times New Roman" pitchFamily="34" charset="0"/>
+                <a:ea typeface="Times New Roman" pitchFamily="34" charset="-122"/>
+                <a:cs typeface="Times New Roman" pitchFamily="34" charset="-120"/>
+              </a:rPr>
+              <a:t>11 / 15</a:t>
             </a:r>
             <a:endParaRPr lang="en-US" sz="1000" dirty="0"/>
           </a:p>
@@ -2963,9 +3301,9 @@
                 <a:solidFill>
                   <a:srgbClr val="667085"/>
                 </a:solidFill>
-                <a:latin typeface="Calibri" pitchFamily="34" charset="0"/>
-                <a:ea typeface="Calibri" pitchFamily="34" charset="-122"/>
-                <a:cs typeface="Calibri" pitchFamily="34" charset="-120"/>
+                <a:latin typeface="Times New Roman" pitchFamily="34" charset="0"/>
+                <a:ea typeface="Times New Roman" pitchFamily="34" charset="-122"/>
+                <a:cs typeface="Times New Roman" pitchFamily="34" charset="-120"/>
               </a:rPr>
               <a:t>EE5003 MSc Project | Liu Chengyu</a:t>
             </a:r>
@@ -3002,9 +3340,9 @@
                 <a:solidFill>
                   <a:srgbClr val="667085"/>
                 </a:solidFill>
-                <a:latin typeface="Calibri" pitchFamily="34" charset="0"/>
-                <a:ea typeface="Calibri" pitchFamily="34" charset="-122"/>
-                <a:cs typeface="Calibri" pitchFamily="34" charset="-120"/>
+                <a:latin typeface="Times New Roman" pitchFamily="34" charset="0"/>
+                <a:ea typeface="Times New Roman" pitchFamily="34" charset="-122"/>
+                <a:cs typeface="Times New Roman" pitchFamily="34" charset="-120"/>
               </a:rPr>
               <a:t>Approximate Graph Unlearning Audit</a:t>
             </a:r>
@@ -3012,40 +3350,16 @@
           </a:p>
         </p:txBody>
       </p:sp>
-      <p:pic>
-        <p:nvPicPr>
-          <p:cNvPr id="7" name="Image 0" descr="H:\project\OpenGU\GULib-master\report\0417_5003report\figures\paper_figures\FIG-3_Spectrum.png"/>
-          <p:cNvPicPr>
-            <a:picLocks noChangeAspect="1"/>
-          </p:cNvPicPr>
-          <p:nvPr/>
-        </p:nvPicPr>
-        <p:blipFill>
-          <a:blip r:embed="rId3"/>
-          <a:stretch>
-            <a:fillRect/>
-          </a:stretch>
-        </p:blipFill>
-        <p:spPr>
-          <a:xfrm>
-            <a:off x="548640" y="914400"/>
-            <a:ext cx="5349240" cy="3383280"/>
-          </a:xfrm>
-          <a:prstGeom prst="rect">
-            <a:avLst/>
-          </a:prstGeom>
-        </p:spPr>
-      </p:pic>
-      <p:sp>
-        <p:nvSpPr>
-          <p:cNvPr id="8" name="Text 5"/>
-          <p:cNvSpPr/>
-          <p:nvPr/>
-        </p:nvSpPr>
-        <p:spPr>
-          <a:xfrm>
-            <a:off x="576072" y="4389120"/>
-            <a:ext cx="5303520" cy="146304"/>
+      <p:sp>
+        <p:nvSpPr>
+          <p:cNvPr id="7" name="Text 5"/>
+          <p:cNvSpPr/>
+          <p:nvPr/>
+        </p:nvSpPr>
+        <p:spPr>
+          <a:xfrm>
+            <a:off x="621792" y="768096"/>
+            <a:ext cx="7498080" cy="228600"/>
           </a:xfrm>
           <a:prstGeom prst="rect">
             <a:avLst/>
@@ -3061,34 +3375,34 @@
               <a:buNone/>
             </a:pPr>
             <a:r>
-              <a:rPr lang="en-US" sz="900" i="1" dirty="0">
-                <a:solidFill>
-                  <a:srgbClr val="667085"/>
-                </a:solidFill>
-                <a:latin typeface="Calibri" pitchFamily="34" charset="0"/>
-                <a:ea typeface="Calibri" pitchFamily="34" charset="-122"/>
-                <a:cs typeface="Calibri" pitchFamily="34" charset="-120"/>
-              </a:rPr>
-              <a:t>Figure 3. Cross-family comparison of the main attack strategies at ratio = 0.05.</a:t>
-            </a:r>
-            <a:endParaRPr lang="en-US" sz="900" dirty="0"/>
-          </a:p>
-        </p:txBody>
-      </p:sp>
-      <p:sp>
-        <p:nvSpPr>
-          <p:cNvPr id="9" name="Shape 6"/>
-          <p:cNvSpPr/>
-          <p:nvPr/>
-        </p:nvSpPr>
-        <p:spPr>
-          <a:xfrm>
-            <a:off x="6144768" y="914400"/>
-            <a:ext cx="2331720" cy="868680"/>
+              <a:rPr lang="en-US" sz="1670" b="1" dirty="0">
+                <a:solidFill>
+                  <a:srgbClr val="223A5E"/>
+                </a:solidFill>
+                <a:latin typeface="Times New Roman" pitchFamily="34" charset="0"/>
+                <a:ea typeface="Times New Roman" pitchFamily="34" charset="-122"/>
+                <a:cs typeface="Times New Roman" pitchFamily="34" charset="-120"/>
+              </a:rPr>
+              <a:t>relative_f1_drop says the attack beats the k=5 method baseline; retrain_gap and collateral metrics explain where the extra damage comes from.</a:t>
+            </a:r>
+            <a:endParaRPr lang="en-US" sz="1670" dirty="0"/>
+          </a:p>
+        </p:txBody>
+      </p:sp>
+      <p:sp>
+        <p:nvSpPr>
+          <p:cNvPr id="8" name="Shape 6"/>
+          <p:cNvSpPr/>
+          <p:nvPr/>
+        </p:nvSpPr>
+        <p:spPr>
+          <a:xfrm>
+            <a:off x="713232" y="1371600"/>
+            <a:ext cx="2487168" cy="2267712"/>
           </a:xfrm>
           <a:prstGeom prst="roundRect">
             <a:avLst>
-              <a:gd name="adj" fmla="val 5263"/>
+              <a:gd name="adj" fmla="val 2016"/>
             </a:avLst>
           </a:prstGeom>
           <a:solidFill>
@@ -3111,14 +3425,14 @@
       </p:sp>
       <p:sp>
         <p:nvSpPr>
-          <p:cNvPr id="10" name="Text 7"/>
-          <p:cNvSpPr/>
-          <p:nvPr/>
-        </p:nvSpPr>
-        <p:spPr>
-          <a:xfrm>
-            <a:off x="6281928" y="1005840"/>
-            <a:ext cx="2057400" cy="182880"/>
+          <p:cNvPr id="9" name="Text 7"/>
+          <p:cNvSpPr/>
+          <p:nvPr/>
+        </p:nvSpPr>
+        <p:spPr>
+          <a:xfrm>
+            <a:off x="850392" y="1536192"/>
+            <a:ext cx="2212848" cy="182880"/>
           </a:xfrm>
           <a:prstGeom prst="rect">
             <a:avLst/>
@@ -3138,11 +3452,11 @@
                 <a:solidFill>
                   <a:srgbClr val="223A5E"/>
                 </a:solidFill>
-                <a:latin typeface="Georgia" pitchFamily="34" charset="0"/>
-                <a:ea typeface="Georgia" pitchFamily="34" charset="-122"/>
-                <a:cs typeface="Georgia" pitchFamily="34" charset="-120"/>
-              </a:rPr>
-              <a:t>Reading key</a:t>
+                <a:latin typeface="Times New Roman" pitchFamily="34" charset="0"/>
+                <a:ea typeface="Times New Roman" pitchFamily="34" charset="-122"/>
+                <a:cs typeface="Times New Roman" pitchFamily="34" charset="-120"/>
+              </a:rPr>
+              <a:t>Attack success</a:t>
             </a:r>
             <a:endParaRPr lang="en-US" sz="1700" dirty="0"/>
           </a:p>
@@ -3150,14 +3464,14 @@
       </p:sp>
       <p:sp>
         <p:nvSpPr>
-          <p:cNvPr id="11" name="Text 8"/>
-          <p:cNvSpPr/>
-          <p:nvPr/>
-        </p:nvSpPr>
-        <p:spPr>
-          <a:xfrm>
-            <a:off x="6281928" y="1252728"/>
-            <a:ext cx="2057400" cy="438912"/>
+          <p:cNvPr id="10" name="Text 8"/>
+          <p:cNvSpPr/>
+          <p:nvPr/>
+        </p:nvSpPr>
+        <p:spPr>
+          <a:xfrm>
+            <a:off x="850392" y="1783080"/>
+            <a:ext cx="2212848" cy="1764792"/>
           </a:xfrm>
           <a:prstGeom prst="rect">
             <a:avLst/>
@@ -3179,11 +3493,11 @@
                 <a:solidFill>
                   <a:srgbClr val="1E2630"/>
                 </a:solidFill>
-                <a:latin typeface="Calibri" pitchFamily="34" charset="0"/>
-                <a:ea typeface="Calibri" pitchFamily="34" charset="-122"/>
-                <a:cs typeface="Calibri" pitchFamily="34" charset="-120"/>
-              </a:rPr>
-              <a:t>Relative F1 drop measures the attack-over-random advantage at the same budget.</a:t>
+                <a:latin typeface="Times New Roman" pitchFamily="34" charset="0"/>
+                <a:ea typeface="Times New Roman" pitchFamily="34" charset="-122"/>
+                <a:cs typeface="Times New Roman" pitchFamily="34" charset="-120"/>
+              </a:rPr>
+              <a:t>relative_f1_drop tells us whether a structured attack causes more loss than the small random-trigger baseline.</a:t>
             </a:r>
             <a:endParaRPr lang="en-US" sz="1220" dirty="0"/>
           </a:p>
@@ -3191,18 +3505,285 @@
       </p:sp>
       <p:sp>
         <p:nvSpPr>
-          <p:cNvPr id="12" name="Shape 9"/>
-          <p:cNvSpPr/>
-          <p:nvPr/>
-        </p:nvSpPr>
-        <p:spPr>
-          <a:xfrm>
-            <a:off x="6199632" y="1993392"/>
-            <a:ext cx="960120" cy="914400"/>
+          <p:cNvPr id="11" name="Shape 9"/>
+          <p:cNvSpPr/>
+          <p:nvPr/>
+        </p:nvSpPr>
+        <p:spPr>
+          <a:xfrm>
+            <a:off x="3337560" y="1371600"/>
+            <a:ext cx="2487168" cy="2267712"/>
           </a:xfrm>
           <a:prstGeom prst="roundRect">
             <a:avLst>
-              <a:gd name="adj" fmla="val 5000"/>
+              <a:gd name="adj" fmla="val 2016"/>
+            </a:avLst>
+          </a:prstGeom>
+          <a:solidFill>
+            <a:srgbClr val="E8EEF5"/>
+          </a:solidFill>
+          <a:ln w="13970">
+            <a:solidFill>
+              <a:srgbClr val="E8EEF5"/>
+            </a:solidFill>
+            <a:prstDash val="solid"/>
+          </a:ln>
+        </p:spPr>
+        <p:txBody>
+          <a:bodyPr/>
+          <a:lstStyle/>
+          <a:p>
+            <a:endParaRPr lang="zh-CN" altLang="en-US"/>
+          </a:p>
+        </p:txBody>
+      </p:sp>
+      <p:sp>
+        <p:nvSpPr>
+          <p:cNvPr id="12" name="Text 10"/>
+          <p:cNvSpPr/>
+          <p:nvPr/>
+        </p:nvSpPr>
+        <p:spPr>
+          <a:xfrm>
+            <a:off x="3474720" y="1536192"/>
+            <a:ext cx="2212848" cy="182880"/>
+          </a:xfrm>
+          <a:prstGeom prst="rect">
+            <a:avLst/>
+          </a:prstGeom>
+          <a:noFill/>
+          <a:ln/>
+        </p:spPr>
+        <p:txBody>
+          <a:bodyPr wrap="square" lIns="0" tIns="0" rIns="0" bIns="0" rtlCol="0" anchor="ctr"/>
+          <a:lstStyle/>
+          <a:p>
+            <a:pPr marL="0" indent="0">
+              <a:buNone/>
+            </a:pPr>
+            <a:r>
+              <a:rPr lang="en-US" sz="1700" b="1" dirty="0">
+                <a:solidFill>
+                  <a:srgbClr val="223A5E"/>
+                </a:solidFill>
+                <a:latin typeface="Times New Roman" pitchFamily="34" charset="0"/>
+                <a:ea typeface="Times New Roman" pitchFamily="34" charset="-122"/>
+                <a:cs typeface="Times New Roman" pitchFamily="34" charset="-120"/>
+              </a:rPr>
+              <a:t>Attribution</a:t>
+            </a:r>
+            <a:endParaRPr lang="en-US" sz="1700" dirty="0"/>
+          </a:p>
+        </p:txBody>
+      </p:sp>
+      <p:sp>
+        <p:nvSpPr>
+          <p:cNvPr id="13" name="Text 11"/>
+          <p:cNvSpPr/>
+          <p:nvPr/>
+        </p:nvSpPr>
+        <p:spPr>
+          <a:xfrm>
+            <a:off x="3474720" y="1783080"/>
+            <a:ext cx="2212848" cy="1764792"/>
+          </a:xfrm>
+          <a:prstGeom prst="rect">
+            <a:avLst/>
+          </a:prstGeom>
+          <a:noFill/>
+          <a:ln/>
+        </p:spPr>
+        <p:txBody>
+          <a:bodyPr wrap="square" lIns="0" tIns="0" rIns="0" bIns="0" rtlCol="0" anchor="ctr">
+            <a:normAutofit/>
+          </a:bodyPr>
+          <a:lstStyle/>
+          <a:p>
+            <a:pPr marL="0" indent="0">
+              <a:buNone/>
+            </a:pPr>
+            <a:r>
+              <a:rPr lang="en-US" sz="1220" dirty="0">
+                <a:solidFill>
+                  <a:srgbClr val="1E2630"/>
+                </a:solidFill>
+                <a:latin typeface="Times New Roman" pitchFamily="34" charset="0"/>
+                <a:ea typeface="Times New Roman" pitchFamily="34" charset="-122"/>
+                <a:cs typeface="Times New Roman" pitchFamily="34" charset="-120"/>
+              </a:rPr>
+              <a:t>retrain_gap isolates the additional approximation error by comparing approximate unlearning with exact retraining on the same deletion set.</a:t>
+            </a:r>
+            <a:endParaRPr lang="en-US" sz="1220" dirty="0"/>
+          </a:p>
+        </p:txBody>
+      </p:sp>
+      <p:sp>
+        <p:nvSpPr>
+          <p:cNvPr id="14" name="Shape 12"/>
+          <p:cNvSpPr/>
+          <p:nvPr/>
+        </p:nvSpPr>
+        <p:spPr>
+          <a:xfrm>
+            <a:off x="5961888" y="1371600"/>
+            <a:ext cx="2487168" cy="2267712"/>
+          </a:xfrm>
+          <a:prstGeom prst="roundRect">
+            <a:avLst>
+              <a:gd name="adj" fmla="val 2016"/>
+            </a:avLst>
+          </a:prstGeom>
+          <a:solidFill>
+            <a:srgbClr val="FFFFFF"/>
+          </a:solidFill>
+          <a:ln w="13970">
+            <a:solidFill>
+              <a:srgbClr val="D9DEE7"/>
+            </a:solidFill>
+            <a:prstDash val="solid"/>
+          </a:ln>
+        </p:spPr>
+        <p:txBody>
+          <a:bodyPr/>
+          <a:lstStyle/>
+          <a:p>
+            <a:endParaRPr lang="zh-CN" altLang="en-US"/>
+          </a:p>
+        </p:txBody>
+      </p:sp>
+      <p:sp>
+        <p:nvSpPr>
+          <p:cNvPr id="15" name="Text 13"/>
+          <p:cNvSpPr/>
+          <p:nvPr/>
+        </p:nvSpPr>
+        <p:spPr>
+          <a:xfrm>
+            <a:off x="6099048" y="1536192"/>
+            <a:ext cx="2212848" cy="182880"/>
+          </a:xfrm>
+          <a:prstGeom prst="rect">
+            <a:avLst/>
+          </a:prstGeom>
+          <a:noFill/>
+          <a:ln/>
+        </p:spPr>
+        <p:txBody>
+          <a:bodyPr wrap="square" lIns="0" tIns="0" rIns="0" bIns="0" rtlCol="0" anchor="ctr"/>
+          <a:lstStyle/>
+          <a:p>
+            <a:pPr marL="0" indent="0">
+              <a:buNone/>
+            </a:pPr>
+            <a:r>
+              <a:rPr lang="en-US" sz="1700" b="1" dirty="0">
+                <a:solidFill>
+                  <a:srgbClr val="223A5E"/>
+                </a:solidFill>
+                <a:latin typeface="Times New Roman" pitchFamily="34" charset="0"/>
+                <a:ea typeface="Times New Roman" pitchFamily="34" charset="-122"/>
+                <a:cs typeface="Times New Roman" pitchFamily="34" charset="-120"/>
+              </a:rPr>
+              <a:t>Spillover</a:t>
+            </a:r>
+            <a:endParaRPr lang="en-US" sz="1700" dirty="0"/>
+          </a:p>
+        </p:txBody>
+      </p:sp>
+      <p:sp>
+        <p:nvSpPr>
+          <p:cNvPr id="16" name="Text 14"/>
+          <p:cNvSpPr/>
+          <p:nvPr/>
+        </p:nvSpPr>
+        <p:spPr>
+          <a:xfrm>
+            <a:off x="6099048" y="1783080"/>
+            <a:ext cx="2212848" cy="1764792"/>
+          </a:xfrm>
+          <a:prstGeom prst="rect">
+            <a:avLst/>
+          </a:prstGeom>
+          <a:noFill/>
+          <a:ln/>
+        </p:spPr>
+        <p:txBody>
+          <a:bodyPr wrap="square" lIns="0" tIns="0" rIns="0" bIns="0" rtlCol="0" anchor="ctr">
+            <a:normAutofit/>
+          </a:bodyPr>
+          <a:lstStyle/>
+          <a:p>
+            <a:pPr marL="0" indent="0">
+              <a:buNone/>
+            </a:pPr>
+            <a:r>
+              <a:rPr lang="en-US" sz="1220" dirty="0">
+                <a:solidFill>
+                  <a:srgbClr val="1E2630"/>
+                </a:solidFill>
+                <a:latin typeface="Times New Roman" pitchFamily="34" charset="0"/>
+                <a:ea typeface="Times New Roman" pitchFamily="34" charset="-122"/>
+                <a:cs typeface="Times New Roman" pitchFamily="34" charset="-120"/>
+              </a:rPr>
+              <a:t>fraction_flipped and mean_pred_shift show how strongly retained non-target nodes are disturbed.</a:t>
+            </a:r>
+            <a:endParaRPr lang="en-US" sz="1220" dirty="0"/>
+          </a:p>
+        </p:txBody>
+      </p:sp>
+      <p:sp>
+        <p:nvSpPr>
+          <p:cNvPr id="17" name="Text 15"/>
+          <p:cNvSpPr/>
+          <p:nvPr/>
+        </p:nvSpPr>
+        <p:spPr>
+          <a:xfrm>
+            <a:off x="749808" y="3749040"/>
+            <a:ext cx="1737360" cy="146304"/>
+          </a:xfrm>
+          <a:prstGeom prst="rect">
+            <a:avLst/>
+          </a:prstGeom>
+          <a:noFill/>
+          <a:ln/>
+        </p:spPr>
+        <p:txBody>
+          <a:bodyPr wrap="square" lIns="0" tIns="0" rIns="0" bIns="0" rtlCol="0" anchor="ctr"/>
+          <a:lstStyle/>
+          <a:p>
+            <a:pPr marL="0" indent="0">
+              <a:buNone/>
+            </a:pPr>
+            <a:r>
+              <a:rPr lang="en-US" sz="1340" b="1" dirty="0">
+                <a:solidFill>
+                  <a:srgbClr val="223A5E"/>
+                </a:solidFill>
+                <a:latin typeface="Times New Roman" pitchFamily="34" charset="0"/>
+                <a:ea typeface="Times New Roman" pitchFamily="34" charset="-122"/>
+                <a:cs typeface="Times New Roman" pitchFamily="34" charset="-120"/>
+              </a:rPr>
+              <a:t>Collateral evidence</a:t>
+            </a:r>
+            <a:endParaRPr lang="en-US" sz="1340" dirty="0"/>
+          </a:p>
+        </p:txBody>
+      </p:sp>
+      <p:sp>
+        <p:nvSpPr>
+          <p:cNvPr id="18" name="Shape 16"/>
+          <p:cNvSpPr/>
+          <p:nvPr/>
+        </p:nvSpPr>
+        <p:spPr>
+          <a:xfrm>
+            <a:off x="1847088" y="3658138"/>
+            <a:ext cx="6565392" cy="877824"/>
+          </a:xfrm>
+          <a:prstGeom prst="roundRect">
+            <a:avLst>
+              <a:gd name="adj" fmla="val 4167"/>
             </a:avLst>
           </a:prstGeom>
           <a:solidFill>
@@ -3227,14 +3808,14 @@
       </p:sp>
       <p:sp>
         <p:nvSpPr>
-          <p:cNvPr id="13" name="Text 10"/>
-          <p:cNvSpPr/>
-          <p:nvPr/>
-        </p:nvSpPr>
-        <p:spPr>
-          <a:xfrm>
-            <a:off x="6272784" y="2103120"/>
-            <a:ext cx="813816" cy="201168"/>
+          <p:cNvPr id="19" name="Text 17"/>
+          <p:cNvSpPr/>
+          <p:nvPr/>
+        </p:nvSpPr>
+        <p:spPr>
+          <a:xfrm>
+            <a:off x="1993392" y="3767328"/>
+            <a:ext cx="6272784" cy="109728"/>
           </a:xfrm>
           <a:prstGeom prst="rect">
             <a:avLst/>
@@ -3246,34 +3827,151 @@
           <a:bodyPr wrap="square" lIns="0" tIns="0" rIns="0" bIns="0" rtlCol="0" anchor="ctr"/>
           <a:lstStyle/>
           <a:p>
-            <a:pPr marL="0" indent="0" algn="ctr">
-              <a:buNone/>
-            </a:pPr>
-            <a:r>
-              <a:rPr lang="en-US" sz="1900" b="1" dirty="0">
-                <a:solidFill>
-                  <a:srgbClr val="FFFFFF"/>
-                </a:solidFill>
-                <a:latin typeface="Georgia" pitchFamily="34" charset="0"/>
-                <a:ea typeface="Georgia" pitchFamily="34" charset="-122"/>
-                <a:cs typeface="Georgia" pitchFamily="34" charset="-120"/>
-              </a:rPr>
-              <a:t>18.9s</a:t>
-            </a:r>
-            <a:endParaRPr lang="en-US" sz="1900" dirty="0"/>
-          </a:p>
-        </p:txBody>
-      </p:sp>
-      <p:sp>
-        <p:nvSpPr>
-          <p:cNvPr id="14" name="Text 11"/>
-          <p:cNvSpPr/>
-          <p:nvPr/>
-        </p:nvSpPr>
-        <p:spPr>
-          <a:xfrm>
-            <a:off x="6272784" y="2377440"/>
-            <a:ext cx="813816" cy="484632"/>
+            <a:pPr marL="0" indent="0">
+              <a:buNone/>
+            </a:pPr>
+            <a:r>
+              <a:rPr lang="en-US" sz="960" b="1" dirty="0">
+                <a:solidFill>
+                  <a:srgbClr val="F7F5F1"/>
+                </a:solidFill>
+                <a:latin typeface="Times New Roman" pitchFamily="34" charset="0"/>
+                <a:ea typeface="Times New Roman" pitchFamily="34" charset="-122"/>
+                <a:cs typeface="Times New Roman" pitchFamily="34" charset="-120"/>
+              </a:rPr>
+              <a:t>Method | Avg Gap | Pred Shift / Flip</a:t>
+            </a:r>
+            <a:endParaRPr lang="en-US" sz="960" dirty="0"/>
+          </a:p>
+        </p:txBody>
+      </p:sp>
+      <p:sp>
+        <p:nvSpPr>
+          <p:cNvPr id="20" name="Text 18"/>
+          <p:cNvSpPr/>
+          <p:nvPr/>
+        </p:nvSpPr>
+        <p:spPr>
+          <a:xfrm>
+            <a:off x="1993392" y="3941064"/>
+            <a:ext cx="6272784" cy="100584"/>
+          </a:xfrm>
+          <a:prstGeom prst="rect">
+            <a:avLst/>
+          </a:prstGeom>
+          <a:noFill/>
+          <a:ln/>
+        </p:spPr>
+        <p:txBody>
+          <a:bodyPr wrap="square" lIns="0" tIns="0" rIns="0" bIns="0" rtlCol="0" anchor="ctr"/>
+          <a:lstStyle/>
+          <a:p>
+            <a:pPr marL="0" indent="0">
+              <a:buNone/>
+            </a:pPr>
+            <a:r>
+              <a:rPr lang="en-US" sz="890" dirty="0">
+                <a:solidFill>
+                  <a:srgbClr val="F7F5F1"/>
+                </a:solidFill>
+                <a:latin typeface="Times New Roman" pitchFamily="34" charset="0"/>
+                <a:ea typeface="Times New Roman" pitchFamily="34" charset="-122"/>
+                <a:cs typeface="Times New Roman" pitchFamily="34" charset="-120"/>
+              </a:rPr>
+              <a:t>GNNDelete | 9.74% | 0.245 / 26.2%</a:t>
+            </a:r>
+            <a:endParaRPr lang="en-US" sz="890" dirty="0"/>
+          </a:p>
+        </p:txBody>
+      </p:sp>
+      <p:sp>
+        <p:nvSpPr>
+          <p:cNvPr id="21" name="Text 19"/>
+          <p:cNvSpPr/>
+          <p:nvPr/>
+        </p:nvSpPr>
+        <p:spPr>
+          <a:xfrm>
+            <a:off x="1993392" y="4105656"/>
+            <a:ext cx="6272784" cy="100584"/>
+          </a:xfrm>
+          <a:prstGeom prst="rect">
+            <a:avLst/>
+          </a:prstGeom>
+          <a:noFill/>
+          <a:ln/>
+        </p:spPr>
+        <p:txBody>
+          <a:bodyPr wrap="square" lIns="0" tIns="0" rIns="0" bIns="0" rtlCol="0" anchor="ctr"/>
+          <a:lstStyle/>
+          <a:p>
+            <a:pPr marL="0" indent="0">
+              <a:buNone/>
+            </a:pPr>
+            <a:r>
+              <a:rPr lang="en-US" sz="890" dirty="0">
+                <a:solidFill>
+                  <a:srgbClr val="F7F5F1"/>
+                </a:solidFill>
+                <a:latin typeface="Times New Roman" pitchFamily="34" charset="0"/>
+                <a:ea typeface="Times New Roman" pitchFamily="34" charset="-122"/>
+                <a:cs typeface="Times New Roman" pitchFamily="34" charset="-120"/>
+              </a:rPr>
+              <a:t>GraphEraser | 0.13% | 0.265 / 18.4%</a:t>
+            </a:r>
+            <a:endParaRPr lang="en-US" sz="890" dirty="0"/>
+          </a:p>
+        </p:txBody>
+      </p:sp>
+      <p:sp>
+        <p:nvSpPr>
+          <p:cNvPr id="22" name="Text 20"/>
+          <p:cNvSpPr/>
+          <p:nvPr/>
+        </p:nvSpPr>
+        <p:spPr>
+          <a:xfrm>
+            <a:off x="1993392" y="4270248"/>
+            <a:ext cx="6272784" cy="100584"/>
+          </a:xfrm>
+          <a:prstGeom prst="rect">
+            <a:avLst/>
+          </a:prstGeom>
+          <a:noFill/>
+          <a:ln/>
+        </p:spPr>
+        <p:txBody>
+          <a:bodyPr wrap="square" lIns="0" tIns="0" rIns="0" bIns="0" rtlCol="0" anchor="ctr"/>
+          <a:lstStyle/>
+          <a:p>
+            <a:pPr marL="0" indent="0">
+              <a:buNone/>
+            </a:pPr>
+            <a:r>
+              <a:rPr lang="en-US" sz="890" dirty="0">
+                <a:solidFill>
+                  <a:srgbClr val="F7F5F1"/>
+                </a:solidFill>
+                <a:latin typeface="Times New Roman" pitchFamily="34" charset="0"/>
+                <a:ea typeface="Times New Roman" pitchFamily="34" charset="-122"/>
+                <a:cs typeface="Times New Roman" pitchFamily="34" charset="-120"/>
+              </a:rPr>
+              <a:t>GIF | -0.34% | 0.024 / 3.1%</a:t>
+            </a:r>
+            <a:endParaRPr lang="en-US" sz="890" dirty="0"/>
+          </a:p>
+        </p:txBody>
+      </p:sp>
+      <p:sp>
+        <p:nvSpPr>
+          <p:cNvPr id="23" name="Text 21"/>
+          <p:cNvSpPr/>
+          <p:nvPr/>
+        </p:nvSpPr>
+        <p:spPr>
+          <a:xfrm>
+            <a:off x="749808" y="4572000"/>
+            <a:ext cx="7571232" cy="109728"/>
           </a:xfrm>
           <a:prstGeom prst="rect">
             <a:avLst/>
@@ -3287,309 +3985,21 @@
           </a:bodyPr>
           <a:lstStyle/>
           <a:p>
-            <a:pPr marL="0" indent="0" algn="ctr">
-              <a:buNone/>
-            </a:pPr>
-            <a:r>
-              <a:rPr lang="en-US" sz="1000" dirty="0">
-                <a:solidFill>
-                  <a:srgbClr val="F7F5F1"/>
-                </a:solidFill>
-                <a:latin typeface="Calibri" pitchFamily="34" charset="0"/>
-                <a:ea typeface="Calibri" pitchFamily="34" charset="-122"/>
-                <a:cs typeface="Calibri" pitchFamily="34" charset="-120"/>
-              </a:rPr>
-              <a:t>IM-v4 selection time</a:t>
-            </a:r>
-            <a:endParaRPr lang="en-US" sz="1000" dirty="0"/>
-          </a:p>
-        </p:txBody>
-      </p:sp>
-      <p:sp>
-        <p:nvSpPr>
-          <p:cNvPr id="15" name="Shape 12"/>
-          <p:cNvSpPr/>
-          <p:nvPr/>
-        </p:nvSpPr>
-        <p:spPr>
-          <a:xfrm>
-            <a:off x="7296912" y="1993392"/>
-            <a:ext cx="960120" cy="914400"/>
-          </a:xfrm>
-          <a:prstGeom prst="roundRect">
-            <a:avLst>
-              <a:gd name="adj" fmla="val 5000"/>
-            </a:avLst>
-          </a:prstGeom>
-          <a:solidFill>
-            <a:srgbClr val="E8EEF5"/>
-          </a:solidFill>
-          <a:ln w="12700">
-            <a:solidFill>
-              <a:srgbClr val="E8EEF5">
-                <a:alpha val="0"/>
-              </a:srgbClr>
-            </a:solidFill>
-            <a:prstDash val="solid"/>
-          </a:ln>
-        </p:spPr>
-        <p:txBody>
-          <a:bodyPr/>
-          <a:lstStyle/>
-          <a:p>
-            <a:endParaRPr lang="zh-CN" altLang="en-US"/>
-          </a:p>
-        </p:txBody>
-      </p:sp>
-      <p:sp>
-        <p:nvSpPr>
-          <p:cNvPr id="16" name="Text 13"/>
-          <p:cNvSpPr/>
-          <p:nvPr/>
-        </p:nvSpPr>
-        <p:spPr>
-          <a:xfrm>
-            <a:off x="7370064" y="2103120"/>
-            <a:ext cx="813816" cy="201168"/>
-          </a:xfrm>
-          <a:prstGeom prst="rect">
-            <a:avLst/>
-          </a:prstGeom>
-          <a:noFill/>
-          <a:ln/>
-        </p:spPr>
-        <p:txBody>
-          <a:bodyPr wrap="square" lIns="0" tIns="0" rIns="0" bIns="0" rtlCol="0" anchor="ctr"/>
-          <a:lstStyle/>
-          <a:p>
-            <a:pPr marL="0" indent="0" algn="ctr">
-              <a:buNone/>
-            </a:pPr>
-            <a:r>
-              <a:rPr lang="en-US" sz="1900" b="1" dirty="0">
-                <a:solidFill>
-                  <a:srgbClr val="223A5E"/>
-                </a:solidFill>
-                <a:latin typeface="Georgia" pitchFamily="34" charset="0"/>
-                <a:ea typeface="Georgia" pitchFamily="34" charset="-122"/>
-                <a:cs typeface="Georgia" pitchFamily="34" charset="-120"/>
-              </a:rPr>
-              <a:t>1.3%</a:t>
-            </a:r>
-            <a:endParaRPr lang="en-US" sz="1900" dirty="0"/>
-          </a:p>
-        </p:txBody>
-      </p:sp>
-      <p:sp>
-        <p:nvSpPr>
-          <p:cNvPr id="17" name="Text 14"/>
-          <p:cNvSpPr/>
-          <p:nvPr/>
-        </p:nvSpPr>
-        <p:spPr>
-          <a:xfrm>
-            <a:off x="7370064" y="2377440"/>
-            <a:ext cx="813816" cy="484632"/>
-          </a:xfrm>
-          <a:prstGeom prst="rect">
-            <a:avLst/>
-          </a:prstGeom>
-          <a:noFill/>
-          <a:ln/>
-        </p:spPr>
-        <p:txBody>
-          <a:bodyPr wrap="square" lIns="0" tIns="0" rIns="0" bIns="0" rtlCol="0" anchor="ctr">
-            <a:normAutofit/>
-          </a:bodyPr>
-          <a:lstStyle/>
-          <a:p>
-            <a:pPr marL="0" indent="0" algn="ctr">
-              <a:buNone/>
-            </a:pPr>
-            <a:r>
-              <a:rPr lang="en-US" sz="1000" dirty="0">
-                <a:solidFill>
-                  <a:srgbClr val="223A5E"/>
-                </a:solidFill>
-                <a:latin typeface="Calibri" pitchFamily="34" charset="0"/>
-                <a:ea typeface="Calibri" pitchFamily="34" charset="-122"/>
-                <a:cs typeface="Calibri" pitchFamily="34" charset="-120"/>
-              </a:rPr>
-              <a:t>spread loss vs CELF</a:t>
-            </a:r>
-            <a:endParaRPr lang="en-US" sz="1000" dirty="0"/>
-          </a:p>
-        </p:txBody>
-      </p:sp>
-      <p:sp>
-        <p:nvSpPr>
-          <p:cNvPr id="18" name="Shape 15"/>
-          <p:cNvSpPr/>
-          <p:nvPr/>
-        </p:nvSpPr>
-        <p:spPr>
-          <a:xfrm>
-            <a:off x="6199632" y="3063240"/>
-            <a:ext cx="2057400" cy="658368"/>
-          </a:xfrm>
-          <a:prstGeom prst="roundRect">
-            <a:avLst>
-              <a:gd name="adj" fmla="val 6944"/>
-            </a:avLst>
-          </a:prstGeom>
-          <a:solidFill>
-            <a:srgbClr val="FFFFFF"/>
-          </a:solidFill>
-          <a:ln w="13970">
-            <a:solidFill>
-              <a:srgbClr val="D9DEE7"/>
-            </a:solidFill>
-            <a:prstDash val="solid"/>
-          </a:ln>
-        </p:spPr>
-        <p:txBody>
-          <a:bodyPr/>
-          <a:lstStyle/>
-          <a:p>
-            <a:endParaRPr lang="zh-CN" altLang="en-US"/>
-          </a:p>
-        </p:txBody>
-      </p:sp>
-      <p:sp>
-        <p:nvSpPr>
-          <p:cNvPr id="19" name="Text 16"/>
-          <p:cNvSpPr/>
-          <p:nvPr/>
-        </p:nvSpPr>
-        <p:spPr>
-          <a:xfrm>
-            <a:off x="6336792" y="3154680"/>
-            <a:ext cx="1783080" cy="182880"/>
-          </a:xfrm>
-          <a:prstGeom prst="rect">
-            <a:avLst/>
-          </a:prstGeom>
-          <a:noFill/>
-          <a:ln/>
-        </p:spPr>
-        <p:txBody>
-          <a:bodyPr wrap="square" lIns="0" tIns="0" rIns="0" bIns="0" rtlCol="0" anchor="ctr"/>
-          <a:lstStyle/>
-          <a:p>
-            <a:pPr marL="0" indent="0">
-              <a:buNone/>
-            </a:pPr>
-            <a:r>
-              <a:rPr lang="en-US" sz="1700" b="1" dirty="0">
-                <a:solidFill>
-                  <a:srgbClr val="223A5E"/>
-                </a:solidFill>
-                <a:latin typeface="Georgia" pitchFamily="34" charset="0"/>
-                <a:ea typeface="Georgia" pitchFamily="34" charset="-122"/>
-                <a:cs typeface="Georgia" pitchFamily="34" charset="-120"/>
-              </a:rPr>
-              <a:t>Practical</a:t>
-            </a:r>
-            <a:endParaRPr lang="en-US" sz="1700" dirty="0"/>
-          </a:p>
-        </p:txBody>
-      </p:sp>
-      <p:sp>
-        <p:nvSpPr>
-          <p:cNvPr id="20" name="Text 17"/>
-          <p:cNvSpPr/>
-          <p:nvPr/>
-        </p:nvSpPr>
-        <p:spPr>
-          <a:xfrm>
-            <a:off x="6336792" y="3401568"/>
-            <a:ext cx="1783080" cy="228600"/>
-          </a:xfrm>
-          <a:prstGeom prst="rect">
-            <a:avLst/>
-          </a:prstGeom>
-          <a:noFill/>
-          <a:ln/>
-        </p:spPr>
-        <p:txBody>
-          <a:bodyPr wrap="square" lIns="0" tIns="0" rIns="0" bIns="0" rtlCol="0" anchor="ctr">
-            <a:normAutofit/>
-          </a:bodyPr>
-          <a:lstStyle/>
-          <a:p>
-            <a:pPr marL="0" indent="0">
-              <a:buNone/>
-            </a:pPr>
-            <a:r>
-              <a:rPr lang="en-US" sz="1220" dirty="0">
-                <a:solidFill>
-                  <a:srgbClr val="1E2630"/>
-                </a:solidFill>
-                <a:latin typeface="Calibri" pitchFamily="34" charset="0"/>
-                <a:ea typeface="Calibri" pitchFamily="34" charset="-122"/>
-                <a:cs typeface="Calibri" pitchFamily="34" charset="-120"/>
-              </a:rPr>
-              <a:t>Selection is operationally feasible.</a:t>
-            </a:r>
-            <a:endParaRPr lang="en-US" sz="1220" dirty="0"/>
-          </a:p>
-        </p:txBody>
-      </p:sp>
-      <p:sp>
-        <p:nvSpPr>
-          <p:cNvPr id="21" name="Text 18"/>
-          <p:cNvSpPr/>
-          <p:nvPr/>
-        </p:nvSpPr>
-        <p:spPr>
-          <a:xfrm>
-            <a:off x="6254496" y="3931920"/>
-            <a:ext cx="1920240" cy="594360"/>
-          </a:xfrm>
-          <a:prstGeom prst="rect">
-            <a:avLst/>
-          </a:prstGeom>
-          <a:noFill/>
-          <a:ln/>
-        </p:spPr>
-        <p:txBody>
-          <a:bodyPr wrap="square" lIns="0" tIns="0" rIns="0" bIns="0" rtlCol="0" anchor="ctr"/>
-          <a:lstStyle/>
-          <a:p>
-            <a:pPr marL="203200" indent="-203200">
-              <a:buSzPct val="100000"/>
-              <a:buChar char="•"/>
-            </a:pPr>
-            <a:r>
-              <a:rPr lang="en-US" sz="1120" dirty="0">
-                <a:solidFill>
-                  <a:srgbClr val="1E2630"/>
-                </a:solidFill>
-                <a:latin typeface="Calibri" pitchFamily="34" charset="0"/>
-                <a:ea typeface="Calibri" pitchFamily="34" charset="-122"/>
-                <a:cs typeface="Calibri" pitchFamily="34" charset="-120"/>
-              </a:rPr>
-              <a:t>Structured attacks outperform random deletion most clearly on GNNDelete.</a:t>
-            </a:r>
-            <a:endParaRPr lang="en-US" sz="1120" dirty="0"/>
-          </a:p>
-          <a:p>
-            <a:pPr marL="203200" indent="-203200">
-              <a:buSzPct val="100000"/>
-              <a:buChar char="•"/>
-            </a:pPr>
-            <a:r>
-              <a:rPr lang="en-US" sz="1120" dirty="0">
-                <a:solidFill>
-                  <a:srgbClr val="1E2630"/>
-                </a:solidFill>
-                <a:latin typeface="Calibri" pitchFamily="34" charset="0"/>
-                <a:ea typeface="Calibri" pitchFamily="34" charset="-122"/>
-                <a:cs typeface="Calibri" pitchFamily="34" charset="-120"/>
-              </a:rPr>
-              <a:t>IM-v4 makes attack selection fast enough to matter in practice.</a:t>
-            </a:r>
-            <a:endParaRPr lang="en-US" sz="1120" dirty="0"/>
+            <a:pPr marL="0" indent="0">
+              <a:buNone/>
+            </a:pPr>
+            <a:r>
+              <a:rPr lang="en-US" sz="950" dirty="0">
+                <a:solidFill>
+                  <a:srgbClr val="667085"/>
+                </a:solidFill>
+                <a:latin typeface="Times New Roman" pitchFamily="34" charset="0"/>
+                <a:ea typeface="Times New Roman" pitchFamily="34" charset="-122"/>
+                <a:cs typeface="Times New Roman" pitchFamily="34" charset="-120"/>
+              </a:rPr>
+              <a:t>Read this as a compact anchor from the report-level collateral table: GNNDelete combines the largest retrain gap with the strongest retained-node disturbance.</a:t>
+            </a:r>
+            <a:endParaRPr lang="en-US" sz="950" dirty="0"/>
           </a:p>
         </p:txBody>
       </p:sp>
@@ -3689,11 +4099,11 @@
                 <a:solidFill>
                   <a:srgbClr val="FFFFFF"/>
                 </a:solidFill>
-                <a:latin typeface="Georgia" pitchFamily="34" charset="0"/>
-                <a:ea typeface="Georgia" pitchFamily="34" charset="-122"/>
-                <a:cs typeface="Georgia" pitchFamily="34" charset="-120"/>
-              </a:rPr>
-              <a:t>Limitations And Future Work</a:t>
+                <a:latin typeface="Times New Roman" pitchFamily="34" charset="0"/>
+                <a:ea typeface="Times New Roman" pitchFamily="34" charset="-122"/>
+                <a:cs typeface="Times New Roman" pitchFamily="34" charset="-120"/>
+              </a:rPr>
+              <a:t>GraphEraser And Shard Protection</a:t>
             </a:r>
             <a:endParaRPr lang="en-US" sz="2400" dirty="0"/>
           </a:p>
@@ -3728,11 +4138,11 @@
                 <a:solidFill>
                   <a:srgbClr val="F7F5F1"/>
                 </a:solidFill>
-                <a:latin typeface="Calibri" pitchFamily="34" charset="0"/>
-                <a:ea typeface="Calibri" pitchFamily="34" charset="-122"/>
-                <a:cs typeface="Calibri" pitchFamily="34" charset="-120"/>
-              </a:rPr>
-              <a:t>12 / 14</a:t>
+                <a:latin typeface="Times New Roman" pitchFamily="34" charset="0"/>
+                <a:ea typeface="Times New Roman" pitchFamily="34" charset="-122"/>
+                <a:cs typeface="Times New Roman" pitchFamily="34" charset="-120"/>
+              </a:rPr>
+              <a:t>12 / 15</a:t>
             </a:r>
             <a:endParaRPr lang="en-US" sz="1000" dirty="0"/>
           </a:p>
@@ -3767,9 +4177,9 @@
                 <a:solidFill>
                   <a:srgbClr val="667085"/>
                 </a:solidFill>
-                <a:latin typeface="Calibri" pitchFamily="34" charset="0"/>
-                <a:ea typeface="Calibri" pitchFamily="34" charset="-122"/>
-                <a:cs typeface="Calibri" pitchFamily="34" charset="-120"/>
+                <a:latin typeface="Times New Roman" pitchFamily="34" charset="0"/>
+                <a:ea typeface="Times New Roman" pitchFamily="34" charset="-122"/>
+                <a:cs typeface="Times New Roman" pitchFamily="34" charset="-120"/>
               </a:rPr>
               <a:t>EE5003 MSc Project | Liu Chengyu</a:t>
             </a:r>
@@ -3806,9 +4216,9 @@
                 <a:solidFill>
                   <a:srgbClr val="667085"/>
                 </a:solidFill>
-                <a:latin typeface="Calibri" pitchFamily="34" charset="0"/>
-                <a:ea typeface="Calibri" pitchFamily="34" charset="-122"/>
-                <a:cs typeface="Calibri" pitchFamily="34" charset="-120"/>
+                <a:latin typeface="Times New Roman" pitchFamily="34" charset="0"/>
+                <a:ea typeface="Times New Roman" pitchFamily="34" charset="-122"/>
+                <a:cs typeface="Times New Roman" pitchFamily="34" charset="-120"/>
               </a:rPr>
               <a:t>Approximate Graph Unlearning Audit</a:t>
             </a:r>
@@ -3816,16 +4226,40 @@
           </a:p>
         </p:txBody>
       </p:sp>
-      <p:sp>
-        <p:nvSpPr>
-          <p:cNvPr id="7" name="Text 5"/>
-          <p:cNvSpPr/>
-          <p:nvPr/>
-        </p:nvSpPr>
-        <p:spPr>
-          <a:xfrm>
-            <a:off x="621792" y="768096"/>
-            <a:ext cx="7498080" cy="228600"/>
+      <p:pic>
+        <p:nvPicPr>
+          <p:cNvPr id="7" name="Image 0" descr="H:\project\OpenGU\GULib-master\report\0417_5003report\figures\report_figures\fig2_grapheraser_shard.png"/>
+          <p:cNvPicPr>
+            <a:picLocks noChangeAspect="1"/>
+          </p:cNvPicPr>
+          <p:nvPr/>
+        </p:nvPicPr>
+        <p:blipFill>
+          <a:blip r:embed="rId3"/>
+          <a:stretch>
+            <a:fillRect/>
+          </a:stretch>
+        </p:blipFill>
+        <p:spPr>
+          <a:xfrm>
+            <a:off x="621792" y="1024128"/>
+            <a:ext cx="4800600" cy="3401568"/>
+          </a:xfrm>
+          <a:prstGeom prst="rect">
+            <a:avLst/>
+          </a:prstGeom>
+        </p:spPr>
+      </p:pic>
+      <p:sp>
+        <p:nvSpPr>
+          <p:cNvPr id="8" name="Text 5"/>
+          <p:cNvSpPr/>
+          <p:nvPr/>
+        </p:nvSpPr>
+        <p:spPr>
+          <a:xfrm>
+            <a:off x="658368" y="4462272"/>
+            <a:ext cx="4709160" cy="146304"/>
           </a:xfrm>
           <a:prstGeom prst="rect">
             <a:avLst/>
@@ -3841,34 +4275,148 @@
               <a:buNone/>
             </a:pPr>
             <a:r>
-              <a:rPr lang="en-US" sz="1750" b="1" dirty="0">
-                <a:solidFill>
-                  <a:srgbClr val="223A5E"/>
-                </a:solidFill>
-                <a:latin typeface="Georgia" pitchFamily="34" charset="0"/>
-                <a:ea typeface="Georgia" pitchFamily="34" charset="-122"/>
-                <a:cs typeface="Georgia" pitchFamily="34" charset="-120"/>
-              </a:rPr>
-              <a:t>The project is complete; these scope limits and follow-up directions define what this report does and does not claim.</a:t>
-            </a:r>
-            <a:endParaRPr lang="en-US" sz="1750" dirty="0"/>
-          </a:p>
-        </p:txBody>
-      </p:sp>
-      <p:sp>
-        <p:nvSpPr>
-          <p:cNvPr id="8" name="Shape 6"/>
-          <p:cNvSpPr/>
-          <p:nvPr/>
-        </p:nvSpPr>
-        <p:spPr>
-          <a:xfrm>
-            <a:off x="749808" y="1389888"/>
-            <a:ext cx="2697480" cy="1024128"/>
+              <a:rPr lang="en-US" sz="900" i="1" dirty="0">
+                <a:solidFill>
+                  <a:srgbClr val="667085"/>
+                </a:solidFill>
+                <a:latin typeface="Times New Roman" pitchFamily="34" charset="0"/>
+                <a:ea typeface="Times New Roman" pitchFamily="34" charset="-122"/>
+                <a:cs typeface="Times New Roman" pitchFamily="34" charset="-120"/>
+              </a:rPr>
+              <a:t>Observed shard-level score shift for GraphEraser on Cora/GCN.</a:t>
+            </a:r>
+            <a:endParaRPr lang="en-US" sz="900" dirty="0"/>
+          </a:p>
+        </p:txBody>
+      </p:sp>
+      <p:sp>
+        <p:nvSpPr>
+          <p:cNvPr id="9" name="Shape 6"/>
+          <p:cNvSpPr/>
+          <p:nvPr/>
+        </p:nvSpPr>
+        <p:spPr>
+          <a:xfrm>
+            <a:off x="5669280" y="1005840"/>
+            <a:ext cx="2697480" cy="1051560"/>
           </a:xfrm>
           <a:prstGeom prst="roundRect">
             <a:avLst>
-              <a:gd name="adj" fmla="val 4464"/>
+              <a:gd name="adj" fmla="val 4348"/>
+            </a:avLst>
+          </a:prstGeom>
+          <a:solidFill>
+            <a:srgbClr val="E8EEF5"/>
+          </a:solidFill>
+          <a:ln w="13970">
+            <a:solidFill>
+              <a:srgbClr val="E8EEF5"/>
+            </a:solidFill>
+            <a:prstDash val="solid"/>
+          </a:ln>
+        </p:spPr>
+        <p:txBody>
+          <a:bodyPr/>
+          <a:lstStyle/>
+          <a:p>
+            <a:endParaRPr lang="zh-CN" altLang="en-US"/>
+          </a:p>
+        </p:txBody>
+      </p:sp>
+      <p:sp>
+        <p:nvSpPr>
+          <p:cNvPr id="10" name="Text 7"/>
+          <p:cNvSpPr/>
+          <p:nvPr/>
+        </p:nvSpPr>
+        <p:spPr>
+          <a:xfrm>
+            <a:off x="5806440" y="1170432"/>
+            <a:ext cx="2423160" cy="182880"/>
+          </a:xfrm>
+          <a:prstGeom prst="rect">
+            <a:avLst/>
+          </a:prstGeom>
+          <a:noFill/>
+          <a:ln/>
+        </p:spPr>
+        <p:txBody>
+          <a:bodyPr wrap="square" lIns="0" tIns="0" rIns="0" bIns="0" rtlCol="0" anchor="ctr"/>
+          <a:lstStyle/>
+          <a:p>
+            <a:pPr marL="0" indent="0">
+              <a:buNone/>
+            </a:pPr>
+            <a:r>
+              <a:rPr lang="en-US" sz="1700" b="1" dirty="0">
+                <a:solidFill>
+                  <a:srgbClr val="223A5E"/>
+                </a:solidFill>
+                <a:latin typeface="Times New Roman" pitchFamily="34" charset="0"/>
+                <a:ea typeface="Times New Roman" pitchFamily="34" charset="-122"/>
+                <a:cs typeface="Times New Roman" pitchFamily="34" charset="-120"/>
+              </a:rPr>
+              <a:t>Observed pattern</a:t>
+            </a:r>
+            <a:endParaRPr lang="en-US" sz="1700" dirty="0"/>
+          </a:p>
+        </p:txBody>
+      </p:sp>
+      <p:sp>
+        <p:nvSpPr>
+          <p:cNvPr id="11" name="Text 8"/>
+          <p:cNvSpPr/>
+          <p:nvPr/>
+        </p:nvSpPr>
+        <p:spPr>
+          <a:xfrm>
+            <a:off x="5806440" y="1417320"/>
+            <a:ext cx="2423160" cy="548640"/>
+          </a:xfrm>
+          <a:prstGeom prst="rect">
+            <a:avLst/>
+          </a:prstGeom>
+          <a:noFill/>
+          <a:ln/>
+        </p:spPr>
+        <p:txBody>
+          <a:bodyPr wrap="square" lIns="0" tIns="0" rIns="0" bIns="0" rtlCol="0" anchor="ctr">
+            <a:normAutofit/>
+          </a:bodyPr>
+          <a:lstStyle/>
+          <a:p>
+            <a:pPr marL="0" indent="0">
+              <a:buNone/>
+            </a:pPr>
+            <a:r>
+              <a:rPr lang="en-US" sz="1220" dirty="0">
+                <a:solidFill>
+                  <a:srgbClr val="1E2630"/>
+                </a:solidFill>
+                <a:latin typeface="Times New Roman" pitchFamily="34" charset="0"/>
+                <a:ea typeface="Times New Roman" pitchFamily="34" charset="-122"/>
+                <a:cs typeface="Times New Roman" pitchFamily="34" charset="-120"/>
+              </a:rPr>
+              <a:t>After-unlearning scores shift upward across the tested strategies, which is evidence for a shard protection effect in these settings.</a:t>
+            </a:r>
+            <a:endParaRPr lang="en-US" sz="1220" dirty="0"/>
+          </a:p>
+        </p:txBody>
+      </p:sp>
+      <p:sp>
+        <p:nvSpPr>
+          <p:cNvPr id="12" name="Shape 9"/>
+          <p:cNvSpPr/>
+          <p:nvPr/>
+        </p:nvSpPr>
+        <p:spPr>
+          <a:xfrm>
+            <a:off x="5669280" y="2148840"/>
+            <a:ext cx="2697480" cy="1051560"/>
+          </a:xfrm>
+          <a:prstGeom prst="roundRect">
+            <a:avLst>
+              <a:gd name="adj" fmla="val 4348"/>
             </a:avLst>
           </a:prstGeom>
           <a:solidFill>
@@ -3891,13 +4439,13 @@
       </p:sp>
       <p:sp>
         <p:nvSpPr>
-          <p:cNvPr id="9" name="Text 7"/>
-          <p:cNvSpPr/>
-          <p:nvPr/>
-        </p:nvSpPr>
-        <p:spPr>
-          <a:xfrm>
-            <a:off x="886968" y="1481328"/>
+          <p:cNvPr id="13" name="Text 10"/>
+          <p:cNvSpPr/>
+          <p:nvPr/>
+        </p:nvSpPr>
+        <p:spPr>
+          <a:xfrm>
+            <a:off x="5806440" y="2313432"/>
             <a:ext cx="2423160" cy="182880"/>
           </a:xfrm>
           <a:prstGeom prst="rect">
@@ -3918,11 +4466,11 @@
                 <a:solidFill>
                   <a:srgbClr val="223A5E"/>
                 </a:solidFill>
-                <a:latin typeface="Georgia" pitchFamily="34" charset="0"/>
-                <a:ea typeface="Georgia" pitchFamily="34" charset="-122"/>
-                <a:cs typeface="Georgia" pitchFamily="34" charset="-120"/>
-              </a:rPr>
-              <a:t>Limitation 1</a:t>
+                <a:latin typeface="Times New Roman" pitchFamily="34" charset="0"/>
+                <a:ea typeface="Times New Roman" pitchFamily="34" charset="-122"/>
+                <a:cs typeface="Times New Roman" pitchFamily="34" charset="-120"/>
+              </a:rPr>
+              <a:t>Why it matters</a:t>
             </a:r>
             <a:endParaRPr lang="en-US" sz="1700" dirty="0"/>
           </a:p>
@@ -3930,14 +4478,14 @@
       </p:sp>
       <p:sp>
         <p:nvSpPr>
-          <p:cNvPr id="10" name="Text 8"/>
-          <p:cNvSpPr/>
-          <p:nvPr/>
-        </p:nvSpPr>
-        <p:spPr>
-          <a:xfrm>
-            <a:off x="886968" y="1728216"/>
-            <a:ext cx="2423160" cy="594360"/>
+          <p:cNvPr id="14" name="Text 11"/>
+          <p:cNvSpPr/>
+          <p:nvPr/>
+        </p:nvSpPr>
+        <p:spPr>
+          <a:xfrm>
+            <a:off x="5806440" y="2560320"/>
+            <a:ext cx="2423160" cy="548640"/>
           </a:xfrm>
           <a:prstGeom prst="rect">
             <a:avLst/>
@@ -3959,11 +4507,11 @@
                 <a:solidFill>
                   <a:srgbClr val="1E2630"/>
                 </a:solidFill>
-                <a:latin typeface="Calibri" pitchFamily="34" charset="0"/>
-                <a:ea typeface="Calibri" pitchFamily="34" charset="-122"/>
-                <a:cs typeface="Calibri" pitchFamily="34" charset="-120"/>
-              </a:rPr>
-              <a:t>Evidence is concentrated on the tested citation benchmarks and backbones.</a:t>
+                <a:latin typeface="Times New Roman" pitchFamily="34" charset="0"/>
+                <a:ea typeface="Times New Roman" pitchFamily="34" charset="-122"/>
+                <a:cs typeface="Times New Roman" pitchFamily="34" charset="-120"/>
+              </a:rPr>
+              <a:t>This is why raw utility drop alone is not the right cross-family metric here; the k=5 relative baseline is the cleaner comparison lens.</a:t>
             </a:r>
             <a:endParaRPr lang="en-US" sz="1220" dirty="0"/>
           </a:p>
@@ -3971,26 +4519,26 @@
       </p:sp>
       <p:sp>
         <p:nvSpPr>
-          <p:cNvPr id="11" name="Shape 9"/>
-          <p:cNvSpPr/>
-          <p:nvPr/>
-        </p:nvSpPr>
-        <p:spPr>
-          <a:xfrm>
-            <a:off x="749808" y="2688336"/>
-            <a:ext cx="2697480" cy="1024128"/>
+          <p:cNvPr id="15" name="Shape 12"/>
+          <p:cNvSpPr/>
+          <p:nvPr/>
+        </p:nvSpPr>
+        <p:spPr>
+          <a:xfrm>
+            <a:off x="5669280" y="3291840"/>
+            <a:ext cx="2697480" cy="960120"/>
           </a:xfrm>
           <a:prstGeom prst="roundRect">
             <a:avLst>
-              <a:gd name="adj" fmla="val 4464"/>
+              <a:gd name="adj" fmla="val 4762"/>
             </a:avLst>
           </a:prstGeom>
           <a:solidFill>
-            <a:srgbClr val="FFFFFF"/>
+            <a:srgbClr val="A6404B"/>
           </a:solidFill>
           <a:ln w="13970">
             <a:solidFill>
-              <a:srgbClr val="D9DEE7"/>
+              <a:srgbClr val="A6404B"/>
             </a:solidFill>
             <a:prstDash val="solid"/>
           </a:ln>
@@ -4005,13 +4553,13 @@
       </p:sp>
       <p:sp>
         <p:nvSpPr>
-          <p:cNvPr id="12" name="Text 10"/>
-          <p:cNvSpPr/>
-          <p:nvPr/>
-        </p:nvSpPr>
-        <p:spPr>
-          <a:xfrm>
-            <a:off x="886968" y="2779776"/>
+          <p:cNvPr id="16" name="Text 13"/>
+          <p:cNvSpPr/>
+          <p:nvPr/>
+        </p:nvSpPr>
+        <p:spPr>
+          <a:xfrm>
+            <a:off x="5806440" y="3456432"/>
             <a:ext cx="2423160" cy="182880"/>
           </a:xfrm>
           <a:prstGeom prst="rect">
@@ -4030,13 +4578,13 @@
             <a:r>
               <a:rPr lang="en-US" sz="1700" b="1" dirty="0">
                 <a:solidFill>
-                  <a:srgbClr val="223A5E"/>
-                </a:solidFill>
-                <a:latin typeface="Georgia" pitchFamily="34" charset="0"/>
-                <a:ea typeface="Georgia" pitchFamily="34" charset="-122"/>
-                <a:cs typeface="Georgia" pitchFamily="34" charset="-120"/>
-              </a:rPr>
-              <a:t>Limitation 2</a:t>
+                  <a:srgbClr val="FFFFFF"/>
+                </a:solidFill>
+                <a:latin typeface="Times New Roman" pitchFamily="34" charset="0"/>
+                <a:ea typeface="Times New Roman" pitchFamily="34" charset="-122"/>
+                <a:cs typeface="Times New Roman" pitchFamily="34" charset="-120"/>
+              </a:rPr>
+              <a:t>Caution</a:t>
             </a:r>
             <a:endParaRPr lang="en-US" sz="1700" dirty="0"/>
           </a:p>
@@ -4044,14 +4592,14 @@
       </p:sp>
       <p:sp>
         <p:nvSpPr>
-          <p:cNvPr id="13" name="Text 11"/>
-          <p:cNvSpPr/>
-          <p:nvPr/>
-        </p:nvSpPr>
-        <p:spPr>
-          <a:xfrm>
-            <a:off x="886968" y="3026664"/>
-            <a:ext cx="2423160" cy="594360"/>
+          <p:cNvPr id="17" name="Text 14"/>
+          <p:cNvSpPr/>
+          <p:nvPr/>
+        </p:nvSpPr>
+        <p:spPr>
+          <a:xfrm>
+            <a:off x="5806440" y="3703320"/>
+            <a:ext cx="2423160" cy="457200"/>
           </a:xfrm>
           <a:prstGeom prst="rect">
             <a:avLst/>
@@ -4071,261 +4619,64 @@
             <a:r>
               <a:rPr lang="en-US" sz="1220" dirty="0">
                 <a:solidFill>
-                  <a:srgbClr val="1E2630"/>
-                </a:solidFill>
-                <a:latin typeface="Calibri" pitchFamily="34" charset="0"/>
-                <a:ea typeface="Calibri" pitchFamily="34" charset="-122"/>
-                <a:cs typeface="Calibri" pitchFamily="34" charset="-120"/>
-              </a:rPr>
-              <a:t>The mechanism-level explanation for GNNDelete fragility is still incomplete.</a:t>
+                  <a:srgbClr val="FFFFFF"/>
+                </a:solidFill>
+                <a:latin typeface="Times New Roman" pitchFamily="34" charset="0"/>
+                <a:ea typeface="Times New Roman" pitchFamily="34" charset="-122"/>
+                <a:cs typeface="Times New Roman" pitchFamily="34" charset="-120"/>
+              </a:rPr>
+              <a:t>This remains setting-specific evidence, not a claim of universal robustness.</a:t>
             </a:r>
             <a:endParaRPr lang="en-US" sz="1220" dirty="0"/>
           </a:p>
         </p:txBody>
       </p:sp>
-      <p:sp>
-        <p:nvSpPr>
-          <p:cNvPr id="14" name="Shape 12"/>
-          <p:cNvSpPr/>
-          <p:nvPr/>
-        </p:nvSpPr>
-        <p:spPr>
-          <a:xfrm>
-            <a:off x="3703320" y="1389888"/>
-            <a:ext cx="2697480" cy="1024128"/>
-          </a:xfrm>
-          <a:prstGeom prst="roundRect">
-            <a:avLst>
-              <a:gd name="adj" fmla="val 4464"/>
-            </a:avLst>
-          </a:prstGeom>
-          <a:solidFill>
-            <a:srgbClr val="FFFFFF"/>
-          </a:solidFill>
-          <a:ln w="13970">
-            <a:solidFill>
-              <a:srgbClr val="D9DEE7"/>
-            </a:solidFill>
-            <a:prstDash val="solid"/>
-          </a:ln>
-        </p:spPr>
-        <p:txBody>
-          <a:bodyPr/>
-          <a:lstStyle/>
-          <a:p>
-            <a:endParaRPr lang="zh-CN" altLang="en-US"/>
-          </a:p>
-        </p:txBody>
-      </p:sp>
-      <p:sp>
-        <p:nvSpPr>
-          <p:cNvPr id="15" name="Text 13"/>
-          <p:cNvSpPr/>
-          <p:nvPr/>
-        </p:nvSpPr>
-        <p:spPr>
-          <a:xfrm>
-            <a:off x="3840480" y="1481328"/>
-            <a:ext cx="2423160" cy="182880"/>
-          </a:xfrm>
-          <a:prstGeom prst="rect">
-            <a:avLst/>
-          </a:prstGeom>
-          <a:noFill/>
-          <a:ln/>
-        </p:spPr>
-        <p:txBody>
-          <a:bodyPr wrap="square" lIns="0" tIns="0" rIns="0" bIns="0" rtlCol="0" anchor="ctr"/>
-          <a:lstStyle/>
-          <a:p>
-            <a:pPr marL="0" indent="0">
-              <a:buNone/>
-            </a:pPr>
-            <a:r>
-              <a:rPr lang="en-US" sz="1700" b="1" dirty="0">
-                <a:solidFill>
-                  <a:srgbClr val="223A5E"/>
-                </a:solidFill>
-                <a:latin typeface="Georgia" pitchFamily="34" charset="0"/>
-                <a:ea typeface="Georgia" pitchFamily="34" charset="-122"/>
-                <a:cs typeface="Georgia" pitchFamily="34" charset="-120"/>
-              </a:rPr>
-              <a:t>Future work 1</a:t>
-            </a:r>
-            <a:endParaRPr lang="en-US" sz="1700" dirty="0"/>
-          </a:p>
-        </p:txBody>
-      </p:sp>
-      <p:sp>
-        <p:nvSpPr>
-          <p:cNvPr id="16" name="Text 14"/>
-          <p:cNvSpPr/>
-          <p:nvPr/>
-        </p:nvSpPr>
-        <p:spPr>
-          <a:xfrm>
-            <a:off x="3840480" y="1728216"/>
-            <a:ext cx="2423160" cy="594360"/>
-          </a:xfrm>
-          <a:prstGeom prst="rect">
-            <a:avLst/>
-          </a:prstGeom>
-          <a:noFill/>
-          <a:ln/>
-        </p:spPr>
-        <p:txBody>
-          <a:bodyPr wrap="square" lIns="0" tIns="0" rIns="0" bIns="0" rtlCol="0" anchor="ctr">
-            <a:normAutofit/>
-          </a:bodyPr>
-          <a:lstStyle/>
-          <a:p>
-            <a:pPr marL="0" indent="0">
-              <a:buNone/>
-            </a:pPr>
-            <a:r>
-              <a:rPr lang="en-US" sz="1220" dirty="0">
-                <a:solidFill>
-                  <a:srgbClr val="1E2630"/>
-                </a:solidFill>
-                <a:latin typeface="Calibri" pitchFamily="34" charset="0"/>
-                <a:ea typeface="Calibri" pitchFamily="34" charset="-122"/>
-                <a:cs typeface="Calibri" pitchFamily="34" charset="-120"/>
-              </a:rPr>
-              <a:t>Validate the same pattern on larger graph benchmarks such as PubMed.</a:t>
-            </a:r>
-            <a:endParaRPr lang="en-US" sz="1220" dirty="0"/>
-          </a:p>
-        </p:txBody>
-      </p:sp>
-      <p:sp>
-        <p:nvSpPr>
-          <p:cNvPr id="17" name="Shape 15"/>
-          <p:cNvSpPr/>
-          <p:nvPr/>
-        </p:nvSpPr>
-        <p:spPr>
-          <a:xfrm>
-            <a:off x="3703320" y="2688336"/>
-            <a:ext cx="2697480" cy="1024128"/>
-          </a:xfrm>
-          <a:prstGeom prst="roundRect">
-            <a:avLst>
-              <a:gd name="adj" fmla="val 4464"/>
-            </a:avLst>
-          </a:prstGeom>
-          <a:solidFill>
-            <a:srgbClr val="FFFFFF"/>
-          </a:solidFill>
-          <a:ln w="13970">
-            <a:solidFill>
-              <a:srgbClr val="D9DEE7"/>
-            </a:solidFill>
-            <a:prstDash val="solid"/>
-          </a:ln>
-        </p:spPr>
-        <p:txBody>
-          <a:bodyPr/>
-          <a:lstStyle/>
-          <a:p>
-            <a:endParaRPr lang="zh-CN" altLang="en-US"/>
-          </a:p>
-        </p:txBody>
-      </p:sp>
-      <p:sp>
-        <p:nvSpPr>
-          <p:cNvPr id="18" name="Text 16"/>
-          <p:cNvSpPr/>
-          <p:nvPr/>
-        </p:nvSpPr>
-        <p:spPr>
-          <a:xfrm>
-            <a:off x="3840480" y="2779776"/>
-            <a:ext cx="2423160" cy="182880"/>
-          </a:xfrm>
-          <a:prstGeom prst="rect">
-            <a:avLst/>
-          </a:prstGeom>
-          <a:noFill/>
-          <a:ln/>
-        </p:spPr>
-        <p:txBody>
-          <a:bodyPr wrap="square" lIns="0" tIns="0" rIns="0" bIns="0" rtlCol="0" anchor="ctr"/>
-          <a:lstStyle/>
-          <a:p>
-            <a:pPr marL="0" indent="0">
-              <a:buNone/>
-            </a:pPr>
-            <a:r>
-              <a:rPr lang="en-US" sz="1700" b="1" dirty="0">
-                <a:solidFill>
-                  <a:srgbClr val="223A5E"/>
-                </a:solidFill>
-                <a:latin typeface="Georgia" pitchFamily="34" charset="0"/>
-                <a:ea typeface="Georgia" pitchFamily="34" charset="-122"/>
-                <a:cs typeface="Georgia" pitchFamily="34" charset="-120"/>
-              </a:rPr>
-              <a:t>Future work 2</a:t>
-            </a:r>
-            <a:endParaRPr lang="en-US" sz="1700" dirty="0"/>
-          </a:p>
-        </p:txBody>
-      </p:sp>
-      <p:sp>
-        <p:nvSpPr>
-          <p:cNvPr id="19" name="Text 17"/>
-          <p:cNvSpPr/>
-          <p:nvPr/>
-        </p:nvSpPr>
-        <p:spPr>
-          <a:xfrm>
-            <a:off x="3840480" y="3026664"/>
-            <a:ext cx="2423160" cy="594360"/>
-          </a:xfrm>
-          <a:prstGeom prst="rect">
-            <a:avLst/>
-          </a:prstGeom>
-          <a:noFill/>
-          <a:ln/>
-        </p:spPr>
-        <p:txBody>
-          <a:bodyPr wrap="square" lIns="0" tIns="0" rIns="0" bIns="0" rtlCol="0" anchor="ctr">
-            <a:normAutofit/>
-          </a:bodyPr>
-          <a:lstStyle/>
-          <a:p>
-            <a:pPr marL="0" indent="0">
-              <a:buNone/>
-            </a:pPr>
-            <a:r>
-              <a:rPr lang="en-US" sz="1220" dirty="0">
-                <a:solidFill>
-                  <a:srgbClr val="1E2630"/>
-                </a:solidFill>
-                <a:latin typeface="Calibri" pitchFamily="34" charset="0"/>
-                <a:ea typeface="Calibri" pitchFamily="34" charset="-122"/>
-                <a:cs typeface="Calibri" pitchFamily="34" charset="-120"/>
-              </a:rPr>
-              <a:t>Add targeted ablations that explain when and why GNNDelete fails.</a:t>
-            </a:r>
-            <a:endParaRPr lang="en-US" sz="1220" dirty="0"/>
-          </a:p>
-        </p:txBody>
-      </p:sp>
-      <p:sp>
-        <p:nvSpPr>
-          <p:cNvPr id="20" name="Shape 18"/>
-          <p:cNvSpPr/>
-          <p:nvPr/>
-        </p:nvSpPr>
-        <p:spPr>
-          <a:xfrm>
-            <a:off x="6510528" y="1792224"/>
-            <a:ext cx="1783080" cy="1417320"/>
-          </a:xfrm>
-          <a:prstGeom prst="roundRect">
-            <a:avLst>
-              <a:gd name="adj" fmla="val 3226"/>
-            </a:avLst>
+    </p:spTree>
+  </p:cSld>
+  <p:clrMapOvr>
+    <a:masterClrMapping/>
+  </p:clrMapOvr>
+</p:sld>
+</file>
+
+<file path=ppt/slides/slide13.xml><?xml version="1.0" encoding="utf-8"?>
+<p:sld xmlns:a="http://schemas.openxmlformats.org/drawingml/2006/main" xmlns:r="http://schemas.openxmlformats.org/officeDocument/2006/relationships" xmlns:p="http://schemas.openxmlformats.org/presentationml/2006/main">
+  <p:cSld name="Slide 13">
+    <p:bg>
+      <p:bgPr>
+        <a:solidFill>
+          <a:srgbClr val="FFFFFF"/>
+        </a:solidFill>
+        <a:effectLst/>
+      </p:bgPr>
+    </p:bg>
+    <p:spTree>
+      <p:nvGrpSpPr>
+        <p:cNvPr id="1" name=""/>
+        <p:cNvGrpSpPr/>
+        <p:nvPr/>
+      </p:nvGrpSpPr>
+      <p:grpSpPr>
+        <a:xfrm>
+          <a:off x="0" y="0"/>
+          <a:ext cx="0" cy="0"/>
+          <a:chOff x="0" y="0"/>
+          <a:chExt cx="0" cy="0"/>
+        </a:xfrm>
+      </p:grpSpPr>
+      <p:sp>
+        <p:nvSpPr>
+          <p:cNvPr id="2" name="Shape 0"/>
+          <p:cNvSpPr/>
+          <p:nvPr/>
+        </p:nvSpPr>
+        <p:spPr>
+          <a:xfrm>
+            <a:off x="0" y="0"/>
+            <a:ext cx="9144000" cy="530352"/>
+          </a:xfrm>
+          <a:prstGeom prst="rect">
+            <a:avLst/>
           </a:prstGeom>
           <a:solidFill>
             <a:srgbClr val="223A5E"/>
@@ -4349,14 +4700,14 @@
       </p:sp>
       <p:sp>
         <p:nvSpPr>
-          <p:cNvPr id="21" name="Text 19"/>
-          <p:cNvSpPr/>
-          <p:nvPr/>
-        </p:nvSpPr>
-        <p:spPr>
-          <a:xfrm>
-            <a:off x="6656832" y="1901952"/>
-            <a:ext cx="1481328" cy="164592"/>
+          <p:cNvPr id="3" name="Text 1"/>
+          <p:cNvSpPr/>
+          <p:nvPr/>
+        </p:nvSpPr>
+        <p:spPr>
+          <a:xfrm>
+            <a:off x="502920" y="100584"/>
+            <a:ext cx="6583680" cy="219456"/>
           </a:xfrm>
           <a:prstGeom prst="rect">
             <a:avLst/>
@@ -4372,30 +4723,346 @@
               <a:buNone/>
             </a:pPr>
             <a:r>
-              <a:rPr lang="en-US" sz="1380" b="1" dirty="0">
+              <a:rPr lang="en-US" sz="2400" b="1" dirty="0">
+                <a:solidFill>
+                  <a:srgbClr val="FFFFFF"/>
+                </a:solidFill>
+                <a:latin typeface="Times New Roman" pitchFamily="34" charset="0"/>
+                <a:ea typeface="Times New Roman" pitchFamily="34" charset="-122"/>
+                <a:cs typeface="Times New Roman" pitchFamily="34" charset="-120"/>
+              </a:rPr>
+              <a:t>Statistical Support And Effect Size</a:t>
+            </a:r>
+            <a:endParaRPr lang="en-US" sz="2400" dirty="0"/>
+          </a:p>
+        </p:txBody>
+      </p:sp>
+      <p:sp>
+        <p:nvSpPr>
+          <p:cNvPr id="4" name="Text 2"/>
+          <p:cNvSpPr/>
+          <p:nvPr/>
+        </p:nvSpPr>
+        <p:spPr>
+          <a:xfrm>
+            <a:off x="7955280" y="118872"/>
+            <a:ext cx="640080" cy="137160"/>
+          </a:xfrm>
+          <a:prstGeom prst="rect">
+            <a:avLst/>
+          </a:prstGeom>
+          <a:noFill/>
+          <a:ln/>
+        </p:spPr>
+        <p:txBody>
+          <a:bodyPr wrap="square" lIns="0" tIns="0" rIns="0" bIns="0" rtlCol="0" anchor="ctr"/>
+          <a:lstStyle/>
+          <a:p>
+            <a:pPr marL="0" indent="0" algn="r">
+              <a:buNone/>
+            </a:pPr>
+            <a:r>
+              <a:rPr lang="en-US" sz="1000" dirty="0">
                 <a:solidFill>
                   <a:srgbClr val="F7F5F1"/>
                 </a:solidFill>
-                <a:latin typeface="Georgia" pitchFamily="34" charset="0"/>
-                <a:ea typeface="Georgia" pitchFamily="34" charset="-122"/>
-                <a:cs typeface="Georgia" pitchFamily="34" charset="-120"/>
-              </a:rPr>
-              <a:t>Project status</a:t>
-            </a:r>
-            <a:endParaRPr lang="en-US" sz="1380" dirty="0"/>
-          </a:p>
-        </p:txBody>
-      </p:sp>
-      <p:sp>
-        <p:nvSpPr>
-          <p:cNvPr id="22" name="Text 20"/>
-          <p:cNvSpPr/>
-          <p:nvPr/>
-        </p:nvSpPr>
-        <p:spPr>
-          <a:xfrm>
-            <a:off x="6656832" y="2157984"/>
-            <a:ext cx="1481328" cy="868680"/>
+                <a:latin typeface="Times New Roman" pitchFamily="34" charset="0"/>
+                <a:ea typeface="Times New Roman" pitchFamily="34" charset="-122"/>
+                <a:cs typeface="Times New Roman" pitchFamily="34" charset="-120"/>
+              </a:rPr>
+              <a:t>13 / 15</a:t>
+            </a:r>
+            <a:endParaRPr lang="en-US" sz="1000" dirty="0"/>
+          </a:p>
+        </p:txBody>
+      </p:sp>
+      <p:sp>
+        <p:nvSpPr>
+          <p:cNvPr id="5" name="Text 3"/>
+          <p:cNvSpPr/>
+          <p:nvPr/>
+        </p:nvSpPr>
+        <p:spPr>
+          <a:xfrm>
+            <a:off x="502920" y="4736592"/>
+            <a:ext cx="2743200" cy="137160"/>
+          </a:xfrm>
+          <a:prstGeom prst="rect">
+            <a:avLst/>
+          </a:prstGeom>
+          <a:noFill/>
+          <a:ln/>
+        </p:spPr>
+        <p:txBody>
+          <a:bodyPr wrap="square" lIns="0" tIns="0" rIns="0" bIns="0" rtlCol="0" anchor="ctr"/>
+          <a:lstStyle/>
+          <a:p>
+            <a:pPr marL="0" indent="0">
+              <a:buNone/>
+            </a:pPr>
+            <a:r>
+              <a:rPr lang="en-US" sz="900" dirty="0">
+                <a:solidFill>
+                  <a:srgbClr val="667085"/>
+                </a:solidFill>
+                <a:latin typeface="Times New Roman" pitchFamily="34" charset="0"/>
+                <a:ea typeface="Times New Roman" pitchFamily="34" charset="-122"/>
+                <a:cs typeface="Times New Roman" pitchFamily="34" charset="-120"/>
+              </a:rPr>
+              <a:t>EE5003 MSc Project | Liu Chengyu</a:t>
+            </a:r>
+            <a:endParaRPr lang="en-US" sz="900" dirty="0"/>
+          </a:p>
+        </p:txBody>
+      </p:sp>
+      <p:sp>
+        <p:nvSpPr>
+          <p:cNvPr id="6" name="Text 4"/>
+          <p:cNvSpPr/>
+          <p:nvPr/>
+        </p:nvSpPr>
+        <p:spPr>
+          <a:xfrm>
+            <a:off x="5577840" y="4736592"/>
+            <a:ext cx="3017520" cy="137160"/>
+          </a:xfrm>
+          <a:prstGeom prst="rect">
+            <a:avLst/>
+          </a:prstGeom>
+          <a:noFill/>
+          <a:ln/>
+        </p:spPr>
+        <p:txBody>
+          <a:bodyPr wrap="square" lIns="0" tIns="0" rIns="0" bIns="0" rtlCol="0" anchor="ctr"/>
+          <a:lstStyle/>
+          <a:p>
+            <a:pPr marL="0" indent="0" algn="r">
+              <a:buNone/>
+            </a:pPr>
+            <a:r>
+              <a:rPr lang="en-US" sz="900" dirty="0">
+                <a:solidFill>
+                  <a:srgbClr val="667085"/>
+                </a:solidFill>
+                <a:latin typeface="Times New Roman" pitchFamily="34" charset="0"/>
+                <a:ea typeface="Times New Roman" pitchFamily="34" charset="-122"/>
+                <a:cs typeface="Times New Roman" pitchFamily="34" charset="-120"/>
+              </a:rPr>
+              <a:t>Approximate Graph Unlearning Audit</a:t>
+            </a:r>
+            <a:endParaRPr lang="en-US" sz="900" dirty="0"/>
+          </a:p>
+        </p:txBody>
+      </p:sp>
+      <p:pic>
+        <p:nvPicPr>
+          <p:cNvPr id="7" name="Image 0" descr="H:\project\OpenGU\GULib-master\report\0417_5003report\figures\paper_figures\FIG-4a_Significance.png"/>
+          <p:cNvPicPr>
+            <a:picLocks noChangeAspect="1"/>
+          </p:cNvPicPr>
+          <p:nvPr/>
+        </p:nvPicPr>
+        <p:blipFill>
+          <a:blip r:embed="rId3"/>
+          <a:stretch>
+            <a:fillRect/>
+          </a:stretch>
+        </p:blipFill>
+        <p:spPr>
+          <a:xfrm>
+            <a:off x="530352" y="932688"/>
+            <a:ext cx="3794760" cy="2788920"/>
+          </a:xfrm>
+          <a:prstGeom prst="rect">
+            <a:avLst/>
+          </a:prstGeom>
+        </p:spPr>
+      </p:pic>
+      <p:pic>
+        <p:nvPicPr>
+          <p:cNvPr id="8" name="Image 1" descr="H:\project\OpenGU\GULib-master\report\0417_5003report\figures\paper_figures\FIG-4b_Effect.png"/>
+          <p:cNvPicPr>
+            <a:picLocks noChangeAspect="1"/>
+          </p:cNvPicPr>
+          <p:nvPr/>
+        </p:nvPicPr>
+        <p:blipFill>
+          <a:blip r:embed="rId4"/>
+          <a:stretch>
+            <a:fillRect/>
+          </a:stretch>
+        </p:blipFill>
+        <p:spPr>
+          <a:xfrm>
+            <a:off x="4754880" y="932688"/>
+            <a:ext cx="3794760" cy="2788920"/>
+          </a:xfrm>
+          <a:prstGeom prst="rect">
+            <a:avLst/>
+          </a:prstGeom>
+        </p:spPr>
+      </p:pic>
+      <p:sp>
+        <p:nvSpPr>
+          <p:cNvPr id="9" name="Text 5"/>
+          <p:cNvSpPr/>
+          <p:nvPr/>
+        </p:nvSpPr>
+        <p:spPr>
+          <a:xfrm>
+            <a:off x="548640" y="3794760"/>
+            <a:ext cx="3730752" cy="146304"/>
+          </a:xfrm>
+          <a:prstGeom prst="rect">
+            <a:avLst/>
+          </a:prstGeom>
+          <a:noFill/>
+          <a:ln/>
+        </p:spPr>
+        <p:txBody>
+          <a:bodyPr wrap="square" lIns="0" tIns="0" rIns="0" bIns="0" rtlCol="0" anchor="ctr"/>
+          <a:lstStyle/>
+          <a:p>
+            <a:pPr marL="0" indent="0">
+              <a:buNone/>
+            </a:pPr>
+            <a:r>
+              <a:rPr lang="en-US" sz="900" i="1" dirty="0">
+                <a:solidFill>
+                  <a:srgbClr val="667085"/>
+                </a:solidFill>
+                <a:latin typeface="Times New Roman" pitchFamily="34" charset="0"/>
+                <a:ea typeface="Times New Roman" pitchFamily="34" charset="-122"/>
+                <a:cs typeface="Times New Roman" pitchFamily="34" charset="-120"/>
+              </a:rPr>
+              <a:t>Figure 4a. Statistical support against random deletion.</a:t>
+            </a:r>
+            <a:endParaRPr lang="en-US" sz="900" dirty="0"/>
+          </a:p>
+        </p:txBody>
+      </p:sp>
+      <p:sp>
+        <p:nvSpPr>
+          <p:cNvPr id="10" name="Text 6"/>
+          <p:cNvSpPr/>
+          <p:nvPr/>
+        </p:nvSpPr>
+        <p:spPr>
+          <a:xfrm>
+            <a:off x="4773168" y="3794760"/>
+            <a:ext cx="3730752" cy="146304"/>
+          </a:xfrm>
+          <a:prstGeom prst="rect">
+            <a:avLst/>
+          </a:prstGeom>
+          <a:noFill/>
+          <a:ln/>
+        </p:spPr>
+        <p:txBody>
+          <a:bodyPr wrap="square" lIns="0" tIns="0" rIns="0" bIns="0" rtlCol="0" anchor="ctr"/>
+          <a:lstStyle/>
+          <a:p>
+            <a:pPr marL="0" indent="0">
+              <a:buNone/>
+            </a:pPr>
+            <a:r>
+              <a:rPr lang="en-US" sz="900" i="1" dirty="0">
+                <a:solidFill>
+                  <a:srgbClr val="667085"/>
+                </a:solidFill>
+                <a:latin typeface="Times New Roman" pitchFamily="34" charset="0"/>
+                <a:ea typeface="Times New Roman" pitchFamily="34" charset="-122"/>
+                <a:cs typeface="Times New Roman" pitchFamily="34" charset="-120"/>
+              </a:rPr>
+              <a:t>Figure 4b. Effect size beyond random deletion.</a:t>
+            </a:r>
+            <a:endParaRPr lang="en-US" sz="900" dirty="0"/>
+          </a:p>
+        </p:txBody>
+      </p:sp>
+      <p:sp>
+        <p:nvSpPr>
+          <p:cNvPr id="11" name="Shape 7"/>
+          <p:cNvSpPr/>
+          <p:nvPr/>
+        </p:nvSpPr>
+        <p:spPr>
+          <a:xfrm>
+            <a:off x="822960" y="4023360"/>
+            <a:ext cx="3246120" cy="685800"/>
+          </a:xfrm>
+          <a:prstGeom prst="roundRect">
+            <a:avLst>
+              <a:gd name="adj" fmla="val 6667"/>
+            </a:avLst>
+          </a:prstGeom>
+          <a:solidFill>
+            <a:srgbClr val="FFFFFF"/>
+          </a:solidFill>
+          <a:ln w="13970">
+            <a:solidFill>
+              <a:srgbClr val="D9DEE7"/>
+            </a:solidFill>
+            <a:prstDash val="solid"/>
+          </a:ln>
+        </p:spPr>
+        <p:txBody>
+          <a:bodyPr/>
+          <a:lstStyle/>
+          <a:p>
+            <a:endParaRPr lang="zh-CN" altLang="en-US"/>
+          </a:p>
+        </p:txBody>
+      </p:sp>
+      <p:sp>
+        <p:nvSpPr>
+          <p:cNvPr id="12" name="Text 8"/>
+          <p:cNvSpPr/>
+          <p:nvPr/>
+        </p:nvSpPr>
+        <p:spPr>
+          <a:xfrm>
+            <a:off x="960120" y="4187952"/>
+            <a:ext cx="2971800" cy="182880"/>
+          </a:xfrm>
+          <a:prstGeom prst="rect">
+            <a:avLst/>
+          </a:prstGeom>
+          <a:noFill/>
+          <a:ln/>
+        </p:spPr>
+        <p:txBody>
+          <a:bodyPr wrap="square" lIns="0" tIns="0" rIns="0" bIns="0" rtlCol="0" anchor="ctr"/>
+          <a:lstStyle/>
+          <a:p>
+            <a:pPr marL="0" indent="0">
+              <a:buNone/>
+            </a:pPr>
+            <a:r>
+              <a:rPr lang="en-US" sz="1700" b="1" dirty="0">
+                <a:solidFill>
+                  <a:srgbClr val="223A5E"/>
+                </a:solidFill>
+                <a:latin typeface="Times New Roman" pitchFamily="34" charset="0"/>
+                <a:ea typeface="Times New Roman" pitchFamily="34" charset="-122"/>
+                <a:cs typeface="Times New Roman" pitchFamily="34" charset="-120"/>
+              </a:rPr>
+              <a:t>Support</a:t>
+            </a:r>
+            <a:endParaRPr lang="en-US" sz="1700" dirty="0"/>
+          </a:p>
+        </p:txBody>
+      </p:sp>
+      <p:sp>
+        <p:nvSpPr>
+          <p:cNvPr id="13" name="Text 9"/>
+          <p:cNvSpPr/>
+          <p:nvPr/>
+        </p:nvSpPr>
+        <p:spPr>
+          <a:xfrm>
+            <a:off x="960120" y="4434840"/>
+            <a:ext cx="2971800" cy="182880"/>
           </a:xfrm>
           <a:prstGeom prst="rect">
             <a:avLst/>
@@ -4413,34 +5080,131 @@
               <a:buNone/>
             </a:pPr>
             <a:r>
-              <a:rPr lang="en-US" sz="1040" dirty="0">
-                <a:solidFill>
-                  <a:srgbClr val="F7F5F1"/>
-                </a:solidFill>
-                <a:latin typeface="Calibri" pitchFamily="34" charset="0"/>
-                <a:ea typeface="Calibri" pitchFamily="34" charset="-122"/>
-                <a:cs typeface="Calibri" pitchFamily="34" charset="-120"/>
-              </a:rPr>
-              <a:t>Completed MSc project</a:t>
-            </a:r>
-            <a:endParaRPr lang="en-US" sz="1040" dirty="0"/>
-          </a:p>
-          <a:p>
-            <a:pPr marL="0" indent="0">
-              <a:buNone/>
-            </a:pPr>
-            <a:r>
-              <a:rPr lang="en-US" sz="1040" dirty="0">
-                <a:solidFill>
-                  <a:srgbClr val="F7F5F1"/>
-                </a:solidFill>
-                <a:latin typeface="Calibri" pitchFamily="34" charset="0"/>
-                <a:ea typeface="Calibri" pitchFamily="34" charset="-122"/>
-                <a:cs typeface="Calibri" pitchFamily="34" charset="-120"/>
-              </a:rPr>
-              <a:t>Final course submission with a reusable audit workflow.</a:t>
-            </a:r>
-            <a:endParaRPr lang="en-US" sz="1040" dirty="0"/>
+              <a:rPr lang="en-US" sz="1220" dirty="0">
+                <a:solidFill>
+                  <a:srgbClr val="1E2630"/>
+                </a:solidFill>
+                <a:latin typeface="Times New Roman" pitchFamily="34" charset="0"/>
+                <a:ea typeface="Times New Roman" pitchFamily="34" charset="-122"/>
+                <a:cs typeface="Times New Roman" pitchFamily="34" charset="-120"/>
+              </a:rPr>
+              <a:t>Figure 4a asks how strongly the attack-over-random difference is supported.</a:t>
+            </a:r>
+            <a:endParaRPr lang="en-US" sz="1220" dirty="0"/>
+          </a:p>
+        </p:txBody>
+      </p:sp>
+      <p:sp>
+        <p:nvSpPr>
+          <p:cNvPr id="14" name="Shape 10"/>
+          <p:cNvSpPr/>
+          <p:nvPr/>
+        </p:nvSpPr>
+        <p:spPr>
+          <a:xfrm>
+            <a:off x="4983480" y="4023360"/>
+            <a:ext cx="3246120" cy="685800"/>
+          </a:xfrm>
+          <a:prstGeom prst="roundRect">
+            <a:avLst>
+              <a:gd name="adj" fmla="val 6667"/>
+            </a:avLst>
+          </a:prstGeom>
+          <a:solidFill>
+            <a:srgbClr val="E8EEF5"/>
+          </a:solidFill>
+          <a:ln w="13970">
+            <a:solidFill>
+              <a:srgbClr val="E8EEF5"/>
+            </a:solidFill>
+            <a:prstDash val="solid"/>
+          </a:ln>
+        </p:spPr>
+        <p:txBody>
+          <a:bodyPr/>
+          <a:lstStyle/>
+          <a:p>
+            <a:endParaRPr lang="zh-CN" altLang="en-US"/>
+          </a:p>
+        </p:txBody>
+      </p:sp>
+      <p:sp>
+        <p:nvSpPr>
+          <p:cNvPr id="15" name="Text 11"/>
+          <p:cNvSpPr/>
+          <p:nvPr/>
+        </p:nvSpPr>
+        <p:spPr>
+          <a:xfrm>
+            <a:off x="5120640" y="4187952"/>
+            <a:ext cx="2971800" cy="182880"/>
+          </a:xfrm>
+          <a:prstGeom prst="rect">
+            <a:avLst/>
+          </a:prstGeom>
+          <a:noFill/>
+          <a:ln/>
+        </p:spPr>
+        <p:txBody>
+          <a:bodyPr wrap="square" lIns="0" tIns="0" rIns="0" bIns="0" rtlCol="0" anchor="ctr"/>
+          <a:lstStyle/>
+          <a:p>
+            <a:pPr marL="0" indent="0">
+              <a:buNone/>
+            </a:pPr>
+            <a:r>
+              <a:rPr lang="en-US" sz="1700" b="1" dirty="0">
+                <a:solidFill>
+                  <a:srgbClr val="223A5E"/>
+                </a:solidFill>
+                <a:latin typeface="Times New Roman" pitchFamily="34" charset="0"/>
+                <a:ea typeface="Times New Roman" pitchFamily="34" charset="-122"/>
+                <a:cs typeface="Times New Roman" pitchFamily="34" charset="-120"/>
+              </a:rPr>
+              <a:t>Effect</a:t>
+            </a:r>
+            <a:endParaRPr lang="en-US" sz="1700" dirty="0"/>
+          </a:p>
+        </p:txBody>
+      </p:sp>
+      <p:sp>
+        <p:nvSpPr>
+          <p:cNvPr id="16" name="Text 12"/>
+          <p:cNvSpPr/>
+          <p:nvPr/>
+        </p:nvSpPr>
+        <p:spPr>
+          <a:xfrm>
+            <a:off x="5120640" y="4434840"/>
+            <a:ext cx="2971800" cy="182880"/>
+          </a:xfrm>
+          <a:prstGeom prst="rect">
+            <a:avLst/>
+          </a:prstGeom>
+          <a:noFill/>
+          <a:ln/>
+        </p:spPr>
+        <p:txBody>
+          <a:bodyPr wrap="square" lIns="0" tIns="0" rIns="0" bIns="0" rtlCol="0" anchor="ctr">
+            <a:normAutofit/>
+          </a:bodyPr>
+          <a:lstStyle/>
+          <a:p>
+            <a:pPr marL="0" indent="0">
+              <a:buNone/>
+            </a:pPr>
+            <a:r>
+              <a:rPr lang="en-US" sz="1220" dirty="0">
+                <a:solidFill>
+                  <a:srgbClr val="1E2630"/>
+                </a:solidFill>
+                <a:latin typeface="Times New Roman" pitchFamily="34" charset="0"/>
+                <a:ea typeface="Times New Roman" pitchFamily="34" charset="-122"/>
+                <a:cs typeface="Times New Roman" pitchFamily="34" charset="-120"/>
+              </a:rPr>
+              <a:t>Figure 4b asks how large that extra damage is once support is established.</a:t>
+            </a:r>
+            <a:endParaRPr lang="en-US" sz="1220" dirty="0"/>
           </a:p>
         </p:txBody>
       </p:sp>
@@ -4452,9 +5216,860 @@
 </p:sld>
 </file>
 
-<file path=ppt/slides/slide13.xml><?xml version="1.0" encoding="utf-8"?>
+<file path=ppt/slides/slide14.xml><?xml version="1.0" encoding="utf-8"?>
 <p:sld xmlns:a="http://schemas.openxmlformats.org/drawingml/2006/main" xmlns:r="http://schemas.openxmlformats.org/officeDocument/2006/relationships" xmlns:p="http://schemas.openxmlformats.org/presentationml/2006/main">
-  <p:cSld name="Slide 13">
+  <p:cSld name="Slide 14">
+    <p:bg>
+      <p:bgPr>
+        <a:solidFill>
+          <a:srgbClr val="F7F5F1"/>
+        </a:solidFill>
+        <a:effectLst/>
+      </p:bgPr>
+    </p:bg>
+    <p:spTree>
+      <p:nvGrpSpPr>
+        <p:cNvPr id="1" name=""/>
+        <p:cNvGrpSpPr/>
+        <p:nvPr/>
+      </p:nvGrpSpPr>
+      <p:grpSpPr>
+        <a:xfrm>
+          <a:off x="0" y="0"/>
+          <a:ext cx="0" cy="0"/>
+          <a:chOff x="0" y="0"/>
+          <a:chExt cx="0" cy="0"/>
+        </a:xfrm>
+      </p:grpSpPr>
+      <p:sp>
+        <p:nvSpPr>
+          <p:cNvPr id="2" name="Shape 0"/>
+          <p:cNvSpPr/>
+          <p:nvPr/>
+        </p:nvSpPr>
+        <p:spPr>
+          <a:xfrm>
+            <a:off x="0" y="0"/>
+            <a:ext cx="9144000" cy="530352"/>
+          </a:xfrm>
+          <a:prstGeom prst="rect">
+            <a:avLst/>
+          </a:prstGeom>
+          <a:solidFill>
+            <a:srgbClr val="223A5E"/>
+          </a:solidFill>
+          <a:ln w="12700">
+            <a:solidFill>
+              <a:srgbClr val="223A5E">
+                <a:alpha val="0"/>
+              </a:srgbClr>
+            </a:solidFill>
+            <a:prstDash val="solid"/>
+          </a:ln>
+        </p:spPr>
+        <p:txBody>
+          <a:bodyPr/>
+          <a:lstStyle/>
+          <a:p>
+            <a:endParaRPr lang="zh-CN" altLang="en-US"/>
+          </a:p>
+        </p:txBody>
+      </p:sp>
+      <p:sp>
+        <p:nvSpPr>
+          <p:cNvPr id="3" name="Text 1"/>
+          <p:cNvSpPr/>
+          <p:nvPr/>
+        </p:nvSpPr>
+        <p:spPr>
+          <a:xfrm>
+            <a:off x="502920" y="100584"/>
+            <a:ext cx="6583680" cy="219456"/>
+          </a:xfrm>
+          <a:prstGeom prst="rect">
+            <a:avLst/>
+          </a:prstGeom>
+          <a:noFill/>
+          <a:ln/>
+        </p:spPr>
+        <p:txBody>
+          <a:bodyPr wrap="square" lIns="0" tIns="0" rIns="0" bIns="0" rtlCol="0" anchor="ctr"/>
+          <a:lstStyle/>
+          <a:p>
+            <a:pPr marL="0" indent="0">
+              <a:buNone/>
+            </a:pPr>
+            <a:r>
+              <a:rPr lang="en-US" sz="2400" b="1" dirty="0">
+                <a:solidFill>
+                  <a:srgbClr val="FFFFFF"/>
+                </a:solidFill>
+                <a:latin typeface="Times New Roman" pitchFamily="34" charset="0"/>
+                <a:ea typeface="Times New Roman" pitchFamily="34" charset="-122"/>
+                <a:cs typeface="Times New Roman" pitchFamily="34" charset="-120"/>
+              </a:rPr>
+              <a:t>Limitations And Future Work</a:t>
+            </a:r>
+            <a:endParaRPr lang="en-US" sz="2400" dirty="0"/>
+          </a:p>
+        </p:txBody>
+      </p:sp>
+      <p:sp>
+        <p:nvSpPr>
+          <p:cNvPr id="4" name="Text 2"/>
+          <p:cNvSpPr/>
+          <p:nvPr/>
+        </p:nvSpPr>
+        <p:spPr>
+          <a:xfrm>
+            <a:off x="7955280" y="118872"/>
+            <a:ext cx="640080" cy="137160"/>
+          </a:xfrm>
+          <a:prstGeom prst="rect">
+            <a:avLst/>
+          </a:prstGeom>
+          <a:noFill/>
+          <a:ln/>
+        </p:spPr>
+        <p:txBody>
+          <a:bodyPr wrap="square" lIns="0" tIns="0" rIns="0" bIns="0" rtlCol="0" anchor="ctr"/>
+          <a:lstStyle/>
+          <a:p>
+            <a:pPr marL="0" indent="0" algn="r">
+              <a:buNone/>
+            </a:pPr>
+            <a:r>
+              <a:rPr lang="en-US" sz="1000" dirty="0">
+                <a:solidFill>
+                  <a:srgbClr val="F7F5F1"/>
+                </a:solidFill>
+                <a:latin typeface="Times New Roman" pitchFamily="34" charset="0"/>
+                <a:ea typeface="Times New Roman" pitchFamily="34" charset="-122"/>
+                <a:cs typeface="Times New Roman" pitchFamily="34" charset="-120"/>
+              </a:rPr>
+              <a:t>14 / 15</a:t>
+            </a:r>
+            <a:endParaRPr lang="en-US" sz="1000" dirty="0"/>
+          </a:p>
+        </p:txBody>
+      </p:sp>
+      <p:sp>
+        <p:nvSpPr>
+          <p:cNvPr id="5" name="Text 3"/>
+          <p:cNvSpPr/>
+          <p:nvPr/>
+        </p:nvSpPr>
+        <p:spPr>
+          <a:xfrm>
+            <a:off x="502920" y="4736592"/>
+            <a:ext cx="2743200" cy="137160"/>
+          </a:xfrm>
+          <a:prstGeom prst="rect">
+            <a:avLst/>
+          </a:prstGeom>
+          <a:noFill/>
+          <a:ln/>
+        </p:spPr>
+        <p:txBody>
+          <a:bodyPr wrap="square" lIns="0" tIns="0" rIns="0" bIns="0" rtlCol="0" anchor="ctr"/>
+          <a:lstStyle/>
+          <a:p>
+            <a:pPr marL="0" indent="0">
+              <a:buNone/>
+            </a:pPr>
+            <a:r>
+              <a:rPr lang="en-US" sz="900" dirty="0">
+                <a:solidFill>
+                  <a:srgbClr val="667085"/>
+                </a:solidFill>
+                <a:latin typeface="Times New Roman" pitchFamily="34" charset="0"/>
+                <a:ea typeface="Times New Roman" pitchFamily="34" charset="-122"/>
+                <a:cs typeface="Times New Roman" pitchFamily="34" charset="-120"/>
+              </a:rPr>
+              <a:t>EE5003 MSc Project | Liu Chengyu</a:t>
+            </a:r>
+            <a:endParaRPr lang="en-US" sz="900" dirty="0"/>
+          </a:p>
+        </p:txBody>
+      </p:sp>
+      <p:sp>
+        <p:nvSpPr>
+          <p:cNvPr id="6" name="Text 4"/>
+          <p:cNvSpPr/>
+          <p:nvPr/>
+        </p:nvSpPr>
+        <p:spPr>
+          <a:xfrm>
+            <a:off x="5577840" y="4736592"/>
+            <a:ext cx="3017520" cy="137160"/>
+          </a:xfrm>
+          <a:prstGeom prst="rect">
+            <a:avLst/>
+          </a:prstGeom>
+          <a:noFill/>
+          <a:ln/>
+        </p:spPr>
+        <p:txBody>
+          <a:bodyPr wrap="square" lIns="0" tIns="0" rIns="0" bIns="0" rtlCol="0" anchor="ctr"/>
+          <a:lstStyle/>
+          <a:p>
+            <a:pPr marL="0" indent="0" algn="r">
+              <a:buNone/>
+            </a:pPr>
+            <a:r>
+              <a:rPr lang="en-US" sz="900" dirty="0">
+                <a:solidFill>
+                  <a:srgbClr val="667085"/>
+                </a:solidFill>
+                <a:latin typeface="Times New Roman" pitchFamily="34" charset="0"/>
+                <a:ea typeface="Times New Roman" pitchFamily="34" charset="-122"/>
+                <a:cs typeface="Times New Roman" pitchFamily="34" charset="-120"/>
+              </a:rPr>
+              <a:t>Approximate Graph Unlearning Audit</a:t>
+            </a:r>
+            <a:endParaRPr lang="en-US" sz="900" dirty="0"/>
+          </a:p>
+        </p:txBody>
+      </p:sp>
+      <p:sp>
+        <p:nvSpPr>
+          <p:cNvPr id="7" name="Text 5"/>
+          <p:cNvSpPr/>
+          <p:nvPr/>
+        </p:nvSpPr>
+        <p:spPr>
+          <a:xfrm>
+            <a:off x="621792" y="768096"/>
+            <a:ext cx="7498080" cy="228600"/>
+          </a:xfrm>
+          <a:prstGeom prst="rect">
+            <a:avLst/>
+          </a:prstGeom>
+          <a:noFill/>
+          <a:ln/>
+        </p:spPr>
+        <p:txBody>
+          <a:bodyPr wrap="square" lIns="0" tIns="0" rIns="0" bIns="0" rtlCol="0" anchor="ctr"/>
+          <a:lstStyle/>
+          <a:p>
+            <a:pPr marL="0" indent="0">
+              <a:buNone/>
+            </a:pPr>
+            <a:r>
+              <a:rPr lang="en-US" sz="1750" b="1" dirty="0">
+                <a:solidFill>
+                  <a:srgbClr val="223A5E"/>
+                </a:solidFill>
+                <a:latin typeface="Times New Roman" pitchFamily="34" charset="0"/>
+                <a:ea typeface="Times New Roman" pitchFamily="34" charset="-122"/>
+                <a:cs typeface="Times New Roman" pitchFamily="34" charset="-120"/>
+              </a:rPr>
+              <a:t>The project is complete; these scope limits and follow-up directions define what this report does and does not claim.</a:t>
+            </a:r>
+            <a:endParaRPr lang="en-US" sz="1750" dirty="0"/>
+          </a:p>
+        </p:txBody>
+      </p:sp>
+      <p:sp>
+        <p:nvSpPr>
+          <p:cNvPr id="8" name="Shape 6"/>
+          <p:cNvSpPr/>
+          <p:nvPr/>
+        </p:nvSpPr>
+        <p:spPr>
+          <a:xfrm>
+            <a:off x="749808" y="1389888"/>
+            <a:ext cx="2697480" cy="1024128"/>
+          </a:xfrm>
+          <a:prstGeom prst="roundRect">
+            <a:avLst>
+              <a:gd name="adj" fmla="val 4464"/>
+            </a:avLst>
+          </a:prstGeom>
+          <a:solidFill>
+            <a:srgbClr val="FFFFFF"/>
+          </a:solidFill>
+          <a:ln w="13970">
+            <a:solidFill>
+              <a:srgbClr val="D9DEE7"/>
+            </a:solidFill>
+            <a:prstDash val="solid"/>
+          </a:ln>
+        </p:spPr>
+        <p:txBody>
+          <a:bodyPr/>
+          <a:lstStyle/>
+          <a:p>
+            <a:endParaRPr lang="zh-CN" altLang="en-US"/>
+          </a:p>
+        </p:txBody>
+      </p:sp>
+      <p:sp>
+        <p:nvSpPr>
+          <p:cNvPr id="9" name="Text 7"/>
+          <p:cNvSpPr/>
+          <p:nvPr/>
+        </p:nvSpPr>
+        <p:spPr>
+          <a:xfrm>
+            <a:off x="886968" y="1554480"/>
+            <a:ext cx="2423160" cy="182880"/>
+          </a:xfrm>
+          <a:prstGeom prst="rect">
+            <a:avLst/>
+          </a:prstGeom>
+          <a:noFill/>
+          <a:ln/>
+        </p:spPr>
+        <p:txBody>
+          <a:bodyPr wrap="square" lIns="0" tIns="0" rIns="0" bIns="0" rtlCol="0" anchor="ctr"/>
+          <a:lstStyle/>
+          <a:p>
+            <a:pPr marL="0" indent="0">
+              <a:buNone/>
+            </a:pPr>
+            <a:r>
+              <a:rPr lang="en-US" sz="1700" b="1" dirty="0">
+                <a:solidFill>
+                  <a:srgbClr val="223A5E"/>
+                </a:solidFill>
+                <a:latin typeface="Times New Roman" pitchFamily="34" charset="0"/>
+                <a:ea typeface="Times New Roman" pitchFamily="34" charset="-122"/>
+                <a:cs typeface="Times New Roman" pitchFamily="34" charset="-120"/>
+              </a:rPr>
+              <a:t>Limitation 1</a:t>
+            </a:r>
+            <a:endParaRPr lang="en-US" sz="1700" dirty="0"/>
+          </a:p>
+        </p:txBody>
+      </p:sp>
+      <p:sp>
+        <p:nvSpPr>
+          <p:cNvPr id="10" name="Text 8"/>
+          <p:cNvSpPr/>
+          <p:nvPr/>
+        </p:nvSpPr>
+        <p:spPr>
+          <a:xfrm>
+            <a:off x="886968" y="1801368"/>
+            <a:ext cx="2423160" cy="521208"/>
+          </a:xfrm>
+          <a:prstGeom prst="rect">
+            <a:avLst/>
+          </a:prstGeom>
+          <a:noFill/>
+          <a:ln/>
+        </p:spPr>
+        <p:txBody>
+          <a:bodyPr wrap="square" lIns="0" tIns="0" rIns="0" bIns="0" rtlCol="0" anchor="ctr">
+            <a:normAutofit/>
+          </a:bodyPr>
+          <a:lstStyle/>
+          <a:p>
+            <a:pPr marL="0" indent="0">
+              <a:buNone/>
+            </a:pPr>
+            <a:r>
+              <a:rPr lang="en-US" sz="1220" dirty="0">
+                <a:solidFill>
+                  <a:srgbClr val="1E2630"/>
+                </a:solidFill>
+                <a:latin typeface="Times New Roman" pitchFamily="34" charset="0"/>
+                <a:ea typeface="Times New Roman" pitchFamily="34" charset="-122"/>
+                <a:cs typeface="Times New Roman" pitchFamily="34" charset="-120"/>
+              </a:rPr>
+              <a:t>Evidence is concentrated on the tested citation benchmarks and backbones.</a:t>
+            </a:r>
+            <a:endParaRPr lang="en-US" sz="1220" dirty="0"/>
+          </a:p>
+        </p:txBody>
+      </p:sp>
+      <p:sp>
+        <p:nvSpPr>
+          <p:cNvPr id="11" name="Shape 9"/>
+          <p:cNvSpPr/>
+          <p:nvPr/>
+        </p:nvSpPr>
+        <p:spPr>
+          <a:xfrm>
+            <a:off x="749808" y="2688336"/>
+            <a:ext cx="2697480" cy="1024128"/>
+          </a:xfrm>
+          <a:prstGeom prst="roundRect">
+            <a:avLst>
+              <a:gd name="adj" fmla="val 4464"/>
+            </a:avLst>
+          </a:prstGeom>
+          <a:solidFill>
+            <a:srgbClr val="FFFFFF"/>
+          </a:solidFill>
+          <a:ln w="13970">
+            <a:solidFill>
+              <a:srgbClr val="D9DEE7"/>
+            </a:solidFill>
+            <a:prstDash val="solid"/>
+          </a:ln>
+        </p:spPr>
+        <p:txBody>
+          <a:bodyPr/>
+          <a:lstStyle/>
+          <a:p>
+            <a:endParaRPr lang="zh-CN" altLang="en-US"/>
+          </a:p>
+        </p:txBody>
+      </p:sp>
+      <p:sp>
+        <p:nvSpPr>
+          <p:cNvPr id="12" name="Text 10"/>
+          <p:cNvSpPr/>
+          <p:nvPr/>
+        </p:nvSpPr>
+        <p:spPr>
+          <a:xfrm>
+            <a:off x="886968" y="2852928"/>
+            <a:ext cx="2423160" cy="182880"/>
+          </a:xfrm>
+          <a:prstGeom prst="rect">
+            <a:avLst/>
+          </a:prstGeom>
+          <a:noFill/>
+          <a:ln/>
+        </p:spPr>
+        <p:txBody>
+          <a:bodyPr wrap="square" lIns="0" tIns="0" rIns="0" bIns="0" rtlCol="0" anchor="ctr"/>
+          <a:lstStyle/>
+          <a:p>
+            <a:pPr marL="0" indent="0">
+              <a:buNone/>
+            </a:pPr>
+            <a:r>
+              <a:rPr lang="en-US" sz="1700" b="1" dirty="0">
+                <a:solidFill>
+                  <a:srgbClr val="223A5E"/>
+                </a:solidFill>
+                <a:latin typeface="Times New Roman" pitchFamily="34" charset="0"/>
+                <a:ea typeface="Times New Roman" pitchFamily="34" charset="-122"/>
+                <a:cs typeface="Times New Roman" pitchFamily="34" charset="-120"/>
+              </a:rPr>
+              <a:t>Limitation 2</a:t>
+            </a:r>
+            <a:endParaRPr lang="en-US" sz="1700" dirty="0"/>
+          </a:p>
+        </p:txBody>
+      </p:sp>
+      <p:sp>
+        <p:nvSpPr>
+          <p:cNvPr id="13" name="Text 11"/>
+          <p:cNvSpPr/>
+          <p:nvPr/>
+        </p:nvSpPr>
+        <p:spPr>
+          <a:xfrm>
+            <a:off x="886968" y="3099816"/>
+            <a:ext cx="2423160" cy="521208"/>
+          </a:xfrm>
+          <a:prstGeom prst="rect">
+            <a:avLst/>
+          </a:prstGeom>
+          <a:noFill/>
+          <a:ln/>
+        </p:spPr>
+        <p:txBody>
+          <a:bodyPr wrap="square" lIns="0" tIns="0" rIns="0" bIns="0" rtlCol="0" anchor="ctr">
+            <a:normAutofit/>
+          </a:bodyPr>
+          <a:lstStyle/>
+          <a:p>
+            <a:pPr marL="0" indent="0">
+              <a:buNone/>
+            </a:pPr>
+            <a:r>
+              <a:rPr lang="en-US" sz="1220" dirty="0">
+                <a:solidFill>
+                  <a:srgbClr val="1E2630"/>
+                </a:solidFill>
+                <a:latin typeface="Times New Roman" pitchFamily="34" charset="0"/>
+                <a:ea typeface="Times New Roman" pitchFamily="34" charset="-122"/>
+                <a:cs typeface="Times New Roman" pitchFamily="34" charset="-120"/>
+              </a:rPr>
+              <a:t>The mechanism-level explanation for GNNDelete fragility is still incomplete.</a:t>
+            </a:r>
+            <a:endParaRPr lang="en-US" sz="1220" dirty="0"/>
+          </a:p>
+        </p:txBody>
+      </p:sp>
+      <p:sp>
+        <p:nvSpPr>
+          <p:cNvPr id="14" name="Shape 12"/>
+          <p:cNvSpPr/>
+          <p:nvPr/>
+        </p:nvSpPr>
+        <p:spPr>
+          <a:xfrm>
+            <a:off x="3703320" y="1389888"/>
+            <a:ext cx="2697480" cy="1024128"/>
+          </a:xfrm>
+          <a:prstGeom prst="roundRect">
+            <a:avLst>
+              <a:gd name="adj" fmla="val 4464"/>
+            </a:avLst>
+          </a:prstGeom>
+          <a:solidFill>
+            <a:srgbClr val="FFFFFF"/>
+          </a:solidFill>
+          <a:ln w="13970">
+            <a:solidFill>
+              <a:srgbClr val="D9DEE7"/>
+            </a:solidFill>
+            <a:prstDash val="solid"/>
+          </a:ln>
+        </p:spPr>
+        <p:txBody>
+          <a:bodyPr/>
+          <a:lstStyle/>
+          <a:p>
+            <a:endParaRPr lang="zh-CN" altLang="en-US"/>
+          </a:p>
+        </p:txBody>
+      </p:sp>
+      <p:sp>
+        <p:nvSpPr>
+          <p:cNvPr id="15" name="Text 13"/>
+          <p:cNvSpPr/>
+          <p:nvPr/>
+        </p:nvSpPr>
+        <p:spPr>
+          <a:xfrm>
+            <a:off x="3840480" y="1554480"/>
+            <a:ext cx="2423160" cy="182880"/>
+          </a:xfrm>
+          <a:prstGeom prst="rect">
+            <a:avLst/>
+          </a:prstGeom>
+          <a:noFill/>
+          <a:ln/>
+        </p:spPr>
+        <p:txBody>
+          <a:bodyPr wrap="square" lIns="0" tIns="0" rIns="0" bIns="0" rtlCol="0" anchor="ctr"/>
+          <a:lstStyle/>
+          <a:p>
+            <a:pPr marL="0" indent="0">
+              <a:buNone/>
+            </a:pPr>
+            <a:r>
+              <a:rPr lang="en-US" sz="1700" b="1" dirty="0">
+                <a:solidFill>
+                  <a:srgbClr val="223A5E"/>
+                </a:solidFill>
+                <a:latin typeface="Times New Roman" pitchFamily="34" charset="0"/>
+                <a:ea typeface="Times New Roman" pitchFamily="34" charset="-122"/>
+                <a:cs typeface="Times New Roman" pitchFamily="34" charset="-120"/>
+              </a:rPr>
+              <a:t>Future work 1</a:t>
+            </a:r>
+            <a:endParaRPr lang="en-US" sz="1700" dirty="0"/>
+          </a:p>
+        </p:txBody>
+      </p:sp>
+      <p:sp>
+        <p:nvSpPr>
+          <p:cNvPr id="16" name="Text 14"/>
+          <p:cNvSpPr/>
+          <p:nvPr/>
+        </p:nvSpPr>
+        <p:spPr>
+          <a:xfrm>
+            <a:off x="3840480" y="1801368"/>
+            <a:ext cx="2423160" cy="521208"/>
+          </a:xfrm>
+          <a:prstGeom prst="rect">
+            <a:avLst/>
+          </a:prstGeom>
+          <a:noFill/>
+          <a:ln/>
+        </p:spPr>
+        <p:txBody>
+          <a:bodyPr wrap="square" lIns="0" tIns="0" rIns="0" bIns="0" rtlCol="0" anchor="ctr">
+            <a:normAutofit/>
+          </a:bodyPr>
+          <a:lstStyle/>
+          <a:p>
+            <a:pPr marL="0" indent="0">
+              <a:buNone/>
+            </a:pPr>
+            <a:r>
+              <a:rPr lang="en-US" sz="1220" dirty="0">
+                <a:solidFill>
+                  <a:srgbClr val="1E2630"/>
+                </a:solidFill>
+                <a:latin typeface="Times New Roman" pitchFamily="34" charset="0"/>
+                <a:ea typeface="Times New Roman" pitchFamily="34" charset="-122"/>
+                <a:cs typeface="Times New Roman" pitchFamily="34" charset="-120"/>
+              </a:rPr>
+              <a:t>Validate the same pattern on larger graph benchmarks such as PubMed.</a:t>
+            </a:r>
+            <a:endParaRPr lang="en-US" sz="1220" dirty="0"/>
+          </a:p>
+        </p:txBody>
+      </p:sp>
+      <p:sp>
+        <p:nvSpPr>
+          <p:cNvPr id="17" name="Shape 15"/>
+          <p:cNvSpPr/>
+          <p:nvPr/>
+        </p:nvSpPr>
+        <p:spPr>
+          <a:xfrm>
+            <a:off x="3703320" y="2688336"/>
+            <a:ext cx="2697480" cy="1024128"/>
+          </a:xfrm>
+          <a:prstGeom prst="roundRect">
+            <a:avLst>
+              <a:gd name="adj" fmla="val 4464"/>
+            </a:avLst>
+          </a:prstGeom>
+          <a:solidFill>
+            <a:srgbClr val="FFFFFF"/>
+          </a:solidFill>
+          <a:ln w="13970">
+            <a:solidFill>
+              <a:srgbClr val="D9DEE7"/>
+            </a:solidFill>
+            <a:prstDash val="solid"/>
+          </a:ln>
+        </p:spPr>
+        <p:txBody>
+          <a:bodyPr/>
+          <a:lstStyle/>
+          <a:p>
+            <a:endParaRPr lang="zh-CN" altLang="en-US"/>
+          </a:p>
+        </p:txBody>
+      </p:sp>
+      <p:sp>
+        <p:nvSpPr>
+          <p:cNvPr id="18" name="Text 16"/>
+          <p:cNvSpPr/>
+          <p:nvPr/>
+        </p:nvSpPr>
+        <p:spPr>
+          <a:xfrm>
+            <a:off x="3840480" y="2852928"/>
+            <a:ext cx="2423160" cy="182880"/>
+          </a:xfrm>
+          <a:prstGeom prst="rect">
+            <a:avLst/>
+          </a:prstGeom>
+          <a:noFill/>
+          <a:ln/>
+        </p:spPr>
+        <p:txBody>
+          <a:bodyPr wrap="square" lIns="0" tIns="0" rIns="0" bIns="0" rtlCol="0" anchor="ctr"/>
+          <a:lstStyle/>
+          <a:p>
+            <a:pPr marL="0" indent="0">
+              <a:buNone/>
+            </a:pPr>
+            <a:r>
+              <a:rPr lang="en-US" sz="1700" b="1" dirty="0">
+                <a:solidFill>
+                  <a:srgbClr val="223A5E"/>
+                </a:solidFill>
+                <a:latin typeface="Times New Roman" pitchFamily="34" charset="0"/>
+                <a:ea typeface="Times New Roman" pitchFamily="34" charset="-122"/>
+                <a:cs typeface="Times New Roman" pitchFamily="34" charset="-120"/>
+              </a:rPr>
+              <a:t>Future work 2</a:t>
+            </a:r>
+            <a:endParaRPr lang="en-US" sz="1700" dirty="0"/>
+          </a:p>
+        </p:txBody>
+      </p:sp>
+      <p:sp>
+        <p:nvSpPr>
+          <p:cNvPr id="19" name="Text 17"/>
+          <p:cNvSpPr/>
+          <p:nvPr/>
+        </p:nvSpPr>
+        <p:spPr>
+          <a:xfrm>
+            <a:off x="3840480" y="3099816"/>
+            <a:ext cx="2423160" cy="521208"/>
+          </a:xfrm>
+          <a:prstGeom prst="rect">
+            <a:avLst/>
+          </a:prstGeom>
+          <a:noFill/>
+          <a:ln/>
+        </p:spPr>
+        <p:txBody>
+          <a:bodyPr wrap="square" lIns="0" tIns="0" rIns="0" bIns="0" rtlCol="0" anchor="ctr">
+            <a:normAutofit/>
+          </a:bodyPr>
+          <a:lstStyle/>
+          <a:p>
+            <a:pPr marL="0" indent="0">
+              <a:buNone/>
+            </a:pPr>
+            <a:r>
+              <a:rPr lang="en-US" sz="1220" dirty="0">
+                <a:solidFill>
+                  <a:srgbClr val="1E2630"/>
+                </a:solidFill>
+                <a:latin typeface="Times New Roman" pitchFamily="34" charset="0"/>
+                <a:ea typeface="Times New Roman" pitchFamily="34" charset="-122"/>
+                <a:cs typeface="Times New Roman" pitchFamily="34" charset="-120"/>
+              </a:rPr>
+              <a:t>Add targeted ablations that explain when and why GNNDelete fails.</a:t>
+            </a:r>
+            <a:endParaRPr lang="en-US" sz="1220" dirty="0"/>
+          </a:p>
+        </p:txBody>
+      </p:sp>
+      <p:sp>
+        <p:nvSpPr>
+          <p:cNvPr id="20" name="Shape 18"/>
+          <p:cNvSpPr/>
+          <p:nvPr/>
+        </p:nvSpPr>
+        <p:spPr>
+          <a:xfrm>
+            <a:off x="6510528" y="1792224"/>
+            <a:ext cx="1783080" cy="1417320"/>
+          </a:xfrm>
+          <a:prstGeom prst="roundRect">
+            <a:avLst>
+              <a:gd name="adj" fmla="val 3226"/>
+            </a:avLst>
+          </a:prstGeom>
+          <a:solidFill>
+            <a:srgbClr val="223A5E"/>
+          </a:solidFill>
+          <a:ln w="12700">
+            <a:solidFill>
+              <a:srgbClr val="223A5E">
+                <a:alpha val="0"/>
+              </a:srgbClr>
+            </a:solidFill>
+            <a:prstDash val="solid"/>
+          </a:ln>
+        </p:spPr>
+        <p:txBody>
+          <a:bodyPr/>
+          <a:lstStyle/>
+          <a:p>
+            <a:endParaRPr lang="zh-CN" altLang="en-US"/>
+          </a:p>
+        </p:txBody>
+      </p:sp>
+      <p:sp>
+        <p:nvSpPr>
+          <p:cNvPr id="21" name="Text 19"/>
+          <p:cNvSpPr/>
+          <p:nvPr/>
+        </p:nvSpPr>
+        <p:spPr>
+          <a:xfrm>
+            <a:off x="6656832" y="1901952"/>
+            <a:ext cx="1481328" cy="164592"/>
+          </a:xfrm>
+          <a:prstGeom prst="rect">
+            <a:avLst/>
+          </a:prstGeom>
+          <a:noFill/>
+          <a:ln/>
+        </p:spPr>
+        <p:txBody>
+          <a:bodyPr wrap="square" lIns="0" tIns="0" rIns="0" bIns="0" rtlCol="0" anchor="ctr"/>
+          <a:lstStyle/>
+          <a:p>
+            <a:pPr marL="0" indent="0">
+              <a:buNone/>
+            </a:pPr>
+            <a:r>
+              <a:rPr lang="en-US" sz="1380" b="1" dirty="0">
+                <a:solidFill>
+                  <a:srgbClr val="F7F5F1"/>
+                </a:solidFill>
+                <a:latin typeface="Times New Roman" pitchFamily="34" charset="0"/>
+                <a:ea typeface="Times New Roman" pitchFamily="34" charset="-122"/>
+                <a:cs typeface="Times New Roman" pitchFamily="34" charset="-120"/>
+              </a:rPr>
+              <a:t>Project status</a:t>
+            </a:r>
+            <a:endParaRPr lang="en-US" sz="1380" dirty="0"/>
+          </a:p>
+        </p:txBody>
+      </p:sp>
+      <p:sp>
+        <p:nvSpPr>
+          <p:cNvPr id="22" name="Text 20"/>
+          <p:cNvSpPr/>
+          <p:nvPr/>
+        </p:nvSpPr>
+        <p:spPr>
+          <a:xfrm>
+            <a:off x="6656832" y="2157984"/>
+            <a:ext cx="1481328" cy="868680"/>
+          </a:xfrm>
+          <a:prstGeom prst="rect">
+            <a:avLst/>
+          </a:prstGeom>
+          <a:noFill/>
+          <a:ln/>
+        </p:spPr>
+        <p:txBody>
+          <a:bodyPr wrap="square" lIns="0" tIns="0" rIns="0" bIns="0" rtlCol="0" anchor="ctr">
+            <a:normAutofit/>
+          </a:bodyPr>
+          <a:lstStyle/>
+          <a:p>
+            <a:pPr marL="0" indent="0">
+              <a:buNone/>
+            </a:pPr>
+            <a:r>
+              <a:rPr lang="en-US" sz="1040" dirty="0">
+                <a:solidFill>
+                  <a:srgbClr val="F7F5F1"/>
+                </a:solidFill>
+                <a:latin typeface="Times New Roman" pitchFamily="34" charset="0"/>
+                <a:ea typeface="Times New Roman" pitchFamily="34" charset="-122"/>
+                <a:cs typeface="Times New Roman" pitchFamily="34" charset="-120"/>
+              </a:rPr>
+              <a:t>Completed MSc project</a:t>
+            </a:r>
+            <a:endParaRPr lang="en-US" sz="1040" dirty="0"/>
+          </a:p>
+          <a:p>
+            <a:pPr marL="0" indent="0">
+              <a:buNone/>
+            </a:pPr>
+            <a:r>
+              <a:rPr lang="en-US" sz="1040" dirty="0">
+                <a:solidFill>
+                  <a:srgbClr val="F7F5F1"/>
+                </a:solidFill>
+                <a:latin typeface="Times New Roman" pitchFamily="34" charset="0"/>
+                <a:ea typeface="Times New Roman" pitchFamily="34" charset="-122"/>
+                <a:cs typeface="Times New Roman" pitchFamily="34" charset="-120"/>
+              </a:rPr>
+              <a:t>Final course submission with a reusable audit workflow.</a:t>
+            </a:r>
+            <a:endParaRPr lang="en-US" sz="1040" dirty="0"/>
+          </a:p>
+        </p:txBody>
+      </p:sp>
+    </p:spTree>
+  </p:cSld>
+  <p:clrMapOvr>
+    <a:masterClrMapping/>
+  </p:clrMapOvr>
+</p:sld>
+</file>
+
+<file path=ppt/slides/slide15.xml><?xml version="1.0" encoding="utf-8"?>
+<p:sld xmlns:a="http://schemas.openxmlformats.org/drawingml/2006/main" xmlns:r="http://schemas.openxmlformats.org/officeDocument/2006/relationships" xmlns:p="http://schemas.openxmlformats.org/presentationml/2006/main">
+  <p:cSld name="Slide 15">
     <p:bg>
       <p:bgPr>
         <a:solidFill>
@@ -4506,9 +6121,9 @@
                 <a:solidFill>
                   <a:srgbClr val="FFFFFF"/>
                 </a:solidFill>
-                <a:latin typeface="Georgia" pitchFamily="34" charset="0"/>
-                <a:ea typeface="Georgia" pitchFamily="34" charset="-122"/>
-                <a:cs typeface="Georgia" pitchFamily="34" charset="-120"/>
+                <a:latin typeface="Times New Roman" pitchFamily="34" charset="0"/>
+                <a:ea typeface="Times New Roman" pitchFamily="34" charset="-122"/>
+                <a:cs typeface="Times New Roman" pitchFamily="34" charset="-120"/>
               </a:rPr>
               <a:t>Takeaways</a:t>
             </a:r>
@@ -4524,7 +6139,7 @@
         </p:nvSpPr>
         <p:spPr>
           <a:xfrm>
-            <a:off x="777240" y="1325880"/>
+            <a:off x="777240" y="1234440"/>
             <a:ext cx="2331720" cy="2194560"/>
           </a:xfrm>
           <a:prstGeom prst="roundRect">
@@ -4558,7 +6173,7 @@
         </p:nvSpPr>
         <p:spPr>
           <a:xfrm>
-            <a:off x="914400" y="1417320"/>
+            <a:off x="914400" y="1399032"/>
             <a:ext cx="2057400" cy="182880"/>
           </a:xfrm>
           <a:prstGeom prst="rect">
@@ -4577,11 +6192,11 @@
             <a:r>
               <a:rPr lang="en-US" sz="1700" b="1" dirty="0">
                 <a:solidFill>
-                  <a:srgbClr val="16263F"/>
-                </a:solidFill>
-                <a:latin typeface="Georgia" pitchFamily="34" charset="0"/>
-                <a:ea typeface="Georgia" pitchFamily="34" charset="-122"/>
-                <a:cs typeface="Georgia" pitchFamily="34" charset="-120"/>
+                  <a:srgbClr val="223A5E"/>
+                </a:solidFill>
+                <a:latin typeface="Times New Roman" pitchFamily="34" charset="0"/>
+                <a:ea typeface="Times New Roman" pitchFamily="34" charset="-122"/>
+                <a:cs typeface="Times New Roman" pitchFamily="34" charset="-120"/>
               </a:rPr>
               <a:t>1. Auditability matters</a:t>
             </a:r>
@@ -4597,8 +6212,8 @@
         </p:nvSpPr>
         <p:spPr>
           <a:xfrm>
-            <a:off x="914400" y="1664208"/>
-            <a:ext cx="2057400" cy="1764792"/>
+            <a:off x="914400" y="1645920"/>
+            <a:ext cx="2057400" cy="1691640"/>
           </a:xfrm>
           <a:prstGeom prst="rect">
             <a:avLst/>
@@ -4620,9 +6235,9 @@
                 <a:solidFill>
                   <a:srgbClr val="1E2630"/>
                 </a:solidFill>
-                <a:latin typeface="Calibri" pitchFamily="34" charset="0"/>
-                <a:ea typeface="Calibri" pitchFamily="34" charset="-122"/>
-                <a:cs typeface="Calibri" pitchFamily="34" charset="-120"/>
+                <a:latin typeface="Times New Roman" pitchFamily="34" charset="0"/>
+                <a:ea typeface="Times New Roman" pitchFamily="34" charset="-122"/>
+                <a:cs typeface="Times New Roman" pitchFamily="34" charset="-120"/>
               </a:rPr>
               <a:t>Approximate graph unlearning should be evaluated not only for accuracy but also for adversarial deletion robustness.</a:t>
             </a:r>
@@ -4638,7 +6253,7 @@
         </p:nvSpPr>
         <p:spPr>
           <a:xfrm>
-            <a:off x="3401568" y="1325880"/>
+            <a:off x="3401568" y="1234440"/>
             <a:ext cx="2331720" cy="2194560"/>
           </a:xfrm>
           <a:prstGeom prst="roundRect">
@@ -4672,7 +6287,7 @@
         </p:nvSpPr>
         <p:spPr>
           <a:xfrm>
-            <a:off x="3538728" y="1417320"/>
+            <a:off x="3538728" y="1399032"/>
             <a:ext cx="2057400" cy="182880"/>
           </a:xfrm>
           <a:prstGeom prst="rect">
@@ -4691,11 +6306,11 @@
             <a:r>
               <a:rPr lang="en-US" sz="1700" b="1" dirty="0">
                 <a:solidFill>
-                  <a:srgbClr val="A6404B"/>
-                </a:solidFill>
-                <a:latin typeface="Georgia" pitchFamily="34" charset="0"/>
-                <a:ea typeface="Georgia" pitchFamily="34" charset="-122"/>
-                <a:cs typeface="Georgia" pitchFamily="34" charset="-120"/>
+                  <a:srgbClr val="223A5E"/>
+                </a:solidFill>
+                <a:latin typeface="Times New Roman" pitchFamily="34" charset="0"/>
+                <a:ea typeface="Times New Roman" pitchFamily="34" charset="-122"/>
+                <a:cs typeface="Times New Roman" pitchFamily="34" charset="-120"/>
               </a:rPr>
               <a:t>2. Family behavior differs</a:t>
             </a:r>
@@ -4711,8 +6326,8 @@
         </p:nvSpPr>
         <p:spPr>
           <a:xfrm>
-            <a:off x="3538728" y="1664208"/>
-            <a:ext cx="2057400" cy="1764792"/>
+            <a:off x="3538728" y="1645920"/>
+            <a:ext cx="2057400" cy="1691640"/>
           </a:xfrm>
           <a:prstGeom prst="rect">
             <a:avLst/>
@@ -4734,9 +6349,9 @@
                 <a:solidFill>
                   <a:srgbClr val="1E2630"/>
                 </a:solidFill>
-                <a:latin typeface="Calibri" pitchFamily="34" charset="0"/>
-                <a:ea typeface="Calibri" pitchFamily="34" charset="-122"/>
-                <a:cs typeface="Calibri" pitchFamily="34" charset="-120"/>
+                <a:latin typeface="Times New Roman" pitchFamily="34" charset="0"/>
+                <a:ea typeface="Times New Roman" pitchFamily="34" charset="-122"/>
+                <a:cs typeface="Times New Roman" pitchFamily="34" charset="-120"/>
               </a:rPr>
               <a:t>In the tested settings, GNNDelete is most fragile, GIF is comparatively stable, and GraphEraser exhibits shard protection.</a:t>
             </a:r>
@@ -4752,7 +6367,7 @@
         </p:nvSpPr>
         <p:spPr>
           <a:xfrm>
-            <a:off x="6025896" y="1325880"/>
+            <a:off x="6025896" y="1234440"/>
             <a:ext cx="2331720" cy="2194560"/>
           </a:xfrm>
           <a:prstGeom prst="roundRect">
@@ -4761,11 +6376,11 @@
             </a:avLst>
           </a:prstGeom>
           <a:solidFill>
-            <a:srgbClr val="E8EEF5"/>
+            <a:srgbClr val="FFFFFF"/>
           </a:solidFill>
           <a:ln w="13970">
             <a:solidFill>
-              <a:srgbClr val="E8EEF5"/>
+              <a:srgbClr val="D9DEE7"/>
             </a:solidFill>
             <a:prstDash val="solid"/>
           </a:ln>
@@ -4786,7 +6401,7 @@
         </p:nvSpPr>
         <p:spPr>
           <a:xfrm>
-            <a:off x="6163056" y="1417320"/>
+            <a:off x="6163056" y="1399032"/>
             <a:ext cx="2057400" cy="182880"/>
           </a:xfrm>
           <a:prstGeom prst="rect">
@@ -4807,9 +6422,9 @@
                 <a:solidFill>
                   <a:srgbClr val="223A5E"/>
                 </a:solidFill>
-                <a:latin typeface="Georgia" pitchFamily="34" charset="0"/>
-                <a:ea typeface="Georgia" pitchFamily="34" charset="-122"/>
-                <a:cs typeface="Georgia" pitchFamily="34" charset="-120"/>
+                <a:latin typeface="Times New Roman" pitchFamily="34" charset="0"/>
+                <a:ea typeface="Times New Roman" pitchFamily="34" charset="-122"/>
+                <a:cs typeface="Times New Roman" pitchFamily="34" charset="-120"/>
               </a:rPr>
               <a:t>3. Workflow contribution</a:t>
             </a:r>
@@ -4825,8 +6440,8 @@
         </p:nvSpPr>
         <p:spPr>
           <a:xfrm>
-            <a:off x="6163056" y="1664208"/>
-            <a:ext cx="2057400" cy="1764792"/>
+            <a:off x="6163056" y="1645920"/>
+            <a:ext cx="2057400" cy="1691640"/>
           </a:xfrm>
           <a:prstGeom prst="rect">
             <a:avLst/>
@@ -4848,9 +6463,9 @@
                 <a:solidFill>
                   <a:srgbClr val="1E2630"/>
                 </a:solidFill>
-                <a:latin typeface="Calibri" pitchFamily="34" charset="0"/>
-                <a:ea typeface="Calibri" pitchFamily="34" charset="-122"/>
-                <a:cs typeface="Calibri" pitchFamily="34" charset="-120"/>
+                <a:latin typeface="Times New Roman" pitchFamily="34" charset="0"/>
+                <a:ea typeface="Times New Roman" pitchFamily="34" charset="-122"/>
+                <a:cs typeface="Times New Roman" pitchFamily="34" charset="-120"/>
               </a:rPr>
               <a:t>The project contributes a reusable OpenGU-based audit pipeline alongside the findings themselves.</a:t>
             </a:r>
@@ -4866,8 +6481,8 @@
         </p:nvSpPr>
         <p:spPr>
           <a:xfrm>
-            <a:off x="713232" y="4160520"/>
-            <a:ext cx="7772400" cy="274320"/>
+            <a:off x="713232" y="3886200"/>
+            <a:ext cx="7772400" cy="411480"/>
           </a:xfrm>
           <a:prstGeom prst="rect">
             <a:avLst/>
@@ -4883,17 +6498,17 @@
               <a:buNone/>
             </a:pPr>
             <a:r>
-              <a:rPr lang="en-US" sz="2400" b="1" dirty="0">
+              <a:rPr lang="en-US" sz="3200" b="1" dirty="0">
                 <a:solidFill>
                   <a:srgbClr val="FFFFFF"/>
                 </a:solidFill>
-                <a:latin typeface="Georgia" pitchFamily="34" charset="0"/>
-                <a:ea typeface="Georgia" pitchFamily="34" charset="-122"/>
-                <a:cs typeface="Georgia" pitchFamily="34" charset="-120"/>
+                <a:latin typeface="Times New Roman" pitchFamily="34" charset="0"/>
+                <a:ea typeface="Times New Roman" pitchFamily="34" charset="-122"/>
+                <a:cs typeface="Times New Roman" pitchFamily="34" charset="-120"/>
               </a:rPr>
               <a:t>Thank you. Q&amp;A</a:t>
             </a:r>
-            <a:endParaRPr lang="en-US" sz="2400" dirty="0"/>
+            <a:endParaRPr lang="en-US" sz="3200" dirty="0"/>
           </a:p>
         </p:txBody>
       </p:sp>
@@ -4926,360 +6541,11 @@
                 <a:solidFill>
                   <a:srgbClr val="F7F5F1"/>
                 </a:solidFill>
-                <a:latin typeface="Calibri" pitchFamily="34" charset="0"/>
-                <a:ea typeface="Calibri" pitchFamily="34" charset="-122"/>
-                <a:cs typeface="Calibri" pitchFamily="34" charset="-120"/>
+                <a:latin typeface="Times New Roman" pitchFamily="34" charset="0"/>
+                <a:ea typeface="Times New Roman" pitchFamily="34" charset="-122"/>
+                <a:cs typeface="Times New Roman" pitchFamily="34" charset="-120"/>
               </a:rPr>
               <a:t>EE5003 MSc Project | Liu Chengyu</a:t>
-            </a:r>
-            <a:endParaRPr lang="en-US" sz="900" dirty="0"/>
-          </a:p>
-        </p:txBody>
-      </p:sp>
-    </p:spTree>
-  </p:cSld>
-  <p:clrMapOvr>
-    <a:masterClrMapping/>
-  </p:clrMapOvr>
-</p:sld>
-</file>
-
-<file path=ppt/slides/slide14.xml><?xml version="1.0" encoding="utf-8"?>
-<p:sld xmlns:a="http://schemas.openxmlformats.org/drawingml/2006/main" xmlns:r="http://schemas.openxmlformats.org/officeDocument/2006/relationships" xmlns:p="http://schemas.openxmlformats.org/presentationml/2006/main">
-  <p:cSld name="Slide 14">
-    <p:bg>
-      <p:bgPr>
-        <a:solidFill>
-          <a:srgbClr val="FFFFFF"/>
-        </a:solidFill>
-        <a:effectLst/>
-      </p:bgPr>
-    </p:bg>
-    <p:spTree>
-      <p:nvGrpSpPr>
-        <p:cNvPr id="1" name=""/>
-        <p:cNvGrpSpPr/>
-        <p:nvPr/>
-      </p:nvGrpSpPr>
-      <p:grpSpPr>
-        <a:xfrm>
-          <a:off x="0" y="0"/>
-          <a:ext cx="0" cy="0"/>
-          <a:chOff x="0" y="0"/>
-          <a:chExt cx="0" cy="0"/>
-        </a:xfrm>
-      </p:grpSpPr>
-      <p:sp>
-        <p:nvSpPr>
-          <p:cNvPr id="2" name="Shape 0"/>
-          <p:cNvSpPr/>
-          <p:nvPr/>
-        </p:nvSpPr>
-        <p:spPr>
-          <a:xfrm>
-            <a:off x="0" y="0"/>
-            <a:ext cx="9144000" cy="530352"/>
-          </a:xfrm>
-          <a:prstGeom prst="rect">
-            <a:avLst/>
-          </a:prstGeom>
-          <a:solidFill>
-            <a:srgbClr val="223A5E"/>
-          </a:solidFill>
-          <a:ln w="12700">
-            <a:solidFill>
-              <a:srgbClr val="223A5E">
-                <a:alpha val="0"/>
-              </a:srgbClr>
-            </a:solidFill>
-            <a:prstDash val="solid"/>
-          </a:ln>
-        </p:spPr>
-        <p:txBody>
-          <a:bodyPr/>
-          <a:lstStyle/>
-          <a:p>
-            <a:endParaRPr lang="zh-CN" altLang="en-US"/>
-          </a:p>
-        </p:txBody>
-      </p:sp>
-      <p:sp>
-        <p:nvSpPr>
-          <p:cNvPr id="3" name="Text 1"/>
-          <p:cNvSpPr/>
-          <p:nvPr/>
-        </p:nvSpPr>
-        <p:spPr>
-          <a:xfrm>
-            <a:off x="502920" y="100584"/>
-            <a:ext cx="6583680" cy="219456"/>
-          </a:xfrm>
-          <a:prstGeom prst="rect">
-            <a:avLst/>
-          </a:prstGeom>
-          <a:noFill/>
-          <a:ln/>
-        </p:spPr>
-        <p:txBody>
-          <a:bodyPr wrap="square" lIns="0" tIns="0" rIns="0" bIns="0" rtlCol="0" anchor="ctr"/>
-          <a:lstStyle/>
-          <a:p>
-            <a:pPr marL="0" indent="0">
-              <a:buNone/>
-            </a:pPr>
-            <a:r>
-              <a:rPr lang="en-US" sz="2400" b="1" dirty="0">
-                <a:solidFill>
-                  <a:srgbClr val="FFFFFF"/>
-                </a:solidFill>
-                <a:latin typeface="Georgia" pitchFamily="34" charset="0"/>
-                <a:ea typeface="Georgia" pitchFamily="34" charset="-122"/>
-                <a:cs typeface="Georgia" pitchFamily="34" charset="-120"/>
-              </a:rPr>
-              <a:t>Backup Appendix: Statistical Support</a:t>
-            </a:r>
-            <a:endParaRPr lang="en-US" sz="2400" dirty="0"/>
-          </a:p>
-        </p:txBody>
-      </p:sp>
-      <p:sp>
-        <p:nvSpPr>
-          <p:cNvPr id="4" name="Text 2"/>
-          <p:cNvSpPr/>
-          <p:nvPr/>
-        </p:nvSpPr>
-        <p:spPr>
-          <a:xfrm>
-            <a:off x="7955280" y="118872"/>
-            <a:ext cx="640080" cy="137160"/>
-          </a:xfrm>
-          <a:prstGeom prst="rect">
-            <a:avLst/>
-          </a:prstGeom>
-          <a:noFill/>
-          <a:ln/>
-        </p:spPr>
-        <p:txBody>
-          <a:bodyPr wrap="square" lIns="0" tIns="0" rIns="0" bIns="0" rtlCol="0" anchor="ctr"/>
-          <a:lstStyle/>
-          <a:p>
-            <a:pPr marL="0" indent="0" algn="r">
-              <a:buNone/>
-            </a:pPr>
-            <a:r>
-              <a:rPr lang="en-US" sz="1000" dirty="0">
-                <a:solidFill>
-                  <a:srgbClr val="F7F5F1"/>
-                </a:solidFill>
-                <a:latin typeface="Calibri" pitchFamily="34" charset="0"/>
-                <a:ea typeface="Calibri" pitchFamily="34" charset="-122"/>
-                <a:cs typeface="Calibri" pitchFamily="34" charset="-120"/>
-              </a:rPr>
-              <a:t>14 / 14</a:t>
-            </a:r>
-            <a:endParaRPr lang="en-US" sz="1000" dirty="0"/>
-          </a:p>
-        </p:txBody>
-      </p:sp>
-      <p:sp>
-        <p:nvSpPr>
-          <p:cNvPr id="5" name="Text 3"/>
-          <p:cNvSpPr/>
-          <p:nvPr/>
-        </p:nvSpPr>
-        <p:spPr>
-          <a:xfrm>
-            <a:off x="502920" y="4736592"/>
-            <a:ext cx="2743200" cy="137160"/>
-          </a:xfrm>
-          <a:prstGeom prst="rect">
-            <a:avLst/>
-          </a:prstGeom>
-          <a:noFill/>
-          <a:ln/>
-        </p:spPr>
-        <p:txBody>
-          <a:bodyPr wrap="square" lIns="0" tIns="0" rIns="0" bIns="0" rtlCol="0" anchor="ctr"/>
-          <a:lstStyle/>
-          <a:p>
-            <a:pPr marL="0" indent="0">
-              <a:buNone/>
-            </a:pPr>
-            <a:r>
-              <a:rPr lang="en-US" sz="900" dirty="0">
-                <a:solidFill>
-                  <a:srgbClr val="667085"/>
-                </a:solidFill>
-                <a:latin typeface="Calibri" pitchFamily="34" charset="0"/>
-                <a:ea typeface="Calibri" pitchFamily="34" charset="-122"/>
-                <a:cs typeface="Calibri" pitchFamily="34" charset="-120"/>
-              </a:rPr>
-              <a:t>EE5003 MSc Project | Liu Chengyu</a:t>
-            </a:r>
-            <a:endParaRPr lang="en-US" sz="900" dirty="0"/>
-          </a:p>
-        </p:txBody>
-      </p:sp>
-      <p:sp>
-        <p:nvSpPr>
-          <p:cNvPr id="6" name="Text 4"/>
-          <p:cNvSpPr/>
-          <p:nvPr/>
-        </p:nvSpPr>
-        <p:spPr>
-          <a:xfrm>
-            <a:off x="5577840" y="4736592"/>
-            <a:ext cx="3017520" cy="137160"/>
-          </a:xfrm>
-          <a:prstGeom prst="rect">
-            <a:avLst/>
-          </a:prstGeom>
-          <a:noFill/>
-          <a:ln/>
-        </p:spPr>
-        <p:txBody>
-          <a:bodyPr wrap="square" lIns="0" tIns="0" rIns="0" bIns="0" rtlCol="0" anchor="ctr"/>
-          <a:lstStyle/>
-          <a:p>
-            <a:pPr marL="0" indent="0" algn="r">
-              <a:buNone/>
-            </a:pPr>
-            <a:r>
-              <a:rPr lang="en-US" sz="900" dirty="0">
-                <a:solidFill>
-                  <a:srgbClr val="667085"/>
-                </a:solidFill>
-                <a:latin typeface="Calibri" pitchFamily="34" charset="0"/>
-                <a:ea typeface="Calibri" pitchFamily="34" charset="-122"/>
-                <a:cs typeface="Calibri" pitchFamily="34" charset="-120"/>
-              </a:rPr>
-              <a:t>Approximate Graph Unlearning Audit</a:t>
-            </a:r>
-            <a:endParaRPr lang="en-US" sz="900" dirty="0"/>
-          </a:p>
-        </p:txBody>
-      </p:sp>
-      <p:pic>
-        <p:nvPicPr>
-          <p:cNvPr id="7" name="Image 0" descr="H:\project\OpenGU\GULib-master\report\0417_5003report\figures\paper_figures\FIG-4a_Significance.png"/>
-          <p:cNvPicPr>
-            <a:picLocks noChangeAspect="1"/>
-          </p:cNvPicPr>
-          <p:nvPr/>
-        </p:nvPicPr>
-        <p:blipFill>
-          <a:blip r:embed="rId3"/>
-          <a:stretch>
-            <a:fillRect/>
-          </a:stretch>
-        </p:blipFill>
-        <p:spPr>
-          <a:xfrm>
-            <a:off x="548640" y="1005840"/>
-            <a:ext cx="3794760" cy="3154680"/>
-          </a:xfrm>
-          <a:prstGeom prst="rect">
-            <a:avLst/>
-          </a:prstGeom>
-        </p:spPr>
-      </p:pic>
-      <p:pic>
-        <p:nvPicPr>
-          <p:cNvPr id="8" name="Image 1" descr="H:\project\OpenGU\GULib-master\report\0417_5003report\figures\paper_figures\FIG-4b_Effect.png"/>
-          <p:cNvPicPr>
-            <a:picLocks noChangeAspect="1"/>
-          </p:cNvPicPr>
-          <p:nvPr/>
-        </p:nvPicPr>
-        <p:blipFill>
-          <a:blip r:embed="rId4"/>
-          <a:stretch>
-            <a:fillRect/>
-          </a:stretch>
-        </p:blipFill>
-        <p:spPr>
-          <a:xfrm>
-            <a:off x="4709160" y="1005840"/>
-            <a:ext cx="3794760" cy="3154680"/>
-          </a:xfrm>
-          <a:prstGeom prst="rect">
-            <a:avLst/>
-          </a:prstGeom>
-        </p:spPr>
-      </p:pic>
-      <p:sp>
-        <p:nvSpPr>
-          <p:cNvPr id="9" name="Text 5"/>
-          <p:cNvSpPr/>
-          <p:nvPr/>
-        </p:nvSpPr>
-        <p:spPr>
-          <a:xfrm>
-            <a:off x="566928" y="4297680"/>
-            <a:ext cx="3749040" cy="146304"/>
-          </a:xfrm>
-          <a:prstGeom prst="rect">
-            <a:avLst/>
-          </a:prstGeom>
-          <a:noFill/>
-          <a:ln/>
-        </p:spPr>
-        <p:txBody>
-          <a:bodyPr wrap="square" lIns="0" tIns="0" rIns="0" bIns="0" rtlCol="0" anchor="ctr"/>
-          <a:lstStyle/>
-          <a:p>
-            <a:pPr marL="0" indent="0">
-              <a:buNone/>
-            </a:pPr>
-            <a:r>
-              <a:rPr lang="en-US" sz="900" i="1" dirty="0">
-                <a:solidFill>
-                  <a:srgbClr val="667085"/>
-                </a:solidFill>
-                <a:latin typeface="Calibri" pitchFamily="34" charset="0"/>
-                <a:ea typeface="Calibri" pitchFamily="34" charset="-122"/>
-                <a:cs typeface="Calibri" pitchFamily="34" charset="-120"/>
-              </a:rPr>
-              <a:t>Figure 4a. -log10(p) support against random deletion.</a:t>
-            </a:r>
-            <a:endParaRPr lang="en-US" sz="900" dirty="0"/>
-          </a:p>
-        </p:txBody>
-      </p:sp>
-      <p:sp>
-        <p:nvSpPr>
-          <p:cNvPr id="10" name="Text 6"/>
-          <p:cNvSpPr/>
-          <p:nvPr/>
-        </p:nvSpPr>
-        <p:spPr>
-          <a:xfrm>
-            <a:off x="4727448" y="4297680"/>
-            <a:ext cx="3749040" cy="146304"/>
-          </a:xfrm>
-          <a:prstGeom prst="rect">
-            <a:avLst/>
-          </a:prstGeom>
-          <a:noFill/>
-          <a:ln/>
-        </p:spPr>
-        <p:txBody>
-          <a:bodyPr wrap="square" lIns="0" tIns="0" rIns="0" bIns="0" rtlCol="0" anchor="ctr"/>
-          <a:lstStyle/>
-          <a:p>
-            <a:pPr marL="0" indent="0">
-              <a:buNone/>
-            </a:pPr>
-            <a:r>
-              <a:rPr lang="en-US" sz="900" i="1" dirty="0">
-                <a:solidFill>
-                  <a:srgbClr val="667085"/>
-                </a:solidFill>
-                <a:latin typeface="Calibri" pitchFamily="34" charset="0"/>
-                <a:ea typeface="Calibri" pitchFamily="34" charset="-122"/>
-                <a:cs typeface="Calibri" pitchFamily="34" charset="-120"/>
-              </a:rPr>
-              <a:t>Figure 4b. Effect size beyond random deletion.</a:t>
             </a:r>
             <a:endParaRPr lang="en-US" sz="900" dirty="0"/>
           </a:p>
@@ -5381,9 +6647,9 @@
                 <a:solidFill>
                   <a:srgbClr val="FFFFFF"/>
                 </a:solidFill>
-                <a:latin typeface="Georgia" pitchFamily="34" charset="0"/>
-                <a:ea typeface="Georgia" pitchFamily="34" charset="-122"/>
-                <a:cs typeface="Georgia" pitchFamily="34" charset="-120"/>
+                <a:latin typeface="Times New Roman" pitchFamily="34" charset="0"/>
+                <a:ea typeface="Times New Roman" pitchFamily="34" charset="-122"/>
+                <a:cs typeface="Times New Roman" pitchFamily="34" charset="-120"/>
               </a:rPr>
               <a:t>Why Graph Unlearning Matters</a:t>
             </a:r>
@@ -5420,11 +6686,11 @@
                 <a:solidFill>
                   <a:srgbClr val="F7F5F1"/>
                 </a:solidFill>
-                <a:latin typeface="Calibri" pitchFamily="34" charset="0"/>
-                <a:ea typeface="Calibri" pitchFamily="34" charset="-122"/>
-                <a:cs typeface="Calibri" pitchFamily="34" charset="-120"/>
-              </a:rPr>
-              <a:t>02 / 14</a:t>
+                <a:latin typeface="Times New Roman" pitchFamily="34" charset="0"/>
+                <a:ea typeface="Times New Roman" pitchFamily="34" charset="-122"/>
+                <a:cs typeface="Times New Roman" pitchFamily="34" charset="-120"/>
+              </a:rPr>
+              <a:t>02 / 15</a:t>
             </a:r>
             <a:endParaRPr lang="en-US" sz="1000" dirty="0"/>
           </a:p>
@@ -5459,9 +6725,9 @@
                 <a:solidFill>
                   <a:srgbClr val="667085"/>
                 </a:solidFill>
-                <a:latin typeface="Calibri" pitchFamily="34" charset="0"/>
-                <a:ea typeface="Calibri" pitchFamily="34" charset="-122"/>
-                <a:cs typeface="Calibri" pitchFamily="34" charset="-120"/>
+                <a:latin typeface="Times New Roman" pitchFamily="34" charset="0"/>
+                <a:ea typeface="Times New Roman" pitchFamily="34" charset="-122"/>
+                <a:cs typeface="Times New Roman" pitchFamily="34" charset="-120"/>
               </a:rPr>
               <a:t>EE5003 MSc Project | Liu Chengyu</a:t>
             </a:r>
@@ -5498,9 +6764,9 @@
                 <a:solidFill>
                   <a:srgbClr val="667085"/>
                 </a:solidFill>
-                <a:latin typeface="Calibri" pitchFamily="34" charset="0"/>
-                <a:ea typeface="Calibri" pitchFamily="34" charset="-122"/>
-                <a:cs typeface="Calibri" pitchFamily="34" charset="-120"/>
+                <a:latin typeface="Times New Roman" pitchFamily="34" charset="0"/>
+                <a:ea typeface="Times New Roman" pitchFamily="34" charset="-122"/>
+                <a:cs typeface="Times New Roman" pitchFamily="34" charset="-120"/>
               </a:rPr>
               <a:t>Approximate Graph Unlearning Audit</a:t>
             </a:r>
@@ -5517,33 +6783,35 @@
         <p:spPr>
           <a:xfrm>
             <a:off x="594360" y="768096"/>
-            <a:ext cx="5669280" cy="228600"/>
-          </a:xfrm>
-          <a:prstGeom prst="rect">
-            <a:avLst/>
-          </a:prstGeom>
-          <a:noFill/>
-          <a:ln/>
-        </p:spPr>
-        <p:txBody>
-          <a:bodyPr wrap="square" lIns="0" tIns="0" rIns="0" bIns="0" rtlCol="0" anchor="ctr"/>
-          <a:lstStyle/>
-          <a:p>
-            <a:pPr marL="0" indent="0">
-              <a:buNone/>
-            </a:pPr>
-            <a:r>
-              <a:rPr lang="en-US" sz="1900" b="1" dirty="0">
+            <a:ext cx="5486400" cy="530352"/>
+          </a:xfrm>
+          <a:prstGeom prst="rect">
+            <a:avLst/>
+          </a:prstGeom>
+          <a:noFill/>
+          <a:ln/>
+        </p:spPr>
+        <p:txBody>
+          <a:bodyPr wrap="square" lIns="0" tIns="0" rIns="0" bIns="0" rtlCol="0" anchor="ctr">
+            <a:normAutofit/>
+          </a:bodyPr>
+          <a:lstStyle/>
+          <a:p>
+            <a:pPr marL="0" indent="0">
+              <a:buNone/>
+            </a:pPr>
+            <a:r>
+              <a:rPr lang="en-US" sz="1720" b="1" dirty="0">
                 <a:solidFill>
                   <a:srgbClr val="223A5E"/>
                 </a:solidFill>
-                <a:latin typeface="Georgia" pitchFamily="34" charset="0"/>
-                <a:ea typeface="Georgia" pitchFamily="34" charset="-122"/>
-                <a:cs typeface="Georgia" pitchFamily="34" charset="-120"/>
+                <a:latin typeface="Times New Roman" pitchFamily="34" charset="0"/>
+                <a:ea typeface="Times New Roman" pitchFamily="34" charset="-122"/>
+                <a:cs typeface="Times New Roman" pitchFamily="34" charset="-120"/>
               </a:rPr>
               <a:t>Deletion requests are operationally plausible, and approximation turns them into a security question.</a:t>
             </a:r>
-            <a:endParaRPr lang="en-US" sz="1900" dirty="0"/>
+            <a:endParaRPr lang="en-US" sz="1720" dirty="0"/>
           </a:p>
         </p:txBody>
       </p:sp>
@@ -5555,12 +6823,12 @@
         </p:nvSpPr>
         <p:spPr>
           <a:xfrm>
-            <a:off x="594360" y="1280160"/>
-            <a:ext cx="2468880" cy="2697480"/>
+            <a:off x="594360" y="1353312"/>
+            <a:ext cx="2468880" cy="2267712"/>
           </a:xfrm>
           <a:prstGeom prst="roundRect">
             <a:avLst>
-              <a:gd name="adj" fmla="val 1852"/>
+              <a:gd name="adj" fmla="val 2016"/>
             </a:avLst>
           </a:prstGeom>
           <a:solidFill>
@@ -5589,47 +6857,8 @@
         </p:nvSpPr>
         <p:spPr>
           <a:xfrm>
-            <a:off x="731520" y="1371600"/>
-            <a:ext cx="2194560" cy="182880"/>
-          </a:xfrm>
-          <a:prstGeom prst="rect">
-            <a:avLst/>
-          </a:prstGeom>
-          <a:noFill/>
-          <a:ln/>
-        </p:spPr>
-        <p:txBody>
-          <a:bodyPr wrap="square" lIns="0" tIns="0" rIns="0" bIns="0" rtlCol="0" anchor="ctr"/>
-          <a:lstStyle/>
-          <a:p>
-            <a:pPr marL="0" indent="0">
-              <a:buNone/>
-            </a:pPr>
-            <a:r>
-              <a:rPr lang="en-US" sz="1700" b="1" dirty="0">
-                <a:solidFill>
-                  <a:srgbClr val="223A5E"/>
-                </a:solidFill>
-                <a:latin typeface="Georgia" pitchFamily="34" charset="0"/>
-                <a:ea typeface="Georgia" pitchFamily="34" charset="-122"/>
-                <a:cs typeface="Georgia" pitchFamily="34" charset="-120"/>
-              </a:rPr>
-              <a:t>Real deletion requests</a:t>
-            </a:r>
-            <a:endParaRPr lang="en-US" sz="1700" dirty="0"/>
-          </a:p>
-        </p:txBody>
-      </p:sp>
-      <p:sp>
-        <p:nvSpPr>
-          <p:cNvPr id="10" name="Text 8"/>
-          <p:cNvSpPr/>
-          <p:nvPr/>
-        </p:nvSpPr>
-        <p:spPr>
-          <a:xfrm>
-            <a:off x="731520" y="1618488"/>
-            <a:ext cx="2194560" cy="2267712"/>
+            <a:off x="731520" y="1463040"/>
+            <a:ext cx="2194560" cy="420624"/>
           </a:xfrm>
           <a:prstGeom prst="rect">
             <a:avLst/>
@@ -5647,17 +6876,58 @@
               <a:buNone/>
             </a:pPr>
             <a:r>
-              <a:rPr lang="en-US" sz="1220" dirty="0">
+              <a:rPr lang="en-US" sz="1580" b="1" dirty="0">
+                <a:solidFill>
+                  <a:srgbClr val="223A5E"/>
+                </a:solidFill>
+                <a:latin typeface="Times New Roman" pitchFamily="34" charset="0"/>
+                <a:ea typeface="Times New Roman" pitchFamily="34" charset="-122"/>
+                <a:cs typeface="Times New Roman" pitchFamily="34" charset="-120"/>
+              </a:rPr>
+              <a:t>Real deletion requests</a:t>
+            </a:r>
+            <a:endParaRPr lang="en-US" sz="1580" dirty="0"/>
+          </a:p>
+        </p:txBody>
+      </p:sp>
+      <p:sp>
+        <p:nvSpPr>
+          <p:cNvPr id="10" name="Text 8"/>
+          <p:cNvSpPr/>
+          <p:nvPr/>
+        </p:nvSpPr>
+        <p:spPr>
+          <a:xfrm>
+            <a:off x="731520" y="2377440"/>
+            <a:ext cx="2194560" cy="1106424"/>
+          </a:xfrm>
+          <a:prstGeom prst="rect">
+            <a:avLst/>
+          </a:prstGeom>
+          <a:noFill/>
+          <a:ln/>
+        </p:spPr>
+        <p:txBody>
+          <a:bodyPr wrap="square" lIns="0" tIns="0" rIns="0" bIns="0" rtlCol="0" anchor="ctr">
+            <a:normAutofit/>
+          </a:bodyPr>
+          <a:lstStyle/>
+          <a:p>
+            <a:pPr marL="0" indent="0">
+              <a:buNone/>
+            </a:pPr>
+            <a:r>
+              <a:rPr lang="en-US" sz="1180" dirty="0">
                 <a:solidFill>
                   <a:srgbClr val="1E2630"/>
                 </a:solidFill>
-                <a:latin typeface="Calibri" pitchFamily="34" charset="0"/>
-                <a:ea typeface="Calibri" pitchFamily="34" charset="-122"/>
-                <a:cs typeface="Calibri" pitchFamily="34" charset="-120"/>
+                <a:latin typeface="Times New Roman" pitchFamily="34" charset="0"/>
+                <a:ea typeface="Times New Roman" pitchFamily="34" charset="-122"/>
+                <a:cs typeface="Times New Roman" pitchFamily="34" charset="-120"/>
               </a:rPr>
               <a:t>User-level or node-level removal is realistic in citation, social, and recommendation graphs.</a:t>
             </a:r>
-            <a:endParaRPr lang="en-US" sz="1220" dirty="0"/>
+            <a:endParaRPr lang="en-US" sz="1180" dirty="0"/>
           </a:p>
         </p:txBody>
       </p:sp>
@@ -5669,12 +6939,12 @@
         </p:nvSpPr>
         <p:spPr>
           <a:xfrm>
-            <a:off x="3337560" y="1280160"/>
-            <a:ext cx="2468880" cy="2697480"/>
+            <a:off x="3337560" y="1353312"/>
+            <a:ext cx="2468880" cy="2267712"/>
           </a:xfrm>
           <a:prstGeom prst="roundRect">
             <a:avLst>
-              <a:gd name="adj" fmla="val 1852"/>
+              <a:gd name="adj" fmla="val 2016"/>
             </a:avLst>
           </a:prstGeom>
           <a:solidFill>
@@ -5703,47 +6973,8 @@
         </p:nvSpPr>
         <p:spPr>
           <a:xfrm>
-            <a:off x="3474720" y="1371600"/>
-            <a:ext cx="2194560" cy="182880"/>
-          </a:xfrm>
-          <a:prstGeom prst="rect">
-            <a:avLst/>
-          </a:prstGeom>
-          <a:noFill/>
-          <a:ln/>
-        </p:spPr>
-        <p:txBody>
-          <a:bodyPr wrap="square" lIns="0" tIns="0" rIns="0" bIns="0" rtlCol="0" anchor="ctr"/>
-          <a:lstStyle/>
-          <a:p>
-            <a:pPr marL="0" indent="0">
-              <a:buNone/>
-            </a:pPr>
-            <a:r>
-              <a:rPr lang="en-US" sz="1700" b="1" dirty="0">
-                <a:solidFill>
-                  <a:srgbClr val="223A5E"/>
-                </a:solidFill>
-                <a:latin typeface="Georgia" pitchFamily="34" charset="0"/>
-                <a:ea typeface="Georgia" pitchFamily="34" charset="-122"/>
-                <a:cs typeface="Georgia" pitchFamily="34" charset="-120"/>
-              </a:rPr>
-              <a:t>Approximate unlearning</a:t>
-            </a:r>
-            <a:endParaRPr lang="en-US" sz="1700" dirty="0"/>
-          </a:p>
-        </p:txBody>
-      </p:sp>
-      <p:sp>
-        <p:nvSpPr>
-          <p:cNvPr id="13" name="Text 11"/>
-          <p:cNvSpPr/>
-          <p:nvPr/>
-        </p:nvSpPr>
-        <p:spPr>
-          <a:xfrm>
-            <a:off x="3474720" y="1618488"/>
-            <a:ext cx="2194560" cy="2267712"/>
+            <a:off x="3474720" y="1463040"/>
+            <a:ext cx="2194560" cy="420624"/>
           </a:xfrm>
           <a:prstGeom prst="rect">
             <a:avLst/>
@@ -5761,17 +6992,75 @@
               <a:buNone/>
             </a:pPr>
             <a:r>
-              <a:rPr lang="en-US" sz="1220" dirty="0">
+              <a:rPr lang="en-US" sz="1580" b="1" dirty="0">
+                <a:solidFill>
+                  <a:srgbClr val="223A5E"/>
+                </a:solidFill>
+                <a:latin typeface="Times New Roman" pitchFamily="34" charset="0"/>
+                <a:ea typeface="Times New Roman" pitchFamily="34" charset="-122"/>
+                <a:cs typeface="Times New Roman" pitchFamily="34" charset="-120"/>
+              </a:rPr>
+              <a:t>Approximate</a:t>
+            </a:r>
+            <a:endParaRPr lang="en-US" sz="1580" dirty="0"/>
+          </a:p>
+          <a:p>
+            <a:pPr marL="0" indent="0">
+              <a:buNone/>
+            </a:pPr>
+            <a:r>
+              <a:rPr lang="en-US" sz="1580" b="1" dirty="0">
+                <a:solidFill>
+                  <a:srgbClr val="223A5E"/>
+                </a:solidFill>
+                <a:latin typeface="Times New Roman" pitchFamily="34" charset="0"/>
+                <a:ea typeface="Times New Roman" pitchFamily="34" charset="-122"/>
+                <a:cs typeface="Times New Roman" pitchFamily="34" charset="-120"/>
+              </a:rPr>
+              <a:t>unlearning</a:t>
+            </a:r>
+            <a:endParaRPr lang="en-US" sz="1580" dirty="0"/>
+          </a:p>
+        </p:txBody>
+      </p:sp>
+      <p:sp>
+        <p:nvSpPr>
+          <p:cNvPr id="13" name="Text 11"/>
+          <p:cNvSpPr/>
+          <p:nvPr/>
+        </p:nvSpPr>
+        <p:spPr>
+          <a:xfrm>
+            <a:off x="3474720" y="2377440"/>
+            <a:ext cx="2194560" cy="1106424"/>
+          </a:xfrm>
+          <a:prstGeom prst="rect">
+            <a:avLst/>
+          </a:prstGeom>
+          <a:noFill/>
+          <a:ln/>
+        </p:spPr>
+        <p:txBody>
+          <a:bodyPr wrap="square" lIns="0" tIns="0" rIns="0" bIns="0" rtlCol="0" anchor="ctr">
+            <a:normAutofit/>
+          </a:bodyPr>
+          <a:lstStyle/>
+          <a:p>
+            <a:pPr marL="0" indent="0">
+              <a:buNone/>
+            </a:pPr>
+            <a:r>
+              <a:rPr lang="en-US" sz="1180" dirty="0">
                 <a:solidFill>
                   <a:srgbClr val="1E2630"/>
                 </a:solidFill>
-                <a:latin typeface="Calibri" pitchFamily="34" charset="0"/>
-                <a:ea typeface="Calibri" pitchFamily="34" charset="-122"/>
-                <a:cs typeface="Calibri" pitchFamily="34" charset="-120"/>
+                <a:latin typeface="Times New Roman" pitchFamily="34" charset="0"/>
+                <a:ea typeface="Times New Roman" pitchFamily="34" charset="-122"/>
+                <a:cs typeface="Times New Roman" pitchFamily="34" charset="-120"/>
               </a:rPr>
               <a:t>Exact retraining is expensive, so practical systems use approximation.</a:t>
             </a:r>
-            <a:endParaRPr lang="en-US" sz="1220" dirty="0"/>
+            <a:endParaRPr lang="en-US" sz="1180" dirty="0"/>
           </a:p>
         </p:txBody>
       </p:sp>
@@ -5783,12 +7072,12 @@
         </p:nvSpPr>
         <p:spPr>
           <a:xfrm>
-            <a:off x="6080760" y="1280160"/>
-            <a:ext cx="2468880" cy="2697480"/>
+            <a:off x="6080760" y="1353312"/>
+            <a:ext cx="2468880" cy="2267712"/>
           </a:xfrm>
           <a:prstGeom prst="roundRect">
             <a:avLst>
-              <a:gd name="adj" fmla="val 1852"/>
+              <a:gd name="adj" fmla="val 2016"/>
             </a:avLst>
           </a:prstGeom>
           <a:solidFill>
@@ -5817,47 +7106,8 @@
         </p:nvSpPr>
         <p:spPr>
           <a:xfrm>
-            <a:off x="6217920" y="1371600"/>
-            <a:ext cx="2194560" cy="182880"/>
-          </a:xfrm>
-          <a:prstGeom prst="rect">
-            <a:avLst/>
-          </a:prstGeom>
-          <a:noFill/>
-          <a:ln/>
-        </p:spPr>
-        <p:txBody>
-          <a:bodyPr wrap="square" lIns="0" tIns="0" rIns="0" bIns="0" rtlCol="0" anchor="ctr"/>
-          <a:lstStyle/>
-          <a:p>
-            <a:pPr marL="0" indent="0">
-              <a:buNone/>
-            </a:pPr>
-            <a:r>
-              <a:rPr lang="en-US" sz="1700" b="1" dirty="0">
-                <a:solidFill>
-                  <a:srgbClr val="223A5E"/>
-                </a:solidFill>
-                <a:latin typeface="Georgia" pitchFamily="34" charset="0"/>
-                <a:ea typeface="Georgia" pitchFamily="34" charset="-122"/>
-                <a:cs typeface="Georgia" pitchFamily="34" charset="-120"/>
-              </a:rPr>
-              <a:t>Attack surface</a:t>
-            </a:r>
-            <a:endParaRPr lang="en-US" sz="1700" dirty="0"/>
-          </a:p>
-        </p:txBody>
-      </p:sp>
-      <p:sp>
-        <p:nvSpPr>
-          <p:cNvPr id="16" name="Text 14"/>
-          <p:cNvSpPr/>
-          <p:nvPr/>
-        </p:nvSpPr>
-        <p:spPr>
-          <a:xfrm>
-            <a:off x="6217920" y="1618488"/>
-            <a:ext cx="2194560" cy="2267712"/>
+            <a:off x="6217920" y="1463040"/>
+            <a:ext cx="2194560" cy="420624"/>
           </a:xfrm>
           <a:prstGeom prst="rect">
             <a:avLst/>
@@ -5875,17 +7125,58 @@
               <a:buNone/>
             </a:pPr>
             <a:r>
-              <a:rPr lang="en-US" sz="1220" dirty="0">
+              <a:rPr lang="en-US" sz="1580" b="1" dirty="0">
+                <a:solidFill>
+                  <a:srgbClr val="223A5E"/>
+                </a:solidFill>
+                <a:latin typeface="Times New Roman" pitchFamily="34" charset="0"/>
+                <a:ea typeface="Times New Roman" pitchFamily="34" charset="-122"/>
+                <a:cs typeface="Times New Roman" pitchFamily="34" charset="-120"/>
+              </a:rPr>
+              <a:t>Attack surface</a:t>
+            </a:r>
+            <a:endParaRPr lang="en-US" sz="1580" dirty="0"/>
+          </a:p>
+        </p:txBody>
+      </p:sp>
+      <p:sp>
+        <p:nvSpPr>
+          <p:cNvPr id="16" name="Text 14"/>
+          <p:cNvSpPr/>
+          <p:nvPr/>
+        </p:nvSpPr>
+        <p:spPr>
+          <a:xfrm>
+            <a:off x="6217920" y="2377440"/>
+            <a:ext cx="2194560" cy="1106424"/>
+          </a:xfrm>
+          <a:prstGeom prst="rect">
+            <a:avLst/>
+          </a:prstGeom>
+          <a:noFill/>
+          <a:ln/>
+        </p:spPr>
+        <p:txBody>
+          <a:bodyPr wrap="square" lIns="0" tIns="0" rIns="0" bIns="0" rtlCol="0" anchor="ctr">
+            <a:normAutofit/>
+          </a:bodyPr>
+          <a:lstStyle/>
+          <a:p>
+            <a:pPr marL="0" indent="0">
+              <a:buNone/>
+            </a:pPr>
+            <a:r>
+              <a:rPr lang="en-US" sz="1180" dirty="0">
                 <a:solidFill>
                   <a:srgbClr val="1E2630"/>
                 </a:solidFill>
-                <a:latin typeface="Calibri" pitchFamily="34" charset="0"/>
-                <a:ea typeface="Calibri" pitchFamily="34" charset="-122"/>
-                <a:cs typeface="Calibri" pitchFamily="34" charset="-120"/>
+                <a:latin typeface="Times New Roman" pitchFamily="34" charset="0"/>
+                <a:ea typeface="Times New Roman" pitchFamily="34" charset="-122"/>
+                <a:cs typeface="Times New Roman" pitchFamily="34" charset="-120"/>
               </a:rPr>
               <a:t>A malicious requester may exploit the deletion interface itself by choosing harmful targets.</a:t>
             </a:r>
-            <a:endParaRPr lang="en-US" sz="1220" dirty="0"/>
+            <a:endParaRPr lang="en-US" sz="1180" dirty="0"/>
           </a:p>
         </p:txBody>
       </p:sp>
@@ -5897,12 +7188,12 @@
         </p:nvSpPr>
         <p:spPr>
           <a:xfrm>
-            <a:off x="6583680" y="4160520"/>
-            <a:ext cx="1783080" cy="566928"/>
+            <a:off x="6565392" y="3822192"/>
+            <a:ext cx="1938528" cy="749808"/>
           </a:xfrm>
           <a:prstGeom prst="roundRect">
             <a:avLst>
-              <a:gd name="adj" fmla="val 8065"/>
+              <a:gd name="adj" fmla="val 6098"/>
             </a:avLst>
           </a:prstGeom>
           <a:solidFill>
@@ -5933,8 +7224,8 @@
         </p:nvSpPr>
         <p:spPr>
           <a:xfrm>
-            <a:off x="6656832" y="4270248"/>
-            <a:ext cx="1636776" cy="201168"/>
+            <a:off x="6638544" y="3931920"/>
+            <a:ext cx="1792224" cy="201168"/>
           </a:xfrm>
           <a:prstGeom prst="rect">
             <a:avLst/>
@@ -5954,9 +7245,9 @@
                 <a:solidFill>
                   <a:srgbClr val="FFFFFF"/>
                 </a:solidFill>
-                <a:latin typeface="Georgia" pitchFamily="34" charset="0"/>
-                <a:ea typeface="Georgia" pitchFamily="34" charset="-122"/>
-                <a:cs typeface="Georgia" pitchFamily="34" charset="-120"/>
+                <a:latin typeface="Times New Roman" pitchFamily="34" charset="0"/>
+                <a:ea typeface="Times New Roman" pitchFamily="34" charset="-122"/>
+                <a:cs typeface="Times New Roman" pitchFamily="34" charset="-120"/>
               </a:rPr>
               <a:t>Delete</a:t>
             </a:r>
@@ -5972,8 +7263,8 @@
         </p:nvSpPr>
         <p:spPr>
           <a:xfrm>
-            <a:off x="6656832" y="4544568"/>
-            <a:ext cx="1636776" cy="137160"/>
+            <a:off x="6638544" y="4206240"/>
+            <a:ext cx="1792224" cy="320040"/>
           </a:xfrm>
           <a:prstGeom prst="rect">
             <a:avLst/>
@@ -5995,9 +7286,9 @@
                 <a:solidFill>
                   <a:srgbClr val="F7F5F1"/>
                 </a:solidFill>
-                <a:latin typeface="Calibri" pitchFamily="34" charset="0"/>
-                <a:ea typeface="Calibri" pitchFamily="34" charset="-122"/>
-                <a:cs typeface="Calibri" pitchFamily="34" charset="-120"/>
+                <a:latin typeface="Times New Roman" pitchFamily="34" charset="0"/>
+                <a:ea typeface="Times New Roman" pitchFamily="34" charset="-122"/>
+                <a:cs typeface="Times New Roman" pitchFamily="34" charset="-120"/>
               </a:rPr>
               <a:t>Compliance tool and attack interface</a:t>
             </a:r>
@@ -6101,9 +7392,9 @@
                 <a:solidFill>
                   <a:srgbClr val="FFFFFF"/>
                 </a:solidFill>
-                <a:latin typeface="Georgia" pitchFamily="34" charset="0"/>
-                <a:ea typeface="Georgia" pitchFamily="34" charset="-122"/>
-                <a:cs typeface="Georgia" pitchFamily="34" charset="-120"/>
+                <a:latin typeface="Times New Roman" pitchFamily="34" charset="0"/>
+                <a:ea typeface="Times New Roman" pitchFamily="34" charset="-122"/>
+                <a:cs typeface="Times New Roman" pitchFamily="34" charset="-120"/>
               </a:rPr>
               <a:t>Research Question And Objectives</a:t>
             </a:r>
@@ -6140,11 +7431,11 @@
                 <a:solidFill>
                   <a:srgbClr val="F7F5F1"/>
                 </a:solidFill>
-                <a:latin typeface="Calibri" pitchFamily="34" charset="0"/>
-                <a:ea typeface="Calibri" pitchFamily="34" charset="-122"/>
-                <a:cs typeface="Calibri" pitchFamily="34" charset="-120"/>
-              </a:rPr>
-              <a:t>03 / 14</a:t>
+                <a:latin typeface="Times New Roman" pitchFamily="34" charset="0"/>
+                <a:ea typeface="Times New Roman" pitchFamily="34" charset="-122"/>
+                <a:cs typeface="Times New Roman" pitchFamily="34" charset="-120"/>
+              </a:rPr>
+              <a:t>03 / 15</a:t>
             </a:r>
             <a:endParaRPr lang="en-US" sz="1000" dirty="0"/>
           </a:p>
@@ -6179,9 +7470,9 @@
                 <a:solidFill>
                   <a:srgbClr val="667085"/>
                 </a:solidFill>
-                <a:latin typeface="Calibri" pitchFamily="34" charset="0"/>
-                <a:ea typeface="Calibri" pitchFamily="34" charset="-122"/>
-                <a:cs typeface="Calibri" pitchFamily="34" charset="-120"/>
+                <a:latin typeface="Times New Roman" pitchFamily="34" charset="0"/>
+                <a:ea typeface="Times New Roman" pitchFamily="34" charset="-122"/>
+                <a:cs typeface="Times New Roman" pitchFamily="34" charset="-120"/>
               </a:rPr>
               <a:t>EE5003 MSc Project | Liu Chengyu</a:t>
             </a:r>
@@ -6218,9 +7509,9 @@
                 <a:solidFill>
                   <a:srgbClr val="667085"/>
                 </a:solidFill>
-                <a:latin typeface="Calibri" pitchFamily="34" charset="0"/>
-                <a:ea typeface="Calibri" pitchFamily="34" charset="-122"/>
-                <a:cs typeface="Calibri" pitchFamily="34" charset="-120"/>
+                <a:latin typeface="Times New Roman" pitchFamily="34" charset="0"/>
+                <a:ea typeface="Times New Roman" pitchFamily="34" charset="-122"/>
+                <a:cs typeface="Times New Roman" pitchFamily="34" charset="-120"/>
               </a:rPr>
               <a:t>Approximate Graph Unlearning Audit</a:t>
             </a:r>
@@ -6270,7 +7561,7 @@
         </p:nvSpPr>
         <p:spPr>
           <a:xfrm>
-            <a:off x="777240" y="1005840"/>
+            <a:off x="777240" y="1078992"/>
             <a:ext cx="7589520" cy="182880"/>
           </a:xfrm>
           <a:prstGeom prst="rect">
@@ -6291,9 +7582,9 @@
                 <a:solidFill>
                   <a:srgbClr val="F7F5F1"/>
                 </a:solidFill>
-                <a:latin typeface="Georgia" pitchFamily="34" charset="0"/>
-                <a:ea typeface="Georgia" pitchFamily="34" charset="-122"/>
-                <a:cs typeface="Georgia" pitchFamily="34" charset="-120"/>
+                <a:latin typeface="Times New Roman" pitchFamily="34" charset="0"/>
+                <a:ea typeface="Times New Roman" pitchFamily="34" charset="-122"/>
+                <a:cs typeface="Times New Roman" pitchFamily="34" charset="-120"/>
               </a:rPr>
               <a:t>Research question</a:t>
             </a:r>
@@ -6309,8 +7600,8 @@
         </p:nvSpPr>
         <p:spPr>
           <a:xfrm>
-            <a:off x="777240" y="1252728"/>
-            <a:ext cx="7589520" cy="438912"/>
+            <a:off x="777240" y="1325880"/>
+            <a:ext cx="7589520" cy="365760"/>
           </a:xfrm>
           <a:prstGeom prst="rect">
             <a:avLst/>
@@ -6332,9 +7623,9 @@
                 <a:solidFill>
                   <a:srgbClr val="FFFFFF"/>
                 </a:solidFill>
-                <a:latin typeface="Calibri" pitchFamily="34" charset="0"/>
-                <a:ea typeface="Calibri" pitchFamily="34" charset="-122"/>
-                <a:cs typeface="Calibri" pitchFamily="34" charset="-120"/>
+                <a:latin typeface="Times New Roman" pitchFamily="34" charset="0"/>
+                <a:ea typeface="Times New Roman" pitchFamily="34" charset="-122"/>
+                <a:cs typeface="Times New Roman" pitchFamily="34" charset="-120"/>
               </a:rPr>
               <a:t>Can malicious deletion requests amplify approximation error and degrade retained-model utility beyond ordinary deletion at the same budget?</a:t>
             </a:r>
@@ -6384,7 +7675,7 @@
         </p:nvSpPr>
         <p:spPr>
           <a:xfrm>
-            <a:off x="914400" y="2240280"/>
+            <a:off x="914400" y="2313432"/>
             <a:ext cx="3337560" cy="182880"/>
           </a:xfrm>
           <a:prstGeom prst="rect">
@@ -6405,9 +7696,9 @@
                 <a:solidFill>
                   <a:srgbClr val="223A5E"/>
                 </a:solidFill>
-                <a:latin typeface="Georgia" pitchFamily="34" charset="0"/>
-                <a:ea typeface="Georgia" pitchFamily="34" charset="-122"/>
-                <a:cs typeface="Georgia" pitchFamily="34" charset="-120"/>
+                <a:latin typeface="Times New Roman" pitchFamily="34" charset="0"/>
+                <a:ea typeface="Times New Roman" pitchFamily="34" charset="-122"/>
+                <a:cs typeface="Times New Roman" pitchFamily="34" charset="-120"/>
               </a:rPr>
               <a:t>Objective 1</a:t>
             </a:r>
@@ -6423,8 +7714,8 @@
         </p:nvSpPr>
         <p:spPr>
           <a:xfrm>
-            <a:off x="914400" y="2487168"/>
-            <a:ext cx="3337560" cy="466344"/>
+            <a:off x="914400" y="2560320"/>
+            <a:ext cx="3337560" cy="393192"/>
           </a:xfrm>
           <a:prstGeom prst="rect">
             <a:avLst/>
@@ -6446,9 +7737,9 @@
                 <a:solidFill>
                   <a:srgbClr val="1E2630"/>
                 </a:solidFill>
-                <a:latin typeface="Calibri" pitchFamily="34" charset="0"/>
-                <a:ea typeface="Calibri" pitchFamily="34" charset="-122"/>
-                <a:cs typeface="Calibri" pitchFamily="34" charset="-120"/>
+                <a:latin typeface="Times New Roman" pitchFamily="34" charset="0"/>
+                <a:ea typeface="Times New Roman" pitchFamily="34" charset="-122"/>
+                <a:cs typeface="Times New Roman" pitchFamily="34" charset="-120"/>
               </a:rPr>
               <a:t>Build an attack pipeline with multiple deletion strategies.</a:t>
             </a:r>
@@ -6498,7 +7789,7 @@
         </p:nvSpPr>
         <p:spPr>
           <a:xfrm>
-            <a:off x="4800600" y="2240280"/>
+            <a:off x="4800600" y="2313432"/>
             <a:ext cx="3337560" cy="182880"/>
           </a:xfrm>
           <a:prstGeom prst="rect">
@@ -6519,9 +7810,9 @@
                 <a:solidFill>
                   <a:srgbClr val="223A5E"/>
                 </a:solidFill>
-                <a:latin typeface="Georgia" pitchFamily="34" charset="0"/>
-                <a:ea typeface="Georgia" pitchFamily="34" charset="-122"/>
-                <a:cs typeface="Georgia" pitchFamily="34" charset="-120"/>
+                <a:latin typeface="Times New Roman" pitchFamily="34" charset="0"/>
+                <a:ea typeface="Times New Roman" pitchFamily="34" charset="-122"/>
+                <a:cs typeface="Times New Roman" pitchFamily="34" charset="-120"/>
               </a:rPr>
               <a:t>Objective 2</a:t>
             </a:r>
@@ -6537,8 +7828,8 @@
         </p:nvSpPr>
         <p:spPr>
           <a:xfrm>
-            <a:off x="4800600" y="2487168"/>
-            <a:ext cx="3337560" cy="466344"/>
+            <a:off x="4800600" y="2560320"/>
+            <a:ext cx="3337560" cy="393192"/>
           </a:xfrm>
           <a:prstGeom prst="rect">
             <a:avLst/>
@@ -6560,9 +7851,9 @@
                 <a:solidFill>
                   <a:srgbClr val="1E2630"/>
                 </a:solidFill>
-                <a:latin typeface="Calibri" pitchFamily="34" charset="0"/>
-                <a:ea typeface="Calibri" pitchFamily="34" charset="-122"/>
-                <a:cs typeface="Calibri" pitchFamily="34" charset="-120"/>
+                <a:latin typeface="Times New Roman" pitchFamily="34" charset="0"/>
+                <a:ea typeface="Times New Roman" pitchFamily="34" charset="-122"/>
+                <a:cs typeface="Times New Roman" pitchFamily="34" charset="-120"/>
               </a:rPr>
               <a:t>Compare vulnerability across method families, not just one algorithm.</a:t>
             </a:r>
@@ -6612,7 +7903,7 @@
         </p:nvSpPr>
         <p:spPr>
           <a:xfrm>
-            <a:off x="914400" y="3383280"/>
+            <a:off x="914400" y="3456432"/>
             <a:ext cx="3337560" cy="182880"/>
           </a:xfrm>
           <a:prstGeom prst="rect">
@@ -6633,9 +7924,9 @@
                 <a:solidFill>
                   <a:srgbClr val="223A5E"/>
                 </a:solidFill>
-                <a:latin typeface="Georgia" pitchFamily="34" charset="0"/>
-                <a:ea typeface="Georgia" pitchFamily="34" charset="-122"/>
-                <a:cs typeface="Georgia" pitchFamily="34" charset="-120"/>
+                <a:latin typeface="Times New Roman" pitchFamily="34" charset="0"/>
+                <a:ea typeface="Times New Roman" pitchFamily="34" charset="-122"/>
+                <a:cs typeface="Times New Roman" pitchFamily="34" charset="-120"/>
               </a:rPr>
               <a:t>Objective 3</a:t>
             </a:r>
@@ -6651,8 +7942,8 @@
         </p:nvSpPr>
         <p:spPr>
           <a:xfrm>
-            <a:off x="914400" y="3630168"/>
-            <a:ext cx="3337560" cy="466344"/>
+            <a:off x="914400" y="3703320"/>
+            <a:ext cx="3337560" cy="393192"/>
           </a:xfrm>
           <a:prstGeom prst="rect">
             <a:avLst/>
@@ -6674,9 +7965,9 @@
                 <a:solidFill>
                   <a:srgbClr val="1E2630"/>
                 </a:solidFill>
-                <a:latin typeface="Calibri" pitchFamily="34" charset="0"/>
-                <a:ea typeface="Calibri" pitchFamily="34" charset="-122"/>
-                <a:cs typeface="Calibri" pitchFamily="34" charset="-120"/>
+                <a:latin typeface="Times New Roman" pitchFamily="34" charset="0"/>
+                <a:ea typeface="Times New Roman" pitchFamily="34" charset="-122"/>
+                <a:cs typeface="Times New Roman" pitchFamily="34" charset="-120"/>
               </a:rPr>
               <a:t>Add attribution metrics for collateral and retrain gap.</a:t>
             </a:r>
@@ -6726,7 +8017,7 @@
         </p:nvSpPr>
         <p:spPr>
           <a:xfrm>
-            <a:off x="4800600" y="3383280"/>
+            <a:off x="4800600" y="3456432"/>
             <a:ext cx="3337560" cy="182880"/>
           </a:xfrm>
           <a:prstGeom prst="rect">
@@ -6747,9 +8038,9 @@
                 <a:solidFill>
                   <a:srgbClr val="223A5E"/>
                 </a:solidFill>
-                <a:latin typeface="Georgia" pitchFamily="34" charset="0"/>
-                <a:ea typeface="Georgia" pitchFamily="34" charset="-122"/>
-                <a:cs typeface="Georgia" pitchFamily="34" charset="-120"/>
+                <a:latin typeface="Times New Roman" pitchFamily="34" charset="0"/>
+                <a:ea typeface="Times New Roman" pitchFamily="34" charset="-122"/>
+                <a:cs typeface="Times New Roman" pitchFamily="34" charset="-120"/>
               </a:rPr>
               <a:t>Objective 4</a:t>
             </a:r>
@@ -6765,8 +8056,8 @@
         </p:nvSpPr>
         <p:spPr>
           <a:xfrm>
-            <a:off x="4800600" y="3630168"/>
-            <a:ext cx="3337560" cy="466344"/>
+            <a:off x="4800600" y="3703320"/>
+            <a:ext cx="3337560" cy="393192"/>
           </a:xfrm>
           <a:prstGeom prst="rect">
             <a:avLst/>
@@ -6788,9 +8079,9 @@
                 <a:solidFill>
                   <a:srgbClr val="1E2630"/>
                 </a:solidFill>
-                <a:latin typeface="Calibri" pitchFamily="34" charset="0"/>
-                <a:ea typeface="Calibri" pitchFamily="34" charset="-122"/>
-                <a:cs typeface="Calibri" pitchFamily="34" charset="-120"/>
+                <a:latin typeface="Times New Roman" pitchFamily="34" charset="0"/>
+                <a:ea typeface="Times New Roman" pitchFamily="34" charset="-122"/>
+                <a:cs typeface="Times New Roman" pitchFamily="34" charset="-120"/>
               </a:rPr>
               <a:t>Measure whether adversarial node selection is practically efficient.</a:t>
             </a:r>
@@ -6894,9 +8185,9 @@
                 <a:solidFill>
                   <a:srgbClr val="FFFFFF"/>
                 </a:solidFill>
-                <a:latin typeface="Georgia" pitchFamily="34" charset="0"/>
-                <a:ea typeface="Georgia" pitchFamily="34" charset="-122"/>
-                <a:cs typeface="Georgia" pitchFamily="34" charset="-120"/>
+                <a:latin typeface="Times New Roman" pitchFamily="34" charset="0"/>
+                <a:ea typeface="Times New Roman" pitchFamily="34" charset="-122"/>
+                <a:cs typeface="Times New Roman" pitchFamily="34" charset="-120"/>
               </a:rPr>
               <a:t>Method Families And Threat Model</a:t>
             </a:r>
@@ -6933,11 +8224,11 @@
                 <a:solidFill>
                   <a:srgbClr val="F7F5F1"/>
                 </a:solidFill>
-                <a:latin typeface="Calibri" pitchFamily="34" charset="0"/>
-                <a:ea typeface="Calibri" pitchFamily="34" charset="-122"/>
-                <a:cs typeface="Calibri" pitchFamily="34" charset="-120"/>
-              </a:rPr>
-              <a:t>04 / 14</a:t>
+                <a:latin typeface="Times New Roman" pitchFamily="34" charset="0"/>
+                <a:ea typeface="Times New Roman" pitchFamily="34" charset="-122"/>
+                <a:cs typeface="Times New Roman" pitchFamily="34" charset="-120"/>
+              </a:rPr>
+              <a:t>04 / 15</a:t>
             </a:r>
             <a:endParaRPr lang="en-US" sz="1000" dirty="0"/>
           </a:p>
@@ -6972,9 +8263,9 @@
                 <a:solidFill>
                   <a:srgbClr val="667085"/>
                 </a:solidFill>
-                <a:latin typeface="Calibri" pitchFamily="34" charset="0"/>
-                <a:ea typeface="Calibri" pitchFamily="34" charset="-122"/>
-                <a:cs typeface="Calibri" pitchFamily="34" charset="-120"/>
+                <a:latin typeface="Times New Roman" pitchFamily="34" charset="0"/>
+                <a:ea typeface="Times New Roman" pitchFamily="34" charset="-122"/>
+                <a:cs typeface="Times New Roman" pitchFamily="34" charset="-120"/>
               </a:rPr>
               <a:t>EE5003 MSc Project | Liu Chengyu</a:t>
             </a:r>
@@ -7011,9 +8302,9 @@
                 <a:solidFill>
                   <a:srgbClr val="667085"/>
                 </a:solidFill>
-                <a:latin typeface="Calibri" pitchFamily="34" charset="0"/>
-                <a:ea typeface="Calibri" pitchFamily="34" charset="-122"/>
-                <a:cs typeface="Calibri" pitchFamily="34" charset="-120"/>
+                <a:latin typeface="Times New Roman" pitchFamily="34" charset="0"/>
+                <a:ea typeface="Times New Roman" pitchFamily="34" charset="-122"/>
+                <a:cs typeface="Times New Roman" pitchFamily="34" charset="-120"/>
               </a:rPr>
               <a:t>Approximate Graph Unlearning Audit</a:t>
             </a:r>
@@ -7050,9 +8341,9 @@
                 <a:solidFill>
                   <a:srgbClr val="223A5E"/>
                 </a:solidFill>
-                <a:latin typeface="Georgia" pitchFamily="34" charset="0"/>
-                <a:ea typeface="Georgia" pitchFamily="34" charset="-122"/>
-                <a:cs typeface="Georgia" pitchFamily="34" charset="-120"/>
+                <a:latin typeface="Times New Roman" pitchFamily="34" charset="0"/>
+                <a:ea typeface="Times New Roman" pitchFamily="34" charset="-122"/>
+                <a:cs typeface="Times New Roman" pitchFamily="34" charset="-120"/>
               </a:rPr>
               <a:t>Families under test</a:t>
             </a:r>
@@ -7102,7 +8393,7 @@
         </p:nvSpPr>
         <p:spPr>
           <a:xfrm>
-            <a:off x="795528" y="1143000"/>
+            <a:off x="795528" y="1216152"/>
             <a:ext cx="2606040" cy="182880"/>
           </a:xfrm>
           <a:prstGeom prst="rect">
@@ -7123,9 +8414,9 @@
                 <a:solidFill>
                   <a:srgbClr val="223A5E"/>
                 </a:solidFill>
-                <a:latin typeface="Georgia" pitchFamily="34" charset="0"/>
-                <a:ea typeface="Georgia" pitchFamily="34" charset="-122"/>
-                <a:cs typeface="Georgia" pitchFamily="34" charset="-120"/>
+                <a:latin typeface="Times New Roman" pitchFamily="34" charset="0"/>
+                <a:ea typeface="Times New Roman" pitchFamily="34" charset="-122"/>
+                <a:cs typeface="Times New Roman" pitchFamily="34" charset="-120"/>
               </a:rPr>
               <a:t>Learning-based</a:t>
             </a:r>
@@ -7141,8 +8432,8 @@
         </p:nvSpPr>
         <p:spPr>
           <a:xfrm>
-            <a:off x="795528" y="1389888"/>
-            <a:ext cx="2606040" cy="530352"/>
+            <a:off x="795528" y="1463040"/>
+            <a:ext cx="2606040" cy="457200"/>
           </a:xfrm>
           <a:prstGeom prst="rect">
             <a:avLst/>
@@ -7164,11 +8455,11 @@
                 <a:solidFill>
                   <a:srgbClr val="1E2630"/>
                 </a:solidFill>
-                <a:latin typeface="Calibri" pitchFamily="34" charset="0"/>
-                <a:ea typeface="Calibri" pitchFamily="34" charset="-122"/>
-                <a:cs typeface="Calibri" pitchFamily="34" charset="-120"/>
-              </a:rPr>
-              <a:t>GNNDelete is the main fragile representative in this study.</a:t>
+                <a:latin typeface="Times New Roman" pitchFamily="34" charset="0"/>
+                <a:ea typeface="Times New Roman" pitchFamily="34" charset="-122"/>
+                <a:cs typeface="Times New Roman" pitchFamily="34" charset="-120"/>
+              </a:rPr>
+              <a:t>Learn a direct unlearning correction; GNNDelete is the fragile representative here.</a:t>
             </a:r>
             <a:endParaRPr lang="en-US" sz="1220" dirty="0"/>
           </a:p>
@@ -7216,7 +8507,7 @@
         </p:nvSpPr>
         <p:spPr>
           <a:xfrm>
-            <a:off x="795528" y="2240280"/>
+            <a:off x="795528" y="2313432"/>
             <a:ext cx="2606040" cy="182880"/>
           </a:xfrm>
           <a:prstGeom prst="rect">
@@ -7237,9 +8528,9 @@
                 <a:solidFill>
                   <a:srgbClr val="223A5E"/>
                 </a:solidFill>
-                <a:latin typeface="Georgia" pitchFamily="34" charset="0"/>
-                <a:ea typeface="Georgia" pitchFamily="34" charset="-122"/>
-                <a:cs typeface="Georgia" pitchFamily="34" charset="-120"/>
+                <a:latin typeface="Times New Roman" pitchFamily="34" charset="0"/>
+                <a:ea typeface="Times New Roman" pitchFamily="34" charset="-122"/>
+                <a:cs typeface="Times New Roman" pitchFamily="34" charset="-120"/>
               </a:rPr>
               <a:t>IF-based</a:t>
             </a:r>
@@ -7255,8 +8546,8 @@
         </p:nvSpPr>
         <p:spPr>
           <a:xfrm>
-            <a:off x="795528" y="2487168"/>
-            <a:ext cx="2606040" cy="530352"/>
+            <a:off x="795528" y="2560320"/>
+            <a:ext cx="2606040" cy="457200"/>
           </a:xfrm>
           <a:prstGeom prst="rect">
             <a:avLst/>
@@ -7278,11 +8569,11 @@
                 <a:solidFill>
                   <a:srgbClr val="1E2630"/>
                 </a:solidFill>
-                <a:latin typeface="Calibri" pitchFamily="34" charset="0"/>
-                <a:ea typeface="Calibri" pitchFamily="34" charset="-122"/>
-                <a:cs typeface="Calibri" pitchFamily="34" charset="-120"/>
-              </a:rPr>
-              <a:t>GIF remains comparatively stable under adversarial selection.</a:t>
+                <a:latin typeface="Times New Roman" pitchFamily="34" charset="0"/>
+                <a:ea typeface="Times New Roman" pitchFamily="34" charset="-122"/>
+                <a:cs typeface="Times New Roman" pitchFamily="34" charset="-120"/>
+              </a:rPr>
+              <a:t>Approximate deletion through local influence-style updates; GIF stays comparatively stable.</a:t>
             </a:r>
             <a:endParaRPr lang="en-US" sz="1220" dirty="0"/>
           </a:p>
@@ -7330,7 +8621,7 @@
         </p:nvSpPr>
         <p:spPr>
           <a:xfrm>
-            <a:off x="795528" y="3337560"/>
+            <a:off x="795528" y="3410712"/>
             <a:ext cx="2606040" cy="182880"/>
           </a:xfrm>
           <a:prstGeom prst="rect">
@@ -7351,9 +8642,9 @@
                 <a:solidFill>
                   <a:srgbClr val="223A5E"/>
                 </a:solidFill>
-                <a:latin typeface="Georgia" pitchFamily="34" charset="0"/>
-                <a:ea typeface="Georgia" pitchFamily="34" charset="-122"/>
-                <a:cs typeface="Georgia" pitchFamily="34" charset="-120"/>
+                <a:latin typeface="Times New Roman" pitchFamily="34" charset="0"/>
+                <a:ea typeface="Times New Roman" pitchFamily="34" charset="-122"/>
+                <a:cs typeface="Times New Roman" pitchFamily="34" charset="-120"/>
               </a:rPr>
               <a:t>Shard-based</a:t>
             </a:r>
@@ -7369,8 +8660,8 @@
         </p:nvSpPr>
         <p:spPr>
           <a:xfrm>
-            <a:off x="795528" y="3584448"/>
-            <a:ext cx="2606040" cy="530352"/>
+            <a:off x="795528" y="3657600"/>
+            <a:ext cx="2606040" cy="457200"/>
           </a:xfrm>
           <a:prstGeom prst="rect">
             <a:avLst/>
@@ -7392,11 +8683,11 @@
                 <a:solidFill>
                   <a:srgbClr val="1E2630"/>
                 </a:solidFill>
-                <a:latin typeface="Calibri" pitchFamily="34" charset="0"/>
-                <a:ea typeface="Calibri" pitchFamily="34" charset="-122"/>
-                <a:cs typeface="Calibri" pitchFamily="34" charset="-120"/>
-              </a:rPr>
-              <a:t>GraphEraser behaves differently and often improves in the tested settings.</a:t>
+                <a:latin typeface="Times New Roman" pitchFamily="34" charset="0"/>
+                <a:ea typeface="Times New Roman" pitchFamily="34" charset="-122"/>
+                <a:cs typeface="Times New Roman" pitchFamily="34" charset="-120"/>
+              </a:rPr>
+              <a:t>Partition the graph and retrain affected shards; GraphEraser behaves differently in the tested settings.</a:t>
             </a:r>
             <a:endParaRPr lang="en-US" sz="1220" dirty="0"/>
           </a:p>
@@ -7444,7 +8735,7 @@
         </p:nvSpPr>
         <p:spPr>
           <a:xfrm>
-            <a:off x="4069080" y="1143000"/>
+            <a:off x="4069080" y="1216152"/>
             <a:ext cx="4251960" cy="182880"/>
           </a:xfrm>
           <a:prstGeom prst="rect">
@@ -7465,9 +8756,9 @@
                 <a:solidFill>
                   <a:srgbClr val="F7F5F1"/>
                 </a:solidFill>
-                <a:latin typeface="Georgia" pitchFamily="34" charset="0"/>
-                <a:ea typeface="Georgia" pitchFamily="34" charset="-122"/>
-                <a:cs typeface="Georgia" pitchFamily="34" charset="-120"/>
+                <a:latin typeface="Times New Roman" pitchFamily="34" charset="0"/>
+                <a:ea typeface="Times New Roman" pitchFamily="34" charset="-122"/>
+                <a:cs typeface="Times New Roman" pitchFamily="34" charset="-120"/>
               </a:rPr>
               <a:t>Threat model</a:t>
             </a:r>
@@ -7483,8 +8774,8 @@
         </p:nvSpPr>
         <p:spPr>
           <a:xfrm>
-            <a:off x="4069080" y="1389888"/>
-            <a:ext cx="4251960" cy="1490472"/>
+            <a:off x="4069080" y="1463040"/>
+            <a:ext cx="4251960" cy="1417320"/>
           </a:xfrm>
           <a:prstGeom prst="rect">
             <a:avLst/>
@@ -7506,9 +8797,9 @@
                 <a:solidFill>
                   <a:srgbClr val="FFFFFF"/>
                 </a:solidFill>
-                <a:latin typeface="Calibri" pitchFamily="34" charset="0"/>
-                <a:ea typeface="Calibri" pitchFamily="34" charset="-122"/>
-                <a:cs typeface="Calibri" pitchFamily="34" charset="-120"/>
+                <a:latin typeface="Times New Roman" pitchFamily="34" charset="0"/>
+                <a:ea typeface="Times New Roman" pitchFamily="34" charset="-122"/>
+                <a:cs typeface="Times New Roman" pitchFamily="34" charset="-120"/>
               </a:rPr>
               <a:t>Attacker capability: choose which nodes to delete through the normal interface.</a:t>
             </a:r>
@@ -7529,9 +8820,9 @@
                 <a:solidFill>
                   <a:srgbClr val="FFFFFF"/>
                 </a:solidFill>
-                <a:latin typeface="Calibri" pitchFamily="34" charset="0"/>
-                <a:ea typeface="Calibri" pitchFamily="34" charset="-122"/>
-                <a:cs typeface="Calibri" pitchFamily="34" charset="-120"/>
+                <a:latin typeface="Times New Roman" pitchFamily="34" charset="0"/>
+                <a:ea typeface="Times New Roman" pitchFamily="34" charset="-122"/>
+                <a:cs typeface="Times New Roman" pitchFamily="34" charset="-120"/>
               </a:rPr>
               <a:t>Out of scope: poisoning labels, features, or hidden training code.</a:t>
             </a:r>
@@ -7552,9 +8843,9 @@
                 <a:solidFill>
                   <a:srgbClr val="FFFFFF"/>
                 </a:solidFill>
-                <a:latin typeface="Calibri" pitchFamily="34" charset="0"/>
-                <a:ea typeface="Calibri" pitchFamily="34" charset="-122"/>
-                <a:cs typeface="Calibri" pitchFamily="34" charset="-120"/>
+                <a:latin typeface="Times New Roman" pitchFamily="34" charset="0"/>
+                <a:ea typeface="Times New Roman" pitchFamily="34" charset="-122"/>
+                <a:cs typeface="Times New Roman" pitchFamily="34" charset="-120"/>
               </a:rPr>
               <a:t>Target: maximize post-unlearning utility loss beyond random deletion.</a:t>
             </a:r>
@@ -7627,9 +8918,9 @@
                 <a:solidFill>
                   <a:srgbClr val="FFFFFF"/>
                 </a:solidFill>
-                <a:latin typeface="Georgia" pitchFamily="34" charset="0"/>
-                <a:ea typeface="Georgia" pitchFamily="34" charset="-122"/>
-                <a:cs typeface="Georgia" pitchFamily="34" charset="-120"/>
+                <a:latin typeface="Times New Roman" pitchFamily="34" charset="0"/>
+                <a:ea typeface="Times New Roman" pitchFamily="34" charset="-122"/>
+                <a:cs typeface="Times New Roman" pitchFamily="34" charset="-120"/>
               </a:rPr>
               <a:t>ΔF1</a:t>
             </a:r>
@@ -7668,9 +8959,9 @@
                 <a:solidFill>
                   <a:srgbClr val="F7F5F1"/>
                 </a:solidFill>
-                <a:latin typeface="Calibri" pitchFamily="34" charset="0"/>
-                <a:ea typeface="Calibri" pitchFamily="34" charset="-122"/>
-                <a:cs typeface="Calibri" pitchFamily="34" charset="-120"/>
+                <a:latin typeface="Times New Roman" pitchFamily="34" charset="0"/>
+                <a:ea typeface="Times New Roman" pitchFamily="34" charset="-122"/>
+                <a:cs typeface="Times New Roman" pitchFamily="34" charset="-120"/>
               </a:rPr>
               <a:t>attack-over-random</a:t>
             </a:r>
@@ -7743,9 +9034,9 @@
                 <a:solidFill>
                   <a:srgbClr val="FFFFFF"/>
                 </a:solidFill>
-                <a:latin typeface="Georgia" pitchFamily="34" charset="0"/>
-                <a:ea typeface="Georgia" pitchFamily="34" charset="-122"/>
-                <a:cs typeface="Georgia" pitchFamily="34" charset="-120"/>
+                <a:latin typeface="Times New Roman" pitchFamily="34" charset="0"/>
+                <a:ea typeface="Times New Roman" pitchFamily="34" charset="-122"/>
+                <a:cs typeface="Times New Roman" pitchFamily="34" charset="-120"/>
               </a:rPr>
               <a:t>Gap</a:t>
             </a:r>
@@ -7784,9 +9075,9 @@
                 <a:solidFill>
                   <a:srgbClr val="F7F5F1"/>
                 </a:solidFill>
-                <a:latin typeface="Calibri" pitchFamily="34" charset="0"/>
-                <a:ea typeface="Calibri" pitchFamily="34" charset="-122"/>
-                <a:cs typeface="Calibri" pitchFamily="34" charset="-120"/>
+                <a:latin typeface="Times New Roman" pitchFamily="34" charset="0"/>
+                <a:ea typeface="Times New Roman" pitchFamily="34" charset="-122"/>
+                <a:cs typeface="Times New Roman" pitchFamily="34" charset="-120"/>
               </a:rPr>
               <a:t>vs exact retrain</a:t>
             </a:r>
@@ -7859,9 +9150,9 @@
                 <a:solidFill>
                   <a:srgbClr val="223A5E"/>
                 </a:solidFill>
-                <a:latin typeface="Georgia" pitchFamily="34" charset="0"/>
-                <a:ea typeface="Georgia" pitchFamily="34" charset="-122"/>
-                <a:cs typeface="Georgia" pitchFamily="34" charset="-120"/>
+                <a:latin typeface="Times New Roman" pitchFamily="34" charset="0"/>
+                <a:ea typeface="Times New Roman" pitchFamily="34" charset="-122"/>
+                <a:cs typeface="Times New Roman" pitchFamily="34" charset="-120"/>
               </a:rPr>
               <a:t>26.2%</a:t>
             </a:r>
@@ -7900,9 +9191,9 @@
                 <a:solidFill>
                   <a:srgbClr val="223A5E"/>
                 </a:solidFill>
-                <a:latin typeface="Calibri" pitchFamily="34" charset="0"/>
-                <a:ea typeface="Calibri" pitchFamily="34" charset="-122"/>
-                <a:cs typeface="Calibri" pitchFamily="34" charset="-120"/>
+                <a:latin typeface="Times New Roman" pitchFamily="34" charset="0"/>
+                <a:ea typeface="Times New Roman" pitchFamily="34" charset="-122"/>
+                <a:cs typeface="Times New Roman" pitchFamily="34" charset="-120"/>
               </a:rPr>
               <a:t>non-target changes</a:t>
             </a:r>
@@ -8006,9 +9297,9 @@
                 <a:solidFill>
                   <a:srgbClr val="FFFFFF"/>
                 </a:solidFill>
-                <a:latin typeface="Georgia" pitchFamily="34" charset="0"/>
-                <a:ea typeface="Georgia" pitchFamily="34" charset="-122"/>
-                <a:cs typeface="Georgia" pitchFamily="34" charset="-120"/>
+                <a:latin typeface="Times New Roman" pitchFamily="34" charset="0"/>
+                <a:ea typeface="Times New Roman" pitchFamily="34" charset="-122"/>
+                <a:cs typeface="Times New Roman" pitchFamily="34" charset="-120"/>
               </a:rPr>
               <a:t>Attack Pipeline And Experimental Matrix</a:t>
             </a:r>
@@ -8045,11 +9336,11 @@
                 <a:solidFill>
                   <a:srgbClr val="F7F5F1"/>
                 </a:solidFill>
-                <a:latin typeface="Calibri" pitchFamily="34" charset="0"/>
-                <a:ea typeface="Calibri" pitchFamily="34" charset="-122"/>
-                <a:cs typeface="Calibri" pitchFamily="34" charset="-120"/>
-              </a:rPr>
-              <a:t>05 / 14</a:t>
+                <a:latin typeface="Times New Roman" pitchFamily="34" charset="0"/>
+                <a:ea typeface="Times New Roman" pitchFamily="34" charset="-122"/>
+                <a:cs typeface="Times New Roman" pitchFamily="34" charset="-120"/>
+              </a:rPr>
+              <a:t>05 / 15</a:t>
             </a:r>
             <a:endParaRPr lang="en-US" sz="1000" dirty="0"/>
           </a:p>
@@ -8084,9 +9375,9 @@
                 <a:solidFill>
                   <a:srgbClr val="667085"/>
                 </a:solidFill>
-                <a:latin typeface="Calibri" pitchFamily="34" charset="0"/>
-                <a:ea typeface="Calibri" pitchFamily="34" charset="-122"/>
-                <a:cs typeface="Calibri" pitchFamily="34" charset="-120"/>
+                <a:latin typeface="Times New Roman" pitchFamily="34" charset="0"/>
+                <a:ea typeface="Times New Roman" pitchFamily="34" charset="-122"/>
+                <a:cs typeface="Times New Roman" pitchFamily="34" charset="-120"/>
               </a:rPr>
               <a:t>EE5003 MSc Project | Liu Chengyu</a:t>
             </a:r>
@@ -8123,9 +9414,9 @@
                 <a:solidFill>
                   <a:srgbClr val="667085"/>
                 </a:solidFill>
-                <a:latin typeface="Calibri" pitchFamily="34" charset="0"/>
-                <a:ea typeface="Calibri" pitchFamily="34" charset="-122"/>
-                <a:cs typeface="Calibri" pitchFamily="34" charset="-120"/>
+                <a:latin typeface="Times New Roman" pitchFamily="34" charset="0"/>
+                <a:ea typeface="Times New Roman" pitchFamily="34" charset="-122"/>
+                <a:cs typeface="Times New Roman" pitchFamily="34" charset="-120"/>
               </a:rPr>
               <a:t>Approximate Graph Unlearning Audit</a:t>
             </a:r>
@@ -8162,9 +9453,9 @@
                 <a:solidFill>
                   <a:srgbClr val="223A5E"/>
                 </a:solidFill>
-                <a:latin typeface="Georgia" pitchFamily="34" charset="0"/>
-                <a:ea typeface="Georgia" pitchFamily="34" charset="-122"/>
-                <a:cs typeface="Georgia" pitchFamily="34" charset="-120"/>
+                <a:latin typeface="Times New Roman" pitchFamily="34" charset="0"/>
+                <a:ea typeface="Times New Roman" pitchFamily="34" charset="-122"/>
+                <a:cs typeface="Times New Roman" pitchFamily="34" charset="-120"/>
               </a:rPr>
               <a:t>The workflow compares approximate unlearning against an exact-retrain control on the same deletion set.</a:t>
             </a:r>
@@ -8269,9 +9560,9 @@
                 <a:solidFill>
                   <a:srgbClr val="FFFFFF"/>
                 </a:solidFill>
-                <a:latin typeface="Calibri" pitchFamily="34" charset="0"/>
-                <a:ea typeface="Calibri" pitchFamily="34" charset="-122"/>
-                <a:cs typeface="Calibri" pitchFamily="34" charset="-120"/>
+                <a:latin typeface="Times New Roman" pitchFamily="34" charset="0"/>
+                <a:ea typeface="Times New Roman" pitchFamily="34" charset="-122"/>
+                <a:cs typeface="Times New Roman" pitchFamily="34" charset="-120"/>
               </a:rPr>
               <a:t>1</a:t>
             </a:r>
@@ -8308,9 +9599,9 @@
                 <a:solidFill>
                   <a:srgbClr val="223A5E"/>
                 </a:solidFill>
-                <a:latin typeface="Georgia" pitchFamily="34" charset="0"/>
-                <a:ea typeface="Georgia" pitchFamily="34" charset="-122"/>
-                <a:cs typeface="Georgia" pitchFamily="34" charset="-120"/>
+                <a:latin typeface="Times New Roman" pitchFamily="34" charset="0"/>
+                <a:ea typeface="Times New Roman" pitchFamily="34" charset="-122"/>
+                <a:cs typeface="Times New Roman" pitchFamily="34" charset="-120"/>
               </a:rPr>
               <a:t>Select nodes</a:t>
             </a:r>
@@ -8349,9 +9640,9 @@
                 <a:solidFill>
                   <a:srgbClr val="1E2630"/>
                 </a:solidFill>
-                <a:latin typeface="Calibri" pitchFamily="34" charset="0"/>
-                <a:ea typeface="Calibri" pitchFamily="34" charset="-122"/>
-                <a:cs typeface="Calibri" pitchFamily="34" charset="-120"/>
+                <a:latin typeface="Times New Roman" pitchFamily="34" charset="0"/>
+                <a:ea typeface="Times New Roman" pitchFamily="34" charset="-122"/>
+                <a:cs typeface="Times New Roman" pitchFamily="34" charset="-120"/>
               </a:rPr>
               <a:t>Use random or structured attack targets.</a:t>
             </a:r>
@@ -8456,9 +9747,9 @@
                 <a:solidFill>
                   <a:srgbClr val="FFFFFF"/>
                 </a:solidFill>
-                <a:latin typeface="Calibri" pitchFamily="34" charset="0"/>
-                <a:ea typeface="Calibri" pitchFamily="34" charset="-122"/>
-                <a:cs typeface="Calibri" pitchFamily="34" charset="-120"/>
+                <a:latin typeface="Times New Roman" pitchFamily="34" charset="0"/>
+                <a:ea typeface="Times New Roman" pitchFamily="34" charset="-122"/>
+                <a:cs typeface="Times New Roman" pitchFamily="34" charset="-120"/>
               </a:rPr>
               <a:t>2</a:t>
             </a:r>
@@ -8495,9 +9786,9 @@
                 <a:solidFill>
                   <a:srgbClr val="223A5E"/>
                 </a:solidFill>
-                <a:latin typeface="Georgia" pitchFamily="34" charset="0"/>
-                <a:ea typeface="Georgia" pitchFamily="34" charset="-122"/>
-                <a:cs typeface="Georgia" pitchFamily="34" charset="-120"/>
+                <a:latin typeface="Times New Roman" pitchFamily="34" charset="0"/>
+                <a:ea typeface="Times New Roman" pitchFamily="34" charset="-122"/>
+                <a:cs typeface="Times New Roman" pitchFamily="34" charset="-120"/>
               </a:rPr>
               <a:t>Apply unlearning</a:t>
             </a:r>
@@ -8536,9 +9827,9 @@
                 <a:solidFill>
                   <a:srgbClr val="1E2630"/>
                 </a:solidFill>
-                <a:latin typeface="Calibri" pitchFamily="34" charset="0"/>
-                <a:ea typeface="Calibri" pitchFamily="34" charset="-122"/>
-                <a:cs typeface="Calibri" pitchFamily="34" charset="-120"/>
+                <a:latin typeface="Times New Roman" pitchFamily="34" charset="0"/>
+                <a:ea typeface="Times New Roman" pitchFamily="34" charset="-122"/>
+                <a:cs typeface="Times New Roman" pitchFamily="34" charset="-120"/>
               </a:rPr>
               <a:t>Run the selected graph unlearning method.</a:t>
             </a:r>
@@ -8643,9 +9934,9 @@
                 <a:solidFill>
                   <a:srgbClr val="223A5E"/>
                 </a:solidFill>
-                <a:latin typeface="Calibri" pitchFamily="34" charset="0"/>
-                <a:ea typeface="Calibri" pitchFamily="34" charset="-122"/>
-                <a:cs typeface="Calibri" pitchFamily="34" charset="-120"/>
+                <a:latin typeface="Times New Roman" pitchFamily="34" charset="0"/>
+                <a:ea typeface="Times New Roman" pitchFamily="34" charset="-122"/>
+                <a:cs typeface="Times New Roman" pitchFamily="34" charset="-120"/>
               </a:rPr>
               <a:t>3</a:t>
             </a:r>
@@ -8682,9 +9973,9 @@
                 <a:solidFill>
                   <a:srgbClr val="223A5E"/>
                 </a:solidFill>
-                <a:latin typeface="Georgia" pitchFamily="34" charset="0"/>
-                <a:ea typeface="Georgia" pitchFamily="34" charset="-122"/>
-                <a:cs typeface="Georgia" pitchFamily="34" charset="-120"/>
+                <a:latin typeface="Times New Roman" pitchFamily="34" charset="0"/>
+                <a:ea typeface="Times New Roman" pitchFamily="34" charset="-122"/>
+                <a:cs typeface="Times New Roman" pitchFamily="34" charset="-120"/>
               </a:rPr>
               <a:t>Exact retrain control</a:t>
             </a:r>
@@ -8723,9 +10014,9 @@
                 <a:solidFill>
                   <a:srgbClr val="1E2630"/>
                 </a:solidFill>
-                <a:latin typeface="Calibri" pitchFamily="34" charset="0"/>
-                <a:ea typeface="Calibri" pitchFamily="34" charset="-122"/>
-                <a:cs typeface="Calibri" pitchFamily="34" charset="-120"/>
+                <a:latin typeface="Times New Roman" pitchFamily="34" charset="0"/>
+                <a:ea typeface="Times New Roman" pitchFamily="34" charset="-122"/>
+                <a:cs typeface="Times New Roman" pitchFamily="34" charset="-120"/>
               </a:rPr>
               <a:t>Retrain on the same deletions for the gold-standard reference.</a:t>
             </a:r>
@@ -8830,9 +10121,9 @@
                 <a:solidFill>
                   <a:srgbClr val="FFFFFF"/>
                 </a:solidFill>
-                <a:latin typeface="Calibri" pitchFamily="34" charset="0"/>
-                <a:ea typeface="Calibri" pitchFamily="34" charset="-122"/>
-                <a:cs typeface="Calibri" pitchFamily="34" charset="-120"/>
+                <a:latin typeface="Times New Roman" pitchFamily="34" charset="0"/>
+                <a:ea typeface="Times New Roman" pitchFamily="34" charset="-122"/>
+                <a:cs typeface="Times New Roman" pitchFamily="34" charset="-120"/>
               </a:rPr>
               <a:t>4</a:t>
             </a:r>
@@ -8869,9 +10160,9 @@
                 <a:solidFill>
                   <a:srgbClr val="223A5E"/>
                 </a:solidFill>
-                <a:latin typeface="Georgia" pitchFamily="34" charset="0"/>
-                <a:ea typeface="Georgia" pitchFamily="34" charset="-122"/>
-                <a:cs typeface="Georgia" pitchFamily="34" charset="-120"/>
+                <a:latin typeface="Times New Roman" pitchFamily="34" charset="0"/>
+                <a:ea typeface="Times New Roman" pitchFamily="34" charset="-122"/>
+                <a:cs typeface="Times New Roman" pitchFamily="34" charset="-120"/>
               </a:rPr>
               <a:t>Compare outcomes</a:t>
             </a:r>
@@ -8910,9 +10201,9 @@
                 <a:solidFill>
                   <a:srgbClr val="1E2630"/>
                 </a:solidFill>
-                <a:latin typeface="Calibri" pitchFamily="34" charset="0"/>
-                <a:ea typeface="Calibri" pitchFamily="34" charset="-122"/>
-                <a:cs typeface="Calibri" pitchFamily="34" charset="-120"/>
+                <a:latin typeface="Times New Roman" pitchFamily="34" charset="0"/>
+                <a:ea typeface="Times New Roman" pitchFamily="34" charset="-122"/>
+                <a:cs typeface="Times New Roman" pitchFamily="34" charset="-120"/>
               </a:rPr>
               <a:t>Read utility loss, retrain gap, and collateral damage.</a:t>
             </a:r>
@@ -8962,7 +10253,7 @@
         </p:nvSpPr>
         <p:spPr>
           <a:xfrm>
-            <a:off x="4937760" y="1463040"/>
+            <a:off x="4937760" y="1536192"/>
             <a:ext cx="3337560" cy="182880"/>
           </a:xfrm>
           <a:prstGeom prst="rect">
@@ -8983,9 +10274,9 @@
                 <a:solidFill>
                   <a:srgbClr val="223A5E"/>
                 </a:solidFill>
-                <a:latin typeface="Georgia" pitchFamily="34" charset="0"/>
-                <a:ea typeface="Georgia" pitchFamily="34" charset="-122"/>
-                <a:cs typeface="Georgia" pitchFamily="34" charset="-120"/>
+                <a:latin typeface="Times New Roman" pitchFamily="34" charset="0"/>
+                <a:ea typeface="Times New Roman" pitchFamily="34" charset="-122"/>
+                <a:cs typeface="Times New Roman" pitchFamily="34" charset="-120"/>
               </a:rPr>
               <a:t>Experimental matrix</a:t>
             </a:r>
@@ -9001,8 +10292,8 @@
         </p:nvSpPr>
         <p:spPr>
           <a:xfrm>
-            <a:off x="4937760" y="1709928"/>
-            <a:ext cx="3337560" cy="2843784"/>
+            <a:off x="4937760" y="1783080"/>
+            <a:ext cx="3337560" cy="2770632"/>
           </a:xfrm>
           <a:prstGeom prst="rect">
             <a:avLst/>
@@ -9024,9 +10315,9 @@
                 <a:solidFill>
                   <a:srgbClr val="1E2630"/>
                 </a:solidFill>
-                <a:latin typeface="Calibri" pitchFamily="34" charset="0"/>
-                <a:ea typeface="Calibri" pitchFamily="34" charset="-122"/>
-                <a:cs typeface="Calibri" pitchFamily="34" charset="-120"/>
+                <a:latin typeface="Times New Roman" pitchFamily="34" charset="0"/>
+                <a:ea typeface="Times New Roman" pitchFamily="34" charset="-122"/>
+                <a:cs typeface="Times New Roman" pitchFamily="34" charset="-120"/>
               </a:rPr>
               <a:t>Methods: 5</a:t>
             </a:r>
@@ -9041,9 +10332,9 @@
                 <a:solidFill>
                   <a:srgbClr val="1E2630"/>
                 </a:solidFill>
-                <a:latin typeface="Calibri" pitchFamily="34" charset="0"/>
-                <a:ea typeface="Calibri" pitchFamily="34" charset="-122"/>
-                <a:cs typeface="Calibri" pitchFamily="34" charset="-120"/>
+                <a:latin typeface="Times New Roman" pitchFamily="34" charset="0"/>
+                <a:ea typeface="Times New Roman" pitchFamily="34" charset="-122"/>
+                <a:cs typeface="Times New Roman" pitchFamily="34" charset="-120"/>
               </a:rPr>
               <a:t>Datasets: 2 citation graphs</a:t>
             </a:r>
@@ -9058,9 +10349,9 @@
                 <a:solidFill>
                   <a:srgbClr val="1E2630"/>
                 </a:solidFill>
-                <a:latin typeface="Calibri" pitchFamily="34" charset="0"/>
-                <a:ea typeface="Calibri" pitchFamily="34" charset="-122"/>
-                <a:cs typeface="Calibri" pitchFamily="34" charset="-120"/>
+                <a:latin typeface="Times New Roman" pitchFamily="34" charset="0"/>
+                <a:ea typeface="Times New Roman" pitchFamily="34" charset="-122"/>
+                <a:cs typeface="Times New Roman" pitchFamily="34" charset="-120"/>
               </a:rPr>
               <a:t>Backbones: 3 GNN architectures</a:t>
             </a:r>
@@ -9075,9 +10366,9 @@
                 <a:solidFill>
                   <a:srgbClr val="1E2630"/>
                 </a:solidFill>
-                <a:latin typeface="Calibri" pitchFamily="34" charset="0"/>
-                <a:ea typeface="Calibri" pitchFamily="34" charset="-122"/>
-                <a:cs typeface="Calibri" pitchFamily="34" charset="-120"/>
+                <a:latin typeface="Times New Roman" pitchFamily="34" charset="0"/>
+                <a:ea typeface="Times New Roman" pitchFamily="34" charset="-122"/>
+                <a:cs typeface="Times New Roman" pitchFamily="34" charset="-120"/>
               </a:rPr>
               <a:t>Strategies: 6 node-selection methods</a:t>
             </a:r>
@@ -9092,9 +10383,9 @@
                 <a:solidFill>
                   <a:srgbClr val="1E2630"/>
                 </a:solidFill>
-                <a:latin typeface="Calibri" pitchFamily="34" charset="0"/>
-                <a:ea typeface="Calibri" pitchFamily="34" charset="-122"/>
-                <a:cs typeface="Calibri" pitchFamily="34" charset="-120"/>
+                <a:latin typeface="Times New Roman" pitchFamily="34" charset="0"/>
+                <a:ea typeface="Times New Roman" pitchFamily="34" charset="-122"/>
+                <a:cs typeface="Times New Roman" pitchFamily="34" charset="-120"/>
               </a:rPr>
               <a:t>Runs: 950 experiment executions</a:t>
             </a:r>
@@ -9115,11 +10406,11 @@
                 <a:solidFill>
                   <a:srgbClr val="1E2630"/>
                 </a:solidFill>
-                <a:latin typeface="Calibri" pitchFamily="34" charset="0"/>
-                <a:ea typeface="Calibri" pitchFamily="34" charset="-122"/>
-                <a:cs typeface="Calibri" pitchFamily="34" charset="-120"/>
-              </a:rPr>
-              <a:t>Story: spectrum, deep dive, attribution, and efficiency.</a:t>
+                <a:latin typeface="Times New Roman" pitchFamily="34" charset="0"/>
+                <a:ea typeface="Times New Roman" pitchFamily="34" charset="-122"/>
+                <a:cs typeface="Times New Roman" pitchFamily="34" charset="-120"/>
+              </a:rPr>
+              <a:t>Outputs: relative_f1_drop, retrain_gap, collateral damage, and efficiency.</a:t>
             </a:r>
             <a:endParaRPr lang="en-US" sz="1220" dirty="0"/>
           </a:p>
@@ -9221,11 +10512,11 @@
                 <a:solidFill>
                   <a:srgbClr val="FFFFFF"/>
                 </a:solidFill>
-                <a:latin typeface="Georgia" pitchFamily="34" charset="0"/>
-                <a:ea typeface="Georgia" pitchFamily="34" charset="-122"/>
-                <a:cs typeface="Georgia" pitchFamily="34" charset="-120"/>
-              </a:rPr>
-              <a:t>What Was Built In OpenGU</a:t>
+                <a:latin typeface="Times New Roman" pitchFamily="34" charset="0"/>
+                <a:ea typeface="Times New Roman" pitchFamily="34" charset="-122"/>
+                <a:cs typeface="Times New Roman" pitchFamily="34" charset="-120"/>
+              </a:rPr>
+              <a:t>Attack Selection Logic</a:t>
             </a:r>
             <a:endParaRPr lang="en-US" sz="2400" dirty="0"/>
           </a:p>
@@ -9260,11 +10551,11 @@
                 <a:solidFill>
                   <a:srgbClr val="F7F5F1"/>
                 </a:solidFill>
-                <a:latin typeface="Calibri" pitchFamily="34" charset="0"/>
-                <a:ea typeface="Calibri" pitchFamily="34" charset="-122"/>
-                <a:cs typeface="Calibri" pitchFamily="34" charset="-120"/>
-              </a:rPr>
-              <a:t>06 / 14</a:t>
+                <a:latin typeface="Times New Roman" pitchFamily="34" charset="0"/>
+                <a:ea typeface="Times New Roman" pitchFamily="34" charset="-122"/>
+                <a:cs typeface="Times New Roman" pitchFamily="34" charset="-120"/>
+              </a:rPr>
+              <a:t>06 / 15</a:t>
             </a:r>
             <a:endParaRPr lang="en-US" sz="1000" dirty="0"/>
           </a:p>
@@ -9299,9 +10590,9 @@
                 <a:solidFill>
                   <a:srgbClr val="667085"/>
                 </a:solidFill>
-                <a:latin typeface="Calibri" pitchFamily="34" charset="0"/>
-                <a:ea typeface="Calibri" pitchFamily="34" charset="-122"/>
-                <a:cs typeface="Calibri" pitchFamily="34" charset="-120"/>
+                <a:latin typeface="Times New Roman" pitchFamily="34" charset="0"/>
+                <a:ea typeface="Times New Roman" pitchFamily="34" charset="-122"/>
+                <a:cs typeface="Times New Roman" pitchFamily="34" charset="-120"/>
               </a:rPr>
               <a:t>EE5003 MSc Project | Liu Chengyu</a:t>
             </a:r>
@@ -9338,9 +10629,9 @@
                 <a:solidFill>
                   <a:srgbClr val="667085"/>
                 </a:solidFill>
-                <a:latin typeface="Calibri" pitchFamily="34" charset="0"/>
-                <a:ea typeface="Calibri" pitchFamily="34" charset="-122"/>
-                <a:cs typeface="Calibri" pitchFamily="34" charset="-120"/>
+                <a:latin typeface="Times New Roman" pitchFamily="34" charset="0"/>
+                <a:ea typeface="Times New Roman" pitchFamily="34" charset="-122"/>
+                <a:cs typeface="Times New Roman" pitchFamily="34" charset="-120"/>
               </a:rPr>
               <a:t>Approximate Graph Unlearning Audit</a:t>
             </a:r>
@@ -9357,7 +10648,7 @@
         <p:spPr>
           <a:xfrm>
             <a:off x="621792" y="768096"/>
-            <a:ext cx="6675120" cy="228600"/>
+            <a:ext cx="7406640" cy="256032"/>
           </a:xfrm>
           <a:prstGeom prst="rect">
             <a:avLst/>
@@ -9373,17 +10664,17 @@
               <a:buNone/>
             </a:pPr>
             <a:r>
-              <a:rPr lang="en-US" sz="1800" b="1" dirty="0">
+              <a:rPr lang="en-US" sz="1660" b="1" dirty="0">
                 <a:solidFill>
                   <a:srgbClr val="223A5E"/>
                 </a:solidFill>
-                <a:latin typeface="Georgia" pitchFamily="34" charset="0"/>
-                <a:ea typeface="Georgia" pitchFamily="34" charset="-122"/>
-                <a:cs typeface="Georgia" pitchFamily="34" charset="-120"/>
-              </a:rPr>
-              <a:t>The project contribution is a reusable adversarial-audit workflow, not only a single batch of experiments.</a:t>
-            </a:r>
-            <a:endParaRPr lang="en-US" sz="1800" dirty="0"/>
+                <a:latin typeface="Times New Roman" pitchFamily="34" charset="0"/>
+                <a:ea typeface="Times New Roman" pitchFamily="34" charset="-122"/>
+                <a:cs typeface="Times New Roman" pitchFamily="34" charset="-120"/>
+              </a:rPr>
+              <a:t>The attack is not only about how many nodes are deleted, but about what logic is used to choose them.</a:t>
+            </a:r>
+            <a:endParaRPr lang="en-US" sz="1660" dirty="0"/>
           </a:p>
         </p:txBody>
       </p:sp>
@@ -9395,12 +10686,12 @@
         </p:nvSpPr>
         <p:spPr>
           <a:xfrm>
-            <a:off x="731520" y="1325880"/>
-            <a:ext cx="3657600" cy="822960"/>
+            <a:off x="713232" y="1325880"/>
+            <a:ext cx="2487168" cy="2029968"/>
           </a:xfrm>
           <a:prstGeom prst="roundRect">
             <a:avLst>
-              <a:gd name="adj" fmla="val 5556"/>
+              <a:gd name="adj" fmla="val 2252"/>
             </a:avLst>
           </a:prstGeom>
           <a:solidFill>
@@ -9429,8 +10720,8 @@
         </p:nvSpPr>
         <p:spPr>
           <a:xfrm>
-            <a:off x="868680" y="1417320"/>
-            <a:ext cx="3383280" cy="182880"/>
+            <a:off x="850392" y="1490472"/>
+            <a:ext cx="2212848" cy="182880"/>
           </a:xfrm>
           <a:prstGeom prst="rect">
             <a:avLst/>
@@ -9450,11 +10741,11 @@
                 <a:solidFill>
                   <a:srgbClr val="223A5E"/>
                 </a:solidFill>
-                <a:latin typeface="Georgia" pitchFamily="34" charset="0"/>
-                <a:ea typeface="Georgia" pitchFamily="34" charset="-122"/>
-                <a:cs typeface="Georgia" pitchFamily="34" charset="-120"/>
-              </a:rPr>
-              <a:t>Execution</a:t>
+                <a:latin typeface="Times New Roman" pitchFamily="34" charset="0"/>
+                <a:ea typeface="Times New Roman" pitchFamily="34" charset="-122"/>
+                <a:cs typeface="Times New Roman" pitchFamily="34" charset="-120"/>
+              </a:rPr>
+              <a:t>TracIn / IF-style</a:t>
             </a:r>
             <a:endParaRPr lang="en-US" sz="1700" dirty="0"/>
           </a:p>
@@ -9468,8 +10759,8 @@
         </p:nvSpPr>
         <p:spPr>
           <a:xfrm>
-            <a:off x="868680" y="1664208"/>
-            <a:ext cx="3383280" cy="393192"/>
+            <a:off x="850392" y="1737360"/>
+            <a:ext cx="2212848" cy="1527048"/>
           </a:xfrm>
           <a:prstGeom prst="rect">
             <a:avLst/>
@@ -9491,14 +10782,54 @@
                 <a:solidFill>
                   <a:srgbClr val="1E2630"/>
                 </a:solidFill>
-                <a:latin typeface="Calibri" pitchFamily="34" charset="0"/>
-                <a:ea typeface="Calibri" pitchFamily="34" charset="-122"/>
-                <a:cs typeface="Calibri" pitchFamily="34" charset="-120"/>
-              </a:rPr>
-              <a:t>Structured batch experiment runs across methods, datasets, and deletion ratios.</a:t>
+                <a:latin typeface="Times New Roman" pitchFamily="34" charset="0"/>
+                <a:ea typeface="Times New Roman" pitchFamily="34" charset="-122"/>
+                <a:cs typeface="Times New Roman" pitchFamily="34" charset="-120"/>
+              </a:rPr>
+              <a:t>Model-aware logic.</a:t>
             </a:r>
             <a:endParaRPr lang="en-US" sz="1220" dirty="0"/>
           </a:p>
+          <a:p>
+            <a:pPr marL="0" indent="0">
+              <a:buNone/>
+            </a:pPr>
+            <a:r>
+              <a:rPr lang="en-US" sz="1220" dirty="0">
+                <a:solidFill>
+                  <a:srgbClr val="1E2630"/>
+                </a:solidFill>
+                <a:latin typeface="Times New Roman" pitchFamily="34" charset="0"/>
+                <a:ea typeface="Times New Roman" pitchFamily="34" charset="-122"/>
+                <a:cs typeface="Times New Roman" pitchFamily="34" charset="-120"/>
+              </a:rPr>
+              <a:t>Pick nodes with high training influence on the learned model.</a:t>
+            </a:r>
+            <a:endParaRPr lang="en-US" sz="1220" dirty="0"/>
+          </a:p>
+          <a:p>
+            <a:pPr marL="0" indent="0">
+              <a:buNone/>
+            </a:pPr>
+            <a:endParaRPr lang="en-US" sz="1220" dirty="0"/>
+          </a:p>
+          <a:p>
+            <a:pPr marL="0" indent="0">
+              <a:buNone/>
+            </a:pPr>
+            <a:r>
+              <a:rPr lang="en-US" sz="1220" dirty="0">
+                <a:solidFill>
+                  <a:srgbClr val="1E2630"/>
+                </a:solidFill>
+                <a:latin typeface="Times New Roman" pitchFamily="34" charset="0"/>
+                <a:ea typeface="Times New Roman" pitchFamily="34" charset="-122"/>
+                <a:cs typeface="Times New Roman" pitchFamily="34" charset="-120"/>
+              </a:rPr>
+              <a:t>Shorthand: score(v) ≈ I_train(v)</a:t>
+            </a:r>
+            <a:endParaRPr lang="en-US" sz="1220" dirty="0"/>
+          </a:p>
         </p:txBody>
       </p:sp>
       <p:sp>
@@ -9509,12 +10840,166 @@
         </p:nvSpPr>
         <p:spPr>
           <a:xfrm>
-            <a:off x="4754880" y="1325880"/>
-            <a:ext cx="3657600" cy="822960"/>
+            <a:off x="3328416" y="1325880"/>
+            <a:ext cx="2487168" cy="2029968"/>
           </a:xfrm>
           <a:prstGeom prst="roundRect">
             <a:avLst>
-              <a:gd name="adj" fmla="val 5556"/>
+              <a:gd name="adj" fmla="val 2252"/>
+            </a:avLst>
+          </a:prstGeom>
+          <a:solidFill>
+            <a:srgbClr val="E8EEF5"/>
+          </a:solidFill>
+          <a:ln w="13970">
+            <a:solidFill>
+              <a:srgbClr val="E8EEF5"/>
+            </a:solidFill>
+            <a:prstDash val="solid"/>
+          </a:ln>
+        </p:spPr>
+        <p:txBody>
+          <a:bodyPr/>
+          <a:lstStyle/>
+          <a:p>
+            <a:endParaRPr lang="zh-CN" altLang="en-US"/>
+          </a:p>
+        </p:txBody>
+      </p:sp>
+      <p:sp>
+        <p:nvSpPr>
+          <p:cNvPr id="12" name="Text 10"/>
+          <p:cNvSpPr/>
+          <p:nvPr/>
+        </p:nvSpPr>
+        <p:spPr>
+          <a:xfrm>
+            <a:off x="3465576" y="1490472"/>
+            <a:ext cx="2212848" cy="182880"/>
+          </a:xfrm>
+          <a:prstGeom prst="rect">
+            <a:avLst/>
+          </a:prstGeom>
+          <a:noFill/>
+          <a:ln/>
+        </p:spPr>
+        <p:txBody>
+          <a:bodyPr wrap="square" lIns="0" tIns="0" rIns="0" bIns="0" rtlCol="0" anchor="ctr"/>
+          <a:lstStyle/>
+          <a:p>
+            <a:pPr marL="0" indent="0">
+              <a:buNone/>
+            </a:pPr>
+            <a:r>
+              <a:rPr lang="en-US" sz="1700" b="1" dirty="0">
+                <a:solidFill>
+                  <a:srgbClr val="223A5E"/>
+                </a:solidFill>
+                <a:latin typeface="Times New Roman" pitchFamily="34" charset="0"/>
+                <a:ea typeface="Times New Roman" pitchFamily="34" charset="-122"/>
+                <a:cs typeface="Times New Roman" pitchFamily="34" charset="-120"/>
+              </a:rPr>
+              <a:t>IM</a:t>
+            </a:r>
+            <a:endParaRPr lang="en-US" sz="1700" dirty="0"/>
+          </a:p>
+        </p:txBody>
+      </p:sp>
+      <p:sp>
+        <p:nvSpPr>
+          <p:cNvPr id="13" name="Text 11"/>
+          <p:cNvSpPr/>
+          <p:nvPr/>
+        </p:nvSpPr>
+        <p:spPr>
+          <a:xfrm>
+            <a:off x="3465576" y="1737360"/>
+            <a:ext cx="2212848" cy="1527048"/>
+          </a:xfrm>
+          <a:prstGeom prst="rect">
+            <a:avLst/>
+          </a:prstGeom>
+          <a:noFill/>
+          <a:ln/>
+        </p:spPr>
+        <p:txBody>
+          <a:bodyPr wrap="square" lIns="0" tIns="0" rIns="0" bIns="0" rtlCol="0" anchor="ctr">
+            <a:normAutofit/>
+          </a:bodyPr>
+          <a:lstStyle/>
+          <a:p>
+            <a:pPr marL="0" indent="0">
+              <a:buNone/>
+            </a:pPr>
+            <a:r>
+              <a:rPr lang="en-US" sz="1220" dirty="0">
+                <a:solidFill>
+                  <a:srgbClr val="1E2630"/>
+                </a:solidFill>
+                <a:latin typeface="Times New Roman" pitchFamily="34" charset="0"/>
+                <a:ea typeface="Times New Roman" pitchFamily="34" charset="-122"/>
+                <a:cs typeface="Times New Roman" pitchFamily="34" charset="-120"/>
+              </a:rPr>
+              <a:t>Graph-structural logic.</a:t>
+            </a:r>
+            <a:endParaRPr lang="en-US" sz="1220" dirty="0"/>
+          </a:p>
+          <a:p>
+            <a:pPr marL="0" indent="0">
+              <a:buNone/>
+            </a:pPr>
+            <a:r>
+              <a:rPr lang="en-US" sz="1220" dirty="0">
+                <a:solidFill>
+                  <a:srgbClr val="1E2630"/>
+                </a:solidFill>
+                <a:latin typeface="Times New Roman" pitchFamily="34" charset="0"/>
+                <a:ea typeface="Times New Roman" pitchFamily="34" charset="-122"/>
+                <a:cs typeface="Times New Roman" pitchFamily="34" charset="-120"/>
+              </a:rPr>
+              <a:t>Pick nodes that maximize spread or disruption in the graph.</a:t>
+            </a:r>
+            <a:endParaRPr lang="en-US" sz="1220" dirty="0"/>
+          </a:p>
+          <a:p>
+            <a:pPr marL="0" indent="0">
+              <a:buNone/>
+            </a:pPr>
+            <a:endParaRPr lang="en-US" sz="1220" dirty="0"/>
+          </a:p>
+          <a:p>
+            <a:pPr marL="0" indent="0">
+              <a:buNone/>
+            </a:pPr>
+            <a:r>
+              <a:rPr lang="en-US" sz="1220" dirty="0">
+                <a:solidFill>
+                  <a:srgbClr val="1E2630"/>
+                </a:solidFill>
+                <a:latin typeface="Times New Roman" pitchFamily="34" charset="0"/>
+                <a:ea typeface="Times New Roman" pitchFamily="34" charset="-122"/>
+                <a:cs typeface="Times New Roman" pitchFamily="34" charset="-120"/>
+              </a:rPr>
+              <a:t>Shorthand: score(S) = spread(S)</a:t>
+            </a:r>
+            <a:endParaRPr lang="en-US" sz="1220" dirty="0"/>
+          </a:p>
+        </p:txBody>
+      </p:sp>
+      <p:sp>
+        <p:nvSpPr>
+          <p:cNvPr id="14" name="Shape 12"/>
+          <p:cNvSpPr/>
+          <p:nvPr/>
+        </p:nvSpPr>
+        <p:spPr>
+          <a:xfrm>
+            <a:off x="5943600" y="1325880"/>
+            <a:ext cx="2487168" cy="2029968"/>
+          </a:xfrm>
+          <a:prstGeom prst="roundRect">
+            <a:avLst>
+              <a:gd name="adj" fmla="val 2252"/>
             </a:avLst>
           </a:prstGeom>
           <a:solidFill>
@@ -9537,14 +11022,14 @@
       </p:sp>
       <p:sp>
         <p:nvSpPr>
-          <p:cNvPr id="12" name="Text 10"/>
-          <p:cNvSpPr/>
-          <p:nvPr/>
-        </p:nvSpPr>
-        <p:spPr>
-          <a:xfrm>
-            <a:off x="4892040" y="1417320"/>
-            <a:ext cx="3383280" cy="182880"/>
+          <p:cNvPr id="15" name="Text 13"/>
+          <p:cNvSpPr/>
+          <p:nvPr/>
+        </p:nvSpPr>
+        <p:spPr>
+          <a:xfrm>
+            <a:off x="6080760" y="1490472"/>
+            <a:ext cx="2212848" cy="182880"/>
           </a:xfrm>
           <a:prstGeom prst="rect">
             <a:avLst/>
@@ -9564,11 +11049,11 @@
                 <a:solidFill>
                   <a:srgbClr val="223A5E"/>
                 </a:solidFill>
-                <a:latin typeface="Georgia" pitchFamily="34" charset="0"/>
-                <a:ea typeface="Georgia" pitchFamily="34" charset="-122"/>
-                <a:cs typeface="Georgia" pitchFamily="34" charset="-120"/>
-              </a:rPr>
-              <a:t>Result discovery</a:t>
+                <a:latin typeface="Times New Roman" pitchFamily="34" charset="0"/>
+                <a:ea typeface="Times New Roman" pitchFamily="34" charset="-122"/>
+                <a:cs typeface="Times New Roman" pitchFamily="34" charset="-120"/>
+              </a:rPr>
+              <a:t>Hybrid</a:t>
             </a:r>
             <a:endParaRPr lang="en-US" sz="1700" dirty="0"/>
           </a:p>
@@ -9576,14 +11061,14 @@
       </p:sp>
       <p:sp>
         <p:nvSpPr>
-          <p:cNvPr id="13" name="Text 11"/>
-          <p:cNvSpPr/>
-          <p:nvPr/>
-        </p:nvSpPr>
-        <p:spPr>
-          <a:xfrm>
-            <a:off x="4892040" y="1664208"/>
-            <a:ext cx="3383280" cy="393192"/>
+          <p:cNvPr id="16" name="Text 14"/>
+          <p:cNvSpPr/>
+          <p:nvPr/>
+        </p:nvSpPr>
+        <p:spPr>
+          <a:xfrm>
+            <a:off x="6080760" y="1737360"/>
+            <a:ext cx="2212848" cy="1527048"/>
           </a:xfrm>
           <a:prstGeom prst="rect">
             <a:avLst/>
@@ -9605,38 +11090,61 @@
                 <a:solidFill>
                   <a:srgbClr val="1E2630"/>
                 </a:solidFill>
-                <a:latin typeface="Calibri" pitchFamily="34" charset="0"/>
-                <a:ea typeface="Calibri" pitchFamily="34" charset="-122"/>
-                <a:cs typeface="Calibri" pitchFamily="34" charset="-120"/>
-              </a:rPr>
-              <a:t>Auto-discovery of stored outputs to reduce manual bookkeeping.</a:t>
+                <a:latin typeface="Times New Roman" pitchFamily="34" charset="0"/>
+                <a:ea typeface="Times New Roman" pitchFamily="34" charset="-122"/>
+                <a:cs typeface="Times New Roman" pitchFamily="34" charset="-120"/>
+              </a:rPr>
+              <a:t>Combine model-side influence with topology-side spread to search for stronger targets.</a:t>
             </a:r>
             <a:endParaRPr lang="en-US" sz="1220" dirty="0"/>
           </a:p>
-        </p:txBody>
-      </p:sp>
-      <p:sp>
-        <p:nvSpPr>
-          <p:cNvPr id="14" name="Shape 12"/>
-          <p:cNvSpPr/>
-          <p:nvPr/>
-        </p:nvSpPr>
-        <p:spPr>
-          <a:xfrm>
-            <a:off x="731520" y="2313432"/>
-            <a:ext cx="3657600" cy="822960"/>
+          <a:p>
+            <a:pPr marL="0" indent="0">
+              <a:buNone/>
+            </a:pPr>
+            <a:endParaRPr lang="en-US" sz="1220" dirty="0"/>
+          </a:p>
+          <a:p>
+            <a:pPr marL="0" indent="0">
+              <a:buNone/>
+            </a:pPr>
+            <a:r>
+              <a:rPr lang="en-US" sz="1220" dirty="0">
+                <a:solidFill>
+                  <a:srgbClr val="1E2630"/>
+                </a:solidFill>
+                <a:latin typeface="Times New Roman" pitchFamily="34" charset="0"/>
+                <a:ea typeface="Times New Roman" pitchFamily="34" charset="-122"/>
+                <a:cs typeface="Times New Roman" pitchFamily="34" charset="-120"/>
+              </a:rPr>
+              <a:t>Shorthand: score(v) = α·z_IF(v) + (1-α)·z_IM(v)</a:t>
+            </a:r>
+            <a:endParaRPr lang="en-US" sz="1220" dirty="0"/>
+          </a:p>
+        </p:txBody>
+      </p:sp>
+      <p:sp>
+        <p:nvSpPr>
+          <p:cNvPr id="17" name="Shape 15"/>
+          <p:cNvSpPr/>
+          <p:nvPr/>
+        </p:nvSpPr>
+        <p:spPr>
+          <a:xfrm>
+            <a:off x="1078992" y="3803904"/>
+            <a:ext cx="6912864" cy="694944"/>
           </a:xfrm>
           <a:prstGeom prst="roundRect">
             <a:avLst>
-              <a:gd name="adj" fmla="val 5556"/>
+              <a:gd name="adj" fmla="val 6579"/>
             </a:avLst>
           </a:prstGeom>
           <a:solidFill>
-            <a:srgbClr val="FFFFFF"/>
+            <a:srgbClr val="223A5E"/>
           </a:solidFill>
           <a:ln w="13970">
             <a:solidFill>
-              <a:srgbClr val="D9DEE7"/>
+              <a:srgbClr val="223A5E"/>
             </a:solidFill>
             <a:prstDash val="solid"/>
           </a:ln>
@@ -9651,14 +11159,14 @@
       </p:sp>
       <p:sp>
         <p:nvSpPr>
-          <p:cNvPr id="15" name="Text 13"/>
-          <p:cNvSpPr/>
-          <p:nvPr/>
-        </p:nvSpPr>
-        <p:spPr>
-          <a:xfrm>
-            <a:off x="868680" y="2404872"/>
-            <a:ext cx="3383280" cy="182880"/>
+          <p:cNvPr id="18" name="Text 16"/>
+          <p:cNvSpPr/>
+          <p:nvPr/>
+        </p:nvSpPr>
+        <p:spPr>
+          <a:xfrm>
+            <a:off x="1216152" y="3968496"/>
+            <a:ext cx="6638544" cy="182880"/>
           </a:xfrm>
           <a:prstGeom prst="rect">
             <a:avLst/>
@@ -9676,13 +11184,13 @@
             <a:r>
               <a:rPr lang="en-US" sz="1700" b="1" dirty="0">
                 <a:solidFill>
-                  <a:srgbClr val="223A5E"/>
-                </a:solidFill>
-                <a:latin typeface="Georgia" pitchFamily="34" charset="0"/>
-                <a:ea typeface="Georgia" pitchFamily="34" charset="-122"/>
-                <a:cs typeface="Georgia" pitchFamily="34" charset="-120"/>
-              </a:rPr>
-              <a:t>Collateral analysis</a:t>
+                  <a:srgbClr val="F7F5F1"/>
+                </a:solidFill>
+                <a:latin typeface="Times New Roman" pitchFamily="34" charset="0"/>
+                <a:ea typeface="Times New Roman" pitchFamily="34" charset="-122"/>
+                <a:cs typeface="Times New Roman" pitchFamily="34" charset="-120"/>
+              </a:rPr>
+              <a:t>Reading rule</a:t>
             </a:r>
             <a:endParaRPr lang="en-US" sz="1700" dirty="0"/>
           </a:p>
@@ -9690,14 +11198,14 @@
       </p:sp>
       <p:sp>
         <p:nvSpPr>
-          <p:cNvPr id="16" name="Text 14"/>
-          <p:cNvSpPr/>
-          <p:nvPr/>
-        </p:nvSpPr>
-        <p:spPr>
-          <a:xfrm>
-            <a:off x="868680" y="2651760"/>
-            <a:ext cx="3383280" cy="393192"/>
+          <p:cNvPr id="19" name="Text 17"/>
+          <p:cNvSpPr/>
+          <p:nvPr/>
+        </p:nvSpPr>
+        <p:spPr>
+          <a:xfrm>
+            <a:off x="1216152" y="4215384"/>
+            <a:ext cx="6638544" cy="192024"/>
           </a:xfrm>
           <a:prstGeom prst="rect">
             <a:avLst/>
@@ -9717,261 +11225,64 @@
             <a:r>
               <a:rPr lang="en-US" sz="1220" dirty="0">
                 <a:solidFill>
-                  <a:srgbClr val="1E2630"/>
-                </a:solidFill>
-                <a:latin typeface="Calibri" pitchFamily="34" charset="0"/>
-                <a:ea typeface="Calibri" pitchFamily="34" charset="-122"/>
-                <a:cs typeface="Calibri" pitchFamily="34" charset="-120"/>
-              </a:rPr>
-              <a:t>Retained-node prediction tracking to reveal spillover.</a:t>
+                  <a:srgbClr val="FFFFFF"/>
+                </a:solidFill>
+                <a:latin typeface="Times New Roman" pitchFamily="34" charset="0"/>
+                <a:ea typeface="Times New Roman" pitchFamily="34" charset="-122"/>
+                <a:cs typeface="Times New Roman" pitchFamily="34" charset="-120"/>
+              </a:rPr>
+              <a:t>Read these formulas only as intuition. The benchmark compares attacker logics: model-aware selection, graph-structural selection, and a hybrid of the two.</a:t>
             </a:r>
             <a:endParaRPr lang="en-US" sz="1220" dirty="0"/>
           </a:p>
         </p:txBody>
       </p:sp>
-      <p:sp>
-        <p:nvSpPr>
-          <p:cNvPr id="17" name="Shape 15"/>
-          <p:cNvSpPr/>
-          <p:nvPr/>
-        </p:nvSpPr>
-        <p:spPr>
-          <a:xfrm>
-            <a:off x="4754880" y="2313432"/>
-            <a:ext cx="3657600" cy="822960"/>
-          </a:xfrm>
-          <a:prstGeom prst="roundRect">
-            <a:avLst>
-              <a:gd name="adj" fmla="val 5556"/>
-            </a:avLst>
-          </a:prstGeom>
-          <a:solidFill>
-            <a:srgbClr val="FFFFFF"/>
-          </a:solidFill>
-          <a:ln w="13970">
-            <a:solidFill>
-              <a:srgbClr val="D9DEE7"/>
-            </a:solidFill>
-            <a:prstDash val="solid"/>
-          </a:ln>
-        </p:spPr>
-        <p:txBody>
-          <a:bodyPr/>
-          <a:lstStyle/>
-          <a:p>
-            <a:endParaRPr lang="zh-CN" altLang="en-US"/>
-          </a:p>
-        </p:txBody>
-      </p:sp>
-      <p:sp>
-        <p:nvSpPr>
-          <p:cNvPr id="18" name="Text 16"/>
-          <p:cNvSpPr/>
-          <p:nvPr/>
-        </p:nvSpPr>
-        <p:spPr>
-          <a:xfrm>
-            <a:off x="4892040" y="2404872"/>
-            <a:ext cx="3383280" cy="182880"/>
-          </a:xfrm>
-          <a:prstGeom prst="rect">
-            <a:avLst/>
-          </a:prstGeom>
-          <a:noFill/>
-          <a:ln/>
-        </p:spPr>
-        <p:txBody>
-          <a:bodyPr wrap="square" lIns="0" tIns="0" rIns="0" bIns="0" rtlCol="0" anchor="ctr"/>
-          <a:lstStyle/>
-          <a:p>
-            <a:pPr marL="0" indent="0">
-              <a:buNone/>
-            </a:pPr>
-            <a:r>
-              <a:rPr lang="en-US" sz="1700" b="1" dirty="0">
-                <a:solidFill>
-                  <a:srgbClr val="223A5E"/>
-                </a:solidFill>
-                <a:latin typeface="Georgia" pitchFamily="34" charset="0"/>
-                <a:ea typeface="Georgia" pitchFamily="34" charset="-122"/>
-                <a:cs typeface="Georgia" pitchFamily="34" charset="-120"/>
-              </a:rPr>
-              <a:t>Statistical summary</a:t>
-            </a:r>
-            <a:endParaRPr lang="en-US" sz="1700" dirty="0"/>
-          </a:p>
-        </p:txBody>
-      </p:sp>
-      <p:sp>
-        <p:nvSpPr>
-          <p:cNvPr id="19" name="Text 17"/>
-          <p:cNvSpPr/>
-          <p:nvPr/>
-        </p:nvSpPr>
-        <p:spPr>
-          <a:xfrm>
-            <a:off x="4892040" y="2651760"/>
-            <a:ext cx="3383280" cy="393192"/>
-          </a:xfrm>
-          <a:prstGeom prst="rect">
-            <a:avLst/>
-          </a:prstGeom>
-          <a:noFill/>
-          <a:ln/>
-        </p:spPr>
-        <p:txBody>
-          <a:bodyPr wrap="square" lIns="0" tIns="0" rIns="0" bIns="0" rtlCol="0" anchor="ctr">
-            <a:normAutofit/>
-          </a:bodyPr>
-          <a:lstStyle/>
-          <a:p>
-            <a:pPr marL="0" indent="0">
-              <a:buNone/>
-            </a:pPr>
-            <a:r>
-              <a:rPr lang="en-US" sz="1220" dirty="0">
-                <a:solidFill>
-                  <a:srgbClr val="1E2630"/>
-                </a:solidFill>
-                <a:latin typeface="Calibri" pitchFamily="34" charset="0"/>
-                <a:ea typeface="Calibri" pitchFamily="34" charset="-122"/>
-                <a:cs typeface="Calibri" pitchFamily="34" charset="-120"/>
-              </a:rPr>
-              <a:t>Relative F1 drop, support thresholds, and effect-size comparisons.</a:t>
-            </a:r>
-            <a:endParaRPr lang="en-US" sz="1220" dirty="0"/>
-          </a:p>
-        </p:txBody>
-      </p:sp>
-      <p:sp>
-        <p:nvSpPr>
-          <p:cNvPr id="20" name="Shape 18"/>
-          <p:cNvSpPr/>
-          <p:nvPr/>
-        </p:nvSpPr>
-        <p:spPr>
-          <a:xfrm>
-            <a:off x="731520" y="3300984"/>
-            <a:ext cx="3657600" cy="822960"/>
-          </a:xfrm>
-          <a:prstGeom prst="roundRect">
-            <a:avLst>
-              <a:gd name="adj" fmla="val 5556"/>
-            </a:avLst>
-          </a:prstGeom>
-          <a:solidFill>
-            <a:srgbClr val="FFFFFF"/>
-          </a:solidFill>
-          <a:ln w="13970">
-            <a:solidFill>
-              <a:srgbClr val="D9DEE7"/>
-            </a:solidFill>
-            <a:prstDash val="solid"/>
-          </a:ln>
-        </p:spPr>
-        <p:txBody>
-          <a:bodyPr/>
-          <a:lstStyle/>
-          <a:p>
-            <a:endParaRPr lang="zh-CN" altLang="en-US"/>
-          </a:p>
-        </p:txBody>
-      </p:sp>
-      <p:sp>
-        <p:nvSpPr>
-          <p:cNvPr id="21" name="Text 19"/>
-          <p:cNvSpPr/>
-          <p:nvPr/>
-        </p:nvSpPr>
-        <p:spPr>
-          <a:xfrm>
-            <a:off x="868680" y="3392424"/>
-            <a:ext cx="3383280" cy="182880"/>
-          </a:xfrm>
-          <a:prstGeom prst="rect">
-            <a:avLst/>
-          </a:prstGeom>
-          <a:noFill/>
-          <a:ln/>
-        </p:spPr>
-        <p:txBody>
-          <a:bodyPr wrap="square" lIns="0" tIns="0" rIns="0" bIns="0" rtlCol="0" anchor="ctr"/>
-          <a:lstStyle/>
-          <a:p>
-            <a:pPr marL="0" indent="0">
-              <a:buNone/>
-            </a:pPr>
-            <a:r>
-              <a:rPr lang="en-US" sz="1700" b="1" dirty="0">
-                <a:solidFill>
-                  <a:srgbClr val="223A5E"/>
-                </a:solidFill>
-                <a:latin typeface="Georgia" pitchFamily="34" charset="0"/>
-                <a:ea typeface="Georgia" pitchFamily="34" charset="-122"/>
-                <a:cs typeface="Georgia" pitchFamily="34" charset="-120"/>
-              </a:rPr>
-              <a:t>Figure generation</a:t>
-            </a:r>
-            <a:endParaRPr lang="en-US" sz="1700" dirty="0"/>
-          </a:p>
-        </p:txBody>
-      </p:sp>
-      <p:sp>
-        <p:nvSpPr>
-          <p:cNvPr id="22" name="Text 20"/>
-          <p:cNvSpPr/>
-          <p:nvPr/>
-        </p:nvSpPr>
-        <p:spPr>
-          <a:xfrm>
-            <a:off x="868680" y="3639312"/>
-            <a:ext cx="3383280" cy="393192"/>
-          </a:xfrm>
-          <a:prstGeom prst="rect">
-            <a:avLst/>
-          </a:prstGeom>
-          <a:noFill/>
-          <a:ln/>
-        </p:spPr>
-        <p:txBody>
-          <a:bodyPr wrap="square" lIns="0" tIns="0" rIns="0" bIns="0" rtlCol="0" anchor="ctr">
-            <a:normAutofit/>
-          </a:bodyPr>
-          <a:lstStyle/>
-          <a:p>
-            <a:pPr marL="0" indent="0">
-              <a:buNone/>
-            </a:pPr>
-            <a:r>
-              <a:rPr lang="en-US" sz="1220" dirty="0">
-                <a:solidFill>
-                  <a:srgbClr val="1E2630"/>
-                </a:solidFill>
-                <a:latin typeface="Calibri" pitchFamily="34" charset="0"/>
-                <a:ea typeface="Calibri" pitchFamily="34" charset="-122"/>
-                <a:cs typeface="Calibri" pitchFamily="34" charset="-120"/>
-              </a:rPr>
-              <a:t>Reusable plotting scripts that turn stored outputs into report figures.</a:t>
-            </a:r>
-            <a:endParaRPr lang="en-US" sz="1220" dirty="0"/>
-          </a:p>
-        </p:txBody>
-      </p:sp>
-      <p:sp>
-        <p:nvSpPr>
-          <p:cNvPr id="23" name="Shape 21"/>
-          <p:cNvSpPr/>
-          <p:nvPr/>
-        </p:nvSpPr>
-        <p:spPr>
-          <a:xfrm>
-            <a:off x="6629400" y="4114800"/>
-            <a:ext cx="1600200" cy="566928"/>
-          </a:xfrm>
-          <a:prstGeom prst="roundRect">
-            <a:avLst>
-              <a:gd name="adj" fmla="val 8065"/>
-            </a:avLst>
+    </p:spTree>
+  </p:cSld>
+  <p:clrMapOvr>
+    <a:masterClrMapping/>
+  </p:clrMapOvr>
+</p:sld>
+</file>
+
+<file path=ppt/slides/slide7.xml><?xml version="1.0" encoding="utf-8"?>
+<p:sld xmlns:a="http://schemas.openxmlformats.org/drawingml/2006/main" xmlns:r="http://schemas.openxmlformats.org/officeDocument/2006/relationships" xmlns:p="http://schemas.openxmlformats.org/presentationml/2006/main">
+  <p:cSld name="Slide 7">
+    <p:bg>
+      <p:bgPr>
+        <a:solidFill>
+          <a:srgbClr val="F7F5F1"/>
+        </a:solidFill>
+        <a:effectLst/>
+      </p:bgPr>
+    </p:bg>
+    <p:spTree>
+      <p:nvGrpSpPr>
+        <p:cNvPr id="1" name=""/>
+        <p:cNvGrpSpPr/>
+        <p:nvPr/>
+      </p:nvGrpSpPr>
+      <p:grpSpPr>
+        <a:xfrm>
+          <a:off x="0" y="0"/>
+          <a:ext cx="0" cy="0"/>
+          <a:chOff x="0" y="0"/>
+          <a:chExt cx="0" cy="0"/>
+        </a:xfrm>
+      </p:grpSpPr>
+      <p:sp>
+        <p:nvSpPr>
+          <p:cNvPr id="2" name="Shape 0"/>
+          <p:cNvSpPr/>
+          <p:nvPr/>
+        </p:nvSpPr>
+        <p:spPr>
+          <a:xfrm>
+            <a:off x="0" y="0"/>
+            <a:ext cx="9144000" cy="530352"/>
+          </a:xfrm>
+          <a:prstGeom prst="rect">
+            <a:avLst/>
           </a:prstGeom>
           <a:solidFill>
             <a:srgbClr val="223A5E"/>
@@ -9995,14 +11306,14 @@
       </p:sp>
       <p:sp>
         <p:nvSpPr>
-          <p:cNvPr id="24" name="Text 22"/>
-          <p:cNvSpPr/>
-          <p:nvPr/>
-        </p:nvSpPr>
-        <p:spPr>
-          <a:xfrm>
-            <a:off x="6702552" y="4224528"/>
-            <a:ext cx="1453896" cy="201168"/>
+          <p:cNvPr id="3" name="Text 1"/>
+          <p:cNvSpPr/>
+          <p:nvPr/>
+        </p:nvSpPr>
+        <p:spPr>
+          <a:xfrm>
+            <a:off x="502920" y="100584"/>
+            <a:ext cx="6583680" cy="219456"/>
           </a:xfrm>
           <a:prstGeom prst="rect">
             <a:avLst/>
@@ -10014,34 +11325,263 @@
           <a:bodyPr wrap="square" lIns="0" tIns="0" rIns="0" bIns="0" rtlCol="0" anchor="ctr"/>
           <a:lstStyle/>
           <a:p>
-            <a:pPr marL="0" indent="0" algn="ctr">
-              <a:buNone/>
-            </a:pPr>
-            <a:r>
-              <a:rPr lang="en-US" sz="1900" b="1" dirty="0">
+            <a:pPr marL="0" indent="0">
+              <a:buNone/>
+            </a:pPr>
+            <a:r>
+              <a:rPr lang="en-US" sz="2400" b="1" dirty="0">
                 <a:solidFill>
                   <a:srgbClr val="FFFFFF"/>
                 </a:solidFill>
-                <a:latin typeface="Georgia" pitchFamily="34" charset="0"/>
-                <a:ea typeface="Georgia" pitchFamily="34" charset="-122"/>
-                <a:cs typeface="Georgia" pitchFamily="34" charset="-120"/>
-              </a:rPr>
-              <a:t>Reproducible</a:t>
-            </a:r>
-            <a:endParaRPr lang="en-US" sz="1900" dirty="0"/>
-          </a:p>
-        </p:txBody>
-      </p:sp>
-      <p:sp>
-        <p:nvSpPr>
-          <p:cNvPr id="25" name="Text 23"/>
-          <p:cNvSpPr/>
-          <p:nvPr/>
-        </p:nvSpPr>
-        <p:spPr>
-          <a:xfrm>
-            <a:off x="6702552" y="4498848"/>
-            <a:ext cx="1453896" cy="137160"/>
+                <a:latin typeface="Times New Roman" pitchFamily="34" charset="0"/>
+                <a:ea typeface="Times New Roman" pitchFamily="34" charset="-122"/>
+                <a:cs typeface="Times New Roman" pitchFamily="34" charset="-120"/>
+              </a:rPr>
+              <a:t>Metrics Framework</a:t>
+            </a:r>
+            <a:endParaRPr lang="en-US" sz="2400" dirty="0"/>
+          </a:p>
+        </p:txBody>
+      </p:sp>
+      <p:sp>
+        <p:nvSpPr>
+          <p:cNvPr id="4" name="Text 2"/>
+          <p:cNvSpPr/>
+          <p:nvPr/>
+        </p:nvSpPr>
+        <p:spPr>
+          <a:xfrm>
+            <a:off x="7955280" y="118872"/>
+            <a:ext cx="640080" cy="137160"/>
+          </a:xfrm>
+          <a:prstGeom prst="rect">
+            <a:avLst/>
+          </a:prstGeom>
+          <a:noFill/>
+          <a:ln/>
+        </p:spPr>
+        <p:txBody>
+          <a:bodyPr wrap="square" lIns="0" tIns="0" rIns="0" bIns="0" rtlCol="0" anchor="ctr"/>
+          <a:lstStyle/>
+          <a:p>
+            <a:pPr marL="0" indent="0" algn="r">
+              <a:buNone/>
+            </a:pPr>
+            <a:r>
+              <a:rPr lang="en-US" sz="1000" dirty="0">
+                <a:solidFill>
+                  <a:srgbClr val="F7F5F1"/>
+                </a:solidFill>
+                <a:latin typeface="Times New Roman" pitchFamily="34" charset="0"/>
+                <a:ea typeface="Times New Roman" pitchFamily="34" charset="-122"/>
+                <a:cs typeface="Times New Roman" pitchFamily="34" charset="-120"/>
+              </a:rPr>
+              <a:t>07 / 15</a:t>
+            </a:r>
+            <a:endParaRPr lang="en-US" sz="1000" dirty="0"/>
+          </a:p>
+        </p:txBody>
+      </p:sp>
+      <p:sp>
+        <p:nvSpPr>
+          <p:cNvPr id="5" name="Text 3"/>
+          <p:cNvSpPr/>
+          <p:nvPr/>
+        </p:nvSpPr>
+        <p:spPr>
+          <a:xfrm>
+            <a:off x="502920" y="4736592"/>
+            <a:ext cx="2743200" cy="137160"/>
+          </a:xfrm>
+          <a:prstGeom prst="rect">
+            <a:avLst/>
+          </a:prstGeom>
+          <a:noFill/>
+          <a:ln/>
+        </p:spPr>
+        <p:txBody>
+          <a:bodyPr wrap="square" lIns="0" tIns="0" rIns="0" bIns="0" rtlCol="0" anchor="ctr"/>
+          <a:lstStyle/>
+          <a:p>
+            <a:pPr marL="0" indent="0">
+              <a:buNone/>
+            </a:pPr>
+            <a:r>
+              <a:rPr lang="en-US" sz="900" dirty="0">
+                <a:solidFill>
+                  <a:srgbClr val="667085"/>
+                </a:solidFill>
+                <a:latin typeface="Times New Roman" pitchFamily="34" charset="0"/>
+                <a:ea typeface="Times New Roman" pitchFamily="34" charset="-122"/>
+                <a:cs typeface="Times New Roman" pitchFamily="34" charset="-120"/>
+              </a:rPr>
+              <a:t>EE5003 MSc Project | Liu Chengyu</a:t>
+            </a:r>
+            <a:endParaRPr lang="en-US" sz="900" dirty="0"/>
+          </a:p>
+        </p:txBody>
+      </p:sp>
+      <p:sp>
+        <p:nvSpPr>
+          <p:cNvPr id="6" name="Text 4"/>
+          <p:cNvSpPr/>
+          <p:nvPr/>
+        </p:nvSpPr>
+        <p:spPr>
+          <a:xfrm>
+            <a:off x="5577840" y="4736592"/>
+            <a:ext cx="3017520" cy="137160"/>
+          </a:xfrm>
+          <a:prstGeom prst="rect">
+            <a:avLst/>
+          </a:prstGeom>
+          <a:noFill/>
+          <a:ln/>
+        </p:spPr>
+        <p:txBody>
+          <a:bodyPr wrap="square" lIns="0" tIns="0" rIns="0" bIns="0" rtlCol="0" anchor="ctr"/>
+          <a:lstStyle/>
+          <a:p>
+            <a:pPr marL="0" indent="0" algn="r">
+              <a:buNone/>
+            </a:pPr>
+            <a:r>
+              <a:rPr lang="en-US" sz="900" dirty="0">
+                <a:solidFill>
+                  <a:srgbClr val="667085"/>
+                </a:solidFill>
+                <a:latin typeface="Times New Roman" pitchFamily="34" charset="0"/>
+                <a:ea typeface="Times New Roman" pitchFamily="34" charset="-122"/>
+                <a:cs typeface="Times New Roman" pitchFamily="34" charset="-120"/>
+              </a:rPr>
+              <a:t>Approximate Graph Unlearning Audit</a:t>
+            </a:r>
+            <a:endParaRPr lang="en-US" sz="900" dirty="0"/>
+          </a:p>
+        </p:txBody>
+      </p:sp>
+      <p:sp>
+        <p:nvSpPr>
+          <p:cNvPr id="7" name="Text 5"/>
+          <p:cNvSpPr/>
+          <p:nvPr/>
+        </p:nvSpPr>
+        <p:spPr>
+          <a:xfrm>
+            <a:off x="621792" y="768096"/>
+            <a:ext cx="7406640" cy="256032"/>
+          </a:xfrm>
+          <a:prstGeom prst="rect">
+            <a:avLst/>
+          </a:prstGeom>
+          <a:noFill/>
+          <a:ln/>
+        </p:spPr>
+        <p:txBody>
+          <a:bodyPr wrap="square" lIns="0" tIns="0" rIns="0" bIns="0" rtlCol="0" anchor="ctr"/>
+          <a:lstStyle/>
+          <a:p>
+            <a:pPr marL="0" indent="0">
+              <a:buNone/>
+            </a:pPr>
+            <a:r>
+              <a:rPr lang="en-US" sz="1620" b="1" dirty="0">
+                <a:solidFill>
+                  <a:srgbClr val="223A5E"/>
+                </a:solidFill>
+                <a:latin typeface="Times New Roman" pitchFamily="34" charset="0"/>
+                <a:ea typeface="Times New Roman" pitchFamily="34" charset="-122"/>
+                <a:cs typeface="Times New Roman" pitchFamily="34" charset="-120"/>
+              </a:rPr>
+              <a:t>Three metrics answer three different questions: how much extra damage appears beyond a k=5 baseline, where it comes from, and how far it spreads.</a:t>
+            </a:r>
+            <a:endParaRPr lang="en-US" sz="1620" dirty="0"/>
+          </a:p>
+        </p:txBody>
+      </p:sp>
+      <p:sp>
+        <p:nvSpPr>
+          <p:cNvPr id="8" name="Shape 6"/>
+          <p:cNvSpPr/>
+          <p:nvPr/>
+        </p:nvSpPr>
+        <p:spPr>
+          <a:xfrm>
+            <a:off x="713232" y="1325880"/>
+            <a:ext cx="2542032" cy="2148840"/>
+          </a:xfrm>
+          <a:prstGeom prst="roundRect">
+            <a:avLst>
+              <a:gd name="adj" fmla="val 2128"/>
+            </a:avLst>
+          </a:prstGeom>
+          <a:solidFill>
+            <a:srgbClr val="FFFFFF"/>
+          </a:solidFill>
+          <a:ln w="13970">
+            <a:solidFill>
+              <a:srgbClr val="D9DEE7"/>
+            </a:solidFill>
+            <a:prstDash val="solid"/>
+          </a:ln>
+        </p:spPr>
+        <p:txBody>
+          <a:bodyPr/>
+          <a:lstStyle/>
+          <a:p>
+            <a:endParaRPr lang="zh-CN" altLang="en-US"/>
+          </a:p>
+        </p:txBody>
+      </p:sp>
+      <p:sp>
+        <p:nvSpPr>
+          <p:cNvPr id="9" name="Text 7"/>
+          <p:cNvSpPr/>
+          <p:nvPr/>
+        </p:nvSpPr>
+        <p:spPr>
+          <a:xfrm>
+            <a:off x="850392" y="1490472"/>
+            <a:ext cx="2267712" cy="182880"/>
+          </a:xfrm>
+          <a:prstGeom prst="rect">
+            <a:avLst/>
+          </a:prstGeom>
+          <a:noFill/>
+          <a:ln/>
+        </p:spPr>
+        <p:txBody>
+          <a:bodyPr wrap="square" lIns="0" tIns="0" rIns="0" bIns="0" rtlCol="0" anchor="ctr"/>
+          <a:lstStyle/>
+          <a:p>
+            <a:pPr marL="0" indent="0">
+              <a:buNone/>
+            </a:pPr>
+            <a:r>
+              <a:rPr lang="en-US" sz="1700" b="1" dirty="0">
+                <a:solidFill>
+                  <a:srgbClr val="223A5E"/>
+                </a:solidFill>
+                <a:latin typeface="Times New Roman" pitchFamily="34" charset="0"/>
+                <a:ea typeface="Times New Roman" pitchFamily="34" charset="-122"/>
+                <a:cs typeface="Times New Roman" pitchFamily="34" charset="-120"/>
+              </a:rPr>
+              <a:t>Utility</a:t>
+            </a:r>
+            <a:endParaRPr lang="en-US" sz="1700" dirty="0"/>
+          </a:p>
+        </p:txBody>
+      </p:sp>
+      <p:sp>
+        <p:nvSpPr>
+          <p:cNvPr id="10" name="Text 8"/>
+          <p:cNvSpPr/>
+          <p:nvPr/>
+        </p:nvSpPr>
+        <p:spPr>
+          <a:xfrm>
+            <a:off x="850392" y="1737360"/>
+            <a:ext cx="2267712" cy="1645920"/>
           </a:xfrm>
           <a:prstGeom prst="rect">
             <a:avLst/>
@@ -10055,21 +11595,449 @@
           </a:bodyPr>
           <a:lstStyle/>
           <a:p>
-            <a:pPr marL="0" indent="0" algn="ctr">
-              <a:buNone/>
-            </a:pPr>
-            <a:r>
-              <a:rPr lang="en-US" sz="1000" dirty="0">
+            <a:pPr marL="0" indent="0">
+              <a:buNone/>
+            </a:pPr>
+            <a:r>
+              <a:rPr lang="en-US" sz="1220" dirty="0">
+                <a:solidFill>
+                  <a:srgbClr val="1E2630"/>
+                </a:solidFill>
+                <a:latin typeface="Times New Roman" pitchFamily="34" charset="0"/>
+                <a:ea typeface="Times New Roman" pitchFamily="34" charset="-122"/>
+                <a:cs typeface="Times New Roman" pitchFamily="34" charset="-120"/>
+              </a:rPr>
+              <a:t>relative_f1_drop = F1_after(k=5, random) - F1_after(attack)</a:t>
+            </a:r>
+            <a:endParaRPr lang="en-US" sz="1220" dirty="0"/>
+          </a:p>
+          <a:p>
+            <a:pPr marL="0" indent="0">
+              <a:buNone/>
+            </a:pPr>
+            <a:endParaRPr lang="en-US" sz="1220" dirty="0"/>
+          </a:p>
+          <a:p>
+            <a:pPr marL="0" indent="0">
+              <a:buNone/>
+            </a:pPr>
+            <a:r>
+              <a:rPr lang="en-US" sz="1220" dirty="0">
+                <a:solidFill>
+                  <a:srgbClr val="1E2630"/>
+                </a:solidFill>
+                <a:latin typeface="Times New Roman" pitchFamily="34" charset="0"/>
+                <a:ea typeface="Times New Roman" pitchFamily="34" charset="-122"/>
+                <a:cs typeface="Times New Roman" pitchFamily="34" charset="-120"/>
+              </a:rPr>
+              <a:t>Use a tiny random-trigger baseline because raw drop can mislead on shard-based methods.</a:t>
+            </a:r>
+            <a:endParaRPr lang="en-US" sz="1220" dirty="0"/>
+          </a:p>
+        </p:txBody>
+      </p:sp>
+      <p:sp>
+        <p:nvSpPr>
+          <p:cNvPr id="11" name="Shape 9"/>
+          <p:cNvSpPr/>
+          <p:nvPr/>
+        </p:nvSpPr>
+        <p:spPr>
+          <a:xfrm>
+            <a:off x="3328416" y="1325880"/>
+            <a:ext cx="2542032" cy="2148840"/>
+          </a:xfrm>
+          <a:prstGeom prst="roundRect">
+            <a:avLst>
+              <a:gd name="adj" fmla="val 2128"/>
+            </a:avLst>
+          </a:prstGeom>
+          <a:solidFill>
+            <a:srgbClr val="E8EEF5"/>
+          </a:solidFill>
+          <a:ln w="13970">
+            <a:solidFill>
+              <a:srgbClr val="E8EEF5"/>
+            </a:solidFill>
+            <a:prstDash val="solid"/>
+          </a:ln>
+        </p:spPr>
+        <p:txBody>
+          <a:bodyPr/>
+          <a:lstStyle/>
+          <a:p>
+            <a:endParaRPr lang="zh-CN" altLang="en-US"/>
+          </a:p>
+        </p:txBody>
+      </p:sp>
+      <p:sp>
+        <p:nvSpPr>
+          <p:cNvPr id="12" name="Text 10"/>
+          <p:cNvSpPr/>
+          <p:nvPr/>
+        </p:nvSpPr>
+        <p:spPr>
+          <a:xfrm>
+            <a:off x="3465576" y="1490472"/>
+            <a:ext cx="2267712" cy="182880"/>
+          </a:xfrm>
+          <a:prstGeom prst="rect">
+            <a:avLst/>
+          </a:prstGeom>
+          <a:noFill/>
+          <a:ln/>
+        </p:spPr>
+        <p:txBody>
+          <a:bodyPr wrap="square" lIns="0" tIns="0" rIns="0" bIns="0" rtlCol="0" anchor="ctr"/>
+          <a:lstStyle/>
+          <a:p>
+            <a:pPr marL="0" indent="0">
+              <a:buNone/>
+            </a:pPr>
+            <a:r>
+              <a:rPr lang="en-US" sz="1700" b="1" dirty="0">
+                <a:solidFill>
+                  <a:srgbClr val="223A5E"/>
+                </a:solidFill>
+                <a:latin typeface="Times New Roman" pitchFamily="34" charset="0"/>
+                <a:ea typeface="Times New Roman" pitchFamily="34" charset="-122"/>
+                <a:cs typeface="Times New Roman" pitchFamily="34" charset="-120"/>
+              </a:rPr>
+              <a:t>Fidelity</a:t>
+            </a:r>
+            <a:endParaRPr lang="en-US" sz="1700" dirty="0"/>
+          </a:p>
+        </p:txBody>
+      </p:sp>
+      <p:sp>
+        <p:nvSpPr>
+          <p:cNvPr id="13" name="Text 11"/>
+          <p:cNvSpPr/>
+          <p:nvPr/>
+        </p:nvSpPr>
+        <p:spPr>
+          <a:xfrm>
+            <a:off x="3465576" y="1737360"/>
+            <a:ext cx="2267712" cy="1645920"/>
+          </a:xfrm>
+          <a:prstGeom prst="rect">
+            <a:avLst/>
+          </a:prstGeom>
+          <a:noFill/>
+          <a:ln/>
+        </p:spPr>
+        <p:txBody>
+          <a:bodyPr wrap="square" lIns="0" tIns="0" rIns="0" bIns="0" rtlCol="0" anchor="ctr">
+            <a:normAutofit/>
+          </a:bodyPr>
+          <a:lstStyle/>
+          <a:p>
+            <a:pPr marL="0" indent="0">
+              <a:buNone/>
+            </a:pPr>
+            <a:r>
+              <a:rPr lang="en-US" sz="1220" dirty="0">
+                <a:solidFill>
+                  <a:srgbClr val="1E2630"/>
+                </a:solidFill>
+                <a:latin typeface="Times New Roman" pitchFamily="34" charset="0"/>
+                <a:ea typeface="Times New Roman" pitchFamily="34" charset="-122"/>
+                <a:cs typeface="Times New Roman" pitchFamily="34" charset="-120"/>
+              </a:rPr>
+              <a:t>retrain_gap = F1_retrain - F1_unlearn</a:t>
+            </a:r>
+            <a:endParaRPr lang="en-US" sz="1220" dirty="0"/>
+          </a:p>
+          <a:p>
+            <a:pPr marL="0" indent="0">
+              <a:buNone/>
+            </a:pPr>
+            <a:endParaRPr lang="en-US" sz="1220" dirty="0"/>
+          </a:p>
+          <a:p>
+            <a:pPr marL="0" indent="0">
+              <a:buNone/>
+            </a:pPr>
+            <a:r>
+              <a:rPr lang="en-US" sz="1220" dirty="0">
+                <a:solidFill>
+                  <a:srgbClr val="1E2630"/>
+                </a:solidFill>
+                <a:latin typeface="Times New Roman" pitchFamily="34" charset="0"/>
+                <a:ea typeface="Times New Roman" pitchFamily="34" charset="-122"/>
+                <a:cs typeface="Times New Roman" pitchFamily="34" charset="-120"/>
+              </a:rPr>
+              <a:t>total_drop = drop_retrain + retrain_gap</a:t>
+            </a:r>
+            <a:endParaRPr lang="en-US" sz="1220" dirty="0"/>
+          </a:p>
+        </p:txBody>
+      </p:sp>
+      <p:sp>
+        <p:nvSpPr>
+          <p:cNvPr id="14" name="Shape 12"/>
+          <p:cNvSpPr/>
+          <p:nvPr/>
+        </p:nvSpPr>
+        <p:spPr>
+          <a:xfrm>
+            <a:off x="5943600" y="1325880"/>
+            <a:ext cx="2542032" cy="2148840"/>
+          </a:xfrm>
+          <a:prstGeom prst="roundRect">
+            <a:avLst>
+              <a:gd name="adj" fmla="val 2128"/>
+            </a:avLst>
+          </a:prstGeom>
+          <a:solidFill>
+            <a:srgbClr val="FFFFFF"/>
+          </a:solidFill>
+          <a:ln w="13970">
+            <a:solidFill>
+              <a:srgbClr val="D9DEE7"/>
+            </a:solidFill>
+            <a:prstDash val="solid"/>
+          </a:ln>
+        </p:spPr>
+        <p:txBody>
+          <a:bodyPr/>
+          <a:lstStyle/>
+          <a:p>
+            <a:endParaRPr lang="zh-CN" altLang="en-US"/>
+          </a:p>
+        </p:txBody>
+      </p:sp>
+      <p:sp>
+        <p:nvSpPr>
+          <p:cNvPr id="15" name="Text 13"/>
+          <p:cNvSpPr/>
+          <p:nvPr/>
+        </p:nvSpPr>
+        <p:spPr>
+          <a:xfrm>
+            <a:off x="6080760" y="1490472"/>
+            <a:ext cx="2267712" cy="182880"/>
+          </a:xfrm>
+          <a:prstGeom prst="rect">
+            <a:avLst/>
+          </a:prstGeom>
+          <a:noFill/>
+          <a:ln/>
+        </p:spPr>
+        <p:txBody>
+          <a:bodyPr wrap="square" lIns="0" tIns="0" rIns="0" bIns="0" rtlCol="0" anchor="ctr"/>
+          <a:lstStyle/>
+          <a:p>
+            <a:pPr marL="0" indent="0">
+              <a:buNone/>
+            </a:pPr>
+            <a:r>
+              <a:rPr lang="en-US" sz="1700" b="1" dirty="0">
+                <a:solidFill>
+                  <a:srgbClr val="223A5E"/>
+                </a:solidFill>
+                <a:latin typeface="Times New Roman" pitchFamily="34" charset="0"/>
+                <a:ea typeface="Times New Roman" pitchFamily="34" charset="-122"/>
+                <a:cs typeface="Times New Roman" pitchFamily="34" charset="-120"/>
+              </a:rPr>
+              <a:t>Collateral</a:t>
+            </a:r>
+            <a:endParaRPr lang="en-US" sz="1700" dirty="0"/>
+          </a:p>
+        </p:txBody>
+      </p:sp>
+      <p:sp>
+        <p:nvSpPr>
+          <p:cNvPr id="16" name="Text 14"/>
+          <p:cNvSpPr/>
+          <p:nvPr/>
+        </p:nvSpPr>
+        <p:spPr>
+          <a:xfrm>
+            <a:off x="6080760" y="1737360"/>
+            <a:ext cx="2267712" cy="1645920"/>
+          </a:xfrm>
+          <a:prstGeom prst="rect">
+            <a:avLst/>
+          </a:prstGeom>
+          <a:noFill/>
+          <a:ln/>
+        </p:spPr>
+        <p:txBody>
+          <a:bodyPr wrap="square" lIns="0" tIns="0" rIns="0" bIns="0" rtlCol="0" anchor="ctr">
+            <a:normAutofit/>
+          </a:bodyPr>
+          <a:lstStyle/>
+          <a:p>
+            <a:pPr marL="0" indent="0">
+              <a:buNone/>
+            </a:pPr>
+            <a:r>
+              <a:rPr lang="en-US" sz="1220" dirty="0">
+                <a:solidFill>
+                  <a:srgbClr val="1E2630"/>
+                </a:solidFill>
+                <a:latin typeface="Times New Roman" pitchFamily="34" charset="0"/>
+                <a:ea typeface="Times New Roman" pitchFamily="34" charset="-122"/>
+                <a:cs typeface="Times New Roman" pitchFamily="34" charset="-120"/>
+              </a:rPr>
+              <a:t>fraction_flipped</a:t>
+            </a:r>
+            <a:endParaRPr lang="en-US" sz="1220" dirty="0"/>
+          </a:p>
+          <a:p>
+            <a:pPr marL="0" indent="0">
+              <a:buNone/>
+            </a:pPr>
+            <a:r>
+              <a:rPr lang="en-US" sz="1220" dirty="0">
+                <a:solidFill>
+                  <a:srgbClr val="1E2630"/>
+                </a:solidFill>
+                <a:latin typeface="Times New Roman" pitchFamily="34" charset="0"/>
+                <a:ea typeface="Times New Roman" pitchFamily="34" charset="-122"/>
+                <a:cs typeface="Times New Roman" pitchFamily="34" charset="-120"/>
+              </a:rPr>
+              <a:t>mean_pred_shift</a:t>
+            </a:r>
+            <a:endParaRPr lang="en-US" sz="1220" dirty="0"/>
+          </a:p>
+          <a:p>
+            <a:pPr marL="0" indent="0">
+              <a:buNone/>
+            </a:pPr>
+            <a:endParaRPr lang="en-US" sz="1220" dirty="0"/>
+          </a:p>
+          <a:p>
+            <a:pPr marL="0" indent="0">
+              <a:buNone/>
+            </a:pPr>
+            <a:r>
+              <a:rPr lang="en-US" sz="1220" dirty="0">
+                <a:solidFill>
+                  <a:srgbClr val="1E2630"/>
+                </a:solidFill>
+                <a:latin typeface="Times New Roman" pitchFamily="34" charset="0"/>
+                <a:ea typeface="Times New Roman" pitchFamily="34" charset="-122"/>
+                <a:cs typeface="Times New Roman" pitchFamily="34" charset="-120"/>
+              </a:rPr>
+              <a:t>These show how strongly retained nodes are disturbed.</a:t>
+            </a:r>
+            <a:endParaRPr lang="en-US" sz="1220" dirty="0"/>
+          </a:p>
+        </p:txBody>
+      </p:sp>
+      <p:sp>
+        <p:nvSpPr>
+          <p:cNvPr id="17" name="Shape 15"/>
+          <p:cNvSpPr/>
+          <p:nvPr/>
+        </p:nvSpPr>
+        <p:spPr>
+          <a:xfrm>
+            <a:off x="987552" y="3611880"/>
+            <a:ext cx="7095744" cy="914400"/>
+          </a:xfrm>
+          <a:prstGeom prst="roundRect">
+            <a:avLst>
+              <a:gd name="adj" fmla="val 5000"/>
+            </a:avLst>
+          </a:prstGeom>
+          <a:solidFill>
+            <a:srgbClr val="223A5E"/>
+          </a:solidFill>
+          <a:ln w="13970">
+            <a:solidFill>
+              <a:srgbClr val="223A5E"/>
+            </a:solidFill>
+            <a:prstDash val="solid"/>
+          </a:ln>
+        </p:spPr>
+        <p:txBody>
+          <a:bodyPr/>
+          <a:lstStyle/>
+          <a:p>
+            <a:endParaRPr lang="zh-CN" altLang="en-US"/>
+          </a:p>
+        </p:txBody>
+      </p:sp>
+      <p:sp>
+        <p:nvSpPr>
+          <p:cNvPr id="18" name="Text 16"/>
+          <p:cNvSpPr/>
+          <p:nvPr/>
+        </p:nvSpPr>
+        <p:spPr>
+          <a:xfrm>
+            <a:off x="1124712" y="3776472"/>
+            <a:ext cx="6821424" cy="182880"/>
+          </a:xfrm>
+          <a:prstGeom prst="rect">
+            <a:avLst/>
+          </a:prstGeom>
+          <a:noFill/>
+          <a:ln/>
+        </p:spPr>
+        <p:txBody>
+          <a:bodyPr wrap="square" lIns="0" tIns="0" rIns="0" bIns="0" rtlCol="0" anchor="ctr"/>
+          <a:lstStyle/>
+          <a:p>
+            <a:pPr marL="0" indent="0">
+              <a:buNone/>
+            </a:pPr>
+            <a:r>
+              <a:rPr lang="en-US" sz="1700" b="1" dirty="0">
                 <a:solidFill>
                   <a:srgbClr val="F7F5F1"/>
                 </a:solidFill>
-                <a:latin typeface="Calibri" pitchFamily="34" charset="0"/>
-                <a:ea typeface="Calibri" pitchFamily="34" charset="-122"/>
-                <a:cs typeface="Calibri" pitchFamily="34" charset="-120"/>
-              </a:rPr>
-              <a:t>analysis from stored outputs</a:t>
-            </a:r>
-            <a:endParaRPr lang="en-US" sz="1000" dirty="0"/>
+                <a:latin typeface="Times New Roman" pitchFamily="34" charset="0"/>
+                <a:ea typeface="Times New Roman" pitchFamily="34" charset="-122"/>
+                <a:cs typeface="Times New Roman" pitchFamily="34" charset="-120"/>
+              </a:rPr>
+              <a:t>Reading rule</a:t>
+            </a:r>
+            <a:endParaRPr lang="en-US" sz="1700" dirty="0"/>
+          </a:p>
+        </p:txBody>
+      </p:sp>
+      <p:sp>
+        <p:nvSpPr>
+          <p:cNvPr id="19" name="Text 17"/>
+          <p:cNvSpPr/>
+          <p:nvPr/>
+        </p:nvSpPr>
+        <p:spPr>
+          <a:xfrm>
+            <a:off x="1124712" y="4023360"/>
+            <a:ext cx="6821424" cy="411480"/>
+          </a:xfrm>
+          <a:prstGeom prst="rect">
+            <a:avLst/>
+          </a:prstGeom>
+          <a:noFill/>
+          <a:ln/>
+        </p:spPr>
+        <p:txBody>
+          <a:bodyPr wrap="square" lIns="0" tIns="0" rIns="0" bIns="0" rtlCol="0" anchor="ctr">
+            <a:normAutofit/>
+          </a:bodyPr>
+          <a:lstStyle/>
+          <a:p>
+            <a:pPr marL="0" indent="0">
+              <a:buNone/>
+            </a:pPr>
+            <a:r>
+              <a:rPr lang="en-US" sz="1220" dirty="0">
+                <a:solidFill>
+                  <a:srgbClr val="FFFFFF"/>
+                </a:solidFill>
+                <a:latin typeface="Times New Roman" pitchFamily="34" charset="0"/>
+                <a:ea typeface="Times New Roman" pitchFamily="34" charset="-122"/>
+                <a:cs typeface="Times New Roman" pitchFamily="34" charset="-120"/>
+              </a:rPr>
+              <a:t>First trigger each method with a tiny random deletion, k=5, and use that post-unlearning F1 as the reference point. Then compare stronger attacks against that baseline; retrain_gap and collateral metrics explain why the utility changes appear.</a:t>
+            </a:r>
+            <a:endParaRPr lang="en-US" sz="1220" dirty="0"/>
           </a:p>
         </p:txBody>
       </p:sp>
@@ -10081,9 +12049,9 @@
 </p:sld>
 </file>
 
-<file path=ppt/slides/slide7.xml><?xml version="1.0" encoding="utf-8"?>
+<file path=ppt/slides/slide8.xml><?xml version="1.0" encoding="utf-8"?>
 <p:sld xmlns:a="http://schemas.openxmlformats.org/drawingml/2006/main" xmlns:r="http://schemas.openxmlformats.org/officeDocument/2006/relationships" xmlns:p="http://schemas.openxmlformats.org/presentationml/2006/main">
-  <p:cSld name="Slide 7">
+  <p:cSld name="Slide 8">
     <p:bg>
       <p:bgPr>
         <a:solidFill>
@@ -10169,11 +12137,11 @@
                 <a:solidFill>
                   <a:srgbClr val="FFFFFF"/>
                 </a:solidFill>
-                <a:latin typeface="Georgia" pitchFamily="34" charset="0"/>
-                <a:ea typeface="Georgia" pitchFamily="34" charset="-122"/>
-                <a:cs typeface="Georgia" pitchFamily="34" charset="-120"/>
-              </a:rPr>
-              <a:t>Main Finding: Vulnerability Spectrum</a:t>
+                <a:latin typeface="Times New Roman" pitchFamily="34" charset="0"/>
+                <a:ea typeface="Times New Roman" pitchFamily="34" charset="-122"/>
+                <a:cs typeface="Times New Roman" pitchFamily="34" charset="-120"/>
+              </a:rPr>
+              <a:t>Main Finding: Family Spectrum</a:t>
             </a:r>
             <a:endParaRPr lang="en-US" sz="2400" dirty="0"/>
           </a:p>
@@ -10208,11 +12176,11 @@
                 <a:solidFill>
                   <a:srgbClr val="F7F5F1"/>
                 </a:solidFill>
-                <a:latin typeface="Calibri" pitchFamily="34" charset="0"/>
-                <a:ea typeface="Calibri" pitchFamily="34" charset="-122"/>
-                <a:cs typeface="Calibri" pitchFamily="34" charset="-120"/>
-              </a:rPr>
-              <a:t>07 / 14</a:t>
+                <a:latin typeface="Times New Roman" pitchFamily="34" charset="0"/>
+                <a:ea typeface="Times New Roman" pitchFamily="34" charset="-122"/>
+                <a:cs typeface="Times New Roman" pitchFamily="34" charset="-120"/>
+              </a:rPr>
+              <a:t>08 / 15</a:t>
             </a:r>
             <a:endParaRPr lang="en-US" sz="1000" dirty="0"/>
           </a:p>
@@ -10247,9 +12215,9 @@
                 <a:solidFill>
                   <a:srgbClr val="667085"/>
                 </a:solidFill>
-                <a:latin typeface="Calibri" pitchFamily="34" charset="0"/>
-                <a:ea typeface="Calibri" pitchFamily="34" charset="-122"/>
-                <a:cs typeface="Calibri" pitchFamily="34" charset="-120"/>
+                <a:latin typeface="Times New Roman" pitchFamily="34" charset="0"/>
+                <a:ea typeface="Times New Roman" pitchFamily="34" charset="-122"/>
+                <a:cs typeface="Times New Roman" pitchFamily="34" charset="-120"/>
               </a:rPr>
               <a:t>EE5003 MSc Project | Liu Chengyu</a:t>
             </a:r>
@@ -10286,9 +12254,9 @@
                 <a:solidFill>
                   <a:srgbClr val="667085"/>
                 </a:solidFill>
-                <a:latin typeface="Calibri" pitchFamily="34" charset="0"/>
-                <a:ea typeface="Calibri" pitchFamily="34" charset="-122"/>
-                <a:cs typeface="Calibri" pitchFamily="34" charset="-120"/>
+                <a:latin typeface="Times New Roman" pitchFamily="34" charset="0"/>
+                <a:ea typeface="Times New Roman" pitchFamily="34" charset="-122"/>
+                <a:cs typeface="Times New Roman" pitchFamily="34" charset="-120"/>
               </a:rPr>
               <a:t>Approximate Graph Unlearning Audit</a:t>
             </a:r>
@@ -10313,7 +12281,7 @@
         <p:spPr>
           <a:xfrm>
             <a:off x="548640" y="914400"/>
-            <a:ext cx="5303520" cy="3383280"/>
+            <a:ext cx="4983480" cy="3154680"/>
           </a:xfrm>
           <a:prstGeom prst="rect">
             <a:avLst/>
@@ -10328,8 +12296,8 @@
         </p:nvSpPr>
         <p:spPr>
           <a:xfrm>
-            <a:off x="566928" y="4389120"/>
-            <a:ext cx="5257800" cy="146304"/>
+            <a:off x="566928" y="4187952"/>
+            <a:ext cx="4937760" cy="146304"/>
           </a:xfrm>
           <a:prstGeom prst="rect">
             <a:avLst/>
@@ -10349,11 +12317,11 @@
                 <a:solidFill>
                   <a:srgbClr val="667085"/>
                 </a:solidFill>
-                <a:latin typeface="Calibri" pitchFamily="34" charset="0"/>
-                <a:ea typeface="Calibri" pitchFamily="34" charset="-122"/>
-                <a:cs typeface="Calibri" pitchFamily="34" charset="-120"/>
-              </a:rPr>
-              <a:t>Figure 1. Relative F1 drop across datasets and backbones at ratio = 0.05.</a:t>
+                <a:latin typeface="Times New Roman" pitchFamily="34" charset="0"/>
+                <a:ea typeface="Times New Roman" pitchFamily="34" charset="-122"/>
+                <a:cs typeface="Times New Roman" pitchFamily="34" charset="-120"/>
+              </a:rPr>
+              <a:t>Figure 1. Family-level spectrum using relative F1 drop at ratio = 0.05.</a:t>
             </a:r>
             <a:endParaRPr lang="en-US" sz="900" dirty="0"/>
           </a:p>
@@ -10367,12 +12335,12 @@
         </p:nvSpPr>
         <p:spPr>
           <a:xfrm>
-            <a:off x="6126480" y="932688"/>
-            <a:ext cx="2377440" cy="1078992"/>
+            <a:off x="5650992" y="914400"/>
+            <a:ext cx="2788920" cy="914400"/>
           </a:xfrm>
           <a:prstGeom prst="roundRect">
             <a:avLst>
-              <a:gd name="adj" fmla="val 4237"/>
+              <a:gd name="adj" fmla="val 5000"/>
             </a:avLst>
           </a:prstGeom>
           <a:solidFill>
@@ -10401,8 +12369,8 @@
         </p:nvSpPr>
         <p:spPr>
           <a:xfrm>
-            <a:off x="6263640" y="1024128"/>
-            <a:ext cx="2103120" cy="182880"/>
+            <a:off x="5788152" y="1078992"/>
+            <a:ext cx="2514600" cy="182880"/>
           </a:xfrm>
           <a:prstGeom prst="rect">
             <a:avLst/>
@@ -10422,9 +12390,9 @@
                 <a:solidFill>
                   <a:srgbClr val="F7F5F1"/>
                 </a:solidFill>
-                <a:latin typeface="Georgia" pitchFamily="34" charset="0"/>
-                <a:ea typeface="Georgia" pitchFamily="34" charset="-122"/>
-                <a:cs typeface="Georgia" pitchFamily="34" charset="-120"/>
+                <a:latin typeface="Times New Roman" pitchFamily="34" charset="0"/>
+                <a:ea typeface="Times New Roman" pitchFamily="34" charset="-122"/>
+                <a:cs typeface="Times New Roman" pitchFamily="34" charset="-120"/>
               </a:rPr>
               <a:t>Core read</a:t>
             </a:r>
@@ -10440,8 +12408,8 @@
         </p:nvSpPr>
         <p:spPr>
           <a:xfrm>
-            <a:off x="6263640" y="1271016"/>
-            <a:ext cx="2103120" cy="649224"/>
+            <a:off x="5788152" y="1325880"/>
+            <a:ext cx="2514600" cy="411480"/>
           </a:xfrm>
           <a:prstGeom prst="rect">
             <a:avLst/>
@@ -10463,11 +12431,11 @@
                 <a:solidFill>
                   <a:srgbClr val="FFFFFF"/>
                 </a:solidFill>
-                <a:latin typeface="Calibri" pitchFamily="34" charset="0"/>
-                <a:ea typeface="Calibri" pitchFamily="34" charset="-122"/>
-                <a:cs typeface="Calibri" pitchFamily="34" charset="-120"/>
-              </a:rPr>
-              <a:t>Approximate graph unlearning does not fail uniformly. Vulnerability depends strongly on the mechanism family.</a:t>
+                <a:latin typeface="Times New Roman" pitchFamily="34" charset="0"/>
+                <a:ea typeface="Times New Roman" pitchFamily="34" charset="-122"/>
+                <a:cs typeface="Times New Roman" pitchFamily="34" charset="-120"/>
+              </a:rPr>
+              <a:t>Relative_f1_drop reveals a family-level vulnerability spectrum rather than one shared failure pattern.</a:t>
             </a:r>
             <a:endParaRPr lang="en-US" sz="1220" dirty="0"/>
           </a:p>
@@ -10481,12 +12449,12 @@
         </p:nvSpPr>
         <p:spPr>
           <a:xfrm>
-            <a:off x="6144768" y="2212848"/>
-            <a:ext cx="2331720" cy="914400"/>
+            <a:off x="5650992" y="1965960"/>
+            <a:ext cx="2788920" cy="960120"/>
           </a:xfrm>
           <a:prstGeom prst="roundRect">
             <a:avLst>
-              <a:gd name="adj" fmla="val 5000"/>
+              <a:gd name="adj" fmla="val 4762"/>
             </a:avLst>
           </a:prstGeom>
           <a:solidFill>
@@ -10515,8 +12483,8 @@
         </p:nvSpPr>
         <p:spPr>
           <a:xfrm>
-            <a:off x="6281928" y="2304288"/>
-            <a:ext cx="2057400" cy="182880"/>
+            <a:off x="5788152" y="2130552"/>
+            <a:ext cx="2514600" cy="182880"/>
           </a:xfrm>
           <a:prstGeom prst="rect">
             <a:avLst/>
@@ -10536,11 +12504,11 @@
                 <a:solidFill>
                   <a:srgbClr val="A6404B"/>
                 </a:solidFill>
-                <a:latin typeface="Georgia" pitchFamily="34" charset="0"/>
-                <a:ea typeface="Georgia" pitchFamily="34" charset="-122"/>
-                <a:cs typeface="Georgia" pitchFamily="34" charset="-120"/>
-              </a:rPr>
-              <a:t>Readout</a:t>
+                <a:latin typeface="Times New Roman" pitchFamily="34" charset="0"/>
+                <a:ea typeface="Times New Roman" pitchFamily="34" charset="-122"/>
+                <a:cs typeface="Times New Roman" pitchFamily="34" charset="-120"/>
+              </a:rPr>
+              <a:t>Family readout</a:t>
             </a:r>
             <a:endParaRPr lang="en-US" sz="1700" dirty="0"/>
           </a:p>
@@ -10554,8 +12522,8 @@
         </p:nvSpPr>
         <p:spPr>
           <a:xfrm>
-            <a:off x="6281928" y="2551176"/>
-            <a:ext cx="2057400" cy="484632"/>
+            <a:off x="5788152" y="2377440"/>
+            <a:ext cx="2514600" cy="457200"/>
           </a:xfrm>
           <a:prstGeom prst="rect">
             <a:avLst/>
@@ -10577,9 +12545,9 @@
                 <a:solidFill>
                   <a:srgbClr val="1E2630"/>
                 </a:solidFill>
-                <a:latin typeface="Calibri" pitchFamily="34" charset="0"/>
-                <a:ea typeface="Calibri" pitchFamily="34" charset="-122"/>
-                <a:cs typeface="Calibri" pitchFamily="34" charset="-120"/>
+                <a:latin typeface="Times New Roman" pitchFamily="34" charset="0"/>
+                <a:ea typeface="Times New Roman" pitchFamily="34" charset="-122"/>
+                <a:cs typeface="Times New Roman" pitchFamily="34" charset="-120"/>
               </a:rPr>
               <a:t>GNNDelete highest.</a:t>
             </a:r>
@@ -10594,9 +12562,9 @@
                 <a:solidFill>
                   <a:srgbClr val="1E2630"/>
                 </a:solidFill>
-                <a:latin typeface="Calibri" pitchFamily="34" charset="0"/>
-                <a:ea typeface="Calibri" pitchFamily="34" charset="-122"/>
-                <a:cs typeface="Calibri" pitchFamily="34" charset="-120"/>
+                <a:latin typeface="Times New Roman" pitchFamily="34" charset="0"/>
+                <a:ea typeface="Times New Roman" pitchFamily="34" charset="-122"/>
+                <a:cs typeface="Times New Roman" pitchFamily="34" charset="-120"/>
               </a:rPr>
               <a:t>GIF comparatively stable.</a:t>
             </a:r>
@@ -10611,11 +12579,11 @@
                 <a:solidFill>
                   <a:srgbClr val="1E2630"/>
                 </a:solidFill>
-                <a:latin typeface="Calibri" pitchFamily="34" charset="0"/>
-                <a:ea typeface="Calibri" pitchFamily="34" charset="-122"/>
-                <a:cs typeface="Calibri" pitchFamily="34" charset="-120"/>
-              </a:rPr>
-              <a:t>GraphEraser shows no collapse.</a:t>
+                <a:latin typeface="Times New Roman" pitchFamily="34" charset="0"/>
+                <a:ea typeface="Times New Roman" pitchFamily="34" charset="-122"/>
+                <a:cs typeface="Times New Roman" pitchFamily="34" charset="-120"/>
+              </a:rPr>
+              <a:t>GraphEraser shows shard protection.</a:t>
             </a:r>
             <a:endParaRPr lang="en-US" sz="1220" dirty="0"/>
           </a:p>
@@ -10623,117 +12591,26 @@
       </p:sp>
       <p:sp>
         <p:nvSpPr>
-          <p:cNvPr id="15" name="Text 12"/>
-          <p:cNvSpPr/>
-          <p:nvPr/>
-        </p:nvSpPr>
-        <p:spPr>
-          <a:xfrm>
-            <a:off x="6254496" y="3456432"/>
-            <a:ext cx="1920240" cy="868680"/>
-          </a:xfrm>
-          <a:prstGeom prst="rect">
-            <a:avLst/>
-          </a:prstGeom>
-          <a:noFill/>
-          <a:ln/>
-        </p:spPr>
-        <p:txBody>
-          <a:bodyPr wrap="square" lIns="0" tIns="0" rIns="0" bIns="0" rtlCol="0" anchor="ctr"/>
-          <a:lstStyle/>
-          <a:p>
-            <a:pPr marL="203200" indent="-203200">
-              <a:buSzPct val="100000"/>
-              <a:buChar char="•"/>
-            </a:pPr>
-            <a:r>
-              <a:rPr lang="en-US" sz="1160" dirty="0">
-                <a:solidFill>
-                  <a:srgbClr val="1E2630"/>
-                </a:solidFill>
-                <a:latin typeface="Calibri" pitchFamily="34" charset="0"/>
-                <a:ea typeface="Calibri" pitchFamily="34" charset="-122"/>
-                <a:cs typeface="Calibri" pitchFamily="34" charset="-120"/>
-              </a:rPr>
-              <a:t>The family-level pattern is consistent across the tested settings.</a:t>
-            </a:r>
-            <a:endParaRPr lang="en-US" sz="1160" dirty="0"/>
-          </a:p>
-          <a:p>
-            <a:pPr marL="203200" indent="-203200">
-              <a:buSzPct val="100000"/>
-              <a:buChar char="•"/>
-            </a:pPr>
-            <a:r>
-              <a:rPr lang="en-US" sz="1160" dirty="0">
-                <a:solidFill>
-                  <a:srgbClr val="1E2630"/>
-                </a:solidFill>
-                <a:latin typeface="Calibri" pitchFamily="34" charset="0"/>
-                <a:ea typeface="Calibri" pitchFamily="34" charset="-122"/>
-                <a:cs typeface="Calibri" pitchFamily="34" charset="-120"/>
-              </a:rPr>
-              <a:t>Mechanism choice, not just deletion budget, determines fragility.</a:t>
-            </a:r>
-            <a:endParaRPr lang="en-US" sz="1160" dirty="0"/>
-          </a:p>
-        </p:txBody>
-      </p:sp>
-    </p:spTree>
-  </p:cSld>
-  <p:clrMapOvr>
-    <a:masterClrMapping/>
-  </p:clrMapOvr>
-</p:sld>
-</file>
-
-<file path=ppt/slides/slide8.xml><?xml version="1.0" encoding="utf-8"?>
-<p:sld xmlns:a="http://schemas.openxmlformats.org/drawingml/2006/main" xmlns:r="http://schemas.openxmlformats.org/officeDocument/2006/relationships" xmlns:p="http://schemas.openxmlformats.org/presentationml/2006/main">
-  <p:cSld name="Slide 8">
-    <p:bg>
-      <p:bgPr>
-        <a:solidFill>
-          <a:srgbClr val="F7F5F1"/>
-        </a:solidFill>
-        <a:effectLst/>
-      </p:bgPr>
-    </p:bg>
-    <p:spTree>
-      <p:nvGrpSpPr>
-        <p:cNvPr id="1" name=""/>
-        <p:cNvGrpSpPr/>
-        <p:nvPr/>
-      </p:nvGrpSpPr>
-      <p:grpSpPr>
-        <a:xfrm>
-          <a:off x="0" y="0"/>
-          <a:ext cx="0" cy="0"/>
-          <a:chOff x="0" y="0"/>
-          <a:chExt cx="0" cy="0"/>
-        </a:xfrm>
-      </p:grpSpPr>
-      <p:sp>
-        <p:nvSpPr>
-          <p:cNvPr id="2" name="Shape 0"/>
-          <p:cNvSpPr/>
-          <p:nvPr/>
-        </p:nvSpPr>
-        <p:spPr>
-          <a:xfrm>
-            <a:off x="0" y="0"/>
-            <a:ext cx="9144000" cy="530352"/>
-          </a:xfrm>
-          <a:prstGeom prst="rect">
-            <a:avLst/>
+          <p:cNvPr id="15" name="Shape 12"/>
+          <p:cNvSpPr/>
+          <p:nvPr/>
+        </p:nvSpPr>
+        <p:spPr>
+          <a:xfrm>
+            <a:off x="5650992" y="3063240"/>
+            <a:ext cx="2788920" cy="1280160"/>
+          </a:xfrm>
+          <a:prstGeom prst="roundRect">
+            <a:avLst>
+              <a:gd name="adj" fmla="val 3571"/>
+            </a:avLst>
           </a:prstGeom>
           <a:solidFill>
-            <a:srgbClr val="223A5E"/>
+            <a:srgbClr val="E8EEF5"/>
           </a:solidFill>
-          <a:ln w="12700">
+          <a:ln w="13970">
             <a:solidFill>
-              <a:srgbClr val="223A5E">
-                <a:alpha val="0"/>
-              </a:srgbClr>
+              <a:srgbClr val="E8EEF5"/>
             </a:solidFill>
             <a:prstDash val="solid"/>
           </a:ln>
@@ -10748,14 +12625,14 @@
       </p:sp>
       <p:sp>
         <p:nvSpPr>
-          <p:cNvPr id="3" name="Text 1"/>
-          <p:cNvSpPr/>
-          <p:nvPr/>
-        </p:nvSpPr>
-        <p:spPr>
-          <a:xfrm>
-            <a:off x="502920" y="100584"/>
-            <a:ext cx="6583680" cy="219456"/>
+          <p:cNvPr id="16" name="Text 13"/>
+          <p:cNvSpPr/>
+          <p:nvPr/>
+        </p:nvSpPr>
+        <p:spPr>
+          <a:xfrm>
+            <a:off x="5788152" y="3227832"/>
+            <a:ext cx="2514600" cy="182880"/>
           </a:xfrm>
           <a:prstGeom prst="rect">
             <a:avLst/>
@@ -10771,285 +12648,30 @@
               <a:buNone/>
             </a:pPr>
             <a:r>
-              <a:rPr lang="en-US" sz="2400" b="1" dirty="0">
-                <a:solidFill>
-                  <a:srgbClr val="FFFFFF"/>
-                </a:solidFill>
-                <a:latin typeface="Georgia" pitchFamily="34" charset="0"/>
-                <a:ea typeface="Georgia" pitchFamily="34" charset="-122"/>
-                <a:cs typeface="Georgia" pitchFamily="34" charset="-120"/>
-              </a:rPr>
-              <a:t>Deep Dive: GNNDelete Fragility</a:t>
-            </a:r>
-            <a:endParaRPr lang="en-US" sz="2400" dirty="0"/>
-          </a:p>
-        </p:txBody>
-      </p:sp>
-      <p:sp>
-        <p:nvSpPr>
-          <p:cNvPr id="4" name="Text 2"/>
-          <p:cNvSpPr/>
-          <p:nvPr/>
-        </p:nvSpPr>
-        <p:spPr>
-          <a:xfrm>
-            <a:off x="7955280" y="118872"/>
-            <a:ext cx="640080" cy="137160"/>
-          </a:xfrm>
-          <a:prstGeom prst="rect">
-            <a:avLst/>
-          </a:prstGeom>
-          <a:noFill/>
-          <a:ln/>
-        </p:spPr>
-        <p:txBody>
-          <a:bodyPr wrap="square" lIns="0" tIns="0" rIns="0" bIns="0" rtlCol="0" anchor="ctr"/>
-          <a:lstStyle/>
-          <a:p>
-            <a:pPr marL="0" indent="0" algn="r">
-              <a:buNone/>
-            </a:pPr>
-            <a:r>
-              <a:rPr lang="en-US" sz="1000" dirty="0">
-                <a:solidFill>
-                  <a:srgbClr val="F7F5F1"/>
-                </a:solidFill>
-                <a:latin typeface="Calibri" pitchFamily="34" charset="0"/>
-                <a:ea typeface="Calibri" pitchFamily="34" charset="-122"/>
-                <a:cs typeface="Calibri" pitchFamily="34" charset="-120"/>
-              </a:rPr>
-              <a:t>08 / 14</a:t>
-            </a:r>
-            <a:endParaRPr lang="en-US" sz="1000" dirty="0"/>
-          </a:p>
-        </p:txBody>
-      </p:sp>
-      <p:sp>
-        <p:nvSpPr>
-          <p:cNvPr id="5" name="Text 3"/>
-          <p:cNvSpPr/>
-          <p:nvPr/>
-        </p:nvSpPr>
-        <p:spPr>
-          <a:xfrm>
-            <a:off x="502920" y="4736592"/>
-            <a:ext cx="2743200" cy="137160"/>
-          </a:xfrm>
-          <a:prstGeom prst="rect">
-            <a:avLst/>
-          </a:prstGeom>
-          <a:noFill/>
-          <a:ln/>
-        </p:spPr>
-        <p:txBody>
-          <a:bodyPr wrap="square" lIns="0" tIns="0" rIns="0" bIns="0" rtlCol="0" anchor="ctr"/>
-          <a:lstStyle/>
-          <a:p>
-            <a:pPr marL="0" indent="0">
-              <a:buNone/>
-            </a:pPr>
-            <a:r>
-              <a:rPr lang="en-US" sz="900" dirty="0">
-                <a:solidFill>
-                  <a:srgbClr val="667085"/>
-                </a:solidFill>
-                <a:latin typeface="Calibri" pitchFamily="34" charset="0"/>
-                <a:ea typeface="Calibri" pitchFamily="34" charset="-122"/>
-                <a:cs typeface="Calibri" pitchFamily="34" charset="-120"/>
-              </a:rPr>
-              <a:t>EE5003 MSc Project | Liu Chengyu</a:t>
-            </a:r>
-            <a:endParaRPr lang="en-US" sz="900" dirty="0"/>
-          </a:p>
-        </p:txBody>
-      </p:sp>
-      <p:sp>
-        <p:nvSpPr>
-          <p:cNvPr id="6" name="Text 4"/>
-          <p:cNvSpPr/>
-          <p:nvPr/>
-        </p:nvSpPr>
-        <p:spPr>
-          <a:xfrm>
-            <a:off x="5577840" y="4736592"/>
-            <a:ext cx="3017520" cy="137160"/>
-          </a:xfrm>
-          <a:prstGeom prst="rect">
-            <a:avLst/>
-          </a:prstGeom>
-          <a:noFill/>
-          <a:ln/>
-        </p:spPr>
-        <p:txBody>
-          <a:bodyPr wrap="square" lIns="0" tIns="0" rIns="0" bIns="0" rtlCol="0" anchor="ctr"/>
-          <a:lstStyle/>
-          <a:p>
-            <a:pPr marL="0" indent="0" algn="r">
-              <a:buNone/>
-            </a:pPr>
-            <a:r>
-              <a:rPr lang="en-US" sz="900" dirty="0">
-                <a:solidFill>
-                  <a:srgbClr val="667085"/>
-                </a:solidFill>
-                <a:latin typeface="Calibri" pitchFamily="34" charset="0"/>
-                <a:ea typeface="Calibri" pitchFamily="34" charset="-122"/>
-                <a:cs typeface="Calibri" pitchFamily="34" charset="-120"/>
-              </a:rPr>
-              <a:t>Approximate Graph Unlearning Audit</a:t>
-            </a:r>
-            <a:endParaRPr lang="en-US" sz="900" dirty="0"/>
-          </a:p>
-        </p:txBody>
-      </p:sp>
-      <p:pic>
-        <p:nvPicPr>
-          <p:cNvPr id="7" name="Image 0" descr="H:\project\OpenGU\GULib-master\report\0417_5003report\figures\paper_figures\FIG-2_Scaling.png"/>
-          <p:cNvPicPr>
-            <a:picLocks noChangeAspect="1"/>
-          </p:cNvPicPr>
-          <p:nvPr/>
-        </p:nvPicPr>
-        <p:blipFill>
-          <a:blip r:embed="rId3"/>
-          <a:stretch>
-            <a:fillRect/>
-          </a:stretch>
-        </p:blipFill>
-        <p:spPr>
-          <a:xfrm>
-            <a:off x="566928" y="914400"/>
-            <a:ext cx="5257800" cy="3291840"/>
-          </a:xfrm>
-          <a:prstGeom prst="rect">
-            <a:avLst/>
-          </a:prstGeom>
-        </p:spPr>
-      </p:pic>
-      <p:sp>
-        <p:nvSpPr>
-          <p:cNvPr id="8" name="Text 5"/>
-          <p:cNvSpPr/>
-          <p:nvPr/>
-        </p:nvSpPr>
-        <p:spPr>
-          <a:xfrm>
-            <a:off x="585216" y="4297680"/>
-            <a:ext cx="5212080" cy="146304"/>
-          </a:xfrm>
-          <a:prstGeom prst="rect">
-            <a:avLst/>
-          </a:prstGeom>
-          <a:noFill/>
-          <a:ln/>
-        </p:spPr>
-        <p:txBody>
-          <a:bodyPr wrap="square" lIns="0" tIns="0" rIns="0" bIns="0" rtlCol="0" anchor="ctr"/>
-          <a:lstStyle/>
-          <a:p>
-            <a:pPr marL="0" indent="0">
-              <a:buNone/>
-            </a:pPr>
-            <a:r>
-              <a:rPr lang="en-US" sz="900" i="1" dirty="0">
-                <a:solidFill>
-                  <a:srgbClr val="667085"/>
-                </a:solidFill>
-                <a:latin typeface="Calibri" pitchFamily="34" charset="0"/>
-                <a:ea typeface="Calibri" pitchFamily="34" charset="-122"/>
-                <a:cs typeface="Calibri" pitchFamily="34" charset="-120"/>
-              </a:rPr>
-              <a:t>Figure 2. Ratio sensitivity view for GIF and GNNDelete on Cora/GCN.</a:t>
-            </a:r>
-            <a:endParaRPr lang="en-US" sz="900" dirty="0"/>
-          </a:p>
-        </p:txBody>
-      </p:sp>
-      <p:sp>
-        <p:nvSpPr>
-          <p:cNvPr id="9" name="Shape 6"/>
-          <p:cNvSpPr/>
-          <p:nvPr/>
-        </p:nvSpPr>
-        <p:spPr>
-          <a:xfrm>
-            <a:off x="6172200" y="1097280"/>
-            <a:ext cx="1920240" cy="731520"/>
-          </a:xfrm>
-          <a:prstGeom prst="roundRect">
-            <a:avLst>
-              <a:gd name="adj" fmla="val 6250"/>
-            </a:avLst>
-          </a:prstGeom>
-          <a:solidFill>
-            <a:srgbClr val="A6404B"/>
-          </a:solidFill>
-          <a:ln w="12700">
-            <a:solidFill>
-              <a:srgbClr val="A6404B">
-                <a:alpha val="0"/>
-              </a:srgbClr>
-            </a:solidFill>
-            <a:prstDash val="solid"/>
-          </a:ln>
-        </p:spPr>
-        <p:txBody>
-          <a:bodyPr/>
-          <a:lstStyle/>
-          <a:p>
-            <a:endParaRPr lang="zh-CN" altLang="en-US"/>
-          </a:p>
-        </p:txBody>
-      </p:sp>
-      <p:sp>
-        <p:nvSpPr>
-          <p:cNvPr id="10" name="Text 7"/>
-          <p:cNvSpPr/>
-          <p:nvPr/>
-        </p:nvSpPr>
-        <p:spPr>
-          <a:xfrm>
-            <a:off x="6245352" y="1207008"/>
-            <a:ext cx="1773936" cy="201168"/>
-          </a:xfrm>
-          <a:prstGeom prst="rect">
-            <a:avLst/>
-          </a:prstGeom>
-          <a:noFill/>
-          <a:ln/>
-        </p:spPr>
-        <p:txBody>
-          <a:bodyPr wrap="square" lIns="0" tIns="0" rIns="0" bIns="0" rtlCol="0" anchor="ctr"/>
-          <a:lstStyle/>
-          <a:p>
-            <a:pPr marL="0" indent="0" algn="ctr">
-              <a:buNone/>
-            </a:pPr>
-            <a:r>
-              <a:rPr lang="en-US" sz="1900" b="1" dirty="0">
-                <a:solidFill>
-                  <a:srgbClr val="FFFFFF"/>
-                </a:solidFill>
-                <a:latin typeface="Georgia" pitchFamily="34" charset="0"/>
-                <a:ea typeface="Georgia" pitchFamily="34" charset="-122"/>
-                <a:cs typeface="Georgia" pitchFamily="34" charset="-120"/>
-              </a:rPr>
-              <a:t>21.53%</a:t>
-            </a:r>
-            <a:endParaRPr lang="en-US" sz="1900" dirty="0"/>
-          </a:p>
-        </p:txBody>
-      </p:sp>
-      <p:sp>
-        <p:nvSpPr>
-          <p:cNvPr id="11" name="Text 8"/>
-          <p:cNvSpPr/>
-          <p:nvPr/>
-        </p:nvSpPr>
-        <p:spPr>
-          <a:xfrm>
-            <a:off x="6245352" y="1481328"/>
-            <a:ext cx="1773936" cy="301752"/>
+              <a:rPr lang="en-US" sz="1700" b="1" dirty="0">
+                <a:solidFill>
+                  <a:srgbClr val="223A5E"/>
+                </a:solidFill>
+                <a:latin typeface="Times New Roman" pitchFamily="34" charset="0"/>
+                <a:ea typeface="Times New Roman" pitchFamily="34" charset="-122"/>
+                <a:cs typeface="Times New Roman" pitchFamily="34" charset="-120"/>
+              </a:rPr>
+              <a:t>Strategy readout</a:t>
+            </a:r>
+            <a:endParaRPr lang="en-US" sz="1700" dirty="0"/>
+          </a:p>
+        </p:txBody>
+      </p:sp>
+      <p:sp>
+        <p:nvSpPr>
+          <p:cNvPr id="17" name="Text 14"/>
+          <p:cNvSpPr/>
+          <p:nvPr/>
+        </p:nvSpPr>
+        <p:spPr>
+          <a:xfrm>
+            <a:off x="5788152" y="3474720"/>
+            <a:ext cx="2514600" cy="777240"/>
           </a:xfrm>
           <a:prstGeom prst="rect">
             <a:avLst/>
@@ -11063,236 +12685,6 @@
           </a:bodyPr>
           <a:lstStyle/>
           <a:p>
-            <a:pPr marL="0" indent="0" algn="ctr">
-              <a:buNone/>
-            </a:pPr>
-            <a:r>
-              <a:rPr lang="en-US" sz="1000" dirty="0">
-                <a:solidFill>
-                  <a:srgbClr val="F7F5F1"/>
-                </a:solidFill>
-                <a:latin typeface="Calibri" pitchFamily="34" charset="0"/>
-                <a:ea typeface="Calibri" pitchFamily="34" charset="-122"/>
-                <a:cs typeface="Calibri" pitchFamily="34" charset="-120"/>
-              </a:rPr>
-              <a:t>retrain gap at ratio 0.01 on Cora</a:t>
-            </a:r>
-            <a:endParaRPr lang="en-US" sz="1000" dirty="0"/>
-          </a:p>
-        </p:txBody>
-      </p:sp>
-      <p:sp>
-        <p:nvSpPr>
-          <p:cNvPr id="12" name="Shape 9"/>
-          <p:cNvSpPr/>
-          <p:nvPr/>
-        </p:nvSpPr>
-        <p:spPr>
-          <a:xfrm>
-            <a:off x="6172200" y="2011680"/>
-            <a:ext cx="1920240" cy="731520"/>
-          </a:xfrm>
-          <a:prstGeom prst="roundRect">
-            <a:avLst>
-              <a:gd name="adj" fmla="val 6250"/>
-            </a:avLst>
-          </a:prstGeom>
-          <a:solidFill>
-            <a:srgbClr val="223A5E"/>
-          </a:solidFill>
-          <a:ln w="12700">
-            <a:solidFill>
-              <a:srgbClr val="223A5E">
-                <a:alpha val="0"/>
-              </a:srgbClr>
-            </a:solidFill>
-            <a:prstDash val="solid"/>
-          </a:ln>
-        </p:spPr>
-        <p:txBody>
-          <a:bodyPr/>
-          <a:lstStyle/>
-          <a:p>
-            <a:endParaRPr lang="zh-CN" altLang="en-US"/>
-          </a:p>
-        </p:txBody>
-      </p:sp>
-      <p:sp>
-        <p:nvSpPr>
-          <p:cNvPr id="13" name="Text 10"/>
-          <p:cNvSpPr/>
-          <p:nvPr/>
-        </p:nvSpPr>
-        <p:spPr>
-          <a:xfrm>
-            <a:off x="6245352" y="2121408"/>
-            <a:ext cx="1773936" cy="201168"/>
-          </a:xfrm>
-          <a:prstGeom prst="rect">
-            <a:avLst/>
-          </a:prstGeom>
-          <a:noFill/>
-          <a:ln/>
-        </p:spPr>
-        <p:txBody>
-          <a:bodyPr wrap="square" lIns="0" tIns="0" rIns="0" bIns="0" rtlCol="0" anchor="ctr"/>
-          <a:lstStyle/>
-          <a:p>
-            <a:pPr marL="0" indent="0" algn="ctr">
-              <a:buNone/>
-            </a:pPr>
-            <a:r>
-              <a:rPr lang="en-US" sz="1900" b="1" dirty="0">
-                <a:solidFill>
-                  <a:srgbClr val="FFFFFF"/>
-                </a:solidFill>
-                <a:latin typeface="Georgia" pitchFamily="34" charset="0"/>
-                <a:ea typeface="Georgia" pitchFamily="34" charset="-122"/>
-                <a:cs typeface="Georgia" pitchFamily="34" charset="-120"/>
-              </a:rPr>
-              <a:t>26.2%</a:t>
-            </a:r>
-            <a:endParaRPr lang="en-US" sz="1900" dirty="0"/>
-          </a:p>
-        </p:txBody>
-      </p:sp>
-      <p:sp>
-        <p:nvSpPr>
-          <p:cNvPr id="14" name="Text 11"/>
-          <p:cNvSpPr/>
-          <p:nvPr/>
-        </p:nvSpPr>
-        <p:spPr>
-          <a:xfrm>
-            <a:off x="6245352" y="2395728"/>
-            <a:ext cx="1773936" cy="301752"/>
-          </a:xfrm>
-          <a:prstGeom prst="rect">
-            <a:avLst/>
-          </a:prstGeom>
-          <a:noFill/>
-          <a:ln/>
-        </p:spPr>
-        <p:txBody>
-          <a:bodyPr wrap="square" lIns="0" tIns="0" rIns="0" bIns="0" rtlCol="0" anchor="ctr">
-            <a:normAutofit/>
-          </a:bodyPr>
-          <a:lstStyle/>
-          <a:p>
-            <a:pPr marL="0" indent="0" algn="ctr">
-              <a:buNone/>
-            </a:pPr>
-            <a:r>
-              <a:rPr lang="en-US" sz="1000" dirty="0">
-                <a:solidFill>
-                  <a:srgbClr val="F7F5F1"/>
-                </a:solidFill>
-                <a:latin typeface="Calibri" pitchFamily="34" charset="0"/>
-                <a:ea typeface="Calibri" pitchFamily="34" charset="-122"/>
-                <a:cs typeface="Calibri" pitchFamily="34" charset="-120"/>
-              </a:rPr>
-              <a:t>non-target prediction changes</a:t>
-            </a:r>
-            <a:endParaRPr lang="en-US" sz="1000" dirty="0"/>
-          </a:p>
-        </p:txBody>
-      </p:sp>
-      <p:sp>
-        <p:nvSpPr>
-          <p:cNvPr id="15" name="Shape 12"/>
-          <p:cNvSpPr/>
-          <p:nvPr/>
-        </p:nvSpPr>
-        <p:spPr>
-          <a:xfrm>
-            <a:off x="5989320" y="2971800"/>
-            <a:ext cx="2331720" cy="1325880"/>
-          </a:xfrm>
-          <a:prstGeom prst="roundRect">
-            <a:avLst>
-              <a:gd name="adj" fmla="val 3448"/>
-            </a:avLst>
-          </a:prstGeom>
-          <a:solidFill>
-            <a:srgbClr val="FFFFFF"/>
-          </a:solidFill>
-          <a:ln w="13970">
-            <a:solidFill>
-              <a:srgbClr val="D9DEE7"/>
-            </a:solidFill>
-            <a:prstDash val="solid"/>
-          </a:ln>
-        </p:spPr>
-        <p:txBody>
-          <a:bodyPr/>
-          <a:lstStyle/>
-          <a:p>
-            <a:endParaRPr lang="zh-CN" altLang="en-US"/>
-          </a:p>
-        </p:txBody>
-      </p:sp>
-      <p:sp>
-        <p:nvSpPr>
-          <p:cNvPr id="16" name="Text 13"/>
-          <p:cNvSpPr/>
-          <p:nvPr/>
-        </p:nvSpPr>
-        <p:spPr>
-          <a:xfrm>
-            <a:off x="6126480" y="3063240"/>
-            <a:ext cx="2057400" cy="182880"/>
-          </a:xfrm>
-          <a:prstGeom prst="rect">
-            <a:avLst/>
-          </a:prstGeom>
-          <a:noFill/>
-          <a:ln/>
-        </p:spPr>
-        <p:txBody>
-          <a:bodyPr wrap="square" lIns="0" tIns="0" rIns="0" bIns="0" rtlCol="0" anchor="ctr"/>
-          <a:lstStyle/>
-          <a:p>
-            <a:pPr marL="0" indent="0">
-              <a:buNone/>
-            </a:pPr>
-            <a:r>
-              <a:rPr lang="en-US" sz="1700" b="1" dirty="0">
-                <a:solidFill>
-                  <a:srgbClr val="223A5E"/>
-                </a:solidFill>
-                <a:latin typeface="Georgia" pitchFamily="34" charset="0"/>
-                <a:ea typeface="Georgia" pitchFamily="34" charset="-122"/>
-                <a:cs typeface="Georgia" pitchFamily="34" charset="-120"/>
-              </a:rPr>
-              <a:t>Interpretation</a:t>
-            </a:r>
-            <a:endParaRPr lang="en-US" sz="1700" dirty="0"/>
-          </a:p>
-        </p:txBody>
-      </p:sp>
-      <p:sp>
-        <p:nvSpPr>
-          <p:cNvPr id="17" name="Text 14"/>
-          <p:cNvSpPr/>
-          <p:nvPr/>
-        </p:nvSpPr>
-        <p:spPr>
-          <a:xfrm>
-            <a:off x="6126480" y="3310128"/>
-            <a:ext cx="2057400" cy="896112"/>
-          </a:xfrm>
-          <a:prstGeom prst="rect">
-            <a:avLst/>
-          </a:prstGeom>
-          <a:noFill/>
-          <a:ln/>
-        </p:spPr>
-        <p:txBody>
-          <a:bodyPr wrap="square" lIns="0" tIns="0" rIns="0" bIns="0" rtlCol="0" anchor="ctr">
-            <a:normAutofit/>
-          </a:bodyPr>
-          <a:lstStyle/>
-          <a:p>
             <a:pPr marL="0" indent="0">
               <a:buNone/>
             </a:pPr>
@@ -11301,11 +12693,11 @@
                 <a:solidFill>
                   <a:srgbClr val="1E2630"/>
                 </a:solidFill>
-                <a:latin typeface="Calibri" pitchFamily="34" charset="0"/>
-                <a:ea typeface="Calibri" pitchFamily="34" charset="-122"/>
-                <a:cs typeface="Calibri" pitchFamily="34" charset="-120"/>
-              </a:rPr>
-              <a:t>Exact retraining on the same deletion set shows only a small intrinsic decrease. The large collapse is therefore mainly approximation error, not simply node importance.</a:t>
+                <a:latin typeface="Times New Roman" pitchFamily="34" charset="0"/>
+                <a:ea typeface="Times New Roman" pitchFamily="34" charset="-122"/>
+                <a:cs typeface="Times New Roman" pitchFamily="34" charset="-120"/>
+              </a:rPr>
+              <a:t>Across the same figure family and the companion strategy view, the strongest extra damage still concentrates on GNNDelete rather than spreading evenly across methods.</a:t>
             </a:r>
             <a:endParaRPr lang="en-US" sz="1220" dirty="0"/>
           </a:p>
@@ -11407,11 +12799,11 @@
                 <a:solidFill>
                   <a:srgbClr val="FFFFFF"/>
                 </a:solidFill>
-                <a:latin typeface="Georgia" pitchFamily="34" charset="0"/>
-                <a:ea typeface="Georgia" pitchFamily="34" charset="-122"/>
-                <a:cs typeface="Georgia" pitchFamily="34" charset="-120"/>
-              </a:rPr>
-              <a:t>Attribution And Collateral Damage</a:t>
+                <a:latin typeface="Times New Roman" pitchFamily="34" charset="0"/>
+                <a:ea typeface="Times New Roman" pitchFamily="34" charset="-122"/>
+                <a:cs typeface="Times New Roman" pitchFamily="34" charset="-120"/>
+              </a:rPr>
+              <a:t>Main Finding: Strategy Spectrum</a:t>
             </a:r>
             <a:endParaRPr lang="en-US" sz="2400" dirty="0"/>
           </a:p>
@@ -11446,11 +12838,11 @@
                 <a:solidFill>
                   <a:srgbClr val="F7F5F1"/>
                 </a:solidFill>
-                <a:latin typeface="Calibri" pitchFamily="34" charset="0"/>
-                <a:ea typeface="Calibri" pitchFamily="34" charset="-122"/>
-                <a:cs typeface="Calibri" pitchFamily="34" charset="-120"/>
-              </a:rPr>
-              <a:t>09 / 14</a:t>
+                <a:latin typeface="Times New Roman" pitchFamily="34" charset="0"/>
+                <a:ea typeface="Times New Roman" pitchFamily="34" charset="-122"/>
+                <a:cs typeface="Times New Roman" pitchFamily="34" charset="-120"/>
+              </a:rPr>
+              <a:t>09 / 15</a:t>
             </a:r>
             <a:endParaRPr lang="en-US" sz="1000" dirty="0"/>
           </a:p>
@@ -11485,9 +12877,9 @@
                 <a:solidFill>
                   <a:srgbClr val="667085"/>
                 </a:solidFill>
-                <a:latin typeface="Calibri" pitchFamily="34" charset="0"/>
-                <a:ea typeface="Calibri" pitchFamily="34" charset="-122"/>
-                <a:cs typeface="Calibri" pitchFamily="34" charset="-120"/>
+                <a:latin typeface="Times New Roman" pitchFamily="34" charset="0"/>
+                <a:ea typeface="Times New Roman" pitchFamily="34" charset="-122"/>
+                <a:cs typeface="Times New Roman" pitchFamily="34" charset="-120"/>
               </a:rPr>
               <a:t>EE5003 MSc Project | Liu Chengyu</a:t>
             </a:r>
@@ -11524,9 +12916,9 @@
                 <a:solidFill>
                   <a:srgbClr val="667085"/>
                 </a:solidFill>
-                <a:latin typeface="Calibri" pitchFamily="34" charset="0"/>
-                <a:ea typeface="Calibri" pitchFamily="34" charset="-122"/>
-                <a:cs typeface="Calibri" pitchFamily="34" charset="-120"/>
+                <a:latin typeface="Times New Roman" pitchFamily="34" charset="0"/>
+                <a:ea typeface="Times New Roman" pitchFamily="34" charset="-122"/>
+                <a:cs typeface="Times New Roman" pitchFamily="34" charset="-120"/>
               </a:rPr>
               <a:t>Approximate Graph Unlearning Audit</a:t>
             </a:r>
@@ -11534,16 +12926,40 @@
           </a:p>
         </p:txBody>
       </p:sp>
-      <p:sp>
-        <p:nvSpPr>
-          <p:cNvPr id="7" name="Text 5"/>
-          <p:cNvSpPr/>
-          <p:nvPr/>
-        </p:nvSpPr>
-        <p:spPr>
-          <a:xfrm>
-            <a:off x="621792" y="768096"/>
-            <a:ext cx="7498080" cy="228600"/>
+      <p:pic>
+        <p:nvPicPr>
+          <p:cNvPr id="7" name="Image 0" descr="H:\project\OpenGU\GULib-master\report\0417_5003report\figures\paper_figures\FIG-3_Spectrum.png"/>
+          <p:cNvPicPr>
+            <a:picLocks noChangeAspect="1"/>
+          </p:cNvPicPr>
+          <p:nvPr/>
+        </p:nvPicPr>
+        <p:blipFill>
+          <a:blip r:embed="rId3"/>
+          <a:stretch>
+            <a:fillRect/>
+          </a:stretch>
+        </p:blipFill>
+        <p:spPr>
+          <a:xfrm>
+            <a:off x="658368" y="932688"/>
+            <a:ext cx="7818120" cy="3566160"/>
+          </a:xfrm>
+          <a:prstGeom prst="rect">
+            <a:avLst/>
+          </a:prstGeom>
+        </p:spPr>
+      </p:pic>
+      <p:sp>
+        <p:nvSpPr>
+          <p:cNvPr id="8" name="Text 5"/>
+          <p:cNvSpPr/>
+          <p:nvPr/>
+        </p:nvSpPr>
+        <p:spPr>
+          <a:xfrm>
+            <a:off x="713232" y="4590288"/>
+            <a:ext cx="7543800" cy="146304"/>
           </a:xfrm>
           <a:prstGeom prst="rect">
             <a:avLst/>
@@ -11559,359 +12975,17 @@
               <a:buNone/>
             </a:pPr>
             <a:r>
-              <a:rPr lang="en-US" sz="1800" b="1" dirty="0">
-                <a:solidFill>
-                  <a:srgbClr val="223A5E"/>
-                </a:solidFill>
-                <a:latin typeface="Georgia" pitchFamily="34" charset="0"/>
-                <a:ea typeface="Georgia" pitchFamily="34" charset="-122"/>
-                <a:cs typeface="Georgia" pitchFamily="34" charset="-120"/>
-              </a:rPr>
-              <a:t>Exact retraining tells us what the deletion should have done. The remaining gap is mechanism-induced spillover.</a:t>
-            </a:r>
-            <a:endParaRPr lang="en-US" sz="1800" dirty="0"/>
-          </a:p>
-        </p:txBody>
-      </p:sp>
-      <p:sp>
-        <p:nvSpPr>
-          <p:cNvPr id="8" name="Shape 6"/>
-          <p:cNvSpPr/>
-          <p:nvPr/>
-        </p:nvSpPr>
-        <p:spPr>
-          <a:xfrm>
-            <a:off x="713232" y="1371600"/>
-            <a:ext cx="3611880" cy="2606040"/>
-          </a:xfrm>
-          <a:prstGeom prst="roundRect">
-            <a:avLst>
-              <a:gd name="adj" fmla="val 1754"/>
-            </a:avLst>
-          </a:prstGeom>
-          <a:solidFill>
-            <a:srgbClr val="FFFFFF"/>
-          </a:solidFill>
-          <a:ln w="13970">
-            <a:solidFill>
-              <a:srgbClr val="D9DEE7"/>
-            </a:solidFill>
-            <a:prstDash val="solid"/>
-          </a:ln>
-        </p:spPr>
-        <p:txBody>
-          <a:bodyPr/>
-          <a:lstStyle/>
-          <a:p>
-            <a:endParaRPr lang="zh-CN" altLang="en-US"/>
-          </a:p>
-        </p:txBody>
-      </p:sp>
-      <p:sp>
-        <p:nvSpPr>
-          <p:cNvPr id="9" name="Text 7"/>
-          <p:cNvSpPr/>
-          <p:nvPr/>
-        </p:nvSpPr>
-        <p:spPr>
-          <a:xfrm>
-            <a:off x="850392" y="1463040"/>
-            <a:ext cx="3337560" cy="182880"/>
-          </a:xfrm>
-          <a:prstGeom prst="rect">
-            <a:avLst/>
-          </a:prstGeom>
-          <a:noFill/>
-          <a:ln/>
-        </p:spPr>
-        <p:txBody>
-          <a:bodyPr wrap="square" lIns="0" tIns="0" rIns="0" bIns="0" rtlCol="0" anchor="ctr"/>
-          <a:lstStyle/>
-          <a:p>
-            <a:pPr marL="0" indent="0">
-              <a:buNone/>
-            </a:pPr>
-            <a:r>
-              <a:rPr lang="en-US" sz="1700" b="1" dirty="0">
-                <a:solidFill>
-                  <a:srgbClr val="223A5E"/>
-                </a:solidFill>
-                <a:latin typeface="Georgia" pitchFamily="34" charset="0"/>
-                <a:ea typeface="Georgia" pitchFamily="34" charset="-122"/>
-                <a:cs typeface="Georgia" pitchFamily="34" charset="-120"/>
-              </a:rPr>
-              <a:t>Deleted targets</a:t>
-            </a:r>
-            <a:endParaRPr lang="en-US" sz="1700" dirty="0"/>
-          </a:p>
-        </p:txBody>
-      </p:sp>
-      <p:sp>
-        <p:nvSpPr>
-          <p:cNvPr id="10" name="Text 8"/>
-          <p:cNvSpPr/>
-          <p:nvPr/>
-        </p:nvSpPr>
-        <p:spPr>
-          <a:xfrm>
-            <a:off x="850392" y="1709928"/>
-            <a:ext cx="3337560" cy="2176272"/>
-          </a:xfrm>
-          <a:prstGeom prst="rect">
-            <a:avLst/>
-          </a:prstGeom>
-          <a:noFill/>
-          <a:ln/>
-        </p:spPr>
-        <p:txBody>
-          <a:bodyPr wrap="square" lIns="0" tIns="0" rIns="0" bIns="0" rtlCol="0" anchor="ctr">
-            <a:normAutofit/>
-          </a:bodyPr>
-          <a:lstStyle/>
-          <a:p>
-            <a:pPr marL="0" indent="0">
-              <a:buNone/>
-            </a:pPr>
-            <a:r>
-              <a:rPr lang="en-US" sz="1220" dirty="0">
-                <a:solidFill>
-                  <a:srgbClr val="1E2630"/>
-                </a:solidFill>
-                <a:latin typeface="Calibri" pitchFamily="34" charset="0"/>
-                <a:ea typeface="Calibri" pitchFamily="34" charset="-122"/>
-                <a:cs typeface="Calibri" pitchFamily="34" charset="-120"/>
-              </a:rPr>
-              <a:t>Some drop is legitimate because removed nodes can be informative. A correct system may still lose a small amount of utility when those nodes disappear. </a:t>
-            </a:r>
-            <a:endParaRPr lang="en-US" sz="1220" dirty="0"/>
-          </a:p>
-        </p:txBody>
-      </p:sp>
-      <p:sp>
-        <p:nvSpPr>
-          <p:cNvPr id="11" name="Shape 9"/>
-          <p:cNvSpPr/>
-          <p:nvPr/>
-        </p:nvSpPr>
-        <p:spPr>
-          <a:xfrm>
-            <a:off x="4663440" y="1371600"/>
-            <a:ext cx="3611880" cy="2606040"/>
-          </a:xfrm>
-          <a:prstGeom prst="roundRect">
-            <a:avLst>
-              <a:gd name="adj" fmla="val 1754"/>
-            </a:avLst>
-          </a:prstGeom>
-          <a:solidFill>
-            <a:srgbClr val="FFFFFF"/>
-          </a:solidFill>
-          <a:ln w="13970">
-            <a:solidFill>
-              <a:srgbClr val="D9DEE7"/>
-            </a:solidFill>
-            <a:prstDash val="solid"/>
-          </a:ln>
-        </p:spPr>
-        <p:txBody>
-          <a:bodyPr/>
-          <a:lstStyle/>
-          <a:p>
-            <a:endParaRPr lang="zh-CN" altLang="en-US"/>
-          </a:p>
-        </p:txBody>
-      </p:sp>
-      <p:sp>
-        <p:nvSpPr>
-          <p:cNvPr id="12" name="Text 10"/>
-          <p:cNvSpPr/>
-          <p:nvPr/>
-        </p:nvSpPr>
-        <p:spPr>
-          <a:xfrm>
-            <a:off x="4800600" y="1463040"/>
-            <a:ext cx="3337560" cy="182880"/>
-          </a:xfrm>
-          <a:prstGeom prst="rect">
-            <a:avLst/>
-          </a:prstGeom>
-          <a:noFill/>
-          <a:ln/>
-        </p:spPr>
-        <p:txBody>
-          <a:bodyPr wrap="square" lIns="0" tIns="0" rIns="0" bIns="0" rtlCol="0" anchor="ctr"/>
-          <a:lstStyle/>
-          <a:p>
-            <a:pPr marL="0" indent="0">
-              <a:buNone/>
-            </a:pPr>
-            <a:r>
-              <a:rPr lang="en-US" sz="1700" b="1" dirty="0">
-                <a:solidFill>
-                  <a:srgbClr val="223A5E"/>
-                </a:solidFill>
-                <a:latin typeface="Georgia" pitchFamily="34" charset="0"/>
-                <a:ea typeface="Georgia" pitchFamily="34" charset="-122"/>
-                <a:cs typeface="Georgia" pitchFamily="34" charset="-120"/>
-              </a:rPr>
-              <a:t>Retained nodes</a:t>
-            </a:r>
-            <a:endParaRPr lang="en-US" sz="1700" dirty="0"/>
-          </a:p>
-        </p:txBody>
-      </p:sp>
-      <p:sp>
-        <p:nvSpPr>
-          <p:cNvPr id="13" name="Text 11"/>
-          <p:cNvSpPr/>
-          <p:nvPr/>
-        </p:nvSpPr>
-        <p:spPr>
-          <a:xfrm>
-            <a:off x="4800600" y="1709928"/>
-            <a:ext cx="3337560" cy="2176272"/>
-          </a:xfrm>
-          <a:prstGeom prst="rect">
-            <a:avLst/>
-          </a:prstGeom>
-          <a:noFill/>
-          <a:ln/>
-        </p:spPr>
-        <p:txBody>
-          <a:bodyPr wrap="square" lIns="0" tIns="0" rIns="0" bIns="0" rtlCol="0" anchor="ctr">
-            <a:normAutofit/>
-          </a:bodyPr>
-          <a:lstStyle/>
-          <a:p>
-            <a:pPr marL="0" indent="0">
-              <a:buNone/>
-            </a:pPr>
-            <a:r>
-              <a:rPr lang="en-US" sz="1220" dirty="0">
-                <a:solidFill>
-                  <a:srgbClr val="1E2630"/>
-                </a:solidFill>
-                <a:latin typeface="Calibri" pitchFamily="34" charset="0"/>
-                <a:ea typeface="Calibri" pitchFamily="34" charset="-122"/>
-                <a:cs typeface="Calibri" pitchFamily="34" charset="-120"/>
-              </a:rPr>
-              <a:t>When predictions on non-target retained nodes shift substantially, the damage is no longer only about the deleted nodes. It indicates spillover from the approximate unlearning mechanism.</a:t>
-            </a:r>
-            <a:endParaRPr lang="en-US" sz="1220" dirty="0"/>
-          </a:p>
-        </p:txBody>
-      </p:sp>
-      <p:sp>
-        <p:nvSpPr>
-          <p:cNvPr id="14" name="Shape 12"/>
-          <p:cNvSpPr/>
-          <p:nvPr/>
-        </p:nvSpPr>
-        <p:spPr>
-          <a:xfrm>
-            <a:off x="1508760" y="4160520"/>
-            <a:ext cx="6080760" cy="502920"/>
-          </a:xfrm>
-          <a:prstGeom prst="roundRect">
-            <a:avLst>
-              <a:gd name="adj" fmla="val 9091"/>
-            </a:avLst>
-          </a:prstGeom>
-          <a:solidFill>
-            <a:srgbClr val="223A5E"/>
-          </a:solidFill>
-          <a:ln w="13970">
-            <a:solidFill>
-              <a:srgbClr val="223A5E"/>
-            </a:solidFill>
-            <a:prstDash val="solid"/>
-          </a:ln>
-        </p:spPr>
-        <p:txBody>
-          <a:bodyPr/>
-          <a:lstStyle/>
-          <a:p>
-            <a:endParaRPr lang="zh-CN" altLang="en-US"/>
-          </a:p>
-        </p:txBody>
-      </p:sp>
-      <p:sp>
-        <p:nvSpPr>
-          <p:cNvPr id="15" name="Text 13"/>
-          <p:cNvSpPr/>
-          <p:nvPr/>
-        </p:nvSpPr>
-        <p:spPr>
-          <a:xfrm>
-            <a:off x="1645920" y="4251960"/>
-            <a:ext cx="5806440" cy="182880"/>
-          </a:xfrm>
-          <a:prstGeom prst="rect">
-            <a:avLst/>
-          </a:prstGeom>
-          <a:noFill/>
-          <a:ln/>
-        </p:spPr>
-        <p:txBody>
-          <a:bodyPr wrap="square" lIns="0" tIns="0" rIns="0" bIns="0" rtlCol="0" anchor="ctr"/>
-          <a:lstStyle/>
-          <a:p>
-            <a:pPr marL="0" indent="0">
-              <a:buNone/>
-            </a:pPr>
-            <a:r>
-              <a:rPr lang="en-US" sz="1700" b="1" dirty="0">
-                <a:solidFill>
-                  <a:srgbClr val="F7F5F1"/>
-                </a:solidFill>
-                <a:latin typeface="Georgia" pitchFamily="34" charset="0"/>
-                <a:ea typeface="Georgia" pitchFamily="34" charset="-122"/>
-                <a:cs typeface="Georgia" pitchFamily="34" charset="-120"/>
-              </a:rPr>
-              <a:t>Bottom line</a:t>
-            </a:r>
-            <a:endParaRPr lang="en-US" sz="1700" dirty="0"/>
-          </a:p>
-        </p:txBody>
-      </p:sp>
-      <p:sp>
-        <p:nvSpPr>
-          <p:cNvPr id="16" name="Text 14"/>
-          <p:cNvSpPr/>
-          <p:nvPr/>
-        </p:nvSpPr>
-        <p:spPr>
-          <a:xfrm>
-            <a:off x="1645920" y="4498848"/>
-            <a:ext cx="5806440" cy="73152"/>
-          </a:xfrm>
-          <a:prstGeom prst="rect">
-            <a:avLst/>
-          </a:prstGeom>
-          <a:noFill/>
-          <a:ln/>
-        </p:spPr>
-        <p:txBody>
-          <a:bodyPr wrap="square" lIns="0" tIns="0" rIns="0" bIns="0" rtlCol="0" anchor="ctr">
-            <a:normAutofit/>
-          </a:bodyPr>
-          <a:lstStyle/>
-          <a:p>
-            <a:pPr marL="0" indent="0">
-              <a:buNone/>
-            </a:pPr>
-            <a:r>
-              <a:rPr lang="en-US" sz="1220" dirty="0">
-                <a:solidFill>
-                  <a:srgbClr val="FFFFFF"/>
-                </a:solidFill>
-                <a:latin typeface="Calibri" pitchFamily="34" charset="0"/>
-                <a:ea typeface="Calibri" pitchFamily="34" charset="-122"/>
-                <a:cs typeface="Calibri" pitchFamily="34" charset="-120"/>
-              </a:rPr>
-              <a:t>Approximate unlearning vs exact retrain is the attribution lens; collateral-damage metrics show how far the error propagates beyond the requested deletion.</a:t>
-            </a:r>
-            <a:endParaRPr lang="en-US" sz="1220" dirty="0"/>
+              <a:rPr lang="en-US" sz="900" i="1" dirty="0">
+                <a:solidFill>
+                  <a:srgbClr val="667085"/>
+                </a:solidFill>
+                <a:latin typeface="Times New Roman" pitchFamily="34" charset="0"/>
+                <a:ea typeface="Times New Roman" pitchFamily="34" charset="-122"/>
+                <a:cs typeface="Times New Roman" pitchFamily="34" charset="-120"/>
+              </a:rPr>
+              <a:t>Full Figure 3. Strategy comparison in relative_f1_drop at ratio = 0.05 using the k=5 baseline.</a:t>
+            </a:r>
+            <a:endParaRPr lang="en-US" sz="900" dirty="0"/>
           </a:p>
         </p:txBody>
       </p:sp>
